--- a/other/204实验.pptx
+++ b/other/204实验.pptx
@@ -6,15 +6,22 @@
   </p:sldMasterIdLst>
   <p:sldIdLst>
     <p:sldId id="256" r:id="rId2"/>
-    <p:sldId id="257" r:id="rId3"/>
-    <p:sldId id="258" r:id="rId4"/>
-    <p:sldId id="260" r:id="rId5"/>
-    <p:sldId id="261" r:id="rId6"/>
-    <p:sldId id="262" r:id="rId7"/>
-    <p:sldId id="263" r:id="rId8"/>
-    <p:sldId id="264" r:id="rId9"/>
-    <p:sldId id="265" r:id="rId10"/>
-    <p:sldId id="266" r:id="rId11"/>
+    <p:sldId id="267" r:id="rId3"/>
+    <p:sldId id="271" r:id="rId4"/>
+    <p:sldId id="268" r:id="rId5"/>
+    <p:sldId id="257" r:id="rId6"/>
+    <p:sldId id="258" r:id="rId7"/>
+    <p:sldId id="260" r:id="rId8"/>
+    <p:sldId id="261" r:id="rId9"/>
+    <p:sldId id="262" r:id="rId10"/>
+    <p:sldId id="263" r:id="rId11"/>
+    <p:sldId id="264" r:id="rId12"/>
+    <p:sldId id="265" r:id="rId13"/>
+    <p:sldId id="270" r:id="rId14"/>
+    <p:sldId id="269" r:id="rId15"/>
+    <p:sldId id="266" r:id="rId16"/>
+    <p:sldId id="273" r:id="rId17"/>
+    <p:sldId id="272" r:id="rId18"/>
   </p:sldIdLst>
   <p:sldSz cx="12192000" cy="6858000"/>
   <p:notesSz cx="6858000" cy="9144000"/>
@@ -250,7 +257,7 @@
           <a:p>
             <a:fld id="{C1204EAE-C964-486C-9112-A587BFBBD611}" type="datetimeFigureOut">
               <a:rPr lang="zh-CN" altLang="en-US" smtClean="0"/>
-              <a:t>2020/10/27</a:t>
+              <a:t>2020/11/2</a:t>
             </a:fld>
             <a:endParaRPr lang="zh-CN" altLang="en-US"/>
           </a:p>
@@ -413,7 +420,7 @@
           <a:p>
             <a:fld id="{C1204EAE-C964-486C-9112-A587BFBBD611}" type="datetimeFigureOut">
               <a:rPr lang="zh-CN" altLang="en-US" smtClean="0"/>
-              <a:t>2020/10/27</a:t>
+              <a:t>2020/11/2</a:t>
             </a:fld>
             <a:endParaRPr lang="zh-CN" altLang="en-US"/>
           </a:p>
@@ -586,7 +593,7 @@
           <a:p>
             <a:fld id="{C1204EAE-C964-486C-9112-A587BFBBD611}" type="datetimeFigureOut">
               <a:rPr lang="zh-CN" altLang="en-US" smtClean="0"/>
-              <a:t>2020/10/27</a:t>
+              <a:t>2020/11/2</a:t>
             </a:fld>
             <a:endParaRPr lang="zh-CN" altLang="en-US"/>
           </a:p>
@@ -749,7 +756,7 @@
           <a:p>
             <a:fld id="{C1204EAE-C964-486C-9112-A587BFBBD611}" type="datetimeFigureOut">
               <a:rPr lang="zh-CN" altLang="en-US" smtClean="0"/>
-              <a:t>2020/10/27</a:t>
+              <a:t>2020/11/2</a:t>
             </a:fld>
             <a:endParaRPr lang="zh-CN" altLang="en-US"/>
           </a:p>
@@ -989,7 +996,7 @@
           <a:p>
             <a:fld id="{C1204EAE-C964-486C-9112-A587BFBBD611}" type="datetimeFigureOut">
               <a:rPr lang="zh-CN" altLang="en-US" smtClean="0"/>
-              <a:t>2020/10/27</a:t>
+              <a:t>2020/11/2</a:t>
             </a:fld>
             <a:endParaRPr lang="zh-CN" altLang="en-US"/>
           </a:p>
@@ -1213,7 +1220,7 @@
           <a:p>
             <a:fld id="{C1204EAE-C964-486C-9112-A587BFBBD611}" type="datetimeFigureOut">
               <a:rPr lang="zh-CN" altLang="en-US" smtClean="0"/>
-              <a:t>2020/10/27</a:t>
+              <a:t>2020/11/2</a:t>
             </a:fld>
             <a:endParaRPr lang="zh-CN" altLang="en-US"/>
           </a:p>
@@ -1572,7 +1579,7 @@
           <a:p>
             <a:fld id="{C1204EAE-C964-486C-9112-A587BFBBD611}" type="datetimeFigureOut">
               <a:rPr lang="zh-CN" altLang="en-US" smtClean="0"/>
-              <a:t>2020/10/27</a:t>
+              <a:t>2020/11/2</a:t>
             </a:fld>
             <a:endParaRPr lang="zh-CN" altLang="en-US"/>
           </a:p>
@@ -1684,7 +1691,7 @@
           <a:p>
             <a:fld id="{C1204EAE-C964-486C-9112-A587BFBBD611}" type="datetimeFigureOut">
               <a:rPr lang="zh-CN" altLang="en-US" smtClean="0"/>
-              <a:t>2020/10/27</a:t>
+              <a:t>2020/11/2</a:t>
             </a:fld>
             <a:endParaRPr lang="zh-CN" altLang="en-US"/>
           </a:p>
@@ -1774,7 +1781,7 @@
           <a:p>
             <a:fld id="{C1204EAE-C964-486C-9112-A587BFBBD611}" type="datetimeFigureOut">
               <a:rPr lang="zh-CN" altLang="en-US" smtClean="0"/>
-              <a:t>2020/10/27</a:t>
+              <a:t>2020/11/2</a:t>
             </a:fld>
             <a:endParaRPr lang="zh-CN" altLang="en-US"/>
           </a:p>
@@ -2044,7 +2051,7 @@
           <a:p>
             <a:fld id="{C1204EAE-C964-486C-9112-A587BFBBD611}" type="datetimeFigureOut">
               <a:rPr lang="zh-CN" altLang="en-US" smtClean="0"/>
-              <a:t>2020/10/27</a:t>
+              <a:t>2020/11/2</a:t>
             </a:fld>
             <a:endParaRPr lang="zh-CN" altLang="en-US"/>
           </a:p>
@@ -2291,7 +2298,7 @@
           <a:p>
             <a:fld id="{C1204EAE-C964-486C-9112-A587BFBBD611}" type="datetimeFigureOut">
               <a:rPr lang="zh-CN" altLang="en-US" smtClean="0"/>
-              <a:t>2020/10/27</a:t>
+              <a:t>2020/11/2</a:t>
             </a:fld>
             <a:endParaRPr lang="zh-CN" altLang="en-US"/>
           </a:p>
@@ -2497,7 +2504,7 @@
           <a:p>
             <a:fld id="{C1204EAE-C964-486C-9112-A587BFBBD611}" type="datetimeFigureOut">
               <a:rPr lang="zh-CN" altLang="en-US" smtClean="0"/>
-              <a:t>2020/10/27</a:t>
+              <a:t>2020/11/2</a:t>
             </a:fld>
             <a:endParaRPr lang="zh-CN" altLang="en-US"/>
           </a:p>
@@ -2899,10 +2906,14 @@
       </p:grpSpPr>
       <p:pic>
         <p:nvPicPr>
-          <p:cNvPr id="4" name="图片 3" descr="6"/>
-          <p:cNvPicPr>
-            <a:picLocks noChangeAspect="1"/>
-          </p:cNvPicPr>
+          <p:cNvPr id="6" name="图片 5">
+            <a:extLst>
+              <a:ext uri="{FF2B5EF4-FFF2-40B4-BE49-F238E27FC236}">
+                <a16:creationId xmlns:a16="http://schemas.microsoft.com/office/drawing/2014/main" id="{2C0BCAA7-ADF4-4FBD-AEFE-80B8A9231A7F}"/>
+              </a:ext>
+            </a:extLst>
+          </p:cNvPr>
+          <p:cNvPicPr/>
           <p:nvPr/>
         </p:nvPicPr>
         <p:blipFill>
@@ -2914,7 +2925,7 @@
         <p:spPr>
           <a:xfrm>
             <a:off x="0" y="0"/>
-            <a:ext cx="12192000" cy="9091295"/>
+            <a:ext cx="12192000" cy="6858000"/>
           </a:xfrm>
           <a:prstGeom prst="rect">
             <a:avLst/>
@@ -2944,7 +2955,14 @@
           <a:lstStyle/>
           <a:p>
             <a:r>
-              <a:rPr lang="zh-CN" altLang="en-US" sz="2400" dirty="0"/>
+              <a:rPr lang="zh-CN" altLang="en-US" sz="2400" dirty="0">
+                <a:solidFill>
+                  <a:schemeClr val="accent1">
+                    <a:lumMod val="40000"/>
+                    <a:lumOff val="60000"/>
+                  </a:schemeClr>
+                </a:solidFill>
+              </a:rPr>
               <a:t>如果两个电脑同时进行有线连接和无线连接同时连接，两个电脑之间会采取哪种运输方式？</a:t>
             </a:r>
           </a:p>
@@ -2973,7 +2991,14 @@
           <a:lstStyle/>
           <a:p>
             <a:r>
-              <a:rPr lang="zh-CN" altLang="en-US" sz="4400" dirty="0"/>
+              <a:rPr lang="zh-CN" altLang="en-US" sz="4400" dirty="0">
+                <a:solidFill>
+                  <a:schemeClr val="accent1">
+                    <a:lumMod val="40000"/>
+                    <a:lumOff val="60000"/>
+                  </a:schemeClr>
+                </a:solidFill>
+              </a:rPr>
               <a:t>实验：</a:t>
             </a:r>
           </a:p>
@@ -3008,10 +3033,24 @@
           <a:lstStyle/>
           <a:p>
             <a:r>
-              <a:rPr lang="en-US" altLang="zh-CN" dirty="0"/>
+              <a:rPr lang="en-US" altLang="zh-CN" dirty="0">
+                <a:solidFill>
+                  <a:schemeClr val="accent1">
+                    <a:lumMod val="40000"/>
+                    <a:lumOff val="60000"/>
+                  </a:schemeClr>
+                </a:solidFill>
+              </a:rPr>
               <a:t>204</a:t>
             </a:r>
-            <a:endParaRPr lang="zh-CN" altLang="en-US" dirty="0"/>
+            <a:endParaRPr lang="zh-CN" altLang="en-US" dirty="0">
+              <a:solidFill>
+                <a:schemeClr val="accent1">
+                  <a:lumMod val="40000"/>
+                  <a:lumOff val="60000"/>
+                </a:schemeClr>
+              </a:solidFill>
+            </a:endParaRPr>
           </a:p>
         </p:txBody>
       </p:sp>
@@ -3042,7 +3081,187 @@
       </p:grpSpPr>
       <p:pic>
         <p:nvPicPr>
-          <p:cNvPr id="5" name="内容占位符 4" descr="6"/>
+          <p:cNvPr id="10" name="图片 9">
+            <a:extLst>
+              <a:ext uri="{FF2B5EF4-FFF2-40B4-BE49-F238E27FC236}">
+                <a16:creationId xmlns:a16="http://schemas.microsoft.com/office/drawing/2014/main" id="{AB65DC57-AA8A-48CC-80DF-807EE9DEEB36}"/>
+              </a:ext>
+            </a:extLst>
+          </p:cNvPr>
+          <p:cNvPicPr/>
+          <p:nvPr/>
+        </p:nvPicPr>
+        <p:blipFill>
+          <a:blip r:embed="rId2"/>
+          <a:stretch>
+            <a:fillRect/>
+          </a:stretch>
+        </p:blipFill>
+        <p:spPr>
+          <a:xfrm>
+            <a:off x="0" y="0"/>
+            <a:ext cx="12192000" cy="6858000"/>
+          </a:xfrm>
+          <a:prstGeom prst="rect">
+            <a:avLst/>
+          </a:prstGeom>
+        </p:spPr>
+      </p:pic>
+      <p:sp>
+        <p:nvSpPr>
+          <p:cNvPr id="2" name="标题 1"/>
+          <p:cNvSpPr>
+            <a:spLocks noGrp="1"/>
+          </p:cNvSpPr>
+          <p:nvPr>
+            <p:ph type="title"/>
+          </p:nvPr>
+        </p:nvSpPr>
+        <p:spPr/>
+        <p:txBody>
+          <a:bodyPr>
+            <a:normAutofit/>
+          </a:bodyPr>
+          <a:lstStyle/>
+          <a:p>
+            <a:r>
+              <a:rPr lang="zh-CN" altLang="en-US" sz="1600" b="1" dirty="0">
+                <a:solidFill>
+                  <a:schemeClr val="accent1">
+                    <a:lumMod val="40000"/>
+                    <a:lumOff val="60000"/>
+                  </a:schemeClr>
+                </a:solidFill>
+                <a:effectLst>
+                  <a:outerShdw blurRad="38100" dist="19050" dir="2700000" algn="tl" rotWithShape="0">
+                    <a:schemeClr val="dk1">
+                      <a:alpha val="40000"/>
+                    </a:schemeClr>
+                  </a:outerShdw>
+                </a:effectLst>
+              </a:rPr>
+              <a:t>第七步：再用有线地址为</a:t>
+            </a:r>
+            <a:r>
+              <a:rPr lang="en-US" altLang="zh-CN" sz="1600" b="1" dirty="0">
+                <a:solidFill>
+                  <a:schemeClr val="accent1">
+                    <a:lumMod val="40000"/>
+                    <a:lumOff val="60000"/>
+                  </a:schemeClr>
+                </a:solidFill>
+                <a:effectLst>
+                  <a:outerShdw blurRad="38100" dist="19050" dir="2700000" algn="tl" rotWithShape="0">
+                    <a:schemeClr val="dk1">
+                      <a:alpha val="40000"/>
+                    </a:schemeClr>
+                  </a:outerShdw>
+                </a:effectLst>
+              </a:rPr>
+              <a:t>192.168.1.1</a:t>
+            </a:r>
+            <a:r>
+              <a:rPr lang="zh-CN" altLang="en-US" sz="1600" b="1" dirty="0">
+                <a:solidFill>
+                  <a:schemeClr val="accent1">
+                    <a:lumMod val="40000"/>
+                    <a:lumOff val="60000"/>
+                  </a:schemeClr>
+                </a:solidFill>
+                <a:effectLst>
+                  <a:outerShdw blurRad="38100" dist="19050" dir="2700000" algn="tl" rotWithShape="0">
+                    <a:schemeClr val="dk1">
+                      <a:alpha val="40000"/>
+                    </a:schemeClr>
+                  </a:outerShdw>
+                </a:effectLst>
+              </a:rPr>
+              <a:t>且无线地址为</a:t>
+            </a:r>
+            <a:r>
+              <a:rPr lang="en-US" altLang="zh-CN" sz="1600" b="1" dirty="0">
+                <a:solidFill>
+                  <a:schemeClr val="accent1">
+                    <a:lumMod val="40000"/>
+                    <a:lumOff val="60000"/>
+                  </a:schemeClr>
+                </a:solidFill>
+                <a:effectLst>
+                  <a:outerShdw blurRad="38100" dist="19050" dir="2700000" algn="tl" rotWithShape="0">
+                    <a:schemeClr val="dk1">
+                      <a:alpha val="40000"/>
+                    </a:schemeClr>
+                  </a:outerShdw>
+                </a:effectLst>
+              </a:rPr>
+              <a:t>192.168.1.11</a:t>
+            </a:r>
+            <a:r>
+              <a:rPr lang="zh-CN" altLang="en-US" sz="1600" b="1" dirty="0">
+                <a:solidFill>
+                  <a:schemeClr val="accent1">
+                    <a:lumMod val="40000"/>
+                    <a:lumOff val="60000"/>
+                  </a:schemeClr>
+                </a:solidFill>
+                <a:effectLst>
+                  <a:outerShdw blurRad="38100" dist="19050" dir="2700000" algn="tl" rotWithShape="0">
+                    <a:schemeClr val="dk1">
+                      <a:alpha val="40000"/>
+                    </a:schemeClr>
+                  </a:outerShdw>
+                </a:effectLst>
+              </a:rPr>
+              <a:t>的电脑去</a:t>
+            </a:r>
+            <a:r>
+              <a:rPr lang="en-US" altLang="zh-CN" sz="1600" b="1" dirty="0">
+                <a:solidFill>
+                  <a:schemeClr val="accent1">
+                    <a:lumMod val="40000"/>
+                    <a:lumOff val="60000"/>
+                  </a:schemeClr>
+                </a:solidFill>
+                <a:effectLst>
+                  <a:outerShdw blurRad="38100" dist="19050" dir="2700000" algn="tl" rotWithShape="0">
+                    <a:schemeClr val="dk1">
+                      <a:alpha val="40000"/>
+                    </a:schemeClr>
+                  </a:outerShdw>
+                </a:effectLst>
+              </a:rPr>
+              <a:t>ping</a:t>
+            </a:r>
+            <a:r>
+              <a:rPr lang="zh-CN" altLang="en-US" sz="1600" b="1" dirty="0">
+                <a:solidFill>
+                  <a:schemeClr val="accent1">
+                    <a:lumMod val="40000"/>
+                    <a:lumOff val="60000"/>
+                  </a:schemeClr>
+                </a:solidFill>
+                <a:effectLst>
+                  <a:outerShdw blurRad="38100" dist="19050" dir="2700000" algn="tl" rotWithShape="0">
+                    <a:schemeClr val="dk1">
+                      <a:alpha val="40000"/>
+                    </a:schemeClr>
+                  </a:outerShdw>
+                </a:effectLst>
+              </a:rPr>
+              <a:t>另一台电脑的地址，对比可知有线速率比无线快很多</a:t>
+            </a:r>
+          </a:p>
+        </p:txBody>
+      </p:sp>
+      <p:pic>
+        <p:nvPicPr>
+          <p:cNvPr id="8" name="内容占位符 7">
+            <a:extLst>
+              <a:ext uri="{FF2B5EF4-FFF2-40B4-BE49-F238E27FC236}">
+                <a16:creationId xmlns:a16="http://schemas.microsoft.com/office/drawing/2014/main" id="{6F4F16DF-5E54-46CA-92EA-6573271C6073}"/>
+              </a:ext>
+            </a:extLst>
+          </p:cNvPr>
           <p:cNvPicPr>
             <a:picLocks noGrp="1" noChangeAspect="1"/>
           </p:cNvPicPr>
@@ -3051,6 +3270,62 @@
           </p:nvPr>
         </p:nvPicPr>
         <p:blipFill>
+          <a:blip r:embed="rId3">
+            <a:extLst>
+              <a:ext uri="{28A0092B-C50C-407E-A947-70E740481C1C}">
+                <a14:useLocalDpi xmlns:a14="http://schemas.microsoft.com/office/drawing/2010/main" val="0"/>
+              </a:ext>
+            </a:extLst>
+          </a:blip>
+          <a:stretch>
+            <a:fillRect/>
+          </a:stretch>
+        </p:blipFill>
+        <p:spPr>
+          <a:xfrm>
+            <a:off x="3113603" y="1590733"/>
+            <a:ext cx="5847347" cy="4351338"/>
+          </a:xfrm>
+        </p:spPr>
+      </p:pic>
+    </p:spTree>
+  </p:cSld>
+  <p:clrMapOvr>
+    <a:masterClrMapping/>
+  </p:clrMapOvr>
+</p:sld>
+</file>
+
+<file path=ppt/slides/slide11.xml><?xml version="1.0" encoding="utf-8"?>
+<p:sld xmlns:a="http://schemas.openxmlformats.org/drawingml/2006/main" xmlns:r="http://schemas.openxmlformats.org/officeDocument/2006/relationships" xmlns:p="http://schemas.openxmlformats.org/presentationml/2006/main">
+  <p:cSld>
+    <p:spTree>
+      <p:nvGrpSpPr>
+        <p:cNvPr id="1" name=""/>
+        <p:cNvGrpSpPr/>
+        <p:nvPr/>
+      </p:nvGrpSpPr>
+      <p:grpSpPr>
+        <a:xfrm>
+          <a:off x="0" y="0"/>
+          <a:ext cx="0" cy="0"/>
+          <a:chOff x="0" y="0"/>
+          <a:chExt cx="0" cy="0"/>
+        </a:xfrm>
+      </p:grpSpPr>
+      <p:pic>
+        <p:nvPicPr>
+          <p:cNvPr id="3" name="图片 2">
+            <a:extLst>
+              <a:ext uri="{FF2B5EF4-FFF2-40B4-BE49-F238E27FC236}">
+                <a16:creationId xmlns:a16="http://schemas.microsoft.com/office/drawing/2014/main" id="{31BF2E65-B3D3-4161-A002-27E31AD02B55}"/>
+              </a:ext>
+            </a:extLst>
+          </p:cNvPr>
+          <p:cNvPicPr/>
+          <p:nvPr/>
+        </p:nvPicPr>
+        <p:blipFill>
           <a:blip r:embed="rId2"/>
           <a:stretch>
             <a:fillRect/>
@@ -3059,7 +3334,7 @@
         <p:spPr>
           <a:xfrm>
             <a:off x="0" y="0"/>
-            <a:ext cx="12192000" cy="9153525"/>
+            <a:ext cx="12192000" cy="6858000"/>
           </a:xfrm>
           <a:prstGeom prst="rect">
             <a:avLst/>
@@ -3076,9 +3351,1730 @@
             <p:ph type="title"/>
           </p:nvPr>
         </p:nvSpPr>
-        <p:spPr>
-          <a:xfrm>
-            <a:off x="1899285" y="2766060"/>
+        <p:spPr/>
+        <p:txBody>
+          <a:bodyPr>
+            <a:normAutofit/>
+          </a:bodyPr>
+          <a:lstStyle/>
+          <a:p>
+            <a:r>
+              <a:rPr lang="zh-CN" altLang="en-US" sz="1600" b="1" dirty="0">
+                <a:solidFill>
+                  <a:schemeClr val="accent1">
+                    <a:lumMod val="40000"/>
+                    <a:lumOff val="60000"/>
+                  </a:schemeClr>
+                </a:solidFill>
+                <a:effectLst>
+                  <a:outerShdw blurRad="38100" dist="19050" dir="2700000" algn="tl" rotWithShape="0">
+                    <a:schemeClr val="dk1">
+                      <a:alpha val="40000"/>
+                    </a:schemeClr>
+                  </a:outerShdw>
+                </a:effectLst>
+              </a:rPr>
+              <a:t>第七步：重复用一台电脑去访问另一台电脑已经共享的文件，然后将它传到自己这里</a:t>
+            </a:r>
+          </a:p>
+        </p:txBody>
+      </p:sp>
+      <p:pic>
+        <p:nvPicPr>
+          <p:cNvPr id="6" name="内容占位符 5"/>
+          <p:cNvPicPr>
+            <a:picLocks noGrp="1"/>
+          </p:cNvPicPr>
+          <p:nvPr>
+            <p:ph idx="1"/>
+          </p:nvPr>
+        </p:nvPicPr>
+        <p:blipFill>
+          <a:blip r:embed="rId3"/>
+          <a:stretch>
+            <a:fillRect/>
+          </a:stretch>
+        </p:blipFill>
+        <p:spPr>
+          <a:xfrm>
+            <a:off x="908375" y="2148884"/>
+            <a:ext cx="4160881" cy="2781541"/>
+          </a:xfrm>
+          <a:prstGeom prst="rect">
+            <a:avLst/>
+          </a:prstGeom>
+        </p:spPr>
+      </p:pic>
+      <p:pic>
+        <p:nvPicPr>
+          <p:cNvPr id="9" name="图片 8"/>
+          <p:cNvPicPr/>
+          <p:nvPr/>
+        </p:nvPicPr>
+        <p:blipFill>
+          <a:blip r:embed="rId4"/>
+          <a:stretch>
+            <a:fillRect/>
+          </a:stretch>
+        </p:blipFill>
+        <p:spPr>
+          <a:xfrm>
+            <a:off x="6247882" y="2057400"/>
+            <a:ext cx="4099560" cy="2743200"/>
+          </a:xfrm>
+          <a:prstGeom prst="rect">
+            <a:avLst/>
+          </a:prstGeom>
+        </p:spPr>
+      </p:pic>
+    </p:spTree>
+  </p:cSld>
+  <p:clrMapOvr>
+    <a:masterClrMapping/>
+  </p:clrMapOvr>
+</p:sld>
+</file>
+
+<file path=ppt/slides/slide12.xml><?xml version="1.0" encoding="utf-8"?>
+<p:sld xmlns:a="http://schemas.openxmlformats.org/drawingml/2006/main" xmlns:r="http://schemas.openxmlformats.org/officeDocument/2006/relationships" xmlns:p="http://schemas.openxmlformats.org/presentationml/2006/main">
+  <p:cSld>
+    <p:spTree>
+      <p:nvGrpSpPr>
+        <p:cNvPr id="1" name=""/>
+        <p:cNvGrpSpPr/>
+        <p:nvPr/>
+      </p:nvGrpSpPr>
+      <p:grpSpPr>
+        <a:xfrm>
+          <a:off x="0" y="0"/>
+          <a:ext cx="0" cy="0"/>
+          <a:chOff x="0" y="0"/>
+          <a:chExt cx="0" cy="0"/>
+        </a:xfrm>
+      </p:grpSpPr>
+      <p:pic>
+        <p:nvPicPr>
+          <p:cNvPr id="3" name="图片 2">
+            <a:extLst>
+              <a:ext uri="{FF2B5EF4-FFF2-40B4-BE49-F238E27FC236}">
+                <a16:creationId xmlns:a16="http://schemas.microsoft.com/office/drawing/2014/main" id="{FAB06EA9-E6F6-448A-AA64-D1E7261AA1E6}"/>
+              </a:ext>
+            </a:extLst>
+          </p:cNvPr>
+          <p:cNvPicPr/>
+          <p:nvPr/>
+        </p:nvPicPr>
+        <p:blipFill>
+          <a:blip r:embed="rId2"/>
+          <a:stretch>
+            <a:fillRect/>
+          </a:stretch>
+        </p:blipFill>
+        <p:spPr>
+          <a:xfrm>
+            <a:off x="0" y="0"/>
+            <a:ext cx="12192000" cy="6858000"/>
+          </a:xfrm>
+          <a:prstGeom prst="rect">
+            <a:avLst/>
+          </a:prstGeom>
+        </p:spPr>
+      </p:pic>
+      <p:sp>
+        <p:nvSpPr>
+          <p:cNvPr id="2" name="标题 1"/>
+          <p:cNvSpPr>
+            <a:spLocks noGrp="1"/>
+          </p:cNvSpPr>
+          <p:nvPr>
+            <p:ph type="title"/>
+          </p:nvPr>
+        </p:nvSpPr>
+        <p:spPr/>
+        <p:txBody>
+          <a:bodyPr>
+            <a:normAutofit/>
+          </a:bodyPr>
+          <a:lstStyle/>
+          <a:p>
+            <a:r>
+              <a:rPr lang="zh-CN" altLang="en-US" sz="1600" b="1" dirty="0">
+                <a:solidFill>
+                  <a:schemeClr val="accent1">
+                    <a:lumMod val="40000"/>
+                    <a:lumOff val="60000"/>
+                  </a:schemeClr>
+                </a:solidFill>
+                <a:effectLst>
+                  <a:outerShdw blurRad="38100" dist="19050" dir="2700000" algn="tl" rotWithShape="0">
+                    <a:schemeClr val="dk1">
+                      <a:alpha val="40000"/>
+                    </a:schemeClr>
+                  </a:outerShdw>
+                </a:effectLst>
+              </a:rPr>
+              <a:t>当将有线的地址和无线的地址设为相同时，由于一个地址只能通过一条道传输的关系，所以会导致只有一个适配器能使用此地址</a:t>
+            </a:r>
+          </a:p>
+        </p:txBody>
+      </p:sp>
+      <p:pic>
+        <p:nvPicPr>
+          <p:cNvPr id="6" name="内容占位符 5"/>
+          <p:cNvPicPr>
+            <a:picLocks noGrp="1"/>
+          </p:cNvPicPr>
+          <p:nvPr>
+            <p:ph idx="1"/>
+          </p:nvPr>
+        </p:nvPicPr>
+        <p:blipFill>
+          <a:blip r:embed="rId3"/>
+          <a:stretch>
+            <a:fillRect/>
+          </a:stretch>
+        </p:blipFill>
+        <p:spPr>
+          <a:xfrm>
+            <a:off x="1108216" y="1690688"/>
+            <a:ext cx="9807790" cy="4206605"/>
+          </a:xfrm>
+          <a:prstGeom prst="rect">
+            <a:avLst/>
+          </a:prstGeom>
+        </p:spPr>
+      </p:pic>
+    </p:spTree>
+  </p:cSld>
+  <p:clrMapOvr>
+    <a:masterClrMapping/>
+  </p:clrMapOvr>
+</p:sld>
+</file>
+
+<file path=ppt/slides/slide13.xml><?xml version="1.0" encoding="utf-8"?>
+<p:sld xmlns:a="http://schemas.openxmlformats.org/drawingml/2006/main" xmlns:r="http://schemas.openxmlformats.org/officeDocument/2006/relationships" xmlns:p="http://schemas.openxmlformats.org/presentationml/2006/main">
+  <p:cSld>
+    <p:spTree>
+      <p:nvGrpSpPr>
+        <p:cNvPr id="1" name=""/>
+        <p:cNvGrpSpPr/>
+        <p:nvPr/>
+      </p:nvGrpSpPr>
+      <p:grpSpPr>
+        <a:xfrm>
+          <a:off x="0" y="0"/>
+          <a:ext cx="0" cy="0"/>
+          <a:chOff x="0" y="0"/>
+          <a:chExt cx="0" cy="0"/>
+        </a:xfrm>
+      </p:grpSpPr>
+      <p:pic>
+        <p:nvPicPr>
+          <p:cNvPr id="17" name="图片 16">
+            <a:extLst>
+              <a:ext uri="{FF2B5EF4-FFF2-40B4-BE49-F238E27FC236}">
+                <a16:creationId xmlns:a16="http://schemas.microsoft.com/office/drawing/2014/main" id="{34599DD7-7163-4C3F-9FE8-A79B54DC9C52}"/>
+              </a:ext>
+            </a:extLst>
+          </p:cNvPr>
+          <p:cNvPicPr/>
+          <p:nvPr/>
+        </p:nvPicPr>
+        <p:blipFill>
+          <a:blip r:embed="rId2"/>
+          <a:stretch>
+            <a:fillRect/>
+          </a:stretch>
+        </p:blipFill>
+        <p:spPr>
+          <a:xfrm>
+            <a:off x="0" y="0"/>
+            <a:ext cx="12192000" cy="6858000"/>
+          </a:xfrm>
+          <a:prstGeom prst="rect">
+            <a:avLst/>
+          </a:prstGeom>
+        </p:spPr>
+      </p:pic>
+      <p:pic>
+        <p:nvPicPr>
+          <p:cNvPr id="9" name="图片 8">
+            <a:extLst>
+              <a:ext uri="{FF2B5EF4-FFF2-40B4-BE49-F238E27FC236}">
+                <a16:creationId xmlns:a16="http://schemas.microsoft.com/office/drawing/2014/main" id="{B54A5F9E-5F85-4309-9B9F-083D0E1FD93E}"/>
+              </a:ext>
+            </a:extLst>
+          </p:cNvPr>
+          <p:cNvPicPr>
+            <a:picLocks noChangeAspect="1"/>
+          </p:cNvPicPr>
+          <p:nvPr/>
+        </p:nvPicPr>
+        <p:blipFill>
+          <a:blip r:embed="rId3">
+            <a:extLst>
+              <a:ext uri="{28A0092B-C50C-407E-A947-70E740481C1C}">
+                <a14:useLocalDpi xmlns:a14="http://schemas.microsoft.com/office/drawing/2010/main" val="0"/>
+              </a:ext>
+            </a:extLst>
+          </a:blip>
+          <a:stretch>
+            <a:fillRect/>
+          </a:stretch>
+        </p:blipFill>
+        <p:spPr>
+          <a:xfrm>
+            <a:off x="2312368" y="1351178"/>
+            <a:ext cx="7163800" cy="2038635"/>
+          </a:xfrm>
+          <a:prstGeom prst="rect">
+            <a:avLst/>
+          </a:prstGeom>
+        </p:spPr>
+      </p:pic>
+      <p:pic>
+        <p:nvPicPr>
+          <p:cNvPr id="11" name="图片 10">
+            <a:extLst>
+              <a:ext uri="{FF2B5EF4-FFF2-40B4-BE49-F238E27FC236}">
+                <a16:creationId xmlns:a16="http://schemas.microsoft.com/office/drawing/2014/main" id="{70DE5FB2-61DD-4C9A-9120-ED3C10486734}"/>
+              </a:ext>
+            </a:extLst>
+          </p:cNvPr>
+          <p:cNvPicPr>
+            <a:picLocks noChangeAspect="1"/>
+          </p:cNvPicPr>
+          <p:nvPr/>
+        </p:nvPicPr>
+        <p:blipFill>
+          <a:blip r:embed="rId4">
+            <a:extLst>
+              <a:ext uri="{28A0092B-C50C-407E-A947-70E740481C1C}">
+                <a14:useLocalDpi xmlns:a14="http://schemas.microsoft.com/office/drawing/2010/main" val="0"/>
+              </a:ext>
+            </a:extLst>
+          </a:blip>
+          <a:stretch>
+            <a:fillRect/>
+          </a:stretch>
+        </p:blipFill>
+        <p:spPr>
+          <a:xfrm>
+            <a:off x="1183454" y="3682253"/>
+            <a:ext cx="3801005" cy="2200582"/>
+          </a:xfrm>
+          <a:prstGeom prst="rect">
+            <a:avLst/>
+          </a:prstGeom>
+        </p:spPr>
+      </p:pic>
+      <p:pic>
+        <p:nvPicPr>
+          <p:cNvPr id="13" name="图片 12">
+            <a:extLst>
+              <a:ext uri="{FF2B5EF4-FFF2-40B4-BE49-F238E27FC236}">
+                <a16:creationId xmlns:a16="http://schemas.microsoft.com/office/drawing/2014/main" id="{C821E735-FBF9-4D0B-8602-F33F418E7710}"/>
+              </a:ext>
+            </a:extLst>
+          </p:cNvPr>
+          <p:cNvPicPr>
+            <a:picLocks noChangeAspect="1"/>
+          </p:cNvPicPr>
+          <p:nvPr/>
+        </p:nvPicPr>
+        <p:blipFill>
+          <a:blip r:embed="rId5">
+            <a:extLst>
+              <a:ext uri="{28A0092B-C50C-407E-A947-70E740481C1C}">
+                <a14:useLocalDpi xmlns:a14="http://schemas.microsoft.com/office/drawing/2010/main" val="0"/>
+              </a:ext>
+            </a:extLst>
+          </a:blip>
+          <a:stretch>
+            <a:fillRect/>
+          </a:stretch>
+        </p:blipFill>
+        <p:spPr>
+          <a:xfrm>
+            <a:off x="5799689" y="3844200"/>
+            <a:ext cx="5627415" cy="2038635"/>
+          </a:xfrm>
+          <a:prstGeom prst="rect">
+            <a:avLst/>
+          </a:prstGeom>
+        </p:spPr>
+      </p:pic>
+      <p:sp>
+        <p:nvSpPr>
+          <p:cNvPr id="15" name="标题 1">
+            <a:extLst>
+              <a:ext uri="{FF2B5EF4-FFF2-40B4-BE49-F238E27FC236}">
+                <a16:creationId xmlns:a16="http://schemas.microsoft.com/office/drawing/2014/main" id="{E5FC40F6-879D-4FE1-A7BF-81EAA186F448}"/>
+              </a:ext>
+            </a:extLst>
+          </p:cNvPr>
+          <p:cNvSpPr>
+            <a:spLocks noGrp="1"/>
+          </p:cNvSpPr>
+          <p:nvPr>
+            <p:ph type="title"/>
+          </p:nvPr>
+        </p:nvSpPr>
+        <p:spPr>
+          <a:xfrm>
+            <a:off x="1806180" y="480213"/>
+            <a:ext cx="7987018" cy="740471"/>
+          </a:xfrm>
+        </p:spPr>
+        <p:txBody>
+          <a:bodyPr>
+            <a:normAutofit/>
+          </a:bodyPr>
+          <a:lstStyle/>
+          <a:p>
+            <a:pPr algn="ctr"/>
+            <a:r>
+              <a:rPr lang="zh-CN" altLang="en-US" sz="3600" b="1" dirty="0">
+                <a:solidFill>
+                  <a:schemeClr val="tx2">
+                    <a:lumMod val="60000"/>
+                    <a:lumOff val="40000"/>
+                  </a:schemeClr>
+                </a:solidFill>
+                <a:effectLst>
+                  <a:outerShdw blurRad="38100" dist="19050" dir="2700000" algn="tl" rotWithShape="0">
+                    <a:schemeClr val="dk1">
+                      <a:alpha val="40000"/>
+                    </a:schemeClr>
+                  </a:outerShdw>
+                </a:effectLst>
+              </a:rPr>
+              <a:t>回到开始，看一看原理</a:t>
+            </a:r>
+          </a:p>
+        </p:txBody>
+      </p:sp>
+    </p:spTree>
+    <p:extLst>
+      <p:ext uri="{BB962C8B-B14F-4D97-AF65-F5344CB8AC3E}">
+        <p14:creationId xmlns:p14="http://schemas.microsoft.com/office/powerpoint/2010/main" val="1010155131"/>
+      </p:ext>
+    </p:extLst>
+  </p:cSld>
+  <p:clrMapOvr>
+    <a:masterClrMapping/>
+  </p:clrMapOvr>
+</p:sld>
+</file>
+
+<file path=ppt/slides/slide14.xml><?xml version="1.0" encoding="utf-8"?>
+<p:sld xmlns:a="http://schemas.openxmlformats.org/drawingml/2006/main" xmlns:r="http://schemas.openxmlformats.org/officeDocument/2006/relationships" xmlns:p="http://schemas.openxmlformats.org/presentationml/2006/main">
+  <p:cSld>
+    <p:spTree>
+      <p:nvGrpSpPr>
+        <p:cNvPr id="1" name=""/>
+        <p:cNvGrpSpPr/>
+        <p:nvPr/>
+      </p:nvGrpSpPr>
+      <p:grpSpPr>
+        <a:xfrm>
+          <a:off x="0" y="0"/>
+          <a:ext cx="0" cy="0"/>
+          <a:chOff x="0" y="0"/>
+          <a:chExt cx="0" cy="0"/>
+        </a:xfrm>
+      </p:grpSpPr>
+      <p:pic>
+        <p:nvPicPr>
+          <p:cNvPr id="50" name="图片 49">
+            <a:extLst>
+              <a:ext uri="{FF2B5EF4-FFF2-40B4-BE49-F238E27FC236}">
+                <a16:creationId xmlns:a16="http://schemas.microsoft.com/office/drawing/2014/main" id="{2DD63D62-E4A6-4CE4-BD5D-7B1F54716730}"/>
+              </a:ext>
+            </a:extLst>
+          </p:cNvPr>
+          <p:cNvPicPr/>
+          <p:nvPr/>
+        </p:nvPicPr>
+        <p:blipFill>
+          <a:blip r:embed="rId2"/>
+          <a:stretch>
+            <a:fillRect/>
+          </a:stretch>
+        </p:blipFill>
+        <p:spPr>
+          <a:xfrm>
+            <a:off x="0" y="0"/>
+            <a:ext cx="12192000" cy="6858000"/>
+          </a:xfrm>
+          <a:prstGeom prst="rect">
+            <a:avLst/>
+          </a:prstGeom>
+        </p:spPr>
+      </p:pic>
+      <p:sp>
+        <p:nvSpPr>
+          <p:cNvPr id="6" name="矩形 5">
+            <a:extLst>
+              <a:ext uri="{FF2B5EF4-FFF2-40B4-BE49-F238E27FC236}">
+                <a16:creationId xmlns:a16="http://schemas.microsoft.com/office/drawing/2014/main" id="{20D6983C-FA3E-42DB-9E83-79552C0F3811}"/>
+              </a:ext>
+            </a:extLst>
+          </p:cNvPr>
+          <p:cNvSpPr/>
+          <p:nvPr/>
+        </p:nvSpPr>
+        <p:spPr>
+          <a:xfrm>
+            <a:off x="2242656" y="1825625"/>
+            <a:ext cx="1442907" cy="3031601"/>
+          </a:xfrm>
+          <a:prstGeom prst="rect">
+            <a:avLst/>
+          </a:prstGeom>
+        </p:spPr>
+        <p:style>
+          <a:lnRef idx="2">
+            <a:schemeClr val="accent1">
+              <a:shade val="50000"/>
+            </a:schemeClr>
+          </a:lnRef>
+          <a:fillRef idx="1">
+            <a:schemeClr val="accent1"/>
+          </a:fillRef>
+          <a:effectRef idx="0">
+            <a:schemeClr val="accent1"/>
+          </a:effectRef>
+          <a:fontRef idx="minor">
+            <a:schemeClr val="lt1"/>
+          </a:fontRef>
+        </p:style>
+        <p:txBody>
+          <a:bodyPr rtlCol="0" anchor="ctr"/>
+          <a:lstStyle/>
+          <a:p>
+            <a:pPr algn="ctr"/>
+            <a:endParaRPr lang="zh-CN" altLang="en-US">
+              <a:solidFill>
+                <a:schemeClr val="accent1">
+                  <a:lumMod val="40000"/>
+                  <a:lumOff val="60000"/>
+                </a:schemeClr>
+              </a:solidFill>
+            </a:endParaRPr>
+          </a:p>
+        </p:txBody>
+      </p:sp>
+      <p:sp>
+        <p:nvSpPr>
+          <p:cNvPr id="8" name="矩形 7">
+            <a:extLst>
+              <a:ext uri="{FF2B5EF4-FFF2-40B4-BE49-F238E27FC236}">
+                <a16:creationId xmlns:a16="http://schemas.microsoft.com/office/drawing/2014/main" id="{66FD494A-8A44-415C-A68A-ADA3007634E1}"/>
+              </a:ext>
+            </a:extLst>
+          </p:cNvPr>
+          <p:cNvSpPr/>
+          <p:nvPr/>
+        </p:nvSpPr>
+        <p:spPr>
+          <a:xfrm>
+            <a:off x="8265954" y="1825625"/>
+            <a:ext cx="1442907" cy="3031601"/>
+          </a:xfrm>
+          <a:prstGeom prst="rect">
+            <a:avLst/>
+          </a:prstGeom>
+        </p:spPr>
+        <p:style>
+          <a:lnRef idx="2">
+            <a:schemeClr val="accent1">
+              <a:shade val="50000"/>
+            </a:schemeClr>
+          </a:lnRef>
+          <a:fillRef idx="1">
+            <a:schemeClr val="accent1"/>
+          </a:fillRef>
+          <a:effectRef idx="0">
+            <a:schemeClr val="accent1"/>
+          </a:effectRef>
+          <a:fontRef idx="minor">
+            <a:schemeClr val="lt1"/>
+          </a:fontRef>
+        </p:style>
+        <p:txBody>
+          <a:bodyPr rtlCol="0" anchor="ctr"/>
+          <a:lstStyle/>
+          <a:p>
+            <a:pPr algn="ctr"/>
+            <a:endParaRPr lang="zh-CN" altLang="en-US">
+              <a:solidFill>
+                <a:schemeClr val="accent1">
+                  <a:lumMod val="40000"/>
+                  <a:lumOff val="60000"/>
+                </a:schemeClr>
+              </a:solidFill>
+            </a:endParaRPr>
+          </a:p>
+        </p:txBody>
+      </p:sp>
+      <p:cxnSp>
+        <p:nvCxnSpPr>
+          <p:cNvPr id="10" name="直接连接符 9">
+            <a:extLst>
+              <a:ext uri="{FF2B5EF4-FFF2-40B4-BE49-F238E27FC236}">
+                <a16:creationId xmlns:a16="http://schemas.microsoft.com/office/drawing/2014/main" id="{7FBCFEFA-FD7C-40BB-B2C4-FF6BFEB59DA0}"/>
+              </a:ext>
+            </a:extLst>
+          </p:cNvPr>
+          <p:cNvCxnSpPr/>
+          <p:nvPr/>
+        </p:nvCxnSpPr>
+        <p:spPr>
+          <a:xfrm>
+            <a:off x="3204594" y="2365695"/>
+            <a:ext cx="5301843" cy="0"/>
+          </a:xfrm>
+          <a:prstGeom prst="line">
+            <a:avLst/>
+          </a:prstGeom>
+        </p:spPr>
+        <p:style>
+          <a:lnRef idx="3">
+            <a:schemeClr val="dk1"/>
+          </a:lnRef>
+          <a:fillRef idx="0">
+            <a:schemeClr val="dk1"/>
+          </a:fillRef>
+          <a:effectRef idx="2">
+            <a:schemeClr val="dk1"/>
+          </a:effectRef>
+          <a:fontRef idx="minor">
+            <a:schemeClr val="tx1"/>
+          </a:fontRef>
+        </p:style>
+      </p:cxnSp>
+      <p:cxnSp>
+        <p:nvCxnSpPr>
+          <p:cNvPr id="14" name="直接连接符 13">
+            <a:extLst>
+              <a:ext uri="{FF2B5EF4-FFF2-40B4-BE49-F238E27FC236}">
+                <a16:creationId xmlns:a16="http://schemas.microsoft.com/office/drawing/2014/main" id="{4D0281A1-9997-498C-979C-5CD443B8EEB8}"/>
+              </a:ext>
+            </a:extLst>
+          </p:cNvPr>
+          <p:cNvCxnSpPr>
+            <a:cxnSpLocks/>
+          </p:cNvCxnSpPr>
+          <p:nvPr/>
+        </p:nvCxnSpPr>
+        <p:spPr>
+          <a:xfrm>
+            <a:off x="3204593" y="4545647"/>
+            <a:ext cx="5301843" cy="0"/>
+          </a:xfrm>
+          <a:prstGeom prst="line">
+            <a:avLst/>
+          </a:prstGeom>
+          <a:ln w="9525" cap="flat" cmpd="sng" algn="ctr">
+            <a:solidFill>
+              <a:schemeClr val="dk1"/>
+            </a:solidFill>
+            <a:prstDash val="dash"/>
+            <a:round/>
+            <a:headEnd type="none" w="med" len="med"/>
+            <a:tailEnd type="none" w="med" len="med"/>
+          </a:ln>
+        </p:spPr>
+        <p:style>
+          <a:lnRef idx="0">
+            <a:scrgbClr r="0" g="0" b="0"/>
+          </a:lnRef>
+          <a:fillRef idx="0">
+            <a:scrgbClr r="0" g="0" b="0"/>
+          </a:fillRef>
+          <a:effectRef idx="0">
+            <a:scrgbClr r="0" g="0" b="0"/>
+          </a:effectRef>
+          <a:fontRef idx="minor">
+            <a:schemeClr val="tx1"/>
+          </a:fontRef>
+        </p:style>
+      </p:cxnSp>
+      <p:sp>
+        <p:nvSpPr>
+          <p:cNvPr id="19" name="文本框 18">
+            <a:extLst>
+              <a:ext uri="{FF2B5EF4-FFF2-40B4-BE49-F238E27FC236}">
+                <a16:creationId xmlns:a16="http://schemas.microsoft.com/office/drawing/2014/main" id="{CB635EFC-938A-486D-9E5B-D19D6B2AB125}"/>
+              </a:ext>
+            </a:extLst>
+          </p:cNvPr>
+          <p:cNvSpPr txBox="1"/>
+          <p:nvPr/>
+        </p:nvSpPr>
+        <p:spPr>
+          <a:xfrm>
+            <a:off x="3685563" y="1928895"/>
+            <a:ext cx="1435008" cy="369332"/>
+          </a:xfrm>
+          <a:prstGeom prst="rect">
+            <a:avLst/>
+          </a:prstGeom>
+          <a:noFill/>
+        </p:spPr>
+        <p:txBody>
+          <a:bodyPr wrap="none" rtlCol="0">
+            <a:spAutoFit/>
+          </a:bodyPr>
+          <a:lstStyle/>
+          <a:p>
+            <a:r>
+              <a:rPr lang="en-US" altLang="zh-CN" dirty="0">
+                <a:solidFill>
+                  <a:schemeClr val="accent1">
+                    <a:lumMod val="40000"/>
+                    <a:lumOff val="60000"/>
+                  </a:schemeClr>
+                </a:solidFill>
+              </a:rPr>
+              <a:t>192.168.1.11</a:t>
+            </a:r>
+            <a:endParaRPr lang="zh-CN" altLang="en-US" dirty="0">
+              <a:solidFill>
+                <a:schemeClr val="accent1">
+                  <a:lumMod val="40000"/>
+                  <a:lumOff val="60000"/>
+                </a:schemeClr>
+              </a:solidFill>
+            </a:endParaRPr>
+          </a:p>
+        </p:txBody>
+      </p:sp>
+      <p:sp>
+        <p:nvSpPr>
+          <p:cNvPr id="21" name="文本框 20">
+            <a:extLst>
+              <a:ext uri="{FF2B5EF4-FFF2-40B4-BE49-F238E27FC236}">
+                <a16:creationId xmlns:a16="http://schemas.microsoft.com/office/drawing/2014/main" id="{42D143DB-5FD7-40B7-BFAC-CCF2B6D80B21}"/>
+              </a:ext>
+            </a:extLst>
+          </p:cNvPr>
+          <p:cNvSpPr txBox="1"/>
+          <p:nvPr/>
+        </p:nvSpPr>
+        <p:spPr>
+          <a:xfrm>
+            <a:off x="3685563" y="4108847"/>
+            <a:ext cx="1435008" cy="369332"/>
+          </a:xfrm>
+          <a:prstGeom prst="rect">
+            <a:avLst/>
+          </a:prstGeom>
+          <a:noFill/>
+        </p:spPr>
+        <p:txBody>
+          <a:bodyPr wrap="none" rtlCol="0">
+            <a:spAutoFit/>
+          </a:bodyPr>
+          <a:lstStyle/>
+          <a:p>
+            <a:r>
+              <a:rPr lang="en-US" altLang="zh-CN" dirty="0">
+                <a:solidFill>
+                  <a:schemeClr val="accent1">
+                    <a:lumMod val="40000"/>
+                    <a:lumOff val="60000"/>
+                  </a:schemeClr>
+                </a:solidFill>
+              </a:rPr>
+              <a:t>192.168.1.11</a:t>
+            </a:r>
+            <a:endParaRPr lang="zh-CN" altLang="en-US" dirty="0">
+              <a:solidFill>
+                <a:schemeClr val="accent1">
+                  <a:lumMod val="40000"/>
+                  <a:lumOff val="60000"/>
+                </a:schemeClr>
+              </a:solidFill>
+            </a:endParaRPr>
+          </a:p>
+        </p:txBody>
+      </p:sp>
+      <p:sp>
+        <p:nvSpPr>
+          <p:cNvPr id="23" name="文本框 22">
+            <a:extLst>
+              <a:ext uri="{FF2B5EF4-FFF2-40B4-BE49-F238E27FC236}">
+                <a16:creationId xmlns:a16="http://schemas.microsoft.com/office/drawing/2014/main" id="{CA2A2B83-4D6B-4902-9FD1-DEA707C40560}"/>
+              </a:ext>
+            </a:extLst>
+          </p:cNvPr>
+          <p:cNvSpPr txBox="1"/>
+          <p:nvPr/>
+        </p:nvSpPr>
+        <p:spPr>
+          <a:xfrm>
+            <a:off x="6828762" y="1910994"/>
+            <a:ext cx="1435008" cy="369332"/>
+          </a:xfrm>
+          <a:prstGeom prst="rect">
+            <a:avLst/>
+          </a:prstGeom>
+          <a:noFill/>
+        </p:spPr>
+        <p:txBody>
+          <a:bodyPr wrap="none" rtlCol="0">
+            <a:spAutoFit/>
+          </a:bodyPr>
+          <a:lstStyle/>
+          <a:p>
+            <a:r>
+              <a:rPr lang="en-US" altLang="zh-CN" dirty="0">
+                <a:solidFill>
+                  <a:schemeClr val="accent1">
+                    <a:lumMod val="40000"/>
+                    <a:lumOff val="60000"/>
+                  </a:schemeClr>
+                </a:solidFill>
+              </a:rPr>
+              <a:t>192.168.1.12</a:t>
+            </a:r>
+            <a:endParaRPr lang="zh-CN" altLang="en-US" dirty="0">
+              <a:solidFill>
+                <a:schemeClr val="accent1">
+                  <a:lumMod val="40000"/>
+                  <a:lumOff val="60000"/>
+                </a:schemeClr>
+              </a:solidFill>
+            </a:endParaRPr>
+          </a:p>
+        </p:txBody>
+      </p:sp>
+      <p:sp>
+        <p:nvSpPr>
+          <p:cNvPr id="25" name="文本框 24">
+            <a:extLst>
+              <a:ext uri="{FF2B5EF4-FFF2-40B4-BE49-F238E27FC236}">
+                <a16:creationId xmlns:a16="http://schemas.microsoft.com/office/drawing/2014/main" id="{BF85E132-EF0A-4BA9-9610-C14B9BBD77BE}"/>
+              </a:ext>
+            </a:extLst>
+          </p:cNvPr>
+          <p:cNvSpPr txBox="1"/>
+          <p:nvPr/>
+        </p:nvSpPr>
+        <p:spPr>
+          <a:xfrm>
+            <a:off x="6836661" y="4115094"/>
+            <a:ext cx="1435008" cy="369332"/>
+          </a:xfrm>
+          <a:prstGeom prst="rect">
+            <a:avLst/>
+          </a:prstGeom>
+          <a:noFill/>
+        </p:spPr>
+        <p:txBody>
+          <a:bodyPr wrap="none" rtlCol="0">
+            <a:spAutoFit/>
+          </a:bodyPr>
+          <a:lstStyle/>
+          <a:p>
+            <a:r>
+              <a:rPr lang="en-US" altLang="zh-CN" dirty="0">
+                <a:solidFill>
+                  <a:schemeClr val="accent1">
+                    <a:lumMod val="40000"/>
+                    <a:lumOff val="60000"/>
+                  </a:schemeClr>
+                </a:solidFill>
+              </a:rPr>
+              <a:t>192.168.1.12</a:t>
+            </a:r>
+            <a:endParaRPr lang="zh-CN" altLang="en-US" dirty="0">
+              <a:solidFill>
+                <a:schemeClr val="accent1">
+                  <a:lumMod val="40000"/>
+                  <a:lumOff val="60000"/>
+                </a:schemeClr>
+              </a:solidFill>
+            </a:endParaRPr>
+          </a:p>
+        </p:txBody>
+      </p:sp>
+      <p:sp>
+        <p:nvSpPr>
+          <p:cNvPr id="26" name="文本框 25">
+            <a:extLst>
+              <a:ext uri="{FF2B5EF4-FFF2-40B4-BE49-F238E27FC236}">
+                <a16:creationId xmlns:a16="http://schemas.microsoft.com/office/drawing/2014/main" id="{5D65D36F-9FDE-4A8B-98C7-7635AC7BD167}"/>
+              </a:ext>
+            </a:extLst>
+          </p:cNvPr>
+          <p:cNvSpPr txBox="1"/>
+          <p:nvPr/>
+        </p:nvSpPr>
+        <p:spPr>
+          <a:xfrm>
+            <a:off x="2567031" y="2860646"/>
+            <a:ext cx="436228" cy="369332"/>
+          </a:xfrm>
+          <a:prstGeom prst="rect">
+            <a:avLst/>
+          </a:prstGeom>
+          <a:noFill/>
+        </p:spPr>
+        <p:txBody>
+          <a:bodyPr wrap="square" rtlCol="0">
+            <a:spAutoFit/>
+          </a:bodyPr>
+          <a:lstStyle/>
+          <a:p>
+            <a:endParaRPr lang="zh-CN" altLang="en-US" dirty="0">
+              <a:solidFill>
+                <a:schemeClr val="accent1">
+                  <a:lumMod val="40000"/>
+                  <a:lumOff val="60000"/>
+                </a:schemeClr>
+              </a:solidFill>
+            </a:endParaRPr>
+          </a:p>
+        </p:txBody>
+      </p:sp>
+      <p:sp>
+        <p:nvSpPr>
+          <p:cNvPr id="30" name="文本框 29">
+            <a:extLst>
+              <a:ext uri="{FF2B5EF4-FFF2-40B4-BE49-F238E27FC236}">
+                <a16:creationId xmlns:a16="http://schemas.microsoft.com/office/drawing/2014/main" id="{01C5441B-1346-40DC-A5B7-F8622BE264F0}"/>
+              </a:ext>
+            </a:extLst>
+          </p:cNvPr>
+          <p:cNvSpPr txBox="1"/>
+          <p:nvPr/>
+        </p:nvSpPr>
+        <p:spPr>
+          <a:xfrm>
+            <a:off x="1434517" y="2793534"/>
+            <a:ext cx="897746" cy="369332"/>
+          </a:xfrm>
+          <a:prstGeom prst="rect">
+            <a:avLst/>
+          </a:prstGeom>
+          <a:noFill/>
+        </p:spPr>
+        <p:txBody>
+          <a:bodyPr wrap="square" rtlCol="0">
+            <a:spAutoFit/>
+          </a:bodyPr>
+          <a:lstStyle/>
+          <a:p>
+            <a:r>
+              <a:rPr lang="zh-CN" altLang="en-US" dirty="0">
+                <a:solidFill>
+                  <a:schemeClr val="accent1">
+                    <a:lumMod val="40000"/>
+                    <a:lumOff val="60000"/>
+                  </a:schemeClr>
+                </a:solidFill>
+              </a:rPr>
+              <a:t>电脑</a:t>
+            </a:r>
+            <a:r>
+              <a:rPr lang="en-US" altLang="zh-CN" dirty="0">
+                <a:solidFill>
+                  <a:schemeClr val="accent1">
+                    <a:lumMod val="40000"/>
+                    <a:lumOff val="60000"/>
+                  </a:schemeClr>
+                </a:solidFill>
+              </a:rPr>
+              <a:t>1</a:t>
+            </a:r>
+            <a:endParaRPr lang="zh-CN" altLang="en-US" dirty="0">
+              <a:solidFill>
+                <a:schemeClr val="accent1">
+                  <a:lumMod val="40000"/>
+                  <a:lumOff val="60000"/>
+                </a:schemeClr>
+              </a:solidFill>
+            </a:endParaRPr>
+          </a:p>
+        </p:txBody>
+      </p:sp>
+      <p:sp>
+        <p:nvSpPr>
+          <p:cNvPr id="32" name="文本框 31">
+            <a:extLst>
+              <a:ext uri="{FF2B5EF4-FFF2-40B4-BE49-F238E27FC236}">
+                <a16:creationId xmlns:a16="http://schemas.microsoft.com/office/drawing/2014/main" id="{27F1E09F-4E90-44A5-84EC-818E13F973E3}"/>
+              </a:ext>
+            </a:extLst>
+          </p:cNvPr>
+          <p:cNvSpPr txBox="1"/>
+          <p:nvPr/>
+        </p:nvSpPr>
+        <p:spPr>
+          <a:xfrm>
+            <a:off x="9949344" y="2933134"/>
+            <a:ext cx="897746" cy="369332"/>
+          </a:xfrm>
+          <a:prstGeom prst="rect">
+            <a:avLst/>
+          </a:prstGeom>
+          <a:noFill/>
+        </p:spPr>
+        <p:txBody>
+          <a:bodyPr wrap="square" rtlCol="0">
+            <a:spAutoFit/>
+          </a:bodyPr>
+          <a:lstStyle/>
+          <a:p>
+            <a:r>
+              <a:rPr lang="zh-CN" altLang="en-US" dirty="0">
+                <a:solidFill>
+                  <a:schemeClr val="accent1">
+                    <a:lumMod val="40000"/>
+                    <a:lumOff val="60000"/>
+                  </a:schemeClr>
+                </a:solidFill>
+              </a:rPr>
+              <a:t>电脑</a:t>
+            </a:r>
+            <a:r>
+              <a:rPr lang="en-US" altLang="zh-CN" dirty="0">
+                <a:solidFill>
+                  <a:schemeClr val="accent1">
+                    <a:lumMod val="40000"/>
+                    <a:lumOff val="60000"/>
+                  </a:schemeClr>
+                </a:solidFill>
+              </a:rPr>
+              <a:t>2</a:t>
+            </a:r>
+            <a:endParaRPr lang="zh-CN" altLang="en-US" dirty="0">
+              <a:solidFill>
+                <a:schemeClr val="accent1">
+                  <a:lumMod val="40000"/>
+                  <a:lumOff val="60000"/>
+                </a:schemeClr>
+              </a:solidFill>
+            </a:endParaRPr>
+          </a:p>
+        </p:txBody>
+      </p:sp>
+      <p:sp>
+        <p:nvSpPr>
+          <p:cNvPr id="9" name="箭头: 下 8">
+            <a:extLst>
+              <a:ext uri="{FF2B5EF4-FFF2-40B4-BE49-F238E27FC236}">
+                <a16:creationId xmlns:a16="http://schemas.microsoft.com/office/drawing/2014/main" id="{F439500E-647D-4C43-A6C0-250CEE9B0DE5}"/>
+              </a:ext>
+            </a:extLst>
+          </p:cNvPr>
+          <p:cNvSpPr/>
+          <p:nvPr/>
+        </p:nvSpPr>
+        <p:spPr>
+          <a:xfrm>
+            <a:off x="4274317" y="4478179"/>
+            <a:ext cx="142612" cy="666922"/>
+          </a:xfrm>
+          <a:prstGeom prst="downArrow">
+            <a:avLst/>
+          </a:prstGeom>
+        </p:spPr>
+        <p:style>
+          <a:lnRef idx="2">
+            <a:schemeClr val="accent1">
+              <a:shade val="50000"/>
+            </a:schemeClr>
+          </a:lnRef>
+          <a:fillRef idx="1">
+            <a:schemeClr val="accent1"/>
+          </a:fillRef>
+          <a:effectRef idx="0">
+            <a:schemeClr val="accent1"/>
+          </a:effectRef>
+          <a:fontRef idx="minor">
+            <a:schemeClr val="lt1"/>
+          </a:fontRef>
+        </p:style>
+        <p:txBody>
+          <a:bodyPr rtlCol="0" anchor="ctr"/>
+          <a:lstStyle/>
+          <a:p>
+            <a:pPr algn="ctr"/>
+            <a:endParaRPr lang="zh-CN" altLang="en-US">
+              <a:solidFill>
+                <a:schemeClr val="accent1">
+                  <a:lumMod val="40000"/>
+                  <a:lumOff val="60000"/>
+                </a:schemeClr>
+              </a:solidFill>
+            </a:endParaRPr>
+          </a:p>
+        </p:txBody>
+      </p:sp>
+      <p:sp>
+        <p:nvSpPr>
+          <p:cNvPr id="11" name="箭头: 下 10">
+            <a:extLst>
+              <a:ext uri="{FF2B5EF4-FFF2-40B4-BE49-F238E27FC236}">
+                <a16:creationId xmlns:a16="http://schemas.microsoft.com/office/drawing/2014/main" id="{65DF9E4F-A58A-4ABC-97A6-03C0ABEB35A2}"/>
+              </a:ext>
+            </a:extLst>
+          </p:cNvPr>
+          <p:cNvSpPr/>
+          <p:nvPr/>
+        </p:nvSpPr>
+        <p:spPr>
+          <a:xfrm>
+            <a:off x="7540180" y="4478179"/>
+            <a:ext cx="142612" cy="666922"/>
+          </a:xfrm>
+          <a:prstGeom prst="downArrow">
+            <a:avLst/>
+          </a:prstGeom>
+        </p:spPr>
+        <p:style>
+          <a:lnRef idx="2">
+            <a:schemeClr val="accent1">
+              <a:shade val="50000"/>
+            </a:schemeClr>
+          </a:lnRef>
+          <a:fillRef idx="1">
+            <a:schemeClr val="accent1"/>
+          </a:fillRef>
+          <a:effectRef idx="0">
+            <a:schemeClr val="accent1"/>
+          </a:effectRef>
+          <a:fontRef idx="minor">
+            <a:schemeClr val="lt1"/>
+          </a:fontRef>
+        </p:style>
+        <p:txBody>
+          <a:bodyPr rtlCol="0" anchor="ctr"/>
+          <a:lstStyle/>
+          <a:p>
+            <a:pPr algn="ctr"/>
+            <a:endParaRPr lang="zh-CN" altLang="en-US">
+              <a:solidFill>
+                <a:schemeClr val="accent1">
+                  <a:lumMod val="40000"/>
+                  <a:lumOff val="60000"/>
+                </a:schemeClr>
+              </a:solidFill>
+            </a:endParaRPr>
+          </a:p>
+        </p:txBody>
+      </p:sp>
+      <p:sp>
+        <p:nvSpPr>
+          <p:cNvPr id="13" name="文本框 12">
+            <a:extLst>
+              <a:ext uri="{FF2B5EF4-FFF2-40B4-BE49-F238E27FC236}">
+                <a16:creationId xmlns:a16="http://schemas.microsoft.com/office/drawing/2014/main" id="{19146187-EE78-4EF1-BDF5-AA5548D4E9BE}"/>
+              </a:ext>
+            </a:extLst>
+          </p:cNvPr>
+          <p:cNvSpPr txBox="1"/>
+          <p:nvPr/>
+        </p:nvSpPr>
+        <p:spPr>
+          <a:xfrm>
+            <a:off x="3598877" y="5354229"/>
+            <a:ext cx="1593908" cy="369332"/>
+          </a:xfrm>
+          <a:prstGeom prst="rect">
+            <a:avLst/>
+          </a:prstGeom>
+          <a:noFill/>
+        </p:spPr>
+        <p:txBody>
+          <a:bodyPr wrap="square" rtlCol="0">
+            <a:spAutoFit/>
+          </a:bodyPr>
+          <a:lstStyle/>
+          <a:p>
+            <a:r>
+              <a:rPr lang="en-US" altLang="zh-CN" dirty="0">
+                <a:solidFill>
+                  <a:schemeClr val="accent1">
+                    <a:lumMod val="40000"/>
+                    <a:lumOff val="60000"/>
+                  </a:schemeClr>
+                </a:solidFill>
+              </a:rPr>
+              <a:t>192.168.1.21</a:t>
+            </a:r>
+            <a:endParaRPr lang="zh-CN" altLang="en-US" dirty="0">
+              <a:solidFill>
+                <a:schemeClr val="accent1">
+                  <a:lumMod val="40000"/>
+                  <a:lumOff val="60000"/>
+                </a:schemeClr>
+              </a:solidFill>
+            </a:endParaRPr>
+          </a:p>
+        </p:txBody>
+      </p:sp>
+      <p:sp>
+        <p:nvSpPr>
+          <p:cNvPr id="17" name="文本框 16">
+            <a:extLst>
+              <a:ext uri="{FF2B5EF4-FFF2-40B4-BE49-F238E27FC236}">
+                <a16:creationId xmlns:a16="http://schemas.microsoft.com/office/drawing/2014/main" id="{8DDCF94B-0AB5-41AB-9D58-C821ABA6BD68}"/>
+              </a:ext>
+            </a:extLst>
+          </p:cNvPr>
+          <p:cNvSpPr txBox="1"/>
+          <p:nvPr/>
+        </p:nvSpPr>
+        <p:spPr>
+          <a:xfrm>
+            <a:off x="6836661" y="5354229"/>
+            <a:ext cx="1593908" cy="369332"/>
+          </a:xfrm>
+          <a:prstGeom prst="rect">
+            <a:avLst/>
+          </a:prstGeom>
+          <a:noFill/>
+        </p:spPr>
+        <p:txBody>
+          <a:bodyPr wrap="square" rtlCol="0">
+            <a:spAutoFit/>
+          </a:bodyPr>
+          <a:lstStyle/>
+          <a:p>
+            <a:r>
+              <a:rPr lang="en-US" altLang="zh-CN" dirty="0">
+                <a:solidFill>
+                  <a:schemeClr val="accent1">
+                    <a:lumMod val="40000"/>
+                    <a:lumOff val="60000"/>
+                  </a:schemeClr>
+                </a:solidFill>
+              </a:rPr>
+              <a:t>192.168.1.22</a:t>
+            </a:r>
+            <a:endParaRPr lang="zh-CN" altLang="en-US" dirty="0">
+              <a:solidFill>
+                <a:schemeClr val="accent1">
+                  <a:lumMod val="40000"/>
+                  <a:lumOff val="60000"/>
+                </a:schemeClr>
+              </a:solidFill>
+            </a:endParaRPr>
+          </a:p>
+        </p:txBody>
+      </p:sp>
+      <p:sp>
+        <p:nvSpPr>
+          <p:cNvPr id="20" name="矩形 19">
+            <a:extLst>
+              <a:ext uri="{FF2B5EF4-FFF2-40B4-BE49-F238E27FC236}">
+                <a16:creationId xmlns:a16="http://schemas.microsoft.com/office/drawing/2014/main" id="{C6CD64A8-8845-4874-A05E-C2B8EAC2BF1B}"/>
+              </a:ext>
+            </a:extLst>
+          </p:cNvPr>
+          <p:cNvSpPr/>
+          <p:nvPr/>
+        </p:nvSpPr>
+        <p:spPr>
+          <a:xfrm>
+            <a:off x="3034202" y="2145932"/>
+            <a:ext cx="308208" cy="445371"/>
+          </a:xfrm>
+          <a:prstGeom prst="rect">
+            <a:avLst/>
+          </a:prstGeom>
+        </p:spPr>
+        <p:style>
+          <a:lnRef idx="3">
+            <a:schemeClr val="lt1"/>
+          </a:lnRef>
+          <a:fillRef idx="1">
+            <a:schemeClr val="accent3"/>
+          </a:fillRef>
+          <a:effectRef idx="1">
+            <a:schemeClr val="accent3"/>
+          </a:effectRef>
+          <a:fontRef idx="minor">
+            <a:schemeClr val="lt1"/>
+          </a:fontRef>
+        </p:style>
+        <p:txBody>
+          <a:bodyPr rtlCol="0" anchor="ctr"/>
+          <a:lstStyle/>
+          <a:p>
+            <a:pPr algn="ctr"/>
+            <a:endParaRPr lang="zh-CN" altLang="en-US">
+              <a:solidFill>
+                <a:schemeClr val="accent1">
+                  <a:lumMod val="40000"/>
+                  <a:lumOff val="60000"/>
+                </a:schemeClr>
+              </a:solidFill>
+            </a:endParaRPr>
+          </a:p>
+        </p:txBody>
+      </p:sp>
+      <p:sp>
+        <p:nvSpPr>
+          <p:cNvPr id="22" name="矩形 21">
+            <a:extLst>
+              <a:ext uri="{FF2B5EF4-FFF2-40B4-BE49-F238E27FC236}">
+                <a16:creationId xmlns:a16="http://schemas.microsoft.com/office/drawing/2014/main" id="{7BDAA7C7-2A2E-4D45-9253-2391000C81F6}"/>
+              </a:ext>
+            </a:extLst>
+          </p:cNvPr>
+          <p:cNvSpPr/>
+          <p:nvPr/>
+        </p:nvSpPr>
+        <p:spPr>
+          <a:xfrm>
+            <a:off x="3011404" y="4317856"/>
+            <a:ext cx="308208" cy="445371"/>
+          </a:xfrm>
+          <a:prstGeom prst="rect">
+            <a:avLst/>
+          </a:prstGeom>
+        </p:spPr>
+        <p:style>
+          <a:lnRef idx="3">
+            <a:schemeClr val="lt1"/>
+          </a:lnRef>
+          <a:fillRef idx="1">
+            <a:schemeClr val="accent3"/>
+          </a:fillRef>
+          <a:effectRef idx="1">
+            <a:schemeClr val="accent3"/>
+          </a:effectRef>
+          <a:fontRef idx="minor">
+            <a:schemeClr val="lt1"/>
+          </a:fontRef>
+        </p:style>
+        <p:txBody>
+          <a:bodyPr rtlCol="0" anchor="ctr"/>
+          <a:lstStyle/>
+          <a:p>
+            <a:pPr algn="ctr"/>
+            <a:endParaRPr lang="zh-CN" altLang="en-US">
+              <a:solidFill>
+                <a:schemeClr val="accent1">
+                  <a:lumMod val="40000"/>
+                  <a:lumOff val="60000"/>
+                </a:schemeClr>
+              </a:solidFill>
+            </a:endParaRPr>
+          </a:p>
+        </p:txBody>
+      </p:sp>
+      <p:sp>
+        <p:nvSpPr>
+          <p:cNvPr id="24" name="矩形 23">
+            <a:extLst>
+              <a:ext uri="{FF2B5EF4-FFF2-40B4-BE49-F238E27FC236}">
+                <a16:creationId xmlns:a16="http://schemas.microsoft.com/office/drawing/2014/main" id="{BF126198-072A-4EFE-A3A7-876FEF483119}"/>
+              </a:ext>
+            </a:extLst>
+          </p:cNvPr>
+          <p:cNvSpPr/>
+          <p:nvPr/>
+        </p:nvSpPr>
+        <p:spPr>
+          <a:xfrm>
+            <a:off x="8449531" y="2129660"/>
+            <a:ext cx="308208" cy="445371"/>
+          </a:xfrm>
+          <a:prstGeom prst="rect">
+            <a:avLst/>
+          </a:prstGeom>
+        </p:spPr>
+        <p:style>
+          <a:lnRef idx="3">
+            <a:schemeClr val="lt1"/>
+          </a:lnRef>
+          <a:fillRef idx="1">
+            <a:schemeClr val="accent3"/>
+          </a:fillRef>
+          <a:effectRef idx="1">
+            <a:schemeClr val="accent3"/>
+          </a:effectRef>
+          <a:fontRef idx="minor">
+            <a:schemeClr val="lt1"/>
+          </a:fontRef>
+        </p:style>
+        <p:txBody>
+          <a:bodyPr rtlCol="0" anchor="ctr"/>
+          <a:lstStyle/>
+          <a:p>
+            <a:pPr algn="ctr"/>
+            <a:endParaRPr lang="zh-CN" altLang="en-US">
+              <a:solidFill>
+                <a:schemeClr val="accent1">
+                  <a:lumMod val="40000"/>
+                  <a:lumOff val="60000"/>
+                </a:schemeClr>
+              </a:solidFill>
+            </a:endParaRPr>
+          </a:p>
+        </p:txBody>
+      </p:sp>
+      <p:sp>
+        <p:nvSpPr>
+          <p:cNvPr id="28" name="矩形 27">
+            <a:extLst>
+              <a:ext uri="{FF2B5EF4-FFF2-40B4-BE49-F238E27FC236}">
+                <a16:creationId xmlns:a16="http://schemas.microsoft.com/office/drawing/2014/main" id="{A1A9E17B-3FE9-4F4C-AD60-CDF67BD6926B}"/>
+              </a:ext>
+            </a:extLst>
+          </p:cNvPr>
+          <p:cNvSpPr/>
+          <p:nvPr/>
+        </p:nvSpPr>
+        <p:spPr>
+          <a:xfrm>
+            <a:off x="8462049" y="4260045"/>
+            <a:ext cx="308208" cy="445371"/>
+          </a:xfrm>
+          <a:prstGeom prst="rect">
+            <a:avLst/>
+          </a:prstGeom>
+        </p:spPr>
+        <p:style>
+          <a:lnRef idx="3">
+            <a:schemeClr val="lt1"/>
+          </a:lnRef>
+          <a:fillRef idx="1">
+            <a:schemeClr val="accent3"/>
+          </a:fillRef>
+          <a:effectRef idx="1">
+            <a:schemeClr val="accent3"/>
+          </a:effectRef>
+          <a:fontRef idx="minor">
+            <a:schemeClr val="lt1"/>
+          </a:fontRef>
+        </p:style>
+        <p:txBody>
+          <a:bodyPr rtlCol="0" anchor="ctr"/>
+          <a:lstStyle/>
+          <a:p>
+            <a:pPr algn="ctr"/>
+            <a:endParaRPr lang="zh-CN" altLang="en-US">
+              <a:solidFill>
+                <a:schemeClr val="accent1">
+                  <a:lumMod val="40000"/>
+                  <a:lumOff val="60000"/>
+                </a:schemeClr>
+              </a:solidFill>
+            </a:endParaRPr>
+          </a:p>
+        </p:txBody>
+      </p:sp>
+      <p:sp>
+        <p:nvSpPr>
+          <p:cNvPr id="43" name="箭头: 下 42">
+            <a:extLst>
+              <a:ext uri="{FF2B5EF4-FFF2-40B4-BE49-F238E27FC236}">
+                <a16:creationId xmlns:a16="http://schemas.microsoft.com/office/drawing/2014/main" id="{B3268E59-DAB6-4F42-9623-6CC5010B5DA4}"/>
+              </a:ext>
+            </a:extLst>
+          </p:cNvPr>
+          <p:cNvSpPr/>
+          <p:nvPr/>
+        </p:nvSpPr>
+        <p:spPr>
+          <a:xfrm rot="2051220">
+            <a:off x="8841424" y="1351601"/>
+            <a:ext cx="247349" cy="793383"/>
+          </a:xfrm>
+          <a:prstGeom prst="downArrow">
+            <a:avLst/>
+          </a:prstGeom>
+        </p:spPr>
+        <p:style>
+          <a:lnRef idx="1">
+            <a:schemeClr val="accent2"/>
+          </a:lnRef>
+          <a:fillRef idx="2">
+            <a:schemeClr val="accent2"/>
+          </a:fillRef>
+          <a:effectRef idx="1">
+            <a:schemeClr val="accent2"/>
+          </a:effectRef>
+          <a:fontRef idx="minor">
+            <a:schemeClr val="dk1"/>
+          </a:fontRef>
+        </p:style>
+        <p:txBody>
+          <a:bodyPr rtlCol="0" anchor="ctr"/>
+          <a:lstStyle/>
+          <a:p>
+            <a:pPr algn="ctr"/>
+            <a:endParaRPr lang="zh-CN" altLang="en-US">
+              <a:solidFill>
+                <a:schemeClr val="accent1">
+                  <a:lumMod val="40000"/>
+                  <a:lumOff val="60000"/>
+                </a:schemeClr>
+              </a:solidFill>
+            </a:endParaRPr>
+          </a:p>
+        </p:txBody>
+      </p:sp>
+      <p:sp>
+        <p:nvSpPr>
+          <p:cNvPr id="45" name="箭头: 下 44">
+            <a:extLst>
+              <a:ext uri="{FF2B5EF4-FFF2-40B4-BE49-F238E27FC236}">
+                <a16:creationId xmlns:a16="http://schemas.microsoft.com/office/drawing/2014/main" id="{2548086D-D9FF-42BE-A3C2-704A28FE9500}"/>
+              </a:ext>
+            </a:extLst>
+          </p:cNvPr>
+          <p:cNvSpPr/>
+          <p:nvPr/>
+        </p:nvSpPr>
+        <p:spPr>
+          <a:xfrm rot="7768153">
+            <a:off x="8800686" y="4432630"/>
+            <a:ext cx="247349" cy="793383"/>
+          </a:xfrm>
+          <a:prstGeom prst="downArrow">
+            <a:avLst/>
+          </a:prstGeom>
+        </p:spPr>
+        <p:style>
+          <a:lnRef idx="1">
+            <a:schemeClr val="accent2"/>
+          </a:lnRef>
+          <a:fillRef idx="2">
+            <a:schemeClr val="accent2"/>
+          </a:fillRef>
+          <a:effectRef idx="1">
+            <a:schemeClr val="accent2"/>
+          </a:effectRef>
+          <a:fontRef idx="minor">
+            <a:schemeClr val="dk1"/>
+          </a:fontRef>
+        </p:style>
+        <p:txBody>
+          <a:bodyPr rtlCol="0" anchor="ctr"/>
+          <a:lstStyle/>
+          <a:p>
+            <a:pPr algn="ctr"/>
+            <a:endParaRPr lang="zh-CN" altLang="en-US">
+              <a:solidFill>
+                <a:schemeClr val="accent1">
+                  <a:lumMod val="40000"/>
+                  <a:lumOff val="60000"/>
+                </a:schemeClr>
+              </a:solidFill>
+            </a:endParaRPr>
+          </a:p>
+        </p:txBody>
+      </p:sp>
+      <p:sp>
+        <p:nvSpPr>
+          <p:cNvPr id="46" name="文本框 45">
+            <a:extLst>
+              <a:ext uri="{FF2B5EF4-FFF2-40B4-BE49-F238E27FC236}">
+                <a16:creationId xmlns:a16="http://schemas.microsoft.com/office/drawing/2014/main" id="{AB5A4B0F-6B63-4F4D-8E37-0A41B454E775}"/>
+              </a:ext>
+            </a:extLst>
+          </p:cNvPr>
+          <p:cNvSpPr txBox="1"/>
+          <p:nvPr/>
+        </p:nvSpPr>
+        <p:spPr>
+          <a:xfrm>
+            <a:off x="8770257" y="885545"/>
+            <a:ext cx="1358246" cy="369332"/>
+          </a:xfrm>
+          <a:prstGeom prst="rect">
+            <a:avLst/>
+          </a:prstGeom>
+          <a:noFill/>
+        </p:spPr>
+        <p:txBody>
+          <a:bodyPr wrap="square" rtlCol="0">
+            <a:spAutoFit/>
+          </a:bodyPr>
+          <a:lstStyle/>
+          <a:p>
+            <a:pPr algn="ctr"/>
+            <a:r>
+              <a:rPr lang="zh-CN" altLang="en-US" dirty="0">
+                <a:solidFill>
+                  <a:schemeClr val="accent1">
+                    <a:lumMod val="40000"/>
+                    <a:lumOff val="60000"/>
+                  </a:schemeClr>
+                </a:solidFill>
+              </a:rPr>
+              <a:t>大门</a:t>
+            </a:r>
+          </a:p>
+        </p:txBody>
+      </p:sp>
+      <p:sp>
+        <p:nvSpPr>
+          <p:cNvPr id="48" name="文本框 47">
+            <a:extLst>
+              <a:ext uri="{FF2B5EF4-FFF2-40B4-BE49-F238E27FC236}">
+                <a16:creationId xmlns:a16="http://schemas.microsoft.com/office/drawing/2014/main" id="{4A8CF20E-9871-423D-A4C2-CE7B68DA6BA6}"/>
+              </a:ext>
+            </a:extLst>
+          </p:cNvPr>
+          <p:cNvSpPr txBox="1"/>
+          <p:nvPr/>
+        </p:nvSpPr>
+        <p:spPr>
+          <a:xfrm>
+            <a:off x="8924360" y="5072415"/>
+            <a:ext cx="1358246" cy="369332"/>
+          </a:xfrm>
+          <a:prstGeom prst="rect">
+            <a:avLst/>
+          </a:prstGeom>
+          <a:noFill/>
+        </p:spPr>
+        <p:txBody>
+          <a:bodyPr wrap="square" rtlCol="0">
+            <a:spAutoFit/>
+          </a:bodyPr>
+          <a:lstStyle/>
+          <a:p>
+            <a:pPr algn="ctr"/>
+            <a:r>
+              <a:rPr lang="zh-CN" altLang="en-US" dirty="0">
+                <a:solidFill>
+                  <a:schemeClr val="accent1">
+                    <a:lumMod val="40000"/>
+                    <a:lumOff val="60000"/>
+                  </a:schemeClr>
+                </a:solidFill>
+              </a:rPr>
+              <a:t>大门</a:t>
+            </a:r>
+          </a:p>
+        </p:txBody>
+      </p:sp>
+      <p:pic>
+        <p:nvPicPr>
+          <p:cNvPr id="54" name="图片 53">
+            <a:extLst>
+              <a:ext uri="{FF2B5EF4-FFF2-40B4-BE49-F238E27FC236}">
+                <a16:creationId xmlns:a16="http://schemas.microsoft.com/office/drawing/2014/main" id="{DC876C17-2126-46F2-9936-D63E63FD84BC}"/>
+              </a:ext>
+            </a:extLst>
+          </p:cNvPr>
+          <p:cNvPicPr>
+            <a:picLocks noChangeAspect="1"/>
+          </p:cNvPicPr>
+          <p:nvPr/>
+        </p:nvPicPr>
+        <p:blipFill>
+          <a:blip r:embed="rId3" cstate="print">
+            <a:duotone>
+              <a:schemeClr val="bg2">
+                <a:shade val="45000"/>
+                <a:satMod val="135000"/>
+              </a:schemeClr>
+              <a:prstClr val="white"/>
+            </a:duotone>
+            <a:extLst>
+              <a:ext uri="{28A0092B-C50C-407E-A947-70E740481C1C}">
+                <a14:useLocalDpi xmlns:a14="http://schemas.microsoft.com/office/drawing/2010/main" val="0"/>
+              </a:ext>
+            </a:extLst>
+          </a:blip>
+          <a:stretch>
+            <a:fillRect/>
+          </a:stretch>
+        </p:blipFill>
+        <p:spPr>
+          <a:xfrm>
+            <a:off x="5301240" y="4727157"/>
+            <a:ext cx="996404" cy="996404"/>
+          </a:xfrm>
+          <a:prstGeom prst="rect">
+            <a:avLst/>
+          </a:prstGeom>
+        </p:spPr>
+      </p:pic>
+    </p:spTree>
+    <p:extLst>
+      <p:ext uri="{BB962C8B-B14F-4D97-AF65-F5344CB8AC3E}">
+        <p14:creationId xmlns:p14="http://schemas.microsoft.com/office/powerpoint/2010/main" val="2816012182"/>
+      </p:ext>
+    </p:extLst>
+  </p:cSld>
+  <p:clrMapOvr>
+    <a:masterClrMapping/>
+  </p:clrMapOvr>
+</p:sld>
+</file>
+
+<file path=ppt/slides/slide15.xml><?xml version="1.0" encoding="utf-8"?>
+<p:sld xmlns:a="http://schemas.openxmlformats.org/drawingml/2006/main" xmlns:r="http://schemas.openxmlformats.org/officeDocument/2006/relationships" xmlns:p="http://schemas.openxmlformats.org/presentationml/2006/main">
+  <p:cSld>
+    <p:spTree>
+      <p:nvGrpSpPr>
+        <p:cNvPr id="1" name=""/>
+        <p:cNvGrpSpPr/>
+        <p:nvPr/>
+      </p:nvGrpSpPr>
+      <p:grpSpPr>
+        <a:xfrm>
+          <a:off x="0" y="0"/>
+          <a:ext cx="0" cy="0"/>
+          <a:chOff x="0" y="0"/>
+          <a:chExt cx="0" cy="0"/>
+        </a:xfrm>
+      </p:grpSpPr>
+      <p:pic>
+        <p:nvPicPr>
+          <p:cNvPr id="7" name="图片 6">
+            <a:extLst>
+              <a:ext uri="{FF2B5EF4-FFF2-40B4-BE49-F238E27FC236}">
+                <a16:creationId xmlns:a16="http://schemas.microsoft.com/office/drawing/2014/main" id="{2B97FE3F-2C75-4288-8E60-7650D62BF1B0}"/>
+              </a:ext>
+            </a:extLst>
+          </p:cNvPr>
+          <p:cNvPicPr/>
+          <p:nvPr/>
+        </p:nvPicPr>
+        <p:blipFill>
+          <a:blip r:embed="rId2"/>
+          <a:stretch>
+            <a:fillRect/>
+          </a:stretch>
+        </p:blipFill>
+        <p:spPr>
+          <a:xfrm>
+            <a:off x="0" y="0"/>
+            <a:ext cx="12192000" cy="6858000"/>
+          </a:xfrm>
+          <a:prstGeom prst="rect">
+            <a:avLst/>
+          </a:prstGeom>
+        </p:spPr>
+      </p:pic>
+      <p:sp>
+        <p:nvSpPr>
+          <p:cNvPr id="2" name="标题 1"/>
+          <p:cNvSpPr>
+            <a:spLocks noGrp="1"/>
+          </p:cNvSpPr>
+          <p:nvPr>
+            <p:ph type="title"/>
+          </p:nvPr>
+        </p:nvSpPr>
+        <p:spPr>
+          <a:xfrm>
+            <a:off x="1899284" y="2766060"/>
             <a:ext cx="8393430" cy="1325880"/>
           </a:xfrm>
         </p:spPr>
@@ -3088,14 +5084,1436 @@
           </a:bodyPr>
           <a:lstStyle/>
           <a:p>
-            <a:r>
-              <a:rPr lang="zh-CN" altLang="en-US" sz="2400" dirty="0"/>
-              <a:t>结论：在一个地址下两台计算机之间是不可能同时进行有线传输和无线传输，所以无法比较如果两个电脑同时进行有线连接和无线连接同时连接，两个电脑之间会采取哪种运输方式。</a:t>
+            <a:pPr algn="ctr"/>
+            <a:r>
+              <a:rPr lang="zh-CN" altLang="en-US" sz="2400" dirty="0">
+                <a:solidFill>
+                  <a:schemeClr val="accent1">
+                    <a:lumMod val="40000"/>
+                    <a:lumOff val="60000"/>
+                  </a:schemeClr>
+                </a:solidFill>
+              </a:rPr>
+              <a:t>因为</a:t>
+            </a:r>
+            <a:r>
+              <a:rPr lang="en-US" altLang="zh-CN" sz="2400" dirty="0">
+                <a:solidFill>
+                  <a:schemeClr val="accent1">
+                    <a:lumMod val="40000"/>
+                    <a:lumOff val="60000"/>
+                  </a:schemeClr>
+                </a:solidFill>
+              </a:rPr>
+              <a:t>IP</a:t>
+            </a:r>
+            <a:r>
+              <a:rPr lang="zh-CN" altLang="en-US" sz="2400" dirty="0">
+                <a:solidFill>
+                  <a:schemeClr val="accent1">
+                    <a:lumMod val="40000"/>
+                    <a:lumOff val="60000"/>
+                  </a:schemeClr>
+                </a:solidFill>
+              </a:rPr>
+              <a:t>地址的唯一性，在访问之前就决定了访问的方式，两个电脑之间会采取哪种运输方式。</a:t>
+            </a:r>
+          </a:p>
+        </p:txBody>
+      </p:sp>
+      <p:sp>
+        <p:nvSpPr>
+          <p:cNvPr id="3" name="文本框 2">
+            <a:extLst>
+              <a:ext uri="{FF2B5EF4-FFF2-40B4-BE49-F238E27FC236}">
+                <a16:creationId xmlns:a16="http://schemas.microsoft.com/office/drawing/2014/main" id="{C32F99DC-CF66-40DB-AF8D-AE18B66B0D04}"/>
+              </a:ext>
+            </a:extLst>
+          </p:cNvPr>
+          <p:cNvSpPr txBox="1"/>
+          <p:nvPr/>
+        </p:nvSpPr>
+        <p:spPr>
+          <a:xfrm>
+            <a:off x="5135459" y="872455"/>
+            <a:ext cx="1921079" cy="769441"/>
+          </a:xfrm>
+          <a:prstGeom prst="rect">
+            <a:avLst/>
+          </a:prstGeom>
+          <a:noFill/>
+        </p:spPr>
+        <p:txBody>
+          <a:bodyPr wrap="square" rtlCol="0">
+            <a:spAutoFit/>
+          </a:bodyPr>
+          <a:lstStyle/>
+          <a:p>
+            <a:pPr algn="ctr"/>
+            <a:r>
+              <a:rPr lang="zh-CN" altLang="en-US" sz="4400" dirty="0">
+                <a:solidFill>
+                  <a:schemeClr val="tx2">
+                    <a:lumMod val="60000"/>
+                    <a:lumOff val="40000"/>
+                  </a:schemeClr>
+                </a:solidFill>
+              </a:rPr>
+              <a:t>结论</a:t>
             </a:r>
           </a:p>
         </p:txBody>
       </p:sp>
     </p:spTree>
+  </p:cSld>
+  <p:clrMapOvr>
+    <a:masterClrMapping/>
+  </p:clrMapOvr>
+</p:sld>
+</file>
+
+<file path=ppt/slides/slide16.xml><?xml version="1.0" encoding="utf-8"?>
+<p:sld xmlns:a="http://schemas.openxmlformats.org/drawingml/2006/main" xmlns:r="http://schemas.openxmlformats.org/officeDocument/2006/relationships" xmlns:p="http://schemas.openxmlformats.org/presentationml/2006/main">
+  <p:cSld>
+    <p:spTree>
+      <p:nvGrpSpPr>
+        <p:cNvPr id="1" name=""/>
+        <p:cNvGrpSpPr/>
+        <p:nvPr/>
+      </p:nvGrpSpPr>
+      <p:grpSpPr>
+        <a:xfrm>
+          <a:off x="0" y="0"/>
+          <a:ext cx="0" cy="0"/>
+          <a:chOff x="0" y="0"/>
+          <a:chExt cx="0" cy="0"/>
+        </a:xfrm>
+      </p:grpSpPr>
+      <p:pic>
+        <p:nvPicPr>
+          <p:cNvPr id="12" name="图片 11">
+            <a:extLst>
+              <a:ext uri="{FF2B5EF4-FFF2-40B4-BE49-F238E27FC236}">
+                <a16:creationId xmlns:a16="http://schemas.microsoft.com/office/drawing/2014/main" id="{09E8FC01-8EA8-4068-82A3-44F01C23C509}"/>
+              </a:ext>
+            </a:extLst>
+          </p:cNvPr>
+          <p:cNvPicPr/>
+          <p:nvPr/>
+        </p:nvPicPr>
+        <p:blipFill>
+          <a:blip r:embed="rId2"/>
+          <a:stretch>
+            <a:fillRect/>
+          </a:stretch>
+        </p:blipFill>
+        <p:spPr>
+          <a:xfrm>
+            <a:off x="0" y="0"/>
+            <a:ext cx="12192000" cy="6858000"/>
+          </a:xfrm>
+          <a:prstGeom prst="rect">
+            <a:avLst/>
+          </a:prstGeom>
+        </p:spPr>
+      </p:pic>
+      <p:sp>
+        <p:nvSpPr>
+          <p:cNvPr id="6" name="矩形 5">
+            <a:extLst>
+              <a:ext uri="{FF2B5EF4-FFF2-40B4-BE49-F238E27FC236}">
+                <a16:creationId xmlns:a16="http://schemas.microsoft.com/office/drawing/2014/main" id="{20D6983C-FA3E-42DB-9E83-79552C0F3811}"/>
+              </a:ext>
+            </a:extLst>
+          </p:cNvPr>
+          <p:cNvSpPr/>
+          <p:nvPr/>
+        </p:nvSpPr>
+        <p:spPr>
+          <a:xfrm>
+            <a:off x="2242656" y="1825625"/>
+            <a:ext cx="1442907" cy="3031601"/>
+          </a:xfrm>
+          <a:prstGeom prst="rect">
+            <a:avLst/>
+          </a:prstGeom>
+        </p:spPr>
+        <p:style>
+          <a:lnRef idx="2">
+            <a:schemeClr val="accent1">
+              <a:shade val="50000"/>
+            </a:schemeClr>
+          </a:lnRef>
+          <a:fillRef idx="1">
+            <a:schemeClr val="accent1"/>
+          </a:fillRef>
+          <a:effectRef idx="0">
+            <a:schemeClr val="accent1"/>
+          </a:effectRef>
+          <a:fontRef idx="minor">
+            <a:schemeClr val="lt1"/>
+          </a:fontRef>
+        </p:style>
+        <p:txBody>
+          <a:bodyPr rtlCol="0" anchor="ctr"/>
+          <a:lstStyle/>
+          <a:p>
+            <a:pPr algn="ctr"/>
+            <a:endParaRPr lang="zh-CN" altLang="en-US">
+              <a:solidFill>
+                <a:schemeClr val="accent1">
+                  <a:lumMod val="40000"/>
+                  <a:lumOff val="60000"/>
+                </a:schemeClr>
+              </a:solidFill>
+            </a:endParaRPr>
+          </a:p>
+        </p:txBody>
+      </p:sp>
+      <p:sp>
+        <p:nvSpPr>
+          <p:cNvPr id="8" name="矩形 7">
+            <a:extLst>
+              <a:ext uri="{FF2B5EF4-FFF2-40B4-BE49-F238E27FC236}">
+                <a16:creationId xmlns:a16="http://schemas.microsoft.com/office/drawing/2014/main" id="{66FD494A-8A44-415C-A68A-ADA3007634E1}"/>
+              </a:ext>
+            </a:extLst>
+          </p:cNvPr>
+          <p:cNvSpPr/>
+          <p:nvPr/>
+        </p:nvSpPr>
+        <p:spPr>
+          <a:xfrm>
+            <a:off x="8265954" y="1825625"/>
+            <a:ext cx="1442907" cy="3031601"/>
+          </a:xfrm>
+          <a:prstGeom prst="rect">
+            <a:avLst/>
+          </a:prstGeom>
+        </p:spPr>
+        <p:style>
+          <a:lnRef idx="2">
+            <a:schemeClr val="accent1">
+              <a:shade val="50000"/>
+            </a:schemeClr>
+          </a:lnRef>
+          <a:fillRef idx="1">
+            <a:schemeClr val="accent1"/>
+          </a:fillRef>
+          <a:effectRef idx="0">
+            <a:schemeClr val="accent1"/>
+          </a:effectRef>
+          <a:fontRef idx="minor">
+            <a:schemeClr val="lt1"/>
+          </a:fontRef>
+        </p:style>
+        <p:txBody>
+          <a:bodyPr rtlCol="0" anchor="ctr"/>
+          <a:lstStyle/>
+          <a:p>
+            <a:pPr algn="ctr"/>
+            <a:endParaRPr lang="zh-CN" altLang="en-US">
+              <a:solidFill>
+                <a:schemeClr val="accent1">
+                  <a:lumMod val="40000"/>
+                  <a:lumOff val="60000"/>
+                </a:schemeClr>
+              </a:solidFill>
+            </a:endParaRPr>
+          </a:p>
+        </p:txBody>
+      </p:sp>
+      <p:cxnSp>
+        <p:nvCxnSpPr>
+          <p:cNvPr id="10" name="直接连接符 9">
+            <a:extLst>
+              <a:ext uri="{FF2B5EF4-FFF2-40B4-BE49-F238E27FC236}">
+                <a16:creationId xmlns:a16="http://schemas.microsoft.com/office/drawing/2014/main" id="{7FBCFEFA-FD7C-40BB-B2C4-FF6BFEB59DA0}"/>
+              </a:ext>
+            </a:extLst>
+          </p:cNvPr>
+          <p:cNvCxnSpPr/>
+          <p:nvPr/>
+        </p:nvCxnSpPr>
+        <p:spPr>
+          <a:xfrm>
+            <a:off x="3204594" y="2365695"/>
+            <a:ext cx="5301843" cy="0"/>
+          </a:xfrm>
+          <a:prstGeom prst="line">
+            <a:avLst/>
+          </a:prstGeom>
+        </p:spPr>
+        <p:style>
+          <a:lnRef idx="3">
+            <a:schemeClr val="dk1"/>
+          </a:lnRef>
+          <a:fillRef idx="0">
+            <a:schemeClr val="dk1"/>
+          </a:fillRef>
+          <a:effectRef idx="2">
+            <a:schemeClr val="dk1"/>
+          </a:effectRef>
+          <a:fontRef idx="minor">
+            <a:schemeClr val="tx1"/>
+          </a:fontRef>
+        </p:style>
+      </p:cxnSp>
+      <p:cxnSp>
+        <p:nvCxnSpPr>
+          <p:cNvPr id="14" name="直接连接符 13">
+            <a:extLst>
+              <a:ext uri="{FF2B5EF4-FFF2-40B4-BE49-F238E27FC236}">
+                <a16:creationId xmlns:a16="http://schemas.microsoft.com/office/drawing/2014/main" id="{4D0281A1-9997-498C-979C-5CD443B8EEB8}"/>
+              </a:ext>
+            </a:extLst>
+          </p:cNvPr>
+          <p:cNvCxnSpPr>
+            <a:cxnSpLocks/>
+          </p:cNvCxnSpPr>
+          <p:nvPr/>
+        </p:nvCxnSpPr>
+        <p:spPr>
+          <a:xfrm>
+            <a:off x="3204593" y="4545647"/>
+            <a:ext cx="5301843" cy="0"/>
+          </a:xfrm>
+          <a:prstGeom prst="line">
+            <a:avLst/>
+          </a:prstGeom>
+          <a:ln w="9525" cap="flat" cmpd="sng" algn="ctr">
+            <a:solidFill>
+              <a:schemeClr val="dk1"/>
+            </a:solidFill>
+            <a:prstDash val="dash"/>
+            <a:round/>
+            <a:headEnd type="none" w="med" len="med"/>
+            <a:tailEnd type="none" w="med" len="med"/>
+          </a:ln>
+        </p:spPr>
+        <p:style>
+          <a:lnRef idx="0">
+            <a:scrgbClr r="0" g="0" b="0"/>
+          </a:lnRef>
+          <a:fillRef idx="0">
+            <a:scrgbClr r="0" g="0" b="0"/>
+          </a:fillRef>
+          <a:effectRef idx="0">
+            <a:scrgbClr r="0" g="0" b="0"/>
+          </a:effectRef>
+          <a:fontRef idx="minor">
+            <a:schemeClr val="tx1"/>
+          </a:fontRef>
+        </p:style>
+      </p:cxnSp>
+      <p:sp>
+        <p:nvSpPr>
+          <p:cNvPr id="19" name="文本框 18">
+            <a:extLst>
+              <a:ext uri="{FF2B5EF4-FFF2-40B4-BE49-F238E27FC236}">
+                <a16:creationId xmlns:a16="http://schemas.microsoft.com/office/drawing/2014/main" id="{CB635EFC-938A-486D-9E5B-D19D6B2AB125}"/>
+              </a:ext>
+            </a:extLst>
+          </p:cNvPr>
+          <p:cNvSpPr txBox="1"/>
+          <p:nvPr/>
+        </p:nvSpPr>
+        <p:spPr>
+          <a:xfrm>
+            <a:off x="3685563" y="1928895"/>
+            <a:ext cx="1435008" cy="369332"/>
+          </a:xfrm>
+          <a:prstGeom prst="rect">
+            <a:avLst/>
+          </a:prstGeom>
+          <a:noFill/>
+        </p:spPr>
+        <p:txBody>
+          <a:bodyPr wrap="none" rtlCol="0">
+            <a:spAutoFit/>
+          </a:bodyPr>
+          <a:lstStyle/>
+          <a:p>
+            <a:r>
+              <a:rPr lang="en-US" altLang="zh-CN" dirty="0">
+                <a:solidFill>
+                  <a:schemeClr val="accent1">
+                    <a:lumMod val="40000"/>
+                    <a:lumOff val="60000"/>
+                  </a:schemeClr>
+                </a:solidFill>
+              </a:rPr>
+              <a:t>192.168.1.11</a:t>
+            </a:r>
+            <a:endParaRPr lang="zh-CN" altLang="en-US" dirty="0">
+              <a:solidFill>
+                <a:schemeClr val="accent1">
+                  <a:lumMod val="40000"/>
+                  <a:lumOff val="60000"/>
+                </a:schemeClr>
+              </a:solidFill>
+            </a:endParaRPr>
+          </a:p>
+        </p:txBody>
+      </p:sp>
+      <p:sp>
+        <p:nvSpPr>
+          <p:cNvPr id="23" name="文本框 22">
+            <a:extLst>
+              <a:ext uri="{FF2B5EF4-FFF2-40B4-BE49-F238E27FC236}">
+                <a16:creationId xmlns:a16="http://schemas.microsoft.com/office/drawing/2014/main" id="{CA2A2B83-4D6B-4902-9FD1-DEA707C40560}"/>
+              </a:ext>
+            </a:extLst>
+          </p:cNvPr>
+          <p:cNvSpPr txBox="1"/>
+          <p:nvPr/>
+        </p:nvSpPr>
+        <p:spPr>
+          <a:xfrm>
+            <a:off x="6828762" y="1910994"/>
+            <a:ext cx="1435008" cy="369332"/>
+          </a:xfrm>
+          <a:prstGeom prst="rect">
+            <a:avLst/>
+          </a:prstGeom>
+          <a:noFill/>
+        </p:spPr>
+        <p:txBody>
+          <a:bodyPr wrap="none" rtlCol="0">
+            <a:spAutoFit/>
+          </a:bodyPr>
+          <a:lstStyle/>
+          <a:p>
+            <a:r>
+              <a:rPr lang="en-US" altLang="zh-CN" dirty="0">
+                <a:solidFill>
+                  <a:schemeClr val="accent1">
+                    <a:lumMod val="40000"/>
+                    <a:lumOff val="60000"/>
+                  </a:schemeClr>
+                </a:solidFill>
+              </a:rPr>
+              <a:t>192.168.1.12</a:t>
+            </a:r>
+            <a:endParaRPr lang="zh-CN" altLang="en-US" dirty="0">
+              <a:solidFill>
+                <a:schemeClr val="accent1">
+                  <a:lumMod val="40000"/>
+                  <a:lumOff val="60000"/>
+                </a:schemeClr>
+              </a:solidFill>
+            </a:endParaRPr>
+          </a:p>
+        </p:txBody>
+      </p:sp>
+      <p:sp>
+        <p:nvSpPr>
+          <p:cNvPr id="26" name="文本框 25">
+            <a:extLst>
+              <a:ext uri="{FF2B5EF4-FFF2-40B4-BE49-F238E27FC236}">
+                <a16:creationId xmlns:a16="http://schemas.microsoft.com/office/drawing/2014/main" id="{5D65D36F-9FDE-4A8B-98C7-7635AC7BD167}"/>
+              </a:ext>
+            </a:extLst>
+          </p:cNvPr>
+          <p:cNvSpPr txBox="1"/>
+          <p:nvPr/>
+        </p:nvSpPr>
+        <p:spPr>
+          <a:xfrm>
+            <a:off x="2567031" y="2860646"/>
+            <a:ext cx="436228" cy="369332"/>
+          </a:xfrm>
+          <a:prstGeom prst="rect">
+            <a:avLst/>
+          </a:prstGeom>
+          <a:noFill/>
+        </p:spPr>
+        <p:txBody>
+          <a:bodyPr wrap="square" rtlCol="0">
+            <a:spAutoFit/>
+          </a:bodyPr>
+          <a:lstStyle/>
+          <a:p>
+            <a:endParaRPr lang="zh-CN" altLang="en-US" dirty="0">
+              <a:solidFill>
+                <a:schemeClr val="accent1">
+                  <a:lumMod val="40000"/>
+                  <a:lumOff val="60000"/>
+                </a:schemeClr>
+              </a:solidFill>
+            </a:endParaRPr>
+          </a:p>
+        </p:txBody>
+      </p:sp>
+      <p:sp>
+        <p:nvSpPr>
+          <p:cNvPr id="30" name="文本框 29">
+            <a:extLst>
+              <a:ext uri="{FF2B5EF4-FFF2-40B4-BE49-F238E27FC236}">
+                <a16:creationId xmlns:a16="http://schemas.microsoft.com/office/drawing/2014/main" id="{01C5441B-1346-40DC-A5B7-F8622BE264F0}"/>
+              </a:ext>
+            </a:extLst>
+          </p:cNvPr>
+          <p:cNvSpPr txBox="1"/>
+          <p:nvPr/>
+        </p:nvSpPr>
+        <p:spPr>
+          <a:xfrm>
+            <a:off x="1154530" y="2785813"/>
+            <a:ext cx="897746" cy="369332"/>
+          </a:xfrm>
+          <a:prstGeom prst="rect">
+            <a:avLst/>
+          </a:prstGeom>
+          <a:noFill/>
+        </p:spPr>
+        <p:txBody>
+          <a:bodyPr wrap="square" rtlCol="0">
+            <a:spAutoFit/>
+          </a:bodyPr>
+          <a:lstStyle/>
+          <a:p>
+            <a:r>
+              <a:rPr lang="zh-CN" altLang="en-US" dirty="0">
+                <a:solidFill>
+                  <a:schemeClr val="accent1">
+                    <a:lumMod val="40000"/>
+                    <a:lumOff val="60000"/>
+                  </a:schemeClr>
+                </a:solidFill>
+              </a:rPr>
+              <a:t>笔记本</a:t>
+            </a:r>
+          </a:p>
+        </p:txBody>
+      </p:sp>
+      <p:sp>
+        <p:nvSpPr>
+          <p:cNvPr id="32" name="文本框 31">
+            <a:extLst>
+              <a:ext uri="{FF2B5EF4-FFF2-40B4-BE49-F238E27FC236}">
+                <a16:creationId xmlns:a16="http://schemas.microsoft.com/office/drawing/2014/main" id="{27F1E09F-4E90-44A5-84EC-818E13F973E3}"/>
+              </a:ext>
+            </a:extLst>
+          </p:cNvPr>
+          <p:cNvSpPr txBox="1"/>
+          <p:nvPr/>
+        </p:nvSpPr>
+        <p:spPr>
+          <a:xfrm>
+            <a:off x="9949344" y="2933134"/>
+            <a:ext cx="897746" cy="369332"/>
+          </a:xfrm>
+          <a:prstGeom prst="rect">
+            <a:avLst/>
+          </a:prstGeom>
+          <a:noFill/>
+        </p:spPr>
+        <p:txBody>
+          <a:bodyPr wrap="square" rtlCol="0">
+            <a:spAutoFit/>
+          </a:bodyPr>
+          <a:lstStyle/>
+          <a:p>
+            <a:r>
+              <a:rPr lang="zh-CN" altLang="en-US" dirty="0">
+                <a:solidFill>
+                  <a:schemeClr val="accent1">
+                    <a:lumMod val="40000"/>
+                    <a:lumOff val="60000"/>
+                  </a:schemeClr>
+                </a:solidFill>
+              </a:rPr>
+              <a:t>台式</a:t>
+            </a:r>
+          </a:p>
+        </p:txBody>
+      </p:sp>
+      <p:sp>
+        <p:nvSpPr>
+          <p:cNvPr id="13" name="文本框 12">
+            <a:extLst>
+              <a:ext uri="{FF2B5EF4-FFF2-40B4-BE49-F238E27FC236}">
+                <a16:creationId xmlns:a16="http://schemas.microsoft.com/office/drawing/2014/main" id="{19146187-EE78-4EF1-BDF5-AA5548D4E9BE}"/>
+              </a:ext>
+            </a:extLst>
+          </p:cNvPr>
+          <p:cNvSpPr txBox="1"/>
+          <p:nvPr/>
+        </p:nvSpPr>
+        <p:spPr>
+          <a:xfrm>
+            <a:off x="3702281" y="4071534"/>
+            <a:ext cx="1593908" cy="369332"/>
+          </a:xfrm>
+          <a:prstGeom prst="rect">
+            <a:avLst/>
+          </a:prstGeom>
+          <a:noFill/>
+        </p:spPr>
+        <p:txBody>
+          <a:bodyPr wrap="square" rtlCol="0">
+            <a:spAutoFit/>
+          </a:bodyPr>
+          <a:lstStyle/>
+          <a:p>
+            <a:r>
+              <a:rPr lang="en-US" altLang="zh-CN" dirty="0">
+                <a:solidFill>
+                  <a:schemeClr val="accent1">
+                    <a:lumMod val="40000"/>
+                    <a:lumOff val="60000"/>
+                  </a:schemeClr>
+                </a:solidFill>
+              </a:rPr>
+              <a:t>192.168.1.21</a:t>
+            </a:r>
+            <a:endParaRPr lang="zh-CN" altLang="en-US" dirty="0">
+              <a:solidFill>
+                <a:schemeClr val="accent1">
+                  <a:lumMod val="40000"/>
+                  <a:lumOff val="60000"/>
+                </a:schemeClr>
+              </a:solidFill>
+            </a:endParaRPr>
+          </a:p>
+        </p:txBody>
+      </p:sp>
+      <p:sp>
+        <p:nvSpPr>
+          <p:cNvPr id="17" name="文本框 16">
+            <a:extLst>
+              <a:ext uri="{FF2B5EF4-FFF2-40B4-BE49-F238E27FC236}">
+                <a16:creationId xmlns:a16="http://schemas.microsoft.com/office/drawing/2014/main" id="{8DDCF94B-0AB5-41AB-9D58-C821ABA6BD68}"/>
+              </a:ext>
+            </a:extLst>
+          </p:cNvPr>
+          <p:cNvSpPr txBox="1"/>
+          <p:nvPr/>
+        </p:nvSpPr>
+        <p:spPr>
+          <a:xfrm>
+            <a:off x="6828762" y="4075105"/>
+            <a:ext cx="1593908" cy="369332"/>
+          </a:xfrm>
+          <a:prstGeom prst="rect">
+            <a:avLst/>
+          </a:prstGeom>
+          <a:noFill/>
+        </p:spPr>
+        <p:txBody>
+          <a:bodyPr wrap="square" rtlCol="0">
+            <a:spAutoFit/>
+          </a:bodyPr>
+          <a:lstStyle/>
+          <a:p>
+            <a:r>
+              <a:rPr lang="en-US" altLang="zh-CN" dirty="0">
+                <a:solidFill>
+                  <a:schemeClr val="accent1">
+                    <a:lumMod val="40000"/>
+                    <a:lumOff val="60000"/>
+                  </a:schemeClr>
+                </a:solidFill>
+              </a:rPr>
+              <a:t>192.168.1.22</a:t>
+            </a:r>
+            <a:endParaRPr lang="zh-CN" altLang="en-US" dirty="0">
+              <a:solidFill>
+                <a:schemeClr val="accent1">
+                  <a:lumMod val="40000"/>
+                  <a:lumOff val="60000"/>
+                </a:schemeClr>
+              </a:solidFill>
+            </a:endParaRPr>
+          </a:p>
+        </p:txBody>
+      </p:sp>
+      <p:sp>
+        <p:nvSpPr>
+          <p:cNvPr id="20" name="矩形 19">
+            <a:extLst>
+              <a:ext uri="{FF2B5EF4-FFF2-40B4-BE49-F238E27FC236}">
+                <a16:creationId xmlns:a16="http://schemas.microsoft.com/office/drawing/2014/main" id="{C6CD64A8-8845-4874-A05E-C2B8EAC2BF1B}"/>
+              </a:ext>
+            </a:extLst>
+          </p:cNvPr>
+          <p:cNvSpPr/>
+          <p:nvPr/>
+        </p:nvSpPr>
+        <p:spPr>
+          <a:xfrm>
+            <a:off x="3034202" y="2145932"/>
+            <a:ext cx="308208" cy="445371"/>
+          </a:xfrm>
+          <a:prstGeom prst="rect">
+            <a:avLst/>
+          </a:prstGeom>
+        </p:spPr>
+        <p:style>
+          <a:lnRef idx="3">
+            <a:schemeClr val="lt1"/>
+          </a:lnRef>
+          <a:fillRef idx="1">
+            <a:schemeClr val="accent3"/>
+          </a:fillRef>
+          <a:effectRef idx="1">
+            <a:schemeClr val="accent3"/>
+          </a:effectRef>
+          <a:fontRef idx="minor">
+            <a:schemeClr val="lt1"/>
+          </a:fontRef>
+        </p:style>
+        <p:txBody>
+          <a:bodyPr rtlCol="0" anchor="ctr"/>
+          <a:lstStyle/>
+          <a:p>
+            <a:pPr algn="ctr"/>
+            <a:endParaRPr lang="zh-CN" altLang="en-US">
+              <a:solidFill>
+                <a:schemeClr val="accent1">
+                  <a:lumMod val="40000"/>
+                  <a:lumOff val="60000"/>
+                </a:schemeClr>
+              </a:solidFill>
+            </a:endParaRPr>
+          </a:p>
+        </p:txBody>
+      </p:sp>
+      <p:sp>
+        <p:nvSpPr>
+          <p:cNvPr id="22" name="矩形 21">
+            <a:extLst>
+              <a:ext uri="{FF2B5EF4-FFF2-40B4-BE49-F238E27FC236}">
+                <a16:creationId xmlns:a16="http://schemas.microsoft.com/office/drawing/2014/main" id="{7BDAA7C7-2A2E-4D45-9253-2391000C81F6}"/>
+              </a:ext>
+            </a:extLst>
+          </p:cNvPr>
+          <p:cNvSpPr/>
+          <p:nvPr/>
+        </p:nvSpPr>
+        <p:spPr>
+          <a:xfrm>
+            <a:off x="3011404" y="4317856"/>
+            <a:ext cx="308208" cy="445371"/>
+          </a:xfrm>
+          <a:prstGeom prst="rect">
+            <a:avLst/>
+          </a:prstGeom>
+        </p:spPr>
+        <p:style>
+          <a:lnRef idx="3">
+            <a:schemeClr val="lt1"/>
+          </a:lnRef>
+          <a:fillRef idx="1">
+            <a:schemeClr val="accent3"/>
+          </a:fillRef>
+          <a:effectRef idx="1">
+            <a:schemeClr val="accent3"/>
+          </a:effectRef>
+          <a:fontRef idx="minor">
+            <a:schemeClr val="lt1"/>
+          </a:fontRef>
+        </p:style>
+        <p:txBody>
+          <a:bodyPr rtlCol="0" anchor="ctr"/>
+          <a:lstStyle/>
+          <a:p>
+            <a:pPr algn="ctr"/>
+            <a:endParaRPr lang="zh-CN" altLang="en-US">
+              <a:solidFill>
+                <a:schemeClr val="accent1">
+                  <a:lumMod val="40000"/>
+                  <a:lumOff val="60000"/>
+                </a:schemeClr>
+              </a:solidFill>
+            </a:endParaRPr>
+          </a:p>
+        </p:txBody>
+      </p:sp>
+      <p:sp>
+        <p:nvSpPr>
+          <p:cNvPr id="24" name="矩形 23">
+            <a:extLst>
+              <a:ext uri="{FF2B5EF4-FFF2-40B4-BE49-F238E27FC236}">
+                <a16:creationId xmlns:a16="http://schemas.microsoft.com/office/drawing/2014/main" id="{BF126198-072A-4EFE-A3A7-876FEF483119}"/>
+              </a:ext>
+            </a:extLst>
+          </p:cNvPr>
+          <p:cNvSpPr/>
+          <p:nvPr/>
+        </p:nvSpPr>
+        <p:spPr>
+          <a:xfrm>
+            <a:off x="8449531" y="2129660"/>
+            <a:ext cx="308208" cy="445371"/>
+          </a:xfrm>
+          <a:prstGeom prst="rect">
+            <a:avLst/>
+          </a:prstGeom>
+        </p:spPr>
+        <p:style>
+          <a:lnRef idx="3">
+            <a:schemeClr val="lt1"/>
+          </a:lnRef>
+          <a:fillRef idx="1">
+            <a:schemeClr val="accent3"/>
+          </a:fillRef>
+          <a:effectRef idx="1">
+            <a:schemeClr val="accent3"/>
+          </a:effectRef>
+          <a:fontRef idx="minor">
+            <a:schemeClr val="lt1"/>
+          </a:fontRef>
+        </p:style>
+        <p:txBody>
+          <a:bodyPr rtlCol="0" anchor="ctr"/>
+          <a:lstStyle/>
+          <a:p>
+            <a:pPr algn="ctr"/>
+            <a:endParaRPr lang="zh-CN" altLang="en-US">
+              <a:solidFill>
+                <a:schemeClr val="accent1">
+                  <a:lumMod val="40000"/>
+                  <a:lumOff val="60000"/>
+                </a:schemeClr>
+              </a:solidFill>
+            </a:endParaRPr>
+          </a:p>
+        </p:txBody>
+      </p:sp>
+      <p:sp>
+        <p:nvSpPr>
+          <p:cNvPr id="28" name="矩形 27">
+            <a:extLst>
+              <a:ext uri="{FF2B5EF4-FFF2-40B4-BE49-F238E27FC236}">
+                <a16:creationId xmlns:a16="http://schemas.microsoft.com/office/drawing/2014/main" id="{A1A9E17B-3FE9-4F4C-AD60-CDF67BD6926B}"/>
+              </a:ext>
+            </a:extLst>
+          </p:cNvPr>
+          <p:cNvSpPr/>
+          <p:nvPr/>
+        </p:nvSpPr>
+        <p:spPr>
+          <a:xfrm>
+            <a:off x="8462049" y="4260045"/>
+            <a:ext cx="308208" cy="445371"/>
+          </a:xfrm>
+          <a:prstGeom prst="rect">
+            <a:avLst/>
+          </a:prstGeom>
+        </p:spPr>
+        <p:style>
+          <a:lnRef idx="3">
+            <a:schemeClr val="lt1"/>
+          </a:lnRef>
+          <a:fillRef idx="1">
+            <a:schemeClr val="accent3"/>
+          </a:fillRef>
+          <a:effectRef idx="1">
+            <a:schemeClr val="accent3"/>
+          </a:effectRef>
+          <a:fontRef idx="minor">
+            <a:schemeClr val="lt1"/>
+          </a:fontRef>
+        </p:style>
+        <p:txBody>
+          <a:bodyPr rtlCol="0" anchor="ctr"/>
+          <a:lstStyle/>
+          <a:p>
+            <a:pPr algn="ctr"/>
+            <a:endParaRPr lang="zh-CN" altLang="en-US">
+              <a:solidFill>
+                <a:schemeClr val="accent1">
+                  <a:lumMod val="40000"/>
+                  <a:lumOff val="60000"/>
+                </a:schemeClr>
+              </a:solidFill>
+            </a:endParaRPr>
+          </a:p>
+        </p:txBody>
+      </p:sp>
+      <p:sp>
+        <p:nvSpPr>
+          <p:cNvPr id="3" name="文本框 2">
+            <a:extLst>
+              <a:ext uri="{FF2B5EF4-FFF2-40B4-BE49-F238E27FC236}">
+                <a16:creationId xmlns:a16="http://schemas.microsoft.com/office/drawing/2014/main" id="{81EAC0AB-B220-4FA7-B013-87A646817A0A}"/>
+              </a:ext>
+            </a:extLst>
+          </p:cNvPr>
+          <p:cNvSpPr txBox="1"/>
+          <p:nvPr/>
+        </p:nvSpPr>
+        <p:spPr>
+          <a:xfrm>
+            <a:off x="8473068" y="826389"/>
+            <a:ext cx="1963512" cy="369332"/>
+          </a:xfrm>
+          <a:prstGeom prst="rect">
+            <a:avLst/>
+          </a:prstGeom>
+          <a:noFill/>
+        </p:spPr>
+        <p:txBody>
+          <a:bodyPr wrap="square" rtlCol="0">
+            <a:spAutoFit/>
+          </a:bodyPr>
+          <a:lstStyle/>
+          <a:p>
+            <a:r>
+              <a:rPr lang="zh-CN" altLang="en-US" dirty="0">
+                <a:solidFill>
+                  <a:schemeClr val="accent1">
+                    <a:lumMod val="40000"/>
+                    <a:lumOff val="60000"/>
+                  </a:schemeClr>
+                </a:solidFill>
+              </a:rPr>
+              <a:t>可上网</a:t>
+            </a:r>
+          </a:p>
+        </p:txBody>
+      </p:sp>
+      <p:sp>
+        <p:nvSpPr>
+          <p:cNvPr id="4" name="箭头: 下 3">
+            <a:extLst>
+              <a:ext uri="{FF2B5EF4-FFF2-40B4-BE49-F238E27FC236}">
+                <a16:creationId xmlns:a16="http://schemas.microsoft.com/office/drawing/2014/main" id="{79EFAB61-E538-4A6D-B986-43CC4BD39CA1}"/>
+              </a:ext>
+            </a:extLst>
+          </p:cNvPr>
+          <p:cNvSpPr/>
+          <p:nvPr/>
+        </p:nvSpPr>
+        <p:spPr>
+          <a:xfrm>
+            <a:off x="8889052" y="1300317"/>
+            <a:ext cx="196709" cy="345941"/>
+          </a:xfrm>
+          <a:prstGeom prst="downArrow">
+            <a:avLst/>
+          </a:prstGeom>
+        </p:spPr>
+        <p:style>
+          <a:lnRef idx="2">
+            <a:schemeClr val="accent1">
+              <a:shade val="50000"/>
+            </a:schemeClr>
+          </a:lnRef>
+          <a:fillRef idx="1">
+            <a:schemeClr val="accent1"/>
+          </a:fillRef>
+          <a:effectRef idx="0">
+            <a:schemeClr val="accent1"/>
+          </a:effectRef>
+          <a:fontRef idx="minor">
+            <a:schemeClr val="lt1"/>
+          </a:fontRef>
+        </p:style>
+        <p:txBody>
+          <a:bodyPr rtlCol="0" anchor="ctr"/>
+          <a:lstStyle/>
+          <a:p>
+            <a:pPr algn="ctr"/>
+            <a:endParaRPr lang="zh-CN" altLang="en-US">
+              <a:solidFill>
+                <a:schemeClr val="accent1">
+                  <a:lumMod val="40000"/>
+                  <a:lumOff val="60000"/>
+                </a:schemeClr>
+              </a:solidFill>
+            </a:endParaRPr>
+          </a:p>
+        </p:txBody>
+      </p:sp>
+      <p:sp>
+        <p:nvSpPr>
+          <p:cNvPr id="7" name="标题 1">
+            <a:extLst>
+              <a:ext uri="{FF2B5EF4-FFF2-40B4-BE49-F238E27FC236}">
+                <a16:creationId xmlns:a16="http://schemas.microsoft.com/office/drawing/2014/main" id="{9E9CE235-BA50-47F5-9A87-46C0E81685E9}"/>
+              </a:ext>
+            </a:extLst>
+          </p:cNvPr>
+          <p:cNvSpPr txBox="1">
+            <a:spLocks/>
+          </p:cNvSpPr>
+          <p:nvPr/>
+        </p:nvSpPr>
+        <p:spPr>
+          <a:xfrm>
+            <a:off x="632358" y="5291158"/>
+            <a:ext cx="10515600" cy="1007078"/>
+          </a:xfrm>
+          <a:prstGeom prst="rect">
+            <a:avLst/>
+          </a:prstGeom>
+        </p:spPr>
+        <p:txBody>
+          <a:bodyPr vert="horz" lIns="91440" tIns="45720" rIns="91440" bIns="45720" rtlCol="0" anchor="ctr">
+            <a:normAutofit/>
+          </a:bodyPr>
+          <a:lstStyle>
+            <a:lvl1pPr algn="l" defTabSz="914400" rtl="0" eaLnBrk="1" latinLnBrk="0" hangingPunct="1">
+              <a:lnSpc>
+                <a:spcPct val="90000"/>
+              </a:lnSpc>
+              <a:spcBef>
+                <a:spcPct val="0"/>
+              </a:spcBef>
+              <a:buNone/>
+              <a:defRPr sz="4400" kern="1200">
+                <a:solidFill>
+                  <a:schemeClr val="tx1"/>
+                </a:solidFill>
+                <a:latin typeface="+mj-lt"/>
+                <a:ea typeface="+mj-ea"/>
+                <a:cs typeface="+mj-cs"/>
+              </a:defRPr>
+            </a:lvl1pPr>
+          </a:lstStyle>
+          <a:p>
+            <a:r>
+              <a:rPr lang="zh-CN" altLang="en-US" sz="1600" b="1" dirty="0">
+                <a:solidFill>
+                  <a:schemeClr val="accent1">
+                    <a:lumMod val="40000"/>
+                    <a:lumOff val="60000"/>
+                  </a:schemeClr>
+                </a:solidFill>
+                <a:effectLst>
+                  <a:outerShdw blurRad="38100" dist="19050" dir="2700000" algn="tl" rotWithShape="0">
+                    <a:schemeClr val="dk1">
+                      <a:alpha val="40000"/>
+                    </a:schemeClr>
+                  </a:outerShdw>
+                </a:effectLst>
+              </a:rPr>
+              <a:t>台式电脑先接上无线网卡，先设置虚拟</a:t>
+            </a:r>
+            <a:r>
+              <a:rPr lang="en-US" altLang="zh-CN" sz="1600" b="1" dirty="0" err="1">
+                <a:solidFill>
+                  <a:schemeClr val="accent1">
+                    <a:lumMod val="40000"/>
+                    <a:lumOff val="60000"/>
+                  </a:schemeClr>
+                </a:solidFill>
+                <a:effectLst>
+                  <a:outerShdw blurRad="38100" dist="19050" dir="2700000" algn="tl" rotWithShape="0">
+                    <a:schemeClr val="dk1">
+                      <a:alpha val="40000"/>
+                    </a:schemeClr>
+                  </a:outerShdw>
+                </a:effectLst>
+              </a:rPr>
+              <a:t>WiFi</a:t>
+            </a:r>
+            <a:r>
+              <a:rPr lang="zh-CN" altLang="en-US" sz="1600" b="1" dirty="0">
+                <a:solidFill>
+                  <a:schemeClr val="accent1">
+                    <a:lumMod val="40000"/>
+                    <a:lumOff val="60000"/>
+                  </a:schemeClr>
+                </a:solidFill>
+                <a:effectLst>
+                  <a:outerShdw blurRad="38100" dist="19050" dir="2700000" algn="tl" rotWithShape="0">
+                    <a:schemeClr val="dk1">
+                      <a:alpha val="40000"/>
+                    </a:schemeClr>
+                  </a:outerShdw>
+                </a:effectLst>
+              </a:rPr>
+              <a:t>热点，然后设置本地连接的网络共享，再用笔记本连接</a:t>
+            </a:r>
+            <a:r>
+              <a:rPr lang="en-US" altLang="zh-CN" sz="1600" b="1" dirty="0" err="1">
+                <a:solidFill>
+                  <a:schemeClr val="accent1">
+                    <a:lumMod val="40000"/>
+                    <a:lumOff val="60000"/>
+                  </a:schemeClr>
+                </a:solidFill>
+                <a:effectLst>
+                  <a:outerShdw blurRad="38100" dist="19050" dir="2700000" algn="tl" rotWithShape="0">
+                    <a:schemeClr val="dk1">
+                      <a:alpha val="40000"/>
+                    </a:schemeClr>
+                  </a:outerShdw>
+                </a:effectLst>
+              </a:rPr>
+              <a:t>WiFi</a:t>
+            </a:r>
+            <a:r>
+              <a:rPr lang="zh-CN" altLang="en-US" sz="1600" b="1" dirty="0">
+                <a:solidFill>
+                  <a:schemeClr val="accent1">
+                    <a:lumMod val="40000"/>
+                    <a:lumOff val="60000"/>
+                  </a:schemeClr>
+                </a:solidFill>
+                <a:effectLst>
+                  <a:outerShdw blurRad="38100" dist="19050" dir="2700000" algn="tl" rotWithShape="0">
+                    <a:schemeClr val="dk1">
+                      <a:alpha val="40000"/>
+                    </a:schemeClr>
+                  </a:outerShdw>
+                </a:effectLst>
+              </a:rPr>
+              <a:t>，笔记本就可以上网了。（不过天翼校园网 有检测，你共享网络会检测，然后会自动退出天翼登录）</a:t>
+            </a:r>
+          </a:p>
+        </p:txBody>
+      </p:sp>
+      <p:pic>
+        <p:nvPicPr>
+          <p:cNvPr id="15" name="图片 14">
+            <a:extLst>
+              <a:ext uri="{FF2B5EF4-FFF2-40B4-BE49-F238E27FC236}">
+                <a16:creationId xmlns:a16="http://schemas.microsoft.com/office/drawing/2014/main" id="{C87B5B79-6498-41FD-9765-8F0819E70E33}"/>
+              </a:ext>
+            </a:extLst>
+          </p:cNvPr>
+          <p:cNvPicPr>
+            <a:picLocks noChangeAspect="1"/>
+          </p:cNvPicPr>
+          <p:nvPr/>
+        </p:nvPicPr>
+        <p:blipFill>
+          <a:blip r:embed="rId3" cstate="print">
+            <a:duotone>
+              <a:schemeClr val="bg2">
+                <a:shade val="45000"/>
+                <a:satMod val="135000"/>
+              </a:schemeClr>
+              <a:prstClr val="white"/>
+            </a:duotone>
+            <a:extLst>
+              <a:ext uri="{28A0092B-C50C-407E-A947-70E740481C1C}">
+                <a14:useLocalDpi xmlns:a14="http://schemas.microsoft.com/office/drawing/2010/main" val="0"/>
+              </a:ext>
+            </a:extLst>
+          </a:blip>
+          <a:stretch>
+            <a:fillRect/>
+          </a:stretch>
+        </p:blipFill>
+        <p:spPr>
+          <a:xfrm>
+            <a:off x="5391956" y="3435348"/>
+            <a:ext cx="996404" cy="996404"/>
+          </a:xfrm>
+          <a:prstGeom prst="rect">
+            <a:avLst/>
+          </a:prstGeom>
+        </p:spPr>
+      </p:pic>
+    </p:spTree>
+    <p:extLst>
+      <p:ext uri="{BB962C8B-B14F-4D97-AF65-F5344CB8AC3E}">
+        <p14:creationId xmlns:p14="http://schemas.microsoft.com/office/powerpoint/2010/main" val="2547158542"/>
+      </p:ext>
+    </p:extLst>
+  </p:cSld>
+  <p:clrMapOvr>
+    <a:masterClrMapping/>
+  </p:clrMapOvr>
+</p:sld>
+</file>
+
+<file path=ppt/slides/slide17.xml><?xml version="1.0" encoding="utf-8"?>
+<p:sld xmlns:a="http://schemas.openxmlformats.org/drawingml/2006/main" xmlns:r="http://schemas.openxmlformats.org/officeDocument/2006/relationships" xmlns:p="http://schemas.openxmlformats.org/presentationml/2006/main">
+  <p:cSld>
+    <p:spTree>
+      <p:nvGrpSpPr>
+        <p:cNvPr id="1" name=""/>
+        <p:cNvGrpSpPr/>
+        <p:nvPr/>
+      </p:nvGrpSpPr>
+      <p:grpSpPr>
+        <a:xfrm>
+          <a:off x="0" y="0"/>
+          <a:ext cx="0" cy="0"/>
+          <a:chOff x="0" y="0"/>
+          <a:chExt cx="0" cy="0"/>
+        </a:xfrm>
+      </p:grpSpPr>
+      <p:pic>
+        <p:nvPicPr>
+          <p:cNvPr id="16" name="图片 15">
+            <a:extLst>
+              <a:ext uri="{FF2B5EF4-FFF2-40B4-BE49-F238E27FC236}">
+                <a16:creationId xmlns:a16="http://schemas.microsoft.com/office/drawing/2014/main" id="{DE7E807C-680E-4A4E-9D29-90A8D032F37C}"/>
+              </a:ext>
+            </a:extLst>
+          </p:cNvPr>
+          <p:cNvPicPr/>
+          <p:nvPr/>
+        </p:nvPicPr>
+        <p:blipFill>
+          <a:blip r:embed="rId2"/>
+          <a:stretch>
+            <a:fillRect/>
+          </a:stretch>
+        </p:blipFill>
+        <p:spPr>
+          <a:xfrm>
+            <a:off x="0" y="0"/>
+            <a:ext cx="12192000" cy="6858000"/>
+          </a:xfrm>
+          <a:prstGeom prst="rect">
+            <a:avLst/>
+          </a:prstGeom>
+        </p:spPr>
+      </p:pic>
+      <p:pic>
+        <p:nvPicPr>
+          <p:cNvPr id="18" name="内容占位符 17">
+            <a:extLst>
+              <a:ext uri="{FF2B5EF4-FFF2-40B4-BE49-F238E27FC236}">
+                <a16:creationId xmlns:a16="http://schemas.microsoft.com/office/drawing/2014/main" id="{6F5AF0A2-E4A1-48C1-AC06-9297529D661A}"/>
+              </a:ext>
+            </a:extLst>
+          </p:cNvPr>
+          <p:cNvPicPr>
+            <a:picLocks noGrp="1" noChangeAspect="1"/>
+          </p:cNvPicPr>
+          <p:nvPr>
+            <p:ph idx="1"/>
+          </p:nvPr>
+        </p:nvPicPr>
+        <p:blipFill>
+          <a:blip r:embed="rId3">
+            <a:extLst>
+              <a:ext uri="{28A0092B-C50C-407E-A947-70E740481C1C}">
+                <a14:useLocalDpi xmlns:a14="http://schemas.microsoft.com/office/drawing/2010/main" val="0"/>
+              </a:ext>
+            </a:extLst>
+          </a:blip>
+          <a:stretch>
+            <a:fillRect/>
+          </a:stretch>
+        </p:blipFill>
+        <p:spPr>
+          <a:xfrm>
+            <a:off x="7127950" y="1843088"/>
+            <a:ext cx="3904622" cy="4351338"/>
+          </a:xfrm>
+        </p:spPr>
+      </p:pic>
+      <p:sp>
+        <p:nvSpPr>
+          <p:cNvPr id="11" name="标题 1">
+            <a:extLst>
+              <a:ext uri="{FF2B5EF4-FFF2-40B4-BE49-F238E27FC236}">
+                <a16:creationId xmlns:a16="http://schemas.microsoft.com/office/drawing/2014/main" id="{2C9BF308-A158-4B1C-9C22-4E295A76E6A6}"/>
+              </a:ext>
+            </a:extLst>
+          </p:cNvPr>
+          <p:cNvSpPr txBox="1">
+            <a:spLocks/>
+          </p:cNvSpPr>
+          <p:nvPr/>
+        </p:nvSpPr>
+        <p:spPr>
+          <a:xfrm>
+            <a:off x="990600" y="517525"/>
+            <a:ext cx="10515600" cy="1325563"/>
+          </a:xfrm>
+          <a:prstGeom prst="rect">
+            <a:avLst/>
+          </a:prstGeom>
+        </p:spPr>
+        <p:txBody>
+          <a:bodyPr vert="horz" lIns="91440" tIns="45720" rIns="91440" bIns="45720" rtlCol="0" anchor="ctr">
+            <a:normAutofit/>
+          </a:bodyPr>
+          <a:lstStyle>
+            <a:lvl1pPr algn="l" defTabSz="914400" rtl="0" eaLnBrk="1" latinLnBrk="0" hangingPunct="1">
+              <a:lnSpc>
+                <a:spcPct val="90000"/>
+              </a:lnSpc>
+              <a:spcBef>
+                <a:spcPct val="0"/>
+              </a:spcBef>
+              <a:buNone/>
+              <a:defRPr sz="4400" kern="1200">
+                <a:solidFill>
+                  <a:schemeClr val="tx1"/>
+                </a:solidFill>
+                <a:latin typeface="+mj-lt"/>
+                <a:ea typeface="+mj-ea"/>
+                <a:cs typeface="+mj-cs"/>
+              </a:defRPr>
+            </a:lvl1pPr>
+          </a:lstStyle>
+          <a:p>
+            <a:r>
+              <a:rPr lang="zh-CN" altLang="en-US" sz="1600" b="1" dirty="0">
+                <a:solidFill>
+                  <a:schemeClr val="accent1">
+                    <a:lumMod val="40000"/>
+                    <a:lumOff val="60000"/>
+                  </a:schemeClr>
+                </a:solidFill>
+                <a:effectLst>
+                  <a:outerShdw blurRad="38100" dist="19050" dir="2700000" algn="tl" rotWithShape="0">
+                    <a:schemeClr val="dk1">
+                      <a:alpha val="40000"/>
+                    </a:schemeClr>
+                  </a:outerShdw>
+                </a:effectLst>
+              </a:rPr>
+              <a:t>台式电脑先接上无线网卡，先设置虚拟</a:t>
+            </a:r>
+            <a:r>
+              <a:rPr lang="en-US" altLang="zh-CN" sz="1600" b="1" dirty="0" err="1">
+                <a:solidFill>
+                  <a:schemeClr val="accent1">
+                    <a:lumMod val="40000"/>
+                    <a:lumOff val="60000"/>
+                  </a:schemeClr>
+                </a:solidFill>
+                <a:effectLst>
+                  <a:outerShdw blurRad="38100" dist="19050" dir="2700000" algn="tl" rotWithShape="0">
+                    <a:schemeClr val="dk1">
+                      <a:alpha val="40000"/>
+                    </a:schemeClr>
+                  </a:outerShdw>
+                </a:effectLst>
+              </a:rPr>
+              <a:t>WiFi</a:t>
+            </a:r>
+            <a:r>
+              <a:rPr lang="zh-CN" altLang="en-US" sz="1600" b="1" dirty="0">
+                <a:solidFill>
+                  <a:schemeClr val="accent1">
+                    <a:lumMod val="40000"/>
+                    <a:lumOff val="60000"/>
+                  </a:schemeClr>
+                </a:solidFill>
+                <a:effectLst>
+                  <a:outerShdw blurRad="38100" dist="19050" dir="2700000" algn="tl" rotWithShape="0">
+                    <a:schemeClr val="dk1">
+                      <a:alpha val="40000"/>
+                    </a:schemeClr>
+                  </a:outerShdw>
+                </a:effectLst>
+              </a:rPr>
+              <a:t>热点，然后设置本地连接的网络共享，再用笔记本连接</a:t>
+            </a:r>
+            <a:r>
+              <a:rPr lang="en-US" altLang="zh-CN" sz="1600" b="1" dirty="0" err="1">
+                <a:solidFill>
+                  <a:schemeClr val="accent1">
+                    <a:lumMod val="40000"/>
+                    <a:lumOff val="60000"/>
+                  </a:schemeClr>
+                </a:solidFill>
+                <a:effectLst>
+                  <a:outerShdw blurRad="38100" dist="19050" dir="2700000" algn="tl" rotWithShape="0">
+                    <a:schemeClr val="dk1">
+                      <a:alpha val="40000"/>
+                    </a:schemeClr>
+                  </a:outerShdw>
+                </a:effectLst>
+              </a:rPr>
+              <a:t>WiFi</a:t>
+            </a:r>
+            <a:r>
+              <a:rPr lang="zh-CN" altLang="en-US" sz="1600" b="1" dirty="0">
+                <a:solidFill>
+                  <a:schemeClr val="accent1">
+                    <a:lumMod val="40000"/>
+                    <a:lumOff val="60000"/>
+                  </a:schemeClr>
+                </a:solidFill>
+                <a:effectLst>
+                  <a:outerShdw blurRad="38100" dist="19050" dir="2700000" algn="tl" rotWithShape="0">
+                    <a:schemeClr val="dk1">
+                      <a:alpha val="40000"/>
+                    </a:schemeClr>
+                  </a:outerShdw>
+                </a:effectLst>
+              </a:rPr>
+              <a:t>，笔记本就可以上网了。（不过天翼校园网 有检测，你共享网络会检测，然后会自动退出天翼登录）</a:t>
+            </a:r>
+          </a:p>
+        </p:txBody>
+      </p:sp>
+      <p:pic>
+        <p:nvPicPr>
+          <p:cNvPr id="12" name="图片 11">
+            <a:extLst>
+              <a:ext uri="{FF2B5EF4-FFF2-40B4-BE49-F238E27FC236}">
+                <a16:creationId xmlns:a16="http://schemas.microsoft.com/office/drawing/2014/main" id="{9AA4BDE6-97F6-46EF-B908-7C5AEA42A000}"/>
+              </a:ext>
+            </a:extLst>
+          </p:cNvPr>
+          <p:cNvPicPr/>
+          <p:nvPr/>
+        </p:nvPicPr>
+        <p:blipFill>
+          <a:blip r:embed="rId4"/>
+          <a:stretch>
+            <a:fillRect/>
+          </a:stretch>
+        </p:blipFill>
+        <p:spPr>
+          <a:xfrm>
+            <a:off x="304800" y="1538363"/>
+            <a:ext cx="6535024" cy="2638728"/>
+          </a:xfrm>
+          <a:prstGeom prst="rect">
+            <a:avLst/>
+          </a:prstGeom>
+          <a:noFill/>
+          <a:ln>
+            <a:noFill/>
+          </a:ln>
+        </p:spPr>
+      </p:pic>
+      <p:pic>
+        <p:nvPicPr>
+          <p:cNvPr id="13" name="图片 12">
+            <a:extLst>
+              <a:ext uri="{FF2B5EF4-FFF2-40B4-BE49-F238E27FC236}">
+                <a16:creationId xmlns:a16="http://schemas.microsoft.com/office/drawing/2014/main" id="{F15270D9-E7D2-4EAE-809D-DBE20A9614B6}"/>
+              </a:ext>
+            </a:extLst>
+          </p:cNvPr>
+          <p:cNvPicPr/>
+          <p:nvPr/>
+        </p:nvPicPr>
+        <p:blipFill>
+          <a:blip r:embed="rId5"/>
+          <a:stretch>
+            <a:fillRect/>
+          </a:stretch>
+        </p:blipFill>
+        <p:spPr>
+          <a:xfrm>
+            <a:off x="990600" y="4278464"/>
+            <a:ext cx="4977923" cy="1838930"/>
+          </a:xfrm>
+          <a:prstGeom prst="rect">
+            <a:avLst/>
+          </a:prstGeom>
+          <a:noFill/>
+          <a:ln>
+            <a:noFill/>
+          </a:ln>
+        </p:spPr>
+      </p:pic>
+    </p:spTree>
+    <p:extLst>
+      <p:ext uri="{BB962C8B-B14F-4D97-AF65-F5344CB8AC3E}">
+        <p14:creationId xmlns:p14="http://schemas.microsoft.com/office/powerpoint/2010/main" val="3239327261"/>
+      </p:ext>
+    </p:extLst>
   </p:cSld>
   <p:clrMapOvr>
     <a:masterClrMapping/>
@@ -3122,10 +6540,14 @@
       </p:grpSpPr>
       <p:pic>
         <p:nvPicPr>
-          <p:cNvPr id="4" name="图片 3" descr="6"/>
-          <p:cNvPicPr>
-            <a:picLocks noChangeAspect="1"/>
-          </p:cNvPicPr>
+          <p:cNvPr id="45" name="图片 44">
+            <a:extLst>
+              <a:ext uri="{FF2B5EF4-FFF2-40B4-BE49-F238E27FC236}">
+                <a16:creationId xmlns:a16="http://schemas.microsoft.com/office/drawing/2014/main" id="{AABE9CE2-AA21-413D-98E3-DDBE62B612F9}"/>
+              </a:ext>
+            </a:extLst>
+          </p:cNvPr>
+          <p:cNvPicPr/>
           <p:nvPr/>
         </p:nvPicPr>
         <p:blipFill>
@@ -3136,8 +6558,8 @@
         </p:blipFill>
         <p:spPr>
           <a:xfrm>
-            <a:off x="-635" y="0"/>
-            <a:ext cx="12192000" cy="9091295"/>
+            <a:off x="0" y="0"/>
+            <a:ext cx="12192000" cy="6858000"/>
           </a:xfrm>
           <a:prstGeom prst="rect">
             <a:avLst/>
@@ -3146,7 +6568,13 @@
       </p:pic>
       <p:sp>
         <p:nvSpPr>
-          <p:cNvPr id="2" name="标题 1"/>
+          <p:cNvPr id="2" name="标题 1">
+            <a:extLst>
+              <a:ext uri="{FF2B5EF4-FFF2-40B4-BE49-F238E27FC236}">
+                <a16:creationId xmlns:a16="http://schemas.microsoft.com/office/drawing/2014/main" id="{0EF62112-E4F3-4E2E-92AA-D9554CD19820}"/>
+              </a:ext>
+            </a:extLst>
+          </p:cNvPr>
           <p:cNvSpPr>
             <a:spLocks noGrp="1"/>
           </p:cNvSpPr>
@@ -3154,234 +6582,662 @@
             <p:ph type="title"/>
           </p:nvPr>
         </p:nvSpPr>
-        <p:spPr>
-          <a:xfrm>
-            <a:off x="758300" y="500062"/>
-            <a:ext cx="10515600" cy="1325563"/>
-          </a:xfrm>
-        </p:spPr>
-        <p:txBody>
-          <a:bodyPr>
-            <a:normAutofit/>
+        <p:spPr/>
+        <p:txBody>
+          <a:bodyPr/>
+          <a:lstStyle/>
+          <a:p>
+            <a:endParaRPr lang="zh-CN" altLang="en-US" dirty="0">
+              <a:solidFill>
+                <a:schemeClr val="tx1">
+                  <a:lumMod val="50000"/>
+                  <a:lumOff val="50000"/>
+                </a:schemeClr>
+              </a:solidFill>
+            </a:endParaRPr>
+          </a:p>
+        </p:txBody>
+      </p:sp>
+      <p:sp>
+        <p:nvSpPr>
+          <p:cNvPr id="6" name="矩形 5">
+            <a:extLst>
+              <a:ext uri="{FF2B5EF4-FFF2-40B4-BE49-F238E27FC236}">
+                <a16:creationId xmlns:a16="http://schemas.microsoft.com/office/drawing/2014/main" id="{20D6983C-FA3E-42DB-9E83-79552C0F3811}"/>
+              </a:ext>
+            </a:extLst>
+          </p:cNvPr>
+          <p:cNvSpPr/>
+          <p:nvPr/>
+        </p:nvSpPr>
+        <p:spPr>
+          <a:xfrm>
+            <a:off x="2242656" y="1825625"/>
+            <a:ext cx="1442907" cy="3031601"/>
+          </a:xfrm>
+          <a:prstGeom prst="rect">
+            <a:avLst/>
+          </a:prstGeom>
+        </p:spPr>
+        <p:style>
+          <a:lnRef idx="2">
+            <a:schemeClr val="accent1">
+              <a:shade val="50000"/>
+            </a:schemeClr>
+          </a:lnRef>
+          <a:fillRef idx="1">
+            <a:schemeClr val="accent1"/>
+          </a:fillRef>
+          <a:effectRef idx="0">
+            <a:schemeClr val="accent1"/>
+          </a:effectRef>
+          <a:fontRef idx="minor">
+            <a:schemeClr val="lt1"/>
+          </a:fontRef>
+        </p:style>
+        <p:txBody>
+          <a:bodyPr rtlCol="0" anchor="ctr"/>
+          <a:lstStyle/>
+          <a:p>
+            <a:pPr algn="ctr"/>
+            <a:endParaRPr lang="zh-CN" altLang="en-US">
+              <a:solidFill>
+                <a:schemeClr val="tx1">
+                  <a:lumMod val="50000"/>
+                  <a:lumOff val="50000"/>
+                </a:schemeClr>
+              </a:solidFill>
+            </a:endParaRPr>
+          </a:p>
+        </p:txBody>
+      </p:sp>
+      <p:sp>
+        <p:nvSpPr>
+          <p:cNvPr id="8" name="矩形 7">
+            <a:extLst>
+              <a:ext uri="{FF2B5EF4-FFF2-40B4-BE49-F238E27FC236}">
+                <a16:creationId xmlns:a16="http://schemas.microsoft.com/office/drawing/2014/main" id="{66FD494A-8A44-415C-A68A-ADA3007634E1}"/>
+              </a:ext>
+            </a:extLst>
+          </p:cNvPr>
+          <p:cNvSpPr/>
+          <p:nvPr/>
+        </p:nvSpPr>
+        <p:spPr>
+          <a:xfrm>
+            <a:off x="8265954" y="1825625"/>
+            <a:ext cx="1442907" cy="3031601"/>
+          </a:xfrm>
+          <a:prstGeom prst="rect">
+            <a:avLst/>
+          </a:prstGeom>
+        </p:spPr>
+        <p:style>
+          <a:lnRef idx="2">
+            <a:schemeClr val="accent1">
+              <a:shade val="50000"/>
+            </a:schemeClr>
+          </a:lnRef>
+          <a:fillRef idx="1">
+            <a:schemeClr val="accent1"/>
+          </a:fillRef>
+          <a:effectRef idx="0">
+            <a:schemeClr val="accent1"/>
+          </a:effectRef>
+          <a:fontRef idx="minor">
+            <a:schemeClr val="lt1"/>
+          </a:fontRef>
+        </p:style>
+        <p:txBody>
+          <a:bodyPr rtlCol="0" anchor="ctr"/>
+          <a:lstStyle/>
+          <a:p>
+            <a:pPr algn="ctr"/>
+            <a:endParaRPr lang="zh-CN" altLang="en-US">
+              <a:solidFill>
+                <a:schemeClr val="tx1">
+                  <a:lumMod val="50000"/>
+                  <a:lumOff val="50000"/>
+                </a:schemeClr>
+              </a:solidFill>
+            </a:endParaRPr>
+          </a:p>
+        </p:txBody>
+      </p:sp>
+      <p:cxnSp>
+        <p:nvCxnSpPr>
+          <p:cNvPr id="10" name="直接连接符 9">
+            <a:extLst>
+              <a:ext uri="{FF2B5EF4-FFF2-40B4-BE49-F238E27FC236}">
+                <a16:creationId xmlns:a16="http://schemas.microsoft.com/office/drawing/2014/main" id="{7FBCFEFA-FD7C-40BB-B2C4-FF6BFEB59DA0}"/>
+              </a:ext>
+            </a:extLst>
+          </p:cNvPr>
+          <p:cNvCxnSpPr/>
+          <p:nvPr/>
+        </p:nvCxnSpPr>
+        <p:spPr>
+          <a:xfrm>
+            <a:off x="3204594" y="2365695"/>
+            <a:ext cx="5301843" cy="0"/>
+          </a:xfrm>
+          <a:prstGeom prst="line">
+            <a:avLst/>
+          </a:prstGeom>
+        </p:spPr>
+        <p:style>
+          <a:lnRef idx="3">
+            <a:schemeClr val="dk1"/>
+          </a:lnRef>
+          <a:fillRef idx="0">
+            <a:schemeClr val="dk1"/>
+          </a:fillRef>
+          <a:effectRef idx="2">
+            <a:schemeClr val="dk1"/>
+          </a:effectRef>
+          <a:fontRef idx="minor">
+            <a:schemeClr val="tx1"/>
+          </a:fontRef>
+        </p:style>
+      </p:cxnSp>
+      <p:cxnSp>
+        <p:nvCxnSpPr>
+          <p:cNvPr id="14" name="直接连接符 13">
+            <a:extLst>
+              <a:ext uri="{FF2B5EF4-FFF2-40B4-BE49-F238E27FC236}">
+                <a16:creationId xmlns:a16="http://schemas.microsoft.com/office/drawing/2014/main" id="{4D0281A1-9997-498C-979C-5CD443B8EEB8}"/>
+              </a:ext>
+            </a:extLst>
+          </p:cNvPr>
+          <p:cNvCxnSpPr>
+            <a:cxnSpLocks/>
+          </p:cNvCxnSpPr>
+          <p:nvPr/>
+        </p:nvCxnSpPr>
+        <p:spPr>
+          <a:xfrm>
+            <a:off x="3204593" y="4545647"/>
+            <a:ext cx="5301843" cy="0"/>
+          </a:xfrm>
+          <a:prstGeom prst="line">
+            <a:avLst/>
+          </a:prstGeom>
+          <a:ln w="9525" cap="flat" cmpd="sng" algn="ctr">
+            <a:solidFill>
+              <a:schemeClr val="dk1"/>
+            </a:solidFill>
+            <a:prstDash val="dash"/>
+            <a:round/>
+            <a:headEnd type="none" w="med" len="med"/>
+            <a:tailEnd type="none" w="med" len="med"/>
+          </a:ln>
+        </p:spPr>
+        <p:style>
+          <a:lnRef idx="0">
+            <a:scrgbClr r="0" g="0" b="0"/>
+          </a:lnRef>
+          <a:fillRef idx="0">
+            <a:scrgbClr r="0" g="0" b="0"/>
+          </a:fillRef>
+          <a:effectRef idx="0">
+            <a:scrgbClr r="0" g="0" b="0"/>
+          </a:effectRef>
+          <a:fontRef idx="minor">
+            <a:schemeClr val="tx1"/>
+          </a:fontRef>
+        </p:style>
+      </p:cxnSp>
+      <p:sp>
+        <p:nvSpPr>
+          <p:cNvPr id="19" name="文本框 18">
+            <a:extLst>
+              <a:ext uri="{FF2B5EF4-FFF2-40B4-BE49-F238E27FC236}">
+                <a16:creationId xmlns:a16="http://schemas.microsoft.com/office/drawing/2014/main" id="{CB635EFC-938A-486D-9E5B-D19D6B2AB125}"/>
+              </a:ext>
+            </a:extLst>
+          </p:cNvPr>
+          <p:cNvSpPr txBox="1"/>
+          <p:nvPr/>
+        </p:nvSpPr>
+        <p:spPr>
+          <a:xfrm>
+            <a:off x="3685563" y="1928895"/>
+            <a:ext cx="1435008" cy="369332"/>
+          </a:xfrm>
+          <a:prstGeom prst="rect">
+            <a:avLst/>
+          </a:prstGeom>
+          <a:noFill/>
+        </p:spPr>
+        <p:txBody>
+          <a:bodyPr wrap="none" rtlCol="0">
+            <a:spAutoFit/>
           </a:bodyPr>
           <a:lstStyle/>
           <a:p>
             <a:r>
-              <a:rPr lang="zh-CN" altLang="en-US" sz="1600" b="1" dirty="0">
-                <a:solidFill>
-                  <a:schemeClr val="tx1"/>
-                </a:solidFill>
-                <a:effectLst>
-                  <a:outerShdw blurRad="38100" dist="19050" dir="2700000" algn="tl" rotWithShape="0">
-                    <a:schemeClr val="dk1">
-                      <a:alpha val="40000"/>
-                    </a:schemeClr>
-                  </a:outerShdw>
-                </a:effectLst>
-              </a:rPr>
-              <a:t>第一步：两个电脑通过网线连接，一个</a:t>
-            </a:r>
-            <a:r>
-              <a:rPr lang="en-US" altLang="zh-CN" sz="1600" b="1" dirty="0">
-                <a:solidFill>
-                  <a:schemeClr val="tx1"/>
-                </a:solidFill>
-                <a:effectLst>
-                  <a:outerShdw blurRad="38100" dist="19050" dir="2700000" algn="tl" rotWithShape="0">
-                    <a:schemeClr val="dk1">
-                      <a:alpha val="40000"/>
-                    </a:schemeClr>
-                  </a:outerShdw>
-                </a:effectLst>
-              </a:rPr>
-              <a:t>IP</a:t>
-            </a:r>
-            <a:r>
-              <a:rPr lang="zh-CN" altLang="en-US" sz="1600" b="1" dirty="0">
-                <a:solidFill>
-                  <a:schemeClr val="tx1"/>
-                </a:solidFill>
-                <a:effectLst>
-                  <a:outerShdw blurRad="38100" dist="19050" dir="2700000" algn="tl" rotWithShape="0">
-                    <a:schemeClr val="dk1">
-                      <a:alpha val="40000"/>
-                    </a:schemeClr>
-                  </a:outerShdw>
-                </a:effectLst>
-              </a:rPr>
-              <a:t>地址设置为</a:t>
-            </a:r>
-            <a:r>
-              <a:rPr lang="en-US" altLang="zh-CN" sz="1600" b="1" dirty="0">
-                <a:solidFill>
-                  <a:schemeClr val="tx1"/>
-                </a:solidFill>
-                <a:effectLst>
-                  <a:outerShdw blurRad="38100" dist="19050" dir="2700000" algn="tl" rotWithShape="0">
-                    <a:schemeClr val="dk1">
-                      <a:alpha val="40000"/>
-                    </a:schemeClr>
-                  </a:outerShdw>
-                </a:effectLst>
+              <a:rPr lang="en-US" altLang="zh-CN" dirty="0">
+                <a:solidFill>
+                  <a:schemeClr val="tx1">
+                    <a:lumMod val="50000"/>
+                    <a:lumOff val="50000"/>
+                  </a:schemeClr>
+                </a:solidFill>
               </a:rPr>
               <a:t>192.168.1.11</a:t>
             </a:r>
-            <a:r>
-              <a:rPr lang="zh-CN" altLang="en-US" sz="1600" b="1" dirty="0">
-                <a:solidFill>
-                  <a:schemeClr val="tx1"/>
-                </a:solidFill>
-                <a:effectLst>
-                  <a:outerShdw blurRad="38100" dist="19050" dir="2700000" algn="tl" rotWithShape="0">
-                    <a:schemeClr val="dk1">
-                      <a:alpha val="40000"/>
-                    </a:schemeClr>
-                  </a:outerShdw>
-                </a:effectLst>
-              </a:rPr>
-              <a:t>，一个为</a:t>
-            </a:r>
-            <a:r>
-              <a:rPr lang="en-US" altLang="zh-CN" sz="1600" b="1" dirty="0">
-                <a:solidFill>
-                  <a:schemeClr val="tx1"/>
-                </a:solidFill>
-                <a:effectLst>
-                  <a:outerShdw blurRad="38100" dist="19050" dir="2700000" algn="tl" rotWithShape="0">
-                    <a:schemeClr val="dk1">
-                      <a:alpha val="40000"/>
-                    </a:schemeClr>
-                  </a:outerShdw>
-                </a:effectLst>
+            <a:endParaRPr lang="zh-CN" altLang="en-US" dirty="0">
+              <a:solidFill>
+                <a:schemeClr val="tx1">
+                  <a:lumMod val="50000"/>
+                  <a:lumOff val="50000"/>
+                </a:schemeClr>
+              </a:solidFill>
+            </a:endParaRPr>
+          </a:p>
+        </p:txBody>
+      </p:sp>
+      <p:sp>
+        <p:nvSpPr>
+          <p:cNvPr id="21" name="文本框 20">
+            <a:extLst>
+              <a:ext uri="{FF2B5EF4-FFF2-40B4-BE49-F238E27FC236}">
+                <a16:creationId xmlns:a16="http://schemas.microsoft.com/office/drawing/2014/main" id="{42D143DB-5FD7-40B7-BFAC-CCF2B6D80B21}"/>
+              </a:ext>
+            </a:extLst>
+          </p:cNvPr>
+          <p:cNvSpPr txBox="1"/>
+          <p:nvPr/>
+        </p:nvSpPr>
+        <p:spPr>
+          <a:xfrm>
+            <a:off x="3685563" y="4108847"/>
+            <a:ext cx="1435008" cy="369332"/>
+          </a:xfrm>
+          <a:prstGeom prst="rect">
+            <a:avLst/>
+          </a:prstGeom>
+          <a:noFill/>
+        </p:spPr>
+        <p:txBody>
+          <a:bodyPr wrap="none" rtlCol="0">
+            <a:spAutoFit/>
+          </a:bodyPr>
+          <a:lstStyle/>
+          <a:p>
+            <a:r>
+              <a:rPr lang="en-US" altLang="zh-CN" dirty="0">
+                <a:solidFill>
+                  <a:schemeClr val="tx1">
+                    <a:lumMod val="50000"/>
+                    <a:lumOff val="50000"/>
+                  </a:schemeClr>
+                </a:solidFill>
+              </a:rPr>
+              <a:t>192.168.1.11</a:t>
+            </a:r>
+            <a:endParaRPr lang="zh-CN" altLang="en-US" dirty="0">
+              <a:solidFill>
+                <a:schemeClr val="tx1">
+                  <a:lumMod val="50000"/>
+                  <a:lumOff val="50000"/>
+                </a:schemeClr>
+              </a:solidFill>
+            </a:endParaRPr>
+          </a:p>
+        </p:txBody>
+      </p:sp>
+      <p:sp>
+        <p:nvSpPr>
+          <p:cNvPr id="23" name="文本框 22">
+            <a:extLst>
+              <a:ext uri="{FF2B5EF4-FFF2-40B4-BE49-F238E27FC236}">
+                <a16:creationId xmlns:a16="http://schemas.microsoft.com/office/drawing/2014/main" id="{CA2A2B83-4D6B-4902-9FD1-DEA707C40560}"/>
+              </a:ext>
+            </a:extLst>
+          </p:cNvPr>
+          <p:cNvSpPr txBox="1"/>
+          <p:nvPr/>
+        </p:nvSpPr>
+        <p:spPr>
+          <a:xfrm>
+            <a:off x="6828762" y="1910994"/>
+            <a:ext cx="1435008" cy="369332"/>
+          </a:xfrm>
+          <a:prstGeom prst="rect">
+            <a:avLst/>
+          </a:prstGeom>
+          <a:noFill/>
+        </p:spPr>
+        <p:txBody>
+          <a:bodyPr wrap="none" rtlCol="0">
+            <a:spAutoFit/>
+          </a:bodyPr>
+          <a:lstStyle/>
+          <a:p>
+            <a:r>
+              <a:rPr lang="en-US" altLang="zh-CN" dirty="0">
+                <a:solidFill>
+                  <a:schemeClr val="tx1">
+                    <a:lumMod val="50000"/>
+                    <a:lumOff val="50000"/>
+                  </a:schemeClr>
+                </a:solidFill>
               </a:rPr>
               <a:t>192.168.1.12</a:t>
             </a:r>
-            <a:r>
-              <a:rPr lang="zh-CN" altLang="en-US" sz="1600" b="1" dirty="0">
-                <a:solidFill>
-                  <a:schemeClr val="tx1"/>
-                </a:solidFill>
-                <a:effectLst>
-                  <a:outerShdw blurRad="38100" dist="19050" dir="2700000" algn="tl" rotWithShape="0">
-                    <a:schemeClr val="dk1">
-                      <a:alpha val="40000"/>
-                    </a:schemeClr>
-                  </a:outerShdw>
-                </a:effectLst>
-              </a:rPr>
-              <a:t>，子网掩码相同。用地址为</a:t>
-            </a:r>
-            <a:r>
-              <a:rPr lang="en-US" altLang="zh-CN" sz="1600" b="1" dirty="0">
-                <a:solidFill>
-                  <a:schemeClr val="tx1"/>
-                </a:solidFill>
-                <a:effectLst>
-                  <a:outerShdw blurRad="38100" dist="19050" dir="2700000" algn="tl" rotWithShape="0">
-                    <a:schemeClr val="dk1">
-                      <a:alpha val="40000"/>
-                    </a:schemeClr>
-                  </a:outerShdw>
-                </a:effectLst>
-              </a:rPr>
-              <a:t>1.12</a:t>
-            </a:r>
-            <a:r>
-              <a:rPr lang="zh-CN" altLang="en-US" sz="1600" b="1" dirty="0">
-                <a:solidFill>
-                  <a:schemeClr val="tx1"/>
-                </a:solidFill>
-                <a:effectLst>
-                  <a:outerShdw blurRad="38100" dist="19050" dir="2700000" algn="tl" rotWithShape="0">
-                    <a:schemeClr val="dk1">
-                      <a:alpha val="40000"/>
-                    </a:schemeClr>
-                  </a:outerShdw>
-                </a:effectLst>
-              </a:rPr>
-              <a:t>的电脑</a:t>
-            </a:r>
-            <a:r>
-              <a:rPr lang="en-US" altLang="zh-CN" sz="1600" b="1" dirty="0">
-                <a:solidFill>
-                  <a:schemeClr val="tx1"/>
-                </a:solidFill>
-                <a:effectLst>
-                  <a:outerShdw blurRad="38100" dist="19050" dir="2700000" algn="tl" rotWithShape="0">
-                    <a:schemeClr val="dk1">
-                      <a:alpha val="40000"/>
-                    </a:schemeClr>
-                  </a:outerShdw>
-                </a:effectLst>
-              </a:rPr>
-              <a:t>ping 1.11</a:t>
-            </a:r>
-            <a:r>
-              <a:rPr lang="zh-CN" altLang="en-US" sz="1600" b="1" dirty="0">
-                <a:solidFill>
-                  <a:schemeClr val="tx1"/>
-                </a:solidFill>
-                <a:effectLst>
-                  <a:outerShdw blurRad="38100" dist="19050" dir="2700000" algn="tl" rotWithShape="0">
-                    <a:schemeClr val="dk1">
-                      <a:alpha val="40000"/>
-                    </a:schemeClr>
-                  </a:outerShdw>
-                </a:effectLst>
-              </a:rPr>
-              <a:t>，结果如图所示：</a:t>
-            </a:r>
+            <a:endParaRPr lang="zh-CN" altLang="en-US" dirty="0">
+              <a:solidFill>
+                <a:schemeClr val="tx1">
+                  <a:lumMod val="50000"/>
+                  <a:lumOff val="50000"/>
+                </a:schemeClr>
+              </a:solidFill>
+            </a:endParaRPr>
+          </a:p>
+        </p:txBody>
+      </p:sp>
+      <p:sp>
+        <p:nvSpPr>
+          <p:cNvPr id="25" name="文本框 24">
+            <a:extLst>
+              <a:ext uri="{FF2B5EF4-FFF2-40B4-BE49-F238E27FC236}">
+                <a16:creationId xmlns:a16="http://schemas.microsoft.com/office/drawing/2014/main" id="{BF85E132-EF0A-4BA9-9610-C14B9BBD77BE}"/>
+              </a:ext>
+            </a:extLst>
+          </p:cNvPr>
+          <p:cNvSpPr txBox="1"/>
+          <p:nvPr/>
+        </p:nvSpPr>
+        <p:spPr>
+          <a:xfrm>
+            <a:off x="6836661" y="4115094"/>
+            <a:ext cx="1435008" cy="369332"/>
+          </a:xfrm>
+          <a:prstGeom prst="rect">
+            <a:avLst/>
+          </a:prstGeom>
+          <a:noFill/>
+        </p:spPr>
+        <p:txBody>
+          <a:bodyPr wrap="none" rtlCol="0">
+            <a:spAutoFit/>
+          </a:bodyPr>
+          <a:lstStyle/>
+          <a:p>
+            <a:r>
+              <a:rPr lang="en-US" altLang="zh-CN" dirty="0">
+                <a:solidFill>
+                  <a:schemeClr val="tx1">
+                    <a:lumMod val="50000"/>
+                    <a:lumOff val="50000"/>
+                  </a:schemeClr>
+                </a:solidFill>
+              </a:rPr>
+              <a:t>192.168.1.12</a:t>
+            </a:r>
+            <a:endParaRPr lang="zh-CN" altLang="en-US" dirty="0">
+              <a:solidFill>
+                <a:schemeClr val="tx1">
+                  <a:lumMod val="50000"/>
+                  <a:lumOff val="50000"/>
+                </a:schemeClr>
+              </a:solidFill>
+            </a:endParaRPr>
+          </a:p>
+        </p:txBody>
+      </p:sp>
+      <p:sp>
+        <p:nvSpPr>
+          <p:cNvPr id="26" name="文本框 25">
+            <a:extLst>
+              <a:ext uri="{FF2B5EF4-FFF2-40B4-BE49-F238E27FC236}">
+                <a16:creationId xmlns:a16="http://schemas.microsoft.com/office/drawing/2014/main" id="{5D65D36F-9FDE-4A8B-98C7-7635AC7BD167}"/>
+              </a:ext>
+            </a:extLst>
+          </p:cNvPr>
+          <p:cNvSpPr txBox="1"/>
+          <p:nvPr/>
+        </p:nvSpPr>
+        <p:spPr>
+          <a:xfrm>
+            <a:off x="2567031" y="2860646"/>
+            <a:ext cx="436228" cy="369332"/>
+          </a:xfrm>
+          <a:prstGeom prst="rect">
+            <a:avLst/>
+          </a:prstGeom>
+          <a:noFill/>
+        </p:spPr>
+        <p:txBody>
+          <a:bodyPr wrap="square" rtlCol="0">
+            <a:spAutoFit/>
+          </a:bodyPr>
+          <a:lstStyle/>
+          <a:p>
+            <a:endParaRPr lang="zh-CN" altLang="en-US" dirty="0">
+              <a:solidFill>
+                <a:schemeClr val="tx1">
+                  <a:lumMod val="50000"/>
+                  <a:lumOff val="50000"/>
+                </a:schemeClr>
+              </a:solidFill>
+            </a:endParaRPr>
+          </a:p>
+        </p:txBody>
+      </p:sp>
+      <p:sp>
+        <p:nvSpPr>
+          <p:cNvPr id="30" name="文本框 29">
+            <a:extLst>
+              <a:ext uri="{FF2B5EF4-FFF2-40B4-BE49-F238E27FC236}">
+                <a16:creationId xmlns:a16="http://schemas.microsoft.com/office/drawing/2014/main" id="{01C5441B-1346-40DC-A5B7-F8622BE264F0}"/>
+              </a:ext>
+            </a:extLst>
+          </p:cNvPr>
+          <p:cNvSpPr txBox="1"/>
+          <p:nvPr/>
+        </p:nvSpPr>
+        <p:spPr>
+          <a:xfrm>
+            <a:off x="1434517" y="2793534"/>
+            <a:ext cx="897746" cy="369332"/>
+          </a:xfrm>
+          <a:prstGeom prst="rect">
+            <a:avLst/>
+          </a:prstGeom>
+          <a:noFill/>
+        </p:spPr>
+        <p:txBody>
+          <a:bodyPr wrap="square" rtlCol="0">
+            <a:spAutoFit/>
+          </a:bodyPr>
+          <a:lstStyle/>
+          <a:p>
+            <a:r>
+              <a:rPr lang="zh-CN" altLang="en-US" dirty="0">
+                <a:solidFill>
+                  <a:schemeClr val="tx1">
+                    <a:lumMod val="50000"/>
+                    <a:lumOff val="50000"/>
+                  </a:schemeClr>
+                </a:solidFill>
+              </a:rPr>
+              <a:t>电脑</a:t>
+            </a:r>
+            <a:r>
+              <a:rPr lang="en-US" altLang="zh-CN" dirty="0">
+                <a:solidFill>
+                  <a:schemeClr val="tx1">
+                    <a:lumMod val="50000"/>
+                    <a:lumOff val="50000"/>
+                  </a:schemeClr>
+                </a:solidFill>
+              </a:rPr>
+              <a:t>1</a:t>
+            </a:r>
+            <a:endParaRPr lang="zh-CN" altLang="en-US" dirty="0">
+              <a:solidFill>
+                <a:schemeClr val="tx1">
+                  <a:lumMod val="50000"/>
+                  <a:lumOff val="50000"/>
+                </a:schemeClr>
+              </a:solidFill>
+            </a:endParaRPr>
+          </a:p>
+        </p:txBody>
+      </p:sp>
+      <p:sp>
+        <p:nvSpPr>
+          <p:cNvPr id="32" name="文本框 31">
+            <a:extLst>
+              <a:ext uri="{FF2B5EF4-FFF2-40B4-BE49-F238E27FC236}">
+                <a16:creationId xmlns:a16="http://schemas.microsoft.com/office/drawing/2014/main" id="{27F1E09F-4E90-44A5-84EC-818E13F973E3}"/>
+              </a:ext>
+            </a:extLst>
+          </p:cNvPr>
+          <p:cNvSpPr txBox="1"/>
+          <p:nvPr/>
+        </p:nvSpPr>
+        <p:spPr>
+          <a:xfrm>
+            <a:off x="9949344" y="2933134"/>
+            <a:ext cx="897746" cy="369332"/>
+          </a:xfrm>
+          <a:prstGeom prst="rect">
+            <a:avLst/>
+          </a:prstGeom>
+          <a:noFill/>
+        </p:spPr>
+        <p:txBody>
+          <a:bodyPr wrap="square" rtlCol="0">
+            <a:spAutoFit/>
+          </a:bodyPr>
+          <a:lstStyle/>
+          <a:p>
+            <a:r>
+              <a:rPr lang="zh-CN" altLang="en-US" dirty="0">
+                <a:solidFill>
+                  <a:schemeClr val="tx1">
+                    <a:lumMod val="50000"/>
+                    <a:lumOff val="50000"/>
+                  </a:schemeClr>
+                </a:solidFill>
+              </a:rPr>
+              <a:t>电脑</a:t>
+            </a:r>
+            <a:r>
+              <a:rPr lang="en-US" altLang="zh-CN" dirty="0">
+                <a:solidFill>
+                  <a:schemeClr val="tx1">
+                    <a:lumMod val="50000"/>
+                    <a:lumOff val="50000"/>
+                  </a:schemeClr>
+                </a:solidFill>
+              </a:rPr>
+              <a:t>2</a:t>
+            </a:r>
+            <a:endParaRPr lang="zh-CN" altLang="en-US" dirty="0">
+              <a:solidFill>
+                <a:schemeClr val="tx1">
+                  <a:lumMod val="50000"/>
+                  <a:lumOff val="50000"/>
+                </a:schemeClr>
+              </a:solidFill>
+            </a:endParaRPr>
+          </a:p>
+        </p:txBody>
+      </p:sp>
+      <p:sp>
+        <p:nvSpPr>
+          <p:cNvPr id="38" name="乘号 37">
+            <a:extLst>
+              <a:ext uri="{FF2B5EF4-FFF2-40B4-BE49-F238E27FC236}">
+                <a16:creationId xmlns:a16="http://schemas.microsoft.com/office/drawing/2014/main" id="{39E19EDE-237A-4576-8E26-3AA6715D0F6D}"/>
+              </a:ext>
+            </a:extLst>
+          </p:cNvPr>
+          <p:cNvSpPr/>
+          <p:nvPr/>
+        </p:nvSpPr>
+        <p:spPr>
+          <a:xfrm>
+            <a:off x="5314424" y="1816216"/>
+            <a:ext cx="1082180" cy="1098958"/>
+          </a:xfrm>
+          <a:prstGeom prst="mathMultiply">
+            <a:avLst/>
+          </a:prstGeom>
+        </p:spPr>
+        <p:style>
+          <a:lnRef idx="2">
+            <a:schemeClr val="accent1">
+              <a:shade val="50000"/>
+            </a:schemeClr>
+          </a:lnRef>
+          <a:fillRef idx="1">
+            <a:schemeClr val="accent1"/>
+          </a:fillRef>
+          <a:effectRef idx="0">
+            <a:schemeClr val="accent1"/>
+          </a:effectRef>
+          <a:fontRef idx="minor">
+            <a:schemeClr val="lt1"/>
+          </a:fontRef>
+        </p:style>
+        <p:txBody>
+          <a:bodyPr rtlCol="0" anchor="ctr"/>
+          <a:lstStyle/>
+          <a:p>
+            <a:pPr algn="ctr"/>
+            <a:endParaRPr lang="zh-CN" altLang="en-US">
+              <a:solidFill>
+                <a:schemeClr val="tx1">
+                  <a:lumMod val="50000"/>
+                  <a:lumOff val="50000"/>
+                </a:schemeClr>
+              </a:solidFill>
+            </a:endParaRPr>
           </a:p>
         </p:txBody>
       </p:sp>
       <p:pic>
         <p:nvPicPr>
-          <p:cNvPr id="6" name="内容占位符 5"/>
+          <p:cNvPr id="49" name="图片 48">
+            <a:extLst>
+              <a:ext uri="{FF2B5EF4-FFF2-40B4-BE49-F238E27FC236}">
+                <a16:creationId xmlns:a16="http://schemas.microsoft.com/office/drawing/2014/main" id="{D0E4C9C9-3BCE-4E14-A71F-A055F9ECFE82}"/>
+              </a:ext>
+            </a:extLst>
+          </p:cNvPr>
           <p:cNvPicPr>
-            <a:picLocks noGrp="1"/>
+            <a:picLocks noChangeAspect="1"/>
           </p:cNvPicPr>
-          <p:nvPr>
-            <p:ph idx="1"/>
-          </p:nvPr>
+          <p:nvPr/>
         </p:nvPicPr>
         <p:blipFill>
-          <a:blip r:embed="rId3"/>
+          <a:blip r:embed="rId3" cstate="print">
+            <a:duotone>
+              <a:schemeClr val="bg2">
+                <a:shade val="45000"/>
+                <a:satMod val="135000"/>
+              </a:schemeClr>
+              <a:prstClr val="white"/>
+            </a:duotone>
+            <a:extLst>
+              <a:ext uri="{28A0092B-C50C-407E-A947-70E740481C1C}">
+                <a14:useLocalDpi xmlns:a14="http://schemas.microsoft.com/office/drawing/2010/main" val="0"/>
+              </a:ext>
+            </a:extLst>
+          </a:blip>
           <a:stretch>
             <a:fillRect/>
           </a:stretch>
         </p:blipFill>
         <p:spPr>
           <a:xfrm>
-            <a:off x="758300" y="1490065"/>
-            <a:ext cx="4943741" cy="4351338"/>
-          </a:xfrm>
-          <a:prstGeom prst="rect">
-            <a:avLst/>
-          </a:prstGeom>
-        </p:spPr>
-      </p:pic>
-      <p:pic>
-        <p:nvPicPr>
-          <p:cNvPr id="5" name="图片 4">
-            <a:extLst>
-              <a:ext uri="{FF2B5EF4-FFF2-40B4-BE49-F238E27FC236}">
-                <a16:creationId xmlns:a16="http://schemas.microsoft.com/office/drawing/2014/main" id="{17E0CF89-D575-48DA-B7B5-911FD993F6BB}"/>
-              </a:ext>
-            </a:extLst>
-          </p:cNvPr>
-          <p:cNvPicPr/>
-          <p:nvPr/>
-        </p:nvPicPr>
-        <p:blipFill>
-          <a:blip r:embed="rId4"/>
-          <a:stretch>
-            <a:fillRect/>
-          </a:stretch>
-        </p:blipFill>
-        <p:spPr>
-          <a:xfrm>
-            <a:off x="6210156" y="1588178"/>
-            <a:ext cx="4449369" cy="4351339"/>
+            <a:off x="5477556" y="4857226"/>
+            <a:ext cx="996404" cy="996404"/>
           </a:xfrm>
           <a:prstGeom prst="rect">
             <a:avLst/>
@@ -3389,6 +7245,11 @@
         </p:spPr>
       </p:pic>
     </p:spTree>
+    <p:extLst>
+      <p:ext uri="{BB962C8B-B14F-4D97-AF65-F5344CB8AC3E}">
+        <p14:creationId xmlns:p14="http://schemas.microsoft.com/office/powerpoint/2010/main" val="2479912351"/>
+      </p:ext>
+    </p:extLst>
   </p:cSld>
   <p:clrMapOvr>
     <a:masterClrMapping/>
@@ -3415,10 +7276,14 @@
       </p:grpSpPr>
       <p:pic>
         <p:nvPicPr>
-          <p:cNvPr id="4" name="图片 3" descr="6"/>
-          <p:cNvPicPr>
-            <a:picLocks noChangeAspect="1"/>
-          </p:cNvPicPr>
+          <p:cNvPr id="7" name="图片 6">
+            <a:extLst>
+              <a:ext uri="{FF2B5EF4-FFF2-40B4-BE49-F238E27FC236}">
+                <a16:creationId xmlns:a16="http://schemas.microsoft.com/office/drawing/2014/main" id="{A7CDDFC0-ED93-497A-83FA-C26EE425179A}"/>
+              </a:ext>
+            </a:extLst>
+          </p:cNvPr>
+          <p:cNvPicPr/>
           <p:nvPr/>
         </p:nvPicPr>
         <p:blipFill>
@@ -3430,7 +7295,7 @@
         <p:spPr>
           <a:xfrm>
             <a:off x="0" y="0"/>
-            <a:ext cx="12192000" cy="9091295"/>
+            <a:ext cx="12192000" cy="6858000"/>
           </a:xfrm>
           <a:prstGeom prst="rect">
             <a:avLst/>
@@ -3439,87 +7304,945 @@
       </p:pic>
       <p:sp>
         <p:nvSpPr>
-          <p:cNvPr id="2" name="标题 1"/>
-          <p:cNvSpPr>
-            <a:spLocks noGrp="1"/>
-          </p:cNvSpPr>
-          <p:nvPr>
-            <p:ph type="title"/>
-          </p:nvPr>
-        </p:nvSpPr>
-        <p:spPr/>
-        <p:txBody>
-          <a:bodyPr>
-            <a:normAutofit/>
+          <p:cNvPr id="6" name="矩形 5">
+            <a:extLst>
+              <a:ext uri="{FF2B5EF4-FFF2-40B4-BE49-F238E27FC236}">
+                <a16:creationId xmlns:a16="http://schemas.microsoft.com/office/drawing/2014/main" id="{20D6983C-FA3E-42DB-9E83-79552C0F3811}"/>
+              </a:ext>
+            </a:extLst>
+          </p:cNvPr>
+          <p:cNvSpPr/>
+          <p:nvPr/>
+        </p:nvSpPr>
+        <p:spPr>
+          <a:xfrm>
+            <a:off x="2242656" y="1825625"/>
+            <a:ext cx="1442907" cy="3031601"/>
+          </a:xfrm>
+          <a:prstGeom prst="rect">
+            <a:avLst/>
+          </a:prstGeom>
+        </p:spPr>
+        <p:style>
+          <a:lnRef idx="2">
+            <a:schemeClr val="accent1">
+              <a:shade val="50000"/>
+            </a:schemeClr>
+          </a:lnRef>
+          <a:fillRef idx="1">
+            <a:schemeClr val="accent1"/>
+          </a:fillRef>
+          <a:effectRef idx="0">
+            <a:schemeClr val="accent1"/>
+          </a:effectRef>
+          <a:fontRef idx="minor">
+            <a:schemeClr val="lt1"/>
+          </a:fontRef>
+        </p:style>
+        <p:txBody>
+          <a:bodyPr rtlCol="0" anchor="ctr"/>
+          <a:lstStyle/>
+          <a:p>
+            <a:pPr algn="ctr"/>
+            <a:endParaRPr lang="zh-CN" altLang="en-US">
+              <a:solidFill>
+                <a:schemeClr val="accent1">
+                  <a:lumMod val="40000"/>
+                  <a:lumOff val="60000"/>
+                </a:schemeClr>
+              </a:solidFill>
+            </a:endParaRPr>
+          </a:p>
+        </p:txBody>
+      </p:sp>
+      <p:sp>
+        <p:nvSpPr>
+          <p:cNvPr id="8" name="矩形 7">
+            <a:extLst>
+              <a:ext uri="{FF2B5EF4-FFF2-40B4-BE49-F238E27FC236}">
+                <a16:creationId xmlns:a16="http://schemas.microsoft.com/office/drawing/2014/main" id="{66FD494A-8A44-415C-A68A-ADA3007634E1}"/>
+              </a:ext>
+            </a:extLst>
+          </p:cNvPr>
+          <p:cNvSpPr/>
+          <p:nvPr/>
+        </p:nvSpPr>
+        <p:spPr>
+          <a:xfrm>
+            <a:off x="8265954" y="1825625"/>
+            <a:ext cx="1442907" cy="3031601"/>
+          </a:xfrm>
+          <a:prstGeom prst="rect">
+            <a:avLst/>
+          </a:prstGeom>
+        </p:spPr>
+        <p:style>
+          <a:lnRef idx="2">
+            <a:schemeClr val="accent1">
+              <a:shade val="50000"/>
+            </a:schemeClr>
+          </a:lnRef>
+          <a:fillRef idx="1">
+            <a:schemeClr val="accent1"/>
+          </a:fillRef>
+          <a:effectRef idx="0">
+            <a:schemeClr val="accent1"/>
+          </a:effectRef>
+          <a:fontRef idx="minor">
+            <a:schemeClr val="lt1"/>
+          </a:fontRef>
+        </p:style>
+        <p:txBody>
+          <a:bodyPr rtlCol="0" anchor="ctr"/>
+          <a:lstStyle/>
+          <a:p>
+            <a:pPr algn="ctr"/>
+            <a:endParaRPr lang="zh-CN" altLang="en-US">
+              <a:solidFill>
+                <a:schemeClr val="accent1">
+                  <a:lumMod val="40000"/>
+                  <a:lumOff val="60000"/>
+                </a:schemeClr>
+              </a:solidFill>
+            </a:endParaRPr>
+          </a:p>
+        </p:txBody>
+      </p:sp>
+      <p:cxnSp>
+        <p:nvCxnSpPr>
+          <p:cNvPr id="10" name="直接连接符 9">
+            <a:extLst>
+              <a:ext uri="{FF2B5EF4-FFF2-40B4-BE49-F238E27FC236}">
+                <a16:creationId xmlns:a16="http://schemas.microsoft.com/office/drawing/2014/main" id="{7FBCFEFA-FD7C-40BB-B2C4-FF6BFEB59DA0}"/>
+              </a:ext>
+            </a:extLst>
+          </p:cNvPr>
+          <p:cNvCxnSpPr/>
+          <p:nvPr/>
+        </p:nvCxnSpPr>
+        <p:spPr>
+          <a:xfrm>
+            <a:off x="3204594" y="2365695"/>
+            <a:ext cx="5301843" cy="0"/>
+          </a:xfrm>
+          <a:prstGeom prst="line">
+            <a:avLst/>
+          </a:prstGeom>
+        </p:spPr>
+        <p:style>
+          <a:lnRef idx="3">
+            <a:schemeClr val="dk1"/>
+          </a:lnRef>
+          <a:fillRef idx="0">
+            <a:schemeClr val="dk1"/>
+          </a:fillRef>
+          <a:effectRef idx="2">
+            <a:schemeClr val="dk1"/>
+          </a:effectRef>
+          <a:fontRef idx="minor">
+            <a:schemeClr val="tx1"/>
+          </a:fontRef>
+        </p:style>
+      </p:cxnSp>
+      <p:cxnSp>
+        <p:nvCxnSpPr>
+          <p:cNvPr id="14" name="直接连接符 13">
+            <a:extLst>
+              <a:ext uri="{FF2B5EF4-FFF2-40B4-BE49-F238E27FC236}">
+                <a16:creationId xmlns:a16="http://schemas.microsoft.com/office/drawing/2014/main" id="{4D0281A1-9997-498C-979C-5CD443B8EEB8}"/>
+              </a:ext>
+            </a:extLst>
+          </p:cNvPr>
+          <p:cNvCxnSpPr>
+            <a:cxnSpLocks/>
+          </p:cNvCxnSpPr>
+          <p:nvPr/>
+        </p:nvCxnSpPr>
+        <p:spPr>
+          <a:xfrm>
+            <a:off x="3204593" y="4545647"/>
+            <a:ext cx="5301843" cy="0"/>
+          </a:xfrm>
+          <a:prstGeom prst="line">
+            <a:avLst/>
+          </a:prstGeom>
+          <a:ln w="9525" cap="flat" cmpd="sng" algn="ctr">
+            <a:solidFill>
+              <a:schemeClr val="dk1"/>
+            </a:solidFill>
+            <a:prstDash val="dash"/>
+            <a:round/>
+            <a:headEnd type="none" w="med" len="med"/>
+            <a:tailEnd type="none" w="med" len="med"/>
+          </a:ln>
+        </p:spPr>
+        <p:style>
+          <a:lnRef idx="0">
+            <a:scrgbClr r="0" g="0" b="0"/>
+          </a:lnRef>
+          <a:fillRef idx="0">
+            <a:scrgbClr r="0" g="0" b="0"/>
+          </a:fillRef>
+          <a:effectRef idx="0">
+            <a:scrgbClr r="0" g="0" b="0"/>
+          </a:effectRef>
+          <a:fontRef idx="minor">
+            <a:schemeClr val="tx1"/>
+          </a:fontRef>
+        </p:style>
+      </p:cxnSp>
+      <p:sp>
+        <p:nvSpPr>
+          <p:cNvPr id="19" name="文本框 18">
+            <a:extLst>
+              <a:ext uri="{FF2B5EF4-FFF2-40B4-BE49-F238E27FC236}">
+                <a16:creationId xmlns:a16="http://schemas.microsoft.com/office/drawing/2014/main" id="{CB635EFC-938A-486D-9E5B-D19D6B2AB125}"/>
+              </a:ext>
+            </a:extLst>
+          </p:cNvPr>
+          <p:cNvSpPr txBox="1"/>
+          <p:nvPr/>
+        </p:nvSpPr>
+        <p:spPr>
+          <a:xfrm>
+            <a:off x="3685563" y="1928895"/>
+            <a:ext cx="1435008" cy="369332"/>
+          </a:xfrm>
+          <a:prstGeom prst="rect">
+            <a:avLst/>
+          </a:prstGeom>
+          <a:noFill/>
+        </p:spPr>
+        <p:txBody>
+          <a:bodyPr wrap="none" rtlCol="0">
+            <a:spAutoFit/>
           </a:bodyPr>
           <a:lstStyle/>
           <a:p>
             <a:r>
-              <a:rPr lang="zh-CN" altLang="en-US" sz="1600" b="1" dirty="0">
-                <a:solidFill>
-                  <a:schemeClr val="tx1"/>
-                </a:solidFill>
-                <a:effectLst>
-                  <a:outerShdw blurRad="38100" dist="19050" dir="2700000" algn="tl" rotWithShape="0">
-                    <a:schemeClr val="dk1">
-                      <a:alpha val="40000"/>
-                    </a:schemeClr>
-                  </a:outerShdw>
-                </a:effectLst>
-              </a:rPr>
-              <a:t>第二步：确认两个电脑已经相连成功后，设置共享使两个队伍能够互相传输文件</a:t>
+              <a:rPr lang="en-US" altLang="zh-CN" dirty="0">
+                <a:solidFill>
+                  <a:schemeClr val="accent1">
+                    <a:lumMod val="40000"/>
+                    <a:lumOff val="60000"/>
+                  </a:schemeClr>
+                </a:solidFill>
+              </a:rPr>
+              <a:t>192.168.1.11</a:t>
+            </a:r>
+            <a:endParaRPr lang="zh-CN" altLang="en-US" dirty="0">
+              <a:solidFill>
+                <a:schemeClr val="accent1">
+                  <a:lumMod val="40000"/>
+                  <a:lumOff val="60000"/>
+                </a:schemeClr>
+              </a:solidFill>
+            </a:endParaRPr>
+          </a:p>
+        </p:txBody>
+      </p:sp>
+      <p:sp>
+        <p:nvSpPr>
+          <p:cNvPr id="21" name="文本框 20">
+            <a:extLst>
+              <a:ext uri="{FF2B5EF4-FFF2-40B4-BE49-F238E27FC236}">
+                <a16:creationId xmlns:a16="http://schemas.microsoft.com/office/drawing/2014/main" id="{42D143DB-5FD7-40B7-BFAC-CCF2B6D80B21}"/>
+              </a:ext>
+            </a:extLst>
+          </p:cNvPr>
+          <p:cNvSpPr txBox="1"/>
+          <p:nvPr/>
+        </p:nvSpPr>
+        <p:spPr>
+          <a:xfrm>
+            <a:off x="3685563" y="4108847"/>
+            <a:ext cx="1435008" cy="369332"/>
+          </a:xfrm>
+          <a:prstGeom prst="rect">
+            <a:avLst/>
+          </a:prstGeom>
+          <a:noFill/>
+        </p:spPr>
+        <p:txBody>
+          <a:bodyPr wrap="none" rtlCol="0">
+            <a:spAutoFit/>
+          </a:bodyPr>
+          <a:lstStyle/>
+          <a:p>
+            <a:r>
+              <a:rPr lang="en-US" altLang="zh-CN" dirty="0">
+                <a:solidFill>
+                  <a:schemeClr val="accent1">
+                    <a:lumMod val="40000"/>
+                    <a:lumOff val="60000"/>
+                  </a:schemeClr>
+                </a:solidFill>
+              </a:rPr>
+              <a:t>192.168.1.11</a:t>
+            </a:r>
+            <a:endParaRPr lang="zh-CN" altLang="en-US" dirty="0">
+              <a:solidFill>
+                <a:schemeClr val="accent1">
+                  <a:lumMod val="40000"/>
+                  <a:lumOff val="60000"/>
+                </a:schemeClr>
+              </a:solidFill>
+            </a:endParaRPr>
+          </a:p>
+        </p:txBody>
+      </p:sp>
+      <p:sp>
+        <p:nvSpPr>
+          <p:cNvPr id="23" name="文本框 22">
+            <a:extLst>
+              <a:ext uri="{FF2B5EF4-FFF2-40B4-BE49-F238E27FC236}">
+                <a16:creationId xmlns:a16="http://schemas.microsoft.com/office/drawing/2014/main" id="{CA2A2B83-4D6B-4902-9FD1-DEA707C40560}"/>
+              </a:ext>
+            </a:extLst>
+          </p:cNvPr>
+          <p:cNvSpPr txBox="1"/>
+          <p:nvPr/>
+        </p:nvSpPr>
+        <p:spPr>
+          <a:xfrm>
+            <a:off x="6828762" y="1910994"/>
+            <a:ext cx="1435008" cy="369332"/>
+          </a:xfrm>
+          <a:prstGeom prst="rect">
+            <a:avLst/>
+          </a:prstGeom>
+          <a:noFill/>
+        </p:spPr>
+        <p:txBody>
+          <a:bodyPr wrap="none" rtlCol="0">
+            <a:spAutoFit/>
+          </a:bodyPr>
+          <a:lstStyle/>
+          <a:p>
+            <a:r>
+              <a:rPr lang="en-US" altLang="zh-CN" dirty="0">
+                <a:solidFill>
+                  <a:schemeClr val="accent1">
+                    <a:lumMod val="40000"/>
+                    <a:lumOff val="60000"/>
+                  </a:schemeClr>
+                </a:solidFill>
+              </a:rPr>
+              <a:t>192.168.1.12</a:t>
+            </a:r>
+            <a:endParaRPr lang="zh-CN" altLang="en-US" dirty="0">
+              <a:solidFill>
+                <a:schemeClr val="accent1">
+                  <a:lumMod val="40000"/>
+                  <a:lumOff val="60000"/>
+                </a:schemeClr>
+              </a:solidFill>
+            </a:endParaRPr>
+          </a:p>
+        </p:txBody>
+      </p:sp>
+      <p:sp>
+        <p:nvSpPr>
+          <p:cNvPr id="25" name="文本框 24">
+            <a:extLst>
+              <a:ext uri="{FF2B5EF4-FFF2-40B4-BE49-F238E27FC236}">
+                <a16:creationId xmlns:a16="http://schemas.microsoft.com/office/drawing/2014/main" id="{BF85E132-EF0A-4BA9-9610-C14B9BBD77BE}"/>
+              </a:ext>
+            </a:extLst>
+          </p:cNvPr>
+          <p:cNvSpPr txBox="1"/>
+          <p:nvPr/>
+        </p:nvSpPr>
+        <p:spPr>
+          <a:xfrm>
+            <a:off x="6836661" y="4115094"/>
+            <a:ext cx="1435008" cy="369332"/>
+          </a:xfrm>
+          <a:prstGeom prst="rect">
+            <a:avLst/>
+          </a:prstGeom>
+          <a:noFill/>
+        </p:spPr>
+        <p:txBody>
+          <a:bodyPr wrap="none" rtlCol="0">
+            <a:spAutoFit/>
+          </a:bodyPr>
+          <a:lstStyle/>
+          <a:p>
+            <a:r>
+              <a:rPr lang="en-US" altLang="zh-CN" dirty="0">
+                <a:solidFill>
+                  <a:schemeClr val="accent1">
+                    <a:lumMod val="40000"/>
+                    <a:lumOff val="60000"/>
+                  </a:schemeClr>
+                </a:solidFill>
+              </a:rPr>
+              <a:t>192.168.1.12</a:t>
+            </a:r>
+            <a:endParaRPr lang="zh-CN" altLang="en-US" dirty="0">
+              <a:solidFill>
+                <a:schemeClr val="accent1">
+                  <a:lumMod val="40000"/>
+                  <a:lumOff val="60000"/>
+                </a:schemeClr>
+              </a:solidFill>
+            </a:endParaRPr>
+          </a:p>
+        </p:txBody>
+      </p:sp>
+      <p:sp>
+        <p:nvSpPr>
+          <p:cNvPr id="26" name="文本框 25">
+            <a:extLst>
+              <a:ext uri="{FF2B5EF4-FFF2-40B4-BE49-F238E27FC236}">
+                <a16:creationId xmlns:a16="http://schemas.microsoft.com/office/drawing/2014/main" id="{5D65D36F-9FDE-4A8B-98C7-7635AC7BD167}"/>
+              </a:ext>
+            </a:extLst>
+          </p:cNvPr>
+          <p:cNvSpPr txBox="1"/>
+          <p:nvPr/>
+        </p:nvSpPr>
+        <p:spPr>
+          <a:xfrm>
+            <a:off x="2567031" y="2860646"/>
+            <a:ext cx="436228" cy="369332"/>
+          </a:xfrm>
+          <a:prstGeom prst="rect">
+            <a:avLst/>
+          </a:prstGeom>
+          <a:noFill/>
+        </p:spPr>
+        <p:txBody>
+          <a:bodyPr wrap="square" rtlCol="0">
+            <a:spAutoFit/>
+          </a:bodyPr>
+          <a:lstStyle/>
+          <a:p>
+            <a:endParaRPr lang="zh-CN" altLang="en-US" dirty="0">
+              <a:solidFill>
+                <a:schemeClr val="accent1">
+                  <a:lumMod val="40000"/>
+                  <a:lumOff val="60000"/>
+                </a:schemeClr>
+              </a:solidFill>
+            </a:endParaRPr>
+          </a:p>
+        </p:txBody>
+      </p:sp>
+      <p:sp>
+        <p:nvSpPr>
+          <p:cNvPr id="30" name="文本框 29">
+            <a:extLst>
+              <a:ext uri="{FF2B5EF4-FFF2-40B4-BE49-F238E27FC236}">
+                <a16:creationId xmlns:a16="http://schemas.microsoft.com/office/drawing/2014/main" id="{01C5441B-1346-40DC-A5B7-F8622BE264F0}"/>
+              </a:ext>
+            </a:extLst>
+          </p:cNvPr>
+          <p:cNvSpPr txBox="1"/>
+          <p:nvPr/>
+        </p:nvSpPr>
+        <p:spPr>
+          <a:xfrm>
+            <a:off x="1434517" y="2793534"/>
+            <a:ext cx="897746" cy="369332"/>
+          </a:xfrm>
+          <a:prstGeom prst="rect">
+            <a:avLst/>
+          </a:prstGeom>
+          <a:noFill/>
+        </p:spPr>
+        <p:txBody>
+          <a:bodyPr wrap="square" rtlCol="0">
+            <a:spAutoFit/>
+          </a:bodyPr>
+          <a:lstStyle/>
+          <a:p>
+            <a:r>
+              <a:rPr lang="zh-CN" altLang="en-US" dirty="0">
+                <a:solidFill>
+                  <a:schemeClr val="accent1">
+                    <a:lumMod val="40000"/>
+                    <a:lumOff val="60000"/>
+                  </a:schemeClr>
+                </a:solidFill>
+              </a:rPr>
+              <a:t>电脑</a:t>
+            </a:r>
+            <a:r>
+              <a:rPr lang="en-US" altLang="zh-CN" dirty="0">
+                <a:solidFill>
+                  <a:schemeClr val="accent1">
+                    <a:lumMod val="40000"/>
+                    <a:lumOff val="60000"/>
+                  </a:schemeClr>
+                </a:solidFill>
+              </a:rPr>
+              <a:t>1</a:t>
+            </a:r>
+            <a:endParaRPr lang="zh-CN" altLang="en-US" dirty="0">
+              <a:solidFill>
+                <a:schemeClr val="accent1">
+                  <a:lumMod val="40000"/>
+                  <a:lumOff val="60000"/>
+                </a:schemeClr>
+              </a:solidFill>
+            </a:endParaRPr>
+          </a:p>
+        </p:txBody>
+      </p:sp>
+      <p:sp>
+        <p:nvSpPr>
+          <p:cNvPr id="32" name="文本框 31">
+            <a:extLst>
+              <a:ext uri="{FF2B5EF4-FFF2-40B4-BE49-F238E27FC236}">
+                <a16:creationId xmlns:a16="http://schemas.microsoft.com/office/drawing/2014/main" id="{27F1E09F-4E90-44A5-84EC-818E13F973E3}"/>
+              </a:ext>
+            </a:extLst>
+          </p:cNvPr>
+          <p:cNvSpPr txBox="1"/>
+          <p:nvPr/>
+        </p:nvSpPr>
+        <p:spPr>
+          <a:xfrm>
+            <a:off x="9949344" y="2933134"/>
+            <a:ext cx="897746" cy="369332"/>
+          </a:xfrm>
+          <a:prstGeom prst="rect">
+            <a:avLst/>
+          </a:prstGeom>
+          <a:noFill/>
+        </p:spPr>
+        <p:txBody>
+          <a:bodyPr wrap="square" rtlCol="0">
+            <a:spAutoFit/>
+          </a:bodyPr>
+          <a:lstStyle/>
+          <a:p>
+            <a:r>
+              <a:rPr lang="zh-CN" altLang="en-US" dirty="0">
+                <a:solidFill>
+                  <a:schemeClr val="accent1">
+                    <a:lumMod val="40000"/>
+                    <a:lumOff val="60000"/>
+                  </a:schemeClr>
+                </a:solidFill>
+              </a:rPr>
+              <a:t>电脑</a:t>
+            </a:r>
+            <a:r>
+              <a:rPr lang="en-US" altLang="zh-CN" dirty="0">
+                <a:solidFill>
+                  <a:schemeClr val="accent1">
+                    <a:lumMod val="40000"/>
+                    <a:lumOff val="60000"/>
+                  </a:schemeClr>
+                </a:solidFill>
+              </a:rPr>
+              <a:t>2</a:t>
+            </a:r>
+            <a:endParaRPr lang="zh-CN" altLang="en-US" dirty="0">
+              <a:solidFill>
+                <a:schemeClr val="accent1">
+                  <a:lumMod val="40000"/>
+                  <a:lumOff val="60000"/>
+                </a:schemeClr>
+              </a:solidFill>
+            </a:endParaRPr>
+          </a:p>
+        </p:txBody>
+      </p:sp>
+      <p:sp>
+        <p:nvSpPr>
+          <p:cNvPr id="33" name="文本框 32">
+            <a:extLst>
+              <a:ext uri="{FF2B5EF4-FFF2-40B4-BE49-F238E27FC236}">
+                <a16:creationId xmlns:a16="http://schemas.microsoft.com/office/drawing/2014/main" id="{E54A518E-2A3D-40B2-A8B7-328C73885FE7}"/>
+              </a:ext>
+            </a:extLst>
+          </p:cNvPr>
+          <p:cNvSpPr txBox="1"/>
+          <p:nvPr/>
+        </p:nvSpPr>
+        <p:spPr>
+          <a:xfrm>
+            <a:off x="4890781" y="5636625"/>
+            <a:ext cx="2169953" cy="369332"/>
+          </a:xfrm>
+          <a:prstGeom prst="rect">
+            <a:avLst/>
+          </a:prstGeom>
+          <a:noFill/>
+        </p:spPr>
+        <p:txBody>
+          <a:bodyPr wrap="square" rtlCol="0">
+            <a:spAutoFit/>
+          </a:bodyPr>
+          <a:lstStyle/>
+          <a:p>
+            <a:pPr algn="ctr"/>
+            <a:r>
+              <a:rPr lang="zh-CN" altLang="en-US" dirty="0">
+                <a:solidFill>
+                  <a:schemeClr val="accent1">
+                    <a:lumMod val="40000"/>
+                    <a:lumOff val="60000"/>
+                  </a:schemeClr>
+                </a:solidFill>
+              </a:rPr>
+              <a:t>速度法</a:t>
+            </a:r>
+          </a:p>
+        </p:txBody>
+      </p:sp>
+      <p:sp>
+        <p:nvSpPr>
+          <p:cNvPr id="34" name="文本框 33">
+            <a:extLst>
+              <a:ext uri="{FF2B5EF4-FFF2-40B4-BE49-F238E27FC236}">
+                <a16:creationId xmlns:a16="http://schemas.microsoft.com/office/drawing/2014/main" id="{CB269ED2-E0FB-4858-BD17-89C4357B9753}"/>
+              </a:ext>
+            </a:extLst>
+          </p:cNvPr>
+          <p:cNvSpPr txBox="1"/>
+          <p:nvPr/>
+        </p:nvSpPr>
+        <p:spPr>
+          <a:xfrm>
+            <a:off x="5274366" y="4049403"/>
+            <a:ext cx="1171662" cy="369332"/>
+          </a:xfrm>
+          <a:prstGeom prst="rect">
+            <a:avLst/>
+          </a:prstGeom>
+          <a:noFill/>
+        </p:spPr>
+        <p:txBody>
+          <a:bodyPr wrap="square" rtlCol="0">
+            <a:spAutoFit/>
+          </a:bodyPr>
+          <a:lstStyle/>
+          <a:p>
+            <a:r>
+              <a:rPr lang="zh-CN" altLang="en-US" dirty="0">
+                <a:solidFill>
+                  <a:schemeClr val="accent1">
+                    <a:lumMod val="40000"/>
+                    <a:lumOff val="60000"/>
+                  </a:schemeClr>
+                </a:solidFill>
+              </a:rPr>
+              <a:t>速度</a:t>
+            </a:r>
+            <a:r>
+              <a:rPr lang="en-US" altLang="zh-CN" dirty="0">
+                <a:solidFill>
+                  <a:schemeClr val="accent1">
+                    <a:lumMod val="40000"/>
+                    <a:lumOff val="60000"/>
+                  </a:schemeClr>
+                </a:solidFill>
+              </a:rPr>
+              <a:t>B</a:t>
+            </a:r>
+            <a:endParaRPr lang="zh-CN" altLang="en-US" dirty="0">
+              <a:solidFill>
+                <a:schemeClr val="accent1">
+                  <a:lumMod val="40000"/>
+                  <a:lumOff val="60000"/>
+                </a:schemeClr>
+              </a:solidFill>
+            </a:endParaRPr>
+          </a:p>
+        </p:txBody>
+      </p:sp>
+      <p:sp>
+        <p:nvSpPr>
+          <p:cNvPr id="36" name="文本框 35">
+            <a:extLst>
+              <a:ext uri="{FF2B5EF4-FFF2-40B4-BE49-F238E27FC236}">
+                <a16:creationId xmlns:a16="http://schemas.microsoft.com/office/drawing/2014/main" id="{6B1191B4-52AE-49BA-8870-6798ED31BD1F}"/>
+              </a:ext>
+            </a:extLst>
+          </p:cNvPr>
+          <p:cNvSpPr txBox="1"/>
+          <p:nvPr/>
+        </p:nvSpPr>
+        <p:spPr>
+          <a:xfrm>
+            <a:off x="5269683" y="1477145"/>
+            <a:ext cx="1171662" cy="369332"/>
+          </a:xfrm>
+          <a:prstGeom prst="rect">
+            <a:avLst/>
+          </a:prstGeom>
+          <a:noFill/>
+        </p:spPr>
+        <p:txBody>
+          <a:bodyPr wrap="square" rtlCol="0">
+            <a:spAutoFit/>
+          </a:bodyPr>
+          <a:lstStyle/>
+          <a:p>
+            <a:r>
+              <a:rPr lang="zh-CN" altLang="en-US" dirty="0">
+                <a:solidFill>
+                  <a:schemeClr val="accent1">
+                    <a:lumMod val="40000"/>
+                    <a:lumOff val="60000"/>
+                  </a:schemeClr>
+                </a:solidFill>
+              </a:rPr>
+              <a:t>速度</a:t>
+            </a:r>
+            <a:r>
+              <a:rPr lang="en-US" altLang="zh-CN" dirty="0">
+                <a:solidFill>
+                  <a:schemeClr val="accent1">
+                    <a:lumMod val="40000"/>
+                    <a:lumOff val="60000"/>
+                  </a:schemeClr>
+                </a:solidFill>
+              </a:rPr>
+              <a:t>A</a:t>
+            </a:r>
+            <a:endParaRPr lang="zh-CN" altLang="en-US" dirty="0">
+              <a:solidFill>
+                <a:schemeClr val="accent1">
+                  <a:lumMod val="40000"/>
+                  <a:lumOff val="60000"/>
+                </a:schemeClr>
+              </a:solidFill>
+            </a:endParaRPr>
+          </a:p>
+        </p:txBody>
+      </p:sp>
+      <p:sp>
+        <p:nvSpPr>
+          <p:cNvPr id="37" name="文本框 36">
+            <a:extLst>
+              <a:ext uri="{FF2B5EF4-FFF2-40B4-BE49-F238E27FC236}">
+                <a16:creationId xmlns:a16="http://schemas.microsoft.com/office/drawing/2014/main" id="{D233130F-9A52-47B3-9D2F-850E31C59CCD}"/>
+              </a:ext>
+            </a:extLst>
+          </p:cNvPr>
+          <p:cNvSpPr txBox="1"/>
+          <p:nvPr/>
+        </p:nvSpPr>
+        <p:spPr>
+          <a:xfrm>
+            <a:off x="302065" y="5179661"/>
+            <a:ext cx="3162649" cy="923330"/>
+          </a:xfrm>
+          <a:prstGeom prst="rect">
+            <a:avLst/>
+          </a:prstGeom>
+          <a:noFill/>
+        </p:spPr>
+        <p:txBody>
+          <a:bodyPr wrap="square" rtlCol="0">
+            <a:spAutoFit/>
+          </a:bodyPr>
+          <a:lstStyle/>
+          <a:p>
+            <a:r>
+              <a:rPr lang="en-US" altLang="zh-CN" dirty="0">
+                <a:solidFill>
+                  <a:schemeClr val="accent1">
+                    <a:lumMod val="40000"/>
+                    <a:lumOff val="60000"/>
+                  </a:schemeClr>
+                </a:solidFill>
+              </a:rPr>
+              <a:t>1.</a:t>
+            </a:r>
+            <a:r>
+              <a:rPr lang="zh-CN" altLang="en-US" dirty="0">
+                <a:solidFill>
+                  <a:schemeClr val="accent1">
+                    <a:lumMod val="40000"/>
+                    <a:lumOff val="60000"/>
+                  </a:schemeClr>
+                </a:solidFill>
+              </a:rPr>
+              <a:t>速度</a:t>
+            </a:r>
+            <a:r>
+              <a:rPr lang="en-US" altLang="zh-CN" dirty="0">
+                <a:solidFill>
+                  <a:schemeClr val="accent1">
+                    <a:lumMod val="40000"/>
+                    <a:lumOff val="60000"/>
+                  </a:schemeClr>
+                </a:solidFill>
+              </a:rPr>
+              <a:t>C=B</a:t>
+            </a:r>
+          </a:p>
+          <a:p>
+            <a:r>
+              <a:rPr lang="en-US" altLang="zh-CN" dirty="0">
+                <a:solidFill>
+                  <a:schemeClr val="accent1">
+                    <a:lumMod val="40000"/>
+                    <a:lumOff val="60000"/>
+                  </a:schemeClr>
+                </a:solidFill>
+              </a:rPr>
+              <a:t>2.</a:t>
+            </a:r>
+            <a:r>
+              <a:rPr lang="zh-CN" altLang="en-US" dirty="0">
+                <a:solidFill>
+                  <a:schemeClr val="accent1">
+                    <a:lumMod val="40000"/>
+                    <a:lumOff val="60000"/>
+                  </a:schemeClr>
+                </a:solidFill>
+              </a:rPr>
+              <a:t>速度</a:t>
+            </a:r>
+            <a:r>
+              <a:rPr lang="en-US" altLang="zh-CN" dirty="0">
+                <a:solidFill>
+                  <a:schemeClr val="accent1">
+                    <a:lumMod val="40000"/>
+                    <a:lumOff val="60000"/>
+                  </a:schemeClr>
+                </a:solidFill>
+              </a:rPr>
+              <a:t>C=A</a:t>
+            </a:r>
+          </a:p>
+          <a:p>
+            <a:r>
+              <a:rPr lang="en-US" altLang="zh-CN" dirty="0">
+                <a:solidFill>
+                  <a:schemeClr val="accent1">
+                    <a:lumMod val="40000"/>
+                    <a:lumOff val="60000"/>
+                  </a:schemeClr>
+                </a:solidFill>
+              </a:rPr>
+              <a:t>3.</a:t>
+            </a:r>
+            <a:r>
+              <a:rPr lang="zh-CN" altLang="en-US" dirty="0">
+                <a:solidFill>
+                  <a:schemeClr val="accent1">
+                    <a:lumMod val="40000"/>
+                    <a:lumOff val="60000"/>
+                  </a:schemeClr>
+                </a:solidFill>
+              </a:rPr>
+              <a:t>速度</a:t>
+            </a:r>
+            <a:r>
+              <a:rPr lang="en-US" altLang="zh-CN" dirty="0">
+                <a:solidFill>
+                  <a:schemeClr val="accent1">
+                    <a:lumMod val="40000"/>
+                    <a:lumOff val="60000"/>
+                  </a:schemeClr>
+                </a:solidFill>
+              </a:rPr>
+              <a:t>C</a:t>
+            </a:r>
+            <a:r>
+              <a:rPr lang="zh-CN" altLang="en-US" dirty="0">
+                <a:solidFill>
+                  <a:schemeClr val="accent1">
+                    <a:lumMod val="40000"/>
+                    <a:lumOff val="60000"/>
+                  </a:schemeClr>
+                </a:solidFill>
+              </a:rPr>
+              <a:t>在</a:t>
+            </a:r>
+            <a:r>
+              <a:rPr lang="en-US" altLang="zh-CN" dirty="0">
+                <a:solidFill>
+                  <a:schemeClr val="accent1">
+                    <a:lumMod val="40000"/>
+                    <a:lumOff val="60000"/>
+                  </a:schemeClr>
+                </a:solidFill>
+              </a:rPr>
+              <a:t>A</a:t>
+            </a:r>
+            <a:r>
+              <a:rPr lang="zh-CN" altLang="en-US" dirty="0">
+                <a:solidFill>
+                  <a:schemeClr val="accent1">
+                    <a:lumMod val="40000"/>
+                    <a:lumOff val="60000"/>
+                  </a:schemeClr>
+                </a:solidFill>
+              </a:rPr>
+              <a:t>，</a:t>
+            </a:r>
+            <a:r>
+              <a:rPr lang="en-US" altLang="zh-CN" dirty="0">
+                <a:solidFill>
+                  <a:schemeClr val="accent1">
+                    <a:lumMod val="40000"/>
+                    <a:lumOff val="60000"/>
+                  </a:schemeClr>
+                </a:solidFill>
+              </a:rPr>
+              <a:t>B</a:t>
+            </a:r>
+            <a:r>
+              <a:rPr lang="zh-CN" altLang="en-US" dirty="0">
+                <a:solidFill>
+                  <a:schemeClr val="accent1">
+                    <a:lumMod val="40000"/>
+                    <a:lumOff val="60000"/>
+                  </a:schemeClr>
+                </a:solidFill>
+              </a:rPr>
+              <a:t>之间</a:t>
             </a:r>
           </a:p>
         </p:txBody>
       </p:sp>
       <p:pic>
         <p:nvPicPr>
-          <p:cNvPr id="6" name="内容占位符 5"/>
+          <p:cNvPr id="9" name="图片 8">
+            <a:extLst>
+              <a:ext uri="{FF2B5EF4-FFF2-40B4-BE49-F238E27FC236}">
+                <a16:creationId xmlns:a16="http://schemas.microsoft.com/office/drawing/2014/main" id="{1E06D4A5-1909-4F10-8013-C5D7826952F7}"/>
+              </a:ext>
+            </a:extLst>
+          </p:cNvPr>
           <p:cNvPicPr>
-            <a:picLocks noGrp="1"/>
+            <a:picLocks noChangeAspect="1"/>
           </p:cNvPicPr>
-          <p:nvPr>
-            <p:ph idx="1"/>
-          </p:nvPr>
+          <p:nvPr/>
         </p:nvPicPr>
         <p:blipFill>
-          <a:blip r:embed="rId3"/>
+          <a:blip r:embed="rId3" cstate="print">
+            <a:duotone>
+              <a:schemeClr val="bg2">
+                <a:shade val="45000"/>
+                <a:satMod val="135000"/>
+              </a:schemeClr>
+              <a:prstClr val="white"/>
+            </a:duotone>
+            <a:extLst>
+              <a:ext uri="{28A0092B-C50C-407E-A947-70E740481C1C}">
+                <a14:useLocalDpi xmlns:a14="http://schemas.microsoft.com/office/drawing/2010/main" val="0"/>
+              </a:ext>
+            </a:extLst>
+          </a:blip>
           <a:stretch>
             <a:fillRect/>
           </a:stretch>
         </p:blipFill>
         <p:spPr>
           <a:xfrm>
-            <a:off x="5922518" y="1676665"/>
-            <a:ext cx="5513617" cy="3714326"/>
-          </a:xfrm>
-          <a:prstGeom prst="rect">
-            <a:avLst/>
-          </a:prstGeom>
-        </p:spPr>
-      </p:pic>
-      <p:pic>
-        <p:nvPicPr>
-          <p:cNvPr id="5" name="图片 4">
-            <a:extLst>
-              <a:ext uri="{FF2B5EF4-FFF2-40B4-BE49-F238E27FC236}">
-                <a16:creationId xmlns:a16="http://schemas.microsoft.com/office/drawing/2014/main" id="{AEBD76FF-2F70-436F-8FCB-D4F09CA1F1A6}"/>
-              </a:ext>
-            </a:extLst>
-          </p:cNvPr>
-          <p:cNvPicPr/>
-          <p:nvPr/>
-        </p:nvPicPr>
-        <p:blipFill>
-          <a:blip r:embed="rId4"/>
-          <a:stretch>
-            <a:fillRect/>
-          </a:stretch>
-        </p:blipFill>
-        <p:spPr>
-          <a:xfrm>
-            <a:off x="755865" y="1495237"/>
-            <a:ext cx="4793126" cy="4050466"/>
+            <a:off x="5477556" y="4606869"/>
+            <a:ext cx="996404" cy="996404"/>
           </a:xfrm>
           <a:prstGeom prst="rect">
             <a:avLst/>
@@ -3527,6 +8250,11 @@
         </p:spPr>
       </p:pic>
     </p:spTree>
+    <p:extLst>
+      <p:ext uri="{BB962C8B-B14F-4D97-AF65-F5344CB8AC3E}">
+        <p14:creationId xmlns:p14="http://schemas.microsoft.com/office/powerpoint/2010/main" val="13672037"/>
+      </p:ext>
+    </p:extLst>
   </p:cSld>
   <p:clrMapOvr>
     <a:masterClrMapping/>
@@ -3553,10 +8281,14 @@
       </p:grpSpPr>
       <p:pic>
         <p:nvPicPr>
-          <p:cNvPr id="4" name="图片 3" descr="6"/>
-          <p:cNvPicPr>
-            <a:picLocks noChangeAspect="1"/>
-          </p:cNvPicPr>
+          <p:cNvPr id="7" name="图片 6">
+            <a:extLst>
+              <a:ext uri="{FF2B5EF4-FFF2-40B4-BE49-F238E27FC236}">
+                <a16:creationId xmlns:a16="http://schemas.microsoft.com/office/drawing/2014/main" id="{EF7B3635-186D-43B6-80D1-675D8EE77566}"/>
+              </a:ext>
+            </a:extLst>
+          </p:cNvPr>
+          <p:cNvPicPr/>
           <p:nvPr/>
         </p:nvPicPr>
         <p:blipFill>
@@ -3568,7 +8300,7 @@
         <p:spPr>
           <a:xfrm>
             <a:off x="0" y="0"/>
-            <a:ext cx="12192000" cy="9091295"/>
+            <a:ext cx="12192000" cy="6858000"/>
           </a:xfrm>
           <a:prstGeom prst="rect">
             <a:avLst/>
@@ -3577,86 +8309,978 @@
       </p:pic>
       <p:sp>
         <p:nvSpPr>
-          <p:cNvPr id="2" name="标题 1"/>
-          <p:cNvSpPr>
-            <a:spLocks noGrp="1"/>
-          </p:cNvSpPr>
-          <p:nvPr>
-            <p:ph type="title"/>
-          </p:nvPr>
-        </p:nvSpPr>
-        <p:spPr>
-          <a:xfrm>
-            <a:off x="909221" y="400635"/>
-            <a:ext cx="10515600" cy="1325563"/>
-          </a:xfrm>
-        </p:spPr>
-        <p:txBody>
-          <a:bodyPr>
-            <a:normAutofit/>
+          <p:cNvPr id="6" name="矩形 5">
+            <a:extLst>
+              <a:ext uri="{FF2B5EF4-FFF2-40B4-BE49-F238E27FC236}">
+                <a16:creationId xmlns:a16="http://schemas.microsoft.com/office/drawing/2014/main" id="{20D6983C-FA3E-42DB-9E83-79552C0F3811}"/>
+              </a:ext>
+            </a:extLst>
+          </p:cNvPr>
+          <p:cNvSpPr/>
+          <p:nvPr/>
+        </p:nvSpPr>
+        <p:spPr>
+          <a:xfrm>
+            <a:off x="2242656" y="1825625"/>
+            <a:ext cx="1442907" cy="3031601"/>
+          </a:xfrm>
+          <a:prstGeom prst="rect">
+            <a:avLst/>
+          </a:prstGeom>
+        </p:spPr>
+        <p:style>
+          <a:lnRef idx="2">
+            <a:schemeClr val="accent1">
+              <a:shade val="50000"/>
+            </a:schemeClr>
+          </a:lnRef>
+          <a:fillRef idx="1">
+            <a:schemeClr val="accent1"/>
+          </a:fillRef>
+          <a:effectRef idx="0">
+            <a:schemeClr val="accent1"/>
+          </a:effectRef>
+          <a:fontRef idx="minor">
+            <a:schemeClr val="lt1"/>
+          </a:fontRef>
+        </p:style>
+        <p:txBody>
+          <a:bodyPr rtlCol="0" anchor="ctr"/>
+          <a:lstStyle/>
+          <a:p>
+            <a:pPr algn="ctr"/>
+            <a:endParaRPr lang="zh-CN" altLang="en-US">
+              <a:solidFill>
+                <a:schemeClr val="accent1">
+                  <a:lumMod val="40000"/>
+                  <a:lumOff val="60000"/>
+                </a:schemeClr>
+              </a:solidFill>
+            </a:endParaRPr>
+          </a:p>
+        </p:txBody>
+      </p:sp>
+      <p:sp>
+        <p:nvSpPr>
+          <p:cNvPr id="8" name="矩形 7">
+            <a:extLst>
+              <a:ext uri="{FF2B5EF4-FFF2-40B4-BE49-F238E27FC236}">
+                <a16:creationId xmlns:a16="http://schemas.microsoft.com/office/drawing/2014/main" id="{66FD494A-8A44-415C-A68A-ADA3007634E1}"/>
+              </a:ext>
+            </a:extLst>
+          </p:cNvPr>
+          <p:cNvSpPr/>
+          <p:nvPr/>
+        </p:nvSpPr>
+        <p:spPr>
+          <a:xfrm>
+            <a:off x="8265954" y="1825625"/>
+            <a:ext cx="1442907" cy="3031601"/>
+          </a:xfrm>
+          <a:prstGeom prst="rect">
+            <a:avLst/>
+          </a:prstGeom>
+        </p:spPr>
+        <p:style>
+          <a:lnRef idx="2">
+            <a:schemeClr val="accent1">
+              <a:shade val="50000"/>
+            </a:schemeClr>
+          </a:lnRef>
+          <a:fillRef idx="1">
+            <a:schemeClr val="accent1"/>
+          </a:fillRef>
+          <a:effectRef idx="0">
+            <a:schemeClr val="accent1"/>
+          </a:effectRef>
+          <a:fontRef idx="minor">
+            <a:schemeClr val="lt1"/>
+          </a:fontRef>
+        </p:style>
+        <p:txBody>
+          <a:bodyPr rtlCol="0" anchor="ctr"/>
+          <a:lstStyle/>
+          <a:p>
+            <a:pPr algn="ctr"/>
+            <a:endParaRPr lang="zh-CN" altLang="en-US">
+              <a:solidFill>
+                <a:schemeClr val="accent1">
+                  <a:lumMod val="40000"/>
+                  <a:lumOff val="60000"/>
+                </a:schemeClr>
+              </a:solidFill>
+            </a:endParaRPr>
+          </a:p>
+        </p:txBody>
+      </p:sp>
+      <p:cxnSp>
+        <p:nvCxnSpPr>
+          <p:cNvPr id="10" name="直接连接符 9">
+            <a:extLst>
+              <a:ext uri="{FF2B5EF4-FFF2-40B4-BE49-F238E27FC236}">
+                <a16:creationId xmlns:a16="http://schemas.microsoft.com/office/drawing/2014/main" id="{7FBCFEFA-FD7C-40BB-B2C4-FF6BFEB59DA0}"/>
+              </a:ext>
+            </a:extLst>
+          </p:cNvPr>
+          <p:cNvCxnSpPr/>
+          <p:nvPr/>
+        </p:nvCxnSpPr>
+        <p:spPr>
+          <a:xfrm>
+            <a:off x="3204594" y="2365695"/>
+            <a:ext cx="5301843" cy="0"/>
+          </a:xfrm>
+          <a:prstGeom prst="line">
+            <a:avLst/>
+          </a:prstGeom>
+        </p:spPr>
+        <p:style>
+          <a:lnRef idx="3">
+            <a:schemeClr val="dk1"/>
+          </a:lnRef>
+          <a:fillRef idx="0">
+            <a:schemeClr val="dk1"/>
+          </a:fillRef>
+          <a:effectRef idx="2">
+            <a:schemeClr val="dk1"/>
+          </a:effectRef>
+          <a:fontRef idx="minor">
+            <a:schemeClr val="tx1"/>
+          </a:fontRef>
+        </p:style>
+      </p:cxnSp>
+      <p:cxnSp>
+        <p:nvCxnSpPr>
+          <p:cNvPr id="14" name="直接连接符 13">
+            <a:extLst>
+              <a:ext uri="{FF2B5EF4-FFF2-40B4-BE49-F238E27FC236}">
+                <a16:creationId xmlns:a16="http://schemas.microsoft.com/office/drawing/2014/main" id="{4D0281A1-9997-498C-979C-5CD443B8EEB8}"/>
+              </a:ext>
+            </a:extLst>
+          </p:cNvPr>
+          <p:cNvCxnSpPr>
+            <a:cxnSpLocks/>
+          </p:cNvCxnSpPr>
+          <p:nvPr/>
+        </p:nvCxnSpPr>
+        <p:spPr>
+          <a:xfrm>
+            <a:off x="3204593" y="4545647"/>
+            <a:ext cx="5301843" cy="0"/>
+          </a:xfrm>
+          <a:prstGeom prst="line">
+            <a:avLst/>
+          </a:prstGeom>
+          <a:ln w="9525" cap="flat" cmpd="sng" algn="ctr">
+            <a:solidFill>
+              <a:schemeClr val="dk1"/>
+            </a:solidFill>
+            <a:prstDash val="dash"/>
+            <a:round/>
+            <a:headEnd type="none" w="med" len="med"/>
+            <a:tailEnd type="none" w="med" len="med"/>
+          </a:ln>
+        </p:spPr>
+        <p:style>
+          <a:lnRef idx="0">
+            <a:scrgbClr r="0" g="0" b="0"/>
+          </a:lnRef>
+          <a:fillRef idx="0">
+            <a:scrgbClr r="0" g="0" b="0"/>
+          </a:fillRef>
+          <a:effectRef idx="0">
+            <a:scrgbClr r="0" g="0" b="0"/>
+          </a:effectRef>
+          <a:fontRef idx="minor">
+            <a:schemeClr val="tx1"/>
+          </a:fontRef>
+        </p:style>
+      </p:cxnSp>
+      <p:sp>
+        <p:nvSpPr>
+          <p:cNvPr id="19" name="文本框 18">
+            <a:extLst>
+              <a:ext uri="{FF2B5EF4-FFF2-40B4-BE49-F238E27FC236}">
+                <a16:creationId xmlns:a16="http://schemas.microsoft.com/office/drawing/2014/main" id="{CB635EFC-938A-486D-9E5B-D19D6B2AB125}"/>
+              </a:ext>
+            </a:extLst>
+          </p:cNvPr>
+          <p:cNvSpPr txBox="1"/>
+          <p:nvPr/>
+        </p:nvSpPr>
+        <p:spPr>
+          <a:xfrm>
+            <a:off x="3685563" y="1928895"/>
+            <a:ext cx="1435008" cy="369332"/>
+          </a:xfrm>
+          <a:prstGeom prst="rect">
+            <a:avLst/>
+          </a:prstGeom>
+          <a:noFill/>
+        </p:spPr>
+        <p:txBody>
+          <a:bodyPr wrap="none" rtlCol="0">
+            <a:spAutoFit/>
           </a:bodyPr>
           <a:lstStyle/>
           <a:p>
             <a:r>
-              <a:rPr lang="zh-CN" altLang="en-US" sz="1600" b="1" dirty="0">
-                <a:solidFill>
-                  <a:schemeClr val="tx1"/>
-                </a:solidFill>
-                <a:effectLst>
-                  <a:outerShdw blurRad="38100" dist="19050" dir="2700000" algn="tl" rotWithShape="0">
-                    <a:schemeClr val="dk1">
-                      <a:alpha val="40000"/>
-                    </a:schemeClr>
-                  </a:outerShdw>
-                </a:effectLst>
-              </a:rPr>
-              <a:t>第四步：用一台电脑去访问另一台电脑已经共享的文件，然后将它传到自己这里，速度如图所示：</a:t>
+              <a:rPr lang="en-US" altLang="zh-CN" dirty="0">
+                <a:solidFill>
+                  <a:schemeClr val="accent1">
+                    <a:lumMod val="40000"/>
+                    <a:lumOff val="60000"/>
+                  </a:schemeClr>
+                </a:solidFill>
+              </a:rPr>
+              <a:t>192.168.1.11</a:t>
+            </a:r>
+            <a:endParaRPr lang="zh-CN" altLang="en-US" dirty="0">
+              <a:solidFill>
+                <a:schemeClr val="accent1">
+                  <a:lumMod val="40000"/>
+                  <a:lumOff val="60000"/>
+                </a:schemeClr>
+              </a:solidFill>
+            </a:endParaRPr>
+          </a:p>
+        </p:txBody>
+      </p:sp>
+      <p:sp>
+        <p:nvSpPr>
+          <p:cNvPr id="21" name="文本框 20">
+            <a:extLst>
+              <a:ext uri="{FF2B5EF4-FFF2-40B4-BE49-F238E27FC236}">
+                <a16:creationId xmlns:a16="http://schemas.microsoft.com/office/drawing/2014/main" id="{42D143DB-5FD7-40B7-BFAC-CCF2B6D80B21}"/>
+              </a:ext>
+            </a:extLst>
+          </p:cNvPr>
+          <p:cNvSpPr txBox="1"/>
+          <p:nvPr/>
+        </p:nvSpPr>
+        <p:spPr>
+          <a:xfrm>
+            <a:off x="3685563" y="4108847"/>
+            <a:ext cx="1435008" cy="369332"/>
+          </a:xfrm>
+          <a:prstGeom prst="rect">
+            <a:avLst/>
+          </a:prstGeom>
+          <a:noFill/>
+        </p:spPr>
+        <p:txBody>
+          <a:bodyPr wrap="none" rtlCol="0">
+            <a:spAutoFit/>
+          </a:bodyPr>
+          <a:lstStyle/>
+          <a:p>
+            <a:r>
+              <a:rPr lang="en-US" altLang="zh-CN" dirty="0">
+                <a:solidFill>
+                  <a:schemeClr val="accent1">
+                    <a:lumMod val="40000"/>
+                    <a:lumOff val="60000"/>
+                  </a:schemeClr>
+                </a:solidFill>
+              </a:rPr>
+              <a:t>192.168.1.11</a:t>
+            </a:r>
+            <a:endParaRPr lang="zh-CN" altLang="en-US" dirty="0">
+              <a:solidFill>
+                <a:schemeClr val="accent1">
+                  <a:lumMod val="40000"/>
+                  <a:lumOff val="60000"/>
+                </a:schemeClr>
+              </a:solidFill>
+            </a:endParaRPr>
+          </a:p>
+        </p:txBody>
+      </p:sp>
+      <p:sp>
+        <p:nvSpPr>
+          <p:cNvPr id="23" name="文本框 22">
+            <a:extLst>
+              <a:ext uri="{FF2B5EF4-FFF2-40B4-BE49-F238E27FC236}">
+                <a16:creationId xmlns:a16="http://schemas.microsoft.com/office/drawing/2014/main" id="{CA2A2B83-4D6B-4902-9FD1-DEA707C40560}"/>
+              </a:ext>
+            </a:extLst>
+          </p:cNvPr>
+          <p:cNvSpPr txBox="1"/>
+          <p:nvPr/>
+        </p:nvSpPr>
+        <p:spPr>
+          <a:xfrm>
+            <a:off x="6828762" y="1910994"/>
+            <a:ext cx="1435008" cy="369332"/>
+          </a:xfrm>
+          <a:prstGeom prst="rect">
+            <a:avLst/>
+          </a:prstGeom>
+          <a:noFill/>
+        </p:spPr>
+        <p:txBody>
+          <a:bodyPr wrap="none" rtlCol="0">
+            <a:spAutoFit/>
+          </a:bodyPr>
+          <a:lstStyle/>
+          <a:p>
+            <a:r>
+              <a:rPr lang="en-US" altLang="zh-CN" dirty="0">
+                <a:solidFill>
+                  <a:schemeClr val="accent1">
+                    <a:lumMod val="40000"/>
+                    <a:lumOff val="60000"/>
+                  </a:schemeClr>
+                </a:solidFill>
+              </a:rPr>
+              <a:t>192.168.1.12</a:t>
+            </a:r>
+            <a:endParaRPr lang="zh-CN" altLang="en-US" dirty="0">
+              <a:solidFill>
+                <a:schemeClr val="accent1">
+                  <a:lumMod val="40000"/>
+                  <a:lumOff val="60000"/>
+                </a:schemeClr>
+              </a:solidFill>
+            </a:endParaRPr>
+          </a:p>
+        </p:txBody>
+      </p:sp>
+      <p:sp>
+        <p:nvSpPr>
+          <p:cNvPr id="25" name="文本框 24">
+            <a:extLst>
+              <a:ext uri="{FF2B5EF4-FFF2-40B4-BE49-F238E27FC236}">
+                <a16:creationId xmlns:a16="http://schemas.microsoft.com/office/drawing/2014/main" id="{BF85E132-EF0A-4BA9-9610-C14B9BBD77BE}"/>
+              </a:ext>
+            </a:extLst>
+          </p:cNvPr>
+          <p:cNvSpPr txBox="1"/>
+          <p:nvPr/>
+        </p:nvSpPr>
+        <p:spPr>
+          <a:xfrm>
+            <a:off x="6836661" y="4115094"/>
+            <a:ext cx="1435008" cy="369332"/>
+          </a:xfrm>
+          <a:prstGeom prst="rect">
+            <a:avLst/>
+          </a:prstGeom>
+          <a:noFill/>
+        </p:spPr>
+        <p:txBody>
+          <a:bodyPr wrap="none" rtlCol="0">
+            <a:spAutoFit/>
+          </a:bodyPr>
+          <a:lstStyle/>
+          <a:p>
+            <a:r>
+              <a:rPr lang="en-US" altLang="zh-CN" dirty="0">
+                <a:solidFill>
+                  <a:schemeClr val="accent1">
+                    <a:lumMod val="40000"/>
+                    <a:lumOff val="60000"/>
+                  </a:schemeClr>
+                </a:solidFill>
+              </a:rPr>
+              <a:t>192.168.1.12</a:t>
+            </a:r>
+            <a:endParaRPr lang="zh-CN" altLang="en-US" dirty="0">
+              <a:solidFill>
+                <a:schemeClr val="accent1">
+                  <a:lumMod val="40000"/>
+                  <a:lumOff val="60000"/>
+                </a:schemeClr>
+              </a:solidFill>
+            </a:endParaRPr>
+          </a:p>
+        </p:txBody>
+      </p:sp>
+      <p:sp>
+        <p:nvSpPr>
+          <p:cNvPr id="26" name="文本框 25">
+            <a:extLst>
+              <a:ext uri="{FF2B5EF4-FFF2-40B4-BE49-F238E27FC236}">
+                <a16:creationId xmlns:a16="http://schemas.microsoft.com/office/drawing/2014/main" id="{5D65D36F-9FDE-4A8B-98C7-7635AC7BD167}"/>
+              </a:ext>
+            </a:extLst>
+          </p:cNvPr>
+          <p:cNvSpPr txBox="1"/>
+          <p:nvPr/>
+        </p:nvSpPr>
+        <p:spPr>
+          <a:xfrm>
+            <a:off x="2567031" y="2860646"/>
+            <a:ext cx="436228" cy="369332"/>
+          </a:xfrm>
+          <a:prstGeom prst="rect">
+            <a:avLst/>
+          </a:prstGeom>
+          <a:noFill/>
+        </p:spPr>
+        <p:txBody>
+          <a:bodyPr wrap="square" rtlCol="0">
+            <a:spAutoFit/>
+          </a:bodyPr>
+          <a:lstStyle/>
+          <a:p>
+            <a:endParaRPr lang="zh-CN" altLang="en-US" dirty="0">
+              <a:solidFill>
+                <a:schemeClr val="accent1">
+                  <a:lumMod val="40000"/>
+                  <a:lumOff val="60000"/>
+                </a:schemeClr>
+              </a:solidFill>
+            </a:endParaRPr>
+          </a:p>
+        </p:txBody>
+      </p:sp>
+      <p:sp>
+        <p:nvSpPr>
+          <p:cNvPr id="30" name="文本框 29">
+            <a:extLst>
+              <a:ext uri="{FF2B5EF4-FFF2-40B4-BE49-F238E27FC236}">
+                <a16:creationId xmlns:a16="http://schemas.microsoft.com/office/drawing/2014/main" id="{01C5441B-1346-40DC-A5B7-F8622BE264F0}"/>
+              </a:ext>
+            </a:extLst>
+          </p:cNvPr>
+          <p:cNvSpPr txBox="1"/>
+          <p:nvPr/>
+        </p:nvSpPr>
+        <p:spPr>
+          <a:xfrm>
+            <a:off x="1434517" y="2793534"/>
+            <a:ext cx="897746" cy="369332"/>
+          </a:xfrm>
+          <a:prstGeom prst="rect">
+            <a:avLst/>
+          </a:prstGeom>
+          <a:noFill/>
+        </p:spPr>
+        <p:txBody>
+          <a:bodyPr wrap="square" rtlCol="0">
+            <a:spAutoFit/>
+          </a:bodyPr>
+          <a:lstStyle/>
+          <a:p>
+            <a:r>
+              <a:rPr lang="zh-CN" altLang="en-US" dirty="0">
+                <a:solidFill>
+                  <a:schemeClr val="accent1">
+                    <a:lumMod val="40000"/>
+                    <a:lumOff val="60000"/>
+                  </a:schemeClr>
+                </a:solidFill>
+              </a:rPr>
+              <a:t>电脑</a:t>
+            </a:r>
+            <a:r>
+              <a:rPr lang="en-US" altLang="zh-CN" dirty="0">
+                <a:solidFill>
+                  <a:schemeClr val="accent1">
+                    <a:lumMod val="40000"/>
+                    <a:lumOff val="60000"/>
+                  </a:schemeClr>
+                </a:solidFill>
+              </a:rPr>
+              <a:t>1</a:t>
+            </a:r>
+            <a:endParaRPr lang="zh-CN" altLang="en-US" dirty="0">
+              <a:solidFill>
+                <a:schemeClr val="accent1">
+                  <a:lumMod val="40000"/>
+                  <a:lumOff val="60000"/>
+                </a:schemeClr>
+              </a:solidFill>
+            </a:endParaRPr>
+          </a:p>
+        </p:txBody>
+      </p:sp>
+      <p:sp>
+        <p:nvSpPr>
+          <p:cNvPr id="32" name="文本框 31">
+            <a:extLst>
+              <a:ext uri="{FF2B5EF4-FFF2-40B4-BE49-F238E27FC236}">
+                <a16:creationId xmlns:a16="http://schemas.microsoft.com/office/drawing/2014/main" id="{27F1E09F-4E90-44A5-84EC-818E13F973E3}"/>
+              </a:ext>
+            </a:extLst>
+          </p:cNvPr>
+          <p:cNvSpPr txBox="1"/>
+          <p:nvPr/>
+        </p:nvSpPr>
+        <p:spPr>
+          <a:xfrm>
+            <a:off x="9949344" y="2933134"/>
+            <a:ext cx="897746" cy="369332"/>
+          </a:xfrm>
+          <a:prstGeom prst="rect">
+            <a:avLst/>
+          </a:prstGeom>
+          <a:noFill/>
+        </p:spPr>
+        <p:txBody>
+          <a:bodyPr wrap="square" rtlCol="0">
+            <a:spAutoFit/>
+          </a:bodyPr>
+          <a:lstStyle/>
+          <a:p>
+            <a:r>
+              <a:rPr lang="zh-CN" altLang="en-US" dirty="0">
+                <a:solidFill>
+                  <a:schemeClr val="accent1">
+                    <a:lumMod val="40000"/>
+                    <a:lumOff val="60000"/>
+                  </a:schemeClr>
+                </a:solidFill>
+              </a:rPr>
+              <a:t>电脑</a:t>
+            </a:r>
+            <a:r>
+              <a:rPr lang="en-US" altLang="zh-CN" dirty="0">
+                <a:solidFill>
+                  <a:schemeClr val="accent1">
+                    <a:lumMod val="40000"/>
+                    <a:lumOff val="60000"/>
+                  </a:schemeClr>
+                </a:solidFill>
+              </a:rPr>
+              <a:t>2</a:t>
+            </a:r>
+            <a:endParaRPr lang="zh-CN" altLang="en-US" dirty="0">
+              <a:solidFill>
+                <a:schemeClr val="accent1">
+                  <a:lumMod val="40000"/>
+                  <a:lumOff val="60000"/>
+                </a:schemeClr>
+              </a:solidFill>
+            </a:endParaRPr>
+          </a:p>
+        </p:txBody>
+      </p:sp>
+      <p:sp>
+        <p:nvSpPr>
+          <p:cNvPr id="33" name="文本框 32">
+            <a:extLst>
+              <a:ext uri="{FF2B5EF4-FFF2-40B4-BE49-F238E27FC236}">
+                <a16:creationId xmlns:a16="http://schemas.microsoft.com/office/drawing/2014/main" id="{E54A518E-2A3D-40B2-A8B7-328C73885FE7}"/>
+              </a:ext>
+            </a:extLst>
+          </p:cNvPr>
+          <p:cNvSpPr txBox="1"/>
+          <p:nvPr/>
+        </p:nvSpPr>
+        <p:spPr>
+          <a:xfrm>
+            <a:off x="4890781" y="5733110"/>
+            <a:ext cx="2169953" cy="369332"/>
+          </a:xfrm>
+          <a:prstGeom prst="rect">
+            <a:avLst/>
+          </a:prstGeom>
+          <a:noFill/>
+        </p:spPr>
+        <p:txBody>
+          <a:bodyPr wrap="square" rtlCol="0">
+            <a:spAutoFit/>
+          </a:bodyPr>
+          <a:lstStyle/>
+          <a:p>
+            <a:pPr algn="ctr"/>
+            <a:r>
+              <a:rPr lang="en-US" altLang="zh-CN" dirty="0">
+                <a:solidFill>
+                  <a:schemeClr val="accent1">
+                    <a:lumMod val="40000"/>
+                    <a:lumOff val="60000"/>
+                  </a:schemeClr>
+                </a:solidFill>
+              </a:rPr>
+              <a:t>Ping</a:t>
+            </a:r>
+            <a:r>
+              <a:rPr lang="zh-CN" altLang="en-US" dirty="0">
+                <a:solidFill>
+                  <a:schemeClr val="accent1">
+                    <a:lumMod val="40000"/>
+                    <a:lumOff val="60000"/>
+                  </a:schemeClr>
+                </a:solidFill>
+              </a:rPr>
+              <a:t>值法</a:t>
+            </a:r>
+          </a:p>
+        </p:txBody>
+      </p:sp>
+      <p:sp>
+        <p:nvSpPr>
+          <p:cNvPr id="34" name="文本框 33">
+            <a:extLst>
+              <a:ext uri="{FF2B5EF4-FFF2-40B4-BE49-F238E27FC236}">
+                <a16:creationId xmlns:a16="http://schemas.microsoft.com/office/drawing/2014/main" id="{CB269ED2-E0FB-4858-BD17-89C4357B9753}"/>
+              </a:ext>
+            </a:extLst>
+          </p:cNvPr>
+          <p:cNvSpPr txBox="1"/>
+          <p:nvPr/>
+        </p:nvSpPr>
+        <p:spPr>
+          <a:xfrm>
+            <a:off x="5274366" y="4049403"/>
+            <a:ext cx="1171662" cy="369332"/>
+          </a:xfrm>
+          <a:prstGeom prst="rect">
+            <a:avLst/>
+          </a:prstGeom>
+          <a:noFill/>
+        </p:spPr>
+        <p:txBody>
+          <a:bodyPr wrap="square" rtlCol="0">
+            <a:spAutoFit/>
+          </a:bodyPr>
+          <a:lstStyle/>
+          <a:p>
+            <a:r>
+              <a:rPr lang="en-US" altLang="zh-CN" dirty="0">
+                <a:solidFill>
+                  <a:schemeClr val="accent1">
+                    <a:lumMod val="40000"/>
+                    <a:lumOff val="60000"/>
+                  </a:schemeClr>
+                </a:solidFill>
+              </a:rPr>
+              <a:t>Ping</a:t>
+            </a:r>
+            <a:r>
+              <a:rPr lang="zh-CN" altLang="en-US" dirty="0">
+                <a:solidFill>
+                  <a:schemeClr val="accent1">
+                    <a:lumMod val="40000"/>
+                    <a:lumOff val="60000"/>
+                  </a:schemeClr>
+                </a:solidFill>
+              </a:rPr>
+              <a:t>值</a:t>
+            </a:r>
+            <a:r>
+              <a:rPr lang="en-US" altLang="zh-CN" dirty="0">
+                <a:solidFill>
+                  <a:schemeClr val="accent1">
+                    <a:lumMod val="40000"/>
+                    <a:lumOff val="60000"/>
+                  </a:schemeClr>
+                </a:solidFill>
+              </a:rPr>
+              <a:t>B</a:t>
+            </a:r>
+            <a:endParaRPr lang="zh-CN" altLang="en-US" dirty="0">
+              <a:solidFill>
+                <a:schemeClr val="accent1">
+                  <a:lumMod val="40000"/>
+                  <a:lumOff val="60000"/>
+                </a:schemeClr>
+              </a:solidFill>
+            </a:endParaRPr>
+          </a:p>
+        </p:txBody>
+      </p:sp>
+      <p:sp>
+        <p:nvSpPr>
+          <p:cNvPr id="36" name="文本框 35">
+            <a:extLst>
+              <a:ext uri="{FF2B5EF4-FFF2-40B4-BE49-F238E27FC236}">
+                <a16:creationId xmlns:a16="http://schemas.microsoft.com/office/drawing/2014/main" id="{6B1191B4-52AE-49BA-8870-6798ED31BD1F}"/>
+              </a:ext>
+            </a:extLst>
+          </p:cNvPr>
+          <p:cNvSpPr txBox="1"/>
+          <p:nvPr/>
+        </p:nvSpPr>
+        <p:spPr>
+          <a:xfrm>
+            <a:off x="5269683" y="1477145"/>
+            <a:ext cx="1171662" cy="369332"/>
+          </a:xfrm>
+          <a:prstGeom prst="rect">
+            <a:avLst/>
+          </a:prstGeom>
+          <a:noFill/>
+        </p:spPr>
+        <p:txBody>
+          <a:bodyPr wrap="square" rtlCol="0">
+            <a:spAutoFit/>
+          </a:bodyPr>
+          <a:lstStyle/>
+          <a:p>
+            <a:r>
+              <a:rPr lang="en-US" altLang="zh-CN" dirty="0">
+                <a:solidFill>
+                  <a:schemeClr val="accent1">
+                    <a:lumMod val="40000"/>
+                    <a:lumOff val="60000"/>
+                  </a:schemeClr>
+                </a:solidFill>
+              </a:rPr>
+              <a:t>Ping</a:t>
+            </a:r>
+            <a:r>
+              <a:rPr lang="zh-CN" altLang="en-US" dirty="0">
+                <a:solidFill>
+                  <a:schemeClr val="accent1">
+                    <a:lumMod val="40000"/>
+                    <a:lumOff val="60000"/>
+                  </a:schemeClr>
+                </a:solidFill>
+              </a:rPr>
+              <a:t>值</a:t>
+            </a:r>
+            <a:r>
+              <a:rPr lang="en-US" altLang="zh-CN" dirty="0">
+                <a:solidFill>
+                  <a:schemeClr val="accent1">
+                    <a:lumMod val="40000"/>
+                    <a:lumOff val="60000"/>
+                  </a:schemeClr>
+                </a:solidFill>
+              </a:rPr>
+              <a:t>A</a:t>
+            </a:r>
+            <a:endParaRPr lang="zh-CN" altLang="en-US" dirty="0">
+              <a:solidFill>
+                <a:schemeClr val="accent1">
+                  <a:lumMod val="40000"/>
+                  <a:lumOff val="60000"/>
+                </a:schemeClr>
+              </a:solidFill>
+            </a:endParaRPr>
+          </a:p>
+        </p:txBody>
+      </p:sp>
+      <p:sp>
+        <p:nvSpPr>
+          <p:cNvPr id="37" name="文本框 36">
+            <a:extLst>
+              <a:ext uri="{FF2B5EF4-FFF2-40B4-BE49-F238E27FC236}">
+                <a16:creationId xmlns:a16="http://schemas.microsoft.com/office/drawing/2014/main" id="{D233130F-9A52-47B3-9D2F-850E31C59CCD}"/>
+              </a:ext>
+            </a:extLst>
+          </p:cNvPr>
+          <p:cNvSpPr txBox="1"/>
+          <p:nvPr/>
+        </p:nvSpPr>
+        <p:spPr>
+          <a:xfrm>
+            <a:off x="302065" y="5179661"/>
+            <a:ext cx="3162649" cy="923330"/>
+          </a:xfrm>
+          <a:prstGeom prst="rect">
+            <a:avLst/>
+          </a:prstGeom>
+          <a:noFill/>
+        </p:spPr>
+        <p:txBody>
+          <a:bodyPr wrap="square" rtlCol="0">
+            <a:spAutoFit/>
+          </a:bodyPr>
+          <a:lstStyle/>
+          <a:p>
+            <a:r>
+              <a:rPr lang="en-US" altLang="zh-CN" dirty="0">
+                <a:solidFill>
+                  <a:schemeClr val="accent1">
+                    <a:lumMod val="40000"/>
+                    <a:lumOff val="60000"/>
+                  </a:schemeClr>
+                </a:solidFill>
+              </a:rPr>
+              <a:t>1. Ping</a:t>
+            </a:r>
+            <a:r>
+              <a:rPr lang="zh-CN" altLang="en-US" dirty="0">
+                <a:solidFill>
+                  <a:schemeClr val="accent1">
+                    <a:lumMod val="40000"/>
+                    <a:lumOff val="60000"/>
+                  </a:schemeClr>
+                </a:solidFill>
+              </a:rPr>
+              <a:t>值</a:t>
+            </a:r>
+            <a:r>
+              <a:rPr lang="en-US" altLang="zh-CN" dirty="0">
+                <a:solidFill>
+                  <a:schemeClr val="accent1">
+                    <a:lumMod val="40000"/>
+                    <a:lumOff val="60000"/>
+                  </a:schemeClr>
+                </a:solidFill>
+              </a:rPr>
+              <a:t>C=B</a:t>
+            </a:r>
+          </a:p>
+          <a:p>
+            <a:r>
+              <a:rPr lang="en-US" altLang="zh-CN" dirty="0">
+                <a:solidFill>
+                  <a:schemeClr val="accent1">
+                    <a:lumMod val="40000"/>
+                    <a:lumOff val="60000"/>
+                  </a:schemeClr>
+                </a:solidFill>
+              </a:rPr>
+              <a:t>2. Ping</a:t>
+            </a:r>
+            <a:r>
+              <a:rPr lang="zh-CN" altLang="en-US" dirty="0">
+                <a:solidFill>
+                  <a:schemeClr val="accent1">
+                    <a:lumMod val="40000"/>
+                    <a:lumOff val="60000"/>
+                  </a:schemeClr>
+                </a:solidFill>
+              </a:rPr>
+              <a:t>值</a:t>
+            </a:r>
+            <a:r>
+              <a:rPr lang="en-US" altLang="zh-CN" dirty="0">
+                <a:solidFill>
+                  <a:schemeClr val="accent1">
+                    <a:lumMod val="40000"/>
+                    <a:lumOff val="60000"/>
+                  </a:schemeClr>
+                </a:solidFill>
+              </a:rPr>
+              <a:t>C=A</a:t>
+            </a:r>
+          </a:p>
+          <a:p>
+            <a:r>
+              <a:rPr lang="en-US" altLang="zh-CN" dirty="0">
+                <a:solidFill>
+                  <a:schemeClr val="accent1">
+                    <a:lumMod val="40000"/>
+                    <a:lumOff val="60000"/>
+                  </a:schemeClr>
+                </a:solidFill>
+              </a:rPr>
+              <a:t>3. Ping</a:t>
+            </a:r>
+            <a:r>
+              <a:rPr lang="zh-CN" altLang="en-US" dirty="0">
+                <a:solidFill>
+                  <a:schemeClr val="accent1">
+                    <a:lumMod val="40000"/>
+                    <a:lumOff val="60000"/>
+                  </a:schemeClr>
+                </a:solidFill>
+              </a:rPr>
+              <a:t>值</a:t>
+            </a:r>
+            <a:r>
+              <a:rPr lang="en-US" altLang="zh-CN" dirty="0">
+                <a:solidFill>
+                  <a:schemeClr val="accent1">
+                    <a:lumMod val="40000"/>
+                    <a:lumOff val="60000"/>
+                  </a:schemeClr>
+                </a:solidFill>
+              </a:rPr>
+              <a:t>C</a:t>
+            </a:r>
+            <a:r>
+              <a:rPr lang="zh-CN" altLang="en-US" dirty="0">
+                <a:solidFill>
+                  <a:schemeClr val="accent1">
+                    <a:lumMod val="40000"/>
+                    <a:lumOff val="60000"/>
+                  </a:schemeClr>
+                </a:solidFill>
+              </a:rPr>
+              <a:t>在</a:t>
+            </a:r>
+            <a:r>
+              <a:rPr lang="en-US" altLang="zh-CN" dirty="0">
+                <a:solidFill>
+                  <a:schemeClr val="accent1">
+                    <a:lumMod val="40000"/>
+                    <a:lumOff val="60000"/>
+                  </a:schemeClr>
+                </a:solidFill>
+              </a:rPr>
+              <a:t>A</a:t>
+            </a:r>
+            <a:r>
+              <a:rPr lang="zh-CN" altLang="en-US" dirty="0">
+                <a:solidFill>
+                  <a:schemeClr val="accent1">
+                    <a:lumMod val="40000"/>
+                    <a:lumOff val="60000"/>
+                  </a:schemeClr>
+                </a:solidFill>
+              </a:rPr>
+              <a:t>，</a:t>
+            </a:r>
+            <a:r>
+              <a:rPr lang="en-US" altLang="zh-CN" dirty="0">
+                <a:solidFill>
+                  <a:schemeClr val="accent1">
+                    <a:lumMod val="40000"/>
+                    <a:lumOff val="60000"/>
+                  </a:schemeClr>
+                </a:solidFill>
+              </a:rPr>
+              <a:t>B</a:t>
+            </a:r>
+            <a:r>
+              <a:rPr lang="zh-CN" altLang="en-US" dirty="0">
+                <a:solidFill>
+                  <a:schemeClr val="accent1">
+                    <a:lumMod val="40000"/>
+                    <a:lumOff val="60000"/>
+                  </a:schemeClr>
+                </a:solidFill>
+              </a:rPr>
+              <a:t>之间</a:t>
             </a:r>
           </a:p>
         </p:txBody>
       </p:sp>
       <p:pic>
         <p:nvPicPr>
-          <p:cNvPr id="6" name="内容占位符 5"/>
+          <p:cNvPr id="11" name="图片 10">
+            <a:extLst>
+              <a:ext uri="{FF2B5EF4-FFF2-40B4-BE49-F238E27FC236}">
+                <a16:creationId xmlns:a16="http://schemas.microsoft.com/office/drawing/2014/main" id="{3873970C-2203-4D4C-8AC7-8C485E9955EA}"/>
+              </a:ext>
+            </a:extLst>
+          </p:cNvPr>
           <p:cNvPicPr>
-            <a:picLocks noGrp="1"/>
+            <a:picLocks noChangeAspect="1"/>
           </p:cNvPicPr>
-          <p:nvPr>
-            <p:ph idx="1"/>
-          </p:nvPr>
+          <p:nvPr/>
         </p:nvPicPr>
         <p:blipFill>
-          <a:blip r:embed="rId3"/>
+          <a:blip r:embed="rId3" cstate="print">
+            <a:duotone>
+              <a:schemeClr val="bg2">
+                <a:shade val="45000"/>
+                <a:satMod val="135000"/>
+              </a:schemeClr>
+              <a:prstClr val="white"/>
+            </a:duotone>
+            <a:extLst>
+              <a:ext uri="{28A0092B-C50C-407E-A947-70E740481C1C}">
+                <a14:useLocalDpi xmlns:a14="http://schemas.microsoft.com/office/drawing/2010/main" val="0"/>
+              </a:ext>
+            </a:extLst>
+          </a:blip>
           <a:stretch>
             <a:fillRect/>
           </a:stretch>
         </p:blipFill>
         <p:spPr>
           <a:xfrm>
-            <a:off x="1036542" y="1816091"/>
-            <a:ext cx="4465707" cy="3048264"/>
-          </a:xfrm>
-          <a:prstGeom prst="rect">
-            <a:avLst/>
-          </a:prstGeom>
-        </p:spPr>
-      </p:pic>
-      <p:pic>
-        <p:nvPicPr>
-          <p:cNvPr id="9" name="图片 8"/>
-          <p:cNvPicPr/>
-          <p:nvPr/>
-        </p:nvPicPr>
-        <p:blipFill>
-          <a:blip r:embed="rId4"/>
-          <a:stretch>
-            <a:fillRect/>
-          </a:stretch>
-        </p:blipFill>
-        <p:spPr>
-          <a:xfrm>
-            <a:off x="6096000" y="1728417"/>
-            <a:ext cx="4312920" cy="2743200"/>
+            <a:off x="5477556" y="4731391"/>
+            <a:ext cx="996404" cy="996404"/>
           </a:xfrm>
           <a:prstGeom prst="rect">
             <a:avLst/>
@@ -3664,6 +9288,11 @@
         </p:spPr>
       </p:pic>
     </p:spTree>
+    <p:extLst>
+      <p:ext uri="{BB962C8B-B14F-4D97-AF65-F5344CB8AC3E}">
+        <p14:creationId xmlns:p14="http://schemas.microsoft.com/office/powerpoint/2010/main" val="3209353491"/>
+      </p:ext>
+    </p:extLst>
   </p:cSld>
   <p:clrMapOvr>
     <a:masterClrMapping/>
@@ -3690,10 +9319,14 @@
       </p:grpSpPr>
       <p:pic>
         <p:nvPicPr>
-          <p:cNvPr id="4" name="图片 3" descr="6"/>
-          <p:cNvPicPr>
-            <a:picLocks noChangeAspect="1"/>
-          </p:cNvPicPr>
+          <p:cNvPr id="13" name="图片 12">
+            <a:extLst>
+              <a:ext uri="{FF2B5EF4-FFF2-40B4-BE49-F238E27FC236}">
+                <a16:creationId xmlns:a16="http://schemas.microsoft.com/office/drawing/2014/main" id="{D0E199CB-71BD-49B0-B31A-DCF785EEB054}"/>
+              </a:ext>
+            </a:extLst>
+          </p:cNvPr>
+          <p:cNvPicPr/>
           <p:nvPr/>
         </p:nvPicPr>
         <p:blipFill>
@@ -3705,7 +9338,7 @@
         <p:spPr>
           <a:xfrm>
             <a:off x="0" y="0"/>
-            <a:ext cx="12192000" cy="9091295"/>
+            <a:ext cx="12192000" cy="6858000"/>
           </a:xfrm>
           <a:prstGeom prst="rect">
             <a:avLst/>
@@ -3722,7 +9355,12 @@
             <p:ph type="title"/>
           </p:nvPr>
         </p:nvSpPr>
-        <p:spPr/>
+        <p:spPr>
+          <a:xfrm>
+            <a:off x="758300" y="500062"/>
+            <a:ext cx="10515600" cy="1325563"/>
+          </a:xfrm>
+        </p:spPr>
         <p:txBody>
           <a:bodyPr>
             <a:normAutofit/>
@@ -3732,7 +9370,10 @@
             <a:r>
               <a:rPr lang="zh-CN" altLang="en-US" sz="1600" b="1" dirty="0">
                 <a:solidFill>
-                  <a:schemeClr val="tx1"/>
+                  <a:schemeClr val="accent1">
+                    <a:lumMod val="40000"/>
+                    <a:lumOff val="60000"/>
+                  </a:schemeClr>
                 </a:solidFill>
                 <a:effectLst>
                   <a:outerShdw blurRad="38100" dist="19050" dir="2700000" algn="tl" rotWithShape="0">
@@ -3742,91 +9383,289 @@
                   </a:outerShdw>
                 </a:effectLst>
               </a:rPr>
-              <a:t>第五步：接下来测无线速度，用一个电脑去连另外一台电脑的热点，使两个电脑进行无线连接，如图所示：</a:t>
+              <a:t>第一步：两个电脑通过网线连接，一个</a:t>
+            </a:r>
+            <a:r>
+              <a:rPr lang="en-US" altLang="zh-CN" sz="1600" b="1" dirty="0">
+                <a:solidFill>
+                  <a:schemeClr val="accent1">
+                    <a:lumMod val="40000"/>
+                    <a:lumOff val="60000"/>
+                  </a:schemeClr>
+                </a:solidFill>
+                <a:effectLst>
+                  <a:outerShdw blurRad="38100" dist="19050" dir="2700000" algn="tl" rotWithShape="0">
+                    <a:schemeClr val="dk1">
+                      <a:alpha val="40000"/>
+                    </a:schemeClr>
+                  </a:outerShdw>
+                </a:effectLst>
+              </a:rPr>
+              <a:t>IP</a:t>
+            </a:r>
+            <a:r>
+              <a:rPr lang="zh-CN" altLang="en-US" sz="1600" b="1" dirty="0">
+                <a:solidFill>
+                  <a:schemeClr val="accent1">
+                    <a:lumMod val="40000"/>
+                    <a:lumOff val="60000"/>
+                  </a:schemeClr>
+                </a:solidFill>
+                <a:effectLst>
+                  <a:outerShdw blurRad="38100" dist="19050" dir="2700000" algn="tl" rotWithShape="0">
+                    <a:schemeClr val="dk1">
+                      <a:alpha val="40000"/>
+                    </a:schemeClr>
+                  </a:outerShdw>
+                </a:effectLst>
+              </a:rPr>
+              <a:t>地址设置为</a:t>
+            </a:r>
+            <a:r>
+              <a:rPr lang="en-US" altLang="zh-CN" sz="1600" b="1" dirty="0">
+                <a:solidFill>
+                  <a:schemeClr val="accent1">
+                    <a:lumMod val="40000"/>
+                    <a:lumOff val="60000"/>
+                  </a:schemeClr>
+                </a:solidFill>
+                <a:effectLst>
+                  <a:outerShdw blurRad="38100" dist="19050" dir="2700000" algn="tl" rotWithShape="0">
+                    <a:schemeClr val="dk1">
+                      <a:alpha val="40000"/>
+                    </a:schemeClr>
+                  </a:outerShdw>
+                </a:effectLst>
+              </a:rPr>
+              <a:t>192.168.1.11</a:t>
+            </a:r>
+            <a:r>
+              <a:rPr lang="zh-CN" altLang="en-US" sz="1600" b="1" dirty="0">
+                <a:solidFill>
+                  <a:schemeClr val="accent1">
+                    <a:lumMod val="40000"/>
+                    <a:lumOff val="60000"/>
+                  </a:schemeClr>
+                </a:solidFill>
+                <a:effectLst>
+                  <a:outerShdw blurRad="38100" dist="19050" dir="2700000" algn="tl" rotWithShape="0">
+                    <a:schemeClr val="dk1">
+                      <a:alpha val="40000"/>
+                    </a:schemeClr>
+                  </a:outerShdw>
+                </a:effectLst>
+              </a:rPr>
+              <a:t>，一个为</a:t>
+            </a:r>
+            <a:r>
+              <a:rPr lang="en-US" altLang="zh-CN" sz="1600" b="1" dirty="0">
+                <a:solidFill>
+                  <a:schemeClr val="accent1">
+                    <a:lumMod val="40000"/>
+                    <a:lumOff val="60000"/>
+                  </a:schemeClr>
+                </a:solidFill>
+                <a:effectLst>
+                  <a:outerShdw blurRad="38100" dist="19050" dir="2700000" algn="tl" rotWithShape="0">
+                    <a:schemeClr val="dk1">
+                      <a:alpha val="40000"/>
+                    </a:schemeClr>
+                  </a:outerShdw>
+                </a:effectLst>
+              </a:rPr>
+              <a:t>192.168.1.12</a:t>
+            </a:r>
+            <a:r>
+              <a:rPr lang="zh-CN" altLang="en-US" sz="1600" b="1" dirty="0">
+                <a:solidFill>
+                  <a:schemeClr val="accent1">
+                    <a:lumMod val="40000"/>
+                    <a:lumOff val="60000"/>
+                  </a:schemeClr>
+                </a:solidFill>
+                <a:effectLst>
+                  <a:outerShdw blurRad="38100" dist="19050" dir="2700000" algn="tl" rotWithShape="0">
+                    <a:schemeClr val="dk1">
+                      <a:alpha val="40000"/>
+                    </a:schemeClr>
+                  </a:outerShdw>
+                </a:effectLst>
+              </a:rPr>
+              <a:t>，子网掩码相同。用地址为</a:t>
+            </a:r>
+            <a:r>
+              <a:rPr lang="en-US" altLang="zh-CN" sz="1600" b="1" dirty="0">
+                <a:solidFill>
+                  <a:schemeClr val="accent1">
+                    <a:lumMod val="40000"/>
+                    <a:lumOff val="60000"/>
+                  </a:schemeClr>
+                </a:solidFill>
+                <a:effectLst>
+                  <a:outerShdw blurRad="38100" dist="19050" dir="2700000" algn="tl" rotWithShape="0">
+                    <a:schemeClr val="dk1">
+                      <a:alpha val="40000"/>
+                    </a:schemeClr>
+                  </a:outerShdw>
+                </a:effectLst>
+              </a:rPr>
+              <a:t>1.12</a:t>
+            </a:r>
+            <a:r>
+              <a:rPr lang="zh-CN" altLang="en-US" sz="1600" b="1" dirty="0">
+                <a:solidFill>
+                  <a:schemeClr val="accent1">
+                    <a:lumMod val="40000"/>
+                    <a:lumOff val="60000"/>
+                  </a:schemeClr>
+                </a:solidFill>
+                <a:effectLst>
+                  <a:outerShdw blurRad="38100" dist="19050" dir="2700000" algn="tl" rotWithShape="0">
+                    <a:schemeClr val="dk1">
+                      <a:alpha val="40000"/>
+                    </a:schemeClr>
+                  </a:outerShdw>
+                </a:effectLst>
+              </a:rPr>
+              <a:t>的电脑</a:t>
+            </a:r>
+            <a:r>
+              <a:rPr lang="en-US" altLang="zh-CN" sz="1600" b="1" dirty="0">
+                <a:solidFill>
+                  <a:schemeClr val="accent1">
+                    <a:lumMod val="40000"/>
+                    <a:lumOff val="60000"/>
+                  </a:schemeClr>
+                </a:solidFill>
+                <a:effectLst>
+                  <a:outerShdw blurRad="38100" dist="19050" dir="2700000" algn="tl" rotWithShape="0">
+                    <a:schemeClr val="dk1">
+                      <a:alpha val="40000"/>
+                    </a:schemeClr>
+                  </a:outerShdw>
+                </a:effectLst>
+              </a:rPr>
+              <a:t>ping 1.11</a:t>
+            </a:r>
+            <a:r>
+              <a:rPr lang="zh-CN" altLang="en-US" sz="1600" b="1" dirty="0">
+                <a:solidFill>
+                  <a:schemeClr val="accent1">
+                    <a:lumMod val="40000"/>
+                    <a:lumOff val="60000"/>
+                  </a:schemeClr>
+                </a:solidFill>
+                <a:effectLst>
+                  <a:outerShdw blurRad="38100" dist="19050" dir="2700000" algn="tl" rotWithShape="0">
+                    <a:schemeClr val="dk1">
+                      <a:alpha val="40000"/>
+                    </a:schemeClr>
+                  </a:outerShdw>
+                </a:effectLst>
+              </a:rPr>
+              <a:t>，结果如图所示：</a:t>
+            </a:r>
+          </a:p>
+        </p:txBody>
+      </p:sp>
+      <p:sp>
+        <p:nvSpPr>
+          <p:cNvPr id="3" name="文本框 2">
+            <a:extLst>
+              <a:ext uri="{FF2B5EF4-FFF2-40B4-BE49-F238E27FC236}">
+                <a16:creationId xmlns:a16="http://schemas.microsoft.com/office/drawing/2014/main" id="{AE884377-3248-490D-874A-2CC116DDEE4B}"/>
+              </a:ext>
+            </a:extLst>
+          </p:cNvPr>
+          <p:cNvSpPr txBox="1"/>
+          <p:nvPr/>
+        </p:nvSpPr>
+        <p:spPr>
+          <a:xfrm>
+            <a:off x="4514470" y="6268003"/>
+            <a:ext cx="3003259" cy="369332"/>
+          </a:xfrm>
+          <a:prstGeom prst="rect">
+            <a:avLst/>
+          </a:prstGeom>
+          <a:noFill/>
+        </p:spPr>
+        <p:txBody>
+          <a:bodyPr wrap="square" rtlCol="0">
+            <a:spAutoFit/>
+          </a:bodyPr>
+          <a:lstStyle/>
+          <a:p>
+            <a:pPr algn="ctr"/>
+            <a:r>
+              <a:rPr lang="zh-CN" altLang="en-US" dirty="0">
+                <a:solidFill>
+                  <a:schemeClr val="accent1">
+                    <a:lumMod val="40000"/>
+                    <a:lumOff val="60000"/>
+                  </a:schemeClr>
+                </a:solidFill>
+              </a:rPr>
+              <a:t>网线</a:t>
+            </a:r>
+            <a:r>
+              <a:rPr lang="en-US" altLang="zh-CN" dirty="0">
+                <a:solidFill>
+                  <a:schemeClr val="accent1">
+                    <a:lumMod val="40000"/>
+                    <a:lumOff val="60000"/>
+                  </a:schemeClr>
+                </a:solidFill>
+              </a:rPr>
+              <a:t>ping</a:t>
+            </a:r>
+            <a:r>
+              <a:rPr lang="zh-CN" altLang="en-US" dirty="0">
+                <a:solidFill>
+                  <a:schemeClr val="accent1">
+                    <a:lumMod val="40000"/>
+                    <a:lumOff val="60000"/>
+                  </a:schemeClr>
+                </a:solidFill>
+              </a:rPr>
+              <a:t>值</a:t>
             </a:r>
           </a:p>
         </p:txBody>
       </p:sp>
       <p:pic>
         <p:nvPicPr>
-          <p:cNvPr id="6" name="内容占位符 5"/>
+          <p:cNvPr id="11" name="内容占位符 10">
+            <a:extLst>
+              <a:ext uri="{FF2B5EF4-FFF2-40B4-BE49-F238E27FC236}">
+                <a16:creationId xmlns:a16="http://schemas.microsoft.com/office/drawing/2014/main" id="{6300D869-3332-4F3B-8E06-4C72F1665153}"/>
+              </a:ext>
+            </a:extLst>
+          </p:cNvPr>
           <p:cNvPicPr>
-            <a:picLocks noGrp="1"/>
+            <a:picLocks noGrp="1" noChangeAspect="1"/>
           </p:cNvPicPr>
           <p:nvPr>
             <p:ph idx="1"/>
           </p:nvPr>
         </p:nvPicPr>
         <p:blipFill>
-          <a:blip r:embed="rId3"/>
+          <a:blip r:embed="rId3">
+            <a:extLst>
+              <a:ext uri="{28A0092B-C50C-407E-A947-70E740481C1C}">
+                <a14:useLocalDpi xmlns:a14="http://schemas.microsoft.com/office/drawing/2010/main" val="0"/>
+              </a:ext>
+            </a:extLst>
+          </a:blip>
           <a:stretch>
             <a:fillRect/>
           </a:stretch>
         </p:blipFill>
         <p:spPr>
           <a:xfrm>
-            <a:off x="6678924" y="1308988"/>
-            <a:ext cx="3520745" cy="1493649"/>
-          </a:xfrm>
-          <a:prstGeom prst="rect">
-            <a:avLst/>
-          </a:prstGeom>
-        </p:spPr>
-      </p:pic>
-      <p:pic>
-        <p:nvPicPr>
-          <p:cNvPr id="5" name="图片 4">
-            <a:extLst>
-              <a:ext uri="{FF2B5EF4-FFF2-40B4-BE49-F238E27FC236}">
-                <a16:creationId xmlns:a16="http://schemas.microsoft.com/office/drawing/2014/main" id="{165C53C9-769A-4923-830F-5F22A64B0176}"/>
-              </a:ext>
-            </a:extLst>
-          </p:cNvPr>
-          <p:cNvPicPr/>
-          <p:nvPr/>
-        </p:nvPicPr>
-        <p:blipFill>
-          <a:blip r:embed="rId4"/>
-          <a:stretch>
-            <a:fillRect/>
-          </a:stretch>
-        </p:blipFill>
-        <p:spPr>
-          <a:xfrm>
-            <a:off x="749201" y="1424305"/>
-            <a:ext cx="5274310" cy="5068570"/>
-          </a:xfrm>
-          <a:prstGeom prst="rect">
-            <a:avLst/>
-          </a:prstGeom>
-        </p:spPr>
-      </p:pic>
-      <p:pic>
-        <p:nvPicPr>
-          <p:cNvPr id="7" name="图片 6">
-            <a:extLst>
-              <a:ext uri="{FF2B5EF4-FFF2-40B4-BE49-F238E27FC236}">
-                <a16:creationId xmlns:a16="http://schemas.microsoft.com/office/drawing/2014/main" id="{0B318443-2BE3-4623-BD9B-DD5D70B11806}"/>
-              </a:ext>
-            </a:extLst>
-          </p:cNvPr>
-          <p:cNvPicPr/>
-          <p:nvPr/>
-        </p:nvPicPr>
-        <p:blipFill>
-          <a:blip r:embed="rId5"/>
-          <a:stretch>
-            <a:fillRect/>
-          </a:stretch>
-        </p:blipFill>
-        <p:spPr>
-          <a:xfrm>
-            <a:off x="6772712" y="2966176"/>
-            <a:ext cx="3456480" cy="3615863"/>
-          </a:xfrm>
-          <a:prstGeom prst="rect">
-            <a:avLst/>
-          </a:prstGeom>
+            <a:off x="3477117" y="1497215"/>
+            <a:ext cx="4943740" cy="4351338"/>
+          </a:xfrm>
         </p:spPr>
       </p:pic>
     </p:spTree>
@@ -3856,10 +9695,14 @@
       </p:grpSpPr>
       <p:pic>
         <p:nvPicPr>
-          <p:cNvPr id="4" name="图片 3" descr="6"/>
-          <p:cNvPicPr>
-            <a:picLocks noChangeAspect="1"/>
-          </p:cNvPicPr>
+          <p:cNvPr id="3" name="图片 2">
+            <a:extLst>
+              <a:ext uri="{FF2B5EF4-FFF2-40B4-BE49-F238E27FC236}">
+                <a16:creationId xmlns:a16="http://schemas.microsoft.com/office/drawing/2014/main" id="{D0926427-9280-4F02-A404-51E16FF8E923}"/>
+              </a:ext>
+            </a:extLst>
+          </p:cNvPr>
+          <p:cNvPicPr/>
           <p:nvPr/>
         </p:nvPicPr>
         <p:blipFill>
@@ -3871,7 +9714,7 @@
         <p:spPr>
           <a:xfrm>
             <a:off x="0" y="0"/>
-            <a:ext cx="12192000" cy="9091295"/>
+            <a:ext cx="12192000" cy="6858000"/>
           </a:xfrm>
           <a:prstGeom prst="rect">
             <a:avLst/>
@@ -3898,7 +9741,10 @@
             <a:r>
               <a:rPr lang="zh-CN" altLang="en-US" sz="1600" b="1" dirty="0">
                 <a:solidFill>
-                  <a:schemeClr val="tx1"/>
+                  <a:schemeClr val="accent1">
+                    <a:lumMod val="40000"/>
+                    <a:lumOff val="60000"/>
+                  </a:schemeClr>
                 </a:solidFill>
                 <a:effectLst>
                   <a:outerShdw blurRad="38100" dist="19050" dir="2700000" algn="tl" rotWithShape="0">
@@ -3908,194 +9754,14 @@
                   </a:outerShdw>
                 </a:effectLst>
               </a:rPr>
-              <a:t>第六步：设置无线</a:t>
-            </a:r>
-            <a:r>
-              <a:rPr lang="en-US" altLang="zh-CN" sz="1600" b="1" dirty="0">
-                <a:solidFill>
-                  <a:schemeClr val="tx1"/>
-                </a:solidFill>
-                <a:effectLst>
-                  <a:outerShdw blurRad="38100" dist="19050" dir="2700000" algn="tl" rotWithShape="0">
-                    <a:schemeClr val="dk1">
-                      <a:alpha val="40000"/>
-                    </a:schemeClr>
-                  </a:outerShdw>
-                </a:effectLst>
-              </a:rPr>
-              <a:t>IP</a:t>
-            </a:r>
-            <a:r>
-              <a:rPr lang="zh-CN" altLang="en-US" sz="1600" b="1" dirty="0">
-                <a:solidFill>
-                  <a:schemeClr val="tx1"/>
-                </a:solidFill>
-                <a:effectLst>
-                  <a:outerShdw blurRad="38100" dist="19050" dir="2700000" algn="tl" rotWithShape="0">
-                    <a:schemeClr val="dk1">
-                      <a:alpha val="40000"/>
-                    </a:schemeClr>
-                  </a:outerShdw>
-                </a:effectLst>
-              </a:rPr>
-              <a:t>地址，一个电脑为</a:t>
-            </a:r>
-            <a:r>
-              <a:rPr lang="en-US" altLang="zh-CN" sz="1600" b="1" dirty="0">
-                <a:solidFill>
-                  <a:schemeClr val="tx1"/>
-                </a:solidFill>
-                <a:effectLst>
-                  <a:outerShdw blurRad="38100" dist="19050" dir="2700000" algn="tl" rotWithShape="0">
-                    <a:schemeClr val="dk1">
-                      <a:alpha val="40000"/>
-                    </a:schemeClr>
-                  </a:outerShdw>
-                </a:effectLst>
-              </a:rPr>
-              <a:t>192.168.1.11</a:t>
-            </a:r>
-            <a:r>
-              <a:rPr lang="zh-CN" altLang="en-US" sz="1600" b="1" dirty="0">
-                <a:solidFill>
-                  <a:schemeClr val="tx1"/>
-                </a:solidFill>
-                <a:effectLst>
-                  <a:outerShdw blurRad="38100" dist="19050" dir="2700000" algn="tl" rotWithShape="0">
-                    <a:schemeClr val="dk1">
-                      <a:alpha val="40000"/>
-                    </a:schemeClr>
-                  </a:outerShdw>
-                </a:effectLst>
-              </a:rPr>
-              <a:t>，一个电脑为</a:t>
-            </a:r>
-            <a:r>
-              <a:rPr lang="en-US" altLang="zh-CN" sz="1600" b="1" dirty="0">
-                <a:solidFill>
-                  <a:schemeClr val="tx1"/>
-                </a:solidFill>
-                <a:effectLst>
-                  <a:outerShdw blurRad="38100" dist="19050" dir="2700000" algn="tl" rotWithShape="0">
-                    <a:schemeClr val="dk1">
-                      <a:alpha val="40000"/>
-                    </a:schemeClr>
-                  </a:outerShdw>
-                </a:effectLst>
-              </a:rPr>
-              <a:t>192.168.1.22</a:t>
-            </a:r>
-            <a:r>
-              <a:rPr lang="zh-CN" altLang="en-US" sz="1600" b="1" dirty="0">
-                <a:solidFill>
-                  <a:schemeClr val="tx1"/>
-                </a:solidFill>
-                <a:effectLst>
-                  <a:outerShdw blurRad="38100" dist="19050" dir="2700000" algn="tl" rotWithShape="0">
-                    <a:schemeClr val="dk1">
-                      <a:alpha val="40000"/>
-                    </a:schemeClr>
-                  </a:outerShdw>
-                </a:effectLst>
-              </a:rPr>
-              <a:t>，用</a:t>
-            </a:r>
-            <a:r>
-              <a:rPr lang="en-US" altLang="zh-CN" sz="1600" b="1" dirty="0">
-                <a:solidFill>
-                  <a:schemeClr val="tx1"/>
-                </a:solidFill>
-                <a:effectLst>
-                  <a:outerShdw blurRad="38100" dist="19050" dir="2700000" algn="tl" rotWithShape="0">
-                    <a:schemeClr val="dk1">
-                      <a:alpha val="40000"/>
-                    </a:schemeClr>
-                  </a:outerShdw>
-                </a:effectLst>
-              </a:rPr>
-              <a:t>IP</a:t>
-            </a:r>
-            <a:r>
-              <a:rPr lang="zh-CN" altLang="en-US" sz="1600" b="1" dirty="0">
-                <a:solidFill>
-                  <a:schemeClr val="tx1"/>
-                </a:solidFill>
-                <a:effectLst>
-                  <a:outerShdw blurRad="38100" dist="19050" dir="2700000" algn="tl" rotWithShape="0">
-                    <a:schemeClr val="dk1">
-                      <a:alpha val="40000"/>
-                    </a:schemeClr>
-                  </a:outerShdw>
-                </a:effectLst>
-              </a:rPr>
-              <a:t>地址为</a:t>
-            </a:r>
-            <a:r>
-              <a:rPr lang="en-US" altLang="zh-CN" sz="1600" b="1" dirty="0">
-                <a:solidFill>
-                  <a:schemeClr val="tx1"/>
-                </a:solidFill>
-                <a:effectLst>
-                  <a:outerShdw blurRad="38100" dist="19050" dir="2700000" algn="tl" rotWithShape="0">
-                    <a:schemeClr val="dk1">
-                      <a:alpha val="40000"/>
-                    </a:schemeClr>
-                  </a:outerShdw>
-                </a:effectLst>
-              </a:rPr>
-              <a:t>192.168.1.11</a:t>
-            </a:r>
-            <a:r>
-              <a:rPr lang="zh-CN" altLang="en-US" sz="1600" b="1" dirty="0">
-                <a:solidFill>
-                  <a:schemeClr val="tx1"/>
-                </a:solidFill>
-                <a:effectLst>
-                  <a:outerShdw blurRad="38100" dist="19050" dir="2700000" algn="tl" rotWithShape="0">
-                    <a:schemeClr val="dk1">
-                      <a:alpha val="40000"/>
-                    </a:schemeClr>
-                  </a:outerShdw>
-                </a:effectLst>
-              </a:rPr>
-              <a:t>的电脑去</a:t>
-            </a:r>
-            <a:r>
-              <a:rPr lang="en-US" altLang="zh-CN" sz="1600" b="1" dirty="0">
-                <a:solidFill>
-                  <a:schemeClr val="tx1"/>
-                </a:solidFill>
-                <a:effectLst>
-                  <a:outerShdw blurRad="38100" dist="19050" dir="2700000" algn="tl" rotWithShape="0">
-                    <a:schemeClr val="dk1">
-                      <a:alpha val="40000"/>
-                    </a:schemeClr>
-                  </a:outerShdw>
-                </a:effectLst>
-              </a:rPr>
-              <a:t>ping192.168.1.22</a:t>
-            </a:r>
-            <a:r>
-              <a:rPr lang="zh-CN" altLang="en-US" sz="1600" b="1" dirty="0">
-                <a:solidFill>
-                  <a:schemeClr val="tx1"/>
-                </a:solidFill>
-                <a:effectLst>
-                  <a:outerShdw blurRad="38100" dist="19050" dir="2700000" algn="tl" rotWithShape="0">
-                    <a:schemeClr val="dk1">
-                      <a:alpha val="40000"/>
-                    </a:schemeClr>
-                  </a:outerShdw>
-                </a:effectLst>
-              </a:rPr>
-              <a:t>，结果如图所示：</a:t>
+              <a:t>第二步：确认两个电脑已经相连成功后，设置共享使两个队伍能够互相传输文件</a:t>
             </a:r>
           </a:p>
         </p:txBody>
       </p:sp>
       <p:pic>
         <p:nvPicPr>
-          <p:cNvPr id="11" name="内容占位符 10"/>
+          <p:cNvPr id="6" name="内容占位符 5"/>
           <p:cNvPicPr>
             <a:picLocks noGrp="1"/>
           </p:cNvPicPr>
@@ -4111,8 +9777,8 @@
         </p:blipFill>
         <p:spPr>
           <a:xfrm>
-            <a:off x="739047" y="1817236"/>
-            <a:ext cx="5244284" cy="4351338"/>
+            <a:off x="5922518" y="1676665"/>
+            <a:ext cx="5513617" cy="3714326"/>
           </a:xfrm>
           <a:prstGeom prst="rect">
             <a:avLst/>
@@ -4124,7 +9790,7 @@
           <p:cNvPr id="5" name="图片 4">
             <a:extLst>
               <a:ext uri="{FF2B5EF4-FFF2-40B4-BE49-F238E27FC236}">
-                <a16:creationId xmlns:a16="http://schemas.microsoft.com/office/drawing/2014/main" id="{FD0522F5-4937-4258-A102-600704B1A752}"/>
+                <a16:creationId xmlns:a16="http://schemas.microsoft.com/office/drawing/2014/main" id="{AEBD76FF-2F70-436F-8FCB-D4F09CA1F1A6}"/>
               </a:ext>
             </a:extLst>
           </p:cNvPr>
@@ -4139,8 +9805,8 @@
         </p:blipFill>
         <p:spPr>
           <a:xfrm>
-            <a:off x="6450510" y="1790249"/>
-            <a:ext cx="5274310" cy="4378325"/>
+            <a:off x="755865" y="1495237"/>
+            <a:ext cx="4793126" cy="4050466"/>
           </a:xfrm>
           <a:prstGeom prst="rect">
             <a:avLst/>
@@ -4174,10 +9840,14 @@
       </p:grpSpPr>
       <p:pic>
         <p:nvPicPr>
-          <p:cNvPr id="4" name="图片 3" descr="6"/>
-          <p:cNvPicPr>
-            <a:picLocks noChangeAspect="1"/>
-          </p:cNvPicPr>
+          <p:cNvPr id="5" name="图片 4">
+            <a:extLst>
+              <a:ext uri="{FF2B5EF4-FFF2-40B4-BE49-F238E27FC236}">
+                <a16:creationId xmlns:a16="http://schemas.microsoft.com/office/drawing/2014/main" id="{4ABE699B-776B-4E38-ACEB-6334ECF6FE86}"/>
+              </a:ext>
+            </a:extLst>
+          </p:cNvPr>
+          <p:cNvPicPr/>
           <p:nvPr/>
         </p:nvPicPr>
         <p:blipFill>
@@ -4189,7 +9859,7 @@
         <p:spPr>
           <a:xfrm>
             <a:off x="0" y="0"/>
-            <a:ext cx="12192000" cy="9091295"/>
+            <a:ext cx="12192000" cy="6858000"/>
           </a:xfrm>
           <a:prstGeom prst="rect">
             <a:avLst/>
@@ -4206,7 +9876,12 @@
             <p:ph type="title"/>
           </p:nvPr>
         </p:nvSpPr>
-        <p:spPr/>
+        <p:spPr>
+          <a:xfrm>
+            <a:off x="909221" y="400635"/>
+            <a:ext cx="10515600" cy="1325563"/>
+          </a:xfrm>
+        </p:spPr>
         <p:txBody>
           <a:bodyPr>
             <a:normAutofit/>
@@ -4216,7 +9891,10 @@
             <a:r>
               <a:rPr lang="zh-CN" altLang="en-US" sz="1600" b="1" dirty="0">
                 <a:solidFill>
-                  <a:schemeClr val="tx1"/>
+                  <a:schemeClr val="accent1">
+                    <a:lumMod val="40000"/>
+                    <a:lumOff val="60000"/>
+                  </a:schemeClr>
                 </a:solidFill>
                 <a:effectLst>
                   <a:outerShdw blurRad="38100" dist="19050" dir="2700000" algn="tl" rotWithShape="0">
@@ -4226,97 +9904,7 @@
                   </a:outerShdw>
                 </a:effectLst>
               </a:rPr>
-              <a:t>第七步：再用有线地址为</a:t>
-            </a:r>
-            <a:r>
-              <a:rPr lang="en-US" altLang="zh-CN" sz="1600" b="1" dirty="0">
-                <a:solidFill>
-                  <a:schemeClr val="tx1"/>
-                </a:solidFill>
-                <a:effectLst>
-                  <a:outerShdw blurRad="38100" dist="19050" dir="2700000" algn="tl" rotWithShape="0">
-                    <a:schemeClr val="dk1">
-                      <a:alpha val="40000"/>
-                    </a:schemeClr>
-                  </a:outerShdw>
-                </a:effectLst>
-              </a:rPr>
-              <a:t>192.168.1.1</a:t>
-            </a:r>
-            <a:r>
-              <a:rPr lang="zh-CN" altLang="en-US" sz="1600" b="1" dirty="0">
-                <a:solidFill>
-                  <a:schemeClr val="tx1"/>
-                </a:solidFill>
-                <a:effectLst>
-                  <a:outerShdw blurRad="38100" dist="19050" dir="2700000" algn="tl" rotWithShape="0">
-                    <a:schemeClr val="dk1">
-                      <a:alpha val="40000"/>
-                    </a:schemeClr>
-                  </a:outerShdw>
-                </a:effectLst>
-              </a:rPr>
-              <a:t>且无线地址为</a:t>
-            </a:r>
-            <a:r>
-              <a:rPr lang="en-US" altLang="zh-CN" sz="1600" b="1" dirty="0">
-                <a:solidFill>
-                  <a:schemeClr val="tx1"/>
-                </a:solidFill>
-                <a:effectLst>
-                  <a:outerShdw blurRad="38100" dist="19050" dir="2700000" algn="tl" rotWithShape="0">
-                    <a:schemeClr val="dk1">
-                      <a:alpha val="40000"/>
-                    </a:schemeClr>
-                  </a:outerShdw>
-                </a:effectLst>
-              </a:rPr>
-              <a:t>192.168.1.11</a:t>
-            </a:r>
-            <a:r>
-              <a:rPr lang="zh-CN" altLang="en-US" sz="1600" b="1" dirty="0">
-                <a:solidFill>
-                  <a:schemeClr val="tx1"/>
-                </a:solidFill>
-                <a:effectLst>
-                  <a:outerShdw blurRad="38100" dist="19050" dir="2700000" algn="tl" rotWithShape="0">
-                    <a:schemeClr val="dk1">
-                      <a:alpha val="40000"/>
-                    </a:schemeClr>
-                  </a:outerShdw>
-                </a:effectLst>
-              </a:rPr>
-              <a:t>的电脑去</a:t>
-            </a:r>
-            <a:r>
-              <a:rPr lang="en-US" altLang="zh-CN" sz="1600" b="1" dirty="0">
-                <a:solidFill>
-                  <a:schemeClr val="tx1"/>
-                </a:solidFill>
-                <a:effectLst>
-                  <a:outerShdw blurRad="38100" dist="19050" dir="2700000" algn="tl" rotWithShape="0">
-                    <a:schemeClr val="dk1">
-                      <a:alpha val="40000"/>
-                    </a:schemeClr>
-                  </a:outerShdw>
-                </a:effectLst>
-              </a:rPr>
-              <a:t>ping</a:t>
-            </a:r>
-            <a:r>
-              <a:rPr lang="zh-CN" altLang="en-US" sz="1600" b="1" dirty="0">
-                <a:solidFill>
-                  <a:schemeClr val="tx1"/>
-                </a:solidFill>
-                <a:effectLst>
-                  <a:outerShdw blurRad="38100" dist="19050" dir="2700000" algn="tl" rotWithShape="0">
-                    <a:schemeClr val="dk1">
-                      <a:alpha val="40000"/>
-                    </a:schemeClr>
-                  </a:outerShdw>
-                </a:effectLst>
-              </a:rPr>
-              <a:t>另一台电脑的地址，对比可知有线速率比无线快很多</a:t>
+              <a:t>第四步：用一台电脑去访问另一台电脑已经共享的文件，然后将它传到自己这里，速度如图所示：</a:t>
             </a:r>
           </a:p>
         </p:txBody>
@@ -4339,14 +9927,56 @@
         </p:blipFill>
         <p:spPr>
           <a:xfrm>
-            <a:off x="3135373" y="1690688"/>
-            <a:ext cx="5921253" cy="4398667"/>
+            <a:off x="3863146" y="1816091"/>
+            <a:ext cx="4465707" cy="3048264"/>
           </a:xfrm>
           <a:prstGeom prst="rect">
             <a:avLst/>
           </a:prstGeom>
         </p:spPr>
       </p:pic>
+      <p:sp>
+        <p:nvSpPr>
+          <p:cNvPr id="3" name="文本框 2">
+            <a:extLst>
+              <a:ext uri="{FF2B5EF4-FFF2-40B4-BE49-F238E27FC236}">
+                <a16:creationId xmlns:a16="http://schemas.microsoft.com/office/drawing/2014/main" id="{BD499AF5-6131-48F2-ADE0-FA3B2E294C3B}"/>
+              </a:ext>
+            </a:extLst>
+          </p:cNvPr>
+          <p:cNvSpPr txBox="1"/>
+          <p:nvPr/>
+        </p:nvSpPr>
+        <p:spPr>
+          <a:xfrm>
+            <a:off x="5494789" y="5134061"/>
+            <a:ext cx="3657600" cy="369332"/>
+          </a:xfrm>
+          <a:prstGeom prst="rect">
+            <a:avLst/>
+          </a:prstGeom>
+          <a:noFill/>
+        </p:spPr>
+        <p:txBody>
+          <a:bodyPr wrap="square" rtlCol="0">
+            <a:spAutoFit/>
+          </a:bodyPr>
+          <a:lstStyle/>
+          <a:p>
+            <a:r>
+              <a:rPr lang="zh-CN" altLang="en-US" dirty="0">
+                <a:solidFill>
+                  <a:schemeClr val="accent1">
+                    <a:lumMod val="40000"/>
+                    <a:lumOff val="60000"/>
+                  </a:schemeClr>
+                </a:solidFill>
+              </a:rPr>
+              <a:t>网线速度</a:t>
+            </a:r>
+          </a:p>
+        </p:txBody>
+      </p:sp>
     </p:spTree>
   </p:cSld>
   <p:clrMapOvr>
@@ -4374,10 +10004,14 @@
       </p:grpSpPr>
       <p:pic>
         <p:nvPicPr>
-          <p:cNvPr id="4" name="图片 3" descr="6"/>
-          <p:cNvPicPr>
-            <a:picLocks noChangeAspect="1"/>
-          </p:cNvPicPr>
+          <p:cNvPr id="3" name="图片 2">
+            <a:extLst>
+              <a:ext uri="{FF2B5EF4-FFF2-40B4-BE49-F238E27FC236}">
+                <a16:creationId xmlns:a16="http://schemas.microsoft.com/office/drawing/2014/main" id="{4F35E4B2-0C9C-400B-AA28-494D0AE7437A}"/>
+              </a:ext>
+            </a:extLst>
+          </p:cNvPr>
+          <p:cNvPicPr/>
           <p:nvPr/>
         </p:nvPicPr>
         <p:blipFill>
@@ -4389,7 +10023,7 @@
         <p:spPr>
           <a:xfrm>
             <a:off x="0" y="0"/>
-            <a:ext cx="12192000" cy="9091295"/>
+            <a:ext cx="12192000" cy="6858000"/>
           </a:xfrm>
           <a:prstGeom prst="rect">
             <a:avLst/>
@@ -4406,7 +10040,12 @@
             <p:ph type="title"/>
           </p:nvPr>
         </p:nvSpPr>
-        <p:spPr/>
+        <p:spPr>
+          <a:xfrm>
+            <a:off x="765711" y="94751"/>
+            <a:ext cx="10515600" cy="1325563"/>
+          </a:xfrm>
+        </p:spPr>
         <p:txBody>
           <a:bodyPr>
             <a:normAutofit/>
@@ -4416,7 +10055,10 @@
             <a:r>
               <a:rPr lang="zh-CN" altLang="en-US" sz="1600" b="1" dirty="0">
                 <a:solidFill>
-                  <a:schemeClr val="tx1"/>
+                  <a:schemeClr val="accent1">
+                    <a:lumMod val="40000"/>
+                    <a:lumOff val="60000"/>
+                  </a:schemeClr>
                 </a:solidFill>
                 <a:effectLst>
                   <a:outerShdw blurRad="38100" dist="19050" dir="2700000" algn="tl" rotWithShape="0">
@@ -4426,7 +10068,7 @@
                   </a:outerShdw>
                 </a:effectLst>
               </a:rPr>
-              <a:t>第八步：重复用一台电脑去访问另一台电脑已经共享的文件，然后将它传到自己这里</a:t>
+              <a:t>第五步：接下来测无线速度，用一个电脑去连另外一台电脑的热点，使两个电脑进行无线连接，如图所示：</a:t>
             </a:r>
           </a:p>
         </p:txBody>
@@ -4449,8 +10091,8 @@
         </p:blipFill>
         <p:spPr>
           <a:xfrm>
-            <a:off x="908375" y="2148884"/>
-            <a:ext cx="4160881" cy="2781541"/>
+            <a:off x="6742328" y="1001771"/>
+            <a:ext cx="3520745" cy="1493649"/>
           </a:xfrm>
           <a:prstGeom prst="rect">
             <a:avLst/>
@@ -4459,7 +10101,13 @@
       </p:pic>
       <p:pic>
         <p:nvPicPr>
-          <p:cNvPr id="9" name="图片 8"/>
+          <p:cNvPr id="5" name="图片 4">
+            <a:extLst>
+              <a:ext uri="{FF2B5EF4-FFF2-40B4-BE49-F238E27FC236}">
+                <a16:creationId xmlns:a16="http://schemas.microsoft.com/office/drawing/2014/main" id="{165C53C9-769A-4923-830F-5F22A64B0176}"/>
+              </a:ext>
+            </a:extLst>
+          </p:cNvPr>
           <p:cNvPicPr/>
           <p:nvPr/>
         </p:nvPicPr>
@@ -4471,8 +10119,36 @@
         </p:blipFill>
         <p:spPr>
           <a:xfrm>
-            <a:off x="6247882" y="2057400"/>
-            <a:ext cx="4099560" cy="2743200"/>
+            <a:off x="702307" y="1038411"/>
+            <a:ext cx="5274310" cy="5068570"/>
+          </a:xfrm>
+          <a:prstGeom prst="rect">
+            <a:avLst/>
+          </a:prstGeom>
+        </p:spPr>
+      </p:pic>
+      <p:pic>
+        <p:nvPicPr>
+          <p:cNvPr id="7" name="图片 6">
+            <a:extLst>
+              <a:ext uri="{FF2B5EF4-FFF2-40B4-BE49-F238E27FC236}">
+                <a16:creationId xmlns:a16="http://schemas.microsoft.com/office/drawing/2014/main" id="{0B318443-2BE3-4623-BD9B-DD5D70B11806}"/>
+              </a:ext>
+            </a:extLst>
+          </p:cNvPr>
+          <p:cNvPicPr/>
+          <p:nvPr/>
+        </p:nvPicPr>
+        <p:blipFill>
+          <a:blip r:embed="rId5"/>
+          <a:stretch>
+            <a:fillRect/>
+          </a:stretch>
+        </p:blipFill>
+        <p:spPr>
+          <a:xfrm>
+            <a:off x="6742328" y="2491118"/>
+            <a:ext cx="3456480" cy="3615863"/>
           </a:xfrm>
           <a:prstGeom prst="rect">
             <a:avLst/>
@@ -4506,10 +10182,14 @@
       </p:grpSpPr>
       <p:pic>
         <p:nvPicPr>
-          <p:cNvPr id="4" name="图片 3" descr="6"/>
-          <p:cNvPicPr>
-            <a:picLocks noChangeAspect="1"/>
-          </p:cNvPicPr>
+          <p:cNvPr id="9" name="图片 8">
+            <a:extLst>
+              <a:ext uri="{FF2B5EF4-FFF2-40B4-BE49-F238E27FC236}">
+                <a16:creationId xmlns:a16="http://schemas.microsoft.com/office/drawing/2014/main" id="{3712C671-C2BE-4DA5-969C-C12BA63CD97C}"/>
+              </a:ext>
+            </a:extLst>
+          </p:cNvPr>
+          <p:cNvPicPr/>
           <p:nvPr/>
         </p:nvPicPr>
         <p:blipFill>
@@ -4521,7 +10201,7 @@
         <p:spPr>
           <a:xfrm>
             <a:off x="0" y="0"/>
-            <a:ext cx="12192000" cy="9091295"/>
+            <a:ext cx="12192000" cy="6858000"/>
           </a:xfrm>
           <a:prstGeom prst="rect">
             <a:avLst/>
@@ -4548,7 +10228,10 @@
             <a:r>
               <a:rPr lang="zh-CN" altLang="en-US" sz="1600" b="1" dirty="0">
                 <a:solidFill>
-                  <a:schemeClr val="tx1"/>
+                  <a:schemeClr val="accent1">
+                    <a:lumMod val="40000"/>
+                    <a:lumOff val="60000"/>
+                  </a:schemeClr>
                 </a:solidFill>
                 <a:effectLst>
                   <a:outerShdw blurRad="38100" dist="19050" dir="2700000" algn="tl" rotWithShape="0">
@@ -4558,20 +10241,238 @@
                   </a:outerShdw>
                 </a:effectLst>
               </a:rPr>
-              <a:t>当将有线的地址和无线的地址设为相同时，由于一个地址只能通过一条道传输的关系，所以会导致只有一个适配器能使用此地址</a:t>
+              <a:t>第六步：设置无线</a:t>
+            </a:r>
+            <a:r>
+              <a:rPr lang="en-US" altLang="zh-CN" sz="1600" b="1" dirty="0">
+                <a:solidFill>
+                  <a:schemeClr val="accent1">
+                    <a:lumMod val="40000"/>
+                    <a:lumOff val="60000"/>
+                  </a:schemeClr>
+                </a:solidFill>
+                <a:effectLst>
+                  <a:outerShdw blurRad="38100" dist="19050" dir="2700000" algn="tl" rotWithShape="0">
+                    <a:schemeClr val="dk1">
+                      <a:alpha val="40000"/>
+                    </a:schemeClr>
+                  </a:outerShdw>
+                </a:effectLst>
+              </a:rPr>
+              <a:t>IP</a:t>
+            </a:r>
+            <a:r>
+              <a:rPr lang="zh-CN" altLang="en-US" sz="1600" b="1" dirty="0">
+                <a:solidFill>
+                  <a:schemeClr val="accent1">
+                    <a:lumMod val="40000"/>
+                    <a:lumOff val="60000"/>
+                  </a:schemeClr>
+                </a:solidFill>
+                <a:effectLst>
+                  <a:outerShdw blurRad="38100" dist="19050" dir="2700000" algn="tl" rotWithShape="0">
+                    <a:schemeClr val="dk1">
+                      <a:alpha val="40000"/>
+                    </a:schemeClr>
+                  </a:outerShdw>
+                </a:effectLst>
+              </a:rPr>
+              <a:t>地址，一个电脑为</a:t>
+            </a:r>
+            <a:r>
+              <a:rPr lang="en-US" altLang="zh-CN" sz="1600" b="1" dirty="0">
+                <a:solidFill>
+                  <a:schemeClr val="accent1">
+                    <a:lumMod val="40000"/>
+                    <a:lumOff val="60000"/>
+                  </a:schemeClr>
+                </a:solidFill>
+                <a:effectLst>
+                  <a:outerShdw blurRad="38100" dist="19050" dir="2700000" algn="tl" rotWithShape="0">
+                    <a:schemeClr val="dk1">
+                      <a:alpha val="40000"/>
+                    </a:schemeClr>
+                  </a:outerShdw>
+                </a:effectLst>
+              </a:rPr>
+              <a:t>192.168.1.11</a:t>
+            </a:r>
+            <a:r>
+              <a:rPr lang="zh-CN" altLang="en-US" sz="1600" b="1" dirty="0">
+                <a:solidFill>
+                  <a:schemeClr val="accent1">
+                    <a:lumMod val="40000"/>
+                    <a:lumOff val="60000"/>
+                  </a:schemeClr>
+                </a:solidFill>
+                <a:effectLst>
+                  <a:outerShdw blurRad="38100" dist="19050" dir="2700000" algn="tl" rotWithShape="0">
+                    <a:schemeClr val="dk1">
+                      <a:alpha val="40000"/>
+                    </a:schemeClr>
+                  </a:outerShdw>
+                </a:effectLst>
+              </a:rPr>
+              <a:t>，一个电脑为</a:t>
+            </a:r>
+            <a:r>
+              <a:rPr lang="en-US" altLang="zh-CN" sz="1600" b="1" dirty="0">
+                <a:solidFill>
+                  <a:schemeClr val="accent1">
+                    <a:lumMod val="40000"/>
+                    <a:lumOff val="60000"/>
+                  </a:schemeClr>
+                </a:solidFill>
+                <a:effectLst>
+                  <a:outerShdw blurRad="38100" dist="19050" dir="2700000" algn="tl" rotWithShape="0">
+                    <a:schemeClr val="dk1">
+                      <a:alpha val="40000"/>
+                    </a:schemeClr>
+                  </a:outerShdw>
+                </a:effectLst>
+              </a:rPr>
+              <a:t>192.168.1.22</a:t>
+            </a:r>
+            <a:r>
+              <a:rPr lang="zh-CN" altLang="en-US" sz="1600" b="1" dirty="0">
+                <a:solidFill>
+                  <a:schemeClr val="accent1">
+                    <a:lumMod val="40000"/>
+                    <a:lumOff val="60000"/>
+                  </a:schemeClr>
+                </a:solidFill>
+                <a:effectLst>
+                  <a:outerShdw blurRad="38100" dist="19050" dir="2700000" algn="tl" rotWithShape="0">
+                    <a:schemeClr val="dk1">
+                      <a:alpha val="40000"/>
+                    </a:schemeClr>
+                  </a:outerShdw>
+                </a:effectLst>
+              </a:rPr>
+              <a:t>，用</a:t>
+            </a:r>
+            <a:r>
+              <a:rPr lang="en-US" altLang="zh-CN" sz="1600" b="1" dirty="0">
+                <a:solidFill>
+                  <a:schemeClr val="accent1">
+                    <a:lumMod val="40000"/>
+                    <a:lumOff val="60000"/>
+                  </a:schemeClr>
+                </a:solidFill>
+                <a:effectLst>
+                  <a:outerShdw blurRad="38100" dist="19050" dir="2700000" algn="tl" rotWithShape="0">
+                    <a:schemeClr val="dk1">
+                      <a:alpha val="40000"/>
+                    </a:schemeClr>
+                  </a:outerShdw>
+                </a:effectLst>
+              </a:rPr>
+              <a:t>IP</a:t>
+            </a:r>
+            <a:r>
+              <a:rPr lang="zh-CN" altLang="en-US" sz="1600" b="1" dirty="0">
+                <a:solidFill>
+                  <a:schemeClr val="accent1">
+                    <a:lumMod val="40000"/>
+                    <a:lumOff val="60000"/>
+                  </a:schemeClr>
+                </a:solidFill>
+                <a:effectLst>
+                  <a:outerShdw blurRad="38100" dist="19050" dir="2700000" algn="tl" rotWithShape="0">
+                    <a:schemeClr val="dk1">
+                      <a:alpha val="40000"/>
+                    </a:schemeClr>
+                  </a:outerShdw>
+                </a:effectLst>
+              </a:rPr>
+              <a:t>地址为</a:t>
+            </a:r>
+            <a:r>
+              <a:rPr lang="en-US" altLang="zh-CN" sz="1600" b="1" dirty="0">
+                <a:solidFill>
+                  <a:schemeClr val="accent1">
+                    <a:lumMod val="40000"/>
+                    <a:lumOff val="60000"/>
+                  </a:schemeClr>
+                </a:solidFill>
+                <a:effectLst>
+                  <a:outerShdw blurRad="38100" dist="19050" dir="2700000" algn="tl" rotWithShape="0">
+                    <a:schemeClr val="dk1">
+                      <a:alpha val="40000"/>
+                    </a:schemeClr>
+                  </a:outerShdw>
+                </a:effectLst>
+              </a:rPr>
+              <a:t>192.168.1.11</a:t>
+            </a:r>
+            <a:r>
+              <a:rPr lang="zh-CN" altLang="en-US" sz="1600" b="1" dirty="0">
+                <a:solidFill>
+                  <a:schemeClr val="accent1">
+                    <a:lumMod val="40000"/>
+                    <a:lumOff val="60000"/>
+                  </a:schemeClr>
+                </a:solidFill>
+                <a:effectLst>
+                  <a:outerShdw blurRad="38100" dist="19050" dir="2700000" algn="tl" rotWithShape="0">
+                    <a:schemeClr val="dk1">
+                      <a:alpha val="40000"/>
+                    </a:schemeClr>
+                  </a:outerShdw>
+                </a:effectLst>
+              </a:rPr>
+              <a:t>的电脑去</a:t>
+            </a:r>
+            <a:r>
+              <a:rPr lang="en-US" altLang="zh-CN" sz="1600" b="1" dirty="0">
+                <a:solidFill>
+                  <a:schemeClr val="accent1">
+                    <a:lumMod val="40000"/>
+                    <a:lumOff val="60000"/>
+                  </a:schemeClr>
+                </a:solidFill>
+                <a:effectLst>
+                  <a:outerShdw blurRad="38100" dist="19050" dir="2700000" algn="tl" rotWithShape="0">
+                    <a:schemeClr val="dk1">
+                      <a:alpha val="40000"/>
+                    </a:schemeClr>
+                  </a:outerShdw>
+                </a:effectLst>
+              </a:rPr>
+              <a:t>ping192.168.1.22</a:t>
+            </a:r>
+            <a:r>
+              <a:rPr lang="zh-CN" altLang="en-US" sz="1600" b="1" dirty="0">
+                <a:solidFill>
+                  <a:schemeClr val="accent1">
+                    <a:lumMod val="40000"/>
+                    <a:lumOff val="60000"/>
+                  </a:schemeClr>
+                </a:solidFill>
+                <a:effectLst>
+                  <a:outerShdw blurRad="38100" dist="19050" dir="2700000" algn="tl" rotWithShape="0">
+                    <a:schemeClr val="dk1">
+                      <a:alpha val="40000"/>
+                    </a:schemeClr>
+                  </a:outerShdw>
+                </a:effectLst>
+              </a:rPr>
+              <a:t>，结果如图所示：</a:t>
             </a:r>
           </a:p>
         </p:txBody>
       </p:sp>
       <p:pic>
         <p:nvPicPr>
-          <p:cNvPr id="6" name="内容占位符 5"/>
-          <p:cNvPicPr>
-            <a:picLocks noGrp="1"/>
-          </p:cNvPicPr>
-          <p:nvPr>
-            <p:ph idx="1"/>
-          </p:nvPr>
+          <p:cNvPr id="8" name="图片 7">
+            <a:extLst>
+              <a:ext uri="{FF2B5EF4-FFF2-40B4-BE49-F238E27FC236}">
+                <a16:creationId xmlns:a16="http://schemas.microsoft.com/office/drawing/2014/main" id="{A176990C-3C27-4C8F-A399-6BE4110CF1AB}"/>
+              </a:ext>
+            </a:extLst>
+          </p:cNvPr>
+          <p:cNvPicPr/>
+          <p:nvPr/>
         </p:nvPicPr>
         <p:blipFill>
           <a:blip r:embed="rId3"/>
@@ -4581,14 +10482,79 @@
         </p:blipFill>
         <p:spPr>
           <a:xfrm>
-            <a:off x="1192105" y="1897991"/>
-            <a:ext cx="9807790" cy="4206605"/>
+            <a:off x="2211010" y="1690688"/>
+            <a:ext cx="7769980" cy="4638040"/>
           </a:xfrm>
           <a:prstGeom prst="rect">
             <a:avLst/>
           </a:prstGeom>
         </p:spPr>
       </p:pic>
+      <p:sp>
+        <p:nvSpPr>
+          <p:cNvPr id="7" name="文本框 6">
+            <a:extLst>
+              <a:ext uri="{FF2B5EF4-FFF2-40B4-BE49-F238E27FC236}">
+                <a16:creationId xmlns:a16="http://schemas.microsoft.com/office/drawing/2014/main" id="{3F1B2F8E-DF77-446F-ACFE-6566BF30BBF6}"/>
+              </a:ext>
+            </a:extLst>
+          </p:cNvPr>
+          <p:cNvSpPr txBox="1"/>
+          <p:nvPr/>
+        </p:nvSpPr>
+        <p:spPr>
+          <a:xfrm>
+            <a:off x="4409813" y="6673334"/>
+            <a:ext cx="3372374" cy="369332"/>
+          </a:xfrm>
+          <a:prstGeom prst="rect">
+            <a:avLst/>
+          </a:prstGeom>
+          <a:noFill/>
+        </p:spPr>
+        <p:txBody>
+          <a:bodyPr wrap="square" rtlCol="0">
+            <a:spAutoFit/>
+          </a:bodyPr>
+          <a:lstStyle/>
+          <a:p>
+            <a:pPr algn="ctr"/>
+            <a:r>
+              <a:rPr lang="zh-CN" altLang="en-US" dirty="0">
+                <a:solidFill>
+                  <a:schemeClr val="accent1">
+                    <a:lumMod val="40000"/>
+                    <a:lumOff val="60000"/>
+                  </a:schemeClr>
+                </a:solidFill>
+              </a:rPr>
+              <a:t>网线</a:t>
+            </a:r>
+            <a:r>
+              <a:rPr lang="en-US" altLang="zh-CN" dirty="0">
+                <a:solidFill>
+                  <a:schemeClr val="accent1">
+                    <a:lumMod val="40000"/>
+                    <a:lumOff val="60000"/>
+                  </a:schemeClr>
+                </a:solidFill>
+              </a:rPr>
+              <a:t>ping</a:t>
+            </a:r>
+            <a:r>
+              <a:rPr lang="zh-CN" altLang="en-US" dirty="0">
+                <a:solidFill>
+                  <a:schemeClr val="accent1">
+                    <a:lumMod val="40000"/>
+                    <a:lumOff val="60000"/>
+                  </a:schemeClr>
+                </a:solidFill>
+              </a:rPr>
+              <a:t>值</a:t>
+            </a:r>
+          </a:p>
+        </p:txBody>
+      </p:sp>
     </p:spTree>
   </p:cSld>
   <p:clrMapOvr>

--- a/other/204实验.pptx
+++ b/other/204实验.pptx
@@ -9,19 +9,17 @@
     <p:sldId id="267" r:id="rId3"/>
     <p:sldId id="271" r:id="rId4"/>
     <p:sldId id="268" r:id="rId5"/>
-    <p:sldId id="257" r:id="rId6"/>
-    <p:sldId id="258" r:id="rId7"/>
-    <p:sldId id="260" r:id="rId8"/>
+    <p:sldId id="258" r:id="rId6"/>
+    <p:sldId id="260" r:id="rId7"/>
+    <p:sldId id="257" r:id="rId8"/>
     <p:sldId id="261" r:id="rId9"/>
-    <p:sldId id="262" r:id="rId10"/>
-    <p:sldId id="263" r:id="rId11"/>
-    <p:sldId id="264" r:id="rId12"/>
-    <p:sldId id="265" r:id="rId13"/>
-    <p:sldId id="270" r:id="rId14"/>
-    <p:sldId id="269" r:id="rId15"/>
-    <p:sldId id="266" r:id="rId16"/>
-    <p:sldId id="273" r:id="rId17"/>
-    <p:sldId id="272" r:id="rId18"/>
+    <p:sldId id="264" r:id="rId10"/>
+    <p:sldId id="262" r:id="rId11"/>
+    <p:sldId id="265" r:id="rId12"/>
+    <p:sldId id="270" r:id="rId13"/>
+    <p:sldId id="269" r:id="rId14"/>
+    <p:sldId id="273" r:id="rId15"/>
+    <p:sldId id="272" r:id="rId16"/>
   </p:sldIdLst>
   <p:sldSz cx="12192000" cy="6858000"/>
   <p:notesSz cx="6858000" cy="9144000"/>
@@ -257,7 +255,7 @@
           <a:p>
             <a:fld id="{C1204EAE-C964-486C-9112-A587BFBBD611}" type="datetimeFigureOut">
               <a:rPr lang="zh-CN" altLang="en-US" smtClean="0"/>
-              <a:t>2020/11/2</a:t>
+              <a:t>2020/11/3</a:t>
             </a:fld>
             <a:endParaRPr lang="zh-CN" altLang="en-US"/>
           </a:p>
@@ -420,7 +418,7 @@
           <a:p>
             <a:fld id="{C1204EAE-C964-486C-9112-A587BFBBD611}" type="datetimeFigureOut">
               <a:rPr lang="zh-CN" altLang="en-US" smtClean="0"/>
-              <a:t>2020/11/2</a:t>
+              <a:t>2020/11/3</a:t>
             </a:fld>
             <a:endParaRPr lang="zh-CN" altLang="en-US"/>
           </a:p>
@@ -593,7 +591,7 @@
           <a:p>
             <a:fld id="{C1204EAE-C964-486C-9112-A587BFBBD611}" type="datetimeFigureOut">
               <a:rPr lang="zh-CN" altLang="en-US" smtClean="0"/>
-              <a:t>2020/11/2</a:t>
+              <a:t>2020/11/3</a:t>
             </a:fld>
             <a:endParaRPr lang="zh-CN" altLang="en-US"/>
           </a:p>
@@ -756,7 +754,7 @@
           <a:p>
             <a:fld id="{C1204EAE-C964-486C-9112-A587BFBBD611}" type="datetimeFigureOut">
               <a:rPr lang="zh-CN" altLang="en-US" smtClean="0"/>
-              <a:t>2020/11/2</a:t>
+              <a:t>2020/11/3</a:t>
             </a:fld>
             <a:endParaRPr lang="zh-CN" altLang="en-US"/>
           </a:p>
@@ -996,7 +994,7 @@
           <a:p>
             <a:fld id="{C1204EAE-C964-486C-9112-A587BFBBD611}" type="datetimeFigureOut">
               <a:rPr lang="zh-CN" altLang="en-US" smtClean="0"/>
-              <a:t>2020/11/2</a:t>
+              <a:t>2020/11/3</a:t>
             </a:fld>
             <a:endParaRPr lang="zh-CN" altLang="en-US"/>
           </a:p>
@@ -1220,7 +1218,7 @@
           <a:p>
             <a:fld id="{C1204EAE-C964-486C-9112-A587BFBBD611}" type="datetimeFigureOut">
               <a:rPr lang="zh-CN" altLang="en-US" smtClean="0"/>
-              <a:t>2020/11/2</a:t>
+              <a:t>2020/11/3</a:t>
             </a:fld>
             <a:endParaRPr lang="zh-CN" altLang="en-US"/>
           </a:p>
@@ -1579,7 +1577,7 @@
           <a:p>
             <a:fld id="{C1204EAE-C964-486C-9112-A587BFBBD611}" type="datetimeFigureOut">
               <a:rPr lang="zh-CN" altLang="en-US" smtClean="0"/>
-              <a:t>2020/11/2</a:t>
+              <a:t>2020/11/3</a:t>
             </a:fld>
             <a:endParaRPr lang="zh-CN" altLang="en-US"/>
           </a:p>
@@ -1691,7 +1689,7 @@
           <a:p>
             <a:fld id="{C1204EAE-C964-486C-9112-A587BFBBD611}" type="datetimeFigureOut">
               <a:rPr lang="zh-CN" altLang="en-US" smtClean="0"/>
-              <a:t>2020/11/2</a:t>
+              <a:t>2020/11/3</a:t>
             </a:fld>
             <a:endParaRPr lang="zh-CN" altLang="en-US"/>
           </a:p>
@@ -1781,7 +1779,7 @@
           <a:p>
             <a:fld id="{C1204EAE-C964-486C-9112-A587BFBBD611}" type="datetimeFigureOut">
               <a:rPr lang="zh-CN" altLang="en-US" smtClean="0"/>
-              <a:t>2020/11/2</a:t>
+              <a:t>2020/11/3</a:t>
             </a:fld>
             <a:endParaRPr lang="zh-CN" altLang="en-US"/>
           </a:p>
@@ -2051,7 +2049,7 @@
           <a:p>
             <a:fld id="{C1204EAE-C964-486C-9112-A587BFBBD611}" type="datetimeFigureOut">
               <a:rPr lang="zh-CN" altLang="en-US" smtClean="0"/>
-              <a:t>2020/11/2</a:t>
+              <a:t>2020/11/3</a:t>
             </a:fld>
             <a:endParaRPr lang="zh-CN" altLang="en-US"/>
           </a:p>
@@ -2298,7 +2296,7 @@
           <a:p>
             <a:fld id="{C1204EAE-C964-486C-9112-A587BFBBD611}" type="datetimeFigureOut">
               <a:rPr lang="zh-CN" altLang="en-US" smtClean="0"/>
-              <a:t>2020/11/2</a:t>
+              <a:t>2020/11/3</a:t>
             </a:fld>
             <a:endParaRPr lang="zh-CN" altLang="en-US"/>
           </a:p>
@@ -2504,7 +2502,7 @@
           <a:p>
             <a:fld id="{C1204EAE-C964-486C-9112-A587BFBBD611}" type="datetimeFigureOut">
               <a:rPr lang="zh-CN" altLang="en-US" smtClean="0"/>
-              <a:t>2020/11/2</a:t>
+              <a:t>2020/11/3</a:t>
             </a:fld>
             <a:endParaRPr lang="zh-CN" altLang="en-US"/>
           </a:p>
@@ -3081,10 +3079,10 @@
       </p:grpSpPr>
       <p:pic>
         <p:nvPicPr>
-          <p:cNvPr id="10" name="图片 9">
-            <a:extLst>
-              <a:ext uri="{FF2B5EF4-FFF2-40B4-BE49-F238E27FC236}">
-                <a16:creationId xmlns:a16="http://schemas.microsoft.com/office/drawing/2014/main" id="{AB65DC57-AA8A-48CC-80DF-807EE9DEEB36}"/>
+          <p:cNvPr id="9" name="图片 8">
+            <a:extLst>
+              <a:ext uri="{FF2B5EF4-FFF2-40B4-BE49-F238E27FC236}">
+                <a16:creationId xmlns:a16="http://schemas.microsoft.com/office/drawing/2014/main" id="{3712C671-C2BE-4DA5-969C-C12BA63CD97C}"/>
               </a:ext>
             </a:extLst>
           </p:cNvPr>
@@ -3140,7 +3138,7 @@
                   </a:outerShdw>
                 </a:effectLst>
               </a:rPr>
-              <a:t>第七步：再用有线地址为</a:t>
+              <a:t>第六步：设置无线</a:t>
             </a:r>
             <a:r>
               <a:rPr lang="en-US" altLang="zh-CN" sz="1600" b="1" dirty="0">
@@ -3158,7 +3156,7 @@
                   </a:outerShdw>
                 </a:effectLst>
               </a:rPr>
-              <a:t>192.168.1.1</a:t>
+              <a:t>IP</a:t>
             </a:r>
             <a:r>
               <a:rPr lang="zh-CN" altLang="en-US" sz="1600" b="1" dirty="0">
@@ -3176,7 +3174,7 @@
                   </a:outerShdw>
                 </a:effectLst>
               </a:rPr>
-              <a:t>且无线地址为</a:t>
+              <a:t>地址，一个电脑为</a:t>
             </a:r>
             <a:r>
               <a:rPr lang="en-US" altLang="zh-CN" sz="1600" b="1" dirty="0">
@@ -3212,7 +3210,7 @@
                   </a:outerShdw>
                 </a:effectLst>
               </a:rPr>
-              <a:t>的电脑去</a:t>
+              <a:t>，一个电脑为</a:t>
             </a:r>
             <a:r>
               <a:rPr lang="en-US" altLang="zh-CN" sz="1600" b="1" dirty="0">
@@ -3230,7 +3228,7 @@
                   </a:outerShdw>
                 </a:effectLst>
               </a:rPr>
-              <a:t>ping</a:t>
+              <a:t>192.168.1.22</a:t>
             </a:r>
             <a:r>
               <a:rPr lang="zh-CN" altLang="en-US" sz="1600" b="1" dirty="0">
@@ -3248,46 +3246,212 @@
                   </a:outerShdw>
                 </a:effectLst>
               </a:rPr>
-              <a:t>另一台电脑的地址，对比可知有线速率比无线快很多</a:t>
+              <a:t>，用</a:t>
+            </a:r>
+            <a:r>
+              <a:rPr lang="en-US" altLang="zh-CN" sz="1600" b="1" dirty="0">
+                <a:solidFill>
+                  <a:schemeClr val="accent1">
+                    <a:lumMod val="40000"/>
+                    <a:lumOff val="60000"/>
+                  </a:schemeClr>
+                </a:solidFill>
+                <a:effectLst>
+                  <a:outerShdw blurRad="38100" dist="19050" dir="2700000" algn="tl" rotWithShape="0">
+                    <a:schemeClr val="dk1">
+                      <a:alpha val="40000"/>
+                    </a:schemeClr>
+                  </a:outerShdw>
+                </a:effectLst>
+              </a:rPr>
+              <a:t>IP</a:t>
+            </a:r>
+            <a:r>
+              <a:rPr lang="zh-CN" altLang="en-US" sz="1600" b="1" dirty="0">
+                <a:solidFill>
+                  <a:schemeClr val="accent1">
+                    <a:lumMod val="40000"/>
+                    <a:lumOff val="60000"/>
+                  </a:schemeClr>
+                </a:solidFill>
+                <a:effectLst>
+                  <a:outerShdw blurRad="38100" dist="19050" dir="2700000" algn="tl" rotWithShape="0">
+                    <a:schemeClr val="dk1">
+                      <a:alpha val="40000"/>
+                    </a:schemeClr>
+                  </a:outerShdw>
+                </a:effectLst>
+              </a:rPr>
+              <a:t>地址为</a:t>
+            </a:r>
+            <a:r>
+              <a:rPr lang="en-US" altLang="zh-CN" sz="1600" b="1" dirty="0">
+                <a:solidFill>
+                  <a:schemeClr val="accent1">
+                    <a:lumMod val="40000"/>
+                    <a:lumOff val="60000"/>
+                  </a:schemeClr>
+                </a:solidFill>
+                <a:effectLst>
+                  <a:outerShdw blurRad="38100" dist="19050" dir="2700000" algn="tl" rotWithShape="0">
+                    <a:schemeClr val="dk1">
+                      <a:alpha val="40000"/>
+                    </a:schemeClr>
+                  </a:outerShdw>
+                </a:effectLst>
+              </a:rPr>
+              <a:t>192.168.1.11</a:t>
+            </a:r>
+            <a:r>
+              <a:rPr lang="zh-CN" altLang="en-US" sz="1600" b="1" dirty="0">
+                <a:solidFill>
+                  <a:schemeClr val="accent1">
+                    <a:lumMod val="40000"/>
+                    <a:lumOff val="60000"/>
+                  </a:schemeClr>
+                </a:solidFill>
+                <a:effectLst>
+                  <a:outerShdw blurRad="38100" dist="19050" dir="2700000" algn="tl" rotWithShape="0">
+                    <a:schemeClr val="dk1">
+                      <a:alpha val="40000"/>
+                    </a:schemeClr>
+                  </a:outerShdw>
+                </a:effectLst>
+              </a:rPr>
+              <a:t>的电脑去</a:t>
+            </a:r>
+            <a:r>
+              <a:rPr lang="en-US" altLang="zh-CN" sz="1600" b="1" dirty="0">
+                <a:solidFill>
+                  <a:schemeClr val="accent1">
+                    <a:lumMod val="40000"/>
+                    <a:lumOff val="60000"/>
+                  </a:schemeClr>
+                </a:solidFill>
+                <a:effectLst>
+                  <a:outerShdw blurRad="38100" dist="19050" dir="2700000" algn="tl" rotWithShape="0">
+                    <a:schemeClr val="dk1">
+                      <a:alpha val="40000"/>
+                    </a:schemeClr>
+                  </a:outerShdw>
+                </a:effectLst>
+              </a:rPr>
+              <a:t>ping192.168.1.22</a:t>
+            </a:r>
+            <a:r>
+              <a:rPr lang="zh-CN" altLang="en-US" sz="1600" b="1" dirty="0">
+                <a:solidFill>
+                  <a:schemeClr val="accent1">
+                    <a:lumMod val="40000"/>
+                    <a:lumOff val="60000"/>
+                  </a:schemeClr>
+                </a:solidFill>
+                <a:effectLst>
+                  <a:outerShdw blurRad="38100" dist="19050" dir="2700000" algn="tl" rotWithShape="0">
+                    <a:schemeClr val="dk1">
+                      <a:alpha val="40000"/>
+                    </a:schemeClr>
+                  </a:outerShdw>
+                </a:effectLst>
+              </a:rPr>
+              <a:t>，结果如图所示：</a:t>
             </a:r>
           </a:p>
         </p:txBody>
       </p:sp>
       <p:pic>
         <p:nvPicPr>
-          <p:cNvPr id="8" name="内容占位符 7">
-            <a:extLst>
-              <a:ext uri="{FF2B5EF4-FFF2-40B4-BE49-F238E27FC236}">
-                <a16:creationId xmlns:a16="http://schemas.microsoft.com/office/drawing/2014/main" id="{6F4F16DF-5E54-46CA-92EA-6573271C6073}"/>
-              </a:ext>
-            </a:extLst>
-          </p:cNvPr>
-          <p:cNvPicPr>
-            <a:picLocks noGrp="1" noChangeAspect="1"/>
-          </p:cNvPicPr>
-          <p:nvPr>
-            <p:ph idx="1"/>
-          </p:nvPr>
+          <p:cNvPr id="8" name="图片 7">
+            <a:extLst>
+              <a:ext uri="{FF2B5EF4-FFF2-40B4-BE49-F238E27FC236}">
+                <a16:creationId xmlns:a16="http://schemas.microsoft.com/office/drawing/2014/main" id="{A176990C-3C27-4C8F-A399-6BE4110CF1AB}"/>
+              </a:ext>
+            </a:extLst>
+          </p:cNvPr>
+          <p:cNvPicPr/>
+          <p:nvPr/>
         </p:nvPicPr>
         <p:blipFill>
-          <a:blip r:embed="rId3">
-            <a:extLst>
-              <a:ext uri="{28A0092B-C50C-407E-A947-70E740481C1C}">
-                <a14:useLocalDpi xmlns:a14="http://schemas.microsoft.com/office/drawing/2010/main" val="0"/>
-              </a:ext>
-            </a:extLst>
-          </a:blip>
+          <a:blip r:embed="rId3"/>
           <a:stretch>
             <a:fillRect/>
           </a:stretch>
         </p:blipFill>
         <p:spPr>
           <a:xfrm>
-            <a:off x="3113603" y="1590733"/>
-            <a:ext cx="5847347" cy="4351338"/>
-          </a:xfrm>
+            <a:off x="2211010" y="1690688"/>
+            <a:ext cx="7769980" cy="4638040"/>
+          </a:xfrm>
+          <a:prstGeom prst="rect">
+            <a:avLst/>
+          </a:prstGeom>
         </p:spPr>
       </p:pic>
+      <p:sp>
+        <p:nvSpPr>
+          <p:cNvPr id="7" name="文本框 6">
+            <a:extLst>
+              <a:ext uri="{FF2B5EF4-FFF2-40B4-BE49-F238E27FC236}">
+                <a16:creationId xmlns:a16="http://schemas.microsoft.com/office/drawing/2014/main" id="{3F1B2F8E-DF77-446F-ACFE-6566BF30BBF6}"/>
+              </a:ext>
+            </a:extLst>
+          </p:cNvPr>
+          <p:cNvSpPr txBox="1"/>
+          <p:nvPr/>
+        </p:nvSpPr>
+        <p:spPr>
+          <a:xfrm>
+            <a:off x="4409813" y="6673334"/>
+            <a:ext cx="3372374" cy="369332"/>
+          </a:xfrm>
+          <a:prstGeom prst="rect">
+            <a:avLst/>
+          </a:prstGeom>
+          <a:noFill/>
+        </p:spPr>
+        <p:txBody>
+          <a:bodyPr wrap="square" rtlCol="0">
+            <a:spAutoFit/>
+          </a:bodyPr>
+          <a:lstStyle/>
+          <a:p>
+            <a:pPr algn="ctr"/>
+            <a:r>
+              <a:rPr lang="zh-CN" altLang="en-US" dirty="0">
+                <a:solidFill>
+                  <a:schemeClr val="accent1">
+                    <a:lumMod val="40000"/>
+                    <a:lumOff val="60000"/>
+                  </a:schemeClr>
+                </a:solidFill>
+              </a:rPr>
+              <a:t>网线</a:t>
+            </a:r>
+            <a:r>
+              <a:rPr lang="en-US" altLang="zh-CN" dirty="0">
+                <a:solidFill>
+                  <a:schemeClr val="accent1">
+                    <a:lumMod val="40000"/>
+                    <a:lumOff val="60000"/>
+                  </a:schemeClr>
+                </a:solidFill>
+              </a:rPr>
+              <a:t>ping</a:t>
+            </a:r>
+            <a:r>
+              <a:rPr lang="zh-CN" altLang="en-US" dirty="0">
+                <a:solidFill>
+                  <a:schemeClr val="accent1">
+                    <a:lumMod val="40000"/>
+                    <a:lumOff val="60000"/>
+                  </a:schemeClr>
+                </a:solidFill>
+              </a:rPr>
+              <a:t>值</a:t>
+            </a:r>
+          </a:p>
+        </p:txBody>
+      </p:sp>
     </p:spTree>
   </p:cSld>
   <p:clrMapOvr>
@@ -3318,7 +3482,7 @@
           <p:cNvPr id="3" name="图片 2">
             <a:extLst>
               <a:ext uri="{FF2B5EF4-FFF2-40B4-BE49-F238E27FC236}">
-                <a16:creationId xmlns:a16="http://schemas.microsoft.com/office/drawing/2014/main" id="{31BF2E65-B3D3-4161-A002-27E31AD02B55}"/>
+                <a16:creationId xmlns:a16="http://schemas.microsoft.com/office/drawing/2014/main" id="{FAB06EA9-E6F6-448A-AA64-D1E7261AA1E6}"/>
               </a:ext>
             </a:extLst>
           </p:cNvPr>
@@ -3374,7 +3538,7 @@
                   </a:outerShdw>
                 </a:effectLst>
               </a:rPr>
-              <a:t>第七步：重复用一台电脑去访问另一台电脑已经共享的文件，然后将它传到自己这里</a:t>
+              <a:t>当将有线的地址和无线的地址设为相同时，由于一个地址只能通过一条道传输的关系，所以会导致只有一个适配器能使用此地址</a:t>
             </a:r>
           </a:p>
         </p:txBody>
@@ -3397,30 +3561,8 @@
         </p:blipFill>
         <p:spPr>
           <a:xfrm>
-            <a:off x="908375" y="2148884"/>
-            <a:ext cx="4160881" cy="2781541"/>
-          </a:xfrm>
-          <a:prstGeom prst="rect">
-            <a:avLst/>
-          </a:prstGeom>
-        </p:spPr>
-      </p:pic>
-      <p:pic>
-        <p:nvPicPr>
-          <p:cNvPr id="9" name="图片 8"/>
-          <p:cNvPicPr/>
-          <p:nvPr/>
-        </p:nvPicPr>
-        <p:blipFill>
-          <a:blip r:embed="rId4"/>
-          <a:stretch>
-            <a:fillRect/>
-          </a:stretch>
-        </p:blipFill>
-        <p:spPr>
-          <a:xfrm>
-            <a:off x="6247882" y="2057400"/>
-            <a:ext cx="4099560" cy="2743200"/>
+            <a:off x="1108216" y="1690688"/>
+            <a:ext cx="9807790" cy="4206605"/>
           </a:xfrm>
           <a:prstGeom prst="rect">
             <a:avLst/>
@@ -3454,10 +3596,10 @@
       </p:grpSpPr>
       <p:pic>
         <p:nvPicPr>
-          <p:cNvPr id="3" name="图片 2">
-            <a:extLst>
-              <a:ext uri="{FF2B5EF4-FFF2-40B4-BE49-F238E27FC236}">
-                <a16:creationId xmlns:a16="http://schemas.microsoft.com/office/drawing/2014/main" id="{FAB06EA9-E6F6-448A-AA64-D1E7261AA1E6}"/>
+          <p:cNvPr id="17" name="图片 16">
+            <a:extLst>
+              <a:ext uri="{FF2B5EF4-FFF2-40B4-BE49-F238E27FC236}">
+                <a16:creationId xmlns:a16="http://schemas.microsoft.com/office/drawing/2014/main" id="{34599DD7-7163-4C3F-9FE8-A79B54DC9C52}"/>
               </a:ext>
             </a:extLst>
           </p:cNvPr>
@@ -3480,9 +3622,123 @@
           </a:prstGeom>
         </p:spPr>
       </p:pic>
-      <p:sp>
-        <p:nvSpPr>
-          <p:cNvPr id="2" name="标题 1"/>
+      <p:pic>
+        <p:nvPicPr>
+          <p:cNvPr id="9" name="图片 8">
+            <a:extLst>
+              <a:ext uri="{FF2B5EF4-FFF2-40B4-BE49-F238E27FC236}">
+                <a16:creationId xmlns:a16="http://schemas.microsoft.com/office/drawing/2014/main" id="{B54A5F9E-5F85-4309-9B9F-083D0E1FD93E}"/>
+              </a:ext>
+            </a:extLst>
+          </p:cNvPr>
+          <p:cNvPicPr>
+            <a:picLocks noChangeAspect="1"/>
+          </p:cNvPicPr>
+          <p:nvPr/>
+        </p:nvPicPr>
+        <p:blipFill>
+          <a:blip r:embed="rId3">
+            <a:extLst>
+              <a:ext uri="{28A0092B-C50C-407E-A947-70E740481C1C}">
+                <a14:useLocalDpi xmlns:a14="http://schemas.microsoft.com/office/drawing/2010/main" val="0"/>
+              </a:ext>
+            </a:extLst>
+          </a:blip>
+          <a:stretch>
+            <a:fillRect/>
+          </a:stretch>
+        </p:blipFill>
+        <p:spPr>
+          <a:xfrm>
+            <a:off x="2312368" y="1351178"/>
+            <a:ext cx="7163800" cy="2038635"/>
+          </a:xfrm>
+          <a:prstGeom prst="rect">
+            <a:avLst/>
+          </a:prstGeom>
+        </p:spPr>
+      </p:pic>
+      <p:pic>
+        <p:nvPicPr>
+          <p:cNvPr id="11" name="图片 10">
+            <a:extLst>
+              <a:ext uri="{FF2B5EF4-FFF2-40B4-BE49-F238E27FC236}">
+                <a16:creationId xmlns:a16="http://schemas.microsoft.com/office/drawing/2014/main" id="{70DE5FB2-61DD-4C9A-9120-ED3C10486734}"/>
+              </a:ext>
+            </a:extLst>
+          </p:cNvPr>
+          <p:cNvPicPr>
+            <a:picLocks noChangeAspect="1"/>
+          </p:cNvPicPr>
+          <p:nvPr/>
+        </p:nvPicPr>
+        <p:blipFill>
+          <a:blip r:embed="rId4">
+            <a:extLst>
+              <a:ext uri="{28A0092B-C50C-407E-A947-70E740481C1C}">
+                <a14:useLocalDpi xmlns:a14="http://schemas.microsoft.com/office/drawing/2010/main" val="0"/>
+              </a:ext>
+            </a:extLst>
+          </a:blip>
+          <a:stretch>
+            <a:fillRect/>
+          </a:stretch>
+        </p:blipFill>
+        <p:spPr>
+          <a:xfrm>
+            <a:off x="1183454" y="3682253"/>
+            <a:ext cx="3801005" cy="2200582"/>
+          </a:xfrm>
+          <a:prstGeom prst="rect">
+            <a:avLst/>
+          </a:prstGeom>
+        </p:spPr>
+      </p:pic>
+      <p:pic>
+        <p:nvPicPr>
+          <p:cNvPr id="13" name="图片 12">
+            <a:extLst>
+              <a:ext uri="{FF2B5EF4-FFF2-40B4-BE49-F238E27FC236}">
+                <a16:creationId xmlns:a16="http://schemas.microsoft.com/office/drawing/2014/main" id="{C821E735-FBF9-4D0B-8602-F33F418E7710}"/>
+              </a:ext>
+            </a:extLst>
+          </p:cNvPr>
+          <p:cNvPicPr>
+            <a:picLocks noChangeAspect="1"/>
+          </p:cNvPicPr>
+          <p:nvPr/>
+        </p:nvPicPr>
+        <p:blipFill>
+          <a:blip r:embed="rId5">
+            <a:extLst>
+              <a:ext uri="{28A0092B-C50C-407E-A947-70E740481C1C}">
+                <a14:useLocalDpi xmlns:a14="http://schemas.microsoft.com/office/drawing/2010/main" val="0"/>
+              </a:ext>
+            </a:extLst>
+          </a:blip>
+          <a:stretch>
+            <a:fillRect/>
+          </a:stretch>
+        </p:blipFill>
+        <p:spPr>
+          <a:xfrm>
+            <a:off x="5799689" y="3844200"/>
+            <a:ext cx="5627415" cy="2038635"/>
+          </a:xfrm>
+          <a:prstGeom prst="rect">
+            <a:avLst/>
+          </a:prstGeom>
+        </p:spPr>
+      </p:pic>
+      <p:sp>
+        <p:nvSpPr>
+          <p:cNvPr id="15" name="标题 1">
+            <a:extLst>
+              <a:ext uri="{FF2B5EF4-FFF2-40B4-BE49-F238E27FC236}">
+                <a16:creationId xmlns:a16="http://schemas.microsoft.com/office/drawing/2014/main" id="{E5FC40F6-879D-4FE1-A7BF-81EAA186F448}"/>
+              </a:ext>
+            </a:extLst>
+          </p:cNvPr>
           <p:cNvSpPr>
             <a:spLocks noGrp="1"/>
           </p:cNvSpPr>
@@ -3490,19 +3746,25 @@
             <p:ph type="title"/>
           </p:nvPr>
         </p:nvSpPr>
-        <p:spPr/>
+        <p:spPr>
+          <a:xfrm>
+            <a:off x="1806180" y="480213"/>
+            <a:ext cx="7987018" cy="740471"/>
+          </a:xfrm>
+        </p:spPr>
         <p:txBody>
           <a:bodyPr>
             <a:normAutofit/>
           </a:bodyPr>
           <a:lstStyle/>
           <a:p>
-            <a:r>
-              <a:rPr lang="zh-CN" altLang="en-US" sz="1600" b="1" dirty="0">
-                <a:solidFill>
-                  <a:schemeClr val="accent1">
-                    <a:lumMod val="40000"/>
-                    <a:lumOff val="60000"/>
+            <a:pPr algn="ctr"/>
+            <a:r>
+              <a:rPr lang="zh-CN" altLang="en-US" sz="3600" b="1" dirty="0">
+                <a:solidFill>
+                  <a:schemeClr val="tx2">
+                    <a:lumMod val="60000"/>
+                    <a:lumOff val="40000"/>
                   </a:schemeClr>
                 </a:solidFill>
                 <a:effectLst>
@@ -3513,38 +3775,17 @@
                   </a:outerShdw>
                 </a:effectLst>
               </a:rPr>
-              <a:t>当将有线的地址和无线的地址设为相同时，由于一个地址只能通过一条道传输的关系，所以会导致只有一个适配器能使用此地址</a:t>
-            </a:r>
-          </a:p>
-        </p:txBody>
-      </p:sp>
-      <p:pic>
-        <p:nvPicPr>
-          <p:cNvPr id="6" name="内容占位符 5"/>
-          <p:cNvPicPr>
-            <a:picLocks noGrp="1"/>
-          </p:cNvPicPr>
-          <p:nvPr>
-            <p:ph idx="1"/>
-          </p:nvPr>
-        </p:nvPicPr>
-        <p:blipFill>
-          <a:blip r:embed="rId3"/>
-          <a:stretch>
-            <a:fillRect/>
-          </a:stretch>
-        </p:blipFill>
-        <p:spPr>
-          <a:xfrm>
-            <a:off x="1108216" y="1690688"/>
-            <a:ext cx="9807790" cy="4206605"/>
-          </a:xfrm>
-          <a:prstGeom prst="rect">
-            <a:avLst/>
-          </a:prstGeom>
-        </p:spPr>
-      </p:pic>
+              <a:t>回到开始，看一看原理</a:t>
+            </a:r>
+          </a:p>
+        </p:txBody>
+      </p:sp>
     </p:spTree>
+    <p:extLst>
+      <p:ext uri="{BB962C8B-B14F-4D97-AF65-F5344CB8AC3E}">
+        <p14:creationId xmlns:p14="http://schemas.microsoft.com/office/powerpoint/2010/main" val="1010155131"/>
+      </p:ext>
+    </p:extLst>
   </p:cSld>
   <p:clrMapOvr>
     <a:masterClrMapping/>
@@ -3571,10 +3812,10 @@
       </p:grpSpPr>
       <p:pic>
         <p:nvPicPr>
-          <p:cNvPr id="17" name="图片 16">
-            <a:extLst>
-              <a:ext uri="{FF2B5EF4-FFF2-40B4-BE49-F238E27FC236}">
-                <a16:creationId xmlns:a16="http://schemas.microsoft.com/office/drawing/2014/main" id="{34599DD7-7163-4C3F-9FE8-A79B54DC9C52}"/>
+          <p:cNvPr id="50" name="图片 49">
+            <a:extLst>
+              <a:ext uri="{FF2B5EF4-FFF2-40B4-BE49-F238E27FC236}">
+                <a16:creationId xmlns:a16="http://schemas.microsoft.com/office/drawing/2014/main" id="{2DD63D62-E4A6-4CE4-BD5D-7B1F54716730}"/>
               </a:ext>
             </a:extLst>
           </p:cNvPr>
@@ -3597,12 +3838,1160 @@
           </a:prstGeom>
         </p:spPr>
       </p:pic>
+      <p:sp>
+        <p:nvSpPr>
+          <p:cNvPr id="6" name="矩形 5">
+            <a:extLst>
+              <a:ext uri="{FF2B5EF4-FFF2-40B4-BE49-F238E27FC236}">
+                <a16:creationId xmlns:a16="http://schemas.microsoft.com/office/drawing/2014/main" id="{20D6983C-FA3E-42DB-9E83-79552C0F3811}"/>
+              </a:ext>
+            </a:extLst>
+          </p:cNvPr>
+          <p:cNvSpPr/>
+          <p:nvPr/>
+        </p:nvSpPr>
+        <p:spPr>
+          <a:xfrm>
+            <a:off x="2204556" y="940080"/>
+            <a:ext cx="1442907" cy="3031601"/>
+          </a:xfrm>
+          <a:prstGeom prst="rect">
+            <a:avLst/>
+          </a:prstGeom>
+        </p:spPr>
+        <p:style>
+          <a:lnRef idx="2">
+            <a:schemeClr val="accent1">
+              <a:shade val="50000"/>
+            </a:schemeClr>
+          </a:lnRef>
+          <a:fillRef idx="1">
+            <a:schemeClr val="accent1"/>
+          </a:fillRef>
+          <a:effectRef idx="0">
+            <a:schemeClr val="accent1"/>
+          </a:effectRef>
+          <a:fontRef idx="minor">
+            <a:schemeClr val="lt1"/>
+          </a:fontRef>
+        </p:style>
+        <p:txBody>
+          <a:bodyPr rtlCol="0" anchor="ctr"/>
+          <a:lstStyle/>
+          <a:p>
+            <a:pPr algn="ctr"/>
+            <a:endParaRPr lang="zh-CN" altLang="en-US">
+              <a:solidFill>
+                <a:schemeClr val="accent1">
+                  <a:lumMod val="40000"/>
+                  <a:lumOff val="60000"/>
+                </a:schemeClr>
+              </a:solidFill>
+            </a:endParaRPr>
+          </a:p>
+        </p:txBody>
+      </p:sp>
+      <p:sp>
+        <p:nvSpPr>
+          <p:cNvPr id="8" name="矩形 7">
+            <a:extLst>
+              <a:ext uri="{FF2B5EF4-FFF2-40B4-BE49-F238E27FC236}">
+                <a16:creationId xmlns:a16="http://schemas.microsoft.com/office/drawing/2014/main" id="{66FD494A-8A44-415C-A68A-ADA3007634E1}"/>
+              </a:ext>
+            </a:extLst>
+          </p:cNvPr>
+          <p:cNvSpPr/>
+          <p:nvPr/>
+        </p:nvSpPr>
+        <p:spPr>
+          <a:xfrm>
+            <a:off x="8227854" y="940080"/>
+            <a:ext cx="1442907" cy="3031601"/>
+          </a:xfrm>
+          <a:prstGeom prst="rect">
+            <a:avLst/>
+          </a:prstGeom>
+        </p:spPr>
+        <p:style>
+          <a:lnRef idx="2">
+            <a:schemeClr val="accent1">
+              <a:shade val="50000"/>
+            </a:schemeClr>
+          </a:lnRef>
+          <a:fillRef idx="1">
+            <a:schemeClr val="accent1"/>
+          </a:fillRef>
+          <a:effectRef idx="0">
+            <a:schemeClr val="accent1"/>
+          </a:effectRef>
+          <a:fontRef idx="minor">
+            <a:schemeClr val="lt1"/>
+          </a:fontRef>
+        </p:style>
+        <p:txBody>
+          <a:bodyPr rtlCol="0" anchor="ctr"/>
+          <a:lstStyle/>
+          <a:p>
+            <a:pPr algn="ctr"/>
+            <a:endParaRPr lang="zh-CN" altLang="en-US">
+              <a:solidFill>
+                <a:schemeClr val="accent1">
+                  <a:lumMod val="40000"/>
+                  <a:lumOff val="60000"/>
+                </a:schemeClr>
+              </a:solidFill>
+            </a:endParaRPr>
+          </a:p>
+        </p:txBody>
+      </p:sp>
+      <p:cxnSp>
+        <p:nvCxnSpPr>
+          <p:cNvPr id="10" name="直接连接符 9">
+            <a:extLst>
+              <a:ext uri="{FF2B5EF4-FFF2-40B4-BE49-F238E27FC236}">
+                <a16:creationId xmlns:a16="http://schemas.microsoft.com/office/drawing/2014/main" id="{7FBCFEFA-FD7C-40BB-B2C4-FF6BFEB59DA0}"/>
+              </a:ext>
+            </a:extLst>
+          </p:cNvPr>
+          <p:cNvCxnSpPr/>
+          <p:nvPr/>
+        </p:nvCxnSpPr>
+        <p:spPr>
+          <a:xfrm>
+            <a:off x="3166494" y="1480150"/>
+            <a:ext cx="5301843" cy="0"/>
+          </a:xfrm>
+          <a:prstGeom prst="line">
+            <a:avLst/>
+          </a:prstGeom>
+        </p:spPr>
+        <p:style>
+          <a:lnRef idx="3">
+            <a:schemeClr val="dk1"/>
+          </a:lnRef>
+          <a:fillRef idx="0">
+            <a:schemeClr val="dk1"/>
+          </a:fillRef>
+          <a:effectRef idx="2">
+            <a:schemeClr val="dk1"/>
+          </a:effectRef>
+          <a:fontRef idx="minor">
+            <a:schemeClr val="tx1"/>
+          </a:fontRef>
+        </p:style>
+      </p:cxnSp>
+      <p:cxnSp>
+        <p:nvCxnSpPr>
+          <p:cNvPr id="14" name="直接连接符 13">
+            <a:extLst>
+              <a:ext uri="{FF2B5EF4-FFF2-40B4-BE49-F238E27FC236}">
+                <a16:creationId xmlns:a16="http://schemas.microsoft.com/office/drawing/2014/main" id="{4D0281A1-9997-498C-979C-5CD443B8EEB8}"/>
+              </a:ext>
+            </a:extLst>
+          </p:cNvPr>
+          <p:cNvCxnSpPr>
+            <a:cxnSpLocks/>
+          </p:cNvCxnSpPr>
+          <p:nvPr/>
+        </p:nvCxnSpPr>
+        <p:spPr>
+          <a:xfrm>
+            <a:off x="3166493" y="3660102"/>
+            <a:ext cx="5301843" cy="0"/>
+          </a:xfrm>
+          <a:prstGeom prst="line">
+            <a:avLst/>
+          </a:prstGeom>
+          <a:ln w="9525" cap="flat" cmpd="sng" algn="ctr">
+            <a:solidFill>
+              <a:schemeClr val="dk1"/>
+            </a:solidFill>
+            <a:prstDash val="dash"/>
+            <a:round/>
+            <a:headEnd type="none" w="med" len="med"/>
+            <a:tailEnd type="none" w="med" len="med"/>
+          </a:ln>
+        </p:spPr>
+        <p:style>
+          <a:lnRef idx="0">
+            <a:scrgbClr r="0" g="0" b="0"/>
+          </a:lnRef>
+          <a:fillRef idx="0">
+            <a:scrgbClr r="0" g="0" b="0"/>
+          </a:fillRef>
+          <a:effectRef idx="0">
+            <a:scrgbClr r="0" g="0" b="0"/>
+          </a:effectRef>
+          <a:fontRef idx="minor">
+            <a:schemeClr val="tx1"/>
+          </a:fontRef>
+        </p:style>
+      </p:cxnSp>
+      <p:sp>
+        <p:nvSpPr>
+          <p:cNvPr id="19" name="文本框 18">
+            <a:extLst>
+              <a:ext uri="{FF2B5EF4-FFF2-40B4-BE49-F238E27FC236}">
+                <a16:creationId xmlns:a16="http://schemas.microsoft.com/office/drawing/2014/main" id="{CB635EFC-938A-486D-9E5B-D19D6B2AB125}"/>
+              </a:ext>
+            </a:extLst>
+          </p:cNvPr>
+          <p:cNvSpPr txBox="1"/>
+          <p:nvPr/>
+        </p:nvSpPr>
+        <p:spPr>
+          <a:xfrm>
+            <a:off x="3647463" y="1043350"/>
+            <a:ext cx="1435008" cy="369332"/>
+          </a:xfrm>
+          <a:prstGeom prst="rect">
+            <a:avLst/>
+          </a:prstGeom>
+          <a:noFill/>
+        </p:spPr>
+        <p:txBody>
+          <a:bodyPr wrap="none" rtlCol="0">
+            <a:spAutoFit/>
+          </a:bodyPr>
+          <a:lstStyle/>
+          <a:p>
+            <a:r>
+              <a:rPr lang="en-US" altLang="zh-CN" dirty="0">
+                <a:solidFill>
+                  <a:schemeClr val="accent1">
+                    <a:lumMod val="40000"/>
+                    <a:lumOff val="60000"/>
+                  </a:schemeClr>
+                </a:solidFill>
+              </a:rPr>
+              <a:t>192.168.1.11</a:t>
+            </a:r>
+            <a:endParaRPr lang="zh-CN" altLang="en-US" dirty="0">
+              <a:solidFill>
+                <a:schemeClr val="accent1">
+                  <a:lumMod val="40000"/>
+                  <a:lumOff val="60000"/>
+                </a:schemeClr>
+              </a:solidFill>
+            </a:endParaRPr>
+          </a:p>
+        </p:txBody>
+      </p:sp>
+      <p:sp>
+        <p:nvSpPr>
+          <p:cNvPr id="21" name="文本框 20">
+            <a:extLst>
+              <a:ext uri="{FF2B5EF4-FFF2-40B4-BE49-F238E27FC236}">
+                <a16:creationId xmlns:a16="http://schemas.microsoft.com/office/drawing/2014/main" id="{42D143DB-5FD7-40B7-BFAC-CCF2B6D80B21}"/>
+              </a:ext>
+            </a:extLst>
+          </p:cNvPr>
+          <p:cNvSpPr txBox="1"/>
+          <p:nvPr/>
+        </p:nvSpPr>
+        <p:spPr>
+          <a:xfrm>
+            <a:off x="3647463" y="3223302"/>
+            <a:ext cx="1435008" cy="369332"/>
+          </a:xfrm>
+          <a:prstGeom prst="rect">
+            <a:avLst/>
+          </a:prstGeom>
+          <a:noFill/>
+        </p:spPr>
+        <p:txBody>
+          <a:bodyPr wrap="none" rtlCol="0">
+            <a:spAutoFit/>
+          </a:bodyPr>
+          <a:lstStyle/>
+          <a:p>
+            <a:r>
+              <a:rPr lang="en-US" altLang="zh-CN" dirty="0">
+                <a:solidFill>
+                  <a:schemeClr val="accent1">
+                    <a:lumMod val="40000"/>
+                    <a:lumOff val="60000"/>
+                  </a:schemeClr>
+                </a:solidFill>
+              </a:rPr>
+              <a:t>192.168.1.11</a:t>
+            </a:r>
+            <a:endParaRPr lang="zh-CN" altLang="en-US" dirty="0">
+              <a:solidFill>
+                <a:schemeClr val="accent1">
+                  <a:lumMod val="40000"/>
+                  <a:lumOff val="60000"/>
+                </a:schemeClr>
+              </a:solidFill>
+            </a:endParaRPr>
+          </a:p>
+        </p:txBody>
+      </p:sp>
+      <p:sp>
+        <p:nvSpPr>
+          <p:cNvPr id="23" name="文本框 22">
+            <a:extLst>
+              <a:ext uri="{FF2B5EF4-FFF2-40B4-BE49-F238E27FC236}">
+                <a16:creationId xmlns:a16="http://schemas.microsoft.com/office/drawing/2014/main" id="{CA2A2B83-4D6B-4902-9FD1-DEA707C40560}"/>
+              </a:ext>
+            </a:extLst>
+          </p:cNvPr>
+          <p:cNvSpPr txBox="1"/>
+          <p:nvPr/>
+        </p:nvSpPr>
+        <p:spPr>
+          <a:xfrm>
+            <a:off x="6790662" y="1025449"/>
+            <a:ext cx="1435008" cy="369332"/>
+          </a:xfrm>
+          <a:prstGeom prst="rect">
+            <a:avLst/>
+          </a:prstGeom>
+          <a:noFill/>
+        </p:spPr>
+        <p:txBody>
+          <a:bodyPr wrap="none" rtlCol="0">
+            <a:spAutoFit/>
+          </a:bodyPr>
+          <a:lstStyle/>
+          <a:p>
+            <a:r>
+              <a:rPr lang="en-US" altLang="zh-CN" dirty="0">
+                <a:solidFill>
+                  <a:schemeClr val="accent1">
+                    <a:lumMod val="40000"/>
+                    <a:lumOff val="60000"/>
+                  </a:schemeClr>
+                </a:solidFill>
+              </a:rPr>
+              <a:t>192.168.1.12</a:t>
+            </a:r>
+            <a:endParaRPr lang="zh-CN" altLang="en-US" dirty="0">
+              <a:solidFill>
+                <a:schemeClr val="accent1">
+                  <a:lumMod val="40000"/>
+                  <a:lumOff val="60000"/>
+                </a:schemeClr>
+              </a:solidFill>
+            </a:endParaRPr>
+          </a:p>
+        </p:txBody>
+      </p:sp>
+      <p:sp>
+        <p:nvSpPr>
+          <p:cNvPr id="25" name="文本框 24">
+            <a:extLst>
+              <a:ext uri="{FF2B5EF4-FFF2-40B4-BE49-F238E27FC236}">
+                <a16:creationId xmlns:a16="http://schemas.microsoft.com/office/drawing/2014/main" id="{BF85E132-EF0A-4BA9-9610-C14B9BBD77BE}"/>
+              </a:ext>
+            </a:extLst>
+          </p:cNvPr>
+          <p:cNvSpPr txBox="1"/>
+          <p:nvPr/>
+        </p:nvSpPr>
+        <p:spPr>
+          <a:xfrm>
+            <a:off x="6798561" y="3229549"/>
+            <a:ext cx="1435008" cy="369332"/>
+          </a:xfrm>
+          <a:prstGeom prst="rect">
+            <a:avLst/>
+          </a:prstGeom>
+          <a:noFill/>
+        </p:spPr>
+        <p:txBody>
+          <a:bodyPr wrap="none" rtlCol="0">
+            <a:spAutoFit/>
+          </a:bodyPr>
+          <a:lstStyle/>
+          <a:p>
+            <a:r>
+              <a:rPr lang="en-US" altLang="zh-CN" dirty="0">
+                <a:solidFill>
+                  <a:schemeClr val="accent1">
+                    <a:lumMod val="40000"/>
+                    <a:lumOff val="60000"/>
+                  </a:schemeClr>
+                </a:solidFill>
+              </a:rPr>
+              <a:t>192.168.1.12</a:t>
+            </a:r>
+            <a:endParaRPr lang="zh-CN" altLang="en-US" dirty="0">
+              <a:solidFill>
+                <a:schemeClr val="accent1">
+                  <a:lumMod val="40000"/>
+                  <a:lumOff val="60000"/>
+                </a:schemeClr>
+              </a:solidFill>
+            </a:endParaRPr>
+          </a:p>
+        </p:txBody>
+      </p:sp>
+      <p:sp>
+        <p:nvSpPr>
+          <p:cNvPr id="26" name="文本框 25">
+            <a:extLst>
+              <a:ext uri="{FF2B5EF4-FFF2-40B4-BE49-F238E27FC236}">
+                <a16:creationId xmlns:a16="http://schemas.microsoft.com/office/drawing/2014/main" id="{5D65D36F-9FDE-4A8B-98C7-7635AC7BD167}"/>
+              </a:ext>
+            </a:extLst>
+          </p:cNvPr>
+          <p:cNvSpPr txBox="1"/>
+          <p:nvPr/>
+        </p:nvSpPr>
+        <p:spPr>
+          <a:xfrm>
+            <a:off x="2528931" y="1975101"/>
+            <a:ext cx="436228" cy="369332"/>
+          </a:xfrm>
+          <a:prstGeom prst="rect">
+            <a:avLst/>
+          </a:prstGeom>
+          <a:noFill/>
+        </p:spPr>
+        <p:txBody>
+          <a:bodyPr wrap="square" rtlCol="0">
+            <a:spAutoFit/>
+          </a:bodyPr>
+          <a:lstStyle/>
+          <a:p>
+            <a:endParaRPr lang="zh-CN" altLang="en-US" dirty="0">
+              <a:solidFill>
+                <a:schemeClr val="accent1">
+                  <a:lumMod val="40000"/>
+                  <a:lumOff val="60000"/>
+                </a:schemeClr>
+              </a:solidFill>
+            </a:endParaRPr>
+          </a:p>
+        </p:txBody>
+      </p:sp>
+      <p:sp>
+        <p:nvSpPr>
+          <p:cNvPr id="30" name="文本框 29">
+            <a:extLst>
+              <a:ext uri="{FF2B5EF4-FFF2-40B4-BE49-F238E27FC236}">
+                <a16:creationId xmlns:a16="http://schemas.microsoft.com/office/drawing/2014/main" id="{01C5441B-1346-40DC-A5B7-F8622BE264F0}"/>
+              </a:ext>
+            </a:extLst>
+          </p:cNvPr>
+          <p:cNvSpPr txBox="1"/>
+          <p:nvPr/>
+        </p:nvSpPr>
+        <p:spPr>
+          <a:xfrm>
+            <a:off x="1396417" y="1907989"/>
+            <a:ext cx="897746" cy="369332"/>
+          </a:xfrm>
+          <a:prstGeom prst="rect">
+            <a:avLst/>
+          </a:prstGeom>
+          <a:noFill/>
+        </p:spPr>
+        <p:txBody>
+          <a:bodyPr wrap="square" rtlCol="0">
+            <a:spAutoFit/>
+          </a:bodyPr>
+          <a:lstStyle/>
+          <a:p>
+            <a:r>
+              <a:rPr lang="zh-CN" altLang="en-US" dirty="0">
+                <a:solidFill>
+                  <a:schemeClr val="accent1">
+                    <a:lumMod val="40000"/>
+                    <a:lumOff val="60000"/>
+                  </a:schemeClr>
+                </a:solidFill>
+              </a:rPr>
+              <a:t>电脑</a:t>
+            </a:r>
+            <a:r>
+              <a:rPr lang="en-US" altLang="zh-CN" dirty="0">
+                <a:solidFill>
+                  <a:schemeClr val="accent1">
+                    <a:lumMod val="40000"/>
+                    <a:lumOff val="60000"/>
+                  </a:schemeClr>
+                </a:solidFill>
+              </a:rPr>
+              <a:t>1</a:t>
+            </a:r>
+            <a:endParaRPr lang="zh-CN" altLang="en-US" dirty="0">
+              <a:solidFill>
+                <a:schemeClr val="accent1">
+                  <a:lumMod val="40000"/>
+                  <a:lumOff val="60000"/>
+                </a:schemeClr>
+              </a:solidFill>
+            </a:endParaRPr>
+          </a:p>
+        </p:txBody>
+      </p:sp>
+      <p:sp>
+        <p:nvSpPr>
+          <p:cNvPr id="32" name="文本框 31">
+            <a:extLst>
+              <a:ext uri="{FF2B5EF4-FFF2-40B4-BE49-F238E27FC236}">
+                <a16:creationId xmlns:a16="http://schemas.microsoft.com/office/drawing/2014/main" id="{27F1E09F-4E90-44A5-84EC-818E13F973E3}"/>
+              </a:ext>
+            </a:extLst>
+          </p:cNvPr>
+          <p:cNvSpPr txBox="1"/>
+          <p:nvPr/>
+        </p:nvSpPr>
+        <p:spPr>
+          <a:xfrm>
+            <a:off x="9911244" y="2047589"/>
+            <a:ext cx="897746" cy="369332"/>
+          </a:xfrm>
+          <a:prstGeom prst="rect">
+            <a:avLst/>
+          </a:prstGeom>
+          <a:noFill/>
+        </p:spPr>
+        <p:txBody>
+          <a:bodyPr wrap="square" rtlCol="0">
+            <a:spAutoFit/>
+          </a:bodyPr>
+          <a:lstStyle/>
+          <a:p>
+            <a:r>
+              <a:rPr lang="zh-CN" altLang="en-US" dirty="0">
+                <a:solidFill>
+                  <a:schemeClr val="accent1">
+                    <a:lumMod val="40000"/>
+                    <a:lumOff val="60000"/>
+                  </a:schemeClr>
+                </a:solidFill>
+              </a:rPr>
+              <a:t>电脑</a:t>
+            </a:r>
+            <a:r>
+              <a:rPr lang="en-US" altLang="zh-CN" dirty="0">
+                <a:solidFill>
+                  <a:schemeClr val="accent1">
+                    <a:lumMod val="40000"/>
+                    <a:lumOff val="60000"/>
+                  </a:schemeClr>
+                </a:solidFill>
+              </a:rPr>
+              <a:t>2</a:t>
+            </a:r>
+            <a:endParaRPr lang="zh-CN" altLang="en-US" dirty="0">
+              <a:solidFill>
+                <a:schemeClr val="accent1">
+                  <a:lumMod val="40000"/>
+                  <a:lumOff val="60000"/>
+                </a:schemeClr>
+              </a:solidFill>
+            </a:endParaRPr>
+          </a:p>
+        </p:txBody>
+      </p:sp>
+      <p:sp>
+        <p:nvSpPr>
+          <p:cNvPr id="9" name="箭头: 下 8">
+            <a:extLst>
+              <a:ext uri="{FF2B5EF4-FFF2-40B4-BE49-F238E27FC236}">
+                <a16:creationId xmlns:a16="http://schemas.microsoft.com/office/drawing/2014/main" id="{F439500E-647D-4C43-A6C0-250CEE9B0DE5}"/>
+              </a:ext>
+            </a:extLst>
+          </p:cNvPr>
+          <p:cNvSpPr/>
+          <p:nvPr/>
+        </p:nvSpPr>
+        <p:spPr>
+          <a:xfrm>
+            <a:off x="4236217" y="3592634"/>
+            <a:ext cx="142612" cy="666922"/>
+          </a:xfrm>
+          <a:prstGeom prst="downArrow">
+            <a:avLst/>
+          </a:prstGeom>
+        </p:spPr>
+        <p:style>
+          <a:lnRef idx="2">
+            <a:schemeClr val="accent1">
+              <a:shade val="50000"/>
+            </a:schemeClr>
+          </a:lnRef>
+          <a:fillRef idx="1">
+            <a:schemeClr val="accent1"/>
+          </a:fillRef>
+          <a:effectRef idx="0">
+            <a:schemeClr val="accent1"/>
+          </a:effectRef>
+          <a:fontRef idx="minor">
+            <a:schemeClr val="lt1"/>
+          </a:fontRef>
+        </p:style>
+        <p:txBody>
+          <a:bodyPr rtlCol="0" anchor="ctr"/>
+          <a:lstStyle/>
+          <a:p>
+            <a:pPr algn="ctr"/>
+            <a:endParaRPr lang="zh-CN" altLang="en-US">
+              <a:solidFill>
+                <a:schemeClr val="accent1">
+                  <a:lumMod val="40000"/>
+                  <a:lumOff val="60000"/>
+                </a:schemeClr>
+              </a:solidFill>
+            </a:endParaRPr>
+          </a:p>
+        </p:txBody>
+      </p:sp>
+      <p:sp>
+        <p:nvSpPr>
+          <p:cNvPr id="11" name="箭头: 下 10">
+            <a:extLst>
+              <a:ext uri="{FF2B5EF4-FFF2-40B4-BE49-F238E27FC236}">
+                <a16:creationId xmlns:a16="http://schemas.microsoft.com/office/drawing/2014/main" id="{65DF9E4F-A58A-4ABC-97A6-03C0ABEB35A2}"/>
+              </a:ext>
+            </a:extLst>
+          </p:cNvPr>
+          <p:cNvSpPr/>
+          <p:nvPr/>
+        </p:nvSpPr>
+        <p:spPr>
+          <a:xfrm>
+            <a:off x="7502080" y="3592634"/>
+            <a:ext cx="142612" cy="666922"/>
+          </a:xfrm>
+          <a:prstGeom prst="downArrow">
+            <a:avLst/>
+          </a:prstGeom>
+        </p:spPr>
+        <p:style>
+          <a:lnRef idx="2">
+            <a:schemeClr val="accent1">
+              <a:shade val="50000"/>
+            </a:schemeClr>
+          </a:lnRef>
+          <a:fillRef idx="1">
+            <a:schemeClr val="accent1"/>
+          </a:fillRef>
+          <a:effectRef idx="0">
+            <a:schemeClr val="accent1"/>
+          </a:effectRef>
+          <a:fontRef idx="minor">
+            <a:schemeClr val="lt1"/>
+          </a:fontRef>
+        </p:style>
+        <p:txBody>
+          <a:bodyPr rtlCol="0" anchor="ctr"/>
+          <a:lstStyle/>
+          <a:p>
+            <a:pPr algn="ctr"/>
+            <a:endParaRPr lang="zh-CN" altLang="en-US">
+              <a:solidFill>
+                <a:schemeClr val="accent1">
+                  <a:lumMod val="40000"/>
+                  <a:lumOff val="60000"/>
+                </a:schemeClr>
+              </a:solidFill>
+            </a:endParaRPr>
+          </a:p>
+        </p:txBody>
+      </p:sp>
+      <p:sp>
+        <p:nvSpPr>
+          <p:cNvPr id="13" name="文本框 12">
+            <a:extLst>
+              <a:ext uri="{FF2B5EF4-FFF2-40B4-BE49-F238E27FC236}">
+                <a16:creationId xmlns:a16="http://schemas.microsoft.com/office/drawing/2014/main" id="{19146187-EE78-4EF1-BDF5-AA5548D4E9BE}"/>
+              </a:ext>
+            </a:extLst>
+          </p:cNvPr>
+          <p:cNvSpPr txBox="1"/>
+          <p:nvPr/>
+        </p:nvSpPr>
+        <p:spPr>
+          <a:xfrm>
+            <a:off x="3560777" y="4468684"/>
+            <a:ext cx="1593908" cy="369332"/>
+          </a:xfrm>
+          <a:prstGeom prst="rect">
+            <a:avLst/>
+          </a:prstGeom>
+          <a:noFill/>
+        </p:spPr>
+        <p:txBody>
+          <a:bodyPr wrap="square" rtlCol="0">
+            <a:spAutoFit/>
+          </a:bodyPr>
+          <a:lstStyle/>
+          <a:p>
+            <a:r>
+              <a:rPr lang="en-US" altLang="zh-CN" dirty="0">
+                <a:solidFill>
+                  <a:schemeClr val="accent1">
+                    <a:lumMod val="40000"/>
+                    <a:lumOff val="60000"/>
+                  </a:schemeClr>
+                </a:solidFill>
+              </a:rPr>
+              <a:t>192.168.1.21</a:t>
+            </a:r>
+            <a:endParaRPr lang="zh-CN" altLang="en-US" dirty="0">
+              <a:solidFill>
+                <a:schemeClr val="accent1">
+                  <a:lumMod val="40000"/>
+                  <a:lumOff val="60000"/>
+                </a:schemeClr>
+              </a:solidFill>
+            </a:endParaRPr>
+          </a:p>
+        </p:txBody>
+      </p:sp>
+      <p:sp>
+        <p:nvSpPr>
+          <p:cNvPr id="17" name="文本框 16">
+            <a:extLst>
+              <a:ext uri="{FF2B5EF4-FFF2-40B4-BE49-F238E27FC236}">
+                <a16:creationId xmlns:a16="http://schemas.microsoft.com/office/drawing/2014/main" id="{8DDCF94B-0AB5-41AB-9D58-C821ABA6BD68}"/>
+              </a:ext>
+            </a:extLst>
+          </p:cNvPr>
+          <p:cNvSpPr txBox="1"/>
+          <p:nvPr/>
+        </p:nvSpPr>
+        <p:spPr>
+          <a:xfrm>
+            <a:off x="6798561" y="4468684"/>
+            <a:ext cx="1593908" cy="369332"/>
+          </a:xfrm>
+          <a:prstGeom prst="rect">
+            <a:avLst/>
+          </a:prstGeom>
+          <a:noFill/>
+        </p:spPr>
+        <p:txBody>
+          <a:bodyPr wrap="square" rtlCol="0">
+            <a:spAutoFit/>
+          </a:bodyPr>
+          <a:lstStyle/>
+          <a:p>
+            <a:r>
+              <a:rPr lang="en-US" altLang="zh-CN" dirty="0">
+                <a:solidFill>
+                  <a:schemeClr val="accent1">
+                    <a:lumMod val="40000"/>
+                    <a:lumOff val="60000"/>
+                  </a:schemeClr>
+                </a:solidFill>
+              </a:rPr>
+              <a:t>192.168.1.22</a:t>
+            </a:r>
+            <a:endParaRPr lang="zh-CN" altLang="en-US" dirty="0">
+              <a:solidFill>
+                <a:schemeClr val="accent1">
+                  <a:lumMod val="40000"/>
+                  <a:lumOff val="60000"/>
+                </a:schemeClr>
+              </a:solidFill>
+            </a:endParaRPr>
+          </a:p>
+        </p:txBody>
+      </p:sp>
+      <p:sp>
+        <p:nvSpPr>
+          <p:cNvPr id="20" name="矩形 19">
+            <a:extLst>
+              <a:ext uri="{FF2B5EF4-FFF2-40B4-BE49-F238E27FC236}">
+                <a16:creationId xmlns:a16="http://schemas.microsoft.com/office/drawing/2014/main" id="{C6CD64A8-8845-4874-A05E-C2B8EAC2BF1B}"/>
+              </a:ext>
+            </a:extLst>
+          </p:cNvPr>
+          <p:cNvSpPr/>
+          <p:nvPr/>
+        </p:nvSpPr>
+        <p:spPr>
+          <a:xfrm>
+            <a:off x="2996102" y="1260387"/>
+            <a:ext cx="308208" cy="445371"/>
+          </a:xfrm>
+          <a:prstGeom prst="rect">
+            <a:avLst/>
+          </a:prstGeom>
+        </p:spPr>
+        <p:style>
+          <a:lnRef idx="3">
+            <a:schemeClr val="lt1"/>
+          </a:lnRef>
+          <a:fillRef idx="1">
+            <a:schemeClr val="accent3"/>
+          </a:fillRef>
+          <a:effectRef idx="1">
+            <a:schemeClr val="accent3"/>
+          </a:effectRef>
+          <a:fontRef idx="minor">
+            <a:schemeClr val="lt1"/>
+          </a:fontRef>
+        </p:style>
+        <p:txBody>
+          <a:bodyPr rtlCol="0" anchor="ctr"/>
+          <a:lstStyle/>
+          <a:p>
+            <a:pPr algn="ctr"/>
+            <a:endParaRPr lang="zh-CN" altLang="en-US">
+              <a:solidFill>
+                <a:schemeClr val="accent1">
+                  <a:lumMod val="40000"/>
+                  <a:lumOff val="60000"/>
+                </a:schemeClr>
+              </a:solidFill>
+            </a:endParaRPr>
+          </a:p>
+        </p:txBody>
+      </p:sp>
+      <p:sp>
+        <p:nvSpPr>
+          <p:cNvPr id="22" name="矩形 21">
+            <a:extLst>
+              <a:ext uri="{FF2B5EF4-FFF2-40B4-BE49-F238E27FC236}">
+                <a16:creationId xmlns:a16="http://schemas.microsoft.com/office/drawing/2014/main" id="{7BDAA7C7-2A2E-4D45-9253-2391000C81F6}"/>
+              </a:ext>
+            </a:extLst>
+          </p:cNvPr>
+          <p:cNvSpPr/>
+          <p:nvPr/>
+        </p:nvSpPr>
+        <p:spPr>
+          <a:xfrm>
+            <a:off x="2973304" y="3432311"/>
+            <a:ext cx="308208" cy="445371"/>
+          </a:xfrm>
+          <a:prstGeom prst="rect">
+            <a:avLst/>
+          </a:prstGeom>
+        </p:spPr>
+        <p:style>
+          <a:lnRef idx="3">
+            <a:schemeClr val="lt1"/>
+          </a:lnRef>
+          <a:fillRef idx="1">
+            <a:schemeClr val="accent3"/>
+          </a:fillRef>
+          <a:effectRef idx="1">
+            <a:schemeClr val="accent3"/>
+          </a:effectRef>
+          <a:fontRef idx="minor">
+            <a:schemeClr val="lt1"/>
+          </a:fontRef>
+        </p:style>
+        <p:txBody>
+          <a:bodyPr rtlCol="0" anchor="ctr"/>
+          <a:lstStyle/>
+          <a:p>
+            <a:pPr algn="ctr"/>
+            <a:endParaRPr lang="zh-CN" altLang="en-US">
+              <a:solidFill>
+                <a:schemeClr val="accent1">
+                  <a:lumMod val="40000"/>
+                  <a:lumOff val="60000"/>
+                </a:schemeClr>
+              </a:solidFill>
+            </a:endParaRPr>
+          </a:p>
+        </p:txBody>
+      </p:sp>
+      <p:sp>
+        <p:nvSpPr>
+          <p:cNvPr id="24" name="矩形 23">
+            <a:extLst>
+              <a:ext uri="{FF2B5EF4-FFF2-40B4-BE49-F238E27FC236}">
+                <a16:creationId xmlns:a16="http://schemas.microsoft.com/office/drawing/2014/main" id="{BF126198-072A-4EFE-A3A7-876FEF483119}"/>
+              </a:ext>
+            </a:extLst>
+          </p:cNvPr>
+          <p:cNvSpPr/>
+          <p:nvPr/>
+        </p:nvSpPr>
+        <p:spPr>
+          <a:xfrm>
+            <a:off x="8411431" y="1244115"/>
+            <a:ext cx="308208" cy="445371"/>
+          </a:xfrm>
+          <a:prstGeom prst="rect">
+            <a:avLst/>
+          </a:prstGeom>
+        </p:spPr>
+        <p:style>
+          <a:lnRef idx="3">
+            <a:schemeClr val="lt1"/>
+          </a:lnRef>
+          <a:fillRef idx="1">
+            <a:schemeClr val="accent3"/>
+          </a:fillRef>
+          <a:effectRef idx="1">
+            <a:schemeClr val="accent3"/>
+          </a:effectRef>
+          <a:fontRef idx="minor">
+            <a:schemeClr val="lt1"/>
+          </a:fontRef>
+        </p:style>
+        <p:txBody>
+          <a:bodyPr rtlCol="0" anchor="ctr"/>
+          <a:lstStyle/>
+          <a:p>
+            <a:pPr algn="ctr"/>
+            <a:endParaRPr lang="zh-CN" altLang="en-US">
+              <a:solidFill>
+                <a:schemeClr val="accent1">
+                  <a:lumMod val="40000"/>
+                  <a:lumOff val="60000"/>
+                </a:schemeClr>
+              </a:solidFill>
+            </a:endParaRPr>
+          </a:p>
+        </p:txBody>
+      </p:sp>
+      <p:sp>
+        <p:nvSpPr>
+          <p:cNvPr id="28" name="矩形 27">
+            <a:extLst>
+              <a:ext uri="{FF2B5EF4-FFF2-40B4-BE49-F238E27FC236}">
+                <a16:creationId xmlns:a16="http://schemas.microsoft.com/office/drawing/2014/main" id="{A1A9E17B-3FE9-4F4C-AD60-CDF67BD6926B}"/>
+              </a:ext>
+            </a:extLst>
+          </p:cNvPr>
+          <p:cNvSpPr/>
+          <p:nvPr/>
+        </p:nvSpPr>
+        <p:spPr>
+          <a:xfrm>
+            <a:off x="8423949" y="3374500"/>
+            <a:ext cx="308208" cy="445371"/>
+          </a:xfrm>
+          <a:prstGeom prst="rect">
+            <a:avLst/>
+          </a:prstGeom>
+        </p:spPr>
+        <p:style>
+          <a:lnRef idx="3">
+            <a:schemeClr val="lt1"/>
+          </a:lnRef>
+          <a:fillRef idx="1">
+            <a:schemeClr val="accent3"/>
+          </a:fillRef>
+          <a:effectRef idx="1">
+            <a:schemeClr val="accent3"/>
+          </a:effectRef>
+          <a:fontRef idx="minor">
+            <a:schemeClr val="lt1"/>
+          </a:fontRef>
+        </p:style>
+        <p:txBody>
+          <a:bodyPr rtlCol="0" anchor="ctr"/>
+          <a:lstStyle/>
+          <a:p>
+            <a:pPr algn="ctr"/>
+            <a:endParaRPr lang="zh-CN" altLang="en-US">
+              <a:solidFill>
+                <a:schemeClr val="accent1">
+                  <a:lumMod val="40000"/>
+                  <a:lumOff val="60000"/>
+                </a:schemeClr>
+              </a:solidFill>
+            </a:endParaRPr>
+          </a:p>
+        </p:txBody>
+      </p:sp>
+      <p:sp>
+        <p:nvSpPr>
+          <p:cNvPr id="43" name="箭头: 下 42">
+            <a:extLst>
+              <a:ext uri="{FF2B5EF4-FFF2-40B4-BE49-F238E27FC236}">
+                <a16:creationId xmlns:a16="http://schemas.microsoft.com/office/drawing/2014/main" id="{B3268E59-DAB6-4F42-9623-6CC5010B5DA4}"/>
+              </a:ext>
+            </a:extLst>
+          </p:cNvPr>
+          <p:cNvSpPr/>
+          <p:nvPr/>
+        </p:nvSpPr>
+        <p:spPr>
+          <a:xfrm rot="2051220">
+            <a:off x="3291800" y="581369"/>
+            <a:ext cx="247349" cy="793383"/>
+          </a:xfrm>
+          <a:prstGeom prst="downArrow">
+            <a:avLst/>
+          </a:prstGeom>
+        </p:spPr>
+        <p:style>
+          <a:lnRef idx="1">
+            <a:schemeClr val="accent2"/>
+          </a:lnRef>
+          <a:fillRef idx="2">
+            <a:schemeClr val="accent2"/>
+          </a:fillRef>
+          <a:effectRef idx="1">
+            <a:schemeClr val="accent2"/>
+          </a:effectRef>
+          <a:fontRef idx="minor">
+            <a:schemeClr val="dk1"/>
+          </a:fontRef>
+        </p:style>
+        <p:txBody>
+          <a:bodyPr rtlCol="0" anchor="ctr"/>
+          <a:lstStyle/>
+          <a:p>
+            <a:pPr algn="ctr"/>
+            <a:endParaRPr lang="zh-CN" altLang="en-US">
+              <a:solidFill>
+                <a:schemeClr val="accent1">
+                  <a:lumMod val="40000"/>
+                  <a:lumOff val="60000"/>
+                </a:schemeClr>
+              </a:solidFill>
+            </a:endParaRPr>
+          </a:p>
+        </p:txBody>
+      </p:sp>
+      <p:sp>
+        <p:nvSpPr>
+          <p:cNvPr id="45" name="箭头: 下 44">
+            <a:extLst>
+              <a:ext uri="{FF2B5EF4-FFF2-40B4-BE49-F238E27FC236}">
+                <a16:creationId xmlns:a16="http://schemas.microsoft.com/office/drawing/2014/main" id="{2548086D-D9FF-42BE-A3C2-704A28FE9500}"/>
+              </a:ext>
+            </a:extLst>
+          </p:cNvPr>
+          <p:cNvSpPr/>
+          <p:nvPr/>
+        </p:nvSpPr>
+        <p:spPr>
+          <a:xfrm rot="13452382">
+            <a:off x="2662898" y="3649000"/>
+            <a:ext cx="247349" cy="793383"/>
+          </a:xfrm>
+          <a:prstGeom prst="downArrow">
+            <a:avLst/>
+          </a:prstGeom>
+        </p:spPr>
+        <p:style>
+          <a:lnRef idx="1">
+            <a:schemeClr val="accent2"/>
+          </a:lnRef>
+          <a:fillRef idx="2">
+            <a:schemeClr val="accent2"/>
+          </a:fillRef>
+          <a:effectRef idx="1">
+            <a:schemeClr val="accent2"/>
+          </a:effectRef>
+          <a:fontRef idx="minor">
+            <a:schemeClr val="dk1"/>
+          </a:fontRef>
+        </p:style>
+        <p:txBody>
+          <a:bodyPr rtlCol="0" anchor="ctr"/>
+          <a:lstStyle/>
+          <a:p>
+            <a:pPr algn="ctr"/>
+            <a:endParaRPr lang="zh-CN" altLang="en-US">
+              <a:solidFill>
+                <a:schemeClr val="accent1">
+                  <a:lumMod val="40000"/>
+                  <a:lumOff val="60000"/>
+                </a:schemeClr>
+              </a:solidFill>
+            </a:endParaRPr>
+          </a:p>
+        </p:txBody>
+      </p:sp>
+      <p:sp>
+        <p:nvSpPr>
+          <p:cNvPr id="46" name="文本框 45">
+            <a:extLst>
+              <a:ext uri="{FF2B5EF4-FFF2-40B4-BE49-F238E27FC236}">
+                <a16:creationId xmlns:a16="http://schemas.microsoft.com/office/drawing/2014/main" id="{AB5A4B0F-6B63-4F4D-8E37-0A41B454E775}"/>
+              </a:ext>
+            </a:extLst>
+          </p:cNvPr>
+          <p:cNvSpPr txBox="1"/>
+          <p:nvPr/>
+        </p:nvSpPr>
+        <p:spPr>
+          <a:xfrm>
+            <a:off x="3222718" y="280801"/>
+            <a:ext cx="1358246" cy="369332"/>
+          </a:xfrm>
+          <a:prstGeom prst="rect">
+            <a:avLst/>
+          </a:prstGeom>
+          <a:noFill/>
+        </p:spPr>
+        <p:txBody>
+          <a:bodyPr wrap="square" rtlCol="0">
+            <a:spAutoFit/>
+          </a:bodyPr>
+          <a:lstStyle/>
+          <a:p>
+            <a:pPr algn="ctr"/>
+            <a:r>
+              <a:rPr lang="zh-CN" altLang="en-US" dirty="0">
+                <a:solidFill>
+                  <a:schemeClr val="accent1">
+                    <a:lumMod val="40000"/>
+                    <a:lumOff val="60000"/>
+                  </a:schemeClr>
+                </a:solidFill>
+              </a:rPr>
+              <a:t>大门</a:t>
+            </a:r>
+          </a:p>
+        </p:txBody>
+      </p:sp>
+      <p:sp>
+        <p:nvSpPr>
+          <p:cNvPr id="48" name="文本框 47">
+            <a:extLst>
+              <a:ext uri="{FF2B5EF4-FFF2-40B4-BE49-F238E27FC236}">
+                <a16:creationId xmlns:a16="http://schemas.microsoft.com/office/drawing/2014/main" id="{4A8CF20E-9871-423D-A4C2-CE7B68DA6BA6}"/>
+              </a:ext>
+            </a:extLst>
+          </p:cNvPr>
+          <p:cNvSpPr txBox="1"/>
+          <p:nvPr/>
+        </p:nvSpPr>
+        <p:spPr>
+          <a:xfrm>
+            <a:off x="1612510" y="4414108"/>
+            <a:ext cx="1358246" cy="369332"/>
+          </a:xfrm>
+          <a:prstGeom prst="rect">
+            <a:avLst/>
+          </a:prstGeom>
+          <a:noFill/>
+        </p:spPr>
+        <p:txBody>
+          <a:bodyPr wrap="square" rtlCol="0">
+            <a:spAutoFit/>
+          </a:bodyPr>
+          <a:lstStyle/>
+          <a:p>
+            <a:pPr algn="ctr"/>
+            <a:r>
+              <a:rPr lang="zh-CN" altLang="en-US" dirty="0">
+                <a:solidFill>
+                  <a:schemeClr val="accent1">
+                    <a:lumMod val="40000"/>
+                    <a:lumOff val="60000"/>
+                  </a:schemeClr>
+                </a:solidFill>
+              </a:rPr>
+              <a:t>大门</a:t>
+            </a:r>
+          </a:p>
+        </p:txBody>
+      </p:sp>
       <p:pic>
         <p:nvPicPr>
-          <p:cNvPr id="9" name="图片 8">
-            <a:extLst>
-              <a:ext uri="{FF2B5EF4-FFF2-40B4-BE49-F238E27FC236}">
-                <a16:creationId xmlns:a16="http://schemas.microsoft.com/office/drawing/2014/main" id="{B54A5F9E-5F85-4309-9B9F-083D0E1FD93E}"/>
+          <p:cNvPr id="54" name="图片 53">
+            <a:extLst>
+              <a:ext uri="{FF2B5EF4-FFF2-40B4-BE49-F238E27FC236}">
+                <a16:creationId xmlns:a16="http://schemas.microsoft.com/office/drawing/2014/main" id="{DC876C17-2126-46F2-9936-D63E63FD84BC}"/>
               </a:ext>
             </a:extLst>
           </p:cNvPr>
@@ -3612,7 +5001,14 @@
           <p:nvPr/>
         </p:nvPicPr>
         <p:blipFill>
-          <a:blip r:embed="rId3">
+          <a:blip r:embed="rId3" cstate="print">
+            <a:duotone>
+              <a:schemeClr val="bg2">
+                <a:shade val="45000"/>
+                <a:satMod val="135000"/>
+              </a:schemeClr>
+              <a:prstClr val="white"/>
+            </a:duotone>
             <a:extLst>
               <a:ext uri="{28A0092B-C50C-407E-A947-70E740481C1C}">
                 <a14:useLocalDpi xmlns:a14="http://schemas.microsoft.com/office/drawing/2010/main" val="0"/>
@@ -3625,132 +5021,183 @@
         </p:blipFill>
         <p:spPr>
           <a:xfrm>
-            <a:off x="2312368" y="1351178"/>
-            <a:ext cx="7163800" cy="2038635"/>
+            <a:off x="5263140" y="3841612"/>
+            <a:ext cx="996404" cy="996404"/>
           </a:xfrm>
           <a:prstGeom prst="rect">
             <a:avLst/>
           </a:prstGeom>
         </p:spPr>
       </p:pic>
-      <p:pic>
-        <p:nvPicPr>
-          <p:cNvPr id="11" name="图片 10">
-            <a:extLst>
-              <a:ext uri="{FF2B5EF4-FFF2-40B4-BE49-F238E27FC236}">
-                <a16:creationId xmlns:a16="http://schemas.microsoft.com/office/drawing/2014/main" id="{70DE5FB2-61DD-4C9A-9120-ED3C10486734}"/>
-              </a:ext>
-            </a:extLst>
-          </p:cNvPr>
-          <p:cNvPicPr>
-            <a:picLocks noChangeAspect="1"/>
-          </p:cNvPicPr>
-          <p:nvPr/>
-        </p:nvPicPr>
-        <p:blipFill>
-          <a:blip r:embed="rId4">
-            <a:extLst>
-              <a:ext uri="{28A0092B-C50C-407E-A947-70E740481C1C}">
-                <a14:useLocalDpi xmlns:a14="http://schemas.microsoft.com/office/drawing/2010/main" val="0"/>
-              </a:ext>
-            </a:extLst>
-          </a:blip>
-          <a:stretch>
-            <a:fillRect/>
-          </a:stretch>
-        </p:blipFill>
-        <p:spPr>
-          <a:xfrm>
-            <a:off x="1183454" y="3682253"/>
-            <a:ext cx="3801005" cy="2200582"/>
-          </a:xfrm>
-          <a:prstGeom prst="rect">
-            <a:avLst/>
-          </a:prstGeom>
-        </p:spPr>
-      </p:pic>
-      <p:pic>
-        <p:nvPicPr>
-          <p:cNvPr id="13" name="图片 12">
-            <a:extLst>
-              <a:ext uri="{FF2B5EF4-FFF2-40B4-BE49-F238E27FC236}">
-                <a16:creationId xmlns:a16="http://schemas.microsoft.com/office/drawing/2014/main" id="{C821E735-FBF9-4D0B-8602-F33F418E7710}"/>
-              </a:ext>
-            </a:extLst>
-          </p:cNvPr>
-          <p:cNvPicPr>
-            <a:picLocks noChangeAspect="1"/>
-          </p:cNvPicPr>
-          <p:nvPr/>
-        </p:nvPicPr>
-        <p:blipFill>
-          <a:blip r:embed="rId5">
-            <a:extLst>
-              <a:ext uri="{28A0092B-C50C-407E-A947-70E740481C1C}">
-                <a14:useLocalDpi xmlns:a14="http://schemas.microsoft.com/office/drawing/2010/main" val="0"/>
-              </a:ext>
-            </a:extLst>
-          </a:blip>
-          <a:stretch>
-            <a:fillRect/>
-          </a:stretch>
-        </p:blipFill>
-        <p:spPr>
-          <a:xfrm>
-            <a:off x="5799689" y="3844200"/>
-            <a:ext cx="5627415" cy="2038635"/>
-          </a:xfrm>
-          <a:prstGeom prst="rect">
-            <a:avLst/>
-          </a:prstGeom>
-        </p:spPr>
-      </p:pic>
-      <p:sp>
-        <p:nvSpPr>
-          <p:cNvPr id="15" name="标题 1">
-            <a:extLst>
-              <a:ext uri="{FF2B5EF4-FFF2-40B4-BE49-F238E27FC236}">
-                <a16:creationId xmlns:a16="http://schemas.microsoft.com/office/drawing/2014/main" id="{E5FC40F6-879D-4FE1-A7BF-81EAA186F448}"/>
-              </a:ext>
-            </a:extLst>
-          </p:cNvPr>
-          <p:cNvSpPr>
-            <a:spLocks noGrp="1"/>
-          </p:cNvSpPr>
-          <p:nvPr>
-            <p:ph type="title"/>
-          </p:nvPr>
-        </p:nvSpPr>
-        <p:spPr>
-          <a:xfrm>
-            <a:off x="1806180" y="480213"/>
-            <a:ext cx="7987018" cy="740471"/>
-          </a:xfrm>
-        </p:spPr>
-        <p:txBody>
-          <a:bodyPr>
-            <a:normAutofit/>
+      <p:sp>
+        <p:nvSpPr>
+          <p:cNvPr id="2" name="文本框 1">
+            <a:extLst>
+              <a:ext uri="{FF2B5EF4-FFF2-40B4-BE49-F238E27FC236}">
+                <a16:creationId xmlns:a16="http://schemas.microsoft.com/office/drawing/2014/main" id="{D58BD76F-E2B0-4223-B1FC-F6DA3549788D}"/>
+              </a:ext>
+            </a:extLst>
+          </p:cNvPr>
+          <p:cNvSpPr txBox="1"/>
+          <p:nvPr/>
+        </p:nvSpPr>
+        <p:spPr>
+          <a:xfrm>
+            <a:off x="1845290" y="5462137"/>
+            <a:ext cx="7374910" cy="646331"/>
+          </a:xfrm>
+          <a:prstGeom prst="rect">
+            <a:avLst/>
+          </a:prstGeom>
+          <a:noFill/>
+        </p:spPr>
+        <p:txBody>
+          <a:bodyPr wrap="square" rtlCol="0">
+            <a:spAutoFit/>
           </a:bodyPr>
           <a:lstStyle/>
           <a:p>
-            <a:pPr algn="ctr"/>
-            <a:r>
-              <a:rPr lang="zh-CN" altLang="en-US" sz="3600" b="1" dirty="0">
-                <a:solidFill>
-                  <a:schemeClr val="tx2">
+            <a:r>
+              <a:rPr lang="zh-CN" altLang="en-US" dirty="0">
+                <a:solidFill>
+                  <a:schemeClr val="accent1">
                     <a:lumMod val="60000"/>
                     <a:lumOff val="40000"/>
                   </a:schemeClr>
                 </a:solidFill>
-                <a:effectLst>
-                  <a:outerShdw blurRad="38100" dist="19050" dir="2700000" algn="tl" rotWithShape="0">
-                    <a:schemeClr val="dk1">
-                      <a:alpha val="40000"/>
-                    </a:schemeClr>
-                  </a:outerShdw>
-                </a:effectLst>
-              </a:rPr>
-              <a:t>回到开始，看一看原理</a:t>
+              </a:rPr>
+              <a:t>结论：由速度法，和</a:t>
+            </a:r>
+            <a:r>
+              <a:rPr lang="en-US" altLang="zh-CN" dirty="0">
+                <a:solidFill>
+                  <a:schemeClr val="accent1">
+                    <a:lumMod val="60000"/>
+                    <a:lumOff val="40000"/>
+                  </a:schemeClr>
+                </a:solidFill>
+              </a:rPr>
+              <a:t>ping</a:t>
+            </a:r>
+            <a:r>
+              <a:rPr lang="zh-CN" altLang="en-US" dirty="0">
+                <a:solidFill>
+                  <a:schemeClr val="accent1">
+                    <a:lumMod val="60000"/>
+                    <a:lumOff val="40000"/>
+                  </a:schemeClr>
+                </a:solidFill>
+              </a:rPr>
+              <a:t>值法可知，速度与</a:t>
+            </a:r>
+            <a:r>
+              <a:rPr lang="en-US" altLang="zh-CN" dirty="0">
+                <a:solidFill>
+                  <a:schemeClr val="accent1">
+                    <a:lumMod val="60000"/>
+                    <a:lumOff val="40000"/>
+                  </a:schemeClr>
+                </a:solidFill>
+              </a:rPr>
+              <a:t>ping</a:t>
+            </a:r>
+            <a:r>
+              <a:rPr lang="zh-CN" altLang="en-US" dirty="0">
+                <a:solidFill>
+                  <a:schemeClr val="accent1">
+                    <a:lumMod val="60000"/>
+                    <a:lumOff val="40000"/>
+                  </a:schemeClr>
+                </a:solidFill>
+              </a:rPr>
+              <a:t>值由访问的</a:t>
+            </a:r>
+            <a:r>
+              <a:rPr lang="en-US" altLang="zh-CN" dirty="0">
+                <a:solidFill>
+                  <a:schemeClr val="accent1">
+                    <a:lumMod val="60000"/>
+                    <a:lumOff val="40000"/>
+                  </a:schemeClr>
+                </a:solidFill>
+              </a:rPr>
+              <a:t>IP</a:t>
+            </a:r>
+            <a:r>
+              <a:rPr lang="zh-CN" altLang="en-US" dirty="0">
+                <a:solidFill>
+                  <a:schemeClr val="accent1">
+                    <a:lumMod val="60000"/>
+                    <a:lumOff val="40000"/>
+                  </a:schemeClr>
+                </a:solidFill>
+              </a:rPr>
+              <a:t>决定。</a:t>
+            </a:r>
+            <a:endParaRPr lang="en-US" altLang="zh-CN" dirty="0">
+              <a:solidFill>
+                <a:schemeClr val="accent1">
+                  <a:lumMod val="60000"/>
+                  <a:lumOff val="40000"/>
+                </a:schemeClr>
+              </a:solidFill>
+            </a:endParaRPr>
+          </a:p>
+          <a:p>
+            <a:r>
+              <a:rPr lang="zh-CN" altLang="en-US" dirty="0">
+                <a:solidFill>
+                  <a:schemeClr val="accent1">
+                    <a:lumMod val="60000"/>
+                    <a:lumOff val="40000"/>
+                  </a:schemeClr>
+                </a:solidFill>
+              </a:rPr>
+              <a:t>由断连法可知，访问无线</a:t>
+            </a:r>
+            <a:r>
+              <a:rPr lang="en-US" altLang="zh-CN" dirty="0">
+                <a:solidFill>
+                  <a:schemeClr val="accent1">
+                    <a:lumMod val="60000"/>
+                    <a:lumOff val="40000"/>
+                  </a:schemeClr>
+                </a:solidFill>
+              </a:rPr>
+              <a:t>IP</a:t>
+            </a:r>
+            <a:r>
+              <a:rPr lang="zh-CN" altLang="en-US" dirty="0">
+                <a:solidFill>
+                  <a:schemeClr val="accent1">
+                    <a:lumMod val="60000"/>
+                    <a:lumOff val="40000"/>
+                  </a:schemeClr>
+                </a:solidFill>
+              </a:rPr>
+              <a:t>走无线通道，访问有线</a:t>
+            </a:r>
+            <a:r>
+              <a:rPr lang="en-US" altLang="zh-CN" dirty="0">
+                <a:solidFill>
+                  <a:schemeClr val="accent1">
+                    <a:lumMod val="60000"/>
+                    <a:lumOff val="40000"/>
+                  </a:schemeClr>
+                </a:solidFill>
+              </a:rPr>
+              <a:t>IP</a:t>
+            </a:r>
+            <a:r>
+              <a:rPr lang="zh-CN" altLang="en-US" dirty="0">
+                <a:solidFill>
+                  <a:schemeClr val="accent1">
+                    <a:lumMod val="60000"/>
+                    <a:lumOff val="40000"/>
+                  </a:schemeClr>
+                </a:solidFill>
+              </a:rPr>
+              <a:t>走有限通道</a:t>
             </a:r>
           </a:p>
         </p:txBody>
@@ -3758,7 +5205,7 @@
     </p:spTree>
     <p:extLst>
       <p:ext uri="{BB962C8B-B14F-4D97-AF65-F5344CB8AC3E}">
-        <p14:creationId xmlns:p14="http://schemas.microsoft.com/office/powerpoint/2010/main" val="1010155131"/>
+        <p14:creationId xmlns:p14="http://schemas.microsoft.com/office/powerpoint/2010/main" val="2816012182"/>
       </p:ext>
     </p:extLst>
   </p:cSld>
@@ -3787,10 +5234,10 @@
       </p:grpSpPr>
       <p:pic>
         <p:nvPicPr>
-          <p:cNvPr id="50" name="图片 49">
-            <a:extLst>
-              <a:ext uri="{FF2B5EF4-FFF2-40B4-BE49-F238E27FC236}">
-                <a16:creationId xmlns:a16="http://schemas.microsoft.com/office/drawing/2014/main" id="{2DD63D62-E4A6-4CE4-BD5D-7B1F54716730}"/>
+          <p:cNvPr id="12" name="图片 11">
+            <a:extLst>
+              <a:ext uri="{FF2B5EF4-FFF2-40B4-BE49-F238E27FC236}">
+                <a16:creationId xmlns:a16="http://schemas.microsoft.com/office/drawing/2014/main" id="{09E8FC01-8EA8-4068-82A3-44F01C23C509}"/>
               </a:ext>
             </a:extLst>
           </p:cNvPr>
@@ -4054,10 +5501,10 @@
       </p:sp>
       <p:sp>
         <p:nvSpPr>
-          <p:cNvPr id="21" name="文本框 20">
-            <a:extLst>
-              <a:ext uri="{FF2B5EF4-FFF2-40B4-BE49-F238E27FC236}">
-                <a16:creationId xmlns:a16="http://schemas.microsoft.com/office/drawing/2014/main" id="{42D143DB-5FD7-40B7-BFAC-CCF2B6D80B21}"/>
+          <p:cNvPr id="23" name="文本框 22">
+            <a:extLst>
+              <a:ext uri="{FF2B5EF4-FFF2-40B4-BE49-F238E27FC236}">
+                <a16:creationId xmlns:a16="http://schemas.microsoft.com/office/drawing/2014/main" id="{CA2A2B83-4D6B-4902-9FD1-DEA707C40560}"/>
               </a:ext>
             </a:extLst>
           </p:cNvPr>
@@ -4066,7 +5513,7 @@
         </p:nvSpPr>
         <p:spPr>
           <a:xfrm>
-            <a:off x="3685563" y="4108847"/>
+            <a:off x="6828762" y="1910994"/>
             <a:ext cx="1435008" cy="369332"/>
           </a:xfrm>
           <a:prstGeom prst="rect">
@@ -4089,7 +5536,7 @@
                   </a:schemeClr>
                 </a:solidFill>
               </a:rPr>
-              <a:t>192.168.1.11</a:t>
+              <a:t>192.168.1.12</a:t>
             </a:r>
             <a:endParaRPr lang="zh-CN" altLang="en-US" dirty="0">
               <a:solidFill>
@@ -4104,10 +5551,10 @@
       </p:sp>
       <p:sp>
         <p:nvSpPr>
-          <p:cNvPr id="23" name="文本框 22">
-            <a:extLst>
-              <a:ext uri="{FF2B5EF4-FFF2-40B4-BE49-F238E27FC236}">
-                <a16:creationId xmlns:a16="http://schemas.microsoft.com/office/drawing/2014/main" id="{CA2A2B83-4D6B-4902-9FD1-DEA707C40560}"/>
+          <p:cNvPr id="26" name="文本框 25">
+            <a:extLst>
+              <a:ext uri="{FF2B5EF4-FFF2-40B4-BE49-F238E27FC236}">
+                <a16:creationId xmlns:a16="http://schemas.microsoft.com/office/drawing/2014/main" id="{5D65D36F-9FDE-4A8B-98C7-7635AC7BD167}"/>
               </a:ext>
             </a:extLst>
           </p:cNvPr>
@@ -4116,8 +5563,8 @@
         </p:nvSpPr>
         <p:spPr>
           <a:xfrm>
-            <a:off x="6828762" y="1910994"/>
-            <a:ext cx="1435008" cy="369332"/>
+            <a:off x="2567031" y="2860646"/>
+            <a:ext cx="436228" cy="369332"/>
           </a:xfrm>
           <a:prstGeom prst="rect">
             <a:avLst/>
@@ -4125,22 +5572,11 @@
           <a:noFill/>
         </p:spPr>
         <p:txBody>
-          <a:bodyPr wrap="none" rtlCol="0">
+          <a:bodyPr wrap="square" rtlCol="0">
             <a:spAutoFit/>
           </a:bodyPr>
           <a:lstStyle/>
           <a:p>
-            <a:r>
-              <a:rPr lang="en-US" altLang="zh-CN" dirty="0">
-                <a:solidFill>
-                  <a:schemeClr val="accent1">
-                    <a:lumMod val="40000"/>
-                    <a:lumOff val="60000"/>
-                  </a:schemeClr>
-                </a:solidFill>
-              </a:rPr>
-              <a:t>192.168.1.12</a:t>
-            </a:r>
             <a:endParaRPr lang="zh-CN" altLang="en-US" dirty="0">
               <a:solidFill>
                 <a:schemeClr val="accent1">
@@ -4154,10 +5590,10 @@
       </p:sp>
       <p:sp>
         <p:nvSpPr>
-          <p:cNvPr id="25" name="文本框 24">
-            <a:extLst>
-              <a:ext uri="{FF2B5EF4-FFF2-40B4-BE49-F238E27FC236}">
-                <a16:creationId xmlns:a16="http://schemas.microsoft.com/office/drawing/2014/main" id="{BF85E132-EF0A-4BA9-9610-C14B9BBD77BE}"/>
+          <p:cNvPr id="30" name="文本框 29">
+            <a:extLst>
+              <a:ext uri="{FF2B5EF4-FFF2-40B4-BE49-F238E27FC236}">
+                <a16:creationId xmlns:a16="http://schemas.microsoft.com/office/drawing/2014/main" id="{01C5441B-1346-40DC-A5B7-F8622BE264F0}"/>
               </a:ext>
             </a:extLst>
           </p:cNvPr>
@@ -4166,8 +5602,8 @@
         </p:nvSpPr>
         <p:spPr>
           <a:xfrm>
-            <a:off x="6836661" y="4115094"/>
-            <a:ext cx="1435008" cy="369332"/>
+            <a:off x="1154530" y="2785813"/>
+            <a:ext cx="897746" cy="369332"/>
           </a:xfrm>
           <a:prstGeom prst="rect">
             <a:avLst/>
@@ -4175,12 +5611,96 @@
           <a:noFill/>
         </p:spPr>
         <p:txBody>
-          <a:bodyPr wrap="none" rtlCol="0">
+          <a:bodyPr wrap="square" rtlCol="0">
             <a:spAutoFit/>
           </a:bodyPr>
           <a:lstStyle/>
           <a:p>
             <a:r>
+              <a:rPr lang="zh-CN" altLang="en-US" dirty="0">
+                <a:solidFill>
+                  <a:schemeClr val="accent1">
+                    <a:lumMod val="40000"/>
+                    <a:lumOff val="60000"/>
+                  </a:schemeClr>
+                </a:solidFill>
+              </a:rPr>
+              <a:t>笔记本</a:t>
+            </a:r>
+          </a:p>
+        </p:txBody>
+      </p:sp>
+      <p:sp>
+        <p:nvSpPr>
+          <p:cNvPr id="32" name="文本框 31">
+            <a:extLst>
+              <a:ext uri="{FF2B5EF4-FFF2-40B4-BE49-F238E27FC236}">
+                <a16:creationId xmlns:a16="http://schemas.microsoft.com/office/drawing/2014/main" id="{27F1E09F-4E90-44A5-84EC-818E13F973E3}"/>
+              </a:ext>
+            </a:extLst>
+          </p:cNvPr>
+          <p:cNvSpPr txBox="1"/>
+          <p:nvPr/>
+        </p:nvSpPr>
+        <p:spPr>
+          <a:xfrm>
+            <a:off x="9949344" y="2933134"/>
+            <a:ext cx="897746" cy="369332"/>
+          </a:xfrm>
+          <a:prstGeom prst="rect">
+            <a:avLst/>
+          </a:prstGeom>
+          <a:noFill/>
+        </p:spPr>
+        <p:txBody>
+          <a:bodyPr wrap="square" rtlCol="0">
+            <a:spAutoFit/>
+          </a:bodyPr>
+          <a:lstStyle/>
+          <a:p>
+            <a:r>
+              <a:rPr lang="zh-CN" altLang="en-US" dirty="0">
+                <a:solidFill>
+                  <a:schemeClr val="accent1">
+                    <a:lumMod val="40000"/>
+                    <a:lumOff val="60000"/>
+                  </a:schemeClr>
+                </a:solidFill>
+              </a:rPr>
+              <a:t>台式</a:t>
+            </a:r>
+          </a:p>
+        </p:txBody>
+      </p:sp>
+      <p:sp>
+        <p:nvSpPr>
+          <p:cNvPr id="13" name="文本框 12">
+            <a:extLst>
+              <a:ext uri="{FF2B5EF4-FFF2-40B4-BE49-F238E27FC236}">
+                <a16:creationId xmlns:a16="http://schemas.microsoft.com/office/drawing/2014/main" id="{19146187-EE78-4EF1-BDF5-AA5548D4E9BE}"/>
+              </a:ext>
+            </a:extLst>
+          </p:cNvPr>
+          <p:cNvSpPr txBox="1"/>
+          <p:nvPr/>
+        </p:nvSpPr>
+        <p:spPr>
+          <a:xfrm>
+            <a:off x="3702281" y="4071534"/>
+            <a:ext cx="1593908" cy="369332"/>
+          </a:xfrm>
+          <a:prstGeom prst="rect">
+            <a:avLst/>
+          </a:prstGeom>
+          <a:noFill/>
+        </p:spPr>
+        <p:txBody>
+          <a:bodyPr wrap="square" rtlCol="0">
+            <a:spAutoFit/>
+          </a:bodyPr>
+          <a:lstStyle/>
+          <a:p>
+            <a:r>
               <a:rPr lang="en-US" altLang="zh-CN" dirty="0">
                 <a:solidFill>
                   <a:schemeClr val="accent1">
@@ -4189,7 +5709,7 @@
                   </a:schemeClr>
                 </a:solidFill>
               </a:rPr>
-              <a:t>192.168.1.12</a:t>
+              <a:t>192.168.1.21</a:t>
             </a:r>
             <a:endParaRPr lang="zh-CN" altLang="en-US" dirty="0">
               <a:solidFill>
@@ -4204,10 +5724,10 @@
       </p:sp>
       <p:sp>
         <p:nvSpPr>
-          <p:cNvPr id="26" name="文本框 25">
-            <a:extLst>
-              <a:ext uri="{FF2B5EF4-FFF2-40B4-BE49-F238E27FC236}">
-                <a16:creationId xmlns:a16="http://schemas.microsoft.com/office/drawing/2014/main" id="{5D65D36F-9FDE-4A8B-98C7-7635AC7BD167}"/>
+          <p:cNvPr id="17" name="文本框 16">
+            <a:extLst>
+              <a:ext uri="{FF2B5EF4-FFF2-40B4-BE49-F238E27FC236}">
+                <a16:creationId xmlns:a16="http://schemas.microsoft.com/office/drawing/2014/main" id="{8DDCF94B-0AB5-41AB-9D58-C821ABA6BD68}"/>
               </a:ext>
             </a:extLst>
           </p:cNvPr>
@@ -4216,8 +5736,8 @@
         </p:nvSpPr>
         <p:spPr>
           <a:xfrm>
-            <a:off x="2567031" y="2860646"/>
-            <a:ext cx="436228" cy="369332"/>
+            <a:off x="6828762" y="4075105"/>
+            <a:ext cx="1593908" cy="369332"/>
           </a:xfrm>
           <a:prstGeom prst="rect">
             <a:avLst/>
@@ -4230,6 +5750,17 @@
           </a:bodyPr>
           <a:lstStyle/>
           <a:p>
+            <a:r>
+              <a:rPr lang="en-US" altLang="zh-CN" dirty="0">
+                <a:solidFill>
+                  <a:schemeClr val="accent1">
+                    <a:lumMod val="40000"/>
+                    <a:lumOff val="60000"/>
+                  </a:schemeClr>
+                </a:solidFill>
+              </a:rPr>
+              <a:t>192.168.1.22</a:t>
+            </a:r>
             <a:endParaRPr lang="zh-CN" altLang="en-US" dirty="0">
               <a:solidFill>
                 <a:schemeClr val="accent1">
@@ -4243,55 +5774,45 @@
       </p:sp>
       <p:sp>
         <p:nvSpPr>
-          <p:cNvPr id="30" name="文本框 29">
-            <a:extLst>
-              <a:ext uri="{FF2B5EF4-FFF2-40B4-BE49-F238E27FC236}">
-                <a16:creationId xmlns:a16="http://schemas.microsoft.com/office/drawing/2014/main" id="{01C5441B-1346-40DC-A5B7-F8622BE264F0}"/>
-              </a:ext>
-            </a:extLst>
-          </p:cNvPr>
-          <p:cNvSpPr txBox="1"/>
-          <p:nvPr/>
-        </p:nvSpPr>
-        <p:spPr>
-          <a:xfrm>
-            <a:off x="1434517" y="2793534"/>
-            <a:ext cx="897746" cy="369332"/>
-          </a:xfrm>
-          <a:prstGeom prst="rect">
-            <a:avLst/>
-          </a:prstGeom>
-          <a:noFill/>
-        </p:spPr>
-        <p:txBody>
-          <a:bodyPr wrap="square" rtlCol="0">
-            <a:spAutoFit/>
-          </a:bodyPr>
-          <a:lstStyle/>
-          <a:p>
-            <a:r>
-              <a:rPr lang="zh-CN" altLang="en-US" dirty="0">
-                <a:solidFill>
-                  <a:schemeClr val="accent1">
-                    <a:lumMod val="40000"/>
-                    <a:lumOff val="60000"/>
-                  </a:schemeClr>
-                </a:solidFill>
-              </a:rPr>
-              <a:t>电脑</a:t>
-            </a:r>
-            <a:r>
-              <a:rPr lang="en-US" altLang="zh-CN" dirty="0">
-                <a:solidFill>
-                  <a:schemeClr val="accent1">
-                    <a:lumMod val="40000"/>
-                    <a:lumOff val="60000"/>
-                  </a:schemeClr>
-                </a:solidFill>
-              </a:rPr>
-              <a:t>1</a:t>
-            </a:r>
-            <a:endParaRPr lang="zh-CN" altLang="en-US" dirty="0">
+          <p:cNvPr id="20" name="矩形 19">
+            <a:extLst>
+              <a:ext uri="{FF2B5EF4-FFF2-40B4-BE49-F238E27FC236}">
+                <a16:creationId xmlns:a16="http://schemas.microsoft.com/office/drawing/2014/main" id="{C6CD64A8-8845-4874-A05E-C2B8EAC2BF1B}"/>
+              </a:ext>
+            </a:extLst>
+          </p:cNvPr>
+          <p:cNvSpPr/>
+          <p:nvPr/>
+        </p:nvSpPr>
+        <p:spPr>
+          <a:xfrm>
+            <a:off x="3034202" y="2145932"/>
+            <a:ext cx="308208" cy="445371"/>
+          </a:xfrm>
+          <a:prstGeom prst="rect">
+            <a:avLst/>
+          </a:prstGeom>
+        </p:spPr>
+        <p:style>
+          <a:lnRef idx="3">
+            <a:schemeClr val="lt1"/>
+          </a:lnRef>
+          <a:fillRef idx="1">
+            <a:schemeClr val="accent3"/>
+          </a:fillRef>
+          <a:effectRef idx="1">
+            <a:schemeClr val="accent3"/>
+          </a:effectRef>
+          <a:fontRef idx="minor">
+            <a:schemeClr val="lt1"/>
+          </a:fontRef>
+        </p:style>
+        <p:txBody>
+          <a:bodyPr rtlCol="0" anchor="ctr"/>
+          <a:lstStyle/>
+          <a:p>
+            <a:pPr algn="ctr"/>
+            <a:endParaRPr lang="zh-CN" altLang="en-US">
               <a:solidFill>
                 <a:schemeClr val="accent1">
                   <a:lumMod val="40000"/>
@@ -4304,55 +5825,45 @@
       </p:sp>
       <p:sp>
         <p:nvSpPr>
-          <p:cNvPr id="32" name="文本框 31">
-            <a:extLst>
-              <a:ext uri="{FF2B5EF4-FFF2-40B4-BE49-F238E27FC236}">
-                <a16:creationId xmlns:a16="http://schemas.microsoft.com/office/drawing/2014/main" id="{27F1E09F-4E90-44A5-84EC-818E13F973E3}"/>
-              </a:ext>
-            </a:extLst>
-          </p:cNvPr>
-          <p:cNvSpPr txBox="1"/>
-          <p:nvPr/>
-        </p:nvSpPr>
-        <p:spPr>
-          <a:xfrm>
-            <a:off x="9949344" y="2933134"/>
-            <a:ext cx="897746" cy="369332"/>
-          </a:xfrm>
-          <a:prstGeom prst="rect">
-            <a:avLst/>
-          </a:prstGeom>
-          <a:noFill/>
-        </p:spPr>
-        <p:txBody>
-          <a:bodyPr wrap="square" rtlCol="0">
-            <a:spAutoFit/>
-          </a:bodyPr>
-          <a:lstStyle/>
-          <a:p>
-            <a:r>
-              <a:rPr lang="zh-CN" altLang="en-US" dirty="0">
-                <a:solidFill>
-                  <a:schemeClr val="accent1">
-                    <a:lumMod val="40000"/>
-                    <a:lumOff val="60000"/>
-                  </a:schemeClr>
-                </a:solidFill>
-              </a:rPr>
-              <a:t>电脑</a:t>
-            </a:r>
-            <a:r>
-              <a:rPr lang="en-US" altLang="zh-CN" dirty="0">
-                <a:solidFill>
-                  <a:schemeClr val="accent1">
-                    <a:lumMod val="40000"/>
-                    <a:lumOff val="60000"/>
-                  </a:schemeClr>
-                </a:solidFill>
-              </a:rPr>
-              <a:t>2</a:t>
-            </a:r>
-            <a:endParaRPr lang="zh-CN" altLang="en-US" dirty="0">
+          <p:cNvPr id="22" name="矩形 21">
+            <a:extLst>
+              <a:ext uri="{FF2B5EF4-FFF2-40B4-BE49-F238E27FC236}">
+                <a16:creationId xmlns:a16="http://schemas.microsoft.com/office/drawing/2014/main" id="{7BDAA7C7-2A2E-4D45-9253-2391000C81F6}"/>
+              </a:ext>
+            </a:extLst>
+          </p:cNvPr>
+          <p:cNvSpPr/>
+          <p:nvPr/>
+        </p:nvSpPr>
+        <p:spPr>
+          <a:xfrm>
+            <a:off x="3011404" y="4317856"/>
+            <a:ext cx="308208" cy="445371"/>
+          </a:xfrm>
+          <a:prstGeom prst="rect">
+            <a:avLst/>
+          </a:prstGeom>
+        </p:spPr>
+        <p:style>
+          <a:lnRef idx="3">
+            <a:schemeClr val="lt1"/>
+          </a:lnRef>
+          <a:fillRef idx="1">
+            <a:schemeClr val="accent3"/>
+          </a:fillRef>
+          <a:effectRef idx="1">
+            <a:schemeClr val="accent3"/>
+          </a:effectRef>
+          <a:fontRef idx="minor">
+            <a:schemeClr val="lt1"/>
+          </a:fontRef>
+        </p:style>
+        <p:txBody>
+          <a:bodyPr rtlCol="0" anchor="ctr"/>
+          <a:lstStyle/>
+          <a:p>
+            <a:pPr algn="ctr"/>
+            <a:endParaRPr lang="zh-CN" altLang="en-US">
               <a:solidFill>
                 <a:schemeClr val="accent1">
                   <a:lumMod val="40000"/>
@@ -4365,10 +5876,10 @@
       </p:sp>
       <p:sp>
         <p:nvSpPr>
-          <p:cNvPr id="9" name="箭头: 下 8">
-            <a:extLst>
-              <a:ext uri="{FF2B5EF4-FFF2-40B4-BE49-F238E27FC236}">
-                <a16:creationId xmlns:a16="http://schemas.microsoft.com/office/drawing/2014/main" id="{F439500E-647D-4C43-A6C0-250CEE9B0DE5}"/>
+          <p:cNvPr id="24" name="矩形 23">
+            <a:extLst>
+              <a:ext uri="{FF2B5EF4-FFF2-40B4-BE49-F238E27FC236}">
+                <a16:creationId xmlns:a16="http://schemas.microsoft.com/office/drawing/2014/main" id="{BF126198-072A-4EFE-A3A7-876FEF483119}"/>
               </a:ext>
             </a:extLst>
           </p:cNvPr>
@@ -4377,8 +5888,152 @@
         </p:nvSpPr>
         <p:spPr>
           <a:xfrm>
-            <a:off x="4274317" y="4478179"/>
-            <a:ext cx="142612" cy="666922"/>
+            <a:off x="8449531" y="2129660"/>
+            <a:ext cx="308208" cy="445371"/>
+          </a:xfrm>
+          <a:prstGeom prst="rect">
+            <a:avLst/>
+          </a:prstGeom>
+        </p:spPr>
+        <p:style>
+          <a:lnRef idx="3">
+            <a:schemeClr val="lt1"/>
+          </a:lnRef>
+          <a:fillRef idx="1">
+            <a:schemeClr val="accent3"/>
+          </a:fillRef>
+          <a:effectRef idx="1">
+            <a:schemeClr val="accent3"/>
+          </a:effectRef>
+          <a:fontRef idx="minor">
+            <a:schemeClr val="lt1"/>
+          </a:fontRef>
+        </p:style>
+        <p:txBody>
+          <a:bodyPr rtlCol="0" anchor="ctr"/>
+          <a:lstStyle/>
+          <a:p>
+            <a:pPr algn="ctr"/>
+            <a:endParaRPr lang="zh-CN" altLang="en-US">
+              <a:solidFill>
+                <a:schemeClr val="accent1">
+                  <a:lumMod val="40000"/>
+                  <a:lumOff val="60000"/>
+                </a:schemeClr>
+              </a:solidFill>
+            </a:endParaRPr>
+          </a:p>
+        </p:txBody>
+      </p:sp>
+      <p:sp>
+        <p:nvSpPr>
+          <p:cNvPr id="28" name="矩形 27">
+            <a:extLst>
+              <a:ext uri="{FF2B5EF4-FFF2-40B4-BE49-F238E27FC236}">
+                <a16:creationId xmlns:a16="http://schemas.microsoft.com/office/drawing/2014/main" id="{A1A9E17B-3FE9-4F4C-AD60-CDF67BD6926B}"/>
+              </a:ext>
+            </a:extLst>
+          </p:cNvPr>
+          <p:cNvSpPr/>
+          <p:nvPr/>
+        </p:nvSpPr>
+        <p:spPr>
+          <a:xfrm>
+            <a:off x="8462049" y="4260045"/>
+            <a:ext cx="308208" cy="445371"/>
+          </a:xfrm>
+          <a:prstGeom prst="rect">
+            <a:avLst/>
+          </a:prstGeom>
+        </p:spPr>
+        <p:style>
+          <a:lnRef idx="3">
+            <a:schemeClr val="lt1"/>
+          </a:lnRef>
+          <a:fillRef idx="1">
+            <a:schemeClr val="accent3"/>
+          </a:fillRef>
+          <a:effectRef idx="1">
+            <a:schemeClr val="accent3"/>
+          </a:effectRef>
+          <a:fontRef idx="minor">
+            <a:schemeClr val="lt1"/>
+          </a:fontRef>
+        </p:style>
+        <p:txBody>
+          <a:bodyPr rtlCol="0" anchor="ctr"/>
+          <a:lstStyle/>
+          <a:p>
+            <a:pPr algn="ctr"/>
+            <a:endParaRPr lang="zh-CN" altLang="en-US">
+              <a:solidFill>
+                <a:schemeClr val="accent1">
+                  <a:lumMod val="40000"/>
+                  <a:lumOff val="60000"/>
+                </a:schemeClr>
+              </a:solidFill>
+            </a:endParaRPr>
+          </a:p>
+        </p:txBody>
+      </p:sp>
+      <p:sp>
+        <p:nvSpPr>
+          <p:cNvPr id="3" name="文本框 2">
+            <a:extLst>
+              <a:ext uri="{FF2B5EF4-FFF2-40B4-BE49-F238E27FC236}">
+                <a16:creationId xmlns:a16="http://schemas.microsoft.com/office/drawing/2014/main" id="{81EAC0AB-B220-4FA7-B013-87A646817A0A}"/>
+              </a:ext>
+            </a:extLst>
+          </p:cNvPr>
+          <p:cNvSpPr txBox="1"/>
+          <p:nvPr/>
+        </p:nvSpPr>
+        <p:spPr>
+          <a:xfrm>
+            <a:off x="8473068" y="826389"/>
+            <a:ext cx="1963512" cy="369332"/>
+          </a:xfrm>
+          <a:prstGeom prst="rect">
+            <a:avLst/>
+          </a:prstGeom>
+          <a:noFill/>
+        </p:spPr>
+        <p:txBody>
+          <a:bodyPr wrap="square" rtlCol="0">
+            <a:spAutoFit/>
+          </a:bodyPr>
+          <a:lstStyle/>
+          <a:p>
+            <a:r>
+              <a:rPr lang="zh-CN" altLang="en-US" dirty="0">
+                <a:solidFill>
+                  <a:schemeClr val="accent1">
+                    <a:lumMod val="40000"/>
+                    <a:lumOff val="60000"/>
+                  </a:schemeClr>
+                </a:solidFill>
+              </a:rPr>
+              <a:t>可上网</a:t>
+            </a:r>
+          </a:p>
+        </p:txBody>
+      </p:sp>
+      <p:sp>
+        <p:nvSpPr>
+          <p:cNvPr id="4" name="箭头: 下 3">
+            <a:extLst>
+              <a:ext uri="{FF2B5EF4-FFF2-40B4-BE49-F238E27FC236}">
+                <a16:creationId xmlns:a16="http://schemas.microsoft.com/office/drawing/2014/main" id="{79EFAB61-E538-4A6D-B986-43CC4BD39CA1}"/>
+              </a:ext>
+            </a:extLst>
+          </p:cNvPr>
+          <p:cNvSpPr/>
+          <p:nvPr/>
+        </p:nvSpPr>
+        <p:spPr>
+          <a:xfrm>
+            <a:off x="8889052" y="1300317"/>
+            <a:ext cx="196709" cy="345941"/>
           </a:xfrm>
           <a:prstGeom prst="downArrow">
             <a:avLst/>
@@ -4418,1618 +6073,6 @@
       </p:sp>
       <p:sp>
         <p:nvSpPr>
-          <p:cNvPr id="11" name="箭头: 下 10">
-            <a:extLst>
-              <a:ext uri="{FF2B5EF4-FFF2-40B4-BE49-F238E27FC236}">
-                <a16:creationId xmlns:a16="http://schemas.microsoft.com/office/drawing/2014/main" id="{65DF9E4F-A58A-4ABC-97A6-03C0ABEB35A2}"/>
-              </a:ext>
-            </a:extLst>
-          </p:cNvPr>
-          <p:cNvSpPr/>
-          <p:nvPr/>
-        </p:nvSpPr>
-        <p:spPr>
-          <a:xfrm>
-            <a:off x="7540180" y="4478179"/>
-            <a:ext cx="142612" cy="666922"/>
-          </a:xfrm>
-          <a:prstGeom prst="downArrow">
-            <a:avLst/>
-          </a:prstGeom>
-        </p:spPr>
-        <p:style>
-          <a:lnRef idx="2">
-            <a:schemeClr val="accent1">
-              <a:shade val="50000"/>
-            </a:schemeClr>
-          </a:lnRef>
-          <a:fillRef idx="1">
-            <a:schemeClr val="accent1"/>
-          </a:fillRef>
-          <a:effectRef idx="0">
-            <a:schemeClr val="accent1"/>
-          </a:effectRef>
-          <a:fontRef idx="minor">
-            <a:schemeClr val="lt1"/>
-          </a:fontRef>
-        </p:style>
-        <p:txBody>
-          <a:bodyPr rtlCol="0" anchor="ctr"/>
-          <a:lstStyle/>
-          <a:p>
-            <a:pPr algn="ctr"/>
-            <a:endParaRPr lang="zh-CN" altLang="en-US">
-              <a:solidFill>
-                <a:schemeClr val="accent1">
-                  <a:lumMod val="40000"/>
-                  <a:lumOff val="60000"/>
-                </a:schemeClr>
-              </a:solidFill>
-            </a:endParaRPr>
-          </a:p>
-        </p:txBody>
-      </p:sp>
-      <p:sp>
-        <p:nvSpPr>
-          <p:cNvPr id="13" name="文本框 12">
-            <a:extLst>
-              <a:ext uri="{FF2B5EF4-FFF2-40B4-BE49-F238E27FC236}">
-                <a16:creationId xmlns:a16="http://schemas.microsoft.com/office/drawing/2014/main" id="{19146187-EE78-4EF1-BDF5-AA5548D4E9BE}"/>
-              </a:ext>
-            </a:extLst>
-          </p:cNvPr>
-          <p:cNvSpPr txBox="1"/>
-          <p:nvPr/>
-        </p:nvSpPr>
-        <p:spPr>
-          <a:xfrm>
-            <a:off x="3598877" y="5354229"/>
-            <a:ext cx="1593908" cy="369332"/>
-          </a:xfrm>
-          <a:prstGeom prst="rect">
-            <a:avLst/>
-          </a:prstGeom>
-          <a:noFill/>
-        </p:spPr>
-        <p:txBody>
-          <a:bodyPr wrap="square" rtlCol="0">
-            <a:spAutoFit/>
-          </a:bodyPr>
-          <a:lstStyle/>
-          <a:p>
-            <a:r>
-              <a:rPr lang="en-US" altLang="zh-CN" dirty="0">
-                <a:solidFill>
-                  <a:schemeClr val="accent1">
-                    <a:lumMod val="40000"/>
-                    <a:lumOff val="60000"/>
-                  </a:schemeClr>
-                </a:solidFill>
-              </a:rPr>
-              <a:t>192.168.1.21</a:t>
-            </a:r>
-            <a:endParaRPr lang="zh-CN" altLang="en-US" dirty="0">
-              <a:solidFill>
-                <a:schemeClr val="accent1">
-                  <a:lumMod val="40000"/>
-                  <a:lumOff val="60000"/>
-                </a:schemeClr>
-              </a:solidFill>
-            </a:endParaRPr>
-          </a:p>
-        </p:txBody>
-      </p:sp>
-      <p:sp>
-        <p:nvSpPr>
-          <p:cNvPr id="17" name="文本框 16">
-            <a:extLst>
-              <a:ext uri="{FF2B5EF4-FFF2-40B4-BE49-F238E27FC236}">
-                <a16:creationId xmlns:a16="http://schemas.microsoft.com/office/drawing/2014/main" id="{8DDCF94B-0AB5-41AB-9D58-C821ABA6BD68}"/>
-              </a:ext>
-            </a:extLst>
-          </p:cNvPr>
-          <p:cNvSpPr txBox="1"/>
-          <p:nvPr/>
-        </p:nvSpPr>
-        <p:spPr>
-          <a:xfrm>
-            <a:off x="6836661" y="5354229"/>
-            <a:ext cx="1593908" cy="369332"/>
-          </a:xfrm>
-          <a:prstGeom prst="rect">
-            <a:avLst/>
-          </a:prstGeom>
-          <a:noFill/>
-        </p:spPr>
-        <p:txBody>
-          <a:bodyPr wrap="square" rtlCol="0">
-            <a:spAutoFit/>
-          </a:bodyPr>
-          <a:lstStyle/>
-          <a:p>
-            <a:r>
-              <a:rPr lang="en-US" altLang="zh-CN" dirty="0">
-                <a:solidFill>
-                  <a:schemeClr val="accent1">
-                    <a:lumMod val="40000"/>
-                    <a:lumOff val="60000"/>
-                  </a:schemeClr>
-                </a:solidFill>
-              </a:rPr>
-              <a:t>192.168.1.22</a:t>
-            </a:r>
-            <a:endParaRPr lang="zh-CN" altLang="en-US" dirty="0">
-              <a:solidFill>
-                <a:schemeClr val="accent1">
-                  <a:lumMod val="40000"/>
-                  <a:lumOff val="60000"/>
-                </a:schemeClr>
-              </a:solidFill>
-            </a:endParaRPr>
-          </a:p>
-        </p:txBody>
-      </p:sp>
-      <p:sp>
-        <p:nvSpPr>
-          <p:cNvPr id="20" name="矩形 19">
-            <a:extLst>
-              <a:ext uri="{FF2B5EF4-FFF2-40B4-BE49-F238E27FC236}">
-                <a16:creationId xmlns:a16="http://schemas.microsoft.com/office/drawing/2014/main" id="{C6CD64A8-8845-4874-A05E-C2B8EAC2BF1B}"/>
-              </a:ext>
-            </a:extLst>
-          </p:cNvPr>
-          <p:cNvSpPr/>
-          <p:nvPr/>
-        </p:nvSpPr>
-        <p:spPr>
-          <a:xfrm>
-            <a:off x="3034202" y="2145932"/>
-            <a:ext cx="308208" cy="445371"/>
-          </a:xfrm>
-          <a:prstGeom prst="rect">
-            <a:avLst/>
-          </a:prstGeom>
-        </p:spPr>
-        <p:style>
-          <a:lnRef idx="3">
-            <a:schemeClr val="lt1"/>
-          </a:lnRef>
-          <a:fillRef idx="1">
-            <a:schemeClr val="accent3"/>
-          </a:fillRef>
-          <a:effectRef idx="1">
-            <a:schemeClr val="accent3"/>
-          </a:effectRef>
-          <a:fontRef idx="minor">
-            <a:schemeClr val="lt1"/>
-          </a:fontRef>
-        </p:style>
-        <p:txBody>
-          <a:bodyPr rtlCol="0" anchor="ctr"/>
-          <a:lstStyle/>
-          <a:p>
-            <a:pPr algn="ctr"/>
-            <a:endParaRPr lang="zh-CN" altLang="en-US">
-              <a:solidFill>
-                <a:schemeClr val="accent1">
-                  <a:lumMod val="40000"/>
-                  <a:lumOff val="60000"/>
-                </a:schemeClr>
-              </a:solidFill>
-            </a:endParaRPr>
-          </a:p>
-        </p:txBody>
-      </p:sp>
-      <p:sp>
-        <p:nvSpPr>
-          <p:cNvPr id="22" name="矩形 21">
-            <a:extLst>
-              <a:ext uri="{FF2B5EF4-FFF2-40B4-BE49-F238E27FC236}">
-                <a16:creationId xmlns:a16="http://schemas.microsoft.com/office/drawing/2014/main" id="{7BDAA7C7-2A2E-4D45-9253-2391000C81F6}"/>
-              </a:ext>
-            </a:extLst>
-          </p:cNvPr>
-          <p:cNvSpPr/>
-          <p:nvPr/>
-        </p:nvSpPr>
-        <p:spPr>
-          <a:xfrm>
-            <a:off x="3011404" y="4317856"/>
-            <a:ext cx="308208" cy="445371"/>
-          </a:xfrm>
-          <a:prstGeom prst="rect">
-            <a:avLst/>
-          </a:prstGeom>
-        </p:spPr>
-        <p:style>
-          <a:lnRef idx="3">
-            <a:schemeClr val="lt1"/>
-          </a:lnRef>
-          <a:fillRef idx="1">
-            <a:schemeClr val="accent3"/>
-          </a:fillRef>
-          <a:effectRef idx="1">
-            <a:schemeClr val="accent3"/>
-          </a:effectRef>
-          <a:fontRef idx="minor">
-            <a:schemeClr val="lt1"/>
-          </a:fontRef>
-        </p:style>
-        <p:txBody>
-          <a:bodyPr rtlCol="0" anchor="ctr"/>
-          <a:lstStyle/>
-          <a:p>
-            <a:pPr algn="ctr"/>
-            <a:endParaRPr lang="zh-CN" altLang="en-US">
-              <a:solidFill>
-                <a:schemeClr val="accent1">
-                  <a:lumMod val="40000"/>
-                  <a:lumOff val="60000"/>
-                </a:schemeClr>
-              </a:solidFill>
-            </a:endParaRPr>
-          </a:p>
-        </p:txBody>
-      </p:sp>
-      <p:sp>
-        <p:nvSpPr>
-          <p:cNvPr id="24" name="矩形 23">
-            <a:extLst>
-              <a:ext uri="{FF2B5EF4-FFF2-40B4-BE49-F238E27FC236}">
-                <a16:creationId xmlns:a16="http://schemas.microsoft.com/office/drawing/2014/main" id="{BF126198-072A-4EFE-A3A7-876FEF483119}"/>
-              </a:ext>
-            </a:extLst>
-          </p:cNvPr>
-          <p:cNvSpPr/>
-          <p:nvPr/>
-        </p:nvSpPr>
-        <p:spPr>
-          <a:xfrm>
-            <a:off x="8449531" y="2129660"/>
-            <a:ext cx="308208" cy="445371"/>
-          </a:xfrm>
-          <a:prstGeom prst="rect">
-            <a:avLst/>
-          </a:prstGeom>
-        </p:spPr>
-        <p:style>
-          <a:lnRef idx="3">
-            <a:schemeClr val="lt1"/>
-          </a:lnRef>
-          <a:fillRef idx="1">
-            <a:schemeClr val="accent3"/>
-          </a:fillRef>
-          <a:effectRef idx="1">
-            <a:schemeClr val="accent3"/>
-          </a:effectRef>
-          <a:fontRef idx="minor">
-            <a:schemeClr val="lt1"/>
-          </a:fontRef>
-        </p:style>
-        <p:txBody>
-          <a:bodyPr rtlCol="0" anchor="ctr"/>
-          <a:lstStyle/>
-          <a:p>
-            <a:pPr algn="ctr"/>
-            <a:endParaRPr lang="zh-CN" altLang="en-US">
-              <a:solidFill>
-                <a:schemeClr val="accent1">
-                  <a:lumMod val="40000"/>
-                  <a:lumOff val="60000"/>
-                </a:schemeClr>
-              </a:solidFill>
-            </a:endParaRPr>
-          </a:p>
-        </p:txBody>
-      </p:sp>
-      <p:sp>
-        <p:nvSpPr>
-          <p:cNvPr id="28" name="矩形 27">
-            <a:extLst>
-              <a:ext uri="{FF2B5EF4-FFF2-40B4-BE49-F238E27FC236}">
-                <a16:creationId xmlns:a16="http://schemas.microsoft.com/office/drawing/2014/main" id="{A1A9E17B-3FE9-4F4C-AD60-CDF67BD6926B}"/>
-              </a:ext>
-            </a:extLst>
-          </p:cNvPr>
-          <p:cNvSpPr/>
-          <p:nvPr/>
-        </p:nvSpPr>
-        <p:spPr>
-          <a:xfrm>
-            <a:off x="8462049" y="4260045"/>
-            <a:ext cx="308208" cy="445371"/>
-          </a:xfrm>
-          <a:prstGeom prst="rect">
-            <a:avLst/>
-          </a:prstGeom>
-        </p:spPr>
-        <p:style>
-          <a:lnRef idx="3">
-            <a:schemeClr val="lt1"/>
-          </a:lnRef>
-          <a:fillRef idx="1">
-            <a:schemeClr val="accent3"/>
-          </a:fillRef>
-          <a:effectRef idx="1">
-            <a:schemeClr val="accent3"/>
-          </a:effectRef>
-          <a:fontRef idx="minor">
-            <a:schemeClr val="lt1"/>
-          </a:fontRef>
-        </p:style>
-        <p:txBody>
-          <a:bodyPr rtlCol="0" anchor="ctr"/>
-          <a:lstStyle/>
-          <a:p>
-            <a:pPr algn="ctr"/>
-            <a:endParaRPr lang="zh-CN" altLang="en-US">
-              <a:solidFill>
-                <a:schemeClr val="accent1">
-                  <a:lumMod val="40000"/>
-                  <a:lumOff val="60000"/>
-                </a:schemeClr>
-              </a:solidFill>
-            </a:endParaRPr>
-          </a:p>
-        </p:txBody>
-      </p:sp>
-      <p:sp>
-        <p:nvSpPr>
-          <p:cNvPr id="43" name="箭头: 下 42">
-            <a:extLst>
-              <a:ext uri="{FF2B5EF4-FFF2-40B4-BE49-F238E27FC236}">
-                <a16:creationId xmlns:a16="http://schemas.microsoft.com/office/drawing/2014/main" id="{B3268E59-DAB6-4F42-9623-6CC5010B5DA4}"/>
-              </a:ext>
-            </a:extLst>
-          </p:cNvPr>
-          <p:cNvSpPr/>
-          <p:nvPr/>
-        </p:nvSpPr>
-        <p:spPr>
-          <a:xfrm rot="2051220">
-            <a:off x="8841424" y="1351601"/>
-            <a:ext cx="247349" cy="793383"/>
-          </a:xfrm>
-          <a:prstGeom prst="downArrow">
-            <a:avLst/>
-          </a:prstGeom>
-        </p:spPr>
-        <p:style>
-          <a:lnRef idx="1">
-            <a:schemeClr val="accent2"/>
-          </a:lnRef>
-          <a:fillRef idx="2">
-            <a:schemeClr val="accent2"/>
-          </a:fillRef>
-          <a:effectRef idx="1">
-            <a:schemeClr val="accent2"/>
-          </a:effectRef>
-          <a:fontRef idx="minor">
-            <a:schemeClr val="dk1"/>
-          </a:fontRef>
-        </p:style>
-        <p:txBody>
-          <a:bodyPr rtlCol="0" anchor="ctr"/>
-          <a:lstStyle/>
-          <a:p>
-            <a:pPr algn="ctr"/>
-            <a:endParaRPr lang="zh-CN" altLang="en-US">
-              <a:solidFill>
-                <a:schemeClr val="accent1">
-                  <a:lumMod val="40000"/>
-                  <a:lumOff val="60000"/>
-                </a:schemeClr>
-              </a:solidFill>
-            </a:endParaRPr>
-          </a:p>
-        </p:txBody>
-      </p:sp>
-      <p:sp>
-        <p:nvSpPr>
-          <p:cNvPr id="45" name="箭头: 下 44">
-            <a:extLst>
-              <a:ext uri="{FF2B5EF4-FFF2-40B4-BE49-F238E27FC236}">
-                <a16:creationId xmlns:a16="http://schemas.microsoft.com/office/drawing/2014/main" id="{2548086D-D9FF-42BE-A3C2-704A28FE9500}"/>
-              </a:ext>
-            </a:extLst>
-          </p:cNvPr>
-          <p:cNvSpPr/>
-          <p:nvPr/>
-        </p:nvSpPr>
-        <p:spPr>
-          <a:xfrm rot="7768153">
-            <a:off x="8800686" y="4432630"/>
-            <a:ext cx="247349" cy="793383"/>
-          </a:xfrm>
-          <a:prstGeom prst="downArrow">
-            <a:avLst/>
-          </a:prstGeom>
-        </p:spPr>
-        <p:style>
-          <a:lnRef idx="1">
-            <a:schemeClr val="accent2"/>
-          </a:lnRef>
-          <a:fillRef idx="2">
-            <a:schemeClr val="accent2"/>
-          </a:fillRef>
-          <a:effectRef idx="1">
-            <a:schemeClr val="accent2"/>
-          </a:effectRef>
-          <a:fontRef idx="minor">
-            <a:schemeClr val="dk1"/>
-          </a:fontRef>
-        </p:style>
-        <p:txBody>
-          <a:bodyPr rtlCol="0" anchor="ctr"/>
-          <a:lstStyle/>
-          <a:p>
-            <a:pPr algn="ctr"/>
-            <a:endParaRPr lang="zh-CN" altLang="en-US">
-              <a:solidFill>
-                <a:schemeClr val="accent1">
-                  <a:lumMod val="40000"/>
-                  <a:lumOff val="60000"/>
-                </a:schemeClr>
-              </a:solidFill>
-            </a:endParaRPr>
-          </a:p>
-        </p:txBody>
-      </p:sp>
-      <p:sp>
-        <p:nvSpPr>
-          <p:cNvPr id="46" name="文本框 45">
-            <a:extLst>
-              <a:ext uri="{FF2B5EF4-FFF2-40B4-BE49-F238E27FC236}">
-                <a16:creationId xmlns:a16="http://schemas.microsoft.com/office/drawing/2014/main" id="{AB5A4B0F-6B63-4F4D-8E37-0A41B454E775}"/>
-              </a:ext>
-            </a:extLst>
-          </p:cNvPr>
-          <p:cNvSpPr txBox="1"/>
-          <p:nvPr/>
-        </p:nvSpPr>
-        <p:spPr>
-          <a:xfrm>
-            <a:off x="8770257" y="885545"/>
-            <a:ext cx="1358246" cy="369332"/>
-          </a:xfrm>
-          <a:prstGeom prst="rect">
-            <a:avLst/>
-          </a:prstGeom>
-          <a:noFill/>
-        </p:spPr>
-        <p:txBody>
-          <a:bodyPr wrap="square" rtlCol="0">
-            <a:spAutoFit/>
-          </a:bodyPr>
-          <a:lstStyle/>
-          <a:p>
-            <a:pPr algn="ctr"/>
-            <a:r>
-              <a:rPr lang="zh-CN" altLang="en-US" dirty="0">
-                <a:solidFill>
-                  <a:schemeClr val="accent1">
-                    <a:lumMod val="40000"/>
-                    <a:lumOff val="60000"/>
-                  </a:schemeClr>
-                </a:solidFill>
-              </a:rPr>
-              <a:t>大门</a:t>
-            </a:r>
-          </a:p>
-        </p:txBody>
-      </p:sp>
-      <p:sp>
-        <p:nvSpPr>
-          <p:cNvPr id="48" name="文本框 47">
-            <a:extLst>
-              <a:ext uri="{FF2B5EF4-FFF2-40B4-BE49-F238E27FC236}">
-                <a16:creationId xmlns:a16="http://schemas.microsoft.com/office/drawing/2014/main" id="{4A8CF20E-9871-423D-A4C2-CE7B68DA6BA6}"/>
-              </a:ext>
-            </a:extLst>
-          </p:cNvPr>
-          <p:cNvSpPr txBox="1"/>
-          <p:nvPr/>
-        </p:nvSpPr>
-        <p:spPr>
-          <a:xfrm>
-            <a:off x="8924360" y="5072415"/>
-            <a:ext cx="1358246" cy="369332"/>
-          </a:xfrm>
-          <a:prstGeom prst="rect">
-            <a:avLst/>
-          </a:prstGeom>
-          <a:noFill/>
-        </p:spPr>
-        <p:txBody>
-          <a:bodyPr wrap="square" rtlCol="0">
-            <a:spAutoFit/>
-          </a:bodyPr>
-          <a:lstStyle/>
-          <a:p>
-            <a:pPr algn="ctr"/>
-            <a:r>
-              <a:rPr lang="zh-CN" altLang="en-US" dirty="0">
-                <a:solidFill>
-                  <a:schemeClr val="accent1">
-                    <a:lumMod val="40000"/>
-                    <a:lumOff val="60000"/>
-                  </a:schemeClr>
-                </a:solidFill>
-              </a:rPr>
-              <a:t>大门</a:t>
-            </a:r>
-          </a:p>
-        </p:txBody>
-      </p:sp>
-      <p:pic>
-        <p:nvPicPr>
-          <p:cNvPr id="54" name="图片 53">
-            <a:extLst>
-              <a:ext uri="{FF2B5EF4-FFF2-40B4-BE49-F238E27FC236}">
-                <a16:creationId xmlns:a16="http://schemas.microsoft.com/office/drawing/2014/main" id="{DC876C17-2126-46F2-9936-D63E63FD84BC}"/>
-              </a:ext>
-            </a:extLst>
-          </p:cNvPr>
-          <p:cNvPicPr>
-            <a:picLocks noChangeAspect="1"/>
-          </p:cNvPicPr>
-          <p:nvPr/>
-        </p:nvPicPr>
-        <p:blipFill>
-          <a:blip r:embed="rId3" cstate="print">
-            <a:duotone>
-              <a:schemeClr val="bg2">
-                <a:shade val="45000"/>
-                <a:satMod val="135000"/>
-              </a:schemeClr>
-              <a:prstClr val="white"/>
-            </a:duotone>
-            <a:extLst>
-              <a:ext uri="{28A0092B-C50C-407E-A947-70E740481C1C}">
-                <a14:useLocalDpi xmlns:a14="http://schemas.microsoft.com/office/drawing/2010/main" val="0"/>
-              </a:ext>
-            </a:extLst>
-          </a:blip>
-          <a:stretch>
-            <a:fillRect/>
-          </a:stretch>
-        </p:blipFill>
-        <p:spPr>
-          <a:xfrm>
-            <a:off x="5301240" y="4727157"/>
-            <a:ext cx="996404" cy="996404"/>
-          </a:xfrm>
-          <a:prstGeom prst="rect">
-            <a:avLst/>
-          </a:prstGeom>
-        </p:spPr>
-      </p:pic>
-    </p:spTree>
-    <p:extLst>
-      <p:ext uri="{BB962C8B-B14F-4D97-AF65-F5344CB8AC3E}">
-        <p14:creationId xmlns:p14="http://schemas.microsoft.com/office/powerpoint/2010/main" val="2816012182"/>
-      </p:ext>
-    </p:extLst>
-  </p:cSld>
-  <p:clrMapOvr>
-    <a:masterClrMapping/>
-  </p:clrMapOvr>
-</p:sld>
-</file>
-
-<file path=ppt/slides/slide15.xml><?xml version="1.0" encoding="utf-8"?>
-<p:sld xmlns:a="http://schemas.openxmlformats.org/drawingml/2006/main" xmlns:r="http://schemas.openxmlformats.org/officeDocument/2006/relationships" xmlns:p="http://schemas.openxmlformats.org/presentationml/2006/main">
-  <p:cSld>
-    <p:spTree>
-      <p:nvGrpSpPr>
-        <p:cNvPr id="1" name=""/>
-        <p:cNvGrpSpPr/>
-        <p:nvPr/>
-      </p:nvGrpSpPr>
-      <p:grpSpPr>
-        <a:xfrm>
-          <a:off x="0" y="0"/>
-          <a:ext cx="0" cy="0"/>
-          <a:chOff x="0" y="0"/>
-          <a:chExt cx="0" cy="0"/>
-        </a:xfrm>
-      </p:grpSpPr>
-      <p:pic>
-        <p:nvPicPr>
-          <p:cNvPr id="7" name="图片 6">
-            <a:extLst>
-              <a:ext uri="{FF2B5EF4-FFF2-40B4-BE49-F238E27FC236}">
-                <a16:creationId xmlns:a16="http://schemas.microsoft.com/office/drawing/2014/main" id="{2B97FE3F-2C75-4288-8E60-7650D62BF1B0}"/>
-              </a:ext>
-            </a:extLst>
-          </p:cNvPr>
-          <p:cNvPicPr/>
-          <p:nvPr/>
-        </p:nvPicPr>
-        <p:blipFill>
-          <a:blip r:embed="rId2"/>
-          <a:stretch>
-            <a:fillRect/>
-          </a:stretch>
-        </p:blipFill>
-        <p:spPr>
-          <a:xfrm>
-            <a:off x="0" y="0"/>
-            <a:ext cx="12192000" cy="6858000"/>
-          </a:xfrm>
-          <a:prstGeom prst="rect">
-            <a:avLst/>
-          </a:prstGeom>
-        </p:spPr>
-      </p:pic>
-      <p:sp>
-        <p:nvSpPr>
-          <p:cNvPr id="2" name="标题 1"/>
-          <p:cNvSpPr>
-            <a:spLocks noGrp="1"/>
-          </p:cNvSpPr>
-          <p:nvPr>
-            <p:ph type="title"/>
-          </p:nvPr>
-        </p:nvSpPr>
-        <p:spPr>
-          <a:xfrm>
-            <a:off x="1899284" y="2766060"/>
-            <a:ext cx="8393430" cy="1325880"/>
-          </a:xfrm>
-        </p:spPr>
-        <p:txBody>
-          <a:bodyPr>
-            <a:noAutofit/>
-          </a:bodyPr>
-          <a:lstStyle/>
-          <a:p>
-            <a:pPr algn="ctr"/>
-            <a:r>
-              <a:rPr lang="zh-CN" altLang="en-US" sz="2400" dirty="0">
-                <a:solidFill>
-                  <a:schemeClr val="accent1">
-                    <a:lumMod val="40000"/>
-                    <a:lumOff val="60000"/>
-                  </a:schemeClr>
-                </a:solidFill>
-              </a:rPr>
-              <a:t>因为</a:t>
-            </a:r>
-            <a:r>
-              <a:rPr lang="en-US" altLang="zh-CN" sz="2400" dirty="0">
-                <a:solidFill>
-                  <a:schemeClr val="accent1">
-                    <a:lumMod val="40000"/>
-                    <a:lumOff val="60000"/>
-                  </a:schemeClr>
-                </a:solidFill>
-              </a:rPr>
-              <a:t>IP</a:t>
-            </a:r>
-            <a:r>
-              <a:rPr lang="zh-CN" altLang="en-US" sz="2400" dirty="0">
-                <a:solidFill>
-                  <a:schemeClr val="accent1">
-                    <a:lumMod val="40000"/>
-                    <a:lumOff val="60000"/>
-                  </a:schemeClr>
-                </a:solidFill>
-              </a:rPr>
-              <a:t>地址的唯一性，在访问之前就决定了访问的方式，两个电脑之间会采取哪种运输方式。</a:t>
-            </a:r>
-          </a:p>
-        </p:txBody>
-      </p:sp>
-      <p:sp>
-        <p:nvSpPr>
-          <p:cNvPr id="3" name="文本框 2">
-            <a:extLst>
-              <a:ext uri="{FF2B5EF4-FFF2-40B4-BE49-F238E27FC236}">
-                <a16:creationId xmlns:a16="http://schemas.microsoft.com/office/drawing/2014/main" id="{C32F99DC-CF66-40DB-AF8D-AE18B66B0D04}"/>
-              </a:ext>
-            </a:extLst>
-          </p:cNvPr>
-          <p:cNvSpPr txBox="1"/>
-          <p:nvPr/>
-        </p:nvSpPr>
-        <p:spPr>
-          <a:xfrm>
-            <a:off x="5135459" y="872455"/>
-            <a:ext cx="1921079" cy="769441"/>
-          </a:xfrm>
-          <a:prstGeom prst="rect">
-            <a:avLst/>
-          </a:prstGeom>
-          <a:noFill/>
-        </p:spPr>
-        <p:txBody>
-          <a:bodyPr wrap="square" rtlCol="0">
-            <a:spAutoFit/>
-          </a:bodyPr>
-          <a:lstStyle/>
-          <a:p>
-            <a:pPr algn="ctr"/>
-            <a:r>
-              <a:rPr lang="zh-CN" altLang="en-US" sz="4400" dirty="0">
-                <a:solidFill>
-                  <a:schemeClr val="tx2">
-                    <a:lumMod val="60000"/>
-                    <a:lumOff val="40000"/>
-                  </a:schemeClr>
-                </a:solidFill>
-              </a:rPr>
-              <a:t>结论</a:t>
-            </a:r>
-          </a:p>
-        </p:txBody>
-      </p:sp>
-    </p:spTree>
-  </p:cSld>
-  <p:clrMapOvr>
-    <a:masterClrMapping/>
-  </p:clrMapOvr>
-</p:sld>
-</file>
-
-<file path=ppt/slides/slide16.xml><?xml version="1.0" encoding="utf-8"?>
-<p:sld xmlns:a="http://schemas.openxmlformats.org/drawingml/2006/main" xmlns:r="http://schemas.openxmlformats.org/officeDocument/2006/relationships" xmlns:p="http://schemas.openxmlformats.org/presentationml/2006/main">
-  <p:cSld>
-    <p:spTree>
-      <p:nvGrpSpPr>
-        <p:cNvPr id="1" name=""/>
-        <p:cNvGrpSpPr/>
-        <p:nvPr/>
-      </p:nvGrpSpPr>
-      <p:grpSpPr>
-        <a:xfrm>
-          <a:off x="0" y="0"/>
-          <a:ext cx="0" cy="0"/>
-          <a:chOff x="0" y="0"/>
-          <a:chExt cx="0" cy="0"/>
-        </a:xfrm>
-      </p:grpSpPr>
-      <p:pic>
-        <p:nvPicPr>
-          <p:cNvPr id="12" name="图片 11">
-            <a:extLst>
-              <a:ext uri="{FF2B5EF4-FFF2-40B4-BE49-F238E27FC236}">
-                <a16:creationId xmlns:a16="http://schemas.microsoft.com/office/drawing/2014/main" id="{09E8FC01-8EA8-4068-82A3-44F01C23C509}"/>
-              </a:ext>
-            </a:extLst>
-          </p:cNvPr>
-          <p:cNvPicPr/>
-          <p:nvPr/>
-        </p:nvPicPr>
-        <p:blipFill>
-          <a:blip r:embed="rId2"/>
-          <a:stretch>
-            <a:fillRect/>
-          </a:stretch>
-        </p:blipFill>
-        <p:spPr>
-          <a:xfrm>
-            <a:off x="0" y="0"/>
-            <a:ext cx="12192000" cy="6858000"/>
-          </a:xfrm>
-          <a:prstGeom prst="rect">
-            <a:avLst/>
-          </a:prstGeom>
-        </p:spPr>
-      </p:pic>
-      <p:sp>
-        <p:nvSpPr>
-          <p:cNvPr id="6" name="矩形 5">
-            <a:extLst>
-              <a:ext uri="{FF2B5EF4-FFF2-40B4-BE49-F238E27FC236}">
-                <a16:creationId xmlns:a16="http://schemas.microsoft.com/office/drawing/2014/main" id="{20D6983C-FA3E-42DB-9E83-79552C0F3811}"/>
-              </a:ext>
-            </a:extLst>
-          </p:cNvPr>
-          <p:cNvSpPr/>
-          <p:nvPr/>
-        </p:nvSpPr>
-        <p:spPr>
-          <a:xfrm>
-            <a:off x="2242656" y="1825625"/>
-            <a:ext cx="1442907" cy="3031601"/>
-          </a:xfrm>
-          <a:prstGeom prst="rect">
-            <a:avLst/>
-          </a:prstGeom>
-        </p:spPr>
-        <p:style>
-          <a:lnRef idx="2">
-            <a:schemeClr val="accent1">
-              <a:shade val="50000"/>
-            </a:schemeClr>
-          </a:lnRef>
-          <a:fillRef idx="1">
-            <a:schemeClr val="accent1"/>
-          </a:fillRef>
-          <a:effectRef idx="0">
-            <a:schemeClr val="accent1"/>
-          </a:effectRef>
-          <a:fontRef idx="minor">
-            <a:schemeClr val="lt1"/>
-          </a:fontRef>
-        </p:style>
-        <p:txBody>
-          <a:bodyPr rtlCol="0" anchor="ctr"/>
-          <a:lstStyle/>
-          <a:p>
-            <a:pPr algn="ctr"/>
-            <a:endParaRPr lang="zh-CN" altLang="en-US">
-              <a:solidFill>
-                <a:schemeClr val="accent1">
-                  <a:lumMod val="40000"/>
-                  <a:lumOff val="60000"/>
-                </a:schemeClr>
-              </a:solidFill>
-            </a:endParaRPr>
-          </a:p>
-        </p:txBody>
-      </p:sp>
-      <p:sp>
-        <p:nvSpPr>
-          <p:cNvPr id="8" name="矩形 7">
-            <a:extLst>
-              <a:ext uri="{FF2B5EF4-FFF2-40B4-BE49-F238E27FC236}">
-                <a16:creationId xmlns:a16="http://schemas.microsoft.com/office/drawing/2014/main" id="{66FD494A-8A44-415C-A68A-ADA3007634E1}"/>
-              </a:ext>
-            </a:extLst>
-          </p:cNvPr>
-          <p:cNvSpPr/>
-          <p:nvPr/>
-        </p:nvSpPr>
-        <p:spPr>
-          <a:xfrm>
-            <a:off x="8265954" y="1825625"/>
-            <a:ext cx="1442907" cy="3031601"/>
-          </a:xfrm>
-          <a:prstGeom prst="rect">
-            <a:avLst/>
-          </a:prstGeom>
-        </p:spPr>
-        <p:style>
-          <a:lnRef idx="2">
-            <a:schemeClr val="accent1">
-              <a:shade val="50000"/>
-            </a:schemeClr>
-          </a:lnRef>
-          <a:fillRef idx="1">
-            <a:schemeClr val="accent1"/>
-          </a:fillRef>
-          <a:effectRef idx="0">
-            <a:schemeClr val="accent1"/>
-          </a:effectRef>
-          <a:fontRef idx="minor">
-            <a:schemeClr val="lt1"/>
-          </a:fontRef>
-        </p:style>
-        <p:txBody>
-          <a:bodyPr rtlCol="0" anchor="ctr"/>
-          <a:lstStyle/>
-          <a:p>
-            <a:pPr algn="ctr"/>
-            <a:endParaRPr lang="zh-CN" altLang="en-US">
-              <a:solidFill>
-                <a:schemeClr val="accent1">
-                  <a:lumMod val="40000"/>
-                  <a:lumOff val="60000"/>
-                </a:schemeClr>
-              </a:solidFill>
-            </a:endParaRPr>
-          </a:p>
-        </p:txBody>
-      </p:sp>
-      <p:cxnSp>
-        <p:nvCxnSpPr>
-          <p:cNvPr id="10" name="直接连接符 9">
-            <a:extLst>
-              <a:ext uri="{FF2B5EF4-FFF2-40B4-BE49-F238E27FC236}">
-                <a16:creationId xmlns:a16="http://schemas.microsoft.com/office/drawing/2014/main" id="{7FBCFEFA-FD7C-40BB-B2C4-FF6BFEB59DA0}"/>
-              </a:ext>
-            </a:extLst>
-          </p:cNvPr>
-          <p:cNvCxnSpPr/>
-          <p:nvPr/>
-        </p:nvCxnSpPr>
-        <p:spPr>
-          <a:xfrm>
-            <a:off x="3204594" y="2365695"/>
-            <a:ext cx="5301843" cy="0"/>
-          </a:xfrm>
-          <a:prstGeom prst="line">
-            <a:avLst/>
-          </a:prstGeom>
-        </p:spPr>
-        <p:style>
-          <a:lnRef idx="3">
-            <a:schemeClr val="dk1"/>
-          </a:lnRef>
-          <a:fillRef idx="0">
-            <a:schemeClr val="dk1"/>
-          </a:fillRef>
-          <a:effectRef idx="2">
-            <a:schemeClr val="dk1"/>
-          </a:effectRef>
-          <a:fontRef idx="minor">
-            <a:schemeClr val="tx1"/>
-          </a:fontRef>
-        </p:style>
-      </p:cxnSp>
-      <p:cxnSp>
-        <p:nvCxnSpPr>
-          <p:cNvPr id="14" name="直接连接符 13">
-            <a:extLst>
-              <a:ext uri="{FF2B5EF4-FFF2-40B4-BE49-F238E27FC236}">
-                <a16:creationId xmlns:a16="http://schemas.microsoft.com/office/drawing/2014/main" id="{4D0281A1-9997-498C-979C-5CD443B8EEB8}"/>
-              </a:ext>
-            </a:extLst>
-          </p:cNvPr>
-          <p:cNvCxnSpPr>
-            <a:cxnSpLocks/>
-          </p:cNvCxnSpPr>
-          <p:nvPr/>
-        </p:nvCxnSpPr>
-        <p:spPr>
-          <a:xfrm>
-            <a:off x="3204593" y="4545647"/>
-            <a:ext cx="5301843" cy="0"/>
-          </a:xfrm>
-          <a:prstGeom prst="line">
-            <a:avLst/>
-          </a:prstGeom>
-          <a:ln w="9525" cap="flat" cmpd="sng" algn="ctr">
-            <a:solidFill>
-              <a:schemeClr val="dk1"/>
-            </a:solidFill>
-            <a:prstDash val="dash"/>
-            <a:round/>
-            <a:headEnd type="none" w="med" len="med"/>
-            <a:tailEnd type="none" w="med" len="med"/>
-          </a:ln>
-        </p:spPr>
-        <p:style>
-          <a:lnRef idx="0">
-            <a:scrgbClr r="0" g="0" b="0"/>
-          </a:lnRef>
-          <a:fillRef idx="0">
-            <a:scrgbClr r="0" g="0" b="0"/>
-          </a:fillRef>
-          <a:effectRef idx="0">
-            <a:scrgbClr r="0" g="0" b="0"/>
-          </a:effectRef>
-          <a:fontRef idx="minor">
-            <a:schemeClr val="tx1"/>
-          </a:fontRef>
-        </p:style>
-      </p:cxnSp>
-      <p:sp>
-        <p:nvSpPr>
-          <p:cNvPr id="19" name="文本框 18">
-            <a:extLst>
-              <a:ext uri="{FF2B5EF4-FFF2-40B4-BE49-F238E27FC236}">
-                <a16:creationId xmlns:a16="http://schemas.microsoft.com/office/drawing/2014/main" id="{CB635EFC-938A-486D-9E5B-D19D6B2AB125}"/>
-              </a:ext>
-            </a:extLst>
-          </p:cNvPr>
-          <p:cNvSpPr txBox="1"/>
-          <p:nvPr/>
-        </p:nvSpPr>
-        <p:spPr>
-          <a:xfrm>
-            <a:off x="3685563" y="1928895"/>
-            <a:ext cx="1435008" cy="369332"/>
-          </a:xfrm>
-          <a:prstGeom prst="rect">
-            <a:avLst/>
-          </a:prstGeom>
-          <a:noFill/>
-        </p:spPr>
-        <p:txBody>
-          <a:bodyPr wrap="none" rtlCol="0">
-            <a:spAutoFit/>
-          </a:bodyPr>
-          <a:lstStyle/>
-          <a:p>
-            <a:r>
-              <a:rPr lang="en-US" altLang="zh-CN" dirty="0">
-                <a:solidFill>
-                  <a:schemeClr val="accent1">
-                    <a:lumMod val="40000"/>
-                    <a:lumOff val="60000"/>
-                  </a:schemeClr>
-                </a:solidFill>
-              </a:rPr>
-              <a:t>192.168.1.11</a:t>
-            </a:r>
-            <a:endParaRPr lang="zh-CN" altLang="en-US" dirty="0">
-              <a:solidFill>
-                <a:schemeClr val="accent1">
-                  <a:lumMod val="40000"/>
-                  <a:lumOff val="60000"/>
-                </a:schemeClr>
-              </a:solidFill>
-            </a:endParaRPr>
-          </a:p>
-        </p:txBody>
-      </p:sp>
-      <p:sp>
-        <p:nvSpPr>
-          <p:cNvPr id="23" name="文本框 22">
-            <a:extLst>
-              <a:ext uri="{FF2B5EF4-FFF2-40B4-BE49-F238E27FC236}">
-                <a16:creationId xmlns:a16="http://schemas.microsoft.com/office/drawing/2014/main" id="{CA2A2B83-4D6B-4902-9FD1-DEA707C40560}"/>
-              </a:ext>
-            </a:extLst>
-          </p:cNvPr>
-          <p:cNvSpPr txBox="1"/>
-          <p:nvPr/>
-        </p:nvSpPr>
-        <p:spPr>
-          <a:xfrm>
-            <a:off x="6828762" y="1910994"/>
-            <a:ext cx="1435008" cy="369332"/>
-          </a:xfrm>
-          <a:prstGeom prst="rect">
-            <a:avLst/>
-          </a:prstGeom>
-          <a:noFill/>
-        </p:spPr>
-        <p:txBody>
-          <a:bodyPr wrap="none" rtlCol="0">
-            <a:spAutoFit/>
-          </a:bodyPr>
-          <a:lstStyle/>
-          <a:p>
-            <a:r>
-              <a:rPr lang="en-US" altLang="zh-CN" dirty="0">
-                <a:solidFill>
-                  <a:schemeClr val="accent1">
-                    <a:lumMod val="40000"/>
-                    <a:lumOff val="60000"/>
-                  </a:schemeClr>
-                </a:solidFill>
-              </a:rPr>
-              <a:t>192.168.1.12</a:t>
-            </a:r>
-            <a:endParaRPr lang="zh-CN" altLang="en-US" dirty="0">
-              <a:solidFill>
-                <a:schemeClr val="accent1">
-                  <a:lumMod val="40000"/>
-                  <a:lumOff val="60000"/>
-                </a:schemeClr>
-              </a:solidFill>
-            </a:endParaRPr>
-          </a:p>
-        </p:txBody>
-      </p:sp>
-      <p:sp>
-        <p:nvSpPr>
-          <p:cNvPr id="26" name="文本框 25">
-            <a:extLst>
-              <a:ext uri="{FF2B5EF4-FFF2-40B4-BE49-F238E27FC236}">
-                <a16:creationId xmlns:a16="http://schemas.microsoft.com/office/drawing/2014/main" id="{5D65D36F-9FDE-4A8B-98C7-7635AC7BD167}"/>
-              </a:ext>
-            </a:extLst>
-          </p:cNvPr>
-          <p:cNvSpPr txBox="1"/>
-          <p:nvPr/>
-        </p:nvSpPr>
-        <p:spPr>
-          <a:xfrm>
-            <a:off x="2567031" y="2860646"/>
-            <a:ext cx="436228" cy="369332"/>
-          </a:xfrm>
-          <a:prstGeom prst="rect">
-            <a:avLst/>
-          </a:prstGeom>
-          <a:noFill/>
-        </p:spPr>
-        <p:txBody>
-          <a:bodyPr wrap="square" rtlCol="0">
-            <a:spAutoFit/>
-          </a:bodyPr>
-          <a:lstStyle/>
-          <a:p>
-            <a:endParaRPr lang="zh-CN" altLang="en-US" dirty="0">
-              <a:solidFill>
-                <a:schemeClr val="accent1">
-                  <a:lumMod val="40000"/>
-                  <a:lumOff val="60000"/>
-                </a:schemeClr>
-              </a:solidFill>
-            </a:endParaRPr>
-          </a:p>
-        </p:txBody>
-      </p:sp>
-      <p:sp>
-        <p:nvSpPr>
-          <p:cNvPr id="30" name="文本框 29">
-            <a:extLst>
-              <a:ext uri="{FF2B5EF4-FFF2-40B4-BE49-F238E27FC236}">
-                <a16:creationId xmlns:a16="http://schemas.microsoft.com/office/drawing/2014/main" id="{01C5441B-1346-40DC-A5B7-F8622BE264F0}"/>
-              </a:ext>
-            </a:extLst>
-          </p:cNvPr>
-          <p:cNvSpPr txBox="1"/>
-          <p:nvPr/>
-        </p:nvSpPr>
-        <p:spPr>
-          <a:xfrm>
-            <a:off x="1154530" y="2785813"/>
-            <a:ext cx="897746" cy="369332"/>
-          </a:xfrm>
-          <a:prstGeom prst="rect">
-            <a:avLst/>
-          </a:prstGeom>
-          <a:noFill/>
-        </p:spPr>
-        <p:txBody>
-          <a:bodyPr wrap="square" rtlCol="0">
-            <a:spAutoFit/>
-          </a:bodyPr>
-          <a:lstStyle/>
-          <a:p>
-            <a:r>
-              <a:rPr lang="zh-CN" altLang="en-US" dirty="0">
-                <a:solidFill>
-                  <a:schemeClr val="accent1">
-                    <a:lumMod val="40000"/>
-                    <a:lumOff val="60000"/>
-                  </a:schemeClr>
-                </a:solidFill>
-              </a:rPr>
-              <a:t>笔记本</a:t>
-            </a:r>
-          </a:p>
-        </p:txBody>
-      </p:sp>
-      <p:sp>
-        <p:nvSpPr>
-          <p:cNvPr id="32" name="文本框 31">
-            <a:extLst>
-              <a:ext uri="{FF2B5EF4-FFF2-40B4-BE49-F238E27FC236}">
-                <a16:creationId xmlns:a16="http://schemas.microsoft.com/office/drawing/2014/main" id="{27F1E09F-4E90-44A5-84EC-818E13F973E3}"/>
-              </a:ext>
-            </a:extLst>
-          </p:cNvPr>
-          <p:cNvSpPr txBox="1"/>
-          <p:nvPr/>
-        </p:nvSpPr>
-        <p:spPr>
-          <a:xfrm>
-            <a:off x="9949344" y="2933134"/>
-            <a:ext cx="897746" cy="369332"/>
-          </a:xfrm>
-          <a:prstGeom prst="rect">
-            <a:avLst/>
-          </a:prstGeom>
-          <a:noFill/>
-        </p:spPr>
-        <p:txBody>
-          <a:bodyPr wrap="square" rtlCol="0">
-            <a:spAutoFit/>
-          </a:bodyPr>
-          <a:lstStyle/>
-          <a:p>
-            <a:r>
-              <a:rPr lang="zh-CN" altLang="en-US" dirty="0">
-                <a:solidFill>
-                  <a:schemeClr val="accent1">
-                    <a:lumMod val="40000"/>
-                    <a:lumOff val="60000"/>
-                  </a:schemeClr>
-                </a:solidFill>
-              </a:rPr>
-              <a:t>台式</a:t>
-            </a:r>
-          </a:p>
-        </p:txBody>
-      </p:sp>
-      <p:sp>
-        <p:nvSpPr>
-          <p:cNvPr id="13" name="文本框 12">
-            <a:extLst>
-              <a:ext uri="{FF2B5EF4-FFF2-40B4-BE49-F238E27FC236}">
-                <a16:creationId xmlns:a16="http://schemas.microsoft.com/office/drawing/2014/main" id="{19146187-EE78-4EF1-BDF5-AA5548D4E9BE}"/>
-              </a:ext>
-            </a:extLst>
-          </p:cNvPr>
-          <p:cNvSpPr txBox="1"/>
-          <p:nvPr/>
-        </p:nvSpPr>
-        <p:spPr>
-          <a:xfrm>
-            <a:off x="3702281" y="4071534"/>
-            <a:ext cx="1593908" cy="369332"/>
-          </a:xfrm>
-          <a:prstGeom prst="rect">
-            <a:avLst/>
-          </a:prstGeom>
-          <a:noFill/>
-        </p:spPr>
-        <p:txBody>
-          <a:bodyPr wrap="square" rtlCol="0">
-            <a:spAutoFit/>
-          </a:bodyPr>
-          <a:lstStyle/>
-          <a:p>
-            <a:r>
-              <a:rPr lang="en-US" altLang="zh-CN" dirty="0">
-                <a:solidFill>
-                  <a:schemeClr val="accent1">
-                    <a:lumMod val="40000"/>
-                    <a:lumOff val="60000"/>
-                  </a:schemeClr>
-                </a:solidFill>
-              </a:rPr>
-              <a:t>192.168.1.21</a:t>
-            </a:r>
-            <a:endParaRPr lang="zh-CN" altLang="en-US" dirty="0">
-              <a:solidFill>
-                <a:schemeClr val="accent1">
-                  <a:lumMod val="40000"/>
-                  <a:lumOff val="60000"/>
-                </a:schemeClr>
-              </a:solidFill>
-            </a:endParaRPr>
-          </a:p>
-        </p:txBody>
-      </p:sp>
-      <p:sp>
-        <p:nvSpPr>
-          <p:cNvPr id="17" name="文本框 16">
-            <a:extLst>
-              <a:ext uri="{FF2B5EF4-FFF2-40B4-BE49-F238E27FC236}">
-                <a16:creationId xmlns:a16="http://schemas.microsoft.com/office/drawing/2014/main" id="{8DDCF94B-0AB5-41AB-9D58-C821ABA6BD68}"/>
-              </a:ext>
-            </a:extLst>
-          </p:cNvPr>
-          <p:cNvSpPr txBox="1"/>
-          <p:nvPr/>
-        </p:nvSpPr>
-        <p:spPr>
-          <a:xfrm>
-            <a:off x="6828762" y="4075105"/>
-            <a:ext cx="1593908" cy="369332"/>
-          </a:xfrm>
-          <a:prstGeom prst="rect">
-            <a:avLst/>
-          </a:prstGeom>
-          <a:noFill/>
-        </p:spPr>
-        <p:txBody>
-          <a:bodyPr wrap="square" rtlCol="0">
-            <a:spAutoFit/>
-          </a:bodyPr>
-          <a:lstStyle/>
-          <a:p>
-            <a:r>
-              <a:rPr lang="en-US" altLang="zh-CN" dirty="0">
-                <a:solidFill>
-                  <a:schemeClr val="accent1">
-                    <a:lumMod val="40000"/>
-                    <a:lumOff val="60000"/>
-                  </a:schemeClr>
-                </a:solidFill>
-              </a:rPr>
-              <a:t>192.168.1.22</a:t>
-            </a:r>
-            <a:endParaRPr lang="zh-CN" altLang="en-US" dirty="0">
-              <a:solidFill>
-                <a:schemeClr val="accent1">
-                  <a:lumMod val="40000"/>
-                  <a:lumOff val="60000"/>
-                </a:schemeClr>
-              </a:solidFill>
-            </a:endParaRPr>
-          </a:p>
-        </p:txBody>
-      </p:sp>
-      <p:sp>
-        <p:nvSpPr>
-          <p:cNvPr id="20" name="矩形 19">
-            <a:extLst>
-              <a:ext uri="{FF2B5EF4-FFF2-40B4-BE49-F238E27FC236}">
-                <a16:creationId xmlns:a16="http://schemas.microsoft.com/office/drawing/2014/main" id="{C6CD64A8-8845-4874-A05E-C2B8EAC2BF1B}"/>
-              </a:ext>
-            </a:extLst>
-          </p:cNvPr>
-          <p:cNvSpPr/>
-          <p:nvPr/>
-        </p:nvSpPr>
-        <p:spPr>
-          <a:xfrm>
-            <a:off x="3034202" y="2145932"/>
-            <a:ext cx="308208" cy="445371"/>
-          </a:xfrm>
-          <a:prstGeom prst="rect">
-            <a:avLst/>
-          </a:prstGeom>
-        </p:spPr>
-        <p:style>
-          <a:lnRef idx="3">
-            <a:schemeClr val="lt1"/>
-          </a:lnRef>
-          <a:fillRef idx="1">
-            <a:schemeClr val="accent3"/>
-          </a:fillRef>
-          <a:effectRef idx="1">
-            <a:schemeClr val="accent3"/>
-          </a:effectRef>
-          <a:fontRef idx="minor">
-            <a:schemeClr val="lt1"/>
-          </a:fontRef>
-        </p:style>
-        <p:txBody>
-          <a:bodyPr rtlCol="0" anchor="ctr"/>
-          <a:lstStyle/>
-          <a:p>
-            <a:pPr algn="ctr"/>
-            <a:endParaRPr lang="zh-CN" altLang="en-US">
-              <a:solidFill>
-                <a:schemeClr val="accent1">
-                  <a:lumMod val="40000"/>
-                  <a:lumOff val="60000"/>
-                </a:schemeClr>
-              </a:solidFill>
-            </a:endParaRPr>
-          </a:p>
-        </p:txBody>
-      </p:sp>
-      <p:sp>
-        <p:nvSpPr>
-          <p:cNvPr id="22" name="矩形 21">
-            <a:extLst>
-              <a:ext uri="{FF2B5EF4-FFF2-40B4-BE49-F238E27FC236}">
-                <a16:creationId xmlns:a16="http://schemas.microsoft.com/office/drawing/2014/main" id="{7BDAA7C7-2A2E-4D45-9253-2391000C81F6}"/>
-              </a:ext>
-            </a:extLst>
-          </p:cNvPr>
-          <p:cNvSpPr/>
-          <p:nvPr/>
-        </p:nvSpPr>
-        <p:spPr>
-          <a:xfrm>
-            <a:off x="3011404" y="4317856"/>
-            <a:ext cx="308208" cy="445371"/>
-          </a:xfrm>
-          <a:prstGeom prst="rect">
-            <a:avLst/>
-          </a:prstGeom>
-        </p:spPr>
-        <p:style>
-          <a:lnRef idx="3">
-            <a:schemeClr val="lt1"/>
-          </a:lnRef>
-          <a:fillRef idx="1">
-            <a:schemeClr val="accent3"/>
-          </a:fillRef>
-          <a:effectRef idx="1">
-            <a:schemeClr val="accent3"/>
-          </a:effectRef>
-          <a:fontRef idx="minor">
-            <a:schemeClr val="lt1"/>
-          </a:fontRef>
-        </p:style>
-        <p:txBody>
-          <a:bodyPr rtlCol="0" anchor="ctr"/>
-          <a:lstStyle/>
-          <a:p>
-            <a:pPr algn="ctr"/>
-            <a:endParaRPr lang="zh-CN" altLang="en-US">
-              <a:solidFill>
-                <a:schemeClr val="accent1">
-                  <a:lumMod val="40000"/>
-                  <a:lumOff val="60000"/>
-                </a:schemeClr>
-              </a:solidFill>
-            </a:endParaRPr>
-          </a:p>
-        </p:txBody>
-      </p:sp>
-      <p:sp>
-        <p:nvSpPr>
-          <p:cNvPr id="24" name="矩形 23">
-            <a:extLst>
-              <a:ext uri="{FF2B5EF4-FFF2-40B4-BE49-F238E27FC236}">
-                <a16:creationId xmlns:a16="http://schemas.microsoft.com/office/drawing/2014/main" id="{BF126198-072A-4EFE-A3A7-876FEF483119}"/>
-              </a:ext>
-            </a:extLst>
-          </p:cNvPr>
-          <p:cNvSpPr/>
-          <p:nvPr/>
-        </p:nvSpPr>
-        <p:spPr>
-          <a:xfrm>
-            <a:off x="8449531" y="2129660"/>
-            <a:ext cx="308208" cy="445371"/>
-          </a:xfrm>
-          <a:prstGeom prst="rect">
-            <a:avLst/>
-          </a:prstGeom>
-        </p:spPr>
-        <p:style>
-          <a:lnRef idx="3">
-            <a:schemeClr val="lt1"/>
-          </a:lnRef>
-          <a:fillRef idx="1">
-            <a:schemeClr val="accent3"/>
-          </a:fillRef>
-          <a:effectRef idx="1">
-            <a:schemeClr val="accent3"/>
-          </a:effectRef>
-          <a:fontRef idx="minor">
-            <a:schemeClr val="lt1"/>
-          </a:fontRef>
-        </p:style>
-        <p:txBody>
-          <a:bodyPr rtlCol="0" anchor="ctr"/>
-          <a:lstStyle/>
-          <a:p>
-            <a:pPr algn="ctr"/>
-            <a:endParaRPr lang="zh-CN" altLang="en-US">
-              <a:solidFill>
-                <a:schemeClr val="accent1">
-                  <a:lumMod val="40000"/>
-                  <a:lumOff val="60000"/>
-                </a:schemeClr>
-              </a:solidFill>
-            </a:endParaRPr>
-          </a:p>
-        </p:txBody>
-      </p:sp>
-      <p:sp>
-        <p:nvSpPr>
-          <p:cNvPr id="28" name="矩形 27">
-            <a:extLst>
-              <a:ext uri="{FF2B5EF4-FFF2-40B4-BE49-F238E27FC236}">
-                <a16:creationId xmlns:a16="http://schemas.microsoft.com/office/drawing/2014/main" id="{A1A9E17B-3FE9-4F4C-AD60-CDF67BD6926B}"/>
-              </a:ext>
-            </a:extLst>
-          </p:cNvPr>
-          <p:cNvSpPr/>
-          <p:nvPr/>
-        </p:nvSpPr>
-        <p:spPr>
-          <a:xfrm>
-            <a:off x="8462049" y="4260045"/>
-            <a:ext cx="308208" cy="445371"/>
-          </a:xfrm>
-          <a:prstGeom prst="rect">
-            <a:avLst/>
-          </a:prstGeom>
-        </p:spPr>
-        <p:style>
-          <a:lnRef idx="3">
-            <a:schemeClr val="lt1"/>
-          </a:lnRef>
-          <a:fillRef idx="1">
-            <a:schemeClr val="accent3"/>
-          </a:fillRef>
-          <a:effectRef idx="1">
-            <a:schemeClr val="accent3"/>
-          </a:effectRef>
-          <a:fontRef idx="minor">
-            <a:schemeClr val="lt1"/>
-          </a:fontRef>
-        </p:style>
-        <p:txBody>
-          <a:bodyPr rtlCol="0" anchor="ctr"/>
-          <a:lstStyle/>
-          <a:p>
-            <a:pPr algn="ctr"/>
-            <a:endParaRPr lang="zh-CN" altLang="en-US">
-              <a:solidFill>
-                <a:schemeClr val="accent1">
-                  <a:lumMod val="40000"/>
-                  <a:lumOff val="60000"/>
-                </a:schemeClr>
-              </a:solidFill>
-            </a:endParaRPr>
-          </a:p>
-        </p:txBody>
-      </p:sp>
-      <p:sp>
-        <p:nvSpPr>
-          <p:cNvPr id="3" name="文本框 2">
-            <a:extLst>
-              <a:ext uri="{FF2B5EF4-FFF2-40B4-BE49-F238E27FC236}">
-                <a16:creationId xmlns:a16="http://schemas.microsoft.com/office/drawing/2014/main" id="{81EAC0AB-B220-4FA7-B013-87A646817A0A}"/>
-              </a:ext>
-            </a:extLst>
-          </p:cNvPr>
-          <p:cNvSpPr txBox="1"/>
-          <p:nvPr/>
-        </p:nvSpPr>
-        <p:spPr>
-          <a:xfrm>
-            <a:off x="8473068" y="826389"/>
-            <a:ext cx="1963512" cy="369332"/>
-          </a:xfrm>
-          <a:prstGeom prst="rect">
-            <a:avLst/>
-          </a:prstGeom>
-          <a:noFill/>
-        </p:spPr>
-        <p:txBody>
-          <a:bodyPr wrap="square" rtlCol="0">
-            <a:spAutoFit/>
-          </a:bodyPr>
-          <a:lstStyle/>
-          <a:p>
-            <a:r>
-              <a:rPr lang="zh-CN" altLang="en-US" dirty="0">
-                <a:solidFill>
-                  <a:schemeClr val="accent1">
-                    <a:lumMod val="40000"/>
-                    <a:lumOff val="60000"/>
-                  </a:schemeClr>
-                </a:solidFill>
-              </a:rPr>
-              <a:t>可上网</a:t>
-            </a:r>
-          </a:p>
-        </p:txBody>
-      </p:sp>
-      <p:sp>
-        <p:nvSpPr>
-          <p:cNvPr id="4" name="箭头: 下 3">
-            <a:extLst>
-              <a:ext uri="{FF2B5EF4-FFF2-40B4-BE49-F238E27FC236}">
-                <a16:creationId xmlns:a16="http://schemas.microsoft.com/office/drawing/2014/main" id="{79EFAB61-E538-4A6D-B986-43CC4BD39CA1}"/>
-              </a:ext>
-            </a:extLst>
-          </p:cNvPr>
-          <p:cNvSpPr/>
-          <p:nvPr/>
-        </p:nvSpPr>
-        <p:spPr>
-          <a:xfrm>
-            <a:off x="8889052" y="1300317"/>
-            <a:ext cx="196709" cy="345941"/>
-          </a:xfrm>
-          <a:prstGeom prst="downArrow">
-            <a:avLst/>
-          </a:prstGeom>
-        </p:spPr>
-        <p:style>
-          <a:lnRef idx="2">
-            <a:schemeClr val="accent1">
-              <a:shade val="50000"/>
-            </a:schemeClr>
-          </a:lnRef>
-          <a:fillRef idx="1">
-            <a:schemeClr val="accent1"/>
-          </a:fillRef>
-          <a:effectRef idx="0">
-            <a:schemeClr val="accent1"/>
-          </a:effectRef>
-          <a:fontRef idx="minor">
-            <a:schemeClr val="lt1"/>
-          </a:fontRef>
-        </p:style>
-        <p:txBody>
-          <a:bodyPr rtlCol="0" anchor="ctr"/>
-          <a:lstStyle/>
-          <a:p>
-            <a:pPr algn="ctr"/>
-            <a:endParaRPr lang="zh-CN" altLang="en-US">
-              <a:solidFill>
-                <a:schemeClr val="accent1">
-                  <a:lumMod val="40000"/>
-                  <a:lumOff val="60000"/>
-                </a:schemeClr>
-              </a:solidFill>
-            </a:endParaRPr>
-          </a:p>
-        </p:txBody>
-      </p:sp>
-      <p:sp>
-        <p:nvSpPr>
           <p:cNvPr id="7" name="标题 1">
             <a:extLst>
               <a:ext uri="{FF2B5EF4-FFF2-40B4-BE49-F238E27FC236}">
@@ -6224,7 +6267,7 @@
 </p:sld>
 </file>
 
-<file path=ppt/slides/slide17.xml><?xml version="1.0" encoding="utf-8"?>
+<file path=ppt/slides/slide15.xml><?xml version="1.0" encoding="utf-8"?>
 <p:sld xmlns:a="http://schemas.openxmlformats.org/drawingml/2006/main" xmlns:r="http://schemas.openxmlformats.org/officeDocument/2006/relationships" xmlns:p="http://schemas.openxmlformats.org/presentationml/2006/main">
   <p:cSld>
     <p:spTree>
@@ -7244,6 +7287,49 @@
           </a:prstGeom>
         </p:spPr>
       </p:pic>
+      <p:sp>
+        <p:nvSpPr>
+          <p:cNvPr id="3" name="文本框 2">
+            <a:extLst>
+              <a:ext uri="{FF2B5EF4-FFF2-40B4-BE49-F238E27FC236}">
+                <a16:creationId xmlns:a16="http://schemas.microsoft.com/office/drawing/2014/main" id="{32F24822-DA41-4BB8-8A89-2A95A58F745A}"/>
+              </a:ext>
+            </a:extLst>
+          </p:cNvPr>
+          <p:cNvSpPr txBox="1"/>
+          <p:nvPr/>
+        </p:nvSpPr>
+        <p:spPr>
+          <a:xfrm>
+            <a:off x="4616858" y="5806789"/>
+            <a:ext cx="2717800" cy="369332"/>
+          </a:xfrm>
+          <a:prstGeom prst="rect">
+            <a:avLst/>
+          </a:prstGeom>
+          <a:noFill/>
+        </p:spPr>
+        <p:txBody>
+          <a:bodyPr wrap="square" rtlCol="0">
+            <a:spAutoFit/>
+          </a:bodyPr>
+          <a:lstStyle/>
+          <a:p>
+            <a:pPr algn="ctr"/>
+            <a:r>
+              <a:rPr lang="zh-CN" altLang="en-US" dirty="0">
+                <a:solidFill>
+                  <a:schemeClr val="accent1">
+                    <a:lumMod val="60000"/>
+                    <a:lumOff val="40000"/>
+                  </a:schemeClr>
+                </a:solidFill>
+              </a:rPr>
+              <a:t>断连法</a:t>
+            </a:r>
+          </a:p>
+        </p:txBody>
+      </p:sp>
     </p:spTree>
     <p:extLst>
       <p:ext uri="{BB962C8B-B14F-4D97-AF65-F5344CB8AC3E}">
@@ -9319,10 +9405,10 @@
       </p:grpSpPr>
       <p:pic>
         <p:nvPicPr>
-          <p:cNvPr id="13" name="图片 12">
-            <a:extLst>
-              <a:ext uri="{FF2B5EF4-FFF2-40B4-BE49-F238E27FC236}">
-                <a16:creationId xmlns:a16="http://schemas.microsoft.com/office/drawing/2014/main" id="{D0E199CB-71BD-49B0-B31A-DCF785EEB054}"/>
+          <p:cNvPr id="3" name="图片 2">
+            <a:extLst>
+              <a:ext uri="{FF2B5EF4-FFF2-40B4-BE49-F238E27FC236}">
+                <a16:creationId xmlns:a16="http://schemas.microsoft.com/office/drawing/2014/main" id="{D0926427-9280-4F02-A404-51E16FF8E923}"/>
               </a:ext>
             </a:extLst>
           </p:cNvPr>
@@ -9355,12 +9441,7 @@
             <p:ph type="title"/>
           </p:nvPr>
         </p:nvSpPr>
-        <p:spPr>
-          <a:xfrm>
-            <a:off x="758300" y="500062"/>
-            <a:ext cx="10515600" cy="1325563"/>
-          </a:xfrm>
-        </p:spPr>
+        <p:spPr/>
         <p:txBody>
           <a:bodyPr>
             <a:normAutofit/>
@@ -9383,289 +9464,63 @@
                   </a:outerShdw>
                 </a:effectLst>
               </a:rPr>
-              <a:t>第一步：两个电脑通过网线连接，一个</a:t>
-            </a:r>
-            <a:r>
-              <a:rPr lang="en-US" altLang="zh-CN" sz="1600" b="1" dirty="0">
-                <a:solidFill>
-                  <a:schemeClr val="accent1">
-                    <a:lumMod val="40000"/>
-                    <a:lumOff val="60000"/>
-                  </a:schemeClr>
-                </a:solidFill>
-                <a:effectLst>
-                  <a:outerShdw blurRad="38100" dist="19050" dir="2700000" algn="tl" rotWithShape="0">
-                    <a:schemeClr val="dk1">
-                      <a:alpha val="40000"/>
-                    </a:schemeClr>
-                  </a:outerShdw>
-                </a:effectLst>
-              </a:rPr>
-              <a:t>IP</a:t>
-            </a:r>
-            <a:r>
-              <a:rPr lang="zh-CN" altLang="en-US" sz="1600" b="1" dirty="0">
-                <a:solidFill>
-                  <a:schemeClr val="accent1">
-                    <a:lumMod val="40000"/>
-                    <a:lumOff val="60000"/>
-                  </a:schemeClr>
-                </a:solidFill>
-                <a:effectLst>
-                  <a:outerShdw blurRad="38100" dist="19050" dir="2700000" algn="tl" rotWithShape="0">
-                    <a:schemeClr val="dk1">
-                      <a:alpha val="40000"/>
-                    </a:schemeClr>
-                  </a:outerShdw>
-                </a:effectLst>
-              </a:rPr>
-              <a:t>地址设置为</a:t>
-            </a:r>
-            <a:r>
-              <a:rPr lang="en-US" altLang="zh-CN" sz="1600" b="1" dirty="0">
-                <a:solidFill>
-                  <a:schemeClr val="accent1">
-                    <a:lumMod val="40000"/>
-                    <a:lumOff val="60000"/>
-                  </a:schemeClr>
-                </a:solidFill>
-                <a:effectLst>
-                  <a:outerShdw blurRad="38100" dist="19050" dir="2700000" algn="tl" rotWithShape="0">
-                    <a:schemeClr val="dk1">
-                      <a:alpha val="40000"/>
-                    </a:schemeClr>
-                  </a:outerShdw>
-                </a:effectLst>
-              </a:rPr>
-              <a:t>192.168.1.11</a:t>
-            </a:r>
-            <a:r>
-              <a:rPr lang="zh-CN" altLang="en-US" sz="1600" b="1" dirty="0">
-                <a:solidFill>
-                  <a:schemeClr val="accent1">
-                    <a:lumMod val="40000"/>
-                    <a:lumOff val="60000"/>
-                  </a:schemeClr>
-                </a:solidFill>
-                <a:effectLst>
-                  <a:outerShdw blurRad="38100" dist="19050" dir="2700000" algn="tl" rotWithShape="0">
-                    <a:schemeClr val="dk1">
-                      <a:alpha val="40000"/>
-                    </a:schemeClr>
-                  </a:outerShdw>
-                </a:effectLst>
-              </a:rPr>
-              <a:t>，一个为</a:t>
-            </a:r>
-            <a:r>
-              <a:rPr lang="en-US" altLang="zh-CN" sz="1600" b="1" dirty="0">
-                <a:solidFill>
-                  <a:schemeClr val="accent1">
-                    <a:lumMod val="40000"/>
-                    <a:lumOff val="60000"/>
-                  </a:schemeClr>
-                </a:solidFill>
-                <a:effectLst>
-                  <a:outerShdw blurRad="38100" dist="19050" dir="2700000" algn="tl" rotWithShape="0">
-                    <a:schemeClr val="dk1">
-                      <a:alpha val="40000"/>
-                    </a:schemeClr>
-                  </a:outerShdw>
-                </a:effectLst>
-              </a:rPr>
-              <a:t>192.168.1.12</a:t>
-            </a:r>
-            <a:r>
-              <a:rPr lang="zh-CN" altLang="en-US" sz="1600" b="1" dirty="0">
-                <a:solidFill>
-                  <a:schemeClr val="accent1">
-                    <a:lumMod val="40000"/>
-                    <a:lumOff val="60000"/>
-                  </a:schemeClr>
-                </a:solidFill>
-                <a:effectLst>
-                  <a:outerShdw blurRad="38100" dist="19050" dir="2700000" algn="tl" rotWithShape="0">
-                    <a:schemeClr val="dk1">
-                      <a:alpha val="40000"/>
-                    </a:schemeClr>
-                  </a:outerShdw>
-                </a:effectLst>
-              </a:rPr>
-              <a:t>，子网掩码相同。用地址为</a:t>
-            </a:r>
-            <a:r>
-              <a:rPr lang="en-US" altLang="zh-CN" sz="1600" b="1" dirty="0">
-                <a:solidFill>
-                  <a:schemeClr val="accent1">
-                    <a:lumMod val="40000"/>
-                    <a:lumOff val="60000"/>
-                  </a:schemeClr>
-                </a:solidFill>
-                <a:effectLst>
-                  <a:outerShdw blurRad="38100" dist="19050" dir="2700000" algn="tl" rotWithShape="0">
-                    <a:schemeClr val="dk1">
-                      <a:alpha val="40000"/>
-                    </a:schemeClr>
-                  </a:outerShdw>
-                </a:effectLst>
-              </a:rPr>
-              <a:t>1.12</a:t>
-            </a:r>
-            <a:r>
-              <a:rPr lang="zh-CN" altLang="en-US" sz="1600" b="1" dirty="0">
-                <a:solidFill>
-                  <a:schemeClr val="accent1">
-                    <a:lumMod val="40000"/>
-                    <a:lumOff val="60000"/>
-                  </a:schemeClr>
-                </a:solidFill>
-                <a:effectLst>
-                  <a:outerShdw blurRad="38100" dist="19050" dir="2700000" algn="tl" rotWithShape="0">
-                    <a:schemeClr val="dk1">
-                      <a:alpha val="40000"/>
-                    </a:schemeClr>
-                  </a:outerShdw>
-                </a:effectLst>
-              </a:rPr>
-              <a:t>的电脑</a:t>
-            </a:r>
-            <a:r>
-              <a:rPr lang="en-US" altLang="zh-CN" sz="1600" b="1" dirty="0">
-                <a:solidFill>
-                  <a:schemeClr val="accent1">
-                    <a:lumMod val="40000"/>
-                    <a:lumOff val="60000"/>
-                  </a:schemeClr>
-                </a:solidFill>
-                <a:effectLst>
-                  <a:outerShdw blurRad="38100" dist="19050" dir="2700000" algn="tl" rotWithShape="0">
-                    <a:schemeClr val="dk1">
-                      <a:alpha val="40000"/>
-                    </a:schemeClr>
-                  </a:outerShdw>
-                </a:effectLst>
-              </a:rPr>
-              <a:t>ping 1.11</a:t>
-            </a:r>
-            <a:r>
-              <a:rPr lang="zh-CN" altLang="en-US" sz="1600" b="1" dirty="0">
-                <a:solidFill>
-                  <a:schemeClr val="accent1">
-                    <a:lumMod val="40000"/>
-                    <a:lumOff val="60000"/>
-                  </a:schemeClr>
-                </a:solidFill>
-                <a:effectLst>
-                  <a:outerShdw blurRad="38100" dist="19050" dir="2700000" algn="tl" rotWithShape="0">
-                    <a:schemeClr val="dk1">
-                      <a:alpha val="40000"/>
-                    </a:schemeClr>
-                  </a:outerShdw>
-                </a:effectLst>
-              </a:rPr>
-              <a:t>，结果如图所示：</a:t>
-            </a:r>
-          </a:p>
-        </p:txBody>
-      </p:sp>
-      <p:sp>
-        <p:nvSpPr>
-          <p:cNvPr id="3" name="文本框 2">
-            <a:extLst>
-              <a:ext uri="{FF2B5EF4-FFF2-40B4-BE49-F238E27FC236}">
-                <a16:creationId xmlns:a16="http://schemas.microsoft.com/office/drawing/2014/main" id="{AE884377-3248-490D-874A-2CC116DDEE4B}"/>
-              </a:ext>
-            </a:extLst>
-          </p:cNvPr>
-          <p:cNvSpPr txBox="1"/>
-          <p:nvPr/>
-        </p:nvSpPr>
-        <p:spPr>
-          <a:xfrm>
-            <a:off x="4514470" y="6268003"/>
-            <a:ext cx="3003259" cy="369332"/>
-          </a:xfrm>
-          <a:prstGeom prst="rect">
-            <a:avLst/>
-          </a:prstGeom>
-          <a:noFill/>
-        </p:spPr>
-        <p:txBody>
-          <a:bodyPr wrap="square" rtlCol="0">
-            <a:spAutoFit/>
-          </a:bodyPr>
-          <a:lstStyle/>
-          <a:p>
-            <a:pPr algn="ctr"/>
-            <a:r>
-              <a:rPr lang="zh-CN" altLang="en-US" dirty="0">
-                <a:solidFill>
-                  <a:schemeClr val="accent1">
-                    <a:lumMod val="40000"/>
-                    <a:lumOff val="60000"/>
-                  </a:schemeClr>
-                </a:solidFill>
-              </a:rPr>
-              <a:t>网线</a:t>
-            </a:r>
-            <a:r>
-              <a:rPr lang="en-US" altLang="zh-CN" dirty="0">
-                <a:solidFill>
-                  <a:schemeClr val="accent1">
-                    <a:lumMod val="40000"/>
-                    <a:lumOff val="60000"/>
-                  </a:schemeClr>
-                </a:solidFill>
-              </a:rPr>
-              <a:t>ping</a:t>
-            </a:r>
-            <a:r>
-              <a:rPr lang="zh-CN" altLang="en-US" dirty="0">
-                <a:solidFill>
-                  <a:schemeClr val="accent1">
-                    <a:lumMod val="40000"/>
-                    <a:lumOff val="60000"/>
-                  </a:schemeClr>
-                </a:solidFill>
-              </a:rPr>
-              <a:t>值</a:t>
+              <a:t>第二步：确认两个电脑已经相连成功后，设置共享使两个队伍能够互相传输文件</a:t>
             </a:r>
           </a:p>
         </p:txBody>
       </p:sp>
       <p:pic>
         <p:nvPicPr>
-          <p:cNvPr id="11" name="内容占位符 10">
-            <a:extLst>
-              <a:ext uri="{FF2B5EF4-FFF2-40B4-BE49-F238E27FC236}">
-                <a16:creationId xmlns:a16="http://schemas.microsoft.com/office/drawing/2014/main" id="{6300D869-3332-4F3B-8E06-4C72F1665153}"/>
-              </a:ext>
-            </a:extLst>
-          </p:cNvPr>
+          <p:cNvPr id="6" name="内容占位符 5"/>
           <p:cNvPicPr>
-            <a:picLocks noGrp="1" noChangeAspect="1"/>
+            <a:picLocks noGrp="1"/>
           </p:cNvPicPr>
           <p:nvPr>
             <p:ph idx="1"/>
           </p:nvPr>
         </p:nvPicPr>
         <p:blipFill>
-          <a:blip r:embed="rId3">
-            <a:extLst>
-              <a:ext uri="{28A0092B-C50C-407E-A947-70E740481C1C}">
-                <a14:useLocalDpi xmlns:a14="http://schemas.microsoft.com/office/drawing/2010/main" val="0"/>
-              </a:ext>
-            </a:extLst>
-          </a:blip>
+          <a:blip r:embed="rId3"/>
           <a:stretch>
             <a:fillRect/>
           </a:stretch>
         </p:blipFill>
         <p:spPr>
           <a:xfrm>
-            <a:off x="3477117" y="1497215"/>
-            <a:ext cx="4943740" cy="4351338"/>
-          </a:xfrm>
+            <a:off x="5922518" y="1676665"/>
+            <a:ext cx="5513617" cy="3714326"/>
+          </a:xfrm>
+          <a:prstGeom prst="rect">
+            <a:avLst/>
+          </a:prstGeom>
+        </p:spPr>
+      </p:pic>
+      <p:pic>
+        <p:nvPicPr>
+          <p:cNvPr id="5" name="图片 4">
+            <a:extLst>
+              <a:ext uri="{FF2B5EF4-FFF2-40B4-BE49-F238E27FC236}">
+                <a16:creationId xmlns:a16="http://schemas.microsoft.com/office/drawing/2014/main" id="{AEBD76FF-2F70-436F-8FCB-D4F09CA1F1A6}"/>
+              </a:ext>
+            </a:extLst>
+          </p:cNvPr>
+          <p:cNvPicPr/>
+          <p:nvPr/>
+        </p:nvPicPr>
+        <p:blipFill>
+          <a:blip r:embed="rId4"/>
+          <a:stretch>
+            <a:fillRect/>
+          </a:stretch>
+        </p:blipFill>
+        <p:spPr>
+          <a:xfrm>
+            <a:off x="755865" y="1495237"/>
+            <a:ext cx="4793126" cy="4050466"/>
+          </a:xfrm>
+          <a:prstGeom prst="rect">
+            <a:avLst/>
+          </a:prstGeom>
         </p:spPr>
       </p:pic>
     </p:spTree>
@@ -9695,10 +9550,10 @@
       </p:grpSpPr>
       <p:pic>
         <p:nvPicPr>
-          <p:cNvPr id="3" name="图片 2">
-            <a:extLst>
-              <a:ext uri="{FF2B5EF4-FFF2-40B4-BE49-F238E27FC236}">
-                <a16:creationId xmlns:a16="http://schemas.microsoft.com/office/drawing/2014/main" id="{D0926427-9280-4F02-A404-51E16FF8E923}"/>
+          <p:cNvPr id="5" name="图片 4">
+            <a:extLst>
+              <a:ext uri="{FF2B5EF4-FFF2-40B4-BE49-F238E27FC236}">
+                <a16:creationId xmlns:a16="http://schemas.microsoft.com/office/drawing/2014/main" id="{4ABE699B-776B-4E38-ACEB-6334ECF6FE86}"/>
               </a:ext>
             </a:extLst>
           </p:cNvPr>
@@ -9731,7 +9586,12 @@
             <p:ph type="title"/>
           </p:nvPr>
         </p:nvSpPr>
-        <p:spPr/>
+        <p:spPr>
+          <a:xfrm>
+            <a:off x="909221" y="400635"/>
+            <a:ext cx="10515600" cy="1325563"/>
+          </a:xfrm>
+        </p:spPr>
         <p:txBody>
           <a:bodyPr>
             <a:normAutofit/>
@@ -9754,7 +9614,7 @@
                   </a:outerShdw>
                 </a:effectLst>
               </a:rPr>
-              <a:t>第二步：确认两个电脑已经相连成功后，设置共享使两个队伍能够互相传输文件</a:t>
+              <a:t>第四步：用一台电脑去访问另一台电脑已经共享的文件，然后将它传到自己这里，速度如图所示：</a:t>
             </a:r>
           </a:p>
         </p:txBody>
@@ -9777,42 +9637,56 @@
         </p:blipFill>
         <p:spPr>
           <a:xfrm>
-            <a:off x="5922518" y="1676665"/>
-            <a:ext cx="5513617" cy="3714326"/>
+            <a:off x="3863146" y="1816091"/>
+            <a:ext cx="4465707" cy="3048264"/>
           </a:xfrm>
           <a:prstGeom prst="rect">
             <a:avLst/>
           </a:prstGeom>
         </p:spPr>
       </p:pic>
-      <p:pic>
-        <p:nvPicPr>
-          <p:cNvPr id="5" name="图片 4">
-            <a:extLst>
-              <a:ext uri="{FF2B5EF4-FFF2-40B4-BE49-F238E27FC236}">
-                <a16:creationId xmlns:a16="http://schemas.microsoft.com/office/drawing/2014/main" id="{AEBD76FF-2F70-436F-8FCB-D4F09CA1F1A6}"/>
-              </a:ext>
-            </a:extLst>
-          </p:cNvPr>
-          <p:cNvPicPr/>
-          <p:nvPr/>
-        </p:nvPicPr>
-        <p:blipFill>
-          <a:blip r:embed="rId4"/>
-          <a:stretch>
-            <a:fillRect/>
-          </a:stretch>
-        </p:blipFill>
-        <p:spPr>
-          <a:xfrm>
-            <a:off x="755865" y="1495237"/>
-            <a:ext cx="4793126" cy="4050466"/>
-          </a:xfrm>
-          <a:prstGeom prst="rect">
-            <a:avLst/>
-          </a:prstGeom>
-        </p:spPr>
-      </p:pic>
+      <p:sp>
+        <p:nvSpPr>
+          <p:cNvPr id="3" name="文本框 2">
+            <a:extLst>
+              <a:ext uri="{FF2B5EF4-FFF2-40B4-BE49-F238E27FC236}">
+                <a16:creationId xmlns:a16="http://schemas.microsoft.com/office/drawing/2014/main" id="{BD499AF5-6131-48F2-ADE0-FA3B2E294C3B}"/>
+              </a:ext>
+            </a:extLst>
+          </p:cNvPr>
+          <p:cNvSpPr txBox="1"/>
+          <p:nvPr/>
+        </p:nvSpPr>
+        <p:spPr>
+          <a:xfrm>
+            <a:off x="5494789" y="5134061"/>
+            <a:ext cx="3657600" cy="369332"/>
+          </a:xfrm>
+          <a:prstGeom prst="rect">
+            <a:avLst/>
+          </a:prstGeom>
+          <a:noFill/>
+        </p:spPr>
+        <p:txBody>
+          <a:bodyPr wrap="square" rtlCol="0">
+            <a:spAutoFit/>
+          </a:bodyPr>
+          <a:lstStyle/>
+          <a:p>
+            <a:r>
+              <a:rPr lang="zh-CN" altLang="en-US" dirty="0">
+                <a:solidFill>
+                  <a:schemeClr val="accent1">
+                    <a:lumMod val="40000"/>
+                    <a:lumOff val="60000"/>
+                  </a:schemeClr>
+                </a:solidFill>
+              </a:rPr>
+              <a:t>网线速度</a:t>
+            </a:r>
+          </a:p>
+        </p:txBody>
+      </p:sp>
     </p:spTree>
   </p:cSld>
   <p:clrMapOvr>
@@ -9840,10 +9714,10 @@
       </p:grpSpPr>
       <p:pic>
         <p:nvPicPr>
-          <p:cNvPr id="5" name="图片 4">
-            <a:extLst>
-              <a:ext uri="{FF2B5EF4-FFF2-40B4-BE49-F238E27FC236}">
-                <a16:creationId xmlns:a16="http://schemas.microsoft.com/office/drawing/2014/main" id="{4ABE699B-776B-4E38-ACEB-6334ECF6FE86}"/>
+          <p:cNvPr id="13" name="图片 12">
+            <a:extLst>
+              <a:ext uri="{FF2B5EF4-FFF2-40B4-BE49-F238E27FC236}">
+                <a16:creationId xmlns:a16="http://schemas.microsoft.com/office/drawing/2014/main" id="{D0E199CB-71BD-49B0-B31A-DCF785EEB054}"/>
               </a:ext>
             </a:extLst>
           </p:cNvPr>
@@ -9878,7 +9752,7 @@
         </p:nvSpPr>
         <p:spPr>
           <a:xfrm>
-            <a:off x="909221" y="400635"/>
+            <a:off x="758300" y="500062"/>
             <a:ext cx="10515600" cy="1325563"/>
           </a:xfrm>
         </p:spPr>
@@ -9904,79 +9778,291 @@
                   </a:outerShdw>
                 </a:effectLst>
               </a:rPr>
-              <a:t>第四步：用一台电脑去访问另一台电脑已经共享的文件，然后将它传到自己这里，速度如图所示：</a:t>
+              <a:t>第一步：两个电脑通过网线连接，一个</a:t>
+            </a:r>
+            <a:r>
+              <a:rPr lang="en-US" altLang="zh-CN" sz="1600" b="1" dirty="0">
+                <a:solidFill>
+                  <a:schemeClr val="accent1">
+                    <a:lumMod val="40000"/>
+                    <a:lumOff val="60000"/>
+                  </a:schemeClr>
+                </a:solidFill>
+                <a:effectLst>
+                  <a:outerShdw blurRad="38100" dist="19050" dir="2700000" algn="tl" rotWithShape="0">
+                    <a:schemeClr val="dk1">
+                      <a:alpha val="40000"/>
+                    </a:schemeClr>
+                  </a:outerShdw>
+                </a:effectLst>
+              </a:rPr>
+              <a:t>IP</a:t>
+            </a:r>
+            <a:r>
+              <a:rPr lang="zh-CN" altLang="en-US" sz="1600" b="1" dirty="0">
+                <a:solidFill>
+                  <a:schemeClr val="accent1">
+                    <a:lumMod val="40000"/>
+                    <a:lumOff val="60000"/>
+                  </a:schemeClr>
+                </a:solidFill>
+                <a:effectLst>
+                  <a:outerShdw blurRad="38100" dist="19050" dir="2700000" algn="tl" rotWithShape="0">
+                    <a:schemeClr val="dk1">
+                      <a:alpha val="40000"/>
+                    </a:schemeClr>
+                  </a:outerShdw>
+                </a:effectLst>
+              </a:rPr>
+              <a:t>地址设置为</a:t>
+            </a:r>
+            <a:r>
+              <a:rPr lang="en-US" altLang="zh-CN" sz="1600" b="1" dirty="0">
+                <a:solidFill>
+                  <a:schemeClr val="accent1">
+                    <a:lumMod val="40000"/>
+                    <a:lumOff val="60000"/>
+                  </a:schemeClr>
+                </a:solidFill>
+                <a:effectLst>
+                  <a:outerShdw blurRad="38100" dist="19050" dir="2700000" algn="tl" rotWithShape="0">
+                    <a:schemeClr val="dk1">
+                      <a:alpha val="40000"/>
+                    </a:schemeClr>
+                  </a:outerShdw>
+                </a:effectLst>
+              </a:rPr>
+              <a:t>192.168.1.11</a:t>
+            </a:r>
+            <a:r>
+              <a:rPr lang="zh-CN" altLang="en-US" sz="1600" b="1" dirty="0">
+                <a:solidFill>
+                  <a:schemeClr val="accent1">
+                    <a:lumMod val="40000"/>
+                    <a:lumOff val="60000"/>
+                  </a:schemeClr>
+                </a:solidFill>
+                <a:effectLst>
+                  <a:outerShdw blurRad="38100" dist="19050" dir="2700000" algn="tl" rotWithShape="0">
+                    <a:schemeClr val="dk1">
+                      <a:alpha val="40000"/>
+                    </a:schemeClr>
+                  </a:outerShdw>
+                </a:effectLst>
+              </a:rPr>
+              <a:t>，一个为</a:t>
+            </a:r>
+            <a:r>
+              <a:rPr lang="en-US" altLang="zh-CN" sz="1600" b="1" dirty="0">
+                <a:solidFill>
+                  <a:schemeClr val="accent1">
+                    <a:lumMod val="40000"/>
+                    <a:lumOff val="60000"/>
+                  </a:schemeClr>
+                </a:solidFill>
+                <a:effectLst>
+                  <a:outerShdw blurRad="38100" dist="19050" dir="2700000" algn="tl" rotWithShape="0">
+                    <a:schemeClr val="dk1">
+                      <a:alpha val="40000"/>
+                    </a:schemeClr>
+                  </a:outerShdw>
+                </a:effectLst>
+              </a:rPr>
+              <a:t>192.168.1.12</a:t>
+            </a:r>
+            <a:r>
+              <a:rPr lang="zh-CN" altLang="en-US" sz="1600" b="1" dirty="0">
+                <a:solidFill>
+                  <a:schemeClr val="accent1">
+                    <a:lumMod val="40000"/>
+                    <a:lumOff val="60000"/>
+                  </a:schemeClr>
+                </a:solidFill>
+                <a:effectLst>
+                  <a:outerShdw blurRad="38100" dist="19050" dir="2700000" algn="tl" rotWithShape="0">
+                    <a:schemeClr val="dk1">
+                      <a:alpha val="40000"/>
+                    </a:schemeClr>
+                  </a:outerShdw>
+                </a:effectLst>
+              </a:rPr>
+              <a:t>，子网掩码相同。用地址为</a:t>
+            </a:r>
+            <a:r>
+              <a:rPr lang="en-US" altLang="zh-CN" sz="1600" b="1" dirty="0">
+                <a:solidFill>
+                  <a:schemeClr val="accent1">
+                    <a:lumMod val="40000"/>
+                    <a:lumOff val="60000"/>
+                  </a:schemeClr>
+                </a:solidFill>
+                <a:effectLst>
+                  <a:outerShdw blurRad="38100" dist="19050" dir="2700000" algn="tl" rotWithShape="0">
+                    <a:schemeClr val="dk1">
+                      <a:alpha val="40000"/>
+                    </a:schemeClr>
+                  </a:outerShdw>
+                </a:effectLst>
+              </a:rPr>
+              <a:t>1.12</a:t>
+            </a:r>
+            <a:r>
+              <a:rPr lang="zh-CN" altLang="en-US" sz="1600" b="1" dirty="0">
+                <a:solidFill>
+                  <a:schemeClr val="accent1">
+                    <a:lumMod val="40000"/>
+                    <a:lumOff val="60000"/>
+                  </a:schemeClr>
+                </a:solidFill>
+                <a:effectLst>
+                  <a:outerShdw blurRad="38100" dist="19050" dir="2700000" algn="tl" rotWithShape="0">
+                    <a:schemeClr val="dk1">
+                      <a:alpha val="40000"/>
+                    </a:schemeClr>
+                  </a:outerShdw>
+                </a:effectLst>
+              </a:rPr>
+              <a:t>的电脑</a:t>
+            </a:r>
+            <a:r>
+              <a:rPr lang="en-US" altLang="zh-CN" sz="1600" b="1" dirty="0">
+                <a:solidFill>
+                  <a:schemeClr val="accent1">
+                    <a:lumMod val="40000"/>
+                    <a:lumOff val="60000"/>
+                  </a:schemeClr>
+                </a:solidFill>
+                <a:effectLst>
+                  <a:outerShdw blurRad="38100" dist="19050" dir="2700000" algn="tl" rotWithShape="0">
+                    <a:schemeClr val="dk1">
+                      <a:alpha val="40000"/>
+                    </a:schemeClr>
+                  </a:outerShdw>
+                </a:effectLst>
+              </a:rPr>
+              <a:t>ping 1.11</a:t>
+            </a:r>
+            <a:r>
+              <a:rPr lang="zh-CN" altLang="en-US" sz="1600" b="1" dirty="0">
+                <a:solidFill>
+                  <a:schemeClr val="accent1">
+                    <a:lumMod val="40000"/>
+                    <a:lumOff val="60000"/>
+                  </a:schemeClr>
+                </a:solidFill>
+                <a:effectLst>
+                  <a:outerShdw blurRad="38100" dist="19050" dir="2700000" algn="tl" rotWithShape="0">
+                    <a:schemeClr val="dk1">
+                      <a:alpha val="40000"/>
+                    </a:schemeClr>
+                  </a:outerShdw>
+                </a:effectLst>
+              </a:rPr>
+              <a:t>，结果如图所示：</a:t>
+            </a:r>
+          </a:p>
+        </p:txBody>
+      </p:sp>
+      <p:sp>
+        <p:nvSpPr>
+          <p:cNvPr id="3" name="文本框 2">
+            <a:extLst>
+              <a:ext uri="{FF2B5EF4-FFF2-40B4-BE49-F238E27FC236}">
+                <a16:creationId xmlns:a16="http://schemas.microsoft.com/office/drawing/2014/main" id="{AE884377-3248-490D-874A-2CC116DDEE4B}"/>
+              </a:ext>
+            </a:extLst>
+          </p:cNvPr>
+          <p:cNvSpPr txBox="1"/>
+          <p:nvPr/>
+        </p:nvSpPr>
+        <p:spPr>
+          <a:xfrm>
+            <a:off x="4514470" y="6268003"/>
+            <a:ext cx="3003259" cy="369332"/>
+          </a:xfrm>
+          <a:prstGeom prst="rect">
+            <a:avLst/>
+          </a:prstGeom>
+          <a:noFill/>
+        </p:spPr>
+        <p:txBody>
+          <a:bodyPr wrap="square" rtlCol="0">
+            <a:spAutoFit/>
+          </a:bodyPr>
+          <a:lstStyle/>
+          <a:p>
+            <a:pPr algn="ctr"/>
+            <a:r>
+              <a:rPr lang="zh-CN" altLang="en-US" dirty="0">
+                <a:solidFill>
+                  <a:schemeClr val="accent1">
+                    <a:lumMod val="40000"/>
+                    <a:lumOff val="60000"/>
+                  </a:schemeClr>
+                </a:solidFill>
+              </a:rPr>
+              <a:t>网线</a:t>
+            </a:r>
+            <a:r>
+              <a:rPr lang="en-US" altLang="zh-CN" dirty="0">
+                <a:solidFill>
+                  <a:schemeClr val="accent1">
+                    <a:lumMod val="40000"/>
+                    <a:lumOff val="60000"/>
+                  </a:schemeClr>
+                </a:solidFill>
+              </a:rPr>
+              <a:t>ping</a:t>
+            </a:r>
+            <a:r>
+              <a:rPr lang="zh-CN" altLang="en-US" dirty="0">
+                <a:solidFill>
+                  <a:schemeClr val="accent1">
+                    <a:lumMod val="40000"/>
+                    <a:lumOff val="60000"/>
+                  </a:schemeClr>
+                </a:solidFill>
+              </a:rPr>
+              <a:t>值</a:t>
             </a:r>
           </a:p>
         </p:txBody>
       </p:sp>
       <p:pic>
         <p:nvPicPr>
-          <p:cNvPr id="6" name="内容占位符 5"/>
+          <p:cNvPr id="11" name="内容占位符 10">
+            <a:extLst>
+              <a:ext uri="{FF2B5EF4-FFF2-40B4-BE49-F238E27FC236}">
+                <a16:creationId xmlns:a16="http://schemas.microsoft.com/office/drawing/2014/main" id="{6300D869-3332-4F3B-8E06-4C72F1665153}"/>
+              </a:ext>
+            </a:extLst>
+          </p:cNvPr>
           <p:cNvPicPr>
-            <a:picLocks noGrp="1"/>
+            <a:picLocks noGrp="1" noChangeAspect="1"/>
           </p:cNvPicPr>
           <p:nvPr>
             <p:ph idx="1"/>
           </p:nvPr>
         </p:nvPicPr>
         <p:blipFill>
-          <a:blip r:embed="rId3"/>
+          <a:blip r:embed="rId3">
+            <a:extLst>
+              <a:ext uri="{28A0092B-C50C-407E-A947-70E740481C1C}">
+                <a14:useLocalDpi xmlns:a14="http://schemas.microsoft.com/office/drawing/2010/main" val="0"/>
+              </a:ext>
+            </a:extLst>
+          </a:blip>
           <a:stretch>
             <a:fillRect/>
           </a:stretch>
         </p:blipFill>
         <p:spPr>
           <a:xfrm>
-            <a:off x="3863146" y="1816091"/>
-            <a:ext cx="4465707" cy="3048264"/>
-          </a:xfrm>
-          <a:prstGeom prst="rect">
-            <a:avLst/>
-          </a:prstGeom>
+            <a:off x="3477117" y="1497215"/>
+            <a:ext cx="4943740" cy="4351338"/>
+          </a:xfrm>
         </p:spPr>
       </p:pic>
-      <p:sp>
-        <p:nvSpPr>
-          <p:cNvPr id="3" name="文本框 2">
-            <a:extLst>
-              <a:ext uri="{FF2B5EF4-FFF2-40B4-BE49-F238E27FC236}">
-                <a16:creationId xmlns:a16="http://schemas.microsoft.com/office/drawing/2014/main" id="{BD499AF5-6131-48F2-ADE0-FA3B2E294C3B}"/>
-              </a:ext>
-            </a:extLst>
-          </p:cNvPr>
-          <p:cNvSpPr txBox="1"/>
-          <p:nvPr/>
-        </p:nvSpPr>
-        <p:spPr>
-          <a:xfrm>
-            <a:off x="5494789" y="5134061"/>
-            <a:ext cx="3657600" cy="369332"/>
-          </a:xfrm>
-          <a:prstGeom prst="rect">
-            <a:avLst/>
-          </a:prstGeom>
-          <a:noFill/>
-        </p:spPr>
-        <p:txBody>
-          <a:bodyPr wrap="square" rtlCol="0">
-            <a:spAutoFit/>
-          </a:bodyPr>
-          <a:lstStyle/>
-          <a:p>
-            <a:r>
-              <a:rPr lang="zh-CN" altLang="en-US" dirty="0">
-                <a:solidFill>
-                  <a:schemeClr val="accent1">
-                    <a:lumMod val="40000"/>
-                    <a:lumOff val="60000"/>
-                  </a:schemeClr>
-                </a:solidFill>
-              </a:rPr>
-              <a:t>网线速度</a:t>
-            </a:r>
-          </a:p>
-        </p:txBody>
-      </p:sp>
     </p:spTree>
   </p:cSld>
   <p:clrMapOvr>
@@ -10182,10 +10268,10 @@
       </p:grpSpPr>
       <p:pic>
         <p:nvPicPr>
-          <p:cNvPr id="9" name="图片 8">
-            <a:extLst>
-              <a:ext uri="{FF2B5EF4-FFF2-40B4-BE49-F238E27FC236}">
-                <a16:creationId xmlns:a16="http://schemas.microsoft.com/office/drawing/2014/main" id="{3712C671-C2BE-4DA5-969C-C12BA63CD97C}"/>
+          <p:cNvPr id="3" name="图片 2">
+            <a:extLst>
+              <a:ext uri="{FF2B5EF4-FFF2-40B4-BE49-F238E27FC236}">
+                <a16:creationId xmlns:a16="http://schemas.microsoft.com/office/drawing/2014/main" id="{31BF2E65-B3D3-4161-A002-27E31AD02B55}"/>
               </a:ext>
             </a:extLst>
           </p:cNvPr>
@@ -10241,238 +10327,20 @@
                   </a:outerShdw>
                 </a:effectLst>
               </a:rPr>
-              <a:t>第六步：设置无线</a:t>
-            </a:r>
-            <a:r>
-              <a:rPr lang="en-US" altLang="zh-CN" sz="1600" b="1" dirty="0">
-                <a:solidFill>
-                  <a:schemeClr val="accent1">
-                    <a:lumMod val="40000"/>
-                    <a:lumOff val="60000"/>
-                  </a:schemeClr>
-                </a:solidFill>
-                <a:effectLst>
-                  <a:outerShdw blurRad="38100" dist="19050" dir="2700000" algn="tl" rotWithShape="0">
-                    <a:schemeClr val="dk1">
-                      <a:alpha val="40000"/>
-                    </a:schemeClr>
-                  </a:outerShdw>
-                </a:effectLst>
-              </a:rPr>
-              <a:t>IP</a:t>
-            </a:r>
-            <a:r>
-              <a:rPr lang="zh-CN" altLang="en-US" sz="1600" b="1" dirty="0">
-                <a:solidFill>
-                  <a:schemeClr val="accent1">
-                    <a:lumMod val="40000"/>
-                    <a:lumOff val="60000"/>
-                  </a:schemeClr>
-                </a:solidFill>
-                <a:effectLst>
-                  <a:outerShdw blurRad="38100" dist="19050" dir="2700000" algn="tl" rotWithShape="0">
-                    <a:schemeClr val="dk1">
-                      <a:alpha val="40000"/>
-                    </a:schemeClr>
-                  </a:outerShdw>
-                </a:effectLst>
-              </a:rPr>
-              <a:t>地址，一个电脑为</a:t>
-            </a:r>
-            <a:r>
-              <a:rPr lang="en-US" altLang="zh-CN" sz="1600" b="1" dirty="0">
-                <a:solidFill>
-                  <a:schemeClr val="accent1">
-                    <a:lumMod val="40000"/>
-                    <a:lumOff val="60000"/>
-                  </a:schemeClr>
-                </a:solidFill>
-                <a:effectLst>
-                  <a:outerShdw blurRad="38100" dist="19050" dir="2700000" algn="tl" rotWithShape="0">
-                    <a:schemeClr val="dk1">
-                      <a:alpha val="40000"/>
-                    </a:schemeClr>
-                  </a:outerShdw>
-                </a:effectLst>
-              </a:rPr>
-              <a:t>192.168.1.11</a:t>
-            </a:r>
-            <a:r>
-              <a:rPr lang="zh-CN" altLang="en-US" sz="1600" b="1" dirty="0">
-                <a:solidFill>
-                  <a:schemeClr val="accent1">
-                    <a:lumMod val="40000"/>
-                    <a:lumOff val="60000"/>
-                  </a:schemeClr>
-                </a:solidFill>
-                <a:effectLst>
-                  <a:outerShdw blurRad="38100" dist="19050" dir="2700000" algn="tl" rotWithShape="0">
-                    <a:schemeClr val="dk1">
-                      <a:alpha val="40000"/>
-                    </a:schemeClr>
-                  </a:outerShdw>
-                </a:effectLst>
-              </a:rPr>
-              <a:t>，一个电脑为</a:t>
-            </a:r>
-            <a:r>
-              <a:rPr lang="en-US" altLang="zh-CN" sz="1600" b="1" dirty="0">
-                <a:solidFill>
-                  <a:schemeClr val="accent1">
-                    <a:lumMod val="40000"/>
-                    <a:lumOff val="60000"/>
-                  </a:schemeClr>
-                </a:solidFill>
-                <a:effectLst>
-                  <a:outerShdw blurRad="38100" dist="19050" dir="2700000" algn="tl" rotWithShape="0">
-                    <a:schemeClr val="dk1">
-                      <a:alpha val="40000"/>
-                    </a:schemeClr>
-                  </a:outerShdw>
-                </a:effectLst>
-              </a:rPr>
-              <a:t>192.168.1.22</a:t>
-            </a:r>
-            <a:r>
-              <a:rPr lang="zh-CN" altLang="en-US" sz="1600" b="1" dirty="0">
-                <a:solidFill>
-                  <a:schemeClr val="accent1">
-                    <a:lumMod val="40000"/>
-                    <a:lumOff val="60000"/>
-                  </a:schemeClr>
-                </a:solidFill>
-                <a:effectLst>
-                  <a:outerShdw blurRad="38100" dist="19050" dir="2700000" algn="tl" rotWithShape="0">
-                    <a:schemeClr val="dk1">
-                      <a:alpha val="40000"/>
-                    </a:schemeClr>
-                  </a:outerShdw>
-                </a:effectLst>
-              </a:rPr>
-              <a:t>，用</a:t>
-            </a:r>
-            <a:r>
-              <a:rPr lang="en-US" altLang="zh-CN" sz="1600" b="1" dirty="0">
-                <a:solidFill>
-                  <a:schemeClr val="accent1">
-                    <a:lumMod val="40000"/>
-                    <a:lumOff val="60000"/>
-                  </a:schemeClr>
-                </a:solidFill>
-                <a:effectLst>
-                  <a:outerShdw blurRad="38100" dist="19050" dir="2700000" algn="tl" rotWithShape="0">
-                    <a:schemeClr val="dk1">
-                      <a:alpha val="40000"/>
-                    </a:schemeClr>
-                  </a:outerShdw>
-                </a:effectLst>
-              </a:rPr>
-              <a:t>IP</a:t>
-            </a:r>
-            <a:r>
-              <a:rPr lang="zh-CN" altLang="en-US" sz="1600" b="1" dirty="0">
-                <a:solidFill>
-                  <a:schemeClr val="accent1">
-                    <a:lumMod val="40000"/>
-                    <a:lumOff val="60000"/>
-                  </a:schemeClr>
-                </a:solidFill>
-                <a:effectLst>
-                  <a:outerShdw blurRad="38100" dist="19050" dir="2700000" algn="tl" rotWithShape="0">
-                    <a:schemeClr val="dk1">
-                      <a:alpha val="40000"/>
-                    </a:schemeClr>
-                  </a:outerShdw>
-                </a:effectLst>
-              </a:rPr>
-              <a:t>地址为</a:t>
-            </a:r>
-            <a:r>
-              <a:rPr lang="en-US" altLang="zh-CN" sz="1600" b="1" dirty="0">
-                <a:solidFill>
-                  <a:schemeClr val="accent1">
-                    <a:lumMod val="40000"/>
-                    <a:lumOff val="60000"/>
-                  </a:schemeClr>
-                </a:solidFill>
-                <a:effectLst>
-                  <a:outerShdw blurRad="38100" dist="19050" dir="2700000" algn="tl" rotWithShape="0">
-                    <a:schemeClr val="dk1">
-                      <a:alpha val="40000"/>
-                    </a:schemeClr>
-                  </a:outerShdw>
-                </a:effectLst>
-              </a:rPr>
-              <a:t>192.168.1.11</a:t>
-            </a:r>
-            <a:r>
-              <a:rPr lang="zh-CN" altLang="en-US" sz="1600" b="1" dirty="0">
-                <a:solidFill>
-                  <a:schemeClr val="accent1">
-                    <a:lumMod val="40000"/>
-                    <a:lumOff val="60000"/>
-                  </a:schemeClr>
-                </a:solidFill>
-                <a:effectLst>
-                  <a:outerShdw blurRad="38100" dist="19050" dir="2700000" algn="tl" rotWithShape="0">
-                    <a:schemeClr val="dk1">
-                      <a:alpha val="40000"/>
-                    </a:schemeClr>
-                  </a:outerShdw>
-                </a:effectLst>
-              </a:rPr>
-              <a:t>的电脑去</a:t>
-            </a:r>
-            <a:r>
-              <a:rPr lang="en-US" altLang="zh-CN" sz="1600" b="1" dirty="0">
-                <a:solidFill>
-                  <a:schemeClr val="accent1">
-                    <a:lumMod val="40000"/>
-                    <a:lumOff val="60000"/>
-                  </a:schemeClr>
-                </a:solidFill>
-                <a:effectLst>
-                  <a:outerShdw blurRad="38100" dist="19050" dir="2700000" algn="tl" rotWithShape="0">
-                    <a:schemeClr val="dk1">
-                      <a:alpha val="40000"/>
-                    </a:schemeClr>
-                  </a:outerShdw>
-                </a:effectLst>
-              </a:rPr>
-              <a:t>ping192.168.1.22</a:t>
-            </a:r>
-            <a:r>
-              <a:rPr lang="zh-CN" altLang="en-US" sz="1600" b="1" dirty="0">
-                <a:solidFill>
-                  <a:schemeClr val="accent1">
-                    <a:lumMod val="40000"/>
-                    <a:lumOff val="60000"/>
-                  </a:schemeClr>
-                </a:solidFill>
-                <a:effectLst>
-                  <a:outerShdw blurRad="38100" dist="19050" dir="2700000" algn="tl" rotWithShape="0">
-                    <a:schemeClr val="dk1">
-                      <a:alpha val="40000"/>
-                    </a:schemeClr>
-                  </a:outerShdw>
-                </a:effectLst>
-              </a:rPr>
-              <a:t>，结果如图所示：</a:t>
+              <a:t>第七步：重复用一台电脑去访问另一台电脑已经共享的文件，然后将它传到自己这里</a:t>
             </a:r>
           </a:p>
         </p:txBody>
       </p:sp>
       <p:pic>
         <p:nvPicPr>
-          <p:cNvPr id="8" name="图片 7">
-            <a:extLst>
-              <a:ext uri="{FF2B5EF4-FFF2-40B4-BE49-F238E27FC236}">
-                <a16:creationId xmlns:a16="http://schemas.microsoft.com/office/drawing/2014/main" id="{A176990C-3C27-4C8F-A399-6BE4110CF1AB}"/>
-              </a:ext>
-            </a:extLst>
-          </p:cNvPr>
-          <p:cNvPicPr/>
-          <p:nvPr/>
+          <p:cNvPr id="6" name="内容占位符 5"/>
+          <p:cNvPicPr>
+            <a:picLocks noGrp="1"/>
+          </p:cNvPicPr>
+          <p:nvPr>
+            <p:ph idx="1"/>
+          </p:nvPr>
         </p:nvPicPr>
         <p:blipFill>
           <a:blip r:embed="rId3"/>
@@ -10482,79 +10350,36 @@
         </p:blipFill>
         <p:spPr>
           <a:xfrm>
-            <a:off x="2211010" y="1690688"/>
-            <a:ext cx="7769980" cy="4638040"/>
+            <a:off x="908375" y="2148884"/>
+            <a:ext cx="4160881" cy="2781541"/>
           </a:xfrm>
           <a:prstGeom prst="rect">
             <a:avLst/>
           </a:prstGeom>
         </p:spPr>
       </p:pic>
-      <p:sp>
-        <p:nvSpPr>
-          <p:cNvPr id="7" name="文本框 6">
-            <a:extLst>
-              <a:ext uri="{FF2B5EF4-FFF2-40B4-BE49-F238E27FC236}">
-                <a16:creationId xmlns:a16="http://schemas.microsoft.com/office/drawing/2014/main" id="{3F1B2F8E-DF77-446F-ACFE-6566BF30BBF6}"/>
-              </a:ext>
-            </a:extLst>
-          </p:cNvPr>
-          <p:cNvSpPr txBox="1"/>
-          <p:nvPr/>
-        </p:nvSpPr>
-        <p:spPr>
-          <a:xfrm>
-            <a:off x="4409813" y="6673334"/>
-            <a:ext cx="3372374" cy="369332"/>
-          </a:xfrm>
-          <a:prstGeom prst="rect">
-            <a:avLst/>
-          </a:prstGeom>
-          <a:noFill/>
-        </p:spPr>
-        <p:txBody>
-          <a:bodyPr wrap="square" rtlCol="0">
-            <a:spAutoFit/>
-          </a:bodyPr>
-          <a:lstStyle/>
-          <a:p>
-            <a:pPr algn="ctr"/>
-            <a:r>
-              <a:rPr lang="zh-CN" altLang="en-US" dirty="0">
-                <a:solidFill>
-                  <a:schemeClr val="accent1">
-                    <a:lumMod val="40000"/>
-                    <a:lumOff val="60000"/>
-                  </a:schemeClr>
-                </a:solidFill>
-              </a:rPr>
-              <a:t>网线</a:t>
-            </a:r>
-            <a:r>
-              <a:rPr lang="en-US" altLang="zh-CN" dirty="0">
-                <a:solidFill>
-                  <a:schemeClr val="accent1">
-                    <a:lumMod val="40000"/>
-                    <a:lumOff val="60000"/>
-                  </a:schemeClr>
-                </a:solidFill>
-              </a:rPr>
-              <a:t>ping</a:t>
-            </a:r>
-            <a:r>
-              <a:rPr lang="zh-CN" altLang="en-US" dirty="0">
-                <a:solidFill>
-                  <a:schemeClr val="accent1">
-                    <a:lumMod val="40000"/>
-                    <a:lumOff val="60000"/>
-                  </a:schemeClr>
-                </a:solidFill>
-              </a:rPr>
-              <a:t>值</a:t>
-            </a:r>
-          </a:p>
-        </p:txBody>
-      </p:sp>
+      <p:pic>
+        <p:nvPicPr>
+          <p:cNvPr id="9" name="图片 8"/>
+          <p:cNvPicPr/>
+          <p:nvPr/>
+        </p:nvPicPr>
+        <p:blipFill>
+          <a:blip r:embed="rId4"/>
+          <a:stretch>
+            <a:fillRect/>
+          </a:stretch>
+        </p:blipFill>
+        <p:spPr>
+          <a:xfrm>
+            <a:off x="6247882" y="2057400"/>
+            <a:ext cx="4099560" cy="2743200"/>
+          </a:xfrm>
+          <a:prstGeom prst="rect">
+            <a:avLst/>
+          </a:prstGeom>
+        </p:spPr>
+      </p:pic>
     </p:spTree>
   </p:cSld>
   <p:clrMapOvr>

--- a/other/204实验.pptx
+++ b/other/204实验.pptx
@@ -20,6 +20,7 @@
     <p:sldId id="269" r:id="rId14"/>
     <p:sldId id="273" r:id="rId15"/>
     <p:sldId id="272" r:id="rId16"/>
+    <p:sldId id="274" r:id="rId17"/>
   </p:sldIdLst>
   <p:sldSz cx="12192000" cy="6858000"/>
   <p:notesSz cx="6858000" cy="9144000"/>
@@ -255,7 +256,7 @@
           <a:p>
             <a:fld id="{C1204EAE-C964-486C-9112-A587BFBBD611}" type="datetimeFigureOut">
               <a:rPr lang="zh-CN" altLang="en-US" smtClean="0"/>
-              <a:t>2020/11/3</a:t>
+              <a:t>2020/11/4</a:t>
             </a:fld>
             <a:endParaRPr lang="zh-CN" altLang="en-US"/>
           </a:p>
@@ -418,7 +419,7 @@
           <a:p>
             <a:fld id="{C1204EAE-C964-486C-9112-A587BFBBD611}" type="datetimeFigureOut">
               <a:rPr lang="zh-CN" altLang="en-US" smtClean="0"/>
-              <a:t>2020/11/3</a:t>
+              <a:t>2020/11/4</a:t>
             </a:fld>
             <a:endParaRPr lang="zh-CN" altLang="en-US"/>
           </a:p>
@@ -591,7 +592,7 @@
           <a:p>
             <a:fld id="{C1204EAE-C964-486C-9112-A587BFBBD611}" type="datetimeFigureOut">
               <a:rPr lang="zh-CN" altLang="en-US" smtClean="0"/>
-              <a:t>2020/11/3</a:t>
+              <a:t>2020/11/4</a:t>
             </a:fld>
             <a:endParaRPr lang="zh-CN" altLang="en-US"/>
           </a:p>
@@ -754,7 +755,7 @@
           <a:p>
             <a:fld id="{C1204EAE-C964-486C-9112-A587BFBBD611}" type="datetimeFigureOut">
               <a:rPr lang="zh-CN" altLang="en-US" smtClean="0"/>
-              <a:t>2020/11/3</a:t>
+              <a:t>2020/11/4</a:t>
             </a:fld>
             <a:endParaRPr lang="zh-CN" altLang="en-US"/>
           </a:p>
@@ -994,7 +995,7 @@
           <a:p>
             <a:fld id="{C1204EAE-C964-486C-9112-A587BFBBD611}" type="datetimeFigureOut">
               <a:rPr lang="zh-CN" altLang="en-US" smtClean="0"/>
-              <a:t>2020/11/3</a:t>
+              <a:t>2020/11/4</a:t>
             </a:fld>
             <a:endParaRPr lang="zh-CN" altLang="en-US"/>
           </a:p>
@@ -1218,7 +1219,7 @@
           <a:p>
             <a:fld id="{C1204EAE-C964-486C-9112-A587BFBBD611}" type="datetimeFigureOut">
               <a:rPr lang="zh-CN" altLang="en-US" smtClean="0"/>
-              <a:t>2020/11/3</a:t>
+              <a:t>2020/11/4</a:t>
             </a:fld>
             <a:endParaRPr lang="zh-CN" altLang="en-US"/>
           </a:p>
@@ -1577,7 +1578,7 @@
           <a:p>
             <a:fld id="{C1204EAE-C964-486C-9112-A587BFBBD611}" type="datetimeFigureOut">
               <a:rPr lang="zh-CN" altLang="en-US" smtClean="0"/>
-              <a:t>2020/11/3</a:t>
+              <a:t>2020/11/4</a:t>
             </a:fld>
             <a:endParaRPr lang="zh-CN" altLang="en-US"/>
           </a:p>
@@ -1689,7 +1690,7 @@
           <a:p>
             <a:fld id="{C1204EAE-C964-486C-9112-A587BFBBD611}" type="datetimeFigureOut">
               <a:rPr lang="zh-CN" altLang="en-US" smtClean="0"/>
-              <a:t>2020/11/3</a:t>
+              <a:t>2020/11/4</a:t>
             </a:fld>
             <a:endParaRPr lang="zh-CN" altLang="en-US"/>
           </a:p>
@@ -1779,7 +1780,7 @@
           <a:p>
             <a:fld id="{C1204EAE-C964-486C-9112-A587BFBBD611}" type="datetimeFigureOut">
               <a:rPr lang="zh-CN" altLang="en-US" smtClean="0"/>
-              <a:t>2020/11/3</a:t>
+              <a:t>2020/11/4</a:t>
             </a:fld>
             <a:endParaRPr lang="zh-CN" altLang="en-US"/>
           </a:p>
@@ -2049,7 +2050,7 @@
           <a:p>
             <a:fld id="{C1204EAE-C964-486C-9112-A587BFBBD611}" type="datetimeFigureOut">
               <a:rPr lang="zh-CN" altLang="en-US" smtClean="0"/>
-              <a:t>2020/11/3</a:t>
+              <a:t>2020/11/4</a:t>
             </a:fld>
             <a:endParaRPr lang="zh-CN" altLang="en-US"/>
           </a:p>
@@ -2296,7 +2297,7 @@
           <a:p>
             <a:fld id="{C1204EAE-C964-486C-9112-A587BFBBD611}" type="datetimeFigureOut">
               <a:rPr lang="zh-CN" altLang="en-US" smtClean="0"/>
-              <a:t>2020/11/3</a:t>
+              <a:t>2020/11/4</a:t>
             </a:fld>
             <a:endParaRPr lang="zh-CN" altLang="en-US"/>
           </a:p>
@@ -2502,7 +2503,7 @@
           <a:p>
             <a:fld id="{C1204EAE-C964-486C-9112-A587BFBBD611}" type="datetimeFigureOut">
               <a:rPr lang="zh-CN" altLang="en-US" smtClean="0"/>
-              <a:t>2020/11/3</a:t>
+              <a:t>2020/11/4</a:t>
             </a:fld>
             <a:endParaRPr lang="zh-CN" altLang="en-US"/>
           </a:p>
@@ -3138,7 +3139,7 @@
                   </a:outerShdw>
                 </a:effectLst>
               </a:rPr>
-              <a:t>第六步：设置无线</a:t>
+              <a:t>设置无线</a:t>
             </a:r>
             <a:r>
               <a:rPr lang="en-US" altLang="zh-CN" sz="1600" b="1" dirty="0">
@@ -3650,8 +3651,8 @@
         </p:blipFill>
         <p:spPr>
           <a:xfrm>
-            <a:off x="2312368" y="1351178"/>
-            <a:ext cx="7163800" cy="2038635"/>
+            <a:off x="2312368" y="740837"/>
+            <a:ext cx="6026289" cy="1714928"/>
           </a:xfrm>
           <a:prstGeom prst="rect">
             <a:avLst/>
@@ -3686,8 +3687,8 @@
         </p:blipFill>
         <p:spPr>
           <a:xfrm>
-            <a:off x="1183454" y="3682253"/>
-            <a:ext cx="3801005" cy="2200582"/>
+            <a:off x="1987097" y="2833498"/>
+            <a:ext cx="2977486" cy="1723808"/>
           </a:xfrm>
           <a:prstGeom prst="rect">
             <a:avLst/>
@@ -3722,8 +3723,8 @@
         </p:blipFill>
         <p:spPr>
           <a:xfrm>
-            <a:off x="5799689" y="3844200"/>
-            <a:ext cx="5627415" cy="2038635"/>
+            <a:off x="5400815" y="2820743"/>
+            <a:ext cx="4758253" cy="1723765"/>
           </a:xfrm>
           <a:prstGeom prst="rect">
             <a:avLst/>
@@ -3748,19 +3749,19 @@
         </p:nvSpPr>
         <p:spPr>
           <a:xfrm>
-            <a:off x="1806180" y="480213"/>
-            <a:ext cx="7987018" cy="740471"/>
+            <a:off x="2312368" y="480214"/>
+            <a:ext cx="7480830" cy="207684"/>
           </a:xfrm>
         </p:spPr>
         <p:txBody>
           <a:bodyPr>
-            <a:normAutofit/>
+            <a:noAutofit/>
           </a:bodyPr>
           <a:lstStyle/>
           <a:p>
             <a:pPr algn="ctr"/>
             <a:r>
-              <a:rPr lang="zh-CN" altLang="en-US" sz="3600" b="1" dirty="0">
+              <a:rPr lang="zh-CN" altLang="en-US" sz="1400" b="1" dirty="0">
                 <a:solidFill>
                   <a:schemeClr val="tx2">
                     <a:lumMod val="60000"/>
@@ -3776,6 +3777,135 @@
                 </a:effectLst>
               </a:rPr>
               <a:t>回到开始，看一看原理</a:t>
+            </a:r>
+          </a:p>
+        </p:txBody>
+      </p:sp>
+      <p:sp>
+        <p:nvSpPr>
+          <p:cNvPr id="3" name="文本框 2">
+            <a:extLst>
+              <a:ext uri="{FF2B5EF4-FFF2-40B4-BE49-F238E27FC236}">
+                <a16:creationId xmlns:a16="http://schemas.microsoft.com/office/drawing/2014/main" id="{95732195-D6C7-4FFC-BCC7-BF6B876A68D3}"/>
+              </a:ext>
+            </a:extLst>
+          </p:cNvPr>
+          <p:cNvSpPr txBox="1"/>
+          <p:nvPr/>
+        </p:nvSpPr>
+        <p:spPr>
+          <a:xfrm>
+            <a:off x="2057802" y="4840448"/>
+            <a:ext cx="6686026" cy="646331"/>
+          </a:xfrm>
+          <a:prstGeom prst="rect">
+            <a:avLst/>
+          </a:prstGeom>
+          <a:noFill/>
+        </p:spPr>
+        <p:txBody>
+          <a:bodyPr wrap="square" rtlCol="0">
+            <a:spAutoFit/>
+          </a:bodyPr>
+          <a:lstStyle/>
+          <a:p>
+            <a:r>
+              <a:rPr lang="zh-CN" altLang="en-US" dirty="0">
+                <a:solidFill>
+                  <a:schemeClr val="accent1">
+                    <a:lumMod val="60000"/>
+                    <a:lumOff val="40000"/>
+                  </a:schemeClr>
+                </a:solidFill>
+              </a:rPr>
+              <a:t>经过实验：访问</a:t>
+            </a:r>
+            <a:r>
+              <a:rPr lang="en-US" altLang="zh-CN" dirty="0">
+                <a:solidFill>
+                  <a:schemeClr val="accent1">
+                    <a:lumMod val="60000"/>
+                    <a:lumOff val="40000"/>
+                  </a:schemeClr>
+                </a:solidFill>
+              </a:rPr>
+              <a:t>192.168.1.11 </a:t>
+            </a:r>
+            <a:r>
+              <a:rPr lang="zh-CN" altLang="en-US" dirty="0">
+                <a:solidFill>
+                  <a:schemeClr val="accent1">
+                    <a:lumMod val="60000"/>
+                    <a:lumOff val="40000"/>
+                  </a:schemeClr>
+                </a:solidFill>
+              </a:rPr>
+              <a:t>速度和</a:t>
+            </a:r>
+            <a:r>
+              <a:rPr lang="en-US" altLang="zh-CN" dirty="0">
+                <a:solidFill>
+                  <a:schemeClr val="accent1">
+                    <a:lumMod val="60000"/>
+                    <a:lumOff val="40000"/>
+                  </a:schemeClr>
+                </a:solidFill>
+              </a:rPr>
+              <a:t>ping</a:t>
+            </a:r>
+            <a:r>
+              <a:rPr lang="zh-CN" altLang="en-US" dirty="0">
+                <a:solidFill>
+                  <a:schemeClr val="accent1">
+                    <a:lumMod val="60000"/>
+                    <a:lumOff val="40000"/>
+                  </a:schemeClr>
+                </a:solidFill>
+              </a:rPr>
+              <a:t>值符合无线的特征</a:t>
+            </a:r>
+            <a:endParaRPr lang="en-US" altLang="zh-CN" dirty="0">
+              <a:solidFill>
+                <a:schemeClr val="accent1">
+                  <a:lumMod val="60000"/>
+                  <a:lumOff val="40000"/>
+                </a:schemeClr>
+              </a:solidFill>
+            </a:endParaRPr>
+          </a:p>
+          <a:p>
+            <a:r>
+              <a:rPr lang="zh-CN" altLang="en-US" dirty="0">
+                <a:solidFill>
+                  <a:schemeClr val="accent1">
+                    <a:lumMod val="60000"/>
+                    <a:lumOff val="40000"/>
+                  </a:schemeClr>
+                </a:solidFill>
+              </a:rPr>
+              <a:t>访问</a:t>
+            </a:r>
+            <a:r>
+              <a:rPr lang="en-US" altLang="zh-CN" dirty="0">
+                <a:solidFill>
+                  <a:schemeClr val="accent1">
+                    <a:lumMod val="60000"/>
+                    <a:lumOff val="40000"/>
+                  </a:schemeClr>
+                </a:solidFill>
+              </a:rPr>
+              <a:t>192.168.1.21</a:t>
+            </a:r>
+            <a:r>
+              <a:rPr lang="zh-CN" altLang="en-US" dirty="0">
+                <a:solidFill>
+                  <a:schemeClr val="accent1">
+                    <a:lumMod val="60000"/>
+                    <a:lumOff val="40000"/>
+                  </a:schemeClr>
+                </a:solidFill>
+              </a:rPr>
+              <a:t>符合有线的特征</a:t>
             </a:r>
           </a:p>
         </p:txBody>
@@ -6564,6 +6694,157 @@
 </p:sld>
 </file>
 
+<file path=ppt/slides/slide16.xml><?xml version="1.0" encoding="utf-8"?>
+<p:sld xmlns:a="http://schemas.openxmlformats.org/drawingml/2006/main" xmlns:r="http://schemas.openxmlformats.org/officeDocument/2006/relationships" xmlns:p="http://schemas.openxmlformats.org/presentationml/2006/main">
+  <p:cSld>
+    <p:spTree>
+      <p:nvGrpSpPr>
+        <p:cNvPr id="1" name=""/>
+        <p:cNvGrpSpPr/>
+        <p:nvPr/>
+      </p:nvGrpSpPr>
+      <p:grpSpPr>
+        <a:xfrm>
+          <a:off x="0" y="0"/>
+          <a:ext cx="0" cy="0"/>
+          <a:chOff x="0" y="0"/>
+          <a:chExt cx="0" cy="0"/>
+        </a:xfrm>
+      </p:grpSpPr>
+      <p:sp>
+        <p:nvSpPr>
+          <p:cNvPr id="2" name="标题 1">
+            <a:extLst>
+              <a:ext uri="{FF2B5EF4-FFF2-40B4-BE49-F238E27FC236}">
+                <a16:creationId xmlns:a16="http://schemas.microsoft.com/office/drawing/2014/main" id="{740B20CF-492B-44C2-A9BC-62D0254C2950}"/>
+              </a:ext>
+            </a:extLst>
+          </p:cNvPr>
+          <p:cNvSpPr>
+            <a:spLocks noGrp="1"/>
+          </p:cNvSpPr>
+          <p:nvPr>
+            <p:ph type="title"/>
+          </p:nvPr>
+        </p:nvSpPr>
+        <p:spPr/>
+        <p:txBody>
+          <a:bodyPr/>
+          <a:lstStyle/>
+          <a:p>
+            <a:endParaRPr lang="zh-CN" altLang="en-US"/>
+          </a:p>
+        </p:txBody>
+      </p:sp>
+      <p:sp>
+        <p:nvSpPr>
+          <p:cNvPr id="3" name="内容占位符 2">
+            <a:extLst>
+              <a:ext uri="{FF2B5EF4-FFF2-40B4-BE49-F238E27FC236}">
+                <a16:creationId xmlns:a16="http://schemas.microsoft.com/office/drawing/2014/main" id="{37E3068F-0D97-4517-B94D-DA3F6044E09A}"/>
+              </a:ext>
+            </a:extLst>
+          </p:cNvPr>
+          <p:cNvSpPr>
+            <a:spLocks noGrp="1"/>
+          </p:cNvSpPr>
+          <p:nvPr>
+            <p:ph idx="1"/>
+          </p:nvPr>
+        </p:nvSpPr>
+        <p:spPr/>
+        <p:txBody>
+          <a:bodyPr/>
+          <a:lstStyle/>
+          <a:p>
+            <a:endParaRPr lang="zh-CN" altLang="en-US"/>
+          </a:p>
+        </p:txBody>
+      </p:sp>
+      <p:pic>
+        <p:nvPicPr>
+          <p:cNvPr id="5" name="图片 4">
+            <a:extLst>
+              <a:ext uri="{FF2B5EF4-FFF2-40B4-BE49-F238E27FC236}">
+                <a16:creationId xmlns:a16="http://schemas.microsoft.com/office/drawing/2014/main" id="{9433C9E0-DC12-4F84-B4BC-273077AAE645}"/>
+              </a:ext>
+            </a:extLst>
+          </p:cNvPr>
+          <p:cNvPicPr/>
+          <p:nvPr/>
+        </p:nvPicPr>
+        <p:blipFill>
+          <a:blip r:embed="rId2"/>
+          <a:stretch>
+            <a:fillRect/>
+          </a:stretch>
+        </p:blipFill>
+        <p:spPr>
+          <a:xfrm>
+            <a:off x="0" y="0"/>
+            <a:ext cx="12192000" cy="6858000"/>
+          </a:xfrm>
+          <a:prstGeom prst="rect">
+            <a:avLst/>
+          </a:prstGeom>
+        </p:spPr>
+      </p:pic>
+      <p:sp>
+        <p:nvSpPr>
+          <p:cNvPr id="6" name="文本框 5">
+            <a:extLst>
+              <a:ext uri="{FF2B5EF4-FFF2-40B4-BE49-F238E27FC236}">
+                <a16:creationId xmlns:a16="http://schemas.microsoft.com/office/drawing/2014/main" id="{508C8F11-3AC7-4D50-A3E3-F03C7A04E266}"/>
+              </a:ext>
+            </a:extLst>
+          </p:cNvPr>
+          <p:cNvSpPr txBox="1"/>
+          <p:nvPr/>
+        </p:nvSpPr>
+        <p:spPr>
+          <a:xfrm>
+            <a:off x="4388840" y="2659559"/>
+            <a:ext cx="3414320" cy="769441"/>
+          </a:xfrm>
+          <a:prstGeom prst="rect">
+            <a:avLst/>
+          </a:prstGeom>
+          <a:noFill/>
+        </p:spPr>
+        <p:txBody>
+          <a:bodyPr wrap="square" rtlCol="0">
+            <a:spAutoFit/>
+          </a:bodyPr>
+          <a:lstStyle/>
+          <a:p>
+            <a:pPr algn="ctr"/>
+            <a:r>
+              <a:rPr lang="zh-CN" altLang="en-US" sz="4400" dirty="0">
+                <a:solidFill>
+                  <a:schemeClr val="accent1">
+                    <a:lumMod val="60000"/>
+                    <a:lumOff val="40000"/>
+                  </a:schemeClr>
+                </a:solidFill>
+              </a:rPr>
+              <a:t>谢谢大家</a:t>
+            </a:r>
+          </a:p>
+        </p:txBody>
+      </p:sp>
+    </p:spTree>
+    <p:extLst>
+      <p:ext uri="{BB962C8B-B14F-4D97-AF65-F5344CB8AC3E}">
+        <p14:creationId xmlns:p14="http://schemas.microsoft.com/office/powerpoint/2010/main" val="884902377"/>
+      </p:ext>
+    </p:extLst>
+  </p:cSld>
+  <p:clrMapOvr>
+    <a:masterClrMapping/>
+  </p:clrMapOvr>
+</p:sld>
+</file>
+
 <file path=ppt/slides/slide2.xml><?xml version="1.0" encoding="utf-8"?>
 <p:sld xmlns:a="http://schemas.openxmlformats.org/drawingml/2006/main" xmlns:r="http://schemas.openxmlformats.org/officeDocument/2006/relationships" xmlns:p="http://schemas.openxmlformats.org/presentationml/2006/main">
   <p:cSld>
@@ -9464,7 +9745,7 @@
                   </a:outerShdw>
                 </a:effectLst>
               </a:rPr>
-              <a:t>第二步：确认两个电脑已经相连成功后，设置共享使两个队伍能够互相传输文件</a:t>
+              <a:t>确认两个电脑已经相连成功后，设置共享使两个队伍能够互相传输文件</a:t>
             </a:r>
           </a:p>
         </p:txBody>
@@ -9614,7 +9895,7 @@
                   </a:outerShdw>
                 </a:effectLst>
               </a:rPr>
-              <a:t>第四步：用一台电脑去访问另一台电脑已经共享的文件，然后将它传到自己这里，速度如图所示：</a:t>
+              <a:t>用一台电脑去访问另一台电脑已经共享的文件，然后将它传到自己这里，速度如图所示：</a:t>
             </a:r>
           </a:p>
         </p:txBody>
@@ -9778,7 +10059,7 @@
                   </a:outerShdw>
                 </a:effectLst>
               </a:rPr>
-              <a:t>第一步：两个电脑通过网线连接，一个</a:t>
+              <a:t>两个电脑通过网线连接，一个</a:t>
             </a:r>
             <a:r>
               <a:rPr lang="en-US" altLang="zh-CN" sz="1600" b="1" dirty="0">
@@ -10154,7 +10435,7 @@
                   </a:outerShdw>
                 </a:effectLst>
               </a:rPr>
-              <a:t>第五步：接下来测无线速度，用一个电脑去连另外一台电脑的热点，使两个电脑进行无线连接，如图所示：</a:t>
+              <a:t>接下来测无线速度，用一个电脑去连另外一台电脑的热点，使两个电脑进行无线连接，如图所示：</a:t>
             </a:r>
           </a:p>
         </p:txBody>
@@ -10327,7 +10608,7 @@
                   </a:outerShdw>
                 </a:effectLst>
               </a:rPr>
-              <a:t>第七步：重复用一台电脑去访问另一台电脑已经共享的文件，然后将它传到自己这里</a:t>
+              <a:t>重复用一台电脑去访问另一台电脑已经共享的文件，然后将它传到自己这里</a:t>
             </a:r>
           </a:p>
         </p:txBody>

--- a/other/204实验.pptx
+++ b/other/204实验.pptx
@@ -2,7 +2,7 @@
 <file path=ppt/presentation.xml><?xml version="1.0" encoding="utf-8"?>
 <p:presentation xmlns:a="http://schemas.openxmlformats.org/drawingml/2006/main" xmlns:r="http://schemas.openxmlformats.org/officeDocument/2006/relationships" xmlns:p="http://schemas.openxmlformats.org/presentationml/2006/main">
   <p:sldMasterIdLst>
-    <p:sldMasterId id="2147483648" r:id="rId1"/>
+    <p:sldMasterId id="2147483660" r:id="rId1"/>
   </p:sldMasterIdLst>
   <p:sldIdLst>
     <p:sldId id="256" r:id="rId2"/>
@@ -18,17 +18,24 @@
     <p:sldId id="265" r:id="rId12"/>
     <p:sldId id="270" r:id="rId13"/>
     <p:sldId id="269" r:id="rId14"/>
-    <p:sldId id="273" r:id="rId15"/>
-    <p:sldId id="272" r:id="rId16"/>
-    <p:sldId id="274" r:id="rId17"/>
+    <p:sldId id="282" r:id="rId15"/>
+    <p:sldId id="275" r:id="rId16"/>
+    <p:sldId id="276" r:id="rId17"/>
+    <p:sldId id="277" r:id="rId18"/>
+    <p:sldId id="278" r:id="rId19"/>
+    <p:sldId id="280" r:id="rId20"/>
+    <p:sldId id="281" r:id="rId21"/>
+    <p:sldId id="273" r:id="rId22"/>
+    <p:sldId id="272" r:id="rId23"/>
+    <p:sldId id="274" r:id="rId24"/>
   </p:sldIdLst>
-  <p:sldSz cx="12192000" cy="6858000"/>
+  <p:sldSz cx="9144000" cy="6858000" type="screen4x3"/>
   <p:notesSz cx="6858000" cy="9144000"/>
   <p:defaultTextStyle>
     <a:defPPr>
-      <a:defRPr lang="zh-CN"/>
+      <a:defRPr lang="en-US"/>
     </a:defPPr>
-    <a:lvl1pPr marL="0" algn="l" defTabSz="914400" rtl="0" eaLnBrk="1" latinLnBrk="0" hangingPunct="1">
+    <a:lvl1pPr marL="0" algn="l" defTabSz="457200" rtl="0" eaLnBrk="1" latinLnBrk="0" hangingPunct="1">
       <a:defRPr sz="1800" kern="1200">
         <a:solidFill>
           <a:schemeClr val="tx1"/>
@@ -38,7 +45,7 @@
         <a:cs typeface="+mn-cs"/>
       </a:defRPr>
     </a:lvl1pPr>
-    <a:lvl2pPr marL="457200" algn="l" defTabSz="914400" rtl="0" eaLnBrk="1" latinLnBrk="0" hangingPunct="1">
+    <a:lvl2pPr marL="457200" algn="l" defTabSz="457200" rtl="0" eaLnBrk="1" latinLnBrk="0" hangingPunct="1">
       <a:defRPr sz="1800" kern="1200">
         <a:solidFill>
           <a:schemeClr val="tx1"/>
@@ -48,7 +55,7 @@
         <a:cs typeface="+mn-cs"/>
       </a:defRPr>
     </a:lvl2pPr>
-    <a:lvl3pPr marL="914400" algn="l" defTabSz="914400" rtl="0" eaLnBrk="1" latinLnBrk="0" hangingPunct="1">
+    <a:lvl3pPr marL="914400" algn="l" defTabSz="457200" rtl="0" eaLnBrk="1" latinLnBrk="0" hangingPunct="1">
       <a:defRPr sz="1800" kern="1200">
         <a:solidFill>
           <a:schemeClr val="tx1"/>
@@ -58,7 +65,7 @@
         <a:cs typeface="+mn-cs"/>
       </a:defRPr>
     </a:lvl3pPr>
-    <a:lvl4pPr marL="1371600" algn="l" defTabSz="914400" rtl="0" eaLnBrk="1" latinLnBrk="0" hangingPunct="1">
+    <a:lvl4pPr marL="1371600" algn="l" defTabSz="457200" rtl="0" eaLnBrk="1" latinLnBrk="0" hangingPunct="1">
       <a:defRPr sz="1800" kern="1200">
         <a:solidFill>
           <a:schemeClr val="tx1"/>
@@ -68,7 +75,7 @@
         <a:cs typeface="+mn-cs"/>
       </a:defRPr>
     </a:lvl4pPr>
-    <a:lvl5pPr marL="1828800" algn="l" defTabSz="914400" rtl="0" eaLnBrk="1" latinLnBrk="0" hangingPunct="1">
+    <a:lvl5pPr marL="1828800" algn="l" defTabSz="457200" rtl="0" eaLnBrk="1" latinLnBrk="0" hangingPunct="1">
       <a:defRPr sz="1800" kern="1200">
         <a:solidFill>
           <a:schemeClr val="tx1"/>
@@ -78,7 +85,7 @@
         <a:cs typeface="+mn-cs"/>
       </a:defRPr>
     </a:lvl5pPr>
-    <a:lvl6pPr marL="2286000" algn="l" defTabSz="914400" rtl="0" eaLnBrk="1" latinLnBrk="0" hangingPunct="1">
+    <a:lvl6pPr marL="2286000" algn="l" defTabSz="457200" rtl="0" eaLnBrk="1" latinLnBrk="0" hangingPunct="1">
       <a:defRPr sz="1800" kern="1200">
         <a:solidFill>
           <a:schemeClr val="tx1"/>
@@ -88,7 +95,7 @@
         <a:cs typeface="+mn-cs"/>
       </a:defRPr>
     </a:lvl6pPr>
-    <a:lvl7pPr marL="2743200" algn="l" defTabSz="914400" rtl="0" eaLnBrk="1" latinLnBrk="0" hangingPunct="1">
+    <a:lvl7pPr marL="2743200" algn="l" defTabSz="457200" rtl="0" eaLnBrk="1" latinLnBrk="0" hangingPunct="1">
       <a:defRPr sz="1800" kern="1200">
         <a:solidFill>
           <a:schemeClr val="tx1"/>
@@ -98,7 +105,7 @@
         <a:cs typeface="+mn-cs"/>
       </a:defRPr>
     </a:lvl7pPr>
-    <a:lvl8pPr marL="3200400" algn="l" defTabSz="914400" rtl="0" eaLnBrk="1" latinLnBrk="0" hangingPunct="1">
+    <a:lvl8pPr marL="3200400" algn="l" defTabSz="457200" rtl="0" eaLnBrk="1" latinLnBrk="0" hangingPunct="1">
       <a:defRPr sz="1800" kern="1200">
         <a:solidFill>
           <a:schemeClr val="tx1"/>
@@ -108,7 +115,7 @@
         <a:cs typeface="+mn-cs"/>
       </a:defRPr>
     </a:lvl8pPr>
-    <a:lvl9pPr marL="3657600" algn="l" defTabSz="914400" rtl="0" eaLnBrk="1" latinLnBrk="0" hangingPunct="1">
+    <a:lvl9pPr marL="3657600" algn="l" defTabSz="457200" rtl="0" eaLnBrk="1" latinLnBrk="0" hangingPunct="1">
       <a:defRPr sz="1800" kern="1200">
         <a:solidFill>
           <a:schemeClr val="tx1"/>
@@ -146,7 +153,7 @@
       </p:grpSpPr>
       <p:sp>
         <p:nvSpPr>
-          <p:cNvPr id="2" name="标题 1"/>
+          <p:cNvPr id="2" name="Title 1"/>
           <p:cNvSpPr>
             <a:spLocks noGrp="1"/>
           </p:cNvSpPr>
@@ -156,8 +163,8 @@
         </p:nvSpPr>
         <p:spPr>
           <a:xfrm>
-            <a:off x="1524000" y="1122363"/>
-            <a:ext cx="9144000" cy="2387600"/>
+            <a:off x="685800" y="1122363"/>
+            <a:ext cx="7772400" cy="2387600"/>
           </a:xfrm>
         </p:spPr>
         <p:txBody>
@@ -172,12 +179,13 @@
               <a:rPr lang="zh-CN" altLang="en-US"/>
               <a:t>单击此处编辑母版标题样式</a:t>
             </a:r>
-          </a:p>
-        </p:txBody>
-      </p:sp>
-      <p:sp>
-        <p:nvSpPr>
-          <p:cNvPr id="3" name="副标题 2"/>
+            <a:endParaRPr lang="en-US" dirty="0"/>
+          </a:p>
+        </p:txBody>
+      </p:sp>
+      <p:sp>
+        <p:nvSpPr>
+          <p:cNvPr id="3" name="Subtitle 2"/>
           <p:cNvSpPr>
             <a:spLocks noGrp="1"/>
           </p:cNvSpPr>
@@ -187,8 +195,8 @@
         </p:nvSpPr>
         <p:spPr>
           <a:xfrm>
-            <a:off x="1524000" y="3602038"/>
-            <a:ext cx="9144000" cy="1655762"/>
+            <a:off x="1143000" y="3602038"/>
+            <a:ext cx="6858000" cy="1655762"/>
           </a:xfrm>
         </p:spPr>
         <p:txBody>
@@ -236,12 +244,13 @@
               <a:rPr lang="zh-CN" altLang="en-US"/>
               <a:t>单击此处编辑母版副标题样式</a:t>
             </a:r>
-          </a:p>
-        </p:txBody>
-      </p:sp>
-      <p:sp>
-        <p:nvSpPr>
-          <p:cNvPr id="4" name="日期占位符 3"/>
+            <a:endParaRPr lang="en-US" dirty="0"/>
+          </a:p>
+        </p:txBody>
+      </p:sp>
+      <p:sp>
+        <p:nvSpPr>
+          <p:cNvPr id="4" name="Date Placeholder 3"/>
           <p:cNvSpPr>
             <a:spLocks noGrp="1"/>
           </p:cNvSpPr>
@@ -256,7 +265,7 @@
           <a:p>
             <a:fld id="{C1204EAE-C964-486C-9112-A587BFBBD611}" type="datetimeFigureOut">
               <a:rPr lang="zh-CN" altLang="en-US" smtClean="0"/>
-              <a:t>2020/11/4</a:t>
+              <a:t>2020/11/9</a:t>
             </a:fld>
             <a:endParaRPr lang="zh-CN" altLang="en-US"/>
           </a:p>
@@ -264,7 +273,7 @@
       </p:sp>
       <p:sp>
         <p:nvSpPr>
-          <p:cNvPr id="5" name="页脚占位符 4"/>
+          <p:cNvPr id="5" name="Footer Placeholder 4"/>
           <p:cNvSpPr>
             <a:spLocks noGrp="1"/>
           </p:cNvSpPr>
@@ -283,7 +292,7 @@
       </p:sp>
       <p:sp>
         <p:nvSpPr>
-          <p:cNvPr id="6" name="灯片编号占位符 5"/>
+          <p:cNvPr id="6" name="Slide Number Placeholder 5"/>
           <p:cNvSpPr>
             <a:spLocks noGrp="1"/>
           </p:cNvSpPr>
@@ -305,6 +314,11 @@
         </p:txBody>
       </p:sp>
     </p:spTree>
+    <p:extLst>
+      <p:ext uri="{BB962C8B-B14F-4D97-AF65-F5344CB8AC3E}">
+        <p14:creationId xmlns:p14="http://schemas.microsoft.com/office/powerpoint/2010/main" val="1215228223"/>
+      </p:ext>
+    </p:extLst>
   </p:cSld>
   <p:clrMapOvr>
     <a:masterClrMapping/>
@@ -331,7 +345,7 @@
       </p:grpSpPr>
       <p:sp>
         <p:nvSpPr>
-          <p:cNvPr id="2" name="标题 1"/>
+          <p:cNvPr id="2" name="Title 1"/>
           <p:cNvSpPr>
             <a:spLocks noGrp="1"/>
           </p:cNvSpPr>
@@ -348,12 +362,13 @@
               <a:rPr lang="zh-CN" altLang="en-US"/>
               <a:t>单击此处编辑母版标题样式</a:t>
             </a:r>
-          </a:p>
-        </p:txBody>
-      </p:sp>
-      <p:sp>
-        <p:nvSpPr>
-          <p:cNvPr id="3" name="竖排文字占位符 2"/>
+            <a:endParaRPr lang="en-US" dirty="0"/>
+          </a:p>
+        </p:txBody>
+      </p:sp>
+      <p:sp>
+        <p:nvSpPr>
+          <p:cNvPr id="3" name="Vertical Text Placeholder 2"/>
           <p:cNvSpPr>
             <a:spLocks noGrp="1"/>
           </p:cNvSpPr>
@@ -399,12 +414,13 @@
               <a:rPr lang="zh-CN" altLang="en-US"/>
               <a:t>五级</a:t>
             </a:r>
-          </a:p>
-        </p:txBody>
-      </p:sp>
-      <p:sp>
-        <p:nvSpPr>
-          <p:cNvPr id="4" name="日期占位符 3"/>
+            <a:endParaRPr lang="en-US" dirty="0"/>
+          </a:p>
+        </p:txBody>
+      </p:sp>
+      <p:sp>
+        <p:nvSpPr>
+          <p:cNvPr id="4" name="Date Placeholder 3"/>
           <p:cNvSpPr>
             <a:spLocks noGrp="1"/>
           </p:cNvSpPr>
@@ -419,7 +435,7 @@
           <a:p>
             <a:fld id="{C1204EAE-C964-486C-9112-A587BFBBD611}" type="datetimeFigureOut">
               <a:rPr lang="zh-CN" altLang="en-US" smtClean="0"/>
-              <a:t>2020/11/4</a:t>
+              <a:t>2020/11/9</a:t>
             </a:fld>
             <a:endParaRPr lang="zh-CN" altLang="en-US"/>
           </a:p>
@@ -427,7 +443,7 @@
       </p:sp>
       <p:sp>
         <p:nvSpPr>
-          <p:cNvPr id="5" name="页脚占位符 4"/>
+          <p:cNvPr id="5" name="Footer Placeholder 4"/>
           <p:cNvSpPr>
             <a:spLocks noGrp="1"/>
           </p:cNvSpPr>
@@ -446,7 +462,7 @@
       </p:sp>
       <p:sp>
         <p:nvSpPr>
-          <p:cNvPr id="6" name="灯片编号占位符 5"/>
+          <p:cNvPr id="6" name="Slide Number Placeholder 5"/>
           <p:cNvSpPr>
             <a:spLocks noGrp="1"/>
           </p:cNvSpPr>
@@ -468,6 +484,11 @@
         </p:txBody>
       </p:sp>
     </p:spTree>
+    <p:extLst>
+      <p:ext uri="{BB962C8B-B14F-4D97-AF65-F5344CB8AC3E}">
+        <p14:creationId xmlns:p14="http://schemas.microsoft.com/office/powerpoint/2010/main" val="2306430106"/>
+      </p:ext>
+    </p:extLst>
   </p:cSld>
   <p:clrMapOvr>
     <a:masterClrMapping/>
@@ -494,7 +515,7 @@
       </p:grpSpPr>
       <p:sp>
         <p:nvSpPr>
-          <p:cNvPr id="2" name="竖排标题 1"/>
+          <p:cNvPr id="2" name="Vertical Title 1"/>
           <p:cNvSpPr>
             <a:spLocks noGrp="1"/>
           </p:cNvSpPr>
@@ -504,8 +525,8 @@
         </p:nvSpPr>
         <p:spPr>
           <a:xfrm>
-            <a:off x="8724900" y="365125"/>
-            <a:ext cx="2628900" cy="5811838"/>
+            <a:off x="6543675" y="365125"/>
+            <a:ext cx="1971675" cy="5811838"/>
           </a:xfrm>
         </p:spPr>
         <p:txBody>
@@ -516,12 +537,13 @@
               <a:rPr lang="zh-CN" altLang="en-US"/>
               <a:t>单击此处编辑母版标题样式</a:t>
             </a:r>
-          </a:p>
-        </p:txBody>
-      </p:sp>
-      <p:sp>
-        <p:nvSpPr>
-          <p:cNvPr id="3" name="竖排文字占位符 2"/>
+            <a:endParaRPr lang="en-US" dirty="0"/>
+          </a:p>
+        </p:txBody>
+      </p:sp>
+      <p:sp>
+        <p:nvSpPr>
+          <p:cNvPr id="3" name="Vertical Text Placeholder 2"/>
           <p:cNvSpPr>
             <a:spLocks noGrp="1"/>
           </p:cNvSpPr>
@@ -531,8 +553,8 @@
         </p:nvSpPr>
         <p:spPr>
           <a:xfrm>
-            <a:off x="838200" y="365125"/>
-            <a:ext cx="7734300" cy="5811838"/>
+            <a:off x="628650" y="365125"/>
+            <a:ext cx="5800725" cy="5811838"/>
           </a:xfrm>
         </p:spPr>
         <p:txBody>
@@ -572,12 +594,13 @@
               <a:rPr lang="zh-CN" altLang="en-US"/>
               <a:t>五级</a:t>
             </a:r>
-          </a:p>
-        </p:txBody>
-      </p:sp>
-      <p:sp>
-        <p:nvSpPr>
-          <p:cNvPr id="4" name="日期占位符 3"/>
+            <a:endParaRPr lang="en-US" dirty="0"/>
+          </a:p>
+        </p:txBody>
+      </p:sp>
+      <p:sp>
+        <p:nvSpPr>
+          <p:cNvPr id="4" name="Date Placeholder 3"/>
           <p:cNvSpPr>
             <a:spLocks noGrp="1"/>
           </p:cNvSpPr>
@@ -592,7 +615,7 @@
           <a:p>
             <a:fld id="{C1204EAE-C964-486C-9112-A587BFBBD611}" type="datetimeFigureOut">
               <a:rPr lang="zh-CN" altLang="en-US" smtClean="0"/>
-              <a:t>2020/11/4</a:t>
+              <a:t>2020/11/9</a:t>
             </a:fld>
             <a:endParaRPr lang="zh-CN" altLang="en-US"/>
           </a:p>
@@ -600,7 +623,7 @@
       </p:sp>
       <p:sp>
         <p:nvSpPr>
-          <p:cNvPr id="5" name="页脚占位符 4"/>
+          <p:cNvPr id="5" name="Footer Placeholder 4"/>
           <p:cNvSpPr>
             <a:spLocks noGrp="1"/>
           </p:cNvSpPr>
@@ -619,7 +642,7 @@
       </p:sp>
       <p:sp>
         <p:nvSpPr>
-          <p:cNvPr id="6" name="灯片编号占位符 5"/>
+          <p:cNvPr id="6" name="Slide Number Placeholder 5"/>
           <p:cNvSpPr>
             <a:spLocks noGrp="1"/>
           </p:cNvSpPr>
@@ -641,6 +664,11 @@
         </p:txBody>
       </p:sp>
     </p:spTree>
+    <p:extLst>
+      <p:ext uri="{BB962C8B-B14F-4D97-AF65-F5344CB8AC3E}">
+        <p14:creationId xmlns:p14="http://schemas.microsoft.com/office/powerpoint/2010/main" val="904968184"/>
+      </p:ext>
+    </p:extLst>
   </p:cSld>
   <p:clrMapOvr>
     <a:masterClrMapping/>
@@ -667,7 +695,7 @@
       </p:grpSpPr>
       <p:sp>
         <p:nvSpPr>
-          <p:cNvPr id="2" name="标题 1"/>
+          <p:cNvPr id="2" name="Title 1"/>
           <p:cNvSpPr>
             <a:spLocks noGrp="1"/>
           </p:cNvSpPr>
@@ -684,12 +712,13 @@
               <a:rPr lang="zh-CN" altLang="en-US"/>
               <a:t>单击此处编辑母版标题样式</a:t>
             </a:r>
-          </a:p>
-        </p:txBody>
-      </p:sp>
-      <p:sp>
-        <p:nvSpPr>
-          <p:cNvPr id="3" name="内容占位符 2"/>
+            <a:endParaRPr lang="en-US" dirty="0"/>
+          </a:p>
+        </p:txBody>
+      </p:sp>
+      <p:sp>
+        <p:nvSpPr>
+          <p:cNvPr id="3" name="Content Placeholder 2"/>
           <p:cNvSpPr>
             <a:spLocks noGrp="1"/>
           </p:cNvSpPr>
@@ -735,12 +764,13 @@
               <a:rPr lang="zh-CN" altLang="en-US"/>
               <a:t>五级</a:t>
             </a:r>
-          </a:p>
-        </p:txBody>
-      </p:sp>
-      <p:sp>
-        <p:nvSpPr>
-          <p:cNvPr id="4" name="日期占位符 3"/>
+            <a:endParaRPr lang="en-US" dirty="0"/>
+          </a:p>
+        </p:txBody>
+      </p:sp>
+      <p:sp>
+        <p:nvSpPr>
+          <p:cNvPr id="4" name="Date Placeholder 3"/>
           <p:cNvSpPr>
             <a:spLocks noGrp="1"/>
           </p:cNvSpPr>
@@ -755,7 +785,7 @@
           <a:p>
             <a:fld id="{C1204EAE-C964-486C-9112-A587BFBBD611}" type="datetimeFigureOut">
               <a:rPr lang="zh-CN" altLang="en-US" smtClean="0"/>
-              <a:t>2020/11/4</a:t>
+              <a:t>2020/11/9</a:t>
             </a:fld>
             <a:endParaRPr lang="zh-CN" altLang="en-US"/>
           </a:p>
@@ -763,7 +793,7 @@
       </p:sp>
       <p:sp>
         <p:nvSpPr>
-          <p:cNvPr id="5" name="页脚占位符 4"/>
+          <p:cNvPr id="5" name="Footer Placeholder 4"/>
           <p:cNvSpPr>
             <a:spLocks noGrp="1"/>
           </p:cNvSpPr>
@@ -782,7 +812,7 @@
       </p:sp>
       <p:sp>
         <p:nvSpPr>
-          <p:cNvPr id="6" name="灯片编号占位符 5"/>
+          <p:cNvPr id="6" name="Slide Number Placeholder 5"/>
           <p:cNvSpPr>
             <a:spLocks noGrp="1"/>
           </p:cNvSpPr>
@@ -804,6 +834,11 @@
         </p:txBody>
       </p:sp>
     </p:spTree>
+    <p:extLst>
+      <p:ext uri="{BB962C8B-B14F-4D97-AF65-F5344CB8AC3E}">
+        <p14:creationId xmlns:p14="http://schemas.microsoft.com/office/powerpoint/2010/main" val="1299096591"/>
+      </p:ext>
+    </p:extLst>
   </p:cSld>
   <p:clrMapOvr>
     <a:masterClrMapping/>
@@ -830,7 +865,7 @@
       </p:grpSpPr>
       <p:sp>
         <p:nvSpPr>
-          <p:cNvPr id="2" name="标题 1"/>
+          <p:cNvPr id="2" name="Title 1"/>
           <p:cNvSpPr>
             <a:spLocks noGrp="1"/>
           </p:cNvSpPr>
@@ -840,8 +875,8 @@
         </p:nvSpPr>
         <p:spPr>
           <a:xfrm>
-            <a:off x="831850" y="1709738"/>
-            <a:ext cx="10515600" cy="2852737"/>
+            <a:off x="623888" y="1709739"/>
+            <a:ext cx="7886700" cy="2852737"/>
           </a:xfrm>
         </p:spPr>
         <p:txBody>
@@ -856,12 +891,13 @@
               <a:rPr lang="zh-CN" altLang="en-US"/>
               <a:t>单击此处编辑母版标题样式</a:t>
             </a:r>
-          </a:p>
-        </p:txBody>
-      </p:sp>
-      <p:sp>
-        <p:nvSpPr>
-          <p:cNvPr id="3" name="文本占位符 2"/>
+            <a:endParaRPr lang="en-US" dirty="0"/>
+          </a:p>
+        </p:txBody>
+      </p:sp>
+      <p:sp>
+        <p:nvSpPr>
+          <p:cNvPr id="3" name="Text Placeholder 2"/>
           <p:cNvSpPr>
             <a:spLocks noGrp="1"/>
           </p:cNvSpPr>
@@ -871,8 +907,8 @@
         </p:nvSpPr>
         <p:spPr>
           <a:xfrm>
-            <a:off x="831850" y="4589463"/>
-            <a:ext cx="10515600" cy="1500187"/>
+            <a:off x="623888" y="4589464"/>
+            <a:ext cx="7886700" cy="1500187"/>
           </a:xfrm>
         </p:spPr>
         <p:txBody>
@@ -882,9 +918,7 @@
               <a:buNone/>
               <a:defRPr sz="2400">
                 <a:solidFill>
-                  <a:schemeClr val="tx1">
-                    <a:tint val="75000"/>
-                  </a:schemeClr>
+                  <a:schemeClr val="tx1"/>
                 </a:solidFill>
               </a:defRPr>
             </a:lvl1pPr>
@@ -980,7 +1014,7 @@
       </p:sp>
       <p:sp>
         <p:nvSpPr>
-          <p:cNvPr id="4" name="日期占位符 3"/>
+          <p:cNvPr id="4" name="Date Placeholder 3"/>
           <p:cNvSpPr>
             <a:spLocks noGrp="1"/>
           </p:cNvSpPr>
@@ -995,7 +1029,7 @@
           <a:p>
             <a:fld id="{C1204EAE-C964-486C-9112-A587BFBBD611}" type="datetimeFigureOut">
               <a:rPr lang="zh-CN" altLang="en-US" smtClean="0"/>
-              <a:t>2020/11/4</a:t>
+              <a:t>2020/11/9</a:t>
             </a:fld>
             <a:endParaRPr lang="zh-CN" altLang="en-US"/>
           </a:p>
@@ -1003,7 +1037,7 @@
       </p:sp>
       <p:sp>
         <p:nvSpPr>
-          <p:cNvPr id="5" name="页脚占位符 4"/>
+          <p:cNvPr id="5" name="Footer Placeholder 4"/>
           <p:cNvSpPr>
             <a:spLocks noGrp="1"/>
           </p:cNvSpPr>
@@ -1022,7 +1056,7 @@
       </p:sp>
       <p:sp>
         <p:nvSpPr>
-          <p:cNvPr id="6" name="灯片编号占位符 5"/>
+          <p:cNvPr id="6" name="Slide Number Placeholder 5"/>
           <p:cNvSpPr>
             <a:spLocks noGrp="1"/>
           </p:cNvSpPr>
@@ -1044,6 +1078,11 @@
         </p:txBody>
       </p:sp>
     </p:spTree>
+    <p:extLst>
+      <p:ext uri="{BB962C8B-B14F-4D97-AF65-F5344CB8AC3E}">
+        <p14:creationId xmlns:p14="http://schemas.microsoft.com/office/powerpoint/2010/main" val="412977096"/>
+      </p:ext>
+    </p:extLst>
   </p:cSld>
   <p:clrMapOvr>
     <a:masterClrMapping/>
@@ -1070,7 +1109,7 @@
       </p:grpSpPr>
       <p:sp>
         <p:nvSpPr>
-          <p:cNvPr id="2" name="标题 1"/>
+          <p:cNvPr id="2" name="Title 1"/>
           <p:cNvSpPr>
             <a:spLocks noGrp="1"/>
           </p:cNvSpPr>
@@ -1087,12 +1126,13 @@
               <a:rPr lang="zh-CN" altLang="en-US"/>
               <a:t>单击此处编辑母版标题样式</a:t>
             </a:r>
-          </a:p>
-        </p:txBody>
-      </p:sp>
-      <p:sp>
-        <p:nvSpPr>
-          <p:cNvPr id="3" name="内容占位符 2"/>
+            <a:endParaRPr lang="en-US" dirty="0"/>
+          </a:p>
+        </p:txBody>
+      </p:sp>
+      <p:sp>
+        <p:nvSpPr>
+          <p:cNvPr id="3" name="Content Placeholder 2"/>
           <p:cNvSpPr>
             <a:spLocks noGrp="1"/>
           </p:cNvSpPr>
@@ -1102,8 +1142,8 @@
         </p:nvSpPr>
         <p:spPr>
           <a:xfrm>
-            <a:off x="838200" y="1825625"/>
-            <a:ext cx="5181600" cy="4351338"/>
+            <a:off x="628650" y="1825625"/>
+            <a:ext cx="3886200" cy="4351338"/>
           </a:xfrm>
         </p:spPr>
         <p:txBody>
@@ -1143,12 +1183,13 @@
               <a:rPr lang="zh-CN" altLang="en-US"/>
               <a:t>五级</a:t>
             </a:r>
-          </a:p>
-        </p:txBody>
-      </p:sp>
-      <p:sp>
-        <p:nvSpPr>
-          <p:cNvPr id="4" name="内容占位符 3"/>
+            <a:endParaRPr lang="en-US" dirty="0"/>
+          </a:p>
+        </p:txBody>
+      </p:sp>
+      <p:sp>
+        <p:nvSpPr>
+          <p:cNvPr id="4" name="Content Placeholder 3"/>
           <p:cNvSpPr>
             <a:spLocks noGrp="1"/>
           </p:cNvSpPr>
@@ -1158,8 +1199,8 @@
         </p:nvSpPr>
         <p:spPr>
           <a:xfrm>
-            <a:off x="6172200" y="1825625"/>
-            <a:ext cx="5181600" cy="4351338"/>
+            <a:off x="4629150" y="1825625"/>
+            <a:ext cx="3886200" cy="4351338"/>
           </a:xfrm>
         </p:spPr>
         <p:txBody>
@@ -1199,12 +1240,13 @@
               <a:rPr lang="zh-CN" altLang="en-US"/>
               <a:t>五级</a:t>
             </a:r>
-          </a:p>
-        </p:txBody>
-      </p:sp>
-      <p:sp>
-        <p:nvSpPr>
-          <p:cNvPr id="5" name="日期占位符 4"/>
+            <a:endParaRPr lang="en-US" dirty="0"/>
+          </a:p>
+        </p:txBody>
+      </p:sp>
+      <p:sp>
+        <p:nvSpPr>
+          <p:cNvPr id="5" name="Date Placeholder 4"/>
           <p:cNvSpPr>
             <a:spLocks noGrp="1"/>
           </p:cNvSpPr>
@@ -1219,7 +1261,7 @@
           <a:p>
             <a:fld id="{C1204EAE-C964-486C-9112-A587BFBBD611}" type="datetimeFigureOut">
               <a:rPr lang="zh-CN" altLang="en-US" smtClean="0"/>
-              <a:t>2020/11/4</a:t>
+              <a:t>2020/11/9</a:t>
             </a:fld>
             <a:endParaRPr lang="zh-CN" altLang="en-US"/>
           </a:p>
@@ -1227,7 +1269,7 @@
       </p:sp>
       <p:sp>
         <p:nvSpPr>
-          <p:cNvPr id="6" name="页脚占位符 5"/>
+          <p:cNvPr id="6" name="Footer Placeholder 5"/>
           <p:cNvSpPr>
             <a:spLocks noGrp="1"/>
           </p:cNvSpPr>
@@ -1246,7 +1288,7 @@
       </p:sp>
       <p:sp>
         <p:nvSpPr>
-          <p:cNvPr id="7" name="灯片编号占位符 6"/>
+          <p:cNvPr id="7" name="Slide Number Placeholder 6"/>
           <p:cNvSpPr>
             <a:spLocks noGrp="1"/>
           </p:cNvSpPr>
@@ -1268,6 +1310,11 @@
         </p:txBody>
       </p:sp>
     </p:spTree>
+    <p:extLst>
+      <p:ext uri="{BB962C8B-B14F-4D97-AF65-F5344CB8AC3E}">
+        <p14:creationId xmlns:p14="http://schemas.microsoft.com/office/powerpoint/2010/main" val="315623285"/>
+      </p:ext>
+    </p:extLst>
   </p:cSld>
   <p:clrMapOvr>
     <a:masterClrMapping/>
@@ -1294,7 +1341,7 @@
       </p:grpSpPr>
       <p:sp>
         <p:nvSpPr>
-          <p:cNvPr id="2" name="标题 1"/>
+          <p:cNvPr id="2" name="Title 1"/>
           <p:cNvSpPr>
             <a:spLocks noGrp="1"/>
           </p:cNvSpPr>
@@ -1304,8 +1351,8 @@
         </p:nvSpPr>
         <p:spPr>
           <a:xfrm>
-            <a:off x="839788" y="365125"/>
-            <a:ext cx="10515600" cy="1325563"/>
+            <a:off x="629841" y="365126"/>
+            <a:ext cx="7886700" cy="1325563"/>
           </a:xfrm>
         </p:spPr>
         <p:txBody>
@@ -1316,12 +1363,13 @@
               <a:rPr lang="zh-CN" altLang="en-US"/>
               <a:t>单击此处编辑母版标题样式</a:t>
             </a:r>
-          </a:p>
-        </p:txBody>
-      </p:sp>
-      <p:sp>
-        <p:nvSpPr>
-          <p:cNvPr id="3" name="文本占位符 2"/>
+            <a:endParaRPr lang="en-US" dirty="0"/>
+          </a:p>
+        </p:txBody>
+      </p:sp>
+      <p:sp>
+        <p:nvSpPr>
+          <p:cNvPr id="3" name="Text Placeholder 2"/>
           <p:cNvSpPr>
             <a:spLocks noGrp="1"/>
           </p:cNvSpPr>
@@ -1331,8 +1379,8 @@
         </p:nvSpPr>
         <p:spPr>
           <a:xfrm>
-            <a:off x="839788" y="1681163"/>
-            <a:ext cx="5157787" cy="823912"/>
+            <a:off x="629842" y="1681163"/>
+            <a:ext cx="3868340" cy="823912"/>
           </a:xfrm>
         </p:spPr>
         <p:txBody>
@@ -1386,7 +1434,7 @@
       </p:sp>
       <p:sp>
         <p:nvSpPr>
-          <p:cNvPr id="4" name="内容占位符 3"/>
+          <p:cNvPr id="4" name="Content Placeholder 3"/>
           <p:cNvSpPr>
             <a:spLocks noGrp="1"/>
           </p:cNvSpPr>
@@ -1396,8 +1444,8 @@
         </p:nvSpPr>
         <p:spPr>
           <a:xfrm>
-            <a:off x="839788" y="2505075"/>
-            <a:ext cx="5157787" cy="3684588"/>
+            <a:off x="629842" y="2505075"/>
+            <a:ext cx="3868340" cy="3684588"/>
           </a:xfrm>
         </p:spPr>
         <p:txBody>
@@ -1437,12 +1485,13 @@
               <a:rPr lang="zh-CN" altLang="en-US"/>
               <a:t>五级</a:t>
             </a:r>
-          </a:p>
-        </p:txBody>
-      </p:sp>
-      <p:sp>
-        <p:nvSpPr>
-          <p:cNvPr id="5" name="文本占位符 4"/>
+            <a:endParaRPr lang="en-US" dirty="0"/>
+          </a:p>
+        </p:txBody>
+      </p:sp>
+      <p:sp>
+        <p:nvSpPr>
+          <p:cNvPr id="5" name="Text Placeholder 4"/>
           <p:cNvSpPr>
             <a:spLocks noGrp="1"/>
           </p:cNvSpPr>
@@ -1452,8 +1501,8 @@
         </p:nvSpPr>
         <p:spPr>
           <a:xfrm>
-            <a:off x="6172200" y="1681163"/>
-            <a:ext cx="5183188" cy="823912"/>
+            <a:off x="4629150" y="1681163"/>
+            <a:ext cx="3887391" cy="823912"/>
           </a:xfrm>
         </p:spPr>
         <p:txBody>
@@ -1507,7 +1556,7 @@
       </p:sp>
       <p:sp>
         <p:nvSpPr>
-          <p:cNvPr id="6" name="内容占位符 5"/>
+          <p:cNvPr id="6" name="Content Placeholder 5"/>
           <p:cNvSpPr>
             <a:spLocks noGrp="1"/>
           </p:cNvSpPr>
@@ -1517,8 +1566,8 @@
         </p:nvSpPr>
         <p:spPr>
           <a:xfrm>
-            <a:off x="6172200" y="2505075"/>
-            <a:ext cx="5183188" cy="3684588"/>
+            <a:off x="4629150" y="2505075"/>
+            <a:ext cx="3887391" cy="3684588"/>
           </a:xfrm>
         </p:spPr>
         <p:txBody>
@@ -1558,12 +1607,13 @@
               <a:rPr lang="zh-CN" altLang="en-US"/>
               <a:t>五级</a:t>
             </a:r>
-          </a:p>
-        </p:txBody>
-      </p:sp>
-      <p:sp>
-        <p:nvSpPr>
-          <p:cNvPr id="7" name="日期占位符 6"/>
+            <a:endParaRPr lang="en-US" dirty="0"/>
+          </a:p>
+        </p:txBody>
+      </p:sp>
+      <p:sp>
+        <p:nvSpPr>
+          <p:cNvPr id="7" name="Date Placeholder 6"/>
           <p:cNvSpPr>
             <a:spLocks noGrp="1"/>
           </p:cNvSpPr>
@@ -1578,7 +1628,7 @@
           <a:p>
             <a:fld id="{C1204EAE-C964-486C-9112-A587BFBBD611}" type="datetimeFigureOut">
               <a:rPr lang="zh-CN" altLang="en-US" smtClean="0"/>
-              <a:t>2020/11/4</a:t>
+              <a:t>2020/11/9</a:t>
             </a:fld>
             <a:endParaRPr lang="zh-CN" altLang="en-US"/>
           </a:p>
@@ -1586,7 +1636,7 @@
       </p:sp>
       <p:sp>
         <p:nvSpPr>
-          <p:cNvPr id="8" name="页脚占位符 7"/>
+          <p:cNvPr id="8" name="Footer Placeholder 7"/>
           <p:cNvSpPr>
             <a:spLocks noGrp="1"/>
           </p:cNvSpPr>
@@ -1605,7 +1655,7 @@
       </p:sp>
       <p:sp>
         <p:nvSpPr>
-          <p:cNvPr id="9" name="灯片编号占位符 8"/>
+          <p:cNvPr id="9" name="Slide Number Placeholder 8"/>
           <p:cNvSpPr>
             <a:spLocks noGrp="1"/>
           </p:cNvSpPr>
@@ -1627,6 +1677,11 @@
         </p:txBody>
       </p:sp>
     </p:spTree>
+    <p:extLst>
+      <p:ext uri="{BB962C8B-B14F-4D97-AF65-F5344CB8AC3E}">
+        <p14:creationId xmlns:p14="http://schemas.microsoft.com/office/powerpoint/2010/main" val="4242424960"/>
+      </p:ext>
+    </p:extLst>
   </p:cSld>
   <p:clrMapOvr>
     <a:masterClrMapping/>
@@ -1653,7 +1708,7 @@
       </p:grpSpPr>
       <p:sp>
         <p:nvSpPr>
-          <p:cNvPr id="2" name="标题 1"/>
+          <p:cNvPr id="2" name="Title 1"/>
           <p:cNvSpPr>
             <a:spLocks noGrp="1"/>
           </p:cNvSpPr>
@@ -1670,12 +1725,13 @@
               <a:rPr lang="zh-CN" altLang="en-US"/>
               <a:t>单击此处编辑母版标题样式</a:t>
             </a:r>
-          </a:p>
-        </p:txBody>
-      </p:sp>
-      <p:sp>
-        <p:nvSpPr>
-          <p:cNvPr id="3" name="日期占位符 2"/>
+            <a:endParaRPr lang="en-US" dirty="0"/>
+          </a:p>
+        </p:txBody>
+      </p:sp>
+      <p:sp>
+        <p:nvSpPr>
+          <p:cNvPr id="3" name="Date Placeholder 2"/>
           <p:cNvSpPr>
             <a:spLocks noGrp="1"/>
           </p:cNvSpPr>
@@ -1690,7 +1746,7 @@
           <a:p>
             <a:fld id="{C1204EAE-C964-486C-9112-A587BFBBD611}" type="datetimeFigureOut">
               <a:rPr lang="zh-CN" altLang="en-US" smtClean="0"/>
-              <a:t>2020/11/4</a:t>
+              <a:t>2020/11/9</a:t>
             </a:fld>
             <a:endParaRPr lang="zh-CN" altLang="en-US"/>
           </a:p>
@@ -1698,7 +1754,7 @@
       </p:sp>
       <p:sp>
         <p:nvSpPr>
-          <p:cNvPr id="4" name="页脚占位符 3"/>
+          <p:cNvPr id="4" name="Footer Placeholder 3"/>
           <p:cNvSpPr>
             <a:spLocks noGrp="1"/>
           </p:cNvSpPr>
@@ -1717,7 +1773,7 @@
       </p:sp>
       <p:sp>
         <p:nvSpPr>
-          <p:cNvPr id="5" name="灯片编号占位符 4"/>
+          <p:cNvPr id="5" name="Slide Number Placeholder 4"/>
           <p:cNvSpPr>
             <a:spLocks noGrp="1"/>
           </p:cNvSpPr>
@@ -1739,6 +1795,11 @@
         </p:txBody>
       </p:sp>
     </p:spTree>
+    <p:extLst>
+      <p:ext uri="{BB962C8B-B14F-4D97-AF65-F5344CB8AC3E}">
+        <p14:creationId xmlns:p14="http://schemas.microsoft.com/office/powerpoint/2010/main" val="3005082823"/>
+      </p:ext>
+    </p:extLst>
   </p:cSld>
   <p:clrMapOvr>
     <a:masterClrMapping/>
@@ -1765,7 +1826,7 @@
       </p:grpSpPr>
       <p:sp>
         <p:nvSpPr>
-          <p:cNvPr id="2" name="日期占位符 1"/>
+          <p:cNvPr id="2" name="Date Placeholder 1"/>
           <p:cNvSpPr>
             <a:spLocks noGrp="1"/>
           </p:cNvSpPr>
@@ -1780,7 +1841,7 @@
           <a:p>
             <a:fld id="{C1204EAE-C964-486C-9112-A587BFBBD611}" type="datetimeFigureOut">
               <a:rPr lang="zh-CN" altLang="en-US" smtClean="0"/>
-              <a:t>2020/11/4</a:t>
+              <a:t>2020/11/9</a:t>
             </a:fld>
             <a:endParaRPr lang="zh-CN" altLang="en-US"/>
           </a:p>
@@ -1788,7 +1849,7 @@
       </p:sp>
       <p:sp>
         <p:nvSpPr>
-          <p:cNvPr id="3" name="页脚占位符 2"/>
+          <p:cNvPr id="3" name="Footer Placeholder 2"/>
           <p:cNvSpPr>
             <a:spLocks noGrp="1"/>
           </p:cNvSpPr>
@@ -1807,7 +1868,7 @@
       </p:sp>
       <p:sp>
         <p:nvSpPr>
-          <p:cNvPr id="4" name="灯片编号占位符 3"/>
+          <p:cNvPr id="4" name="Slide Number Placeholder 3"/>
           <p:cNvSpPr>
             <a:spLocks noGrp="1"/>
           </p:cNvSpPr>
@@ -1829,6 +1890,11 @@
         </p:txBody>
       </p:sp>
     </p:spTree>
+    <p:extLst>
+      <p:ext uri="{BB962C8B-B14F-4D97-AF65-F5344CB8AC3E}">
+        <p14:creationId xmlns:p14="http://schemas.microsoft.com/office/powerpoint/2010/main" val="1392034388"/>
+      </p:ext>
+    </p:extLst>
   </p:cSld>
   <p:clrMapOvr>
     <a:masterClrMapping/>
@@ -1855,7 +1921,7 @@
       </p:grpSpPr>
       <p:sp>
         <p:nvSpPr>
-          <p:cNvPr id="2" name="标题 1"/>
+          <p:cNvPr id="2" name="Title 1"/>
           <p:cNvSpPr>
             <a:spLocks noGrp="1"/>
           </p:cNvSpPr>
@@ -1865,8 +1931,8 @@
         </p:nvSpPr>
         <p:spPr>
           <a:xfrm>
-            <a:off x="839788" y="457200"/>
-            <a:ext cx="3932237" cy="1600200"/>
+            <a:off x="629841" y="457200"/>
+            <a:ext cx="2949178" cy="1600200"/>
           </a:xfrm>
         </p:spPr>
         <p:txBody>
@@ -1881,12 +1947,13 @@
               <a:rPr lang="zh-CN" altLang="en-US"/>
               <a:t>单击此处编辑母版标题样式</a:t>
             </a:r>
-          </a:p>
-        </p:txBody>
-      </p:sp>
-      <p:sp>
-        <p:nvSpPr>
-          <p:cNvPr id="3" name="内容占位符 2"/>
+            <a:endParaRPr lang="en-US" dirty="0"/>
+          </a:p>
+        </p:txBody>
+      </p:sp>
+      <p:sp>
+        <p:nvSpPr>
+          <p:cNvPr id="3" name="Content Placeholder 2"/>
           <p:cNvSpPr>
             <a:spLocks noGrp="1"/>
           </p:cNvSpPr>
@@ -1896,8 +1963,8 @@
         </p:nvSpPr>
         <p:spPr>
           <a:xfrm>
-            <a:off x="5183188" y="987425"/>
-            <a:ext cx="6172200" cy="4873625"/>
+            <a:off x="3887391" y="987426"/>
+            <a:ext cx="4629150" cy="4873625"/>
           </a:xfrm>
         </p:spPr>
         <p:txBody>
@@ -1965,12 +2032,13 @@
               <a:rPr lang="zh-CN" altLang="en-US"/>
               <a:t>五级</a:t>
             </a:r>
-          </a:p>
-        </p:txBody>
-      </p:sp>
-      <p:sp>
-        <p:nvSpPr>
-          <p:cNvPr id="4" name="文本占位符 3"/>
+            <a:endParaRPr lang="en-US" dirty="0"/>
+          </a:p>
+        </p:txBody>
+      </p:sp>
+      <p:sp>
+        <p:nvSpPr>
+          <p:cNvPr id="4" name="Text Placeholder 3"/>
           <p:cNvSpPr>
             <a:spLocks noGrp="1"/>
           </p:cNvSpPr>
@@ -1980,8 +2048,8 @@
         </p:nvSpPr>
         <p:spPr>
           <a:xfrm>
-            <a:off x="839788" y="2057400"/>
-            <a:ext cx="3932237" cy="3811588"/>
+            <a:off x="629841" y="2057400"/>
+            <a:ext cx="2949178" cy="3811588"/>
           </a:xfrm>
         </p:spPr>
         <p:txBody>
@@ -2035,7 +2103,7 @@
       </p:sp>
       <p:sp>
         <p:nvSpPr>
-          <p:cNvPr id="5" name="日期占位符 4"/>
+          <p:cNvPr id="5" name="Date Placeholder 4"/>
           <p:cNvSpPr>
             <a:spLocks noGrp="1"/>
           </p:cNvSpPr>
@@ -2050,7 +2118,7 @@
           <a:p>
             <a:fld id="{C1204EAE-C964-486C-9112-A587BFBBD611}" type="datetimeFigureOut">
               <a:rPr lang="zh-CN" altLang="en-US" smtClean="0"/>
-              <a:t>2020/11/4</a:t>
+              <a:t>2020/11/9</a:t>
             </a:fld>
             <a:endParaRPr lang="zh-CN" altLang="en-US"/>
           </a:p>
@@ -2058,7 +2126,7 @@
       </p:sp>
       <p:sp>
         <p:nvSpPr>
-          <p:cNvPr id="6" name="页脚占位符 5"/>
+          <p:cNvPr id="6" name="Footer Placeholder 5"/>
           <p:cNvSpPr>
             <a:spLocks noGrp="1"/>
           </p:cNvSpPr>
@@ -2077,7 +2145,7 @@
       </p:sp>
       <p:sp>
         <p:nvSpPr>
-          <p:cNvPr id="7" name="灯片编号占位符 6"/>
+          <p:cNvPr id="7" name="Slide Number Placeholder 6"/>
           <p:cNvSpPr>
             <a:spLocks noGrp="1"/>
           </p:cNvSpPr>
@@ -2099,6 +2167,11 @@
         </p:txBody>
       </p:sp>
     </p:spTree>
+    <p:extLst>
+      <p:ext uri="{BB962C8B-B14F-4D97-AF65-F5344CB8AC3E}">
+        <p14:creationId xmlns:p14="http://schemas.microsoft.com/office/powerpoint/2010/main" val="2687401016"/>
+      </p:ext>
+    </p:extLst>
   </p:cSld>
   <p:clrMapOvr>
     <a:masterClrMapping/>
@@ -2125,7 +2198,7 @@
       </p:grpSpPr>
       <p:sp>
         <p:nvSpPr>
-          <p:cNvPr id="2" name="标题 1"/>
+          <p:cNvPr id="2" name="Title 1"/>
           <p:cNvSpPr>
             <a:spLocks noGrp="1"/>
           </p:cNvSpPr>
@@ -2135,8 +2208,8 @@
         </p:nvSpPr>
         <p:spPr>
           <a:xfrm>
-            <a:off x="839788" y="457200"/>
-            <a:ext cx="3932237" cy="1600200"/>
+            <a:off x="629841" y="457200"/>
+            <a:ext cx="2949178" cy="1600200"/>
           </a:xfrm>
         </p:spPr>
         <p:txBody>
@@ -2151,14 +2224,15 @@
               <a:rPr lang="zh-CN" altLang="en-US"/>
               <a:t>单击此处编辑母版标题样式</a:t>
             </a:r>
-          </a:p>
-        </p:txBody>
-      </p:sp>
-      <p:sp>
-        <p:nvSpPr>
-          <p:cNvPr id="3" name="图片占位符 2"/>
+            <a:endParaRPr lang="en-US" dirty="0"/>
+          </a:p>
+        </p:txBody>
+      </p:sp>
+      <p:sp>
+        <p:nvSpPr>
+          <p:cNvPr id="3" name="Picture Placeholder 2"/>
           <p:cNvSpPr>
-            <a:spLocks noGrp="1"/>
+            <a:spLocks noGrp="1" noChangeAspect="1"/>
           </p:cNvSpPr>
           <p:nvPr>
             <p:ph type="pic" idx="1"/>
@@ -2166,12 +2240,12 @@
         </p:nvSpPr>
         <p:spPr>
           <a:xfrm>
-            <a:off x="5183188" y="987425"/>
-            <a:ext cx="6172200" cy="4873625"/>
-          </a:xfrm>
-        </p:spPr>
-        <p:txBody>
-          <a:bodyPr/>
+            <a:off x="3887391" y="987426"/>
+            <a:ext cx="4629150" cy="4873625"/>
+          </a:xfrm>
+        </p:spPr>
+        <p:txBody>
+          <a:bodyPr anchor="t"/>
           <a:lstStyle>
             <a:lvl1pPr marL="0" indent="0">
               <a:buNone/>
@@ -2211,13 +2285,17 @@
             </a:lvl9pPr>
           </a:lstStyle>
           <a:p>
-            <a:endParaRPr lang="zh-CN" altLang="en-US"/>
-          </a:p>
-        </p:txBody>
-      </p:sp>
-      <p:sp>
-        <p:nvSpPr>
-          <p:cNvPr id="4" name="文本占位符 3"/>
+            <a:r>
+              <a:rPr lang="zh-CN" altLang="en-US"/>
+              <a:t>单击图标添加图片</a:t>
+            </a:r>
+            <a:endParaRPr lang="en-US" dirty="0"/>
+          </a:p>
+        </p:txBody>
+      </p:sp>
+      <p:sp>
+        <p:nvSpPr>
+          <p:cNvPr id="4" name="Text Placeholder 3"/>
           <p:cNvSpPr>
             <a:spLocks noGrp="1"/>
           </p:cNvSpPr>
@@ -2227,8 +2305,8 @@
         </p:nvSpPr>
         <p:spPr>
           <a:xfrm>
-            <a:off x="839788" y="2057400"/>
-            <a:ext cx="3932237" cy="3811588"/>
+            <a:off x="629841" y="2057400"/>
+            <a:ext cx="2949178" cy="3811588"/>
           </a:xfrm>
         </p:spPr>
         <p:txBody>
@@ -2282,7 +2360,7 @@
       </p:sp>
       <p:sp>
         <p:nvSpPr>
-          <p:cNvPr id="5" name="日期占位符 4"/>
+          <p:cNvPr id="5" name="Date Placeholder 4"/>
           <p:cNvSpPr>
             <a:spLocks noGrp="1"/>
           </p:cNvSpPr>
@@ -2297,7 +2375,7 @@
           <a:p>
             <a:fld id="{C1204EAE-C964-486C-9112-A587BFBBD611}" type="datetimeFigureOut">
               <a:rPr lang="zh-CN" altLang="en-US" smtClean="0"/>
-              <a:t>2020/11/4</a:t>
+              <a:t>2020/11/9</a:t>
             </a:fld>
             <a:endParaRPr lang="zh-CN" altLang="en-US"/>
           </a:p>
@@ -2305,7 +2383,7 @@
       </p:sp>
       <p:sp>
         <p:nvSpPr>
-          <p:cNvPr id="6" name="页脚占位符 5"/>
+          <p:cNvPr id="6" name="Footer Placeholder 5"/>
           <p:cNvSpPr>
             <a:spLocks noGrp="1"/>
           </p:cNvSpPr>
@@ -2324,7 +2402,7 @@
       </p:sp>
       <p:sp>
         <p:nvSpPr>
-          <p:cNvPr id="7" name="灯片编号占位符 6"/>
+          <p:cNvPr id="7" name="Slide Number Placeholder 6"/>
           <p:cNvSpPr>
             <a:spLocks noGrp="1"/>
           </p:cNvSpPr>
@@ -2346,6 +2424,11 @@
         </p:txBody>
       </p:sp>
     </p:spTree>
+    <p:extLst>
+      <p:ext uri="{BB962C8B-B14F-4D97-AF65-F5344CB8AC3E}">
+        <p14:creationId xmlns:p14="http://schemas.microsoft.com/office/powerpoint/2010/main" val="1786422124"/>
+      </p:ext>
+    </p:extLst>
   </p:cSld>
   <p:clrMapOvr>
     <a:masterClrMapping/>
@@ -2377,7 +2460,7 @@
       </p:grpSpPr>
       <p:sp>
         <p:nvSpPr>
-          <p:cNvPr id="2" name="标题占位符 1"/>
+          <p:cNvPr id="2" name="Title Placeholder 1"/>
           <p:cNvSpPr>
             <a:spLocks noGrp="1"/>
           </p:cNvSpPr>
@@ -2387,8 +2470,8 @@
         </p:nvSpPr>
         <p:spPr>
           <a:xfrm>
-            <a:off x="838200" y="365125"/>
-            <a:ext cx="10515600" cy="1325563"/>
+            <a:off x="628650" y="365126"/>
+            <a:ext cx="7886700" cy="1325563"/>
           </a:xfrm>
           <a:prstGeom prst="rect">
             <a:avLst/>
@@ -2404,12 +2487,13 @@
               <a:rPr lang="zh-CN" altLang="en-US"/>
               <a:t>单击此处编辑母版标题样式</a:t>
             </a:r>
-          </a:p>
-        </p:txBody>
-      </p:sp>
-      <p:sp>
-        <p:nvSpPr>
-          <p:cNvPr id="3" name="文本占位符 2"/>
+            <a:endParaRPr lang="en-US" dirty="0"/>
+          </a:p>
+        </p:txBody>
+      </p:sp>
+      <p:sp>
+        <p:nvSpPr>
+          <p:cNvPr id="3" name="Text Placeholder 2"/>
           <p:cNvSpPr>
             <a:spLocks noGrp="1"/>
           </p:cNvSpPr>
@@ -2419,8 +2503,8 @@
         </p:nvSpPr>
         <p:spPr>
           <a:xfrm>
-            <a:off x="838200" y="1825625"/>
-            <a:ext cx="10515600" cy="4351338"/>
+            <a:off x="628650" y="1825625"/>
+            <a:ext cx="7886700" cy="4351338"/>
           </a:xfrm>
           <a:prstGeom prst="rect">
             <a:avLst/>
@@ -2465,12 +2549,13 @@
               <a:rPr lang="zh-CN" altLang="en-US"/>
               <a:t>五级</a:t>
             </a:r>
-          </a:p>
-        </p:txBody>
-      </p:sp>
-      <p:sp>
-        <p:nvSpPr>
-          <p:cNvPr id="4" name="日期占位符 3"/>
+            <a:endParaRPr lang="en-US" dirty="0"/>
+          </a:p>
+        </p:txBody>
+      </p:sp>
+      <p:sp>
+        <p:nvSpPr>
+          <p:cNvPr id="4" name="Date Placeholder 3"/>
           <p:cNvSpPr>
             <a:spLocks noGrp="1"/>
           </p:cNvSpPr>
@@ -2480,8 +2565,8 @@
         </p:nvSpPr>
         <p:spPr>
           <a:xfrm>
-            <a:off x="838200" y="6356350"/>
-            <a:ext cx="2743200" cy="365125"/>
+            <a:off x="628650" y="6356351"/>
+            <a:ext cx="2057400" cy="365125"/>
           </a:xfrm>
           <a:prstGeom prst="rect">
             <a:avLst/>
@@ -2503,7 +2588,7 @@
           <a:p>
             <a:fld id="{C1204EAE-C964-486C-9112-A587BFBBD611}" type="datetimeFigureOut">
               <a:rPr lang="zh-CN" altLang="en-US" smtClean="0"/>
-              <a:t>2020/11/4</a:t>
+              <a:t>2020/11/9</a:t>
             </a:fld>
             <a:endParaRPr lang="zh-CN" altLang="en-US"/>
           </a:p>
@@ -2511,7 +2596,7 @@
       </p:sp>
       <p:sp>
         <p:nvSpPr>
-          <p:cNvPr id="5" name="页脚占位符 4"/>
+          <p:cNvPr id="5" name="Footer Placeholder 4"/>
           <p:cNvSpPr>
             <a:spLocks noGrp="1"/>
           </p:cNvSpPr>
@@ -2521,8 +2606,8 @@
         </p:nvSpPr>
         <p:spPr>
           <a:xfrm>
-            <a:off x="4038600" y="6356350"/>
-            <a:ext cx="4114800" cy="365125"/>
+            <a:off x="3028950" y="6356351"/>
+            <a:ext cx="3086100" cy="365125"/>
           </a:xfrm>
           <a:prstGeom prst="rect">
             <a:avLst/>
@@ -2548,7 +2633,7 @@
       </p:sp>
       <p:sp>
         <p:nvSpPr>
-          <p:cNvPr id="6" name="灯片编号占位符 5"/>
+          <p:cNvPr id="6" name="Slide Number Placeholder 5"/>
           <p:cNvSpPr>
             <a:spLocks noGrp="1"/>
           </p:cNvSpPr>
@@ -2558,8 +2643,8 @@
         </p:nvSpPr>
         <p:spPr>
           <a:xfrm>
-            <a:off x="8610600" y="6356350"/>
-            <a:ext cx="2743200" cy="365125"/>
+            <a:off x="6457950" y="6356351"/>
+            <a:ext cx="2057400" cy="365125"/>
           </a:xfrm>
           <a:prstGeom prst="rect">
             <a:avLst/>
@@ -2588,20 +2673,25 @@
         </p:txBody>
       </p:sp>
     </p:spTree>
+    <p:extLst>
+      <p:ext uri="{BB962C8B-B14F-4D97-AF65-F5344CB8AC3E}">
+        <p14:creationId xmlns:p14="http://schemas.microsoft.com/office/powerpoint/2010/main" val="1939357829"/>
+      </p:ext>
+    </p:extLst>
   </p:cSld>
   <p:clrMap bg1="lt1" tx1="dk1" bg2="lt2" tx2="dk2" accent1="accent1" accent2="accent2" accent3="accent3" accent4="accent4" accent5="accent5" accent6="accent6" hlink="hlink" folHlink="folHlink"/>
   <p:sldLayoutIdLst>
-    <p:sldLayoutId id="2147483649" r:id="rId1"/>
-    <p:sldLayoutId id="2147483650" r:id="rId2"/>
-    <p:sldLayoutId id="2147483651" r:id="rId3"/>
-    <p:sldLayoutId id="2147483652" r:id="rId4"/>
-    <p:sldLayoutId id="2147483653" r:id="rId5"/>
-    <p:sldLayoutId id="2147483654" r:id="rId6"/>
-    <p:sldLayoutId id="2147483655" r:id="rId7"/>
-    <p:sldLayoutId id="2147483656" r:id="rId8"/>
-    <p:sldLayoutId id="2147483657" r:id="rId9"/>
-    <p:sldLayoutId id="2147483658" r:id="rId10"/>
-    <p:sldLayoutId id="2147483659" r:id="rId11"/>
+    <p:sldLayoutId id="2147483661" r:id="rId1"/>
+    <p:sldLayoutId id="2147483662" r:id="rId2"/>
+    <p:sldLayoutId id="2147483663" r:id="rId3"/>
+    <p:sldLayoutId id="2147483664" r:id="rId4"/>
+    <p:sldLayoutId id="2147483665" r:id="rId5"/>
+    <p:sldLayoutId id="2147483666" r:id="rId6"/>
+    <p:sldLayoutId id="2147483667" r:id="rId7"/>
+    <p:sldLayoutId id="2147483668" r:id="rId8"/>
+    <p:sldLayoutId id="2147483669" r:id="rId9"/>
+    <p:sldLayoutId id="2147483670" r:id="rId10"/>
+    <p:sldLayoutId id="2147483671" r:id="rId11"/>
   </p:sldLayoutIdLst>
   <p:txStyles>
     <p:titleStyle>
@@ -2789,7 +2879,7 @@
     </p:bodyStyle>
     <p:otherStyle>
       <a:defPPr>
-        <a:defRPr lang="zh-CN"/>
+        <a:defRPr lang="en-US"/>
       </a:defPPr>
       <a:lvl1pPr marL="0" algn="l" defTabSz="914400" rtl="0" eaLnBrk="1" latinLnBrk="0" hangingPunct="1">
         <a:defRPr sz="1800" kern="1200">
@@ -2924,7 +3014,7 @@
         <p:spPr>
           <a:xfrm>
             <a:off x="0" y="0"/>
-            <a:ext cx="12192000" cy="6858000"/>
+            <a:ext cx="9144000" cy="6858000"/>
           </a:xfrm>
           <a:prstGeom prst="rect">
             <a:avLst/>
@@ -2943,8 +3033,8 @@
         </p:nvSpPr>
         <p:spPr>
           <a:xfrm>
-            <a:off x="2580443" y="1322772"/>
-            <a:ext cx="7031114" cy="2024108"/>
+            <a:off x="1935332" y="1849329"/>
+            <a:ext cx="5273336" cy="1518081"/>
           </a:xfrm>
         </p:spPr>
         <p:txBody>
@@ -2954,7 +3044,7 @@
           <a:lstStyle/>
           <a:p>
             <a:r>
-              <a:rPr lang="zh-CN" altLang="en-US" sz="2400" dirty="0">
+              <a:rPr lang="zh-CN" altLang="en-US" sz="1800" dirty="0">
                 <a:solidFill>
                   <a:schemeClr val="accent1">
                     <a:lumMod val="40000"/>
@@ -2979,8 +3069,8 @@
         </p:nvSpPr>
         <p:spPr>
           <a:xfrm>
-            <a:off x="236220" y="657860"/>
-            <a:ext cx="2928620" cy="916305"/>
+            <a:off x="177165" y="1350645"/>
+            <a:ext cx="2196465" cy="687229"/>
           </a:xfrm>
         </p:spPr>
         <p:txBody>
@@ -2990,7 +3080,7 @@
           <a:lstStyle/>
           <a:p>
             <a:r>
-              <a:rPr lang="zh-CN" altLang="en-US" sz="4400" dirty="0">
+              <a:rPr lang="zh-CN" altLang="en-US" sz="3300" dirty="0">
                 <a:solidFill>
                   <a:schemeClr val="accent1">
                     <a:lumMod val="40000"/>
@@ -3017,8 +3107,8 @@
         </p:nvSpPr>
         <p:spPr>
           <a:xfrm>
-            <a:off x="5461234" y="4300320"/>
-            <a:ext cx="550151" cy="369332"/>
+            <a:off x="4095926" y="4082490"/>
+            <a:ext cx="458780" cy="300082"/>
           </a:xfrm>
           <a:prstGeom prst="rect">
             <a:avLst/>
@@ -3032,7 +3122,7 @@
           <a:lstStyle/>
           <a:p>
             <a:r>
-              <a:rPr lang="en-US" altLang="zh-CN" dirty="0">
+              <a:rPr lang="en-US" altLang="zh-CN" sz="1350" dirty="0">
                 <a:solidFill>
                   <a:schemeClr val="accent1">
                     <a:lumMod val="40000"/>
@@ -3042,7 +3132,7 @@
               </a:rPr>
               <a:t>204</a:t>
             </a:r>
-            <a:endParaRPr lang="zh-CN" altLang="en-US" dirty="0">
+            <a:endParaRPr lang="zh-CN" altLang="en-US" sz="1350" dirty="0">
               <a:solidFill>
                 <a:schemeClr val="accent1">
                   <a:lumMod val="40000"/>
@@ -3080,10 +3170,10 @@
       </p:grpSpPr>
       <p:pic>
         <p:nvPicPr>
-          <p:cNvPr id="9" name="图片 8">
-            <a:extLst>
-              <a:ext uri="{FF2B5EF4-FFF2-40B4-BE49-F238E27FC236}">
-                <a16:creationId xmlns:a16="http://schemas.microsoft.com/office/drawing/2014/main" id="{3712C671-C2BE-4DA5-969C-C12BA63CD97C}"/>
+          <p:cNvPr id="3" name="图片 2">
+            <a:extLst>
+              <a:ext uri="{FF2B5EF4-FFF2-40B4-BE49-F238E27FC236}">
+                <a16:creationId xmlns:a16="http://schemas.microsoft.com/office/drawing/2014/main" id="{B8815C74-6B12-4AD1-8C7D-5179615653EC}"/>
               </a:ext>
             </a:extLst>
           </p:cNvPr>
@@ -3099,7 +3189,7 @@
         <p:spPr>
           <a:xfrm>
             <a:off x="0" y="0"/>
-            <a:ext cx="12192000" cy="6858000"/>
+            <a:ext cx="9144000" cy="6858000"/>
           </a:xfrm>
           <a:prstGeom prst="rect">
             <a:avLst/>
@@ -3124,7 +3214,7 @@
           <a:lstStyle/>
           <a:p>
             <a:r>
-              <a:rPr lang="zh-CN" altLang="en-US" sz="1600" b="1" dirty="0">
+              <a:rPr lang="zh-CN" altLang="en-US" sz="1200" b="1" dirty="0">
                 <a:solidFill>
                   <a:schemeClr val="accent1">
                     <a:lumMod val="40000"/>
@@ -3142,7 +3232,7 @@
               <a:t>设置无线</a:t>
             </a:r>
             <a:r>
-              <a:rPr lang="en-US" altLang="zh-CN" sz="1600" b="1" dirty="0">
+              <a:rPr lang="en-US" altLang="zh-CN" sz="1200" b="1" dirty="0">
                 <a:solidFill>
                   <a:schemeClr val="accent1">
                     <a:lumMod val="40000"/>
@@ -3160,7 +3250,7 @@
               <a:t>IP</a:t>
             </a:r>
             <a:r>
-              <a:rPr lang="zh-CN" altLang="en-US" sz="1600" b="1" dirty="0">
+              <a:rPr lang="zh-CN" altLang="en-US" sz="1200" b="1" dirty="0">
                 <a:solidFill>
                   <a:schemeClr val="accent1">
                     <a:lumMod val="40000"/>
@@ -3178,7 +3268,7 @@
               <a:t>地址，一个电脑为</a:t>
             </a:r>
             <a:r>
-              <a:rPr lang="en-US" altLang="zh-CN" sz="1600" b="1" dirty="0">
+              <a:rPr lang="en-US" altLang="zh-CN" sz="1200" b="1" dirty="0">
                 <a:solidFill>
                   <a:schemeClr val="accent1">
                     <a:lumMod val="40000"/>
@@ -3196,7 +3286,7 @@
               <a:t>192.168.1.11</a:t>
             </a:r>
             <a:r>
-              <a:rPr lang="zh-CN" altLang="en-US" sz="1600" b="1" dirty="0">
+              <a:rPr lang="zh-CN" altLang="en-US" sz="1200" b="1" dirty="0">
                 <a:solidFill>
                   <a:schemeClr val="accent1">
                     <a:lumMod val="40000"/>
@@ -3214,7 +3304,7 @@
               <a:t>，一个电脑为</a:t>
             </a:r>
             <a:r>
-              <a:rPr lang="en-US" altLang="zh-CN" sz="1600" b="1" dirty="0">
+              <a:rPr lang="en-US" altLang="zh-CN" sz="1200" b="1" dirty="0">
                 <a:solidFill>
                   <a:schemeClr val="accent1">
                     <a:lumMod val="40000"/>
@@ -3232,7 +3322,7 @@
               <a:t>192.168.1.22</a:t>
             </a:r>
             <a:r>
-              <a:rPr lang="zh-CN" altLang="en-US" sz="1600" b="1" dirty="0">
+              <a:rPr lang="zh-CN" altLang="en-US" sz="1200" b="1" dirty="0">
                 <a:solidFill>
                   <a:schemeClr val="accent1">
                     <a:lumMod val="40000"/>
@@ -3250,7 +3340,7 @@
               <a:t>，用</a:t>
             </a:r>
             <a:r>
-              <a:rPr lang="en-US" altLang="zh-CN" sz="1600" b="1" dirty="0">
+              <a:rPr lang="en-US" altLang="zh-CN" sz="1200" b="1" dirty="0">
                 <a:solidFill>
                   <a:schemeClr val="accent1">
                     <a:lumMod val="40000"/>
@@ -3268,7 +3358,7 @@
               <a:t>IP</a:t>
             </a:r>
             <a:r>
-              <a:rPr lang="zh-CN" altLang="en-US" sz="1600" b="1" dirty="0">
+              <a:rPr lang="zh-CN" altLang="en-US" sz="1200" b="1" dirty="0">
                 <a:solidFill>
                   <a:schemeClr val="accent1">
                     <a:lumMod val="40000"/>
@@ -3286,7 +3376,7 @@
               <a:t>地址为</a:t>
             </a:r>
             <a:r>
-              <a:rPr lang="en-US" altLang="zh-CN" sz="1600" b="1" dirty="0">
+              <a:rPr lang="en-US" altLang="zh-CN" sz="1200" b="1" dirty="0">
                 <a:solidFill>
                   <a:schemeClr val="accent1">
                     <a:lumMod val="40000"/>
@@ -3304,7 +3394,7 @@
               <a:t>192.168.1.11</a:t>
             </a:r>
             <a:r>
-              <a:rPr lang="zh-CN" altLang="en-US" sz="1600" b="1" dirty="0">
+              <a:rPr lang="zh-CN" altLang="en-US" sz="1200" b="1" dirty="0">
                 <a:solidFill>
                   <a:schemeClr val="accent1">
                     <a:lumMod val="40000"/>
@@ -3322,7 +3412,7 @@
               <a:t>的电脑去</a:t>
             </a:r>
             <a:r>
-              <a:rPr lang="en-US" altLang="zh-CN" sz="1600" b="1" dirty="0">
+              <a:rPr lang="en-US" altLang="zh-CN" sz="1200" b="1" dirty="0">
                 <a:solidFill>
                   <a:schemeClr val="accent1">
                     <a:lumMod val="40000"/>
@@ -3340,7 +3430,7 @@
               <a:t>ping192.168.1.22</a:t>
             </a:r>
             <a:r>
-              <a:rPr lang="zh-CN" altLang="en-US" sz="1600" b="1" dirty="0">
+              <a:rPr lang="zh-CN" altLang="en-US" sz="1200" b="1" dirty="0">
                 <a:solidFill>
                   <a:schemeClr val="accent1">
                     <a:lumMod val="40000"/>
@@ -3380,8 +3470,8 @@
         </p:blipFill>
         <p:spPr>
           <a:xfrm>
-            <a:off x="2211010" y="1690688"/>
-            <a:ext cx="7769980" cy="4638040"/>
+            <a:off x="1658258" y="2125266"/>
+            <a:ext cx="5827485" cy="3478530"/>
           </a:xfrm>
           <a:prstGeom prst="rect">
             <a:avLst/>
@@ -3402,8 +3492,8 @@
         </p:nvSpPr>
         <p:spPr>
           <a:xfrm>
-            <a:off x="4409813" y="6673334"/>
-            <a:ext cx="3372374" cy="369332"/>
+            <a:off x="3307360" y="5862250"/>
+            <a:ext cx="2529281" cy="300082"/>
           </a:xfrm>
           <a:prstGeom prst="rect">
             <a:avLst/>
@@ -3418,7 +3508,7 @@
           <a:p>
             <a:pPr algn="ctr"/>
             <a:r>
-              <a:rPr lang="zh-CN" altLang="en-US" dirty="0">
+              <a:rPr lang="zh-CN" altLang="en-US" sz="1350" dirty="0">
                 <a:solidFill>
                   <a:schemeClr val="accent1">
                     <a:lumMod val="40000"/>
@@ -3429,7 +3519,7 @@
               <a:t>网线</a:t>
             </a:r>
             <a:r>
-              <a:rPr lang="en-US" altLang="zh-CN" dirty="0">
+              <a:rPr lang="en-US" altLang="zh-CN" sz="1350" dirty="0">
                 <a:solidFill>
                   <a:schemeClr val="accent1">
                     <a:lumMod val="40000"/>
@@ -3440,7 +3530,7 @@
               <a:t>ping</a:t>
             </a:r>
             <a:r>
-              <a:rPr lang="zh-CN" altLang="en-US" dirty="0">
+              <a:rPr lang="zh-CN" altLang="en-US" sz="1350" dirty="0">
                 <a:solidFill>
                   <a:schemeClr val="accent1">
                     <a:lumMod val="40000"/>
@@ -3480,10 +3570,10 @@
       </p:grpSpPr>
       <p:pic>
         <p:nvPicPr>
-          <p:cNvPr id="3" name="图片 2">
-            <a:extLst>
-              <a:ext uri="{FF2B5EF4-FFF2-40B4-BE49-F238E27FC236}">
-                <a16:creationId xmlns:a16="http://schemas.microsoft.com/office/drawing/2014/main" id="{FAB06EA9-E6F6-448A-AA64-D1E7261AA1E6}"/>
+          <p:cNvPr id="4" name="图片 3">
+            <a:extLst>
+              <a:ext uri="{FF2B5EF4-FFF2-40B4-BE49-F238E27FC236}">
+                <a16:creationId xmlns:a16="http://schemas.microsoft.com/office/drawing/2014/main" id="{7F58B310-E75F-43B9-AC6F-5CAED2E569AC}"/>
               </a:ext>
             </a:extLst>
           </p:cNvPr>
@@ -3499,7 +3589,7 @@
         <p:spPr>
           <a:xfrm>
             <a:off x="0" y="0"/>
-            <a:ext cx="12192000" cy="6858000"/>
+            <a:ext cx="9144000" cy="6858000"/>
           </a:xfrm>
           <a:prstGeom prst="rect">
             <a:avLst/>
@@ -3524,7 +3614,7 @@
           <a:lstStyle/>
           <a:p>
             <a:r>
-              <a:rPr lang="zh-CN" altLang="en-US" sz="1600" b="1" dirty="0">
+              <a:rPr lang="zh-CN" altLang="en-US" sz="1200" b="1" dirty="0">
                 <a:solidFill>
                   <a:schemeClr val="accent1">
                     <a:lumMod val="40000"/>
@@ -3562,8 +3652,8 @@
         </p:blipFill>
         <p:spPr>
           <a:xfrm>
-            <a:off x="1108216" y="1690688"/>
-            <a:ext cx="9807790" cy="4206605"/>
+            <a:off x="831162" y="2125266"/>
+            <a:ext cx="7355843" cy="3154954"/>
           </a:xfrm>
           <a:prstGeom prst="rect">
             <a:avLst/>
@@ -3597,10 +3687,10 @@
       </p:grpSpPr>
       <p:pic>
         <p:nvPicPr>
-          <p:cNvPr id="17" name="图片 16">
-            <a:extLst>
-              <a:ext uri="{FF2B5EF4-FFF2-40B4-BE49-F238E27FC236}">
-                <a16:creationId xmlns:a16="http://schemas.microsoft.com/office/drawing/2014/main" id="{34599DD7-7163-4C3F-9FE8-A79B54DC9C52}"/>
+          <p:cNvPr id="2" name="图片 1">
+            <a:extLst>
+              <a:ext uri="{FF2B5EF4-FFF2-40B4-BE49-F238E27FC236}">
+                <a16:creationId xmlns:a16="http://schemas.microsoft.com/office/drawing/2014/main" id="{A41EE860-DEAC-4EAC-9DE5-56FE8C360448}"/>
               </a:ext>
             </a:extLst>
           </p:cNvPr>
@@ -3616,7 +3706,7 @@
         <p:spPr>
           <a:xfrm>
             <a:off x="0" y="0"/>
-            <a:ext cx="12192000" cy="6858000"/>
+            <a:ext cx="9144000" cy="6858000"/>
           </a:xfrm>
           <a:prstGeom prst="rect">
             <a:avLst/>
@@ -3651,8 +3741,8 @@
         </p:blipFill>
         <p:spPr>
           <a:xfrm>
-            <a:off x="2312368" y="740837"/>
-            <a:ext cx="6026289" cy="1714928"/>
+            <a:off x="1734276" y="1412878"/>
+            <a:ext cx="4519717" cy="1286196"/>
           </a:xfrm>
           <a:prstGeom prst="rect">
             <a:avLst/>
@@ -3687,8 +3777,8 @@
         </p:blipFill>
         <p:spPr>
           <a:xfrm>
-            <a:off x="1987097" y="2833498"/>
-            <a:ext cx="2977486" cy="1723808"/>
+            <a:off x="1490323" y="2982374"/>
+            <a:ext cx="2233115" cy="1292856"/>
           </a:xfrm>
           <a:prstGeom prst="rect">
             <a:avLst/>
@@ -3710,7 +3800,7 @@
           <p:nvPr/>
         </p:nvPicPr>
         <p:blipFill>
-          <a:blip r:embed="rId5">
+          <a:blip r:embed="rId5" cstate="print">
             <a:extLst>
               <a:ext uri="{28A0092B-C50C-407E-A947-70E740481C1C}">
                 <a14:useLocalDpi xmlns:a14="http://schemas.microsoft.com/office/drawing/2010/main" val="0"/>
@@ -3723,8 +3813,8 @@
         </p:blipFill>
         <p:spPr>
           <a:xfrm>
-            <a:off x="5400815" y="2820743"/>
-            <a:ext cx="4758253" cy="1723765"/>
+            <a:off x="4050612" y="2972808"/>
+            <a:ext cx="3568690" cy="1292824"/>
           </a:xfrm>
           <a:prstGeom prst="rect">
             <a:avLst/>
@@ -3749,8 +3839,8 @@
         </p:nvSpPr>
         <p:spPr>
           <a:xfrm>
-            <a:off x="2312368" y="480214"/>
-            <a:ext cx="7480830" cy="207684"/>
+            <a:off x="1734276" y="1217411"/>
+            <a:ext cx="5610623" cy="155763"/>
           </a:xfrm>
         </p:spPr>
         <p:txBody>
@@ -3761,7 +3851,7 @@
           <a:p>
             <a:pPr algn="ctr"/>
             <a:r>
-              <a:rPr lang="zh-CN" altLang="en-US" sz="1400" b="1" dirty="0">
+              <a:rPr lang="zh-CN" altLang="en-US" sz="1050" b="1" dirty="0">
                 <a:solidFill>
                   <a:schemeClr val="tx2">
                     <a:lumMod val="60000"/>
@@ -3795,8 +3885,8 @@
         </p:nvSpPr>
         <p:spPr>
           <a:xfrm>
-            <a:off x="2057802" y="4840448"/>
-            <a:ext cx="6686026" cy="646331"/>
+            <a:off x="1543351" y="4487587"/>
+            <a:ext cx="5014520" cy="507831"/>
           </a:xfrm>
           <a:prstGeom prst="rect">
             <a:avLst/>
@@ -3810,7 +3900,7 @@
           <a:lstStyle/>
           <a:p>
             <a:r>
-              <a:rPr lang="zh-CN" altLang="en-US" dirty="0">
+              <a:rPr lang="zh-CN" altLang="en-US" sz="1350" dirty="0">
                 <a:solidFill>
                   <a:schemeClr val="accent1">
                     <a:lumMod val="60000"/>
@@ -3821,7 +3911,7 @@
               <a:t>经过实验：访问</a:t>
             </a:r>
             <a:r>
-              <a:rPr lang="en-US" altLang="zh-CN" dirty="0">
+              <a:rPr lang="en-US" altLang="zh-CN" sz="1350" dirty="0">
                 <a:solidFill>
                   <a:schemeClr val="accent1">
                     <a:lumMod val="60000"/>
@@ -3832,7 +3922,7 @@
               <a:t>192.168.1.11 </a:t>
             </a:r>
             <a:r>
-              <a:rPr lang="zh-CN" altLang="en-US" dirty="0">
+              <a:rPr lang="zh-CN" altLang="en-US" sz="1350" dirty="0">
                 <a:solidFill>
                   <a:schemeClr val="accent1">
                     <a:lumMod val="60000"/>
@@ -3843,7 +3933,7 @@
               <a:t>速度和</a:t>
             </a:r>
             <a:r>
-              <a:rPr lang="en-US" altLang="zh-CN" dirty="0">
+              <a:rPr lang="en-US" altLang="zh-CN" sz="1350" dirty="0">
                 <a:solidFill>
                   <a:schemeClr val="accent1">
                     <a:lumMod val="60000"/>
@@ -3854,7 +3944,7 @@
               <a:t>ping</a:t>
             </a:r>
             <a:r>
-              <a:rPr lang="zh-CN" altLang="en-US" dirty="0">
+              <a:rPr lang="zh-CN" altLang="en-US" sz="1350" dirty="0">
                 <a:solidFill>
                   <a:schemeClr val="accent1">
                     <a:lumMod val="60000"/>
@@ -3864,7 +3954,7 @@
               </a:rPr>
               <a:t>值符合无线的特征</a:t>
             </a:r>
-            <a:endParaRPr lang="en-US" altLang="zh-CN" dirty="0">
+            <a:endParaRPr lang="en-US" altLang="zh-CN" sz="1350" dirty="0">
               <a:solidFill>
                 <a:schemeClr val="accent1">
                   <a:lumMod val="60000"/>
@@ -3875,7 +3965,7 @@
           </a:p>
           <a:p>
             <a:r>
-              <a:rPr lang="zh-CN" altLang="en-US" dirty="0">
+              <a:rPr lang="zh-CN" altLang="en-US" sz="1350" dirty="0">
                 <a:solidFill>
                   <a:schemeClr val="accent1">
                     <a:lumMod val="60000"/>
@@ -3886,7 +3976,7 @@
               <a:t>访问</a:t>
             </a:r>
             <a:r>
-              <a:rPr lang="en-US" altLang="zh-CN" dirty="0">
+              <a:rPr lang="en-US" altLang="zh-CN" sz="1350" dirty="0">
                 <a:solidFill>
                   <a:schemeClr val="accent1">
                     <a:lumMod val="60000"/>
@@ -3897,7 +3987,7 @@
               <a:t>192.168.1.21</a:t>
             </a:r>
             <a:r>
-              <a:rPr lang="zh-CN" altLang="en-US" dirty="0">
+              <a:rPr lang="zh-CN" altLang="en-US" sz="1350" dirty="0">
                 <a:solidFill>
                   <a:schemeClr val="accent1">
                     <a:lumMod val="60000"/>
@@ -3942,10 +4032,10 @@
       </p:grpSpPr>
       <p:pic>
         <p:nvPicPr>
-          <p:cNvPr id="50" name="图片 49">
-            <a:extLst>
-              <a:ext uri="{FF2B5EF4-FFF2-40B4-BE49-F238E27FC236}">
-                <a16:creationId xmlns:a16="http://schemas.microsoft.com/office/drawing/2014/main" id="{2DD63D62-E4A6-4CE4-BD5D-7B1F54716730}"/>
+          <p:cNvPr id="3" name="图片 2">
+            <a:extLst>
+              <a:ext uri="{FF2B5EF4-FFF2-40B4-BE49-F238E27FC236}">
+                <a16:creationId xmlns:a16="http://schemas.microsoft.com/office/drawing/2014/main" id="{F1F289C1-D60A-4E11-9340-8296408932DB}"/>
               </a:ext>
             </a:extLst>
           </p:cNvPr>
@@ -3961,7 +4051,7 @@
         <p:spPr>
           <a:xfrm>
             <a:off x="0" y="0"/>
-            <a:ext cx="12192000" cy="6858000"/>
+            <a:ext cx="9144000" cy="6858000"/>
           </a:xfrm>
           <a:prstGeom prst="rect">
             <a:avLst/>
@@ -3982,8 +4072,8 @@
         </p:nvSpPr>
         <p:spPr>
           <a:xfrm>
-            <a:off x="2204556" y="940080"/>
-            <a:ext cx="1442907" cy="3031601"/>
+            <a:off x="1653418" y="1562310"/>
+            <a:ext cx="1082180" cy="2273701"/>
           </a:xfrm>
           <a:prstGeom prst="rect">
             <a:avLst/>
@@ -4010,7 +4100,7 @@
           <a:lstStyle/>
           <a:p>
             <a:pPr algn="ctr"/>
-            <a:endParaRPr lang="zh-CN" altLang="en-US">
+            <a:endParaRPr lang="zh-CN" altLang="en-US" sz="1350">
               <a:solidFill>
                 <a:schemeClr val="accent1">
                   <a:lumMod val="40000"/>
@@ -4035,8 +4125,8 @@
         </p:nvSpPr>
         <p:spPr>
           <a:xfrm>
-            <a:off x="8227854" y="940080"/>
-            <a:ext cx="1442907" cy="3031601"/>
+            <a:off x="6170891" y="1562310"/>
+            <a:ext cx="1082180" cy="2273701"/>
           </a:xfrm>
           <a:prstGeom prst="rect">
             <a:avLst/>
@@ -4063,7 +4153,7 @@
           <a:lstStyle/>
           <a:p>
             <a:pPr algn="ctr"/>
-            <a:endParaRPr lang="zh-CN" altLang="en-US">
+            <a:endParaRPr lang="zh-CN" altLang="en-US" sz="1350">
               <a:solidFill>
                 <a:schemeClr val="accent1">
                   <a:lumMod val="40000"/>
@@ -4088,8 +4178,8 @@
         </p:nvCxnSpPr>
         <p:spPr>
           <a:xfrm>
-            <a:off x="3166494" y="1480150"/>
-            <a:ext cx="5301843" cy="0"/>
+            <a:off x="2374871" y="1967363"/>
+            <a:ext cx="3976382" cy="0"/>
           </a:xfrm>
           <a:prstGeom prst="line">
             <a:avLst/>
@@ -4126,8 +4216,8 @@
         </p:nvCxnSpPr>
         <p:spPr>
           <a:xfrm>
-            <a:off x="3166493" y="3660102"/>
-            <a:ext cx="5301843" cy="0"/>
+            <a:off x="2374870" y="3602327"/>
+            <a:ext cx="3976382" cy="0"/>
           </a:xfrm>
           <a:prstGeom prst="line">
             <a:avLst/>
@@ -4171,8 +4261,8 @@
         </p:nvSpPr>
         <p:spPr>
           <a:xfrm>
-            <a:off x="3647463" y="1043350"/>
-            <a:ext cx="1435008" cy="369332"/>
+            <a:off x="2735598" y="1639762"/>
+            <a:ext cx="1122423" cy="300082"/>
           </a:xfrm>
           <a:prstGeom prst="rect">
             <a:avLst/>
@@ -4186,7 +4276,7 @@
           <a:lstStyle/>
           <a:p>
             <a:r>
-              <a:rPr lang="en-US" altLang="zh-CN" dirty="0">
+              <a:rPr lang="en-US" altLang="zh-CN" sz="1350" dirty="0">
                 <a:solidFill>
                   <a:schemeClr val="accent1">
                     <a:lumMod val="40000"/>
@@ -4196,7 +4286,7 @@
               </a:rPr>
               <a:t>192.168.1.11</a:t>
             </a:r>
-            <a:endParaRPr lang="zh-CN" altLang="en-US" dirty="0">
+            <a:endParaRPr lang="zh-CN" altLang="en-US" sz="1350" dirty="0">
               <a:solidFill>
                 <a:schemeClr val="accent1">
                   <a:lumMod val="40000"/>
@@ -4221,8 +4311,8 @@
         </p:nvSpPr>
         <p:spPr>
           <a:xfrm>
-            <a:off x="3647463" y="3223302"/>
-            <a:ext cx="1435008" cy="369332"/>
+            <a:off x="2735598" y="3274726"/>
+            <a:ext cx="1122423" cy="300082"/>
           </a:xfrm>
           <a:prstGeom prst="rect">
             <a:avLst/>
@@ -4236,7 +4326,7 @@
           <a:lstStyle/>
           <a:p>
             <a:r>
-              <a:rPr lang="en-US" altLang="zh-CN" dirty="0">
+              <a:rPr lang="en-US" altLang="zh-CN" sz="1350" dirty="0">
                 <a:solidFill>
                   <a:schemeClr val="accent1">
                     <a:lumMod val="40000"/>
@@ -4246,7 +4336,7 @@
               </a:rPr>
               <a:t>192.168.1.11</a:t>
             </a:r>
-            <a:endParaRPr lang="zh-CN" altLang="en-US" dirty="0">
+            <a:endParaRPr lang="zh-CN" altLang="en-US" sz="1350" dirty="0">
               <a:solidFill>
                 <a:schemeClr val="accent1">
                   <a:lumMod val="40000"/>
@@ -4271,8 +4361,8 @@
         </p:nvSpPr>
         <p:spPr>
           <a:xfrm>
-            <a:off x="6790662" y="1025449"/>
-            <a:ext cx="1435008" cy="369332"/>
+            <a:off x="5092997" y="1626337"/>
+            <a:ext cx="1122423" cy="300082"/>
           </a:xfrm>
           <a:prstGeom prst="rect">
             <a:avLst/>
@@ -4286,7 +4376,7 @@
           <a:lstStyle/>
           <a:p>
             <a:r>
-              <a:rPr lang="en-US" altLang="zh-CN" dirty="0">
+              <a:rPr lang="en-US" altLang="zh-CN" sz="1350" dirty="0">
                 <a:solidFill>
                   <a:schemeClr val="accent1">
                     <a:lumMod val="40000"/>
@@ -4296,7 +4386,7 @@
               </a:rPr>
               <a:t>192.168.1.12</a:t>
             </a:r>
-            <a:endParaRPr lang="zh-CN" altLang="en-US" dirty="0">
+            <a:endParaRPr lang="zh-CN" altLang="en-US" sz="1350" dirty="0">
               <a:solidFill>
                 <a:schemeClr val="accent1">
                   <a:lumMod val="40000"/>
@@ -4321,8 +4411,8 @@
         </p:nvSpPr>
         <p:spPr>
           <a:xfrm>
-            <a:off x="6798561" y="3229549"/>
-            <a:ext cx="1435008" cy="369332"/>
+            <a:off x="5098921" y="3279412"/>
+            <a:ext cx="1122423" cy="300082"/>
           </a:xfrm>
           <a:prstGeom prst="rect">
             <a:avLst/>
@@ -4336,7 +4426,7 @@
           <a:lstStyle/>
           <a:p>
             <a:r>
-              <a:rPr lang="en-US" altLang="zh-CN" dirty="0">
+              <a:rPr lang="en-US" altLang="zh-CN" sz="1350" dirty="0">
                 <a:solidFill>
                   <a:schemeClr val="accent1">
                     <a:lumMod val="40000"/>
@@ -4346,7 +4436,7 @@
               </a:rPr>
               <a:t>192.168.1.12</a:t>
             </a:r>
-            <a:endParaRPr lang="zh-CN" altLang="en-US" dirty="0">
+            <a:endParaRPr lang="zh-CN" altLang="en-US" sz="1350" dirty="0">
               <a:solidFill>
                 <a:schemeClr val="accent1">
                   <a:lumMod val="40000"/>
@@ -4371,8 +4461,8 @@
         </p:nvSpPr>
         <p:spPr>
           <a:xfrm>
-            <a:off x="2528931" y="1975101"/>
-            <a:ext cx="436228" cy="369332"/>
+            <a:off x="1896698" y="2338576"/>
+            <a:ext cx="327171" cy="300082"/>
           </a:xfrm>
           <a:prstGeom prst="rect">
             <a:avLst/>
@@ -4385,7 +4475,7 @@
           </a:bodyPr>
           <a:lstStyle/>
           <a:p>
-            <a:endParaRPr lang="zh-CN" altLang="en-US" dirty="0">
+            <a:endParaRPr lang="zh-CN" altLang="en-US" sz="1350" dirty="0">
               <a:solidFill>
                 <a:schemeClr val="accent1">
                   <a:lumMod val="40000"/>
@@ -4410,8 +4500,8 @@
         </p:nvSpPr>
         <p:spPr>
           <a:xfrm>
-            <a:off x="1396417" y="1907989"/>
-            <a:ext cx="897746" cy="369332"/>
+            <a:off x="1047313" y="2288242"/>
+            <a:ext cx="673310" cy="300082"/>
           </a:xfrm>
           <a:prstGeom prst="rect">
             <a:avLst/>
@@ -4425,7 +4515,7 @@
           <a:lstStyle/>
           <a:p>
             <a:r>
-              <a:rPr lang="zh-CN" altLang="en-US" dirty="0">
+              <a:rPr lang="zh-CN" altLang="en-US" sz="1350" dirty="0">
                 <a:solidFill>
                   <a:schemeClr val="accent1">
                     <a:lumMod val="40000"/>
@@ -4436,7 +4526,7 @@
               <a:t>电脑</a:t>
             </a:r>
             <a:r>
-              <a:rPr lang="en-US" altLang="zh-CN" dirty="0">
+              <a:rPr lang="en-US" altLang="zh-CN" sz="1350" dirty="0">
                 <a:solidFill>
                   <a:schemeClr val="accent1">
                     <a:lumMod val="40000"/>
@@ -4446,7 +4536,7 @@
               </a:rPr>
               <a:t>1</a:t>
             </a:r>
-            <a:endParaRPr lang="zh-CN" altLang="en-US" dirty="0">
+            <a:endParaRPr lang="zh-CN" altLang="en-US" sz="1350" dirty="0">
               <a:solidFill>
                 <a:schemeClr val="accent1">
                   <a:lumMod val="40000"/>
@@ -4471,8 +4561,8 @@
         </p:nvSpPr>
         <p:spPr>
           <a:xfrm>
-            <a:off x="9911244" y="2047589"/>
-            <a:ext cx="897746" cy="369332"/>
+            <a:off x="7433433" y="2392942"/>
+            <a:ext cx="673310" cy="300082"/>
           </a:xfrm>
           <a:prstGeom prst="rect">
             <a:avLst/>
@@ -4486,7 +4576,7 @@
           <a:lstStyle/>
           <a:p>
             <a:r>
-              <a:rPr lang="zh-CN" altLang="en-US" dirty="0">
+              <a:rPr lang="zh-CN" altLang="en-US" sz="1350" dirty="0">
                 <a:solidFill>
                   <a:schemeClr val="accent1">
                     <a:lumMod val="40000"/>
@@ -4497,7 +4587,7 @@
               <a:t>电脑</a:t>
             </a:r>
             <a:r>
-              <a:rPr lang="en-US" altLang="zh-CN" dirty="0">
+              <a:rPr lang="en-US" altLang="zh-CN" sz="1350" dirty="0">
                 <a:solidFill>
                   <a:schemeClr val="accent1">
                     <a:lumMod val="40000"/>
@@ -4507,7 +4597,7 @@
               </a:rPr>
               <a:t>2</a:t>
             </a:r>
-            <a:endParaRPr lang="zh-CN" altLang="en-US" dirty="0">
+            <a:endParaRPr lang="zh-CN" altLang="en-US" sz="1350" dirty="0">
               <a:solidFill>
                 <a:schemeClr val="accent1">
                   <a:lumMod val="40000"/>
@@ -4532,8 +4622,8 @@
         </p:nvSpPr>
         <p:spPr>
           <a:xfrm>
-            <a:off x="4236217" y="3592634"/>
-            <a:ext cx="142612" cy="666922"/>
+            <a:off x="3177163" y="3551725"/>
+            <a:ext cx="106959" cy="500192"/>
           </a:xfrm>
           <a:prstGeom prst="downArrow">
             <a:avLst/>
@@ -4560,7 +4650,7 @@
           <a:lstStyle/>
           <a:p>
             <a:pPr algn="ctr"/>
-            <a:endParaRPr lang="zh-CN" altLang="en-US">
+            <a:endParaRPr lang="zh-CN" altLang="en-US" sz="1350">
               <a:solidFill>
                 <a:schemeClr val="accent1">
                   <a:lumMod val="40000"/>
@@ -4585,8 +4675,8 @@
         </p:nvSpPr>
         <p:spPr>
           <a:xfrm>
-            <a:off x="7502080" y="3592634"/>
-            <a:ext cx="142612" cy="666922"/>
+            <a:off x="5626560" y="3551725"/>
+            <a:ext cx="106959" cy="500192"/>
           </a:xfrm>
           <a:prstGeom prst="downArrow">
             <a:avLst/>
@@ -4613,7 +4703,7 @@
           <a:lstStyle/>
           <a:p>
             <a:pPr algn="ctr"/>
-            <a:endParaRPr lang="zh-CN" altLang="en-US">
+            <a:endParaRPr lang="zh-CN" altLang="en-US" sz="1350">
               <a:solidFill>
                 <a:schemeClr val="accent1">
                   <a:lumMod val="40000"/>
@@ -4638,8 +4728,8 @@
         </p:nvSpPr>
         <p:spPr>
           <a:xfrm>
-            <a:off x="3560777" y="4468684"/>
-            <a:ext cx="1593908" cy="369332"/>
+            <a:off x="2670583" y="4208763"/>
+            <a:ext cx="1195431" cy="300082"/>
           </a:xfrm>
           <a:prstGeom prst="rect">
             <a:avLst/>
@@ -4653,7 +4743,7 @@
           <a:lstStyle/>
           <a:p>
             <a:r>
-              <a:rPr lang="en-US" altLang="zh-CN" dirty="0">
+              <a:rPr lang="en-US" altLang="zh-CN" sz="1350" dirty="0">
                 <a:solidFill>
                   <a:schemeClr val="accent1">
                     <a:lumMod val="40000"/>
@@ -4663,7 +4753,7 @@
               </a:rPr>
               <a:t>192.168.1.21</a:t>
             </a:r>
-            <a:endParaRPr lang="zh-CN" altLang="en-US" dirty="0">
+            <a:endParaRPr lang="zh-CN" altLang="en-US" sz="1350" dirty="0">
               <a:solidFill>
                 <a:schemeClr val="accent1">
                   <a:lumMod val="40000"/>
@@ -4688,8 +4778,8 @@
         </p:nvSpPr>
         <p:spPr>
           <a:xfrm>
-            <a:off x="6798561" y="4468684"/>
-            <a:ext cx="1593908" cy="369332"/>
+            <a:off x="5098921" y="4208763"/>
+            <a:ext cx="1195431" cy="300082"/>
           </a:xfrm>
           <a:prstGeom prst="rect">
             <a:avLst/>
@@ -4703,7 +4793,7 @@
           <a:lstStyle/>
           <a:p>
             <a:r>
-              <a:rPr lang="en-US" altLang="zh-CN" dirty="0">
+              <a:rPr lang="en-US" altLang="zh-CN" sz="1350" dirty="0">
                 <a:solidFill>
                   <a:schemeClr val="accent1">
                     <a:lumMod val="40000"/>
@@ -4713,7 +4803,7 @@
               </a:rPr>
               <a:t>192.168.1.22</a:t>
             </a:r>
-            <a:endParaRPr lang="zh-CN" altLang="en-US" dirty="0">
+            <a:endParaRPr lang="zh-CN" altLang="en-US" sz="1350" dirty="0">
               <a:solidFill>
                 <a:schemeClr val="accent1">
                   <a:lumMod val="40000"/>
@@ -4738,8 +4828,8 @@
         </p:nvSpPr>
         <p:spPr>
           <a:xfrm>
-            <a:off x="2996102" y="1260387"/>
-            <a:ext cx="308208" cy="445371"/>
+            <a:off x="2247077" y="1802541"/>
+            <a:ext cx="231156" cy="334028"/>
           </a:xfrm>
           <a:prstGeom prst="rect">
             <a:avLst/>
@@ -4764,7 +4854,7 @@
           <a:lstStyle/>
           <a:p>
             <a:pPr algn="ctr"/>
-            <a:endParaRPr lang="zh-CN" altLang="en-US">
+            <a:endParaRPr lang="zh-CN" altLang="en-US" sz="1350">
               <a:solidFill>
                 <a:schemeClr val="accent1">
                   <a:lumMod val="40000"/>
@@ -4789,8 +4879,8 @@
         </p:nvSpPr>
         <p:spPr>
           <a:xfrm>
-            <a:off x="2973304" y="3432311"/>
-            <a:ext cx="308208" cy="445371"/>
+            <a:off x="2229978" y="3431484"/>
+            <a:ext cx="231156" cy="334028"/>
           </a:xfrm>
           <a:prstGeom prst="rect">
             <a:avLst/>
@@ -4815,7 +4905,7 @@
           <a:lstStyle/>
           <a:p>
             <a:pPr algn="ctr"/>
-            <a:endParaRPr lang="zh-CN" altLang="en-US">
+            <a:endParaRPr lang="zh-CN" altLang="en-US" sz="1350">
               <a:solidFill>
                 <a:schemeClr val="accent1">
                   <a:lumMod val="40000"/>
@@ -4840,8 +4930,8 @@
         </p:nvSpPr>
         <p:spPr>
           <a:xfrm>
-            <a:off x="8411431" y="1244115"/>
-            <a:ext cx="308208" cy="445371"/>
+            <a:off x="6308573" y="1790337"/>
+            <a:ext cx="231156" cy="334028"/>
           </a:xfrm>
           <a:prstGeom prst="rect">
             <a:avLst/>
@@ -4866,7 +4956,7 @@
           <a:lstStyle/>
           <a:p>
             <a:pPr algn="ctr"/>
-            <a:endParaRPr lang="zh-CN" altLang="en-US">
+            <a:endParaRPr lang="zh-CN" altLang="en-US" sz="1350">
               <a:solidFill>
                 <a:schemeClr val="accent1">
                   <a:lumMod val="40000"/>
@@ -4891,8 +4981,8 @@
         </p:nvSpPr>
         <p:spPr>
           <a:xfrm>
-            <a:off x="8423949" y="3374500"/>
-            <a:ext cx="308208" cy="445371"/>
+            <a:off x="6317962" y="3388126"/>
+            <a:ext cx="231156" cy="334028"/>
           </a:xfrm>
           <a:prstGeom prst="rect">
             <a:avLst/>
@@ -4917,7 +5007,7 @@
           <a:lstStyle/>
           <a:p>
             <a:pPr algn="ctr"/>
-            <a:endParaRPr lang="zh-CN" altLang="en-US">
+            <a:endParaRPr lang="zh-CN" altLang="en-US" sz="1350">
               <a:solidFill>
                 <a:schemeClr val="accent1">
                   <a:lumMod val="40000"/>
@@ -4942,8 +5032,8 @@
         </p:nvSpPr>
         <p:spPr>
           <a:xfrm rot="2051220">
-            <a:off x="3291800" y="581369"/>
-            <a:ext cx="247349" cy="793383"/>
+            <a:off x="2468850" y="1293277"/>
+            <a:ext cx="185512" cy="595037"/>
           </a:xfrm>
           <a:prstGeom prst="downArrow">
             <a:avLst/>
@@ -4968,7 +5058,7 @@
           <a:lstStyle/>
           <a:p>
             <a:pPr algn="ctr"/>
-            <a:endParaRPr lang="zh-CN" altLang="en-US">
+            <a:endParaRPr lang="zh-CN" altLang="en-US" sz="1350">
               <a:solidFill>
                 <a:schemeClr val="accent1">
                   <a:lumMod val="40000"/>
@@ -4993,8 +5083,8 @@
         </p:nvSpPr>
         <p:spPr>
           <a:xfrm rot="13452382">
-            <a:off x="2662898" y="3649000"/>
-            <a:ext cx="247349" cy="793383"/>
+            <a:off x="1997174" y="3594001"/>
+            <a:ext cx="185512" cy="595037"/>
           </a:xfrm>
           <a:prstGeom prst="downArrow">
             <a:avLst/>
@@ -5019,7 +5109,7 @@
           <a:lstStyle/>
           <a:p>
             <a:pPr algn="ctr"/>
-            <a:endParaRPr lang="zh-CN" altLang="en-US">
+            <a:endParaRPr lang="zh-CN" altLang="en-US" sz="1350">
               <a:solidFill>
                 <a:schemeClr val="accent1">
                   <a:lumMod val="40000"/>
@@ -5044,8 +5134,8 @@
         </p:nvSpPr>
         <p:spPr>
           <a:xfrm>
-            <a:off x="3222718" y="280801"/>
-            <a:ext cx="1358246" cy="369332"/>
+            <a:off x="2417038" y="1067851"/>
+            <a:ext cx="1018685" cy="300082"/>
           </a:xfrm>
           <a:prstGeom prst="rect">
             <a:avLst/>
@@ -5060,7 +5150,7 @@
           <a:p>
             <a:pPr algn="ctr"/>
             <a:r>
-              <a:rPr lang="zh-CN" altLang="en-US" dirty="0">
+              <a:rPr lang="zh-CN" altLang="en-US" sz="1350" dirty="0">
                 <a:solidFill>
                   <a:schemeClr val="accent1">
                     <a:lumMod val="40000"/>
@@ -5087,8 +5177,8 @@
         </p:nvSpPr>
         <p:spPr>
           <a:xfrm>
-            <a:off x="1612510" y="4414108"/>
-            <a:ext cx="1358246" cy="369332"/>
+            <a:off x="1209382" y="4167831"/>
+            <a:ext cx="1018685" cy="300082"/>
           </a:xfrm>
           <a:prstGeom prst="rect">
             <a:avLst/>
@@ -5103,7 +5193,7 @@
           <a:p>
             <a:pPr algn="ctr"/>
             <a:r>
-              <a:rPr lang="zh-CN" altLang="en-US" dirty="0">
+              <a:rPr lang="zh-CN" altLang="en-US" sz="1350" dirty="0">
                 <a:solidFill>
                   <a:schemeClr val="accent1">
                     <a:lumMod val="40000"/>
@@ -5151,8 +5241,8 @@
         </p:blipFill>
         <p:spPr>
           <a:xfrm>
-            <a:off x="5263140" y="3841612"/>
-            <a:ext cx="996404" cy="996404"/>
+            <a:off x="3947355" y="3738459"/>
+            <a:ext cx="747303" cy="747303"/>
           </a:xfrm>
           <a:prstGeom prst="rect">
             <a:avLst/>
@@ -5173,8 +5263,8 @@
         </p:nvSpPr>
         <p:spPr>
           <a:xfrm>
-            <a:off x="1845290" y="5462137"/>
-            <a:ext cx="7374910" cy="646331"/>
+            <a:off x="1383967" y="4953853"/>
+            <a:ext cx="5531183" cy="507831"/>
           </a:xfrm>
           <a:prstGeom prst="rect">
             <a:avLst/>
@@ -5188,7 +5278,7 @@
           <a:lstStyle/>
           <a:p>
             <a:r>
-              <a:rPr lang="zh-CN" altLang="en-US" dirty="0">
+              <a:rPr lang="zh-CN" altLang="en-US" sz="1350" dirty="0">
                 <a:solidFill>
                   <a:schemeClr val="accent1">
                     <a:lumMod val="60000"/>
@@ -5199,7 +5289,7 @@
               <a:t>结论：由速度法，和</a:t>
             </a:r>
             <a:r>
-              <a:rPr lang="en-US" altLang="zh-CN" dirty="0">
+              <a:rPr lang="en-US" altLang="zh-CN" sz="1350" dirty="0">
                 <a:solidFill>
                   <a:schemeClr val="accent1">
                     <a:lumMod val="60000"/>
@@ -5210,7 +5300,7 @@
               <a:t>ping</a:t>
             </a:r>
             <a:r>
-              <a:rPr lang="zh-CN" altLang="en-US" dirty="0">
+              <a:rPr lang="zh-CN" altLang="en-US" sz="1350" dirty="0">
                 <a:solidFill>
                   <a:schemeClr val="accent1">
                     <a:lumMod val="60000"/>
@@ -5221,7 +5311,7 @@
               <a:t>值法可知，速度与</a:t>
             </a:r>
             <a:r>
-              <a:rPr lang="en-US" altLang="zh-CN" dirty="0">
+              <a:rPr lang="en-US" altLang="zh-CN" sz="1350" dirty="0">
                 <a:solidFill>
                   <a:schemeClr val="accent1">
                     <a:lumMod val="60000"/>
@@ -5232,7 +5322,7 @@
               <a:t>ping</a:t>
             </a:r>
             <a:r>
-              <a:rPr lang="zh-CN" altLang="en-US" dirty="0">
+              <a:rPr lang="zh-CN" altLang="en-US" sz="1350" dirty="0">
                 <a:solidFill>
                   <a:schemeClr val="accent1">
                     <a:lumMod val="60000"/>
@@ -5243,7 +5333,7 @@
               <a:t>值由访问的</a:t>
             </a:r>
             <a:r>
-              <a:rPr lang="en-US" altLang="zh-CN" dirty="0">
+              <a:rPr lang="en-US" altLang="zh-CN" sz="1350" dirty="0">
                 <a:solidFill>
                   <a:schemeClr val="accent1">
                     <a:lumMod val="60000"/>
@@ -5254,7 +5344,7 @@
               <a:t>IP</a:t>
             </a:r>
             <a:r>
-              <a:rPr lang="zh-CN" altLang="en-US" dirty="0">
+              <a:rPr lang="zh-CN" altLang="en-US" sz="1350" dirty="0">
                 <a:solidFill>
                   <a:schemeClr val="accent1">
                     <a:lumMod val="60000"/>
@@ -5264,7 +5354,7 @@
               </a:rPr>
               <a:t>决定。</a:t>
             </a:r>
-            <a:endParaRPr lang="en-US" altLang="zh-CN" dirty="0">
+            <a:endParaRPr lang="en-US" altLang="zh-CN" sz="1350" dirty="0">
               <a:solidFill>
                 <a:schemeClr val="accent1">
                   <a:lumMod val="60000"/>
@@ -5275,7 +5365,7 @@
           </a:p>
           <a:p>
             <a:r>
-              <a:rPr lang="zh-CN" altLang="en-US" dirty="0">
+              <a:rPr lang="zh-CN" altLang="en-US" sz="1350" dirty="0">
                 <a:solidFill>
                   <a:schemeClr val="accent1">
                     <a:lumMod val="60000"/>
@@ -5286,7 +5376,7 @@
               <a:t>由断连法可知，访问无线</a:t>
             </a:r>
             <a:r>
-              <a:rPr lang="en-US" altLang="zh-CN" dirty="0">
+              <a:rPr lang="en-US" altLang="zh-CN" sz="1350" dirty="0">
                 <a:solidFill>
                   <a:schemeClr val="accent1">
                     <a:lumMod val="60000"/>
@@ -5297,7 +5387,7 @@
               <a:t>IP</a:t>
             </a:r>
             <a:r>
-              <a:rPr lang="zh-CN" altLang="en-US" dirty="0">
+              <a:rPr lang="zh-CN" altLang="en-US" sz="1350" dirty="0">
                 <a:solidFill>
                   <a:schemeClr val="accent1">
                     <a:lumMod val="60000"/>
@@ -5308,7 +5398,7 @@
               <a:t>走无线通道，访问有线</a:t>
             </a:r>
             <a:r>
-              <a:rPr lang="en-US" altLang="zh-CN" dirty="0">
+              <a:rPr lang="en-US" altLang="zh-CN" sz="1350" dirty="0">
                 <a:solidFill>
                   <a:schemeClr val="accent1">
                     <a:lumMod val="60000"/>
@@ -5319,7 +5409,7 @@
               <a:t>IP</a:t>
             </a:r>
             <a:r>
-              <a:rPr lang="zh-CN" altLang="en-US" dirty="0">
+              <a:rPr lang="zh-CN" altLang="en-US" sz="1350" dirty="0">
                 <a:solidFill>
                   <a:schemeClr val="accent1">
                     <a:lumMod val="60000"/>
@@ -5364,10 +5454,10 @@
       </p:grpSpPr>
       <p:pic>
         <p:nvPicPr>
-          <p:cNvPr id="12" name="图片 11">
-            <a:extLst>
-              <a:ext uri="{FF2B5EF4-FFF2-40B4-BE49-F238E27FC236}">
-                <a16:creationId xmlns:a16="http://schemas.microsoft.com/office/drawing/2014/main" id="{09E8FC01-8EA8-4068-82A3-44F01C23C509}"/>
+          <p:cNvPr id="5" name="图片 4">
+            <a:extLst>
+              <a:ext uri="{FF2B5EF4-FFF2-40B4-BE49-F238E27FC236}">
+                <a16:creationId xmlns:a16="http://schemas.microsoft.com/office/drawing/2014/main" id="{4D3464A1-A7CD-4DF2-BA07-8FB5A8002E95}"/>
               </a:ext>
             </a:extLst>
           </p:cNvPr>
@@ -5383,7 +5473,7 @@
         <p:spPr>
           <a:xfrm>
             <a:off x="0" y="0"/>
-            <a:ext cx="12192000" cy="6858000"/>
+            <a:ext cx="9144000" cy="6858000"/>
           </a:xfrm>
           <a:prstGeom prst="rect">
             <a:avLst/>
@@ -5392,1002 +5482,57 @@
       </p:pic>
       <p:sp>
         <p:nvSpPr>
-          <p:cNvPr id="6" name="矩形 5">
-            <a:extLst>
-              <a:ext uri="{FF2B5EF4-FFF2-40B4-BE49-F238E27FC236}">
-                <a16:creationId xmlns:a16="http://schemas.microsoft.com/office/drawing/2014/main" id="{20D6983C-FA3E-42DB-9E83-79552C0F3811}"/>
-              </a:ext>
-            </a:extLst>
-          </p:cNvPr>
-          <p:cNvSpPr/>
-          <p:nvPr/>
-        </p:nvSpPr>
-        <p:spPr>
-          <a:xfrm>
-            <a:off x="2242656" y="1825625"/>
-            <a:ext cx="1442907" cy="3031601"/>
-          </a:xfrm>
-          <a:prstGeom prst="rect">
-            <a:avLst/>
-          </a:prstGeom>
-        </p:spPr>
-        <p:style>
-          <a:lnRef idx="2">
-            <a:schemeClr val="accent1">
-              <a:shade val="50000"/>
-            </a:schemeClr>
-          </a:lnRef>
-          <a:fillRef idx="1">
-            <a:schemeClr val="accent1"/>
-          </a:fillRef>
-          <a:effectRef idx="0">
-            <a:schemeClr val="accent1"/>
-          </a:effectRef>
-          <a:fontRef idx="minor">
-            <a:schemeClr val="lt1"/>
-          </a:fontRef>
-        </p:style>
-        <p:txBody>
-          <a:bodyPr rtlCol="0" anchor="ctr"/>
+          <p:cNvPr id="2" name="文本框 1">
+            <a:extLst>
+              <a:ext uri="{FF2B5EF4-FFF2-40B4-BE49-F238E27FC236}">
+                <a16:creationId xmlns:a16="http://schemas.microsoft.com/office/drawing/2014/main" id="{E833889B-425B-495F-9895-7C13087E657C}"/>
+              </a:ext>
+            </a:extLst>
+          </p:cNvPr>
+          <p:cNvSpPr txBox="1"/>
+          <p:nvPr/>
+        </p:nvSpPr>
+        <p:spPr>
+          <a:xfrm>
+            <a:off x="1925273" y="3075057"/>
+            <a:ext cx="5293453" cy="707886"/>
+          </a:xfrm>
+          <a:prstGeom prst="rect">
+            <a:avLst/>
+          </a:prstGeom>
+          <a:noFill/>
+        </p:spPr>
+        <p:txBody>
+          <a:bodyPr wrap="square" rtlCol="0">
+            <a:spAutoFit/>
+          </a:bodyPr>
           <a:lstStyle/>
           <a:p>
             <a:pPr algn="ctr"/>
-            <a:endParaRPr lang="zh-CN" altLang="en-US">
+            <a:r>
+              <a:rPr lang="en-US" altLang="zh-CN" sz="4000" dirty="0">
+                <a:solidFill>
+                  <a:schemeClr val="bg2">
+                    <a:lumMod val="90000"/>
+                  </a:schemeClr>
+                </a:solidFill>
+              </a:rPr>
+              <a:t>One more thing…</a:t>
+            </a:r>
+            <a:endParaRPr lang="zh-CN" altLang="en-US" sz="4000" dirty="0">
               <a:solidFill>
-                <a:schemeClr val="accent1">
-                  <a:lumMod val="40000"/>
-                  <a:lumOff val="60000"/>
+                <a:schemeClr val="bg2">
+                  <a:lumMod val="90000"/>
                 </a:schemeClr>
               </a:solidFill>
             </a:endParaRPr>
           </a:p>
         </p:txBody>
       </p:sp>
-      <p:sp>
-        <p:nvSpPr>
-          <p:cNvPr id="8" name="矩形 7">
-            <a:extLst>
-              <a:ext uri="{FF2B5EF4-FFF2-40B4-BE49-F238E27FC236}">
-                <a16:creationId xmlns:a16="http://schemas.microsoft.com/office/drawing/2014/main" id="{66FD494A-8A44-415C-A68A-ADA3007634E1}"/>
-              </a:ext>
-            </a:extLst>
-          </p:cNvPr>
-          <p:cNvSpPr/>
-          <p:nvPr/>
-        </p:nvSpPr>
-        <p:spPr>
-          <a:xfrm>
-            <a:off x="8265954" y="1825625"/>
-            <a:ext cx="1442907" cy="3031601"/>
-          </a:xfrm>
-          <a:prstGeom prst="rect">
-            <a:avLst/>
-          </a:prstGeom>
-        </p:spPr>
-        <p:style>
-          <a:lnRef idx="2">
-            <a:schemeClr val="accent1">
-              <a:shade val="50000"/>
-            </a:schemeClr>
-          </a:lnRef>
-          <a:fillRef idx="1">
-            <a:schemeClr val="accent1"/>
-          </a:fillRef>
-          <a:effectRef idx="0">
-            <a:schemeClr val="accent1"/>
-          </a:effectRef>
-          <a:fontRef idx="minor">
-            <a:schemeClr val="lt1"/>
-          </a:fontRef>
-        </p:style>
-        <p:txBody>
-          <a:bodyPr rtlCol="0" anchor="ctr"/>
-          <a:lstStyle/>
-          <a:p>
-            <a:pPr algn="ctr"/>
-            <a:endParaRPr lang="zh-CN" altLang="en-US">
-              <a:solidFill>
-                <a:schemeClr val="accent1">
-                  <a:lumMod val="40000"/>
-                  <a:lumOff val="60000"/>
-                </a:schemeClr>
-              </a:solidFill>
-            </a:endParaRPr>
-          </a:p>
-        </p:txBody>
-      </p:sp>
-      <p:cxnSp>
-        <p:nvCxnSpPr>
-          <p:cNvPr id="10" name="直接连接符 9">
-            <a:extLst>
-              <a:ext uri="{FF2B5EF4-FFF2-40B4-BE49-F238E27FC236}">
-                <a16:creationId xmlns:a16="http://schemas.microsoft.com/office/drawing/2014/main" id="{7FBCFEFA-FD7C-40BB-B2C4-FF6BFEB59DA0}"/>
-              </a:ext>
-            </a:extLst>
-          </p:cNvPr>
-          <p:cNvCxnSpPr/>
-          <p:nvPr/>
-        </p:nvCxnSpPr>
-        <p:spPr>
-          <a:xfrm>
-            <a:off x="3204594" y="2365695"/>
-            <a:ext cx="5301843" cy="0"/>
-          </a:xfrm>
-          <a:prstGeom prst="line">
-            <a:avLst/>
-          </a:prstGeom>
-        </p:spPr>
-        <p:style>
-          <a:lnRef idx="3">
-            <a:schemeClr val="dk1"/>
-          </a:lnRef>
-          <a:fillRef idx="0">
-            <a:schemeClr val="dk1"/>
-          </a:fillRef>
-          <a:effectRef idx="2">
-            <a:schemeClr val="dk1"/>
-          </a:effectRef>
-          <a:fontRef idx="minor">
-            <a:schemeClr val="tx1"/>
-          </a:fontRef>
-        </p:style>
-      </p:cxnSp>
-      <p:cxnSp>
-        <p:nvCxnSpPr>
-          <p:cNvPr id="14" name="直接连接符 13">
-            <a:extLst>
-              <a:ext uri="{FF2B5EF4-FFF2-40B4-BE49-F238E27FC236}">
-                <a16:creationId xmlns:a16="http://schemas.microsoft.com/office/drawing/2014/main" id="{4D0281A1-9997-498C-979C-5CD443B8EEB8}"/>
-              </a:ext>
-            </a:extLst>
-          </p:cNvPr>
-          <p:cNvCxnSpPr>
-            <a:cxnSpLocks/>
-          </p:cNvCxnSpPr>
-          <p:nvPr/>
-        </p:nvCxnSpPr>
-        <p:spPr>
-          <a:xfrm>
-            <a:off x="3204593" y="4545647"/>
-            <a:ext cx="5301843" cy="0"/>
-          </a:xfrm>
-          <a:prstGeom prst="line">
-            <a:avLst/>
-          </a:prstGeom>
-          <a:ln w="9525" cap="flat" cmpd="sng" algn="ctr">
-            <a:solidFill>
-              <a:schemeClr val="dk1"/>
-            </a:solidFill>
-            <a:prstDash val="dash"/>
-            <a:round/>
-            <a:headEnd type="none" w="med" len="med"/>
-            <a:tailEnd type="none" w="med" len="med"/>
-          </a:ln>
-        </p:spPr>
-        <p:style>
-          <a:lnRef idx="0">
-            <a:scrgbClr r="0" g="0" b="0"/>
-          </a:lnRef>
-          <a:fillRef idx="0">
-            <a:scrgbClr r="0" g="0" b="0"/>
-          </a:fillRef>
-          <a:effectRef idx="0">
-            <a:scrgbClr r="0" g="0" b="0"/>
-          </a:effectRef>
-          <a:fontRef idx="minor">
-            <a:schemeClr val="tx1"/>
-          </a:fontRef>
-        </p:style>
-      </p:cxnSp>
-      <p:sp>
-        <p:nvSpPr>
-          <p:cNvPr id="19" name="文本框 18">
-            <a:extLst>
-              <a:ext uri="{FF2B5EF4-FFF2-40B4-BE49-F238E27FC236}">
-                <a16:creationId xmlns:a16="http://schemas.microsoft.com/office/drawing/2014/main" id="{CB635EFC-938A-486D-9E5B-D19D6B2AB125}"/>
-              </a:ext>
-            </a:extLst>
-          </p:cNvPr>
-          <p:cNvSpPr txBox="1"/>
-          <p:nvPr/>
-        </p:nvSpPr>
-        <p:spPr>
-          <a:xfrm>
-            <a:off x="3685563" y="1928895"/>
-            <a:ext cx="1435008" cy="369332"/>
-          </a:xfrm>
-          <a:prstGeom prst="rect">
-            <a:avLst/>
-          </a:prstGeom>
-          <a:noFill/>
-        </p:spPr>
-        <p:txBody>
-          <a:bodyPr wrap="none" rtlCol="0">
-            <a:spAutoFit/>
-          </a:bodyPr>
-          <a:lstStyle/>
-          <a:p>
-            <a:r>
-              <a:rPr lang="en-US" altLang="zh-CN" dirty="0">
-                <a:solidFill>
-                  <a:schemeClr val="accent1">
-                    <a:lumMod val="40000"/>
-                    <a:lumOff val="60000"/>
-                  </a:schemeClr>
-                </a:solidFill>
-              </a:rPr>
-              <a:t>192.168.1.11</a:t>
-            </a:r>
-            <a:endParaRPr lang="zh-CN" altLang="en-US" dirty="0">
-              <a:solidFill>
-                <a:schemeClr val="accent1">
-                  <a:lumMod val="40000"/>
-                  <a:lumOff val="60000"/>
-                </a:schemeClr>
-              </a:solidFill>
-            </a:endParaRPr>
-          </a:p>
-        </p:txBody>
-      </p:sp>
-      <p:sp>
-        <p:nvSpPr>
-          <p:cNvPr id="23" name="文本框 22">
-            <a:extLst>
-              <a:ext uri="{FF2B5EF4-FFF2-40B4-BE49-F238E27FC236}">
-                <a16:creationId xmlns:a16="http://schemas.microsoft.com/office/drawing/2014/main" id="{CA2A2B83-4D6B-4902-9FD1-DEA707C40560}"/>
-              </a:ext>
-            </a:extLst>
-          </p:cNvPr>
-          <p:cNvSpPr txBox="1"/>
-          <p:nvPr/>
-        </p:nvSpPr>
-        <p:spPr>
-          <a:xfrm>
-            <a:off x="6828762" y="1910994"/>
-            <a:ext cx="1435008" cy="369332"/>
-          </a:xfrm>
-          <a:prstGeom prst="rect">
-            <a:avLst/>
-          </a:prstGeom>
-          <a:noFill/>
-        </p:spPr>
-        <p:txBody>
-          <a:bodyPr wrap="none" rtlCol="0">
-            <a:spAutoFit/>
-          </a:bodyPr>
-          <a:lstStyle/>
-          <a:p>
-            <a:r>
-              <a:rPr lang="en-US" altLang="zh-CN" dirty="0">
-                <a:solidFill>
-                  <a:schemeClr val="accent1">
-                    <a:lumMod val="40000"/>
-                    <a:lumOff val="60000"/>
-                  </a:schemeClr>
-                </a:solidFill>
-              </a:rPr>
-              <a:t>192.168.1.12</a:t>
-            </a:r>
-            <a:endParaRPr lang="zh-CN" altLang="en-US" dirty="0">
-              <a:solidFill>
-                <a:schemeClr val="accent1">
-                  <a:lumMod val="40000"/>
-                  <a:lumOff val="60000"/>
-                </a:schemeClr>
-              </a:solidFill>
-            </a:endParaRPr>
-          </a:p>
-        </p:txBody>
-      </p:sp>
-      <p:sp>
-        <p:nvSpPr>
-          <p:cNvPr id="26" name="文本框 25">
-            <a:extLst>
-              <a:ext uri="{FF2B5EF4-FFF2-40B4-BE49-F238E27FC236}">
-                <a16:creationId xmlns:a16="http://schemas.microsoft.com/office/drawing/2014/main" id="{5D65D36F-9FDE-4A8B-98C7-7635AC7BD167}"/>
-              </a:ext>
-            </a:extLst>
-          </p:cNvPr>
-          <p:cNvSpPr txBox="1"/>
-          <p:nvPr/>
-        </p:nvSpPr>
-        <p:spPr>
-          <a:xfrm>
-            <a:off x="2567031" y="2860646"/>
-            <a:ext cx="436228" cy="369332"/>
-          </a:xfrm>
-          <a:prstGeom prst="rect">
-            <a:avLst/>
-          </a:prstGeom>
-          <a:noFill/>
-        </p:spPr>
-        <p:txBody>
-          <a:bodyPr wrap="square" rtlCol="0">
-            <a:spAutoFit/>
-          </a:bodyPr>
-          <a:lstStyle/>
-          <a:p>
-            <a:endParaRPr lang="zh-CN" altLang="en-US" dirty="0">
-              <a:solidFill>
-                <a:schemeClr val="accent1">
-                  <a:lumMod val="40000"/>
-                  <a:lumOff val="60000"/>
-                </a:schemeClr>
-              </a:solidFill>
-            </a:endParaRPr>
-          </a:p>
-        </p:txBody>
-      </p:sp>
-      <p:sp>
-        <p:nvSpPr>
-          <p:cNvPr id="30" name="文本框 29">
-            <a:extLst>
-              <a:ext uri="{FF2B5EF4-FFF2-40B4-BE49-F238E27FC236}">
-                <a16:creationId xmlns:a16="http://schemas.microsoft.com/office/drawing/2014/main" id="{01C5441B-1346-40DC-A5B7-F8622BE264F0}"/>
-              </a:ext>
-            </a:extLst>
-          </p:cNvPr>
-          <p:cNvSpPr txBox="1"/>
-          <p:nvPr/>
-        </p:nvSpPr>
-        <p:spPr>
-          <a:xfrm>
-            <a:off x="1154530" y="2785813"/>
-            <a:ext cx="897746" cy="369332"/>
-          </a:xfrm>
-          <a:prstGeom prst="rect">
-            <a:avLst/>
-          </a:prstGeom>
-          <a:noFill/>
-        </p:spPr>
-        <p:txBody>
-          <a:bodyPr wrap="square" rtlCol="0">
-            <a:spAutoFit/>
-          </a:bodyPr>
-          <a:lstStyle/>
-          <a:p>
-            <a:r>
-              <a:rPr lang="zh-CN" altLang="en-US" dirty="0">
-                <a:solidFill>
-                  <a:schemeClr val="accent1">
-                    <a:lumMod val="40000"/>
-                    <a:lumOff val="60000"/>
-                  </a:schemeClr>
-                </a:solidFill>
-              </a:rPr>
-              <a:t>笔记本</a:t>
-            </a:r>
-          </a:p>
-        </p:txBody>
-      </p:sp>
-      <p:sp>
-        <p:nvSpPr>
-          <p:cNvPr id="32" name="文本框 31">
-            <a:extLst>
-              <a:ext uri="{FF2B5EF4-FFF2-40B4-BE49-F238E27FC236}">
-                <a16:creationId xmlns:a16="http://schemas.microsoft.com/office/drawing/2014/main" id="{27F1E09F-4E90-44A5-84EC-818E13F973E3}"/>
-              </a:ext>
-            </a:extLst>
-          </p:cNvPr>
-          <p:cNvSpPr txBox="1"/>
-          <p:nvPr/>
-        </p:nvSpPr>
-        <p:spPr>
-          <a:xfrm>
-            <a:off x="9949344" y="2933134"/>
-            <a:ext cx="897746" cy="369332"/>
-          </a:xfrm>
-          <a:prstGeom prst="rect">
-            <a:avLst/>
-          </a:prstGeom>
-          <a:noFill/>
-        </p:spPr>
-        <p:txBody>
-          <a:bodyPr wrap="square" rtlCol="0">
-            <a:spAutoFit/>
-          </a:bodyPr>
-          <a:lstStyle/>
-          <a:p>
-            <a:r>
-              <a:rPr lang="zh-CN" altLang="en-US" dirty="0">
-                <a:solidFill>
-                  <a:schemeClr val="accent1">
-                    <a:lumMod val="40000"/>
-                    <a:lumOff val="60000"/>
-                  </a:schemeClr>
-                </a:solidFill>
-              </a:rPr>
-              <a:t>台式</a:t>
-            </a:r>
-          </a:p>
-        </p:txBody>
-      </p:sp>
-      <p:sp>
-        <p:nvSpPr>
-          <p:cNvPr id="13" name="文本框 12">
-            <a:extLst>
-              <a:ext uri="{FF2B5EF4-FFF2-40B4-BE49-F238E27FC236}">
-                <a16:creationId xmlns:a16="http://schemas.microsoft.com/office/drawing/2014/main" id="{19146187-EE78-4EF1-BDF5-AA5548D4E9BE}"/>
-              </a:ext>
-            </a:extLst>
-          </p:cNvPr>
-          <p:cNvSpPr txBox="1"/>
-          <p:nvPr/>
-        </p:nvSpPr>
-        <p:spPr>
-          <a:xfrm>
-            <a:off x="3702281" y="4071534"/>
-            <a:ext cx="1593908" cy="369332"/>
-          </a:xfrm>
-          <a:prstGeom prst="rect">
-            <a:avLst/>
-          </a:prstGeom>
-          <a:noFill/>
-        </p:spPr>
-        <p:txBody>
-          <a:bodyPr wrap="square" rtlCol="0">
-            <a:spAutoFit/>
-          </a:bodyPr>
-          <a:lstStyle/>
-          <a:p>
-            <a:r>
-              <a:rPr lang="en-US" altLang="zh-CN" dirty="0">
-                <a:solidFill>
-                  <a:schemeClr val="accent1">
-                    <a:lumMod val="40000"/>
-                    <a:lumOff val="60000"/>
-                  </a:schemeClr>
-                </a:solidFill>
-              </a:rPr>
-              <a:t>192.168.1.21</a:t>
-            </a:r>
-            <a:endParaRPr lang="zh-CN" altLang="en-US" dirty="0">
-              <a:solidFill>
-                <a:schemeClr val="accent1">
-                  <a:lumMod val="40000"/>
-                  <a:lumOff val="60000"/>
-                </a:schemeClr>
-              </a:solidFill>
-            </a:endParaRPr>
-          </a:p>
-        </p:txBody>
-      </p:sp>
-      <p:sp>
-        <p:nvSpPr>
-          <p:cNvPr id="17" name="文本框 16">
-            <a:extLst>
-              <a:ext uri="{FF2B5EF4-FFF2-40B4-BE49-F238E27FC236}">
-                <a16:creationId xmlns:a16="http://schemas.microsoft.com/office/drawing/2014/main" id="{8DDCF94B-0AB5-41AB-9D58-C821ABA6BD68}"/>
-              </a:ext>
-            </a:extLst>
-          </p:cNvPr>
-          <p:cNvSpPr txBox="1"/>
-          <p:nvPr/>
-        </p:nvSpPr>
-        <p:spPr>
-          <a:xfrm>
-            <a:off x="6828762" y="4075105"/>
-            <a:ext cx="1593908" cy="369332"/>
-          </a:xfrm>
-          <a:prstGeom prst="rect">
-            <a:avLst/>
-          </a:prstGeom>
-          <a:noFill/>
-        </p:spPr>
-        <p:txBody>
-          <a:bodyPr wrap="square" rtlCol="0">
-            <a:spAutoFit/>
-          </a:bodyPr>
-          <a:lstStyle/>
-          <a:p>
-            <a:r>
-              <a:rPr lang="en-US" altLang="zh-CN" dirty="0">
-                <a:solidFill>
-                  <a:schemeClr val="accent1">
-                    <a:lumMod val="40000"/>
-                    <a:lumOff val="60000"/>
-                  </a:schemeClr>
-                </a:solidFill>
-              </a:rPr>
-              <a:t>192.168.1.22</a:t>
-            </a:r>
-            <a:endParaRPr lang="zh-CN" altLang="en-US" dirty="0">
-              <a:solidFill>
-                <a:schemeClr val="accent1">
-                  <a:lumMod val="40000"/>
-                  <a:lumOff val="60000"/>
-                </a:schemeClr>
-              </a:solidFill>
-            </a:endParaRPr>
-          </a:p>
-        </p:txBody>
-      </p:sp>
-      <p:sp>
-        <p:nvSpPr>
-          <p:cNvPr id="20" name="矩形 19">
-            <a:extLst>
-              <a:ext uri="{FF2B5EF4-FFF2-40B4-BE49-F238E27FC236}">
-                <a16:creationId xmlns:a16="http://schemas.microsoft.com/office/drawing/2014/main" id="{C6CD64A8-8845-4874-A05E-C2B8EAC2BF1B}"/>
-              </a:ext>
-            </a:extLst>
-          </p:cNvPr>
-          <p:cNvSpPr/>
-          <p:nvPr/>
-        </p:nvSpPr>
-        <p:spPr>
-          <a:xfrm>
-            <a:off x="3034202" y="2145932"/>
-            <a:ext cx="308208" cy="445371"/>
-          </a:xfrm>
-          <a:prstGeom prst="rect">
-            <a:avLst/>
-          </a:prstGeom>
-        </p:spPr>
-        <p:style>
-          <a:lnRef idx="3">
-            <a:schemeClr val="lt1"/>
-          </a:lnRef>
-          <a:fillRef idx="1">
-            <a:schemeClr val="accent3"/>
-          </a:fillRef>
-          <a:effectRef idx="1">
-            <a:schemeClr val="accent3"/>
-          </a:effectRef>
-          <a:fontRef idx="minor">
-            <a:schemeClr val="lt1"/>
-          </a:fontRef>
-        </p:style>
-        <p:txBody>
-          <a:bodyPr rtlCol="0" anchor="ctr"/>
-          <a:lstStyle/>
-          <a:p>
-            <a:pPr algn="ctr"/>
-            <a:endParaRPr lang="zh-CN" altLang="en-US">
-              <a:solidFill>
-                <a:schemeClr val="accent1">
-                  <a:lumMod val="40000"/>
-                  <a:lumOff val="60000"/>
-                </a:schemeClr>
-              </a:solidFill>
-            </a:endParaRPr>
-          </a:p>
-        </p:txBody>
-      </p:sp>
-      <p:sp>
-        <p:nvSpPr>
-          <p:cNvPr id="22" name="矩形 21">
-            <a:extLst>
-              <a:ext uri="{FF2B5EF4-FFF2-40B4-BE49-F238E27FC236}">
-                <a16:creationId xmlns:a16="http://schemas.microsoft.com/office/drawing/2014/main" id="{7BDAA7C7-2A2E-4D45-9253-2391000C81F6}"/>
-              </a:ext>
-            </a:extLst>
-          </p:cNvPr>
-          <p:cNvSpPr/>
-          <p:nvPr/>
-        </p:nvSpPr>
-        <p:spPr>
-          <a:xfrm>
-            <a:off x="3011404" y="4317856"/>
-            <a:ext cx="308208" cy="445371"/>
-          </a:xfrm>
-          <a:prstGeom prst="rect">
-            <a:avLst/>
-          </a:prstGeom>
-        </p:spPr>
-        <p:style>
-          <a:lnRef idx="3">
-            <a:schemeClr val="lt1"/>
-          </a:lnRef>
-          <a:fillRef idx="1">
-            <a:schemeClr val="accent3"/>
-          </a:fillRef>
-          <a:effectRef idx="1">
-            <a:schemeClr val="accent3"/>
-          </a:effectRef>
-          <a:fontRef idx="minor">
-            <a:schemeClr val="lt1"/>
-          </a:fontRef>
-        </p:style>
-        <p:txBody>
-          <a:bodyPr rtlCol="0" anchor="ctr"/>
-          <a:lstStyle/>
-          <a:p>
-            <a:pPr algn="ctr"/>
-            <a:endParaRPr lang="zh-CN" altLang="en-US">
-              <a:solidFill>
-                <a:schemeClr val="accent1">
-                  <a:lumMod val="40000"/>
-                  <a:lumOff val="60000"/>
-                </a:schemeClr>
-              </a:solidFill>
-            </a:endParaRPr>
-          </a:p>
-        </p:txBody>
-      </p:sp>
-      <p:sp>
-        <p:nvSpPr>
-          <p:cNvPr id="24" name="矩形 23">
-            <a:extLst>
-              <a:ext uri="{FF2B5EF4-FFF2-40B4-BE49-F238E27FC236}">
-                <a16:creationId xmlns:a16="http://schemas.microsoft.com/office/drawing/2014/main" id="{BF126198-072A-4EFE-A3A7-876FEF483119}"/>
-              </a:ext>
-            </a:extLst>
-          </p:cNvPr>
-          <p:cNvSpPr/>
-          <p:nvPr/>
-        </p:nvSpPr>
-        <p:spPr>
-          <a:xfrm>
-            <a:off x="8449531" y="2129660"/>
-            <a:ext cx="308208" cy="445371"/>
-          </a:xfrm>
-          <a:prstGeom prst="rect">
-            <a:avLst/>
-          </a:prstGeom>
-        </p:spPr>
-        <p:style>
-          <a:lnRef idx="3">
-            <a:schemeClr val="lt1"/>
-          </a:lnRef>
-          <a:fillRef idx="1">
-            <a:schemeClr val="accent3"/>
-          </a:fillRef>
-          <a:effectRef idx="1">
-            <a:schemeClr val="accent3"/>
-          </a:effectRef>
-          <a:fontRef idx="minor">
-            <a:schemeClr val="lt1"/>
-          </a:fontRef>
-        </p:style>
-        <p:txBody>
-          <a:bodyPr rtlCol="0" anchor="ctr"/>
-          <a:lstStyle/>
-          <a:p>
-            <a:pPr algn="ctr"/>
-            <a:endParaRPr lang="zh-CN" altLang="en-US">
-              <a:solidFill>
-                <a:schemeClr val="accent1">
-                  <a:lumMod val="40000"/>
-                  <a:lumOff val="60000"/>
-                </a:schemeClr>
-              </a:solidFill>
-            </a:endParaRPr>
-          </a:p>
-        </p:txBody>
-      </p:sp>
-      <p:sp>
-        <p:nvSpPr>
-          <p:cNvPr id="28" name="矩形 27">
-            <a:extLst>
-              <a:ext uri="{FF2B5EF4-FFF2-40B4-BE49-F238E27FC236}">
-                <a16:creationId xmlns:a16="http://schemas.microsoft.com/office/drawing/2014/main" id="{A1A9E17B-3FE9-4F4C-AD60-CDF67BD6926B}"/>
-              </a:ext>
-            </a:extLst>
-          </p:cNvPr>
-          <p:cNvSpPr/>
-          <p:nvPr/>
-        </p:nvSpPr>
-        <p:spPr>
-          <a:xfrm>
-            <a:off x="8462049" y="4260045"/>
-            <a:ext cx="308208" cy="445371"/>
-          </a:xfrm>
-          <a:prstGeom prst="rect">
-            <a:avLst/>
-          </a:prstGeom>
-        </p:spPr>
-        <p:style>
-          <a:lnRef idx="3">
-            <a:schemeClr val="lt1"/>
-          </a:lnRef>
-          <a:fillRef idx="1">
-            <a:schemeClr val="accent3"/>
-          </a:fillRef>
-          <a:effectRef idx="1">
-            <a:schemeClr val="accent3"/>
-          </a:effectRef>
-          <a:fontRef idx="minor">
-            <a:schemeClr val="lt1"/>
-          </a:fontRef>
-        </p:style>
-        <p:txBody>
-          <a:bodyPr rtlCol="0" anchor="ctr"/>
-          <a:lstStyle/>
-          <a:p>
-            <a:pPr algn="ctr"/>
-            <a:endParaRPr lang="zh-CN" altLang="en-US">
-              <a:solidFill>
-                <a:schemeClr val="accent1">
-                  <a:lumMod val="40000"/>
-                  <a:lumOff val="60000"/>
-                </a:schemeClr>
-              </a:solidFill>
-            </a:endParaRPr>
-          </a:p>
-        </p:txBody>
-      </p:sp>
-      <p:sp>
-        <p:nvSpPr>
-          <p:cNvPr id="3" name="文本框 2">
-            <a:extLst>
-              <a:ext uri="{FF2B5EF4-FFF2-40B4-BE49-F238E27FC236}">
-                <a16:creationId xmlns:a16="http://schemas.microsoft.com/office/drawing/2014/main" id="{81EAC0AB-B220-4FA7-B013-87A646817A0A}"/>
-              </a:ext>
-            </a:extLst>
-          </p:cNvPr>
-          <p:cNvSpPr txBox="1"/>
-          <p:nvPr/>
-        </p:nvSpPr>
-        <p:spPr>
-          <a:xfrm>
-            <a:off x="8473068" y="826389"/>
-            <a:ext cx="1963512" cy="369332"/>
-          </a:xfrm>
-          <a:prstGeom prst="rect">
-            <a:avLst/>
-          </a:prstGeom>
-          <a:noFill/>
-        </p:spPr>
-        <p:txBody>
-          <a:bodyPr wrap="square" rtlCol="0">
-            <a:spAutoFit/>
-          </a:bodyPr>
-          <a:lstStyle/>
-          <a:p>
-            <a:r>
-              <a:rPr lang="zh-CN" altLang="en-US" dirty="0">
-                <a:solidFill>
-                  <a:schemeClr val="accent1">
-                    <a:lumMod val="40000"/>
-                    <a:lumOff val="60000"/>
-                  </a:schemeClr>
-                </a:solidFill>
-              </a:rPr>
-              <a:t>可上网</a:t>
-            </a:r>
-          </a:p>
-        </p:txBody>
-      </p:sp>
-      <p:sp>
-        <p:nvSpPr>
-          <p:cNvPr id="4" name="箭头: 下 3">
-            <a:extLst>
-              <a:ext uri="{FF2B5EF4-FFF2-40B4-BE49-F238E27FC236}">
-                <a16:creationId xmlns:a16="http://schemas.microsoft.com/office/drawing/2014/main" id="{79EFAB61-E538-4A6D-B986-43CC4BD39CA1}"/>
-              </a:ext>
-            </a:extLst>
-          </p:cNvPr>
-          <p:cNvSpPr/>
-          <p:nvPr/>
-        </p:nvSpPr>
-        <p:spPr>
-          <a:xfrm>
-            <a:off x="8889052" y="1300317"/>
-            <a:ext cx="196709" cy="345941"/>
-          </a:xfrm>
-          <a:prstGeom prst="downArrow">
-            <a:avLst/>
-          </a:prstGeom>
-        </p:spPr>
-        <p:style>
-          <a:lnRef idx="2">
-            <a:schemeClr val="accent1">
-              <a:shade val="50000"/>
-            </a:schemeClr>
-          </a:lnRef>
-          <a:fillRef idx="1">
-            <a:schemeClr val="accent1"/>
-          </a:fillRef>
-          <a:effectRef idx="0">
-            <a:schemeClr val="accent1"/>
-          </a:effectRef>
-          <a:fontRef idx="minor">
-            <a:schemeClr val="lt1"/>
-          </a:fontRef>
-        </p:style>
-        <p:txBody>
-          <a:bodyPr rtlCol="0" anchor="ctr"/>
-          <a:lstStyle/>
-          <a:p>
-            <a:pPr algn="ctr"/>
-            <a:endParaRPr lang="zh-CN" altLang="en-US">
-              <a:solidFill>
-                <a:schemeClr val="accent1">
-                  <a:lumMod val="40000"/>
-                  <a:lumOff val="60000"/>
-                </a:schemeClr>
-              </a:solidFill>
-            </a:endParaRPr>
-          </a:p>
-        </p:txBody>
-      </p:sp>
-      <p:sp>
-        <p:nvSpPr>
-          <p:cNvPr id="7" name="标题 1">
-            <a:extLst>
-              <a:ext uri="{FF2B5EF4-FFF2-40B4-BE49-F238E27FC236}">
-                <a16:creationId xmlns:a16="http://schemas.microsoft.com/office/drawing/2014/main" id="{9E9CE235-BA50-47F5-9A87-46C0E81685E9}"/>
-              </a:ext>
-            </a:extLst>
-          </p:cNvPr>
-          <p:cNvSpPr txBox="1">
-            <a:spLocks/>
-          </p:cNvSpPr>
-          <p:nvPr/>
-        </p:nvSpPr>
-        <p:spPr>
-          <a:xfrm>
-            <a:off x="632358" y="5291158"/>
-            <a:ext cx="10515600" cy="1007078"/>
-          </a:xfrm>
-          <a:prstGeom prst="rect">
-            <a:avLst/>
-          </a:prstGeom>
-        </p:spPr>
-        <p:txBody>
-          <a:bodyPr vert="horz" lIns="91440" tIns="45720" rIns="91440" bIns="45720" rtlCol="0" anchor="ctr">
-            <a:normAutofit/>
-          </a:bodyPr>
-          <a:lstStyle>
-            <a:lvl1pPr algn="l" defTabSz="914400" rtl="0" eaLnBrk="1" latinLnBrk="0" hangingPunct="1">
-              <a:lnSpc>
-                <a:spcPct val="90000"/>
-              </a:lnSpc>
-              <a:spcBef>
-                <a:spcPct val="0"/>
-              </a:spcBef>
-              <a:buNone/>
-              <a:defRPr sz="4400" kern="1200">
-                <a:solidFill>
-                  <a:schemeClr val="tx1"/>
-                </a:solidFill>
-                <a:latin typeface="+mj-lt"/>
-                <a:ea typeface="+mj-ea"/>
-                <a:cs typeface="+mj-cs"/>
-              </a:defRPr>
-            </a:lvl1pPr>
-          </a:lstStyle>
-          <a:p>
-            <a:r>
-              <a:rPr lang="zh-CN" altLang="en-US" sz="1600" b="1" dirty="0">
-                <a:solidFill>
-                  <a:schemeClr val="accent1">
-                    <a:lumMod val="40000"/>
-                    <a:lumOff val="60000"/>
-                  </a:schemeClr>
-                </a:solidFill>
-                <a:effectLst>
-                  <a:outerShdw blurRad="38100" dist="19050" dir="2700000" algn="tl" rotWithShape="0">
-                    <a:schemeClr val="dk1">
-                      <a:alpha val="40000"/>
-                    </a:schemeClr>
-                  </a:outerShdw>
-                </a:effectLst>
-              </a:rPr>
-              <a:t>台式电脑先接上无线网卡，先设置虚拟</a:t>
-            </a:r>
-            <a:r>
-              <a:rPr lang="en-US" altLang="zh-CN" sz="1600" b="1" dirty="0" err="1">
-                <a:solidFill>
-                  <a:schemeClr val="accent1">
-                    <a:lumMod val="40000"/>
-                    <a:lumOff val="60000"/>
-                  </a:schemeClr>
-                </a:solidFill>
-                <a:effectLst>
-                  <a:outerShdw blurRad="38100" dist="19050" dir="2700000" algn="tl" rotWithShape="0">
-                    <a:schemeClr val="dk1">
-                      <a:alpha val="40000"/>
-                    </a:schemeClr>
-                  </a:outerShdw>
-                </a:effectLst>
-              </a:rPr>
-              <a:t>WiFi</a:t>
-            </a:r>
-            <a:r>
-              <a:rPr lang="zh-CN" altLang="en-US" sz="1600" b="1" dirty="0">
-                <a:solidFill>
-                  <a:schemeClr val="accent1">
-                    <a:lumMod val="40000"/>
-                    <a:lumOff val="60000"/>
-                  </a:schemeClr>
-                </a:solidFill>
-                <a:effectLst>
-                  <a:outerShdw blurRad="38100" dist="19050" dir="2700000" algn="tl" rotWithShape="0">
-                    <a:schemeClr val="dk1">
-                      <a:alpha val="40000"/>
-                    </a:schemeClr>
-                  </a:outerShdw>
-                </a:effectLst>
-              </a:rPr>
-              <a:t>热点，然后设置本地连接的网络共享，再用笔记本连接</a:t>
-            </a:r>
-            <a:r>
-              <a:rPr lang="en-US" altLang="zh-CN" sz="1600" b="1" dirty="0" err="1">
-                <a:solidFill>
-                  <a:schemeClr val="accent1">
-                    <a:lumMod val="40000"/>
-                    <a:lumOff val="60000"/>
-                  </a:schemeClr>
-                </a:solidFill>
-                <a:effectLst>
-                  <a:outerShdw blurRad="38100" dist="19050" dir="2700000" algn="tl" rotWithShape="0">
-                    <a:schemeClr val="dk1">
-                      <a:alpha val="40000"/>
-                    </a:schemeClr>
-                  </a:outerShdw>
-                </a:effectLst>
-              </a:rPr>
-              <a:t>WiFi</a:t>
-            </a:r>
-            <a:r>
-              <a:rPr lang="zh-CN" altLang="en-US" sz="1600" b="1" dirty="0">
-                <a:solidFill>
-                  <a:schemeClr val="accent1">
-                    <a:lumMod val="40000"/>
-                    <a:lumOff val="60000"/>
-                  </a:schemeClr>
-                </a:solidFill>
-                <a:effectLst>
-                  <a:outerShdw blurRad="38100" dist="19050" dir="2700000" algn="tl" rotWithShape="0">
-                    <a:schemeClr val="dk1">
-                      <a:alpha val="40000"/>
-                    </a:schemeClr>
-                  </a:outerShdw>
-                </a:effectLst>
-              </a:rPr>
-              <a:t>，笔记本就可以上网了。（不过天翼校园网 有检测，你共享网络会检测，然后会自动退出天翼登录）</a:t>
-            </a:r>
-          </a:p>
-        </p:txBody>
-      </p:sp>
-      <p:pic>
-        <p:nvPicPr>
-          <p:cNvPr id="15" name="图片 14">
-            <a:extLst>
-              <a:ext uri="{FF2B5EF4-FFF2-40B4-BE49-F238E27FC236}">
-                <a16:creationId xmlns:a16="http://schemas.microsoft.com/office/drawing/2014/main" id="{C87B5B79-6498-41FD-9765-8F0819E70E33}"/>
-              </a:ext>
-            </a:extLst>
-          </p:cNvPr>
-          <p:cNvPicPr>
-            <a:picLocks noChangeAspect="1"/>
-          </p:cNvPicPr>
-          <p:nvPr/>
-        </p:nvPicPr>
-        <p:blipFill>
-          <a:blip r:embed="rId3" cstate="print">
-            <a:duotone>
-              <a:schemeClr val="bg2">
-                <a:shade val="45000"/>
-                <a:satMod val="135000"/>
-              </a:schemeClr>
-              <a:prstClr val="white"/>
-            </a:duotone>
-            <a:extLst>
-              <a:ext uri="{28A0092B-C50C-407E-A947-70E740481C1C}">
-                <a14:useLocalDpi xmlns:a14="http://schemas.microsoft.com/office/drawing/2010/main" val="0"/>
-              </a:ext>
-            </a:extLst>
-          </a:blip>
-          <a:stretch>
-            <a:fillRect/>
-          </a:stretch>
-        </p:blipFill>
-        <p:spPr>
-          <a:xfrm>
-            <a:off x="5391956" y="3435348"/>
-            <a:ext cx="996404" cy="996404"/>
-          </a:xfrm>
-          <a:prstGeom prst="rect">
-            <a:avLst/>
-          </a:prstGeom>
-        </p:spPr>
-      </p:pic>
     </p:spTree>
     <p:extLst>
       <p:ext uri="{BB962C8B-B14F-4D97-AF65-F5344CB8AC3E}">
-        <p14:creationId xmlns:p14="http://schemas.microsoft.com/office/powerpoint/2010/main" val="2547158542"/>
+        <p14:creationId xmlns:p14="http://schemas.microsoft.com/office/powerpoint/2010/main" val="460071081"/>
       </p:ext>
     </p:extLst>
   </p:cSld>
@@ -6416,10 +5561,10 @@
       </p:grpSpPr>
       <p:pic>
         <p:nvPicPr>
-          <p:cNvPr id="16" name="图片 15">
-            <a:extLst>
-              <a:ext uri="{FF2B5EF4-FFF2-40B4-BE49-F238E27FC236}">
-                <a16:creationId xmlns:a16="http://schemas.microsoft.com/office/drawing/2014/main" id="{DE7E807C-680E-4A4E-9D29-90A8D032F37C}"/>
+          <p:cNvPr id="5" name="图片 4">
+            <a:extLst>
+              <a:ext uri="{FF2B5EF4-FFF2-40B4-BE49-F238E27FC236}">
+                <a16:creationId xmlns:a16="http://schemas.microsoft.com/office/drawing/2014/main" id="{4D3464A1-A7CD-4DF2-BA07-8FB5A8002E95}"/>
               </a:ext>
             </a:extLst>
           </p:cNvPr>
@@ -6435,31 +5580,567 @@
         <p:spPr>
           <a:xfrm>
             <a:off x="0" y="0"/>
-            <a:ext cx="12192000" cy="6858000"/>
+            <a:ext cx="9144000" cy="6858000"/>
           </a:xfrm>
           <a:prstGeom prst="rect">
             <a:avLst/>
           </a:prstGeom>
         </p:spPr>
       </p:pic>
+      <p:sp>
+        <p:nvSpPr>
+          <p:cNvPr id="6" name="文本框 5">
+            <a:extLst>
+              <a:ext uri="{FF2B5EF4-FFF2-40B4-BE49-F238E27FC236}">
+                <a16:creationId xmlns:a16="http://schemas.microsoft.com/office/drawing/2014/main" id="{3BBC7B1B-7DEA-4A90-9BB9-009C33C0B379}"/>
+              </a:ext>
+            </a:extLst>
+          </p:cNvPr>
+          <p:cNvSpPr txBox="1"/>
+          <p:nvPr/>
+        </p:nvSpPr>
+        <p:spPr>
+          <a:xfrm>
+            <a:off x="609600" y="883023"/>
+            <a:ext cx="3612776" cy="369332"/>
+          </a:xfrm>
+          <a:prstGeom prst="rect">
+            <a:avLst/>
+          </a:prstGeom>
+          <a:noFill/>
+        </p:spPr>
+        <p:txBody>
+          <a:bodyPr wrap="square" rtlCol="0">
+            <a:spAutoFit/>
+          </a:bodyPr>
+          <a:lstStyle/>
+          <a:p>
+            <a:r>
+              <a:rPr lang="zh-CN" altLang="en-US" dirty="0">
+                <a:solidFill>
+                  <a:schemeClr val="accent1">
+                    <a:lumMod val="60000"/>
+                    <a:lumOff val="40000"/>
+                  </a:schemeClr>
+                </a:solidFill>
+              </a:rPr>
+              <a:t>换个思路：</a:t>
+            </a:r>
+          </a:p>
+        </p:txBody>
+      </p:sp>
+      <p:sp>
+        <p:nvSpPr>
+          <p:cNvPr id="45" name="矩形 44">
+            <a:extLst>
+              <a:ext uri="{FF2B5EF4-FFF2-40B4-BE49-F238E27FC236}">
+                <a16:creationId xmlns:a16="http://schemas.microsoft.com/office/drawing/2014/main" id="{54A57442-7F2E-49AD-AE01-F7E07EDD0768}"/>
+              </a:ext>
+            </a:extLst>
+          </p:cNvPr>
+          <p:cNvSpPr/>
+          <p:nvPr/>
+        </p:nvSpPr>
+        <p:spPr>
+          <a:xfrm>
+            <a:off x="1681993" y="2226469"/>
+            <a:ext cx="1082180" cy="2273701"/>
+          </a:xfrm>
+          <a:prstGeom prst="rect">
+            <a:avLst/>
+          </a:prstGeom>
+        </p:spPr>
+        <p:style>
+          <a:lnRef idx="2">
+            <a:schemeClr val="accent1">
+              <a:shade val="50000"/>
+            </a:schemeClr>
+          </a:lnRef>
+          <a:fillRef idx="1">
+            <a:schemeClr val="accent1"/>
+          </a:fillRef>
+          <a:effectRef idx="0">
+            <a:schemeClr val="accent1"/>
+          </a:effectRef>
+          <a:fontRef idx="minor">
+            <a:schemeClr val="lt1"/>
+          </a:fontRef>
+        </p:style>
+        <p:txBody>
+          <a:bodyPr rtlCol="0" anchor="ctr"/>
+          <a:lstStyle/>
+          <a:p>
+            <a:pPr algn="ctr"/>
+            <a:endParaRPr lang="zh-CN" altLang="en-US" sz="1350">
+              <a:solidFill>
+                <a:schemeClr val="tx1">
+                  <a:lumMod val="50000"/>
+                  <a:lumOff val="50000"/>
+                </a:schemeClr>
+              </a:solidFill>
+            </a:endParaRPr>
+          </a:p>
+        </p:txBody>
+      </p:sp>
+      <p:sp>
+        <p:nvSpPr>
+          <p:cNvPr id="47" name="矩形 46">
+            <a:extLst>
+              <a:ext uri="{FF2B5EF4-FFF2-40B4-BE49-F238E27FC236}">
+                <a16:creationId xmlns:a16="http://schemas.microsoft.com/office/drawing/2014/main" id="{8547CD0D-9312-4D5E-90A6-495AC6AA5EB9}"/>
+              </a:ext>
+            </a:extLst>
+          </p:cNvPr>
+          <p:cNvSpPr/>
+          <p:nvPr/>
+        </p:nvSpPr>
+        <p:spPr>
+          <a:xfrm>
+            <a:off x="6199466" y="2226469"/>
+            <a:ext cx="1082180" cy="2273701"/>
+          </a:xfrm>
+          <a:prstGeom prst="rect">
+            <a:avLst/>
+          </a:prstGeom>
+        </p:spPr>
+        <p:style>
+          <a:lnRef idx="2">
+            <a:schemeClr val="accent1">
+              <a:shade val="50000"/>
+            </a:schemeClr>
+          </a:lnRef>
+          <a:fillRef idx="1">
+            <a:schemeClr val="accent1"/>
+          </a:fillRef>
+          <a:effectRef idx="0">
+            <a:schemeClr val="accent1"/>
+          </a:effectRef>
+          <a:fontRef idx="minor">
+            <a:schemeClr val="lt1"/>
+          </a:fontRef>
+        </p:style>
+        <p:txBody>
+          <a:bodyPr rtlCol="0" anchor="ctr"/>
+          <a:lstStyle/>
+          <a:p>
+            <a:pPr algn="ctr"/>
+            <a:endParaRPr lang="zh-CN" altLang="en-US" sz="1350">
+              <a:solidFill>
+                <a:schemeClr val="tx1">
+                  <a:lumMod val="50000"/>
+                  <a:lumOff val="50000"/>
+                </a:schemeClr>
+              </a:solidFill>
+            </a:endParaRPr>
+          </a:p>
+        </p:txBody>
+      </p:sp>
+      <p:cxnSp>
+        <p:nvCxnSpPr>
+          <p:cNvPr id="49" name="直接连接符 48">
+            <a:extLst>
+              <a:ext uri="{FF2B5EF4-FFF2-40B4-BE49-F238E27FC236}">
+                <a16:creationId xmlns:a16="http://schemas.microsoft.com/office/drawing/2014/main" id="{BA174E0A-E683-427F-B16F-F87F183B9B17}"/>
+              </a:ext>
+            </a:extLst>
+          </p:cNvPr>
+          <p:cNvCxnSpPr>
+            <a:cxnSpLocks/>
+          </p:cNvCxnSpPr>
+          <p:nvPr/>
+        </p:nvCxnSpPr>
+        <p:spPr>
+          <a:xfrm>
+            <a:off x="2403446" y="2631521"/>
+            <a:ext cx="3976382" cy="0"/>
+          </a:xfrm>
+          <a:prstGeom prst="line">
+            <a:avLst/>
+          </a:prstGeom>
+        </p:spPr>
+        <p:style>
+          <a:lnRef idx="3">
+            <a:schemeClr val="dk1"/>
+          </a:lnRef>
+          <a:fillRef idx="0">
+            <a:schemeClr val="dk1"/>
+          </a:fillRef>
+          <a:effectRef idx="2">
+            <a:schemeClr val="dk1"/>
+          </a:effectRef>
+          <a:fontRef idx="minor">
+            <a:schemeClr val="tx1"/>
+          </a:fontRef>
+        </p:style>
+      </p:cxnSp>
+      <p:cxnSp>
+        <p:nvCxnSpPr>
+          <p:cNvPr id="51" name="直接连接符 50">
+            <a:extLst>
+              <a:ext uri="{FF2B5EF4-FFF2-40B4-BE49-F238E27FC236}">
+                <a16:creationId xmlns:a16="http://schemas.microsoft.com/office/drawing/2014/main" id="{65DC49CF-999C-4EFA-804E-2549AD7E95CC}"/>
+              </a:ext>
+            </a:extLst>
+          </p:cNvPr>
+          <p:cNvCxnSpPr>
+            <a:cxnSpLocks/>
+          </p:cNvCxnSpPr>
+          <p:nvPr/>
+        </p:nvCxnSpPr>
+        <p:spPr>
+          <a:xfrm>
+            <a:off x="2403445" y="4266485"/>
+            <a:ext cx="3976382" cy="0"/>
+          </a:xfrm>
+          <a:prstGeom prst="line">
+            <a:avLst/>
+          </a:prstGeom>
+          <a:ln w="9525" cap="flat" cmpd="sng" algn="ctr">
+            <a:solidFill>
+              <a:schemeClr val="dk1"/>
+            </a:solidFill>
+            <a:prstDash val="dash"/>
+            <a:round/>
+            <a:headEnd type="none" w="med" len="med"/>
+            <a:tailEnd type="none" w="med" len="med"/>
+          </a:ln>
+        </p:spPr>
+        <p:style>
+          <a:lnRef idx="0">
+            <a:scrgbClr r="0" g="0" b="0"/>
+          </a:lnRef>
+          <a:fillRef idx="0">
+            <a:scrgbClr r="0" g="0" b="0"/>
+          </a:fillRef>
+          <a:effectRef idx="0">
+            <a:scrgbClr r="0" g="0" b="0"/>
+          </a:effectRef>
+          <a:fontRef idx="minor">
+            <a:schemeClr val="tx1"/>
+          </a:fontRef>
+        </p:style>
+      </p:cxnSp>
+      <p:sp>
+        <p:nvSpPr>
+          <p:cNvPr id="53" name="文本框 52">
+            <a:extLst>
+              <a:ext uri="{FF2B5EF4-FFF2-40B4-BE49-F238E27FC236}">
+                <a16:creationId xmlns:a16="http://schemas.microsoft.com/office/drawing/2014/main" id="{0E98F8E6-E8FA-4F6E-A286-A3C8E57734A3}"/>
+              </a:ext>
+            </a:extLst>
+          </p:cNvPr>
+          <p:cNvSpPr txBox="1"/>
+          <p:nvPr/>
+        </p:nvSpPr>
+        <p:spPr>
+          <a:xfrm>
+            <a:off x="2764173" y="2303921"/>
+            <a:ext cx="184731" cy="300082"/>
+          </a:xfrm>
+          <a:prstGeom prst="rect">
+            <a:avLst/>
+          </a:prstGeom>
+          <a:noFill/>
+        </p:spPr>
+        <p:txBody>
+          <a:bodyPr wrap="none" rtlCol="0">
+            <a:spAutoFit/>
+          </a:bodyPr>
+          <a:lstStyle/>
+          <a:p>
+            <a:endParaRPr lang="zh-CN" altLang="en-US" sz="1350" dirty="0">
+              <a:solidFill>
+                <a:schemeClr val="tx1">
+                  <a:lumMod val="50000"/>
+                  <a:lumOff val="50000"/>
+                </a:schemeClr>
+              </a:solidFill>
+            </a:endParaRPr>
+          </a:p>
+        </p:txBody>
+      </p:sp>
+      <p:sp>
+        <p:nvSpPr>
+          <p:cNvPr id="55" name="文本框 54">
+            <a:extLst>
+              <a:ext uri="{FF2B5EF4-FFF2-40B4-BE49-F238E27FC236}">
+                <a16:creationId xmlns:a16="http://schemas.microsoft.com/office/drawing/2014/main" id="{BE7A2FFF-DAEA-47D8-9015-D0269B61212F}"/>
+              </a:ext>
+            </a:extLst>
+          </p:cNvPr>
+          <p:cNvSpPr txBox="1"/>
+          <p:nvPr/>
+        </p:nvSpPr>
+        <p:spPr>
+          <a:xfrm>
+            <a:off x="2764173" y="3938885"/>
+            <a:ext cx="184731" cy="300082"/>
+          </a:xfrm>
+          <a:prstGeom prst="rect">
+            <a:avLst/>
+          </a:prstGeom>
+          <a:noFill/>
+        </p:spPr>
+        <p:txBody>
+          <a:bodyPr wrap="none" rtlCol="0">
+            <a:spAutoFit/>
+          </a:bodyPr>
+          <a:lstStyle/>
+          <a:p>
+            <a:endParaRPr lang="zh-CN" altLang="en-US" sz="1350" dirty="0">
+              <a:solidFill>
+                <a:schemeClr val="tx1">
+                  <a:lumMod val="50000"/>
+                  <a:lumOff val="50000"/>
+                </a:schemeClr>
+              </a:solidFill>
+            </a:endParaRPr>
+          </a:p>
+        </p:txBody>
+      </p:sp>
+      <p:sp>
+        <p:nvSpPr>
+          <p:cNvPr id="57" name="文本框 56">
+            <a:extLst>
+              <a:ext uri="{FF2B5EF4-FFF2-40B4-BE49-F238E27FC236}">
+                <a16:creationId xmlns:a16="http://schemas.microsoft.com/office/drawing/2014/main" id="{76740A23-15E2-4BA3-A01B-8253B50BAAF4}"/>
+              </a:ext>
+            </a:extLst>
+          </p:cNvPr>
+          <p:cNvSpPr txBox="1"/>
+          <p:nvPr/>
+        </p:nvSpPr>
+        <p:spPr>
+          <a:xfrm>
+            <a:off x="5121572" y="2290495"/>
+            <a:ext cx="184731" cy="300082"/>
+          </a:xfrm>
+          <a:prstGeom prst="rect">
+            <a:avLst/>
+          </a:prstGeom>
+          <a:noFill/>
+        </p:spPr>
+        <p:txBody>
+          <a:bodyPr wrap="none" rtlCol="0">
+            <a:spAutoFit/>
+          </a:bodyPr>
+          <a:lstStyle/>
+          <a:p>
+            <a:endParaRPr lang="zh-CN" altLang="en-US" sz="1350" dirty="0">
+              <a:solidFill>
+                <a:schemeClr val="tx1">
+                  <a:lumMod val="50000"/>
+                  <a:lumOff val="50000"/>
+                </a:schemeClr>
+              </a:solidFill>
+            </a:endParaRPr>
+          </a:p>
+        </p:txBody>
+      </p:sp>
+      <p:sp>
+        <p:nvSpPr>
+          <p:cNvPr id="59" name="文本框 58">
+            <a:extLst>
+              <a:ext uri="{FF2B5EF4-FFF2-40B4-BE49-F238E27FC236}">
+                <a16:creationId xmlns:a16="http://schemas.microsoft.com/office/drawing/2014/main" id="{9E781E71-89D6-4128-BA90-3C561AA7DC23}"/>
+              </a:ext>
+            </a:extLst>
+          </p:cNvPr>
+          <p:cNvSpPr txBox="1"/>
+          <p:nvPr/>
+        </p:nvSpPr>
+        <p:spPr>
+          <a:xfrm>
+            <a:off x="5127496" y="3943570"/>
+            <a:ext cx="184731" cy="300082"/>
+          </a:xfrm>
+          <a:prstGeom prst="rect">
+            <a:avLst/>
+          </a:prstGeom>
+          <a:noFill/>
+        </p:spPr>
+        <p:txBody>
+          <a:bodyPr wrap="none" rtlCol="0">
+            <a:spAutoFit/>
+          </a:bodyPr>
+          <a:lstStyle/>
+          <a:p>
+            <a:endParaRPr lang="zh-CN" altLang="en-US" sz="1350" dirty="0">
+              <a:solidFill>
+                <a:schemeClr val="tx1">
+                  <a:lumMod val="50000"/>
+                  <a:lumOff val="50000"/>
+                </a:schemeClr>
+              </a:solidFill>
+            </a:endParaRPr>
+          </a:p>
+        </p:txBody>
+      </p:sp>
+      <p:sp>
+        <p:nvSpPr>
+          <p:cNvPr id="61" name="文本框 60">
+            <a:extLst>
+              <a:ext uri="{FF2B5EF4-FFF2-40B4-BE49-F238E27FC236}">
+                <a16:creationId xmlns:a16="http://schemas.microsoft.com/office/drawing/2014/main" id="{2886F48A-F472-4CC9-BDC6-B15D6268E74E}"/>
+              </a:ext>
+            </a:extLst>
+          </p:cNvPr>
+          <p:cNvSpPr txBox="1"/>
+          <p:nvPr/>
+        </p:nvSpPr>
+        <p:spPr>
+          <a:xfrm>
+            <a:off x="1925273" y="3002734"/>
+            <a:ext cx="327171" cy="300082"/>
+          </a:xfrm>
+          <a:prstGeom prst="rect">
+            <a:avLst/>
+          </a:prstGeom>
+          <a:noFill/>
+        </p:spPr>
+        <p:txBody>
+          <a:bodyPr wrap="square" rtlCol="0">
+            <a:spAutoFit/>
+          </a:bodyPr>
+          <a:lstStyle/>
+          <a:p>
+            <a:endParaRPr lang="zh-CN" altLang="en-US" sz="1350" dirty="0">
+              <a:solidFill>
+                <a:schemeClr val="tx1">
+                  <a:lumMod val="50000"/>
+                  <a:lumOff val="50000"/>
+                </a:schemeClr>
+              </a:solidFill>
+            </a:endParaRPr>
+          </a:p>
+        </p:txBody>
+      </p:sp>
+      <p:sp>
+        <p:nvSpPr>
+          <p:cNvPr id="63" name="文本框 62">
+            <a:extLst>
+              <a:ext uri="{FF2B5EF4-FFF2-40B4-BE49-F238E27FC236}">
+                <a16:creationId xmlns:a16="http://schemas.microsoft.com/office/drawing/2014/main" id="{BAF6C794-1306-49CB-A469-8901A43A9856}"/>
+              </a:ext>
+            </a:extLst>
+          </p:cNvPr>
+          <p:cNvSpPr txBox="1"/>
+          <p:nvPr/>
+        </p:nvSpPr>
+        <p:spPr>
+          <a:xfrm>
+            <a:off x="1075888" y="2952400"/>
+            <a:ext cx="673310" cy="300082"/>
+          </a:xfrm>
+          <a:prstGeom prst="rect">
+            <a:avLst/>
+          </a:prstGeom>
+          <a:noFill/>
+        </p:spPr>
+        <p:txBody>
+          <a:bodyPr wrap="square" rtlCol="0">
+            <a:spAutoFit/>
+          </a:bodyPr>
+          <a:lstStyle/>
+          <a:p>
+            <a:r>
+              <a:rPr lang="zh-CN" altLang="en-US" sz="1350" dirty="0">
+                <a:solidFill>
+                  <a:schemeClr val="tx1">
+                    <a:lumMod val="50000"/>
+                    <a:lumOff val="50000"/>
+                  </a:schemeClr>
+                </a:solidFill>
+              </a:rPr>
+              <a:t>电脑</a:t>
+            </a:r>
+            <a:r>
+              <a:rPr lang="en-US" altLang="zh-CN" sz="1350" dirty="0">
+                <a:solidFill>
+                  <a:schemeClr val="tx1">
+                    <a:lumMod val="50000"/>
+                    <a:lumOff val="50000"/>
+                  </a:schemeClr>
+                </a:solidFill>
+              </a:rPr>
+              <a:t>1</a:t>
+            </a:r>
+            <a:endParaRPr lang="zh-CN" altLang="en-US" sz="1350" dirty="0">
+              <a:solidFill>
+                <a:schemeClr val="tx1">
+                  <a:lumMod val="50000"/>
+                  <a:lumOff val="50000"/>
+                </a:schemeClr>
+              </a:solidFill>
+            </a:endParaRPr>
+          </a:p>
+        </p:txBody>
+      </p:sp>
+      <p:sp>
+        <p:nvSpPr>
+          <p:cNvPr id="65" name="文本框 64">
+            <a:extLst>
+              <a:ext uri="{FF2B5EF4-FFF2-40B4-BE49-F238E27FC236}">
+                <a16:creationId xmlns:a16="http://schemas.microsoft.com/office/drawing/2014/main" id="{E6050309-913C-4A0F-9C8A-22E9DCA2A104}"/>
+              </a:ext>
+            </a:extLst>
+          </p:cNvPr>
+          <p:cNvSpPr txBox="1"/>
+          <p:nvPr/>
+        </p:nvSpPr>
+        <p:spPr>
+          <a:xfrm>
+            <a:off x="7539513" y="3013934"/>
+            <a:ext cx="1082180" cy="300082"/>
+          </a:xfrm>
+          <a:prstGeom prst="rect">
+            <a:avLst/>
+          </a:prstGeom>
+          <a:noFill/>
+        </p:spPr>
+        <p:txBody>
+          <a:bodyPr wrap="square" rtlCol="0">
+            <a:spAutoFit/>
+          </a:bodyPr>
+          <a:lstStyle/>
+          <a:p>
+            <a:r>
+              <a:rPr lang="zh-CN" altLang="en-US" sz="1350" dirty="0">
+                <a:solidFill>
+                  <a:schemeClr val="tx1">
+                    <a:lumMod val="50000"/>
+                    <a:lumOff val="50000"/>
+                  </a:schemeClr>
+                </a:solidFill>
+              </a:rPr>
+              <a:t>网络</a:t>
+            </a:r>
+          </a:p>
+        </p:txBody>
+      </p:sp>
       <p:pic>
         <p:nvPicPr>
-          <p:cNvPr id="18" name="内容占位符 17">
-            <a:extLst>
-              <a:ext uri="{FF2B5EF4-FFF2-40B4-BE49-F238E27FC236}">
-                <a16:creationId xmlns:a16="http://schemas.microsoft.com/office/drawing/2014/main" id="{6F5AF0A2-E4A1-48C1-AC06-9297529D661A}"/>
+          <p:cNvPr id="69" name="图片 68">
+            <a:extLst>
+              <a:ext uri="{FF2B5EF4-FFF2-40B4-BE49-F238E27FC236}">
+                <a16:creationId xmlns:a16="http://schemas.microsoft.com/office/drawing/2014/main" id="{E633B884-53C3-44DB-9CD8-EF289805BBB5}"/>
               </a:ext>
             </a:extLst>
           </p:cNvPr>
           <p:cNvPicPr>
-            <a:picLocks noGrp="1" noChangeAspect="1"/>
+            <a:picLocks noChangeAspect="1"/>
           </p:cNvPicPr>
-          <p:nvPr>
-            <p:ph idx="1"/>
-          </p:nvPr>
+          <p:nvPr/>
         </p:nvPicPr>
         <p:blipFill>
-          <a:blip r:embed="rId3">
+          <a:blip r:embed="rId3" cstate="print">
+            <a:duotone>
+              <a:schemeClr val="bg2">
+                <a:shade val="45000"/>
+                <a:satMod val="135000"/>
+              </a:schemeClr>
+              <a:prstClr val="white"/>
+            </a:duotone>
             <a:extLst>
               <a:ext uri="{28A0092B-C50C-407E-A947-70E740481C1C}">
                 <a14:useLocalDpi xmlns:a14="http://schemas.microsoft.com/office/drawing/2010/main" val="0"/>
@@ -6472,219 +6153,104 @@
         </p:blipFill>
         <p:spPr>
           <a:xfrm>
-            <a:off x="7127950" y="1843088"/>
-            <a:ext cx="3904622" cy="4351338"/>
-          </a:xfrm>
+            <a:off x="4108167" y="4500170"/>
+            <a:ext cx="747303" cy="747303"/>
+          </a:xfrm>
+          <a:prstGeom prst="rect">
+            <a:avLst/>
+          </a:prstGeom>
         </p:spPr>
       </p:pic>
       <p:sp>
         <p:nvSpPr>
-          <p:cNvPr id="11" name="标题 1">
-            <a:extLst>
-              <a:ext uri="{FF2B5EF4-FFF2-40B4-BE49-F238E27FC236}">
-                <a16:creationId xmlns:a16="http://schemas.microsoft.com/office/drawing/2014/main" id="{2C9BF308-A158-4B1C-9C22-4E295A76E6A6}"/>
-              </a:ext>
-            </a:extLst>
-          </p:cNvPr>
-          <p:cNvSpPr txBox="1">
-            <a:spLocks/>
-          </p:cNvSpPr>
-          <p:nvPr/>
-        </p:nvSpPr>
-        <p:spPr>
-          <a:xfrm>
-            <a:off x="990600" y="517525"/>
-            <a:ext cx="10515600" cy="1325563"/>
-          </a:xfrm>
-          <a:prstGeom prst="rect">
-            <a:avLst/>
-          </a:prstGeom>
-        </p:spPr>
-        <p:txBody>
-          <a:bodyPr vert="horz" lIns="91440" tIns="45720" rIns="91440" bIns="45720" rtlCol="0" anchor="ctr">
-            <a:normAutofit/>
+          <p:cNvPr id="72" name="文本框 71">
+            <a:extLst>
+              <a:ext uri="{FF2B5EF4-FFF2-40B4-BE49-F238E27FC236}">
+                <a16:creationId xmlns:a16="http://schemas.microsoft.com/office/drawing/2014/main" id="{580431F7-C6EB-4BA3-8A91-AD4D0EB5343E}"/>
+              </a:ext>
+            </a:extLst>
+          </p:cNvPr>
+          <p:cNvSpPr txBox="1"/>
+          <p:nvPr/>
+        </p:nvSpPr>
+        <p:spPr>
+          <a:xfrm>
+            <a:off x="1590700" y="5342832"/>
+            <a:ext cx="5782235" cy="369332"/>
+          </a:xfrm>
+          <a:prstGeom prst="rect">
+            <a:avLst/>
+          </a:prstGeom>
+          <a:noFill/>
+        </p:spPr>
+        <p:txBody>
+          <a:bodyPr wrap="square" rtlCol="0">
+            <a:spAutoFit/>
           </a:bodyPr>
-          <a:lstStyle>
-            <a:lvl1pPr algn="l" defTabSz="914400" rtl="0" eaLnBrk="1" latinLnBrk="0" hangingPunct="1">
-              <a:lnSpc>
-                <a:spcPct val="90000"/>
-              </a:lnSpc>
-              <a:spcBef>
-                <a:spcPct val="0"/>
-              </a:spcBef>
-              <a:buNone/>
-              <a:defRPr sz="4400" kern="1200">
-                <a:solidFill>
-                  <a:schemeClr val="tx1"/>
-                </a:solidFill>
-                <a:latin typeface="+mj-lt"/>
-                <a:ea typeface="+mj-ea"/>
-                <a:cs typeface="+mj-cs"/>
-              </a:defRPr>
-            </a:lvl1pPr>
-          </a:lstStyle>
-          <a:p>
-            <a:r>
-              <a:rPr lang="zh-CN" altLang="en-US" sz="1600" b="1" dirty="0">
-                <a:solidFill>
-                  <a:schemeClr val="accent1">
-                    <a:lumMod val="40000"/>
-                    <a:lumOff val="60000"/>
-                  </a:schemeClr>
-                </a:solidFill>
-                <a:effectLst>
-                  <a:outerShdw blurRad="38100" dist="19050" dir="2700000" algn="tl" rotWithShape="0">
-                    <a:schemeClr val="dk1">
-                      <a:alpha val="40000"/>
-                    </a:schemeClr>
-                  </a:outerShdw>
-                </a:effectLst>
-              </a:rPr>
-              <a:t>台式电脑先接上无线网卡，先设置虚拟</a:t>
-            </a:r>
-            <a:r>
-              <a:rPr lang="en-US" altLang="zh-CN" sz="1600" b="1" dirty="0" err="1">
-                <a:solidFill>
-                  <a:schemeClr val="accent1">
-                    <a:lumMod val="40000"/>
-                    <a:lumOff val="60000"/>
-                  </a:schemeClr>
-                </a:solidFill>
-                <a:effectLst>
-                  <a:outerShdw blurRad="38100" dist="19050" dir="2700000" algn="tl" rotWithShape="0">
-                    <a:schemeClr val="dk1">
-                      <a:alpha val="40000"/>
-                    </a:schemeClr>
-                  </a:outerShdw>
-                </a:effectLst>
-              </a:rPr>
-              <a:t>WiFi</a:t>
-            </a:r>
-            <a:r>
-              <a:rPr lang="zh-CN" altLang="en-US" sz="1600" b="1" dirty="0">
-                <a:solidFill>
-                  <a:schemeClr val="accent1">
-                    <a:lumMod val="40000"/>
-                    <a:lumOff val="60000"/>
-                  </a:schemeClr>
-                </a:solidFill>
-                <a:effectLst>
-                  <a:outerShdw blurRad="38100" dist="19050" dir="2700000" algn="tl" rotWithShape="0">
-                    <a:schemeClr val="dk1">
-                      <a:alpha val="40000"/>
-                    </a:schemeClr>
-                  </a:outerShdw>
-                </a:effectLst>
-              </a:rPr>
-              <a:t>热点，然后设置本地连接的网络共享，再用笔记本连接</a:t>
-            </a:r>
-            <a:r>
-              <a:rPr lang="en-US" altLang="zh-CN" sz="1600" b="1" dirty="0" err="1">
-                <a:solidFill>
-                  <a:schemeClr val="accent1">
-                    <a:lumMod val="40000"/>
-                    <a:lumOff val="60000"/>
-                  </a:schemeClr>
-                </a:solidFill>
-                <a:effectLst>
-                  <a:outerShdw blurRad="38100" dist="19050" dir="2700000" algn="tl" rotWithShape="0">
-                    <a:schemeClr val="dk1">
-                      <a:alpha val="40000"/>
-                    </a:schemeClr>
-                  </a:outerShdw>
-                </a:effectLst>
-              </a:rPr>
-              <a:t>WiFi</a:t>
-            </a:r>
-            <a:r>
-              <a:rPr lang="zh-CN" altLang="en-US" sz="1600" b="1" dirty="0">
-                <a:solidFill>
-                  <a:schemeClr val="accent1">
-                    <a:lumMod val="40000"/>
-                    <a:lumOff val="60000"/>
-                  </a:schemeClr>
-                </a:solidFill>
-                <a:effectLst>
-                  <a:outerShdw blurRad="38100" dist="19050" dir="2700000" algn="tl" rotWithShape="0">
-                    <a:schemeClr val="dk1">
-                      <a:alpha val="40000"/>
-                    </a:schemeClr>
-                  </a:outerShdw>
-                </a:effectLst>
-              </a:rPr>
-              <a:t>，笔记本就可以上网了。（不过天翼校园网 有检测，你共享网络会检测，然后会自动退出天翼登录）</a:t>
-            </a:r>
-          </a:p>
-        </p:txBody>
-      </p:sp>
-      <p:pic>
-        <p:nvPicPr>
-          <p:cNvPr id="12" name="图片 11">
-            <a:extLst>
-              <a:ext uri="{FF2B5EF4-FFF2-40B4-BE49-F238E27FC236}">
-                <a16:creationId xmlns:a16="http://schemas.microsoft.com/office/drawing/2014/main" id="{9AA4BDE6-97F6-46EF-B908-7C5AEA42A000}"/>
-              </a:ext>
-            </a:extLst>
-          </p:cNvPr>
-          <p:cNvPicPr/>
-          <p:nvPr/>
-        </p:nvPicPr>
-        <p:blipFill>
-          <a:blip r:embed="rId4"/>
-          <a:stretch>
-            <a:fillRect/>
-          </a:stretch>
-        </p:blipFill>
-        <p:spPr>
-          <a:xfrm>
-            <a:off x="304800" y="1538363"/>
-            <a:ext cx="6535024" cy="2638728"/>
-          </a:xfrm>
-          <a:prstGeom prst="rect">
-            <a:avLst/>
-          </a:prstGeom>
-          <a:noFill/>
-          <a:ln>
-            <a:noFill/>
-          </a:ln>
-        </p:spPr>
-      </p:pic>
-      <p:pic>
-        <p:nvPicPr>
-          <p:cNvPr id="13" name="图片 12">
-            <a:extLst>
-              <a:ext uri="{FF2B5EF4-FFF2-40B4-BE49-F238E27FC236}">
-                <a16:creationId xmlns:a16="http://schemas.microsoft.com/office/drawing/2014/main" id="{F15270D9-E7D2-4EAE-809D-DBE20A9614B6}"/>
-              </a:ext>
-            </a:extLst>
-          </p:cNvPr>
-          <p:cNvPicPr/>
-          <p:nvPr/>
-        </p:nvPicPr>
-        <p:blipFill>
-          <a:blip r:embed="rId5"/>
-          <a:stretch>
-            <a:fillRect/>
-          </a:stretch>
-        </p:blipFill>
-        <p:spPr>
-          <a:xfrm>
-            <a:off x="990600" y="4278464"/>
-            <a:ext cx="4977923" cy="1838930"/>
-          </a:xfrm>
-          <a:prstGeom prst="rect">
-            <a:avLst/>
-          </a:prstGeom>
-          <a:noFill/>
-          <a:ln>
-            <a:noFill/>
-          </a:ln>
-        </p:spPr>
-      </p:pic>
+          <a:lstStyle/>
+          <a:p>
+            <a:r>
+              <a:rPr lang="zh-CN" altLang="en-US" dirty="0">
+                <a:solidFill>
+                  <a:schemeClr val="accent1">
+                    <a:lumMod val="60000"/>
+                    <a:lumOff val="40000"/>
+                  </a:schemeClr>
+                </a:solidFill>
+              </a:rPr>
+              <a:t>电脑无线和有限和网络连接</a:t>
+            </a:r>
+            <a:r>
+              <a:rPr lang="en-US" altLang="zh-CN" dirty="0">
+                <a:solidFill>
+                  <a:schemeClr val="accent1">
+                    <a:lumMod val="60000"/>
+                    <a:lumOff val="40000"/>
+                  </a:schemeClr>
+                </a:solidFill>
+              </a:rPr>
+              <a:t>,</a:t>
+            </a:r>
+            <a:r>
+              <a:rPr lang="zh-CN" altLang="en-US" dirty="0">
+                <a:solidFill>
+                  <a:schemeClr val="accent1">
+                    <a:lumMod val="60000"/>
+                    <a:lumOff val="40000"/>
+                  </a:schemeClr>
+                </a:solidFill>
+              </a:rPr>
+              <a:t>使用断连法和</a:t>
+            </a:r>
+            <a:r>
+              <a:rPr lang="en-US" altLang="zh-CN" dirty="0">
+                <a:solidFill>
+                  <a:schemeClr val="accent1">
+                    <a:lumMod val="60000"/>
+                    <a:lumOff val="40000"/>
+                  </a:schemeClr>
+                </a:solidFill>
+              </a:rPr>
+              <a:t>Ping</a:t>
+            </a:r>
+            <a:r>
+              <a:rPr lang="zh-CN" altLang="en-US" dirty="0">
+                <a:solidFill>
+                  <a:schemeClr val="accent1">
+                    <a:lumMod val="60000"/>
+                    <a:lumOff val="40000"/>
+                  </a:schemeClr>
+                </a:solidFill>
+              </a:rPr>
+              <a:t>值法测量</a:t>
+            </a:r>
+          </a:p>
+        </p:txBody>
+      </p:sp>
     </p:spTree>
     <p:extLst>
       <p:ext uri="{BB962C8B-B14F-4D97-AF65-F5344CB8AC3E}">
-        <p14:creationId xmlns:p14="http://schemas.microsoft.com/office/powerpoint/2010/main" val="3239327261"/>
+        <p14:creationId xmlns:p14="http://schemas.microsoft.com/office/powerpoint/2010/main" val="3115913326"/>
       </p:ext>
     </p:extLst>
   </p:cSld>
@@ -6711,62 +6277,12 @@
           <a:chExt cx="0" cy="0"/>
         </a:xfrm>
       </p:grpSpPr>
-      <p:sp>
-        <p:nvSpPr>
-          <p:cNvPr id="2" name="标题 1">
-            <a:extLst>
-              <a:ext uri="{FF2B5EF4-FFF2-40B4-BE49-F238E27FC236}">
-                <a16:creationId xmlns:a16="http://schemas.microsoft.com/office/drawing/2014/main" id="{740B20CF-492B-44C2-A9BC-62D0254C2950}"/>
-              </a:ext>
-            </a:extLst>
-          </p:cNvPr>
-          <p:cNvSpPr>
-            <a:spLocks noGrp="1"/>
-          </p:cNvSpPr>
-          <p:nvPr>
-            <p:ph type="title"/>
-          </p:nvPr>
-        </p:nvSpPr>
-        <p:spPr/>
-        <p:txBody>
-          <a:bodyPr/>
-          <a:lstStyle/>
-          <a:p>
-            <a:endParaRPr lang="zh-CN" altLang="en-US"/>
-          </a:p>
-        </p:txBody>
-      </p:sp>
-      <p:sp>
-        <p:nvSpPr>
-          <p:cNvPr id="3" name="内容占位符 2">
-            <a:extLst>
-              <a:ext uri="{FF2B5EF4-FFF2-40B4-BE49-F238E27FC236}">
-                <a16:creationId xmlns:a16="http://schemas.microsoft.com/office/drawing/2014/main" id="{37E3068F-0D97-4517-B94D-DA3F6044E09A}"/>
-              </a:ext>
-            </a:extLst>
-          </p:cNvPr>
-          <p:cNvSpPr>
-            <a:spLocks noGrp="1"/>
-          </p:cNvSpPr>
-          <p:nvPr>
-            <p:ph idx="1"/>
-          </p:nvPr>
-        </p:nvSpPr>
-        <p:spPr/>
-        <p:txBody>
-          <a:bodyPr/>
-          <a:lstStyle/>
-          <a:p>
-            <a:endParaRPr lang="zh-CN" altLang="en-US"/>
-          </a:p>
-        </p:txBody>
-      </p:sp>
       <p:pic>
         <p:nvPicPr>
           <p:cNvPr id="5" name="图片 4">
             <a:extLst>
               <a:ext uri="{FF2B5EF4-FFF2-40B4-BE49-F238E27FC236}">
-                <a16:creationId xmlns:a16="http://schemas.microsoft.com/office/drawing/2014/main" id="{9433C9E0-DC12-4F84-B4BC-273077AAE645}"/>
+                <a16:creationId xmlns:a16="http://schemas.microsoft.com/office/drawing/2014/main" id="{5CC6663E-2BB2-4C5C-B790-5B102F770D27}"/>
               </a:ext>
             </a:extLst>
           </p:cNvPr>
@@ -6782,7 +6298,7 @@
         <p:spPr>
           <a:xfrm>
             <a:off x="0" y="0"/>
-            <a:ext cx="12192000" cy="6858000"/>
+            <a:ext cx="9144000" cy="6858000"/>
           </a:xfrm>
           <a:prstGeom prst="rect">
             <a:avLst/>
@@ -6794,7 +6310,7 @@
           <p:cNvPr id="6" name="文本框 5">
             <a:extLst>
               <a:ext uri="{FF2B5EF4-FFF2-40B4-BE49-F238E27FC236}">
-                <a16:creationId xmlns:a16="http://schemas.microsoft.com/office/drawing/2014/main" id="{508C8F11-3AC7-4D50-A3E3-F03C7A04E266}"/>
+                <a16:creationId xmlns:a16="http://schemas.microsoft.com/office/drawing/2014/main" id="{71775130-D0BE-42F4-9AD8-7D7BEC3DB39D}"/>
               </a:ext>
             </a:extLst>
           </p:cNvPr>
@@ -6803,8 +6319,8 @@
         </p:nvSpPr>
         <p:spPr>
           <a:xfrm>
-            <a:off x="4388840" y="2659559"/>
-            <a:ext cx="3414320" cy="769441"/>
+            <a:off x="2447365" y="484093"/>
+            <a:ext cx="4249270" cy="369332"/>
           </a:xfrm>
           <a:prstGeom prst="rect">
             <a:avLst/>
@@ -6819,7 +6335,7 @@
           <a:p>
             <a:pPr algn="ctr"/>
             <a:r>
-              <a:rPr lang="zh-CN" altLang="en-US" sz="4400" dirty="0">
+              <a:rPr lang="zh-CN" altLang="en-US" dirty="0">
                 <a:solidFill>
                   <a:schemeClr val="accent1">
                     <a:lumMod val="60000"/>
@@ -6827,15 +6343,1253 @@
                   </a:schemeClr>
                 </a:solidFill>
               </a:rPr>
-              <a:t>谢谢大家</a:t>
-            </a:r>
+              <a:t>分别测量有限与无线的</a:t>
+            </a:r>
+            <a:r>
+              <a:rPr lang="en-US" altLang="zh-CN" dirty="0">
+                <a:solidFill>
+                  <a:schemeClr val="accent1">
+                    <a:lumMod val="60000"/>
+                    <a:lumOff val="40000"/>
+                  </a:schemeClr>
+                </a:solidFill>
+              </a:rPr>
+              <a:t>ping</a:t>
+            </a:r>
+            <a:r>
+              <a:rPr lang="zh-CN" altLang="en-US" dirty="0">
+                <a:solidFill>
+                  <a:schemeClr val="accent1">
+                    <a:lumMod val="60000"/>
+                    <a:lumOff val="40000"/>
+                  </a:schemeClr>
+                </a:solidFill>
+              </a:rPr>
+              <a:t>值</a:t>
+            </a:r>
+          </a:p>
+        </p:txBody>
+      </p:sp>
+      <p:pic>
+        <p:nvPicPr>
+          <p:cNvPr id="7" name="图片 6">
+            <a:extLst>
+              <a:ext uri="{FF2B5EF4-FFF2-40B4-BE49-F238E27FC236}">
+                <a16:creationId xmlns:a16="http://schemas.microsoft.com/office/drawing/2014/main" id="{EADCBC83-E276-4B05-BDAC-EF5F414B9D27}"/>
+              </a:ext>
+            </a:extLst>
+          </p:cNvPr>
+          <p:cNvPicPr/>
+          <p:nvPr/>
+        </p:nvPicPr>
+        <p:blipFill>
+          <a:blip r:embed="rId3"/>
+          <a:stretch>
+            <a:fillRect/>
+          </a:stretch>
+        </p:blipFill>
+        <p:spPr>
+          <a:xfrm>
+            <a:off x="1905958" y="1290915"/>
+            <a:ext cx="5332083" cy="1243468"/>
+          </a:xfrm>
+          <a:prstGeom prst="rect">
+            <a:avLst/>
+          </a:prstGeom>
+        </p:spPr>
+      </p:pic>
+      <p:pic>
+        <p:nvPicPr>
+          <p:cNvPr id="8" name="图片 7">
+            <a:extLst>
+              <a:ext uri="{FF2B5EF4-FFF2-40B4-BE49-F238E27FC236}">
+                <a16:creationId xmlns:a16="http://schemas.microsoft.com/office/drawing/2014/main" id="{9F74DD6C-8C6B-4F69-880D-51EB61A6E0B9}"/>
+              </a:ext>
+            </a:extLst>
+          </p:cNvPr>
+          <p:cNvPicPr/>
+          <p:nvPr/>
+        </p:nvPicPr>
+        <p:blipFill>
+          <a:blip r:embed="rId4"/>
+          <a:stretch>
+            <a:fillRect/>
+          </a:stretch>
+        </p:blipFill>
+        <p:spPr>
+          <a:xfrm>
+            <a:off x="1934843" y="3099175"/>
+            <a:ext cx="5274310" cy="1452245"/>
+          </a:xfrm>
+          <a:prstGeom prst="rect">
+            <a:avLst/>
+          </a:prstGeom>
+        </p:spPr>
+      </p:pic>
+      <p:sp>
+        <p:nvSpPr>
+          <p:cNvPr id="9" name="文本框 8">
+            <a:extLst>
+              <a:ext uri="{FF2B5EF4-FFF2-40B4-BE49-F238E27FC236}">
+                <a16:creationId xmlns:a16="http://schemas.microsoft.com/office/drawing/2014/main" id="{009C19BF-2D7F-4A23-93EC-52355AF71450}"/>
+              </a:ext>
+            </a:extLst>
+          </p:cNvPr>
+          <p:cNvSpPr txBox="1"/>
+          <p:nvPr/>
+        </p:nvSpPr>
+        <p:spPr>
+          <a:xfrm>
+            <a:off x="2696383" y="2543390"/>
+            <a:ext cx="3693459" cy="369332"/>
+          </a:xfrm>
+          <a:prstGeom prst="rect">
+            <a:avLst/>
+          </a:prstGeom>
+          <a:noFill/>
+        </p:spPr>
+        <p:txBody>
+          <a:bodyPr wrap="square" rtlCol="0">
+            <a:spAutoFit/>
+          </a:bodyPr>
+          <a:lstStyle/>
+          <a:p>
+            <a:pPr algn="ctr"/>
+            <a:r>
+              <a:rPr lang="zh-CN" altLang="en-US" dirty="0">
+                <a:solidFill>
+                  <a:schemeClr val="accent1">
+                    <a:lumMod val="60000"/>
+                    <a:lumOff val="40000"/>
+                  </a:schemeClr>
+                </a:solidFill>
+              </a:rPr>
+              <a:t>有线</a:t>
+            </a:r>
+            <a:r>
+              <a:rPr lang="en-US" altLang="zh-CN" dirty="0">
+                <a:solidFill>
+                  <a:schemeClr val="accent1">
+                    <a:lumMod val="60000"/>
+                    <a:lumOff val="40000"/>
+                  </a:schemeClr>
+                </a:solidFill>
+              </a:rPr>
+              <a:t>Ping</a:t>
+            </a:r>
+            <a:r>
+              <a:rPr lang="zh-CN" altLang="en-US" dirty="0">
+                <a:solidFill>
+                  <a:schemeClr val="accent1">
+                    <a:lumMod val="60000"/>
+                    <a:lumOff val="40000"/>
+                  </a:schemeClr>
+                </a:solidFill>
+              </a:rPr>
+              <a:t>值</a:t>
+            </a:r>
+          </a:p>
+        </p:txBody>
+      </p:sp>
+      <p:sp>
+        <p:nvSpPr>
+          <p:cNvPr id="11" name="文本框 10">
+            <a:extLst>
+              <a:ext uri="{FF2B5EF4-FFF2-40B4-BE49-F238E27FC236}">
+                <a16:creationId xmlns:a16="http://schemas.microsoft.com/office/drawing/2014/main" id="{0E7A03A9-86C0-4D7F-9D21-3B516EEE2DAA}"/>
+              </a:ext>
+            </a:extLst>
+          </p:cNvPr>
+          <p:cNvSpPr txBox="1"/>
+          <p:nvPr/>
+        </p:nvSpPr>
+        <p:spPr>
+          <a:xfrm>
+            <a:off x="2696382" y="4796188"/>
+            <a:ext cx="3693459" cy="369332"/>
+          </a:xfrm>
+          <a:prstGeom prst="rect">
+            <a:avLst/>
+          </a:prstGeom>
+          <a:noFill/>
+        </p:spPr>
+        <p:txBody>
+          <a:bodyPr wrap="square" rtlCol="0">
+            <a:spAutoFit/>
+          </a:bodyPr>
+          <a:lstStyle/>
+          <a:p>
+            <a:pPr algn="ctr"/>
+            <a:r>
+              <a:rPr lang="zh-CN" altLang="en-US" dirty="0">
+                <a:solidFill>
+                  <a:schemeClr val="accent1">
+                    <a:lumMod val="60000"/>
+                    <a:lumOff val="40000"/>
+                  </a:schemeClr>
+                </a:solidFill>
+              </a:rPr>
+              <a:t>无线</a:t>
+            </a:r>
+            <a:r>
+              <a:rPr lang="en-US" altLang="zh-CN" dirty="0">
+                <a:solidFill>
+                  <a:schemeClr val="accent1">
+                    <a:lumMod val="60000"/>
+                    <a:lumOff val="40000"/>
+                  </a:schemeClr>
+                </a:solidFill>
+              </a:rPr>
+              <a:t>Ping</a:t>
+            </a:r>
+            <a:r>
+              <a:rPr lang="zh-CN" altLang="en-US" dirty="0">
+                <a:solidFill>
+                  <a:schemeClr val="accent1">
+                    <a:lumMod val="60000"/>
+                    <a:lumOff val="40000"/>
+                  </a:schemeClr>
+                </a:solidFill>
+              </a:rPr>
+              <a:t>值</a:t>
+            </a:r>
+          </a:p>
+        </p:txBody>
+      </p:sp>
+      <p:sp>
+        <p:nvSpPr>
+          <p:cNvPr id="14" name="文本框 13">
+            <a:extLst>
+              <a:ext uri="{FF2B5EF4-FFF2-40B4-BE49-F238E27FC236}">
+                <a16:creationId xmlns:a16="http://schemas.microsoft.com/office/drawing/2014/main" id="{AF5F85F9-B610-45FB-959F-9C31819AEEEF}"/>
+              </a:ext>
+            </a:extLst>
+          </p:cNvPr>
+          <p:cNvSpPr txBox="1"/>
+          <p:nvPr/>
+        </p:nvSpPr>
+        <p:spPr>
+          <a:xfrm>
+            <a:off x="2418476" y="5335378"/>
+            <a:ext cx="4249270" cy="369332"/>
+          </a:xfrm>
+          <a:prstGeom prst="rect">
+            <a:avLst/>
+          </a:prstGeom>
+          <a:noFill/>
+        </p:spPr>
+        <p:txBody>
+          <a:bodyPr wrap="square" rtlCol="0">
+            <a:spAutoFit/>
+          </a:bodyPr>
+          <a:lstStyle/>
+          <a:p>
+            <a:pPr algn="ctr"/>
+            <a:r>
+              <a:rPr lang="zh-CN" altLang="en-US" dirty="0">
+                <a:solidFill>
+                  <a:schemeClr val="accent1">
+                    <a:lumMod val="60000"/>
+                    <a:lumOff val="40000"/>
+                  </a:schemeClr>
+                </a:solidFill>
+              </a:rPr>
+              <a:t>平均</a:t>
+            </a:r>
+            <a:r>
+              <a:rPr lang="en-US" altLang="zh-CN" dirty="0">
+                <a:solidFill>
+                  <a:schemeClr val="accent1">
+                    <a:lumMod val="60000"/>
+                    <a:lumOff val="40000"/>
+                  </a:schemeClr>
+                </a:solidFill>
+              </a:rPr>
+              <a:t>Ping</a:t>
+            </a:r>
+            <a:r>
+              <a:rPr lang="zh-CN" altLang="en-US" dirty="0">
+                <a:solidFill>
+                  <a:schemeClr val="accent1">
+                    <a:lumMod val="60000"/>
+                    <a:lumOff val="40000"/>
+                  </a:schemeClr>
+                </a:solidFill>
+              </a:rPr>
+              <a:t>值为</a:t>
+            </a:r>
+            <a:r>
+              <a:rPr lang="en-US" altLang="zh-CN" dirty="0">
+                <a:solidFill>
+                  <a:schemeClr val="accent1">
+                    <a:lumMod val="60000"/>
+                    <a:lumOff val="40000"/>
+                  </a:schemeClr>
+                </a:solidFill>
+              </a:rPr>
+              <a:t>59ms</a:t>
+            </a:r>
+            <a:endParaRPr lang="zh-CN" altLang="en-US" dirty="0">
+              <a:solidFill>
+                <a:schemeClr val="accent1">
+                  <a:lumMod val="60000"/>
+                  <a:lumOff val="40000"/>
+                </a:schemeClr>
+              </a:solidFill>
+            </a:endParaRPr>
           </a:p>
         </p:txBody>
       </p:sp>
     </p:spTree>
     <p:extLst>
       <p:ext uri="{BB962C8B-B14F-4D97-AF65-F5344CB8AC3E}">
-        <p14:creationId xmlns:p14="http://schemas.microsoft.com/office/powerpoint/2010/main" val="884902377"/>
+        <p14:creationId xmlns:p14="http://schemas.microsoft.com/office/powerpoint/2010/main" val="4261523169"/>
+      </p:ext>
+    </p:extLst>
+  </p:cSld>
+  <p:clrMapOvr>
+    <a:masterClrMapping/>
+  </p:clrMapOvr>
+</p:sld>
+</file>
+
+<file path=ppt/slides/slide17.xml><?xml version="1.0" encoding="utf-8"?>
+<p:sld xmlns:a="http://schemas.openxmlformats.org/drawingml/2006/main" xmlns:r="http://schemas.openxmlformats.org/officeDocument/2006/relationships" xmlns:p="http://schemas.openxmlformats.org/presentationml/2006/main">
+  <p:cSld>
+    <p:spTree>
+      <p:nvGrpSpPr>
+        <p:cNvPr id="1" name=""/>
+        <p:cNvGrpSpPr/>
+        <p:nvPr/>
+      </p:nvGrpSpPr>
+      <p:grpSpPr>
+        <a:xfrm>
+          <a:off x="0" y="0"/>
+          <a:ext cx="0" cy="0"/>
+          <a:chOff x="0" y="0"/>
+          <a:chExt cx="0" cy="0"/>
+        </a:xfrm>
+      </p:grpSpPr>
+      <p:pic>
+        <p:nvPicPr>
+          <p:cNvPr id="5" name="图片 4">
+            <a:extLst>
+              <a:ext uri="{FF2B5EF4-FFF2-40B4-BE49-F238E27FC236}">
+                <a16:creationId xmlns:a16="http://schemas.microsoft.com/office/drawing/2014/main" id="{8D2D9CCC-6C41-4617-B98F-6C94DF88758D}"/>
+              </a:ext>
+            </a:extLst>
+          </p:cNvPr>
+          <p:cNvPicPr/>
+          <p:nvPr/>
+        </p:nvPicPr>
+        <p:blipFill>
+          <a:blip r:embed="rId2"/>
+          <a:stretch>
+            <a:fillRect/>
+          </a:stretch>
+        </p:blipFill>
+        <p:spPr>
+          <a:xfrm>
+            <a:off x="0" y="0"/>
+            <a:ext cx="9144000" cy="6858000"/>
+          </a:xfrm>
+          <a:prstGeom prst="rect">
+            <a:avLst/>
+          </a:prstGeom>
+        </p:spPr>
+      </p:pic>
+      <p:sp>
+        <p:nvSpPr>
+          <p:cNvPr id="7" name="文本框 6">
+            <a:extLst>
+              <a:ext uri="{FF2B5EF4-FFF2-40B4-BE49-F238E27FC236}">
+                <a16:creationId xmlns:a16="http://schemas.microsoft.com/office/drawing/2014/main" id="{4AA9013A-2BA1-4191-9BAA-9FCB9392DB4D}"/>
+              </a:ext>
+            </a:extLst>
+          </p:cNvPr>
+          <p:cNvSpPr txBox="1"/>
+          <p:nvPr/>
+        </p:nvSpPr>
+        <p:spPr>
+          <a:xfrm>
+            <a:off x="2447365" y="412849"/>
+            <a:ext cx="4249270" cy="369332"/>
+          </a:xfrm>
+          <a:prstGeom prst="rect">
+            <a:avLst/>
+          </a:prstGeom>
+          <a:noFill/>
+        </p:spPr>
+        <p:txBody>
+          <a:bodyPr wrap="square" rtlCol="0">
+            <a:spAutoFit/>
+          </a:bodyPr>
+          <a:lstStyle/>
+          <a:p>
+            <a:pPr algn="ctr"/>
+            <a:r>
+              <a:rPr lang="zh-CN" altLang="en-US" dirty="0">
+                <a:solidFill>
+                  <a:schemeClr val="accent1">
+                    <a:lumMod val="60000"/>
+                    <a:lumOff val="40000"/>
+                  </a:schemeClr>
+                </a:solidFill>
+              </a:rPr>
+              <a:t>有线和无线同时连接网络</a:t>
+            </a:r>
+          </a:p>
+        </p:txBody>
+      </p:sp>
+      <p:sp>
+        <p:nvSpPr>
+          <p:cNvPr id="10" name="文本框 9">
+            <a:extLst>
+              <a:ext uri="{FF2B5EF4-FFF2-40B4-BE49-F238E27FC236}">
+                <a16:creationId xmlns:a16="http://schemas.microsoft.com/office/drawing/2014/main" id="{C63787DA-C218-42B8-9EE4-F1F4B5655B07}"/>
+              </a:ext>
+            </a:extLst>
+          </p:cNvPr>
+          <p:cNvSpPr txBox="1"/>
+          <p:nvPr/>
+        </p:nvSpPr>
+        <p:spPr>
+          <a:xfrm>
+            <a:off x="2447365" y="5151150"/>
+            <a:ext cx="4249270" cy="369332"/>
+          </a:xfrm>
+          <a:prstGeom prst="rect">
+            <a:avLst/>
+          </a:prstGeom>
+          <a:noFill/>
+        </p:spPr>
+        <p:txBody>
+          <a:bodyPr wrap="square" rtlCol="0">
+            <a:spAutoFit/>
+          </a:bodyPr>
+          <a:lstStyle/>
+          <a:p>
+            <a:pPr algn="ctr"/>
+            <a:r>
+              <a:rPr lang="zh-CN" altLang="en-US" dirty="0">
+                <a:solidFill>
+                  <a:schemeClr val="accent1">
+                    <a:lumMod val="60000"/>
+                    <a:lumOff val="40000"/>
+                  </a:schemeClr>
+                </a:solidFill>
+              </a:rPr>
+              <a:t>平均</a:t>
+            </a:r>
+            <a:r>
+              <a:rPr lang="en-US" altLang="zh-CN" dirty="0">
+                <a:solidFill>
+                  <a:schemeClr val="accent1">
+                    <a:lumMod val="60000"/>
+                    <a:lumOff val="40000"/>
+                  </a:schemeClr>
+                </a:solidFill>
+              </a:rPr>
+              <a:t>Ping</a:t>
+            </a:r>
+            <a:r>
+              <a:rPr lang="zh-CN" altLang="en-US" dirty="0">
+                <a:solidFill>
+                  <a:schemeClr val="accent1">
+                    <a:lumMod val="60000"/>
+                    <a:lumOff val="40000"/>
+                  </a:schemeClr>
+                </a:solidFill>
+              </a:rPr>
+              <a:t>值为</a:t>
+            </a:r>
+            <a:r>
+              <a:rPr lang="en-US" altLang="zh-CN" dirty="0">
+                <a:solidFill>
+                  <a:schemeClr val="accent1">
+                    <a:lumMod val="60000"/>
+                    <a:lumOff val="40000"/>
+                  </a:schemeClr>
+                </a:solidFill>
+              </a:rPr>
+              <a:t>7ms</a:t>
+            </a:r>
+            <a:endParaRPr lang="zh-CN" altLang="en-US" dirty="0">
+              <a:solidFill>
+                <a:schemeClr val="accent1">
+                  <a:lumMod val="60000"/>
+                  <a:lumOff val="40000"/>
+                </a:schemeClr>
+              </a:solidFill>
+            </a:endParaRPr>
+          </a:p>
+        </p:txBody>
+      </p:sp>
+      <p:sp>
+        <p:nvSpPr>
+          <p:cNvPr id="12" name="文本框 11">
+            <a:extLst>
+              <a:ext uri="{FF2B5EF4-FFF2-40B4-BE49-F238E27FC236}">
+                <a16:creationId xmlns:a16="http://schemas.microsoft.com/office/drawing/2014/main" id="{65B3DBFC-E6FA-46B2-932C-6469C024421E}"/>
+              </a:ext>
+            </a:extLst>
+          </p:cNvPr>
+          <p:cNvSpPr txBox="1"/>
+          <p:nvPr/>
+        </p:nvSpPr>
+        <p:spPr>
+          <a:xfrm>
+            <a:off x="2447365" y="5706487"/>
+            <a:ext cx="4249270" cy="369332"/>
+          </a:xfrm>
+          <a:prstGeom prst="rect">
+            <a:avLst/>
+          </a:prstGeom>
+          <a:noFill/>
+        </p:spPr>
+        <p:txBody>
+          <a:bodyPr wrap="square" rtlCol="0">
+            <a:spAutoFit/>
+          </a:bodyPr>
+          <a:lstStyle/>
+          <a:p>
+            <a:pPr algn="ctr"/>
+            <a:r>
+              <a:rPr lang="zh-CN" altLang="en-US" dirty="0">
+                <a:solidFill>
+                  <a:schemeClr val="accent1">
+                    <a:lumMod val="60000"/>
+                    <a:lumOff val="40000"/>
+                  </a:schemeClr>
+                </a:solidFill>
+              </a:rPr>
+              <a:t>符合无线的特征</a:t>
+            </a:r>
+          </a:p>
+        </p:txBody>
+      </p:sp>
+      <p:pic>
+        <p:nvPicPr>
+          <p:cNvPr id="15" name="图片 14">
+            <a:extLst>
+              <a:ext uri="{FF2B5EF4-FFF2-40B4-BE49-F238E27FC236}">
+                <a16:creationId xmlns:a16="http://schemas.microsoft.com/office/drawing/2014/main" id="{0FB8B0C2-E396-4977-99B4-F8816F4C89BD}"/>
+              </a:ext>
+            </a:extLst>
+          </p:cNvPr>
+          <p:cNvPicPr/>
+          <p:nvPr/>
+        </p:nvPicPr>
+        <p:blipFill>
+          <a:blip r:embed="rId3"/>
+          <a:stretch>
+            <a:fillRect/>
+          </a:stretch>
+        </p:blipFill>
+        <p:spPr>
+          <a:xfrm>
+            <a:off x="1934845" y="2251918"/>
+            <a:ext cx="5274310" cy="1806575"/>
+          </a:xfrm>
+          <a:prstGeom prst="rect">
+            <a:avLst/>
+          </a:prstGeom>
+        </p:spPr>
+      </p:pic>
+    </p:spTree>
+    <p:extLst>
+      <p:ext uri="{BB962C8B-B14F-4D97-AF65-F5344CB8AC3E}">
+        <p14:creationId xmlns:p14="http://schemas.microsoft.com/office/powerpoint/2010/main" val="1584714506"/>
+      </p:ext>
+    </p:extLst>
+  </p:cSld>
+  <p:clrMapOvr>
+    <a:masterClrMapping/>
+  </p:clrMapOvr>
+</p:sld>
+</file>
+
+<file path=ppt/slides/slide18.xml><?xml version="1.0" encoding="utf-8"?>
+<p:sld xmlns:a="http://schemas.openxmlformats.org/drawingml/2006/main" xmlns:r="http://schemas.openxmlformats.org/officeDocument/2006/relationships" xmlns:p="http://schemas.openxmlformats.org/presentationml/2006/main">
+  <p:cSld>
+    <p:spTree>
+      <p:nvGrpSpPr>
+        <p:cNvPr id="1" name=""/>
+        <p:cNvGrpSpPr/>
+        <p:nvPr/>
+      </p:nvGrpSpPr>
+      <p:grpSpPr>
+        <a:xfrm>
+          <a:off x="0" y="0"/>
+          <a:ext cx="0" cy="0"/>
+          <a:chOff x="0" y="0"/>
+          <a:chExt cx="0" cy="0"/>
+        </a:xfrm>
+      </p:grpSpPr>
+      <p:pic>
+        <p:nvPicPr>
+          <p:cNvPr id="5" name="图片 4">
+            <a:extLst>
+              <a:ext uri="{FF2B5EF4-FFF2-40B4-BE49-F238E27FC236}">
+                <a16:creationId xmlns:a16="http://schemas.microsoft.com/office/drawing/2014/main" id="{8D2D9CCC-6C41-4617-B98F-6C94DF88758D}"/>
+              </a:ext>
+            </a:extLst>
+          </p:cNvPr>
+          <p:cNvPicPr/>
+          <p:nvPr/>
+        </p:nvPicPr>
+        <p:blipFill>
+          <a:blip r:embed="rId2"/>
+          <a:stretch>
+            <a:fillRect/>
+          </a:stretch>
+        </p:blipFill>
+        <p:spPr>
+          <a:xfrm>
+            <a:off x="0" y="0"/>
+            <a:ext cx="9144000" cy="6858000"/>
+          </a:xfrm>
+          <a:prstGeom prst="rect">
+            <a:avLst/>
+          </a:prstGeom>
+        </p:spPr>
+      </p:pic>
+      <p:sp>
+        <p:nvSpPr>
+          <p:cNvPr id="7" name="文本框 6">
+            <a:extLst>
+              <a:ext uri="{FF2B5EF4-FFF2-40B4-BE49-F238E27FC236}">
+                <a16:creationId xmlns:a16="http://schemas.microsoft.com/office/drawing/2014/main" id="{4AA9013A-2BA1-4191-9BAA-9FCB9392DB4D}"/>
+              </a:ext>
+            </a:extLst>
+          </p:cNvPr>
+          <p:cNvSpPr txBox="1"/>
+          <p:nvPr/>
+        </p:nvSpPr>
+        <p:spPr>
+          <a:xfrm>
+            <a:off x="2447365" y="484093"/>
+            <a:ext cx="4249270" cy="369332"/>
+          </a:xfrm>
+          <a:prstGeom prst="rect">
+            <a:avLst/>
+          </a:prstGeom>
+          <a:noFill/>
+        </p:spPr>
+        <p:txBody>
+          <a:bodyPr wrap="square" rtlCol="0">
+            <a:spAutoFit/>
+          </a:bodyPr>
+          <a:lstStyle/>
+          <a:p>
+            <a:pPr algn="ctr"/>
+            <a:r>
+              <a:rPr lang="zh-CN" altLang="en-US" dirty="0">
+                <a:solidFill>
+                  <a:schemeClr val="accent1">
+                    <a:lumMod val="60000"/>
+                    <a:lumOff val="40000"/>
+                  </a:schemeClr>
+                </a:solidFill>
+              </a:rPr>
+              <a:t>断开有线网络</a:t>
+            </a:r>
+          </a:p>
+        </p:txBody>
+      </p:sp>
+      <p:sp>
+        <p:nvSpPr>
+          <p:cNvPr id="12" name="文本框 11">
+            <a:extLst>
+              <a:ext uri="{FF2B5EF4-FFF2-40B4-BE49-F238E27FC236}">
+                <a16:creationId xmlns:a16="http://schemas.microsoft.com/office/drawing/2014/main" id="{65B3DBFC-E6FA-46B2-932C-6469C024421E}"/>
+              </a:ext>
+            </a:extLst>
+          </p:cNvPr>
+          <p:cNvSpPr txBox="1"/>
+          <p:nvPr/>
+        </p:nvSpPr>
+        <p:spPr>
+          <a:xfrm>
+            <a:off x="2447365" y="5584682"/>
+            <a:ext cx="4249270" cy="369332"/>
+          </a:xfrm>
+          <a:prstGeom prst="rect">
+            <a:avLst/>
+          </a:prstGeom>
+          <a:noFill/>
+        </p:spPr>
+        <p:txBody>
+          <a:bodyPr wrap="square" rtlCol="0">
+            <a:spAutoFit/>
+          </a:bodyPr>
+          <a:lstStyle/>
+          <a:p>
+            <a:pPr algn="ctr"/>
+            <a:r>
+              <a:rPr lang="zh-CN" altLang="en-US" dirty="0">
+                <a:solidFill>
+                  <a:schemeClr val="accent1">
+                    <a:lumMod val="60000"/>
+                    <a:lumOff val="40000"/>
+                  </a:schemeClr>
+                </a:solidFill>
+              </a:rPr>
+              <a:t>符合无线的特征</a:t>
+            </a:r>
+          </a:p>
+        </p:txBody>
+      </p:sp>
+      <p:sp>
+        <p:nvSpPr>
+          <p:cNvPr id="2" name="文本框 1">
+            <a:extLst>
+              <a:ext uri="{FF2B5EF4-FFF2-40B4-BE49-F238E27FC236}">
+                <a16:creationId xmlns:a16="http://schemas.microsoft.com/office/drawing/2014/main" id="{F021CAA0-75FF-4CEE-82B0-F20F012EE390}"/>
+              </a:ext>
+            </a:extLst>
+          </p:cNvPr>
+          <p:cNvSpPr txBox="1"/>
+          <p:nvPr/>
+        </p:nvSpPr>
+        <p:spPr>
+          <a:xfrm>
+            <a:off x="3523129" y="3616699"/>
+            <a:ext cx="2384612" cy="623607"/>
+          </a:xfrm>
+          <a:prstGeom prst="rect">
+            <a:avLst/>
+          </a:prstGeom>
+          <a:noFill/>
+        </p:spPr>
+        <p:txBody>
+          <a:bodyPr wrap="square" rtlCol="0">
+            <a:spAutoFit/>
+          </a:bodyPr>
+          <a:lstStyle/>
+          <a:p>
+            <a:endParaRPr lang="zh-CN" altLang="en-US" dirty="0"/>
+          </a:p>
+        </p:txBody>
+      </p:sp>
+      <p:sp>
+        <p:nvSpPr>
+          <p:cNvPr id="3" name="文本框 2">
+            <a:extLst>
+              <a:ext uri="{FF2B5EF4-FFF2-40B4-BE49-F238E27FC236}">
+                <a16:creationId xmlns:a16="http://schemas.microsoft.com/office/drawing/2014/main" id="{E9FC433F-FD42-4929-A801-7B2F8D53ABAE}"/>
+              </a:ext>
+            </a:extLst>
+          </p:cNvPr>
+          <p:cNvSpPr txBox="1"/>
+          <p:nvPr/>
+        </p:nvSpPr>
+        <p:spPr>
+          <a:xfrm>
+            <a:off x="2447364" y="3925009"/>
+            <a:ext cx="4249270" cy="369332"/>
+          </a:xfrm>
+          <a:prstGeom prst="rect">
+            <a:avLst/>
+          </a:prstGeom>
+          <a:noFill/>
+        </p:spPr>
+        <p:txBody>
+          <a:bodyPr wrap="square" rtlCol="0">
+            <a:spAutoFit/>
+          </a:bodyPr>
+          <a:lstStyle/>
+          <a:p>
+            <a:pPr algn="ctr"/>
+            <a:r>
+              <a:rPr lang="zh-CN" altLang="en-US" dirty="0">
+                <a:solidFill>
+                  <a:schemeClr val="accent1">
+                    <a:lumMod val="60000"/>
+                    <a:lumOff val="40000"/>
+                  </a:schemeClr>
+                </a:solidFill>
+              </a:rPr>
+              <a:t>上方平均</a:t>
+            </a:r>
+            <a:r>
+              <a:rPr lang="en-US" altLang="zh-CN" dirty="0">
+                <a:solidFill>
+                  <a:schemeClr val="accent1">
+                    <a:lumMod val="60000"/>
+                    <a:lumOff val="40000"/>
+                  </a:schemeClr>
+                </a:solidFill>
+              </a:rPr>
+              <a:t>Ping</a:t>
+            </a:r>
+            <a:r>
+              <a:rPr lang="zh-CN" altLang="en-US" dirty="0">
+                <a:solidFill>
+                  <a:schemeClr val="accent1">
+                    <a:lumMod val="60000"/>
+                    <a:lumOff val="40000"/>
+                  </a:schemeClr>
+                </a:solidFill>
+              </a:rPr>
+              <a:t>值为</a:t>
+            </a:r>
+            <a:r>
+              <a:rPr lang="en-US" altLang="zh-CN" dirty="0">
+                <a:solidFill>
+                  <a:schemeClr val="accent1">
+                    <a:lumMod val="60000"/>
+                    <a:lumOff val="40000"/>
+                  </a:schemeClr>
+                </a:solidFill>
+              </a:rPr>
+              <a:t>6.66ms</a:t>
+            </a:r>
+            <a:endParaRPr lang="zh-CN" altLang="en-US" dirty="0">
+              <a:solidFill>
+                <a:schemeClr val="accent1">
+                  <a:lumMod val="60000"/>
+                  <a:lumOff val="40000"/>
+                </a:schemeClr>
+              </a:solidFill>
+            </a:endParaRPr>
+          </a:p>
+        </p:txBody>
+      </p:sp>
+      <p:pic>
+        <p:nvPicPr>
+          <p:cNvPr id="17" name="图片 16">
+            <a:extLst>
+              <a:ext uri="{FF2B5EF4-FFF2-40B4-BE49-F238E27FC236}">
+                <a16:creationId xmlns:a16="http://schemas.microsoft.com/office/drawing/2014/main" id="{B316E96E-AFE2-410C-8EC0-52B43FC77276}"/>
+              </a:ext>
+            </a:extLst>
+          </p:cNvPr>
+          <p:cNvPicPr/>
+          <p:nvPr/>
+        </p:nvPicPr>
+        <p:blipFill>
+          <a:blip r:embed="rId3"/>
+          <a:stretch>
+            <a:fillRect/>
+          </a:stretch>
+        </p:blipFill>
+        <p:spPr>
+          <a:xfrm>
+            <a:off x="1552499" y="1012912"/>
+            <a:ext cx="5144135" cy="2152650"/>
+          </a:xfrm>
+          <a:prstGeom prst="rect">
+            <a:avLst/>
+          </a:prstGeom>
+        </p:spPr>
+      </p:pic>
+      <p:pic>
+        <p:nvPicPr>
+          <p:cNvPr id="14" name="图片 13">
+            <a:extLst>
+              <a:ext uri="{FF2B5EF4-FFF2-40B4-BE49-F238E27FC236}">
+                <a16:creationId xmlns:a16="http://schemas.microsoft.com/office/drawing/2014/main" id="{E0DC8313-A7E9-4216-B37E-8957AF900AA5}"/>
+              </a:ext>
+            </a:extLst>
+          </p:cNvPr>
+          <p:cNvPicPr>
+            <a:picLocks noChangeAspect="1"/>
+          </p:cNvPicPr>
+          <p:nvPr/>
+        </p:nvPicPr>
+        <p:blipFill>
+          <a:blip r:embed="rId4"/>
+          <a:stretch>
+            <a:fillRect/>
+          </a:stretch>
+        </p:blipFill>
+        <p:spPr>
+          <a:xfrm>
+            <a:off x="1563545" y="2149174"/>
+            <a:ext cx="6315956" cy="1543265"/>
+          </a:xfrm>
+          <a:prstGeom prst="rect">
+            <a:avLst/>
+          </a:prstGeom>
+        </p:spPr>
+      </p:pic>
+      <p:sp>
+        <p:nvSpPr>
+          <p:cNvPr id="19" name="文本框 18">
+            <a:extLst>
+              <a:ext uri="{FF2B5EF4-FFF2-40B4-BE49-F238E27FC236}">
+                <a16:creationId xmlns:a16="http://schemas.microsoft.com/office/drawing/2014/main" id="{9C66E71A-F041-4807-9EF9-502C1230334A}"/>
+              </a:ext>
+            </a:extLst>
+          </p:cNvPr>
+          <p:cNvSpPr txBox="1"/>
+          <p:nvPr/>
+        </p:nvSpPr>
+        <p:spPr>
+          <a:xfrm>
+            <a:off x="2447364" y="4526911"/>
+            <a:ext cx="4249270" cy="369332"/>
+          </a:xfrm>
+          <a:prstGeom prst="rect">
+            <a:avLst/>
+          </a:prstGeom>
+          <a:noFill/>
+        </p:spPr>
+        <p:txBody>
+          <a:bodyPr wrap="square" rtlCol="0">
+            <a:spAutoFit/>
+          </a:bodyPr>
+          <a:lstStyle/>
+          <a:p>
+            <a:pPr algn="ctr"/>
+            <a:r>
+              <a:rPr lang="zh-CN" altLang="en-US" dirty="0">
+                <a:solidFill>
+                  <a:schemeClr val="accent1">
+                    <a:lumMod val="60000"/>
+                    <a:lumOff val="40000"/>
+                  </a:schemeClr>
+                </a:solidFill>
+              </a:rPr>
+              <a:t>下方平均</a:t>
+            </a:r>
+            <a:r>
+              <a:rPr lang="en-US" altLang="zh-CN" dirty="0">
+                <a:solidFill>
+                  <a:schemeClr val="accent1">
+                    <a:lumMod val="60000"/>
+                    <a:lumOff val="40000"/>
+                  </a:schemeClr>
+                </a:solidFill>
+              </a:rPr>
+              <a:t>Ping</a:t>
+            </a:r>
+            <a:r>
+              <a:rPr lang="zh-CN" altLang="en-US" dirty="0">
+                <a:solidFill>
+                  <a:schemeClr val="accent1">
+                    <a:lumMod val="60000"/>
+                    <a:lumOff val="40000"/>
+                  </a:schemeClr>
+                </a:solidFill>
+              </a:rPr>
+              <a:t>值为</a:t>
+            </a:r>
+            <a:r>
+              <a:rPr lang="en-US" altLang="zh-CN" dirty="0">
+                <a:solidFill>
+                  <a:schemeClr val="accent1">
+                    <a:lumMod val="60000"/>
+                    <a:lumOff val="40000"/>
+                  </a:schemeClr>
+                </a:solidFill>
+              </a:rPr>
+              <a:t>170.25ms</a:t>
+            </a:r>
+            <a:endParaRPr lang="zh-CN" altLang="en-US" dirty="0">
+              <a:solidFill>
+                <a:schemeClr val="accent1">
+                  <a:lumMod val="60000"/>
+                  <a:lumOff val="40000"/>
+                </a:schemeClr>
+              </a:solidFill>
+            </a:endParaRPr>
+          </a:p>
+        </p:txBody>
+      </p:sp>
+    </p:spTree>
+    <p:extLst>
+      <p:ext uri="{BB962C8B-B14F-4D97-AF65-F5344CB8AC3E}">
+        <p14:creationId xmlns:p14="http://schemas.microsoft.com/office/powerpoint/2010/main" val="2934268986"/>
+      </p:ext>
+    </p:extLst>
+  </p:cSld>
+  <p:clrMapOvr>
+    <a:masterClrMapping/>
+  </p:clrMapOvr>
+</p:sld>
+</file>
+
+<file path=ppt/slides/slide19.xml><?xml version="1.0" encoding="utf-8"?>
+<p:sld xmlns:a="http://schemas.openxmlformats.org/drawingml/2006/main" xmlns:r="http://schemas.openxmlformats.org/officeDocument/2006/relationships" xmlns:p="http://schemas.openxmlformats.org/presentationml/2006/main">
+  <p:cSld>
+    <p:spTree>
+      <p:nvGrpSpPr>
+        <p:cNvPr id="1" name=""/>
+        <p:cNvGrpSpPr/>
+        <p:nvPr/>
+      </p:nvGrpSpPr>
+      <p:grpSpPr>
+        <a:xfrm>
+          <a:off x="0" y="0"/>
+          <a:ext cx="0" cy="0"/>
+          <a:chOff x="0" y="0"/>
+          <a:chExt cx="0" cy="0"/>
+        </a:xfrm>
+      </p:grpSpPr>
+      <p:pic>
+        <p:nvPicPr>
+          <p:cNvPr id="5" name="图片 4">
+            <a:extLst>
+              <a:ext uri="{FF2B5EF4-FFF2-40B4-BE49-F238E27FC236}">
+                <a16:creationId xmlns:a16="http://schemas.microsoft.com/office/drawing/2014/main" id="{8D2D9CCC-6C41-4617-B98F-6C94DF88758D}"/>
+              </a:ext>
+            </a:extLst>
+          </p:cNvPr>
+          <p:cNvPicPr/>
+          <p:nvPr/>
+        </p:nvPicPr>
+        <p:blipFill>
+          <a:blip r:embed="rId2"/>
+          <a:stretch>
+            <a:fillRect/>
+          </a:stretch>
+        </p:blipFill>
+        <p:spPr>
+          <a:xfrm>
+            <a:off x="0" y="0"/>
+            <a:ext cx="9144000" cy="6858000"/>
+          </a:xfrm>
+          <a:prstGeom prst="rect">
+            <a:avLst/>
+          </a:prstGeom>
+        </p:spPr>
+      </p:pic>
+      <p:sp>
+        <p:nvSpPr>
+          <p:cNvPr id="7" name="文本框 6">
+            <a:extLst>
+              <a:ext uri="{FF2B5EF4-FFF2-40B4-BE49-F238E27FC236}">
+                <a16:creationId xmlns:a16="http://schemas.microsoft.com/office/drawing/2014/main" id="{4AA9013A-2BA1-4191-9BAA-9FCB9392DB4D}"/>
+              </a:ext>
+            </a:extLst>
+          </p:cNvPr>
+          <p:cNvSpPr txBox="1"/>
+          <p:nvPr/>
+        </p:nvSpPr>
+        <p:spPr>
+          <a:xfrm>
+            <a:off x="2447365" y="484093"/>
+            <a:ext cx="4249270" cy="369332"/>
+          </a:xfrm>
+          <a:prstGeom prst="rect">
+            <a:avLst/>
+          </a:prstGeom>
+          <a:noFill/>
+        </p:spPr>
+        <p:txBody>
+          <a:bodyPr wrap="square" rtlCol="0">
+            <a:spAutoFit/>
+          </a:bodyPr>
+          <a:lstStyle/>
+          <a:p>
+            <a:pPr algn="ctr"/>
+            <a:r>
+              <a:rPr lang="zh-CN" altLang="en-US" dirty="0">
+                <a:solidFill>
+                  <a:schemeClr val="accent1">
+                    <a:lumMod val="60000"/>
+                    <a:lumOff val="40000"/>
+                  </a:schemeClr>
+                </a:solidFill>
+              </a:rPr>
+              <a:t>断开无线网络</a:t>
+            </a:r>
+          </a:p>
+        </p:txBody>
+      </p:sp>
+      <p:sp>
+        <p:nvSpPr>
+          <p:cNvPr id="12" name="文本框 11">
+            <a:extLst>
+              <a:ext uri="{FF2B5EF4-FFF2-40B4-BE49-F238E27FC236}">
+                <a16:creationId xmlns:a16="http://schemas.microsoft.com/office/drawing/2014/main" id="{65B3DBFC-E6FA-46B2-932C-6469C024421E}"/>
+              </a:ext>
+            </a:extLst>
+          </p:cNvPr>
+          <p:cNvSpPr txBox="1"/>
+          <p:nvPr/>
+        </p:nvSpPr>
+        <p:spPr>
+          <a:xfrm>
+            <a:off x="2447365" y="5584682"/>
+            <a:ext cx="4249270" cy="369332"/>
+          </a:xfrm>
+          <a:prstGeom prst="rect">
+            <a:avLst/>
+          </a:prstGeom>
+          <a:noFill/>
+        </p:spPr>
+        <p:txBody>
+          <a:bodyPr wrap="square" rtlCol="0">
+            <a:spAutoFit/>
+          </a:bodyPr>
+          <a:lstStyle/>
+          <a:p>
+            <a:pPr algn="ctr"/>
+            <a:r>
+              <a:rPr lang="zh-CN" altLang="en-US" dirty="0">
+                <a:solidFill>
+                  <a:schemeClr val="accent1">
+                    <a:lumMod val="60000"/>
+                    <a:lumOff val="40000"/>
+                  </a:schemeClr>
+                </a:solidFill>
+              </a:rPr>
+              <a:t>符合有线的特征</a:t>
+            </a:r>
+          </a:p>
+        </p:txBody>
+      </p:sp>
+      <p:sp>
+        <p:nvSpPr>
+          <p:cNvPr id="2" name="文本框 1">
+            <a:extLst>
+              <a:ext uri="{FF2B5EF4-FFF2-40B4-BE49-F238E27FC236}">
+                <a16:creationId xmlns:a16="http://schemas.microsoft.com/office/drawing/2014/main" id="{F021CAA0-75FF-4CEE-82B0-F20F012EE390}"/>
+              </a:ext>
+            </a:extLst>
+          </p:cNvPr>
+          <p:cNvSpPr txBox="1"/>
+          <p:nvPr/>
+        </p:nvSpPr>
+        <p:spPr>
+          <a:xfrm>
+            <a:off x="3523129" y="3616699"/>
+            <a:ext cx="2384612" cy="623607"/>
+          </a:xfrm>
+          <a:prstGeom prst="rect">
+            <a:avLst/>
+          </a:prstGeom>
+          <a:noFill/>
+        </p:spPr>
+        <p:txBody>
+          <a:bodyPr wrap="square" rtlCol="0">
+            <a:spAutoFit/>
+          </a:bodyPr>
+          <a:lstStyle/>
+          <a:p>
+            <a:endParaRPr lang="zh-CN" altLang="en-US" dirty="0"/>
+          </a:p>
+        </p:txBody>
+      </p:sp>
+      <p:sp>
+        <p:nvSpPr>
+          <p:cNvPr id="19" name="文本框 18">
+            <a:extLst>
+              <a:ext uri="{FF2B5EF4-FFF2-40B4-BE49-F238E27FC236}">
+                <a16:creationId xmlns:a16="http://schemas.microsoft.com/office/drawing/2014/main" id="{9C66E71A-F041-4807-9EF9-502C1230334A}"/>
+              </a:ext>
+            </a:extLst>
+          </p:cNvPr>
+          <p:cNvSpPr txBox="1"/>
+          <p:nvPr/>
+        </p:nvSpPr>
+        <p:spPr>
+          <a:xfrm>
+            <a:off x="2447364" y="4526911"/>
+            <a:ext cx="4249270" cy="369332"/>
+          </a:xfrm>
+          <a:prstGeom prst="rect">
+            <a:avLst/>
+          </a:prstGeom>
+          <a:noFill/>
+        </p:spPr>
+        <p:txBody>
+          <a:bodyPr wrap="square" rtlCol="0">
+            <a:spAutoFit/>
+          </a:bodyPr>
+          <a:lstStyle/>
+          <a:p>
+            <a:pPr algn="ctr"/>
+            <a:r>
+              <a:rPr lang="zh-CN" altLang="en-US" dirty="0">
+                <a:solidFill>
+                  <a:schemeClr val="accent1">
+                    <a:lumMod val="60000"/>
+                    <a:lumOff val="40000"/>
+                  </a:schemeClr>
+                </a:solidFill>
+              </a:rPr>
+              <a:t>下方平均</a:t>
+            </a:r>
+            <a:r>
+              <a:rPr lang="en-US" altLang="zh-CN" dirty="0">
+                <a:solidFill>
+                  <a:schemeClr val="accent1">
+                    <a:lumMod val="60000"/>
+                    <a:lumOff val="40000"/>
+                  </a:schemeClr>
+                </a:solidFill>
+              </a:rPr>
+              <a:t>Ping</a:t>
+            </a:r>
+            <a:r>
+              <a:rPr lang="zh-CN" altLang="en-US" dirty="0">
+                <a:solidFill>
+                  <a:schemeClr val="accent1">
+                    <a:lumMod val="60000"/>
+                    <a:lumOff val="40000"/>
+                  </a:schemeClr>
+                </a:solidFill>
+              </a:rPr>
+              <a:t>值为</a:t>
+            </a:r>
+            <a:r>
+              <a:rPr lang="en-US" altLang="zh-CN" dirty="0">
+                <a:solidFill>
+                  <a:schemeClr val="accent1">
+                    <a:lumMod val="60000"/>
+                    <a:lumOff val="40000"/>
+                  </a:schemeClr>
+                </a:solidFill>
+              </a:rPr>
+              <a:t>6.7ms</a:t>
+            </a:r>
+            <a:endParaRPr lang="zh-CN" altLang="en-US" dirty="0">
+              <a:solidFill>
+                <a:schemeClr val="accent1">
+                  <a:lumMod val="60000"/>
+                  <a:lumOff val="40000"/>
+                </a:schemeClr>
+              </a:solidFill>
+            </a:endParaRPr>
+          </a:p>
+        </p:txBody>
+      </p:sp>
+      <p:pic>
+        <p:nvPicPr>
+          <p:cNvPr id="10" name="图片 9">
+            <a:extLst>
+              <a:ext uri="{FF2B5EF4-FFF2-40B4-BE49-F238E27FC236}">
+                <a16:creationId xmlns:a16="http://schemas.microsoft.com/office/drawing/2014/main" id="{486D84B7-82C1-4474-92B3-131964282496}"/>
+              </a:ext>
+            </a:extLst>
+          </p:cNvPr>
+          <p:cNvPicPr/>
+          <p:nvPr/>
+        </p:nvPicPr>
+        <p:blipFill>
+          <a:blip r:embed="rId3"/>
+          <a:stretch>
+            <a:fillRect/>
+          </a:stretch>
+        </p:blipFill>
+        <p:spPr>
+          <a:xfrm>
+            <a:off x="1934844" y="1975628"/>
+            <a:ext cx="5274310" cy="1739265"/>
+          </a:xfrm>
+          <a:prstGeom prst="rect">
+            <a:avLst/>
+          </a:prstGeom>
+        </p:spPr>
+      </p:pic>
+    </p:spTree>
+    <p:extLst>
+      <p:ext uri="{BB962C8B-B14F-4D97-AF65-F5344CB8AC3E}">
+        <p14:creationId xmlns:p14="http://schemas.microsoft.com/office/powerpoint/2010/main" val="2925620926"/>
       </p:ext>
     </p:extLst>
   </p:cSld>
@@ -6864,10 +7618,10 @@
       </p:grpSpPr>
       <p:pic>
         <p:nvPicPr>
-          <p:cNvPr id="45" name="图片 44">
-            <a:extLst>
-              <a:ext uri="{FF2B5EF4-FFF2-40B4-BE49-F238E27FC236}">
-                <a16:creationId xmlns:a16="http://schemas.microsoft.com/office/drawing/2014/main" id="{AABE9CE2-AA21-413D-98E3-DDBE62B612F9}"/>
+          <p:cNvPr id="4" name="图片 3">
+            <a:extLst>
+              <a:ext uri="{FF2B5EF4-FFF2-40B4-BE49-F238E27FC236}">
+                <a16:creationId xmlns:a16="http://schemas.microsoft.com/office/drawing/2014/main" id="{19AE68A9-ADD4-4708-BD33-FC730D62BCB5}"/>
               </a:ext>
             </a:extLst>
           </p:cNvPr>
@@ -6883,7 +7637,7 @@
         <p:spPr>
           <a:xfrm>
             <a:off x="0" y="0"/>
-            <a:ext cx="12192000" cy="6858000"/>
+            <a:ext cx="9144000" cy="6858000"/>
           </a:xfrm>
           <a:prstGeom prst="rect">
             <a:avLst/>
@@ -6892,38 +7646,6 @@
       </p:pic>
       <p:sp>
         <p:nvSpPr>
-          <p:cNvPr id="2" name="标题 1">
-            <a:extLst>
-              <a:ext uri="{FF2B5EF4-FFF2-40B4-BE49-F238E27FC236}">
-                <a16:creationId xmlns:a16="http://schemas.microsoft.com/office/drawing/2014/main" id="{0EF62112-E4F3-4E2E-92AA-D9554CD19820}"/>
-              </a:ext>
-            </a:extLst>
-          </p:cNvPr>
-          <p:cNvSpPr>
-            <a:spLocks noGrp="1"/>
-          </p:cNvSpPr>
-          <p:nvPr>
-            <p:ph type="title"/>
-          </p:nvPr>
-        </p:nvSpPr>
-        <p:spPr/>
-        <p:txBody>
-          <a:bodyPr/>
-          <a:lstStyle/>
-          <a:p>
-            <a:endParaRPr lang="zh-CN" altLang="en-US" dirty="0">
-              <a:solidFill>
-                <a:schemeClr val="tx1">
-                  <a:lumMod val="50000"/>
-                  <a:lumOff val="50000"/>
-                </a:schemeClr>
-              </a:solidFill>
-            </a:endParaRPr>
-          </a:p>
-        </p:txBody>
-      </p:sp>
-      <p:sp>
-        <p:nvSpPr>
           <p:cNvPr id="6" name="矩形 5">
             <a:extLst>
               <a:ext uri="{FF2B5EF4-FFF2-40B4-BE49-F238E27FC236}">
@@ -6936,8 +7658,8 @@
         </p:nvSpPr>
         <p:spPr>
           <a:xfrm>
-            <a:off x="2242656" y="1825625"/>
-            <a:ext cx="1442907" cy="3031601"/>
+            <a:off x="1681993" y="2226469"/>
+            <a:ext cx="1082180" cy="2273701"/>
           </a:xfrm>
           <a:prstGeom prst="rect">
             <a:avLst/>
@@ -6964,11 +7686,11 @@
           <a:lstStyle/>
           <a:p>
             <a:pPr algn="ctr"/>
-            <a:endParaRPr lang="zh-CN" altLang="en-US">
+            <a:endParaRPr lang="zh-CN" altLang="en-US" sz="1350">
               <a:solidFill>
-                <a:schemeClr val="tx1">
-                  <a:lumMod val="50000"/>
-                  <a:lumOff val="50000"/>
+                <a:schemeClr val="accent1">
+                  <a:lumMod val="20000"/>
+                  <a:lumOff val="80000"/>
                 </a:schemeClr>
               </a:solidFill>
             </a:endParaRPr>
@@ -6989,8 +7711,8 @@
         </p:nvSpPr>
         <p:spPr>
           <a:xfrm>
-            <a:off x="8265954" y="1825625"/>
-            <a:ext cx="1442907" cy="3031601"/>
+            <a:off x="6199466" y="2226469"/>
+            <a:ext cx="1082180" cy="2273701"/>
           </a:xfrm>
           <a:prstGeom prst="rect">
             <a:avLst/>
@@ -7017,11 +7739,11 @@
           <a:lstStyle/>
           <a:p>
             <a:pPr algn="ctr"/>
-            <a:endParaRPr lang="zh-CN" altLang="en-US">
+            <a:endParaRPr lang="zh-CN" altLang="en-US" sz="1350">
               <a:solidFill>
-                <a:schemeClr val="tx1">
-                  <a:lumMod val="50000"/>
-                  <a:lumOff val="50000"/>
+                <a:schemeClr val="accent1">
+                  <a:lumMod val="20000"/>
+                  <a:lumOff val="80000"/>
                 </a:schemeClr>
               </a:solidFill>
             </a:endParaRPr>
@@ -7042,8 +7764,8 @@
         </p:nvCxnSpPr>
         <p:spPr>
           <a:xfrm>
-            <a:off x="3204594" y="2365695"/>
-            <a:ext cx="5301843" cy="0"/>
+            <a:off x="2403446" y="2631521"/>
+            <a:ext cx="3976382" cy="0"/>
           </a:xfrm>
           <a:prstGeom prst="line">
             <a:avLst/>
@@ -7080,8 +7802,8 @@
         </p:nvCxnSpPr>
         <p:spPr>
           <a:xfrm>
-            <a:off x="3204593" y="4545647"/>
-            <a:ext cx="5301843" cy="0"/>
+            <a:off x="2403445" y="4266485"/>
+            <a:ext cx="3976382" cy="0"/>
           </a:xfrm>
           <a:prstGeom prst="line">
             <a:avLst/>
@@ -7125,8 +7847,8 @@
         </p:nvSpPr>
         <p:spPr>
           <a:xfrm>
-            <a:off x="3685563" y="1928895"/>
-            <a:ext cx="1435008" cy="369332"/>
+            <a:off x="2764173" y="2303921"/>
+            <a:ext cx="1122423" cy="300082"/>
           </a:xfrm>
           <a:prstGeom prst="rect">
             <a:avLst/>
@@ -7140,21 +7862,21 @@
           <a:lstStyle/>
           <a:p>
             <a:r>
-              <a:rPr lang="en-US" altLang="zh-CN" dirty="0">
-                <a:solidFill>
-                  <a:schemeClr val="tx1">
-                    <a:lumMod val="50000"/>
-                    <a:lumOff val="50000"/>
+              <a:rPr lang="en-US" altLang="zh-CN" sz="1350" dirty="0">
+                <a:solidFill>
+                  <a:schemeClr val="accent1">
+                    <a:lumMod val="20000"/>
+                    <a:lumOff val="80000"/>
                   </a:schemeClr>
                 </a:solidFill>
               </a:rPr>
               <a:t>192.168.1.11</a:t>
             </a:r>
-            <a:endParaRPr lang="zh-CN" altLang="en-US" dirty="0">
+            <a:endParaRPr lang="zh-CN" altLang="en-US" sz="1350" dirty="0">
               <a:solidFill>
-                <a:schemeClr val="tx1">
-                  <a:lumMod val="50000"/>
-                  <a:lumOff val="50000"/>
+                <a:schemeClr val="accent1">
+                  <a:lumMod val="20000"/>
+                  <a:lumOff val="80000"/>
                 </a:schemeClr>
               </a:solidFill>
             </a:endParaRPr>
@@ -7175,8 +7897,8 @@
         </p:nvSpPr>
         <p:spPr>
           <a:xfrm>
-            <a:off x="3685563" y="4108847"/>
-            <a:ext cx="1435008" cy="369332"/>
+            <a:off x="2764173" y="3938885"/>
+            <a:ext cx="1122423" cy="300082"/>
           </a:xfrm>
           <a:prstGeom prst="rect">
             <a:avLst/>
@@ -7190,21 +7912,21 @@
           <a:lstStyle/>
           <a:p>
             <a:r>
-              <a:rPr lang="en-US" altLang="zh-CN" dirty="0">
-                <a:solidFill>
-                  <a:schemeClr val="tx1">
-                    <a:lumMod val="50000"/>
-                    <a:lumOff val="50000"/>
+              <a:rPr lang="en-US" altLang="zh-CN" sz="1350" dirty="0">
+                <a:solidFill>
+                  <a:schemeClr val="accent1">
+                    <a:lumMod val="20000"/>
+                    <a:lumOff val="80000"/>
                   </a:schemeClr>
                 </a:solidFill>
               </a:rPr>
               <a:t>192.168.1.11</a:t>
             </a:r>
-            <a:endParaRPr lang="zh-CN" altLang="en-US" dirty="0">
+            <a:endParaRPr lang="zh-CN" altLang="en-US" sz="1350" dirty="0">
               <a:solidFill>
-                <a:schemeClr val="tx1">
-                  <a:lumMod val="50000"/>
-                  <a:lumOff val="50000"/>
+                <a:schemeClr val="accent1">
+                  <a:lumMod val="20000"/>
+                  <a:lumOff val="80000"/>
                 </a:schemeClr>
               </a:solidFill>
             </a:endParaRPr>
@@ -7225,8 +7947,8 @@
         </p:nvSpPr>
         <p:spPr>
           <a:xfrm>
-            <a:off x="6828762" y="1910994"/>
-            <a:ext cx="1435008" cy="369332"/>
+            <a:off x="5121572" y="2290495"/>
+            <a:ext cx="1122423" cy="300082"/>
           </a:xfrm>
           <a:prstGeom prst="rect">
             <a:avLst/>
@@ -7240,21 +7962,21 @@
           <a:lstStyle/>
           <a:p>
             <a:r>
-              <a:rPr lang="en-US" altLang="zh-CN" dirty="0">
-                <a:solidFill>
-                  <a:schemeClr val="tx1">
-                    <a:lumMod val="50000"/>
-                    <a:lumOff val="50000"/>
+              <a:rPr lang="en-US" altLang="zh-CN" sz="1350" dirty="0">
+                <a:solidFill>
+                  <a:schemeClr val="accent1">
+                    <a:lumMod val="20000"/>
+                    <a:lumOff val="80000"/>
                   </a:schemeClr>
                 </a:solidFill>
               </a:rPr>
               <a:t>192.168.1.12</a:t>
             </a:r>
-            <a:endParaRPr lang="zh-CN" altLang="en-US" dirty="0">
+            <a:endParaRPr lang="zh-CN" altLang="en-US" sz="1350" dirty="0">
               <a:solidFill>
-                <a:schemeClr val="tx1">
-                  <a:lumMod val="50000"/>
-                  <a:lumOff val="50000"/>
+                <a:schemeClr val="accent1">
+                  <a:lumMod val="20000"/>
+                  <a:lumOff val="80000"/>
                 </a:schemeClr>
               </a:solidFill>
             </a:endParaRPr>
@@ -7275,8 +7997,8 @@
         </p:nvSpPr>
         <p:spPr>
           <a:xfrm>
-            <a:off x="6836661" y="4115094"/>
-            <a:ext cx="1435008" cy="369332"/>
+            <a:off x="5127496" y="3943570"/>
+            <a:ext cx="1122423" cy="300082"/>
           </a:xfrm>
           <a:prstGeom prst="rect">
             <a:avLst/>
@@ -7290,21 +8012,21 @@
           <a:lstStyle/>
           <a:p>
             <a:r>
-              <a:rPr lang="en-US" altLang="zh-CN" dirty="0">
-                <a:solidFill>
-                  <a:schemeClr val="tx1">
-                    <a:lumMod val="50000"/>
-                    <a:lumOff val="50000"/>
+              <a:rPr lang="en-US" altLang="zh-CN" sz="1350" dirty="0">
+                <a:solidFill>
+                  <a:schemeClr val="accent1">
+                    <a:lumMod val="20000"/>
+                    <a:lumOff val="80000"/>
                   </a:schemeClr>
                 </a:solidFill>
               </a:rPr>
               <a:t>192.168.1.12</a:t>
             </a:r>
-            <a:endParaRPr lang="zh-CN" altLang="en-US" dirty="0">
+            <a:endParaRPr lang="zh-CN" altLang="en-US" sz="1350" dirty="0">
               <a:solidFill>
-                <a:schemeClr val="tx1">
-                  <a:lumMod val="50000"/>
-                  <a:lumOff val="50000"/>
+                <a:schemeClr val="accent1">
+                  <a:lumMod val="20000"/>
+                  <a:lumOff val="80000"/>
                 </a:schemeClr>
               </a:solidFill>
             </a:endParaRPr>
@@ -7325,8 +8047,8 @@
         </p:nvSpPr>
         <p:spPr>
           <a:xfrm>
-            <a:off x="2567031" y="2860646"/>
-            <a:ext cx="436228" cy="369332"/>
+            <a:off x="1925273" y="3002734"/>
+            <a:ext cx="327171" cy="300082"/>
           </a:xfrm>
           <a:prstGeom prst="rect">
             <a:avLst/>
@@ -7339,11 +8061,11 @@
           </a:bodyPr>
           <a:lstStyle/>
           <a:p>
-            <a:endParaRPr lang="zh-CN" altLang="en-US" dirty="0">
+            <a:endParaRPr lang="zh-CN" altLang="en-US" sz="1350" dirty="0">
               <a:solidFill>
-                <a:schemeClr val="tx1">
-                  <a:lumMod val="50000"/>
-                  <a:lumOff val="50000"/>
+                <a:schemeClr val="accent1">
+                  <a:lumMod val="20000"/>
+                  <a:lumOff val="80000"/>
                 </a:schemeClr>
               </a:solidFill>
             </a:endParaRPr>
@@ -7364,8 +8086,8 @@
         </p:nvSpPr>
         <p:spPr>
           <a:xfrm>
-            <a:off x="1434517" y="2793534"/>
-            <a:ext cx="897746" cy="369332"/>
+            <a:off x="1075888" y="2952400"/>
+            <a:ext cx="673310" cy="300082"/>
           </a:xfrm>
           <a:prstGeom prst="rect">
             <a:avLst/>
@@ -7379,32 +8101,32 @@
           <a:lstStyle/>
           <a:p>
             <a:r>
-              <a:rPr lang="zh-CN" altLang="en-US" dirty="0">
-                <a:solidFill>
-                  <a:schemeClr val="tx1">
-                    <a:lumMod val="50000"/>
-                    <a:lumOff val="50000"/>
+              <a:rPr lang="zh-CN" altLang="en-US" sz="1350" dirty="0">
+                <a:solidFill>
+                  <a:schemeClr val="accent1">
+                    <a:lumMod val="20000"/>
+                    <a:lumOff val="80000"/>
                   </a:schemeClr>
                 </a:solidFill>
               </a:rPr>
               <a:t>电脑</a:t>
             </a:r>
             <a:r>
-              <a:rPr lang="en-US" altLang="zh-CN" dirty="0">
-                <a:solidFill>
-                  <a:schemeClr val="tx1">
-                    <a:lumMod val="50000"/>
-                    <a:lumOff val="50000"/>
+              <a:rPr lang="en-US" altLang="zh-CN" sz="1350" dirty="0">
+                <a:solidFill>
+                  <a:schemeClr val="accent1">
+                    <a:lumMod val="20000"/>
+                    <a:lumOff val="80000"/>
                   </a:schemeClr>
                 </a:solidFill>
               </a:rPr>
               <a:t>1</a:t>
             </a:r>
-            <a:endParaRPr lang="zh-CN" altLang="en-US" dirty="0">
+            <a:endParaRPr lang="zh-CN" altLang="en-US" sz="1350" dirty="0">
               <a:solidFill>
-                <a:schemeClr val="tx1">
-                  <a:lumMod val="50000"/>
-                  <a:lumOff val="50000"/>
+                <a:schemeClr val="accent1">
+                  <a:lumMod val="20000"/>
+                  <a:lumOff val="80000"/>
                 </a:schemeClr>
               </a:solidFill>
             </a:endParaRPr>
@@ -7425,8 +8147,8 @@
         </p:nvSpPr>
         <p:spPr>
           <a:xfrm>
-            <a:off x="9949344" y="2933134"/>
-            <a:ext cx="897746" cy="369332"/>
+            <a:off x="7462008" y="3057100"/>
+            <a:ext cx="673310" cy="300082"/>
           </a:xfrm>
           <a:prstGeom prst="rect">
             <a:avLst/>
@@ -7440,32 +8162,32 @@
           <a:lstStyle/>
           <a:p>
             <a:r>
-              <a:rPr lang="zh-CN" altLang="en-US" dirty="0">
-                <a:solidFill>
-                  <a:schemeClr val="tx1">
-                    <a:lumMod val="50000"/>
-                    <a:lumOff val="50000"/>
+              <a:rPr lang="zh-CN" altLang="en-US" sz="1350" dirty="0">
+                <a:solidFill>
+                  <a:schemeClr val="accent1">
+                    <a:lumMod val="20000"/>
+                    <a:lumOff val="80000"/>
                   </a:schemeClr>
                 </a:solidFill>
               </a:rPr>
               <a:t>电脑</a:t>
             </a:r>
             <a:r>
-              <a:rPr lang="en-US" altLang="zh-CN" dirty="0">
-                <a:solidFill>
-                  <a:schemeClr val="tx1">
-                    <a:lumMod val="50000"/>
-                    <a:lumOff val="50000"/>
+              <a:rPr lang="en-US" altLang="zh-CN" sz="1350" dirty="0">
+                <a:solidFill>
+                  <a:schemeClr val="accent1">
+                    <a:lumMod val="20000"/>
+                    <a:lumOff val="80000"/>
                   </a:schemeClr>
                 </a:solidFill>
               </a:rPr>
               <a:t>2</a:t>
             </a:r>
-            <a:endParaRPr lang="zh-CN" altLang="en-US" dirty="0">
+            <a:endParaRPr lang="zh-CN" altLang="en-US" sz="1350" dirty="0">
               <a:solidFill>
-                <a:schemeClr val="tx1">
-                  <a:lumMod val="50000"/>
-                  <a:lumOff val="50000"/>
+                <a:schemeClr val="accent1">
+                  <a:lumMod val="20000"/>
+                  <a:lumOff val="80000"/>
                 </a:schemeClr>
               </a:solidFill>
             </a:endParaRPr>
@@ -7486,8 +8208,8 @@
         </p:nvSpPr>
         <p:spPr>
           <a:xfrm>
-            <a:off x="5314424" y="1816216"/>
-            <a:ext cx="1082180" cy="1098958"/>
+            <a:off x="3985818" y="2219412"/>
+            <a:ext cx="811635" cy="824219"/>
           </a:xfrm>
           <a:prstGeom prst="mathMultiply">
             <a:avLst/>
@@ -7514,11 +8236,11 @@
           <a:lstStyle/>
           <a:p>
             <a:pPr algn="ctr"/>
-            <a:endParaRPr lang="zh-CN" altLang="en-US">
+            <a:endParaRPr lang="zh-CN" altLang="en-US" sz="1350">
               <a:solidFill>
-                <a:schemeClr val="tx1">
-                  <a:lumMod val="50000"/>
-                  <a:lumOff val="50000"/>
+                <a:schemeClr val="accent1">
+                  <a:lumMod val="20000"/>
+                  <a:lumOff val="80000"/>
                 </a:schemeClr>
               </a:solidFill>
             </a:endParaRPr>
@@ -7560,8 +8282,8 @@
         </p:blipFill>
         <p:spPr>
           <a:xfrm>
-            <a:off x="5477556" y="4857226"/>
-            <a:ext cx="996404" cy="996404"/>
+            <a:off x="4108167" y="4500170"/>
+            <a:ext cx="747303" cy="747303"/>
           </a:xfrm>
           <a:prstGeom prst="rect">
             <a:avLst/>
@@ -7582,8 +8304,8 @@
         </p:nvSpPr>
         <p:spPr>
           <a:xfrm>
-            <a:off x="4616858" y="5806789"/>
-            <a:ext cx="2717800" cy="369332"/>
+            <a:off x="3462644" y="5212342"/>
+            <a:ext cx="2038350" cy="300082"/>
           </a:xfrm>
           <a:prstGeom prst="rect">
             <a:avLst/>
@@ -7598,11 +8320,11 @@
           <a:p>
             <a:pPr algn="ctr"/>
             <a:r>
-              <a:rPr lang="zh-CN" altLang="en-US" dirty="0">
-                <a:solidFill>
-                  <a:schemeClr val="accent1">
-                    <a:lumMod val="60000"/>
-                    <a:lumOff val="40000"/>
+              <a:rPr lang="zh-CN" altLang="en-US" sz="1350" dirty="0">
+                <a:solidFill>
+                  <a:schemeClr val="accent1">
+                    <a:lumMod val="20000"/>
+                    <a:lumOff val="80000"/>
                   </a:schemeClr>
                 </a:solidFill>
               </a:rPr>
@@ -7615,6 +8337,1531 @@
     <p:extLst>
       <p:ext uri="{BB962C8B-B14F-4D97-AF65-F5344CB8AC3E}">
         <p14:creationId xmlns:p14="http://schemas.microsoft.com/office/powerpoint/2010/main" val="2479912351"/>
+      </p:ext>
+    </p:extLst>
+  </p:cSld>
+  <p:clrMapOvr>
+    <a:masterClrMapping/>
+  </p:clrMapOvr>
+</p:sld>
+</file>
+
+<file path=ppt/slides/slide20.xml><?xml version="1.0" encoding="utf-8"?>
+<p:sld xmlns:a="http://schemas.openxmlformats.org/drawingml/2006/main" xmlns:r="http://schemas.openxmlformats.org/officeDocument/2006/relationships" xmlns:p="http://schemas.openxmlformats.org/presentationml/2006/main">
+  <p:cSld>
+    <p:spTree>
+      <p:nvGrpSpPr>
+        <p:cNvPr id="1" name=""/>
+        <p:cNvGrpSpPr/>
+        <p:nvPr/>
+      </p:nvGrpSpPr>
+      <p:grpSpPr>
+        <a:xfrm>
+          <a:off x="0" y="0"/>
+          <a:ext cx="0" cy="0"/>
+          <a:chOff x="0" y="0"/>
+          <a:chExt cx="0" cy="0"/>
+        </a:xfrm>
+      </p:grpSpPr>
+      <p:pic>
+        <p:nvPicPr>
+          <p:cNvPr id="5" name="图片 4">
+            <a:extLst>
+              <a:ext uri="{FF2B5EF4-FFF2-40B4-BE49-F238E27FC236}">
+                <a16:creationId xmlns:a16="http://schemas.microsoft.com/office/drawing/2014/main" id="{8D2D9CCC-6C41-4617-B98F-6C94DF88758D}"/>
+              </a:ext>
+            </a:extLst>
+          </p:cNvPr>
+          <p:cNvPicPr/>
+          <p:nvPr/>
+        </p:nvPicPr>
+        <p:blipFill>
+          <a:blip r:embed="rId2"/>
+          <a:stretch>
+            <a:fillRect/>
+          </a:stretch>
+        </p:blipFill>
+        <p:spPr>
+          <a:xfrm>
+            <a:off x="0" y="0"/>
+            <a:ext cx="9144000" cy="6858000"/>
+          </a:xfrm>
+          <a:prstGeom prst="rect">
+            <a:avLst/>
+          </a:prstGeom>
+        </p:spPr>
+      </p:pic>
+      <p:sp>
+        <p:nvSpPr>
+          <p:cNvPr id="2" name="文本框 1">
+            <a:extLst>
+              <a:ext uri="{FF2B5EF4-FFF2-40B4-BE49-F238E27FC236}">
+                <a16:creationId xmlns:a16="http://schemas.microsoft.com/office/drawing/2014/main" id="{F021CAA0-75FF-4CEE-82B0-F20F012EE390}"/>
+              </a:ext>
+            </a:extLst>
+          </p:cNvPr>
+          <p:cNvSpPr txBox="1"/>
+          <p:nvPr/>
+        </p:nvSpPr>
+        <p:spPr>
+          <a:xfrm>
+            <a:off x="3523129" y="3616699"/>
+            <a:ext cx="2384612" cy="623607"/>
+          </a:xfrm>
+          <a:prstGeom prst="rect">
+            <a:avLst/>
+          </a:prstGeom>
+          <a:noFill/>
+        </p:spPr>
+        <p:txBody>
+          <a:bodyPr wrap="square" rtlCol="0">
+            <a:spAutoFit/>
+          </a:bodyPr>
+          <a:lstStyle/>
+          <a:p>
+            <a:endParaRPr lang="zh-CN" altLang="en-US" dirty="0"/>
+          </a:p>
+        </p:txBody>
+      </p:sp>
+      <p:sp>
+        <p:nvSpPr>
+          <p:cNvPr id="3" name="文本框 2">
+            <a:extLst>
+              <a:ext uri="{FF2B5EF4-FFF2-40B4-BE49-F238E27FC236}">
+                <a16:creationId xmlns:a16="http://schemas.microsoft.com/office/drawing/2014/main" id="{E36AF013-28FA-41C3-BA81-90F88C7F4AF9}"/>
+              </a:ext>
+            </a:extLst>
+          </p:cNvPr>
+          <p:cNvSpPr txBox="1"/>
+          <p:nvPr/>
+        </p:nvSpPr>
+        <p:spPr>
+          <a:xfrm>
+            <a:off x="811512" y="1352863"/>
+            <a:ext cx="4249270" cy="369332"/>
+          </a:xfrm>
+          <a:prstGeom prst="rect">
+            <a:avLst/>
+          </a:prstGeom>
+          <a:noFill/>
+        </p:spPr>
+        <p:txBody>
+          <a:bodyPr wrap="square" rtlCol="0">
+            <a:spAutoFit/>
+          </a:bodyPr>
+          <a:lstStyle/>
+          <a:p>
+            <a:r>
+              <a:rPr lang="zh-CN" altLang="en-US" dirty="0">
+                <a:solidFill>
+                  <a:schemeClr val="accent1">
+                    <a:lumMod val="60000"/>
+                    <a:lumOff val="40000"/>
+                  </a:schemeClr>
+                </a:solidFill>
+              </a:rPr>
+              <a:t>结论：</a:t>
+            </a:r>
+            <a:endParaRPr lang="en-US" altLang="zh-CN" dirty="0">
+              <a:solidFill>
+                <a:schemeClr val="accent1">
+                  <a:lumMod val="60000"/>
+                  <a:lumOff val="40000"/>
+                </a:schemeClr>
+              </a:solidFill>
+            </a:endParaRPr>
+          </a:p>
+        </p:txBody>
+      </p:sp>
+      <p:sp>
+        <p:nvSpPr>
+          <p:cNvPr id="4" name="文本框 3">
+            <a:extLst>
+              <a:ext uri="{FF2B5EF4-FFF2-40B4-BE49-F238E27FC236}">
+                <a16:creationId xmlns:a16="http://schemas.microsoft.com/office/drawing/2014/main" id="{E6A0F483-0556-48B5-90C7-8C506517C28E}"/>
+              </a:ext>
+            </a:extLst>
+          </p:cNvPr>
+          <p:cNvSpPr txBox="1"/>
+          <p:nvPr/>
+        </p:nvSpPr>
+        <p:spPr>
+          <a:xfrm>
+            <a:off x="2057400" y="3075057"/>
+            <a:ext cx="5029200" cy="707886"/>
+          </a:xfrm>
+          <a:prstGeom prst="rect">
+            <a:avLst/>
+          </a:prstGeom>
+          <a:noFill/>
+        </p:spPr>
+        <p:txBody>
+          <a:bodyPr wrap="square" rtlCol="0">
+            <a:spAutoFit/>
+          </a:bodyPr>
+          <a:lstStyle/>
+          <a:p>
+            <a:r>
+              <a:rPr lang="zh-CN" altLang="en-US" sz="2000" dirty="0">
+                <a:solidFill>
+                  <a:schemeClr val="accent1">
+                    <a:lumMod val="60000"/>
+                    <a:lumOff val="40000"/>
+                  </a:schemeClr>
+                </a:solidFill>
+              </a:rPr>
+              <a:t>有线与无线同时连接，优先使用有线网络。如果此时断开有线网络，则转用无线网络。</a:t>
+            </a:r>
+          </a:p>
+        </p:txBody>
+      </p:sp>
+    </p:spTree>
+    <p:extLst>
+      <p:ext uri="{BB962C8B-B14F-4D97-AF65-F5344CB8AC3E}">
+        <p14:creationId xmlns:p14="http://schemas.microsoft.com/office/powerpoint/2010/main" val="338057363"/>
+      </p:ext>
+    </p:extLst>
+  </p:cSld>
+  <p:clrMapOvr>
+    <a:masterClrMapping/>
+  </p:clrMapOvr>
+</p:sld>
+</file>
+
+<file path=ppt/slides/slide21.xml><?xml version="1.0" encoding="utf-8"?>
+<p:sld xmlns:a="http://schemas.openxmlformats.org/drawingml/2006/main" xmlns:r="http://schemas.openxmlformats.org/officeDocument/2006/relationships" xmlns:p="http://schemas.openxmlformats.org/presentationml/2006/main">
+  <p:cSld>
+    <p:spTree>
+      <p:nvGrpSpPr>
+        <p:cNvPr id="1" name=""/>
+        <p:cNvGrpSpPr/>
+        <p:nvPr/>
+      </p:nvGrpSpPr>
+      <p:grpSpPr>
+        <a:xfrm>
+          <a:off x="0" y="0"/>
+          <a:ext cx="0" cy="0"/>
+          <a:chOff x="0" y="0"/>
+          <a:chExt cx="0" cy="0"/>
+        </a:xfrm>
+      </p:grpSpPr>
+      <p:pic>
+        <p:nvPicPr>
+          <p:cNvPr id="2" name="图片 1">
+            <a:extLst>
+              <a:ext uri="{FF2B5EF4-FFF2-40B4-BE49-F238E27FC236}">
+                <a16:creationId xmlns:a16="http://schemas.microsoft.com/office/drawing/2014/main" id="{37EADFB3-52E2-4A2E-965E-C099EF3A40CA}"/>
+              </a:ext>
+            </a:extLst>
+          </p:cNvPr>
+          <p:cNvPicPr/>
+          <p:nvPr/>
+        </p:nvPicPr>
+        <p:blipFill>
+          <a:blip r:embed="rId2"/>
+          <a:stretch>
+            <a:fillRect/>
+          </a:stretch>
+        </p:blipFill>
+        <p:spPr>
+          <a:xfrm>
+            <a:off x="0" y="0"/>
+            <a:ext cx="9144000" cy="6858000"/>
+          </a:xfrm>
+          <a:prstGeom prst="rect">
+            <a:avLst/>
+          </a:prstGeom>
+        </p:spPr>
+      </p:pic>
+      <p:sp>
+        <p:nvSpPr>
+          <p:cNvPr id="6" name="矩形 5">
+            <a:extLst>
+              <a:ext uri="{FF2B5EF4-FFF2-40B4-BE49-F238E27FC236}">
+                <a16:creationId xmlns:a16="http://schemas.microsoft.com/office/drawing/2014/main" id="{20D6983C-FA3E-42DB-9E83-79552C0F3811}"/>
+              </a:ext>
+            </a:extLst>
+          </p:cNvPr>
+          <p:cNvSpPr/>
+          <p:nvPr/>
+        </p:nvSpPr>
+        <p:spPr>
+          <a:xfrm>
+            <a:off x="1681993" y="2226469"/>
+            <a:ext cx="1082180" cy="2273701"/>
+          </a:xfrm>
+          <a:prstGeom prst="rect">
+            <a:avLst/>
+          </a:prstGeom>
+        </p:spPr>
+        <p:style>
+          <a:lnRef idx="2">
+            <a:schemeClr val="accent1">
+              <a:shade val="50000"/>
+            </a:schemeClr>
+          </a:lnRef>
+          <a:fillRef idx="1">
+            <a:schemeClr val="accent1"/>
+          </a:fillRef>
+          <a:effectRef idx="0">
+            <a:schemeClr val="accent1"/>
+          </a:effectRef>
+          <a:fontRef idx="minor">
+            <a:schemeClr val="lt1"/>
+          </a:fontRef>
+        </p:style>
+        <p:txBody>
+          <a:bodyPr rtlCol="0" anchor="ctr"/>
+          <a:lstStyle/>
+          <a:p>
+            <a:pPr algn="ctr"/>
+            <a:endParaRPr lang="zh-CN" altLang="en-US" sz="1350">
+              <a:solidFill>
+                <a:schemeClr val="accent1">
+                  <a:lumMod val="40000"/>
+                  <a:lumOff val="60000"/>
+                </a:schemeClr>
+              </a:solidFill>
+            </a:endParaRPr>
+          </a:p>
+        </p:txBody>
+      </p:sp>
+      <p:sp>
+        <p:nvSpPr>
+          <p:cNvPr id="8" name="矩形 7">
+            <a:extLst>
+              <a:ext uri="{FF2B5EF4-FFF2-40B4-BE49-F238E27FC236}">
+                <a16:creationId xmlns:a16="http://schemas.microsoft.com/office/drawing/2014/main" id="{66FD494A-8A44-415C-A68A-ADA3007634E1}"/>
+              </a:ext>
+            </a:extLst>
+          </p:cNvPr>
+          <p:cNvSpPr/>
+          <p:nvPr/>
+        </p:nvSpPr>
+        <p:spPr>
+          <a:xfrm>
+            <a:off x="6199466" y="2226469"/>
+            <a:ext cx="1082180" cy="2273701"/>
+          </a:xfrm>
+          <a:prstGeom prst="rect">
+            <a:avLst/>
+          </a:prstGeom>
+        </p:spPr>
+        <p:style>
+          <a:lnRef idx="2">
+            <a:schemeClr val="accent1">
+              <a:shade val="50000"/>
+            </a:schemeClr>
+          </a:lnRef>
+          <a:fillRef idx="1">
+            <a:schemeClr val="accent1"/>
+          </a:fillRef>
+          <a:effectRef idx="0">
+            <a:schemeClr val="accent1"/>
+          </a:effectRef>
+          <a:fontRef idx="minor">
+            <a:schemeClr val="lt1"/>
+          </a:fontRef>
+        </p:style>
+        <p:txBody>
+          <a:bodyPr rtlCol="0" anchor="ctr"/>
+          <a:lstStyle/>
+          <a:p>
+            <a:pPr algn="ctr"/>
+            <a:endParaRPr lang="zh-CN" altLang="en-US" sz="1350">
+              <a:solidFill>
+                <a:schemeClr val="accent1">
+                  <a:lumMod val="40000"/>
+                  <a:lumOff val="60000"/>
+                </a:schemeClr>
+              </a:solidFill>
+            </a:endParaRPr>
+          </a:p>
+        </p:txBody>
+      </p:sp>
+      <p:cxnSp>
+        <p:nvCxnSpPr>
+          <p:cNvPr id="14" name="直接连接符 13">
+            <a:extLst>
+              <a:ext uri="{FF2B5EF4-FFF2-40B4-BE49-F238E27FC236}">
+                <a16:creationId xmlns:a16="http://schemas.microsoft.com/office/drawing/2014/main" id="{4D0281A1-9997-498C-979C-5CD443B8EEB8}"/>
+              </a:ext>
+            </a:extLst>
+          </p:cNvPr>
+          <p:cNvCxnSpPr>
+            <a:cxnSpLocks/>
+          </p:cNvCxnSpPr>
+          <p:nvPr/>
+        </p:nvCxnSpPr>
+        <p:spPr>
+          <a:xfrm>
+            <a:off x="2403445" y="4266485"/>
+            <a:ext cx="3976382" cy="0"/>
+          </a:xfrm>
+          <a:prstGeom prst="line">
+            <a:avLst/>
+          </a:prstGeom>
+          <a:ln w="9525" cap="flat" cmpd="sng" algn="ctr">
+            <a:solidFill>
+              <a:schemeClr val="dk1"/>
+            </a:solidFill>
+            <a:prstDash val="dash"/>
+            <a:round/>
+            <a:headEnd type="none" w="med" len="med"/>
+            <a:tailEnd type="none" w="med" len="med"/>
+          </a:ln>
+        </p:spPr>
+        <p:style>
+          <a:lnRef idx="0">
+            <a:scrgbClr r="0" g="0" b="0"/>
+          </a:lnRef>
+          <a:fillRef idx="0">
+            <a:scrgbClr r="0" g="0" b="0"/>
+          </a:fillRef>
+          <a:effectRef idx="0">
+            <a:scrgbClr r="0" g="0" b="0"/>
+          </a:effectRef>
+          <a:fontRef idx="minor">
+            <a:schemeClr val="tx1"/>
+          </a:fontRef>
+        </p:style>
+      </p:cxnSp>
+      <p:sp>
+        <p:nvSpPr>
+          <p:cNvPr id="26" name="文本框 25">
+            <a:extLst>
+              <a:ext uri="{FF2B5EF4-FFF2-40B4-BE49-F238E27FC236}">
+                <a16:creationId xmlns:a16="http://schemas.microsoft.com/office/drawing/2014/main" id="{5D65D36F-9FDE-4A8B-98C7-7635AC7BD167}"/>
+              </a:ext>
+            </a:extLst>
+          </p:cNvPr>
+          <p:cNvSpPr txBox="1"/>
+          <p:nvPr/>
+        </p:nvSpPr>
+        <p:spPr>
+          <a:xfrm>
+            <a:off x="1925273" y="3002734"/>
+            <a:ext cx="327171" cy="300082"/>
+          </a:xfrm>
+          <a:prstGeom prst="rect">
+            <a:avLst/>
+          </a:prstGeom>
+          <a:noFill/>
+        </p:spPr>
+        <p:txBody>
+          <a:bodyPr wrap="square" rtlCol="0">
+            <a:spAutoFit/>
+          </a:bodyPr>
+          <a:lstStyle/>
+          <a:p>
+            <a:endParaRPr lang="zh-CN" altLang="en-US" sz="1350" dirty="0">
+              <a:solidFill>
+                <a:schemeClr val="accent1">
+                  <a:lumMod val="40000"/>
+                  <a:lumOff val="60000"/>
+                </a:schemeClr>
+              </a:solidFill>
+            </a:endParaRPr>
+          </a:p>
+        </p:txBody>
+      </p:sp>
+      <p:sp>
+        <p:nvSpPr>
+          <p:cNvPr id="30" name="文本框 29">
+            <a:extLst>
+              <a:ext uri="{FF2B5EF4-FFF2-40B4-BE49-F238E27FC236}">
+                <a16:creationId xmlns:a16="http://schemas.microsoft.com/office/drawing/2014/main" id="{01C5441B-1346-40DC-A5B7-F8622BE264F0}"/>
+              </a:ext>
+            </a:extLst>
+          </p:cNvPr>
+          <p:cNvSpPr txBox="1"/>
+          <p:nvPr/>
+        </p:nvSpPr>
+        <p:spPr>
+          <a:xfrm>
+            <a:off x="865897" y="2946610"/>
+            <a:ext cx="673310" cy="507831"/>
+          </a:xfrm>
+          <a:prstGeom prst="rect">
+            <a:avLst/>
+          </a:prstGeom>
+          <a:noFill/>
+        </p:spPr>
+        <p:txBody>
+          <a:bodyPr wrap="square" rtlCol="0">
+            <a:spAutoFit/>
+          </a:bodyPr>
+          <a:lstStyle/>
+          <a:p>
+            <a:r>
+              <a:rPr lang="zh-CN" altLang="en-US" sz="1350" dirty="0">
+                <a:solidFill>
+                  <a:schemeClr val="accent1">
+                    <a:lumMod val="40000"/>
+                    <a:lumOff val="60000"/>
+                  </a:schemeClr>
+                </a:solidFill>
+              </a:rPr>
+              <a:t>笔记本</a:t>
+            </a:r>
+          </a:p>
+        </p:txBody>
+      </p:sp>
+      <p:sp>
+        <p:nvSpPr>
+          <p:cNvPr id="32" name="文本框 31">
+            <a:extLst>
+              <a:ext uri="{FF2B5EF4-FFF2-40B4-BE49-F238E27FC236}">
+                <a16:creationId xmlns:a16="http://schemas.microsoft.com/office/drawing/2014/main" id="{27F1E09F-4E90-44A5-84EC-818E13F973E3}"/>
+              </a:ext>
+            </a:extLst>
+          </p:cNvPr>
+          <p:cNvSpPr txBox="1"/>
+          <p:nvPr/>
+        </p:nvSpPr>
+        <p:spPr>
+          <a:xfrm>
+            <a:off x="7462008" y="3057100"/>
+            <a:ext cx="673310" cy="300082"/>
+          </a:xfrm>
+          <a:prstGeom prst="rect">
+            <a:avLst/>
+          </a:prstGeom>
+          <a:noFill/>
+        </p:spPr>
+        <p:txBody>
+          <a:bodyPr wrap="square" rtlCol="0">
+            <a:spAutoFit/>
+          </a:bodyPr>
+          <a:lstStyle/>
+          <a:p>
+            <a:r>
+              <a:rPr lang="zh-CN" altLang="en-US" sz="1350" dirty="0">
+                <a:solidFill>
+                  <a:schemeClr val="accent1">
+                    <a:lumMod val="40000"/>
+                    <a:lumOff val="60000"/>
+                  </a:schemeClr>
+                </a:solidFill>
+              </a:rPr>
+              <a:t>台式</a:t>
+            </a:r>
+          </a:p>
+        </p:txBody>
+      </p:sp>
+      <p:sp>
+        <p:nvSpPr>
+          <p:cNvPr id="13" name="文本框 12">
+            <a:extLst>
+              <a:ext uri="{FF2B5EF4-FFF2-40B4-BE49-F238E27FC236}">
+                <a16:creationId xmlns:a16="http://schemas.microsoft.com/office/drawing/2014/main" id="{19146187-EE78-4EF1-BDF5-AA5548D4E9BE}"/>
+              </a:ext>
+            </a:extLst>
+          </p:cNvPr>
+          <p:cNvSpPr txBox="1"/>
+          <p:nvPr/>
+        </p:nvSpPr>
+        <p:spPr>
+          <a:xfrm>
+            <a:off x="2776711" y="3910900"/>
+            <a:ext cx="1195431" cy="300082"/>
+          </a:xfrm>
+          <a:prstGeom prst="rect">
+            <a:avLst/>
+          </a:prstGeom>
+          <a:noFill/>
+        </p:spPr>
+        <p:txBody>
+          <a:bodyPr wrap="square" rtlCol="0">
+            <a:spAutoFit/>
+          </a:bodyPr>
+          <a:lstStyle/>
+          <a:p>
+            <a:r>
+              <a:rPr lang="en-US" altLang="zh-CN" sz="1350" dirty="0">
+                <a:solidFill>
+                  <a:schemeClr val="accent1">
+                    <a:lumMod val="40000"/>
+                    <a:lumOff val="60000"/>
+                  </a:schemeClr>
+                </a:solidFill>
+              </a:rPr>
+              <a:t>192.168.1.21</a:t>
+            </a:r>
+            <a:endParaRPr lang="zh-CN" altLang="en-US" sz="1350" dirty="0">
+              <a:solidFill>
+                <a:schemeClr val="accent1">
+                  <a:lumMod val="40000"/>
+                  <a:lumOff val="60000"/>
+                </a:schemeClr>
+              </a:solidFill>
+            </a:endParaRPr>
+          </a:p>
+        </p:txBody>
+      </p:sp>
+      <p:sp>
+        <p:nvSpPr>
+          <p:cNvPr id="17" name="文本框 16">
+            <a:extLst>
+              <a:ext uri="{FF2B5EF4-FFF2-40B4-BE49-F238E27FC236}">
+                <a16:creationId xmlns:a16="http://schemas.microsoft.com/office/drawing/2014/main" id="{8DDCF94B-0AB5-41AB-9D58-C821ABA6BD68}"/>
+              </a:ext>
+            </a:extLst>
+          </p:cNvPr>
+          <p:cNvSpPr txBox="1"/>
+          <p:nvPr/>
+        </p:nvSpPr>
+        <p:spPr>
+          <a:xfrm>
+            <a:off x="5121572" y="3913579"/>
+            <a:ext cx="1195431" cy="300082"/>
+          </a:xfrm>
+          <a:prstGeom prst="rect">
+            <a:avLst/>
+          </a:prstGeom>
+          <a:noFill/>
+        </p:spPr>
+        <p:txBody>
+          <a:bodyPr wrap="square" rtlCol="0">
+            <a:spAutoFit/>
+          </a:bodyPr>
+          <a:lstStyle/>
+          <a:p>
+            <a:r>
+              <a:rPr lang="en-US" altLang="zh-CN" sz="1350" dirty="0">
+                <a:solidFill>
+                  <a:schemeClr val="accent1">
+                    <a:lumMod val="40000"/>
+                    <a:lumOff val="60000"/>
+                  </a:schemeClr>
+                </a:solidFill>
+              </a:rPr>
+              <a:t>192.168.1.22</a:t>
+            </a:r>
+            <a:endParaRPr lang="zh-CN" altLang="en-US" sz="1350" dirty="0">
+              <a:solidFill>
+                <a:schemeClr val="accent1">
+                  <a:lumMod val="40000"/>
+                  <a:lumOff val="60000"/>
+                </a:schemeClr>
+              </a:solidFill>
+            </a:endParaRPr>
+          </a:p>
+        </p:txBody>
+      </p:sp>
+      <p:sp>
+        <p:nvSpPr>
+          <p:cNvPr id="22" name="矩形 21">
+            <a:extLst>
+              <a:ext uri="{FF2B5EF4-FFF2-40B4-BE49-F238E27FC236}">
+                <a16:creationId xmlns:a16="http://schemas.microsoft.com/office/drawing/2014/main" id="{7BDAA7C7-2A2E-4D45-9253-2391000C81F6}"/>
+              </a:ext>
+            </a:extLst>
+          </p:cNvPr>
+          <p:cNvSpPr/>
+          <p:nvPr/>
+        </p:nvSpPr>
+        <p:spPr>
+          <a:xfrm>
+            <a:off x="2258553" y="4095643"/>
+            <a:ext cx="231156" cy="334028"/>
+          </a:xfrm>
+          <a:prstGeom prst="rect">
+            <a:avLst/>
+          </a:prstGeom>
+        </p:spPr>
+        <p:style>
+          <a:lnRef idx="3">
+            <a:schemeClr val="lt1"/>
+          </a:lnRef>
+          <a:fillRef idx="1">
+            <a:schemeClr val="accent3"/>
+          </a:fillRef>
+          <a:effectRef idx="1">
+            <a:schemeClr val="accent3"/>
+          </a:effectRef>
+          <a:fontRef idx="minor">
+            <a:schemeClr val="lt1"/>
+          </a:fontRef>
+        </p:style>
+        <p:txBody>
+          <a:bodyPr rtlCol="0" anchor="ctr"/>
+          <a:lstStyle/>
+          <a:p>
+            <a:pPr algn="ctr"/>
+            <a:endParaRPr lang="zh-CN" altLang="en-US" sz="1350">
+              <a:solidFill>
+                <a:schemeClr val="accent1">
+                  <a:lumMod val="40000"/>
+                  <a:lumOff val="60000"/>
+                </a:schemeClr>
+              </a:solidFill>
+            </a:endParaRPr>
+          </a:p>
+        </p:txBody>
+      </p:sp>
+      <p:sp>
+        <p:nvSpPr>
+          <p:cNvPr id="24" name="矩形 23">
+            <a:extLst>
+              <a:ext uri="{FF2B5EF4-FFF2-40B4-BE49-F238E27FC236}">
+                <a16:creationId xmlns:a16="http://schemas.microsoft.com/office/drawing/2014/main" id="{BF126198-072A-4EFE-A3A7-876FEF483119}"/>
+              </a:ext>
+            </a:extLst>
+          </p:cNvPr>
+          <p:cNvSpPr/>
+          <p:nvPr/>
+        </p:nvSpPr>
+        <p:spPr>
+          <a:xfrm>
+            <a:off x="6337148" y="2454496"/>
+            <a:ext cx="231156" cy="334028"/>
+          </a:xfrm>
+          <a:prstGeom prst="rect">
+            <a:avLst/>
+          </a:prstGeom>
+        </p:spPr>
+        <p:style>
+          <a:lnRef idx="3">
+            <a:schemeClr val="lt1"/>
+          </a:lnRef>
+          <a:fillRef idx="1">
+            <a:schemeClr val="accent3"/>
+          </a:fillRef>
+          <a:effectRef idx="1">
+            <a:schemeClr val="accent3"/>
+          </a:effectRef>
+          <a:fontRef idx="minor">
+            <a:schemeClr val="lt1"/>
+          </a:fontRef>
+        </p:style>
+        <p:txBody>
+          <a:bodyPr rtlCol="0" anchor="ctr"/>
+          <a:lstStyle/>
+          <a:p>
+            <a:pPr algn="ctr"/>
+            <a:endParaRPr lang="zh-CN" altLang="en-US" sz="1350">
+              <a:solidFill>
+                <a:schemeClr val="accent1">
+                  <a:lumMod val="40000"/>
+                  <a:lumOff val="60000"/>
+                </a:schemeClr>
+              </a:solidFill>
+            </a:endParaRPr>
+          </a:p>
+        </p:txBody>
+      </p:sp>
+      <p:sp>
+        <p:nvSpPr>
+          <p:cNvPr id="28" name="矩形 27">
+            <a:extLst>
+              <a:ext uri="{FF2B5EF4-FFF2-40B4-BE49-F238E27FC236}">
+                <a16:creationId xmlns:a16="http://schemas.microsoft.com/office/drawing/2014/main" id="{A1A9E17B-3FE9-4F4C-AD60-CDF67BD6926B}"/>
+              </a:ext>
+            </a:extLst>
+          </p:cNvPr>
+          <p:cNvSpPr/>
+          <p:nvPr/>
+        </p:nvSpPr>
+        <p:spPr>
+          <a:xfrm>
+            <a:off x="6346537" y="4052284"/>
+            <a:ext cx="231156" cy="334028"/>
+          </a:xfrm>
+          <a:prstGeom prst="rect">
+            <a:avLst/>
+          </a:prstGeom>
+        </p:spPr>
+        <p:style>
+          <a:lnRef idx="3">
+            <a:schemeClr val="lt1"/>
+          </a:lnRef>
+          <a:fillRef idx="1">
+            <a:schemeClr val="accent3"/>
+          </a:fillRef>
+          <a:effectRef idx="1">
+            <a:schemeClr val="accent3"/>
+          </a:effectRef>
+          <a:fontRef idx="minor">
+            <a:schemeClr val="lt1"/>
+          </a:fontRef>
+        </p:style>
+        <p:txBody>
+          <a:bodyPr rtlCol="0" anchor="ctr"/>
+          <a:lstStyle/>
+          <a:p>
+            <a:pPr algn="ctr"/>
+            <a:endParaRPr lang="zh-CN" altLang="en-US" sz="1350">
+              <a:solidFill>
+                <a:schemeClr val="accent1">
+                  <a:lumMod val="40000"/>
+                  <a:lumOff val="60000"/>
+                </a:schemeClr>
+              </a:solidFill>
+            </a:endParaRPr>
+          </a:p>
+        </p:txBody>
+      </p:sp>
+      <p:sp>
+        <p:nvSpPr>
+          <p:cNvPr id="3" name="文本框 2">
+            <a:extLst>
+              <a:ext uri="{FF2B5EF4-FFF2-40B4-BE49-F238E27FC236}">
+                <a16:creationId xmlns:a16="http://schemas.microsoft.com/office/drawing/2014/main" id="{81EAC0AB-B220-4FA7-B013-87A646817A0A}"/>
+              </a:ext>
+            </a:extLst>
+          </p:cNvPr>
+          <p:cNvSpPr txBox="1"/>
+          <p:nvPr/>
+        </p:nvSpPr>
+        <p:spPr>
+          <a:xfrm>
+            <a:off x="6354801" y="1477042"/>
+            <a:ext cx="1472634" cy="300082"/>
+          </a:xfrm>
+          <a:prstGeom prst="rect">
+            <a:avLst/>
+          </a:prstGeom>
+          <a:noFill/>
+        </p:spPr>
+        <p:txBody>
+          <a:bodyPr wrap="square" rtlCol="0">
+            <a:spAutoFit/>
+          </a:bodyPr>
+          <a:lstStyle/>
+          <a:p>
+            <a:r>
+              <a:rPr lang="zh-CN" altLang="en-US" sz="1350" dirty="0">
+                <a:solidFill>
+                  <a:schemeClr val="accent1">
+                    <a:lumMod val="40000"/>
+                    <a:lumOff val="60000"/>
+                  </a:schemeClr>
+                </a:solidFill>
+              </a:rPr>
+              <a:t>可上网</a:t>
+            </a:r>
+          </a:p>
+        </p:txBody>
+      </p:sp>
+      <p:sp>
+        <p:nvSpPr>
+          <p:cNvPr id="4" name="箭头: 下 3">
+            <a:extLst>
+              <a:ext uri="{FF2B5EF4-FFF2-40B4-BE49-F238E27FC236}">
+                <a16:creationId xmlns:a16="http://schemas.microsoft.com/office/drawing/2014/main" id="{79EFAB61-E538-4A6D-B986-43CC4BD39CA1}"/>
+              </a:ext>
+            </a:extLst>
+          </p:cNvPr>
+          <p:cNvSpPr/>
+          <p:nvPr/>
+        </p:nvSpPr>
+        <p:spPr>
+          <a:xfrm>
+            <a:off x="6666789" y="1832488"/>
+            <a:ext cx="147532" cy="259456"/>
+          </a:xfrm>
+          <a:prstGeom prst="downArrow">
+            <a:avLst/>
+          </a:prstGeom>
+        </p:spPr>
+        <p:style>
+          <a:lnRef idx="2">
+            <a:schemeClr val="accent1">
+              <a:shade val="50000"/>
+            </a:schemeClr>
+          </a:lnRef>
+          <a:fillRef idx="1">
+            <a:schemeClr val="accent1"/>
+          </a:fillRef>
+          <a:effectRef idx="0">
+            <a:schemeClr val="accent1"/>
+          </a:effectRef>
+          <a:fontRef idx="minor">
+            <a:schemeClr val="lt1"/>
+          </a:fontRef>
+        </p:style>
+        <p:txBody>
+          <a:bodyPr rtlCol="0" anchor="ctr"/>
+          <a:lstStyle/>
+          <a:p>
+            <a:pPr algn="ctr"/>
+            <a:endParaRPr lang="zh-CN" altLang="en-US" sz="1350">
+              <a:solidFill>
+                <a:schemeClr val="accent1">
+                  <a:lumMod val="40000"/>
+                  <a:lumOff val="60000"/>
+                </a:schemeClr>
+              </a:solidFill>
+            </a:endParaRPr>
+          </a:p>
+        </p:txBody>
+      </p:sp>
+      <p:sp>
+        <p:nvSpPr>
+          <p:cNvPr id="7" name="标题 1">
+            <a:extLst>
+              <a:ext uri="{FF2B5EF4-FFF2-40B4-BE49-F238E27FC236}">
+                <a16:creationId xmlns:a16="http://schemas.microsoft.com/office/drawing/2014/main" id="{9E9CE235-BA50-47F5-9A87-46C0E81685E9}"/>
+              </a:ext>
+            </a:extLst>
+          </p:cNvPr>
+          <p:cNvSpPr txBox="1">
+            <a:spLocks/>
+          </p:cNvSpPr>
+          <p:nvPr/>
+        </p:nvSpPr>
+        <p:spPr>
+          <a:xfrm>
+            <a:off x="474269" y="4825618"/>
+            <a:ext cx="7886700" cy="755309"/>
+          </a:xfrm>
+          <a:prstGeom prst="rect">
+            <a:avLst/>
+          </a:prstGeom>
+        </p:spPr>
+        <p:txBody>
+          <a:bodyPr vert="horz" lIns="68580" tIns="34290" rIns="68580" bIns="34290" rtlCol="0" anchor="ctr">
+            <a:normAutofit/>
+          </a:bodyPr>
+          <a:lstStyle>
+            <a:lvl1pPr algn="l" defTabSz="914400" rtl="0" eaLnBrk="1" latinLnBrk="0" hangingPunct="1">
+              <a:lnSpc>
+                <a:spcPct val="90000"/>
+              </a:lnSpc>
+              <a:spcBef>
+                <a:spcPct val="0"/>
+              </a:spcBef>
+              <a:buNone/>
+              <a:defRPr sz="4400" kern="1200">
+                <a:solidFill>
+                  <a:schemeClr val="tx1"/>
+                </a:solidFill>
+                <a:latin typeface="+mj-lt"/>
+                <a:ea typeface="+mj-ea"/>
+                <a:cs typeface="+mj-cs"/>
+              </a:defRPr>
+            </a:lvl1pPr>
+          </a:lstStyle>
+          <a:p>
+            <a:r>
+              <a:rPr lang="zh-CN" altLang="en-US" sz="1400" b="1" dirty="0">
+                <a:solidFill>
+                  <a:schemeClr val="accent1">
+                    <a:lumMod val="40000"/>
+                    <a:lumOff val="60000"/>
+                  </a:schemeClr>
+                </a:solidFill>
+                <a:effectLst>
+                  <a:outerShdw blurRad="38100" dist="19050" dir="2700000" algn="tl" rotWithShape="0">
+                    <a:schemeClr val="dk1">
+                      <a:alpha val="40000"/>
+                    </a:schemeClr>
+                  </a:outerShdw>
+                </a:effectLst>
+              </a:rPr>
+              <a:t>台式电脑先接上无线网卡，先设置虚拟</a:t>
+            </a:r>
+            <a:r>
+              <a:rPr lang="en-US" altLang="zh-CN" sz="1400" b="1" dirty="0" err="1">
+                <a:solidFill>
+                  <a:schemeClr val="accent1">
+                    <a:lumMod val="40000"/>
+                    <a:lumOff val="60000"/>
+                  </a:schemeClr>
+                </a:solidFill>
+                <a:effectLst>
+                  <a:outerShdw blurRad="38100" dist="19050" dir="2700000" algn="tl" rotWithShape="0">
+                    <a:schemeClr val="dk1">
+                      <a:alpha val="40000"/>
+                    </a:schemeClr>
+                  </a:outerShdw>
+                </a:effectLst>
+              </a:rPr>
+              <a:t>WiFi</a:t>
+            </a:r>
+            <a:r>
+              <a:rPr lang="zh-CN" altLang="en-US" sz="1400" b="1" dirty="0">
+                <a:solidFill>
+                  <a:schemeClr val="accent1">
+                    <a:lumMod val="40000"/>
+                    <a:lumOff val="60000"/>
+                  </a:schemeClr>
+                </a:solidFill>
+                <a:effectLst>
+                  <a:outerShdw blurRad="38100" dist="19050" dir="2700000" algn="tl" rotWithShape="0">
+                    <a:schemeClr val="dk1">
+                      <a:alpha val="40000"/>
+                    </a:schemeClr>
+                  </a:outerShdw>
+                </a:effectLst>
+              </a:rPr>
+              <a:t>热点，然后设置本地连接的网络共享，再用笔记本连接</a:t>
+            </a:r>
+            <a:r>
+              <a:rPr lang="en-US" altLang="zh-CN" sz="1400" b="1" dirty="0" err="1">
+                <a:solidFill>
+                  <a:schemeClr val="accent1">
+                    <a:lumMod val="40000"/>
+                    <a:lumOff val="60000"/>
+                  </a:schemeClr>
+                </a:solidFill>
+                <a:effectLst>
+                  <a:outerShdw blurRad="38100" dist="19050" dir="2700000" algn="tl" rotWithShape="0">
+                    <a:schemeClr val="dk1">
+                      <a:alpha val="40000"/>
+                    </a:schemeClr>
+                  </a:outerShdw>
+                </a:effectLst>
+              </a:rPr>
+              <a:t>WiFi</a:t>
+            </a:r>
+            <a:r>
+              <a:rPr lang="zh-CN" altLang="en-US" sz="1400" b="1" dirty="0">
+                <a:solidFill>
+                  <a:schemeClr val="accent1">
+                    <a:lumMod val="40000"/>
+                    <a:lumOff val="60000"/>
+                  </a:schemeClr>
+                </a:solidFill>
+                <a:effectLst>
+                  <a:outerShdw blurRad="38100" dist="19050" dir="2700000" algn="tl" rotWithShape="0">
+                    <a:schemeClr val="dk1">
+                      <a:alpha val="40000"/>
+                    </a:schemeClr>
+                  </a:outerShdw>
+                </a:effectLst>
+              </a:rPr>
+              <a:t>，笔记本就可以上网了。（不过天翼校园网 有检测，你共享网络会检测，然后会自动退出天翼登录）</a:t>
+            </a:r>
+          </a:p>
+        </p:txBody>
+      </p:sp>
+      <p:pic>
+        <p:nvPicPr>
+          <p:cNvPr id="15" name="图片 14">
+            <a:extLst>
+              <a:ext uri="{FF2B5EF4-FFF2-40B4-BE49-F238E27FC236}">
+                <a16:creationId xmlns:a16="http://schemas.microsoft.com/office/drawing/2014/main" id="{C87B5B79-6498-41FD-9765-8F0819E70E33}"/>
+              </a:ext>
+            </a:extLst>
+          </p:cNvPr>
+          <p:cNvPicPr>
+            <a:picLocks noChangeAspect="1"/>
+          </p:cNvPicPr>
+          <p:nvPr/>
+        </p:nvPicPr>
+        <p:blipFill>
+          <a:blip r:embed="rId3" cstate="print">
+            <a:duotone>
+              <a:schemeClr val="bg2">
+                <a:shade val="45000"/>
+                <a:satMod val="135000"/>
+              </a:schemeClr>
+              <a:prstClr val="white"/>
+            </a:duotone>
+            <a:extLst>
+              <a:ext uri="{28A0092B-C50C-407E-A947-70E740481C1C}">
+                <a14:useLocalDpi xmlns:a14="http://schemas.microsoft.com/office/drawing/2010/main" val="0"/>
+              </a:ext>
+            </a:extLst>
+          </a:blip>
+          <a:stretch>
+            <a:fillRect/>
+          </a:stretch>
+        </p:blipFill>
+        <p:spPr>
+          <a:xfrm>
+            <a:off x="4043967" y="3433761"/>
+            <a:ext cx="747303" cy="747303"/>
+          </a:xfrm>
+          <a:prstGeom prst="rect">
+            <a:avLst/>
+          </a:prstGeom>
+        </p:spPr>
+      </p:pic>
+      <p:cxnSp>
+        <p:nvCxnSpPr>
+          <p:cNvPr id="9" name="直接连接符 8">
+            <a:extLst>
+              <a:ext uri="{FF2B5EF4-FFF2-40B4-BE49-F238E27FC236}">
+                <a16:creationId xmlns:a16="http://schemas.microsoft.com/office/drawing/2014/main" id="{4F8A0F10-D6DB-48E2-82D8-727F0BE709BB}"/>
+              </a:ext>
+            </a:extLst>
+          </p:cNvPr>
+          <p:cNvCxnSpPr>
+            <a:cxnSpLocks/>
+          </p:cNvCxnSpPr>
+          <p:nvPr/>
+        </p:nvCxnSpPr>
+        <p:spPr>
+          <a:xfrm flipH="1" flipV="1">
+            <a:off x="6506461" y="2615639"/>
+            <a:ext cx="2067088" cy="5871"/>
+          </a:xfrm>
+          <a:prstGeom prst="line">
+            <a:avLst/>
+          </a:prstGeom>
+        </p:spPr>
+        <p:style>
+          <a:lnRef idx="1">
+            <a:schemeClr val="dk1"/>
+          </a:lnRef>
+          <a:fillRef idx="0">
+            <a:schemeClr val="dk1"/>
+          </a:fillRef>
+          <a:effectRef idx="0">
+            <a:schemeClr val="dk1"/>
+          </a:effectRef>
+          <a:fontRef idx="minor">
+            <a:schemeClr val="tx1"/>
+          </a:fontRef>
+        </p:style>
+      </p:cxnSp>
+      <p:sp>
+        <p:nvSpPr>
+          <p:cNvPr id="16" name="文本框 15">
+            <a:extLst>
+              <a:ext uri="{FF2B5EF4-FFF2-40B4-BE49-F238E27FC236}">
+                <a16:creationId xmlns:a16="http://schemas.microsoft.com/office/drawing/2014/main" id="{054D1322-8703-462C-9FCE-8BD8096CC6DB}"/>
+              </a:ext>
+            </a:extLst>
+          </p:cNvPr>
+          <p:cNvSpPr txBox="1"/>
+          <p:nvPr/>
+        </p:nvSpPr>
+        <p:spPr>
+          <a:xfrm>
+            <a:off x="7476506" y="2138216"/>
+            <a:ext cx="1472634" cy="369332"/>
+          </a:xfrm>
+          <a:prstGeom prst="rect">
+            <a:avLst/>
+          </a:prstGeom>
+          <a:noFill/>
+        </p:spPr>
+        <p:txBody>
+          <a:bodyPr wrap="square" rtlCol="0">
+            <a:spAutoFit/>
+          </a:bodyPr>
+          <a:lstStyle/>
+          <a:p>
+            <a:r>
+              <a:rPr lang="zh-CN" altLang="en-US" dirty="0">
+                <a:solidFill>
+                  <a:schemeClr val="accent1">
+                    <a:lumMod val="60000"/>
+                    <a:lumOff val="40000"/>
+                  </a:schemeClr>
+                </a:solidFill>
+              </a:rPr>
+              <a:t>接入互联网</a:t>
+            </a:r>
+          </a:p>
+        </p:txBody>
+      </p:sp>
+    </p:spTree>
+    <p:extLst>
+      <p:ext uri="{BB962C8B-B14F-4D97-AF65-F5344CB8AC3E}">
+        <p14:creationId xmlns:p14="http://schemas.microsoft.com/office/powerpoint/2010/main" val="2547158542"/>
+      </p:ext>
+    </p:extLst>
+  </p:cSld>
+  <p:clrMapOvr>
+    <a:masterClrMapping/>
+  </p:clrMapOvr>
+</p:sld>
+</file>
+
+<file path=ppt/slides/slide22.xml><?xml version="1.0" encoding="utf-8"?>
+<p:sld xmlns:a="http://schemas.openxmlformats.org/drawingml/2006/main" xmlns:r="http://schemas.openxmlformats.org/officeDocument/2006/relationships" xmlns:p="http://schemas.openxmlformats.org/presentationml/2006/main">
+  <p:cSld>
+    <p:spTree>
+      <p:nvGrpSpPr>
+        <p:cNvPr id="1" name=""/>
+        <p:cNvGrpSpPr/>
+        <p:nvPr/>
+      </p:nvGrpSpPr>
+      <p:grpSpPr>
+        <a:xfrm>
+          <a:off x="0" y="0"/>
+          <a:ext cx="0" cy="0"/>
+          <a:chOff x="0" y="0"/>
+          <a:chExt cx="0" cy="0"/>
+        </a:xfrm>
+      </p:grpSpPr>
+      <p:pic>
+        <p:nvPicPr>
+          <p:cNvPr id="2" name="图片 1">
+            <a:extLst>
+              <a:ext uri="{FF2B5EF4-FFF2-40B4-BE49-F238E27FC236}">
+                <a16:creationId xmlns:a16="http://schemas.microsoft.com/office/drawing/2014/main" id="{7922F051-39B9-4172-9207-0FEA1F3A7B57}"/>
+              </a:ext>
+            </a:extLst>
+          </p:cNvPr>
+          <p:cNvPicPr/>
+          <p:nvPr/>
+        </p:nvPicPr>
+        <p:blipFill>
+          <a:blip r:embed="rId2"/>
+          <a:stretch>
+            <a:fillRect/>
+          </a:stretch>
+        </p:blipFill>
+        <p:spPr>
+          <a:xfrm>
+            <a:off x="0" y="0"/>
+            <a:ext cx="9144000" cy="6858000"/>
+          </a:xfrm>
+          <a:prstGeom prst="rect">
+            <a:avLst/>
+          </a:prstGeom>
+        </p:spPr>
+      </p:pic>
+      <p:pic>
+        <p:nvPicPr>
+          <p:cNvPr id="18" name="内容占位符 17">
+            <a:extLst>
+              <a:ext uri="{FF2B5EF4-FFF2-40B4-BE49-F238E27FC236}">
+                <a16:creationId xmlns:a16="http://schemas.microsoft.com/office/drawing/2014/main" id="{6F5AF0A2-E4A1-48C1-AC06-9297529D661A}"/>
+              </a:ext>
+            </a:extLst>
+          </p:cNvPr>
+          <p:cNvPicPr>
+            <a:picLocks noGrp="1" noChangeAspect="1"/>
+          </p:cNvPicPr>
+          <p:nvPr>
+            <p:ph idx="1"/>
+          </p:nvPr>
+        </p:nvPicPr>
+        <p:blipFill>
+          <a:blip r:embed="rId3">
+            <a:extLst>
+              <a:ext uri="{28A0092B-C50C-407E-A947-70E740481C1C}">
+                <a14:useLocalDpi xmlns:a14="http://schemas.microsoft.com/office/drawing/2010/main" val="0"/>
+              </a:ext>
+            </a:extLst>
+          </a:blip>
+          <a:stretch>
+            <a:fillRect/>
+          </a:stretch>
+        </p:blipFill>
+        <p:spPr>
+          <a:xfrm>
+            <a:off x="5345962" y="2239566"/>
+            <a:ext cx="2928467" cy="3263504"/>
+          </a:xfrm>
+        </p:spPr>
+      </p:pic>
+      <p:sp>
+        <p:nvSpPr>
+          <p:cNvPr id="11" name="标题 1">
+            <a:extLst>
+              <a:ext uri="{FF2B5EF4-FFF2-40B4-BE49-F238E27FC236}">
+                <a16:creationId xmlns:a16="http://schemas.microsoft.com/office/drawing/2014/main" id="{2C9BF308-A158-4B1C-9C22-4E295A76E6A6}"/>
+              </a:ext>
+            </a:extLst>
+          </p:cNvPr>
+          <p:cNvSpPr txBox="1">
+            <a:spLocks/>
+          </p:cNvSpPr>
+          <p:nvPr/>
+        </p:nvSpPr>
+        <p:spPr>
+          <a:xfrm>
+            <a:off x="742950" y="1245394"/>
+            <a:ext cx="7886700" cy="994172"/>
+          </a:xfrm>
+          <a:prstGeom prst="rect">
+            <a:avLst/>
+          </a:prstGeom>
+        </p:spPr>
+        <p:txBody>
+          <a:bodyPr vert="horz" lIns="68580" tIns="34290" rIns="68580" bIns="34290" rtlCol="0" anchor="ctr">
+            <a:normAutofit/>
+          </a:bodyPr>
+          <a:lstStyle>
+            <a:lvl1pPr algn="l" defTabSz="914400" rtl="0" eaLnBrk="1" latinLnBrk="0" hangingPunct="1">
+              <a:lnSpc>
+                <a:spcPct val="90000"/>
+              </a:lnSpc>
+              <a:spcBef>
+                <a:spcPct val="0"/>
+              </a:spcBef>
+              <a:buNone/>
+              <a:defRPr sz="4400" kern="1200">
+                <a:solidFill>
+                  <a:schemeClr val="tx1"/>
+                </a:solidFill>
+                <a:latin typeface="+mj-lt"/>
+                <a:ea typeface="+mj-ea"/>
+                <a:cs typeface="+mj-cs"/>
+              </a:defRPr>
+            </a:lvl1pPr>
+          </a:lstStyle>
+          <a:p>
+            <a:r>
+              <a:rPr lang="zh-CN" altLang="en-US" sz="1200" b="1" dirty="0">
+                <a:solidFill>
+                  <a:schemeClr val="accent1">
+                    <a:lumMod val="40000"/>
+                    <a:lumOff val="60000"/>
+                  </a:schemeClr>
+                </a:solidFill>
+                <a:effectLst>
+                  <a:outerShdw blurRad="38100" dist="19050" dir="2700000" algn="tl" rotWithShape="0">
+                    <a:schemeClr val="dk1">
+                      <a:alpha val="40000"/>
+                    </a:schemeClr>
+                  </a:outerShdw>
+                </a:effectLst>
+              </a:rPr>
+              <a:t>台式电脑先接上无线网卡，先设置虚拟</a:t>
+            </a:r>
+            <a:r>
+              <a:rPr lang="en-US" altLang="zh-CN" sz="1200" b="1" dirty="0" err="1">
+                <a:solidFill>
+                  <a:schemeClr val="accent1">
+                    <a:lumMod val="40000"/>
+                    <a:lumOff val="60000"/>
+                  </a:schemeClr>
+                </a:solidFill>
+                <a:effectLst>
+                  <a:outerShdw blurRad="38100" dist="19050" dir="2700000" algn="tl" rotWithShape="0">
+                    <a:schemeClr val="dk1">
+                      <a:alpha val="40000"/>
+                    </a:schemeClr>
+                  </a:outerShdw>
+                </a:effectLst>
+              </a:rPr>
+              <a:t>WiFi</a:t>
+            </a:r>
+            <a:r>
+              <a:rPr lang="zh-CN" altLang="en-US" sz="1200" b="1" dirty="0">
+                <a:solidFill>
+                  <a:schemeClr val="accent1">
+                    <a:lumMod val="40000"/>
+                    <a:lumOff val="60000"/>
+                  </a:schemeClr>
+                </a:solidFill>
+                <a:effectLst>
+                  <a:outerShdw blurRad="38100" dist="19050" dir="2700000" algn="tl" rotWithShape="0">
+                    <a:schemeClr val="dk1">
+                      <a:alpha val="40000"/>
+                    </a:schemeClr>
+                  </a:outerShdw>
+                </a:effectLst>
+              </a:rPr>
+              <a:t>热点，然后设置本地连接的网络共享，再用笔记本连接</a:t>
+            </a:r>
+            <a:r>
+              <a:rPr lang="en-US" altLang="zh-CN" sz="1200" b="1" dirty="0" err="1">
+                <a:solidFill>
+                  <a:schemeClr val="accent1">
+                    <a:lumMod val="40000"/>
+                    <a:lumOff val="60000"/>
+                  </a:schemeClr>
+                </a:solidFill>
+                <a:effectLst>
+                  <a:outerShdw blurRad="38100" dist="19050" dir="2700000" algn="tl" rotWithShape="0">
+                    <a:schemeClr val="dk1">
+                      <a:alpha val="40000"/>
+                    </a:schemeClr>
+                  </a:outerShdw>
+                </a:effectLst>
+              </a:rPr>
+              <a:t>WiFi</a:t>
+            </a:r>
+            <a:r>
+              <a:rPr lang="zh-CN" altLang="en-US" sz="1200" b="1" dirty="0">
+                <a:solidFill>
+                  <a:schemeClr val="accent1">
+                    <a:lumMod val="40000"/>
+                    <a:lumOff val="60000"/>
+                  </a:schemeClr>
+                </a:solidFill>
+                <a:effectLst>
+                  <a:outerShdw blurRad="38100" dist="19050" dir="2700000" algn="tl" rotWithShape="0">
+                    <a:schemeClr val="dk1">
+                      <a:alpha val="40000"/>
+                    </a:schemeClr>
+                  </a:outerShdw>
+                </a:effectLst>
+              </a:rPr>
+              <a:t>，笔记本就可以上网了。（不过天翼校园网 有检测，你共享网络会检测，然后会自动退出天翼登录）</a:t>
+            </a:r>
+          </a:p>
+        </p:txBody>
+      </p:sp>
+      <p:pic>
+        <p:nvPicPr>
+          <p:cNvPr id="12" name="图片 11">
+            <a:extLst>
+              <a:ext uri="{FF2B5EF4-FFF2-40B4-BE49-F238E27FC236}">
+                <a16:creationId xmlns:a16="http://schemas.microsoft.com/office/drawing/2014/main" id="{9AA4BDE6-97F6-46EF-B908-7C5AEA42A000}"/>
+              </a:ext>
+            </a:extLst>
+          </p:cNvPr>
+          <p:cNvPicPr/>
+          <p:nvPr/>
+        </p:nvPicPr>
+        <p:blipFill>
+          <a:blip r:embed="rId4"/>
+          <a:stretch>
+            <a:fillRect/>
+          </a:stretch>
+        </p:blipFill>
+        <p:spPr>
+          <a:xfrm>
+            <a:off x="228600" y="2011022"/>
+            <a:ext cx="4901268" cy="1979046"/>
+          </a:xfrm>
+          <a:prstGeom prst="rect">
+            <a:avLst/>
+          </a:prstGeom>
+          <a:noFill/>
+          <a:ln>
+            <a:noFill/>
+          </a:ln>
+        </p:spPr>
+      </p:pic>
+      <p:pic>
+        <p:nvPicPr>
+          <p:cNvPr id="13" name="图片 12">
+            <a:extLst>
+              <a:ext uri="{FF2B5EF4-FFF2-40B4-BE49-F238E27FC236}">
+                <a16:creationId xmlns:a16="http://schemas.microsoft.com/office/drawing/2014/main" id="{F15270D9-E7D2-4EAE-809D-DBE20A9614B6}"/>
+              </a:ext>
+            </a:extLst>
+          </p:cNvPr>
+          <p:cNvPicPr/>
+          <p:nvPr/>
+        </p:nvPicPr>
+        <p:blipFill>
+          <a:blip r:embed="rId5"/>
+          <a:stretch>
+            <a:fillRect/>
+          </a:stretch>
+        </p:blipFill>
+        <p:spPr>
+          <a:xfrm>
+            <a:off x="742951" y="4066098"/>
+            <a:ext cx="3733442" cy="1379198"/>
+          </a:xfrm>
+          <a:prstGeom prst="rect">
+            <a:avLst/>
+          </a:prstGeom>
+          <a:noFill/>
+          <a:ln>
+            <a:noFill/>
+          </a:ln>
+        </p:spPr>
+      </p:pic>
+    </p:spTree>
+    <p:extLst>
+      <p:ext uri="{BB962C8B-B14F-4D97-AF65-F5344CB8AC3E}">
+        <p14:creationId xmlns:p14="http://schemas.microsoft.com/office/powerpoint/2010/main" val="3239327261"/>
+      </p:ext>
+    </p:extLst>
+  </p:cSld>
+  <p:clrMapOvr>
+    <a:masterClrMapping/>
+  </p:clrMapOvr>
+</p:sld>
+</file>
+
+<file path=ppt/slides/slide23.xml><?xml version="1.0" encoding="utf-8"?>
+<p:sld xmlns:a="http://schemas.openxmlformats.org/drawingml/2006/main" xmlns:r="http://schemas.openxmlformats.org/officeDocument/2006/relationships" xmlns:p="http://schemas.openxmlformats.org/presentationml/2006/main">
+  <p:cSld>
+    <p:spTree>
+      <p:nvGrpSpPr>
+        <p:cNvPr id="1" name=""/>
+        <p:cNvGrpSpPr/>
+        <p:nvPr/>
+      </p:nvGrpSpPr>
+      <p:grpSpPr>
+        <a:xfrm>
+          <a:off x="0" y="0"/>
+          <a:ext cx="0" cy="0"/>
+          <a:chOff x="0" y="0"/>
+          <a:chExt cx="0" cy="0"/>
+        </a:xfrm>
+      </p:grpSpPr>
+      <p:pic>
+        <p:nvPicPr>
+          <p:cNvPr id="4" name="图片 3">
+            <a:extLst>
+              <a:ext uri="{FF2B5EF4-FFF2-40B4-BE49-F238E27FC236}">
+                <a16:creationId xmlns:a16="http://schemas.microsoft.com/office/drawing/2014/main" id="{E515E98D-A47E-4067-B5A4-E6F8AA7AF8F7}"/>
+              </a:ext>
+            </a:extLst>
+          </p:cNvPr>
+          <p:cNvPicPr/>
+          <p:nvPr/>
+        </p:nvPicPr>
+        <p:blipFill>
+          <a:blip r:embed="rId2"/>
+          <a:stretch>
+            <a:fillRect/>
+          </a:stretch>
+        </p:blipFill>
+        <p:spPr>
+          <a:xfrm>
+            <a:off x="0" y="0"/>
+            <a:ext cx="9144000" cy="6858000"/>
+          </a:xfrm>
+          <a:prstGeom prst="rect">
+            <a:avLst/>
+          </a:prstGeom>
+        </p:spPr>
+      </p:pic>
+      <p:sp>
+        <p:nvSpPr>
+          <p:cNvPr id="6" name="文本框 5">
+            <a:extLst>
+              <a:ext uri="{FF2B5EF4-FFF2-40B4-BE49-F238E27FC236}">
+                <a16:creationId xmlns:a16="http://schemas.microsoft.com/office/drawing/2014/main" id="{508C8F11-3AC7-4D50-A3E3-F03C7A04E266}"/>
+              </a:ext>
+            </a:extLst>
+          </p:cNvPr>
+          <p:cNvSpPr txBox="1"/>
+          <p:nvPr/>
+        </p:nvSpPr>
+        <p:spPr>
+          <a:xfrm>
+            <a:off x="2753162" y="3013501"/>
+            <a:ext cx="3637676" cy="830997"/>
+          </a:xfrm>
+          <a:prstGeom prst="rect">
+            <a:avLst/>
+          </a:prstGeom>
+          <a:noFill/>
+        </p:spPr>
+        <p:txBody>
+          <a:bodyPr wrap="square" rtlCol="0">
+            <a:spAutoFit/>
+          </a:bodyPr>
+          <a:lstStyle/>
+          <a:p>
+            <a:pPr algn="ctr"/>
+            <a:r>
+              <a:rPr lang="zh-CN" altLang="en-US" sz="4800" dirty="0">
+                <a:solidFill>
+                  <a:schemeClr val="accent1">
+                    <a:lumMod val="60000"/>
+                    <a:lumOff val="40000"/>
+                  </a:schemeClr>
+                </a:solidFill>
+              </a:rPr>
+              <a:t>谢谢大家</a:t>
+            </a:r>
+          </a:p>
+        </p:txBody>
+      </p:sp>
+    </p:spTree>
+    <p:extLst>
+      <p:ext uri="{BB962C8B-B14F-4D97-AF65-F5344CB8AC3E}">
+        <p14:creationId xmlns:p14="http://schemas.microsoft.com/office/powerpoint/2010/main" val="884902377"/>
       </p:ext>
     </p:extLst>
   </p:cSld>
@@ -7643,10 +9890,10 @@
       </p:grpSpPr>
       <p:pic>
         <p:nvPicPr>
-          <p:cNvPr id="7" name="图片 6">
-            <a:extLst>
-              <a:ext uri="{FF2B5EF4-FFF2-40B4-BE49-F238E27FC236}">
-                <a16:creationId xmlns:a16="http://schemas.microsoft.com/office/drawing/2014/main" id="{A7CDDFC0-ED93-497A-83FA-C26EE425179A}"/>
+          <p:cNvPr id="2" name="图片 1">
+            <a:extLst>
+              <a:ext uri="{FF2B5EF4-FFF2-40B4-BE49-F238E27FC236}">
+                <a16:creationId xmlns:a16="http://schemas.microsoft.com/office/drawing/2014/main" id="{7162DBC0-767C-430C-8811-5E64725E39FE}"/>
               </a:ext>
             </a:extLst>
           </p:cNvPr>
@@ -7662,7 +9909,7 @@
         <p:spPr>
           <a:xfrm>
             <a:off x="0" y="0"/>
-            <a:ext cx="12192000" cy="6858000"/>
+            <a:ext cx="9144000" cy="6858000"/>
           </a:xfrm>
           <a:prstGeom prst="rect">
             <a:avLst/>
@@ -7683,8 +9930,8 @@
         </p:nvSpPr>
         <p:spPr>
           <a:xfrm>
-            <a:off x="2242656" y="1825625"/>
-            <a:ext cx="1442907" cy="3031601"/>
+            <a:off x="1681993" y="2226469"/>
+            <a:ext cx="1082180" cy="2273701"/>
           </a:xfrm>
           <a:prstGeom prst="rect">
             <a:avLst/>
@@ -7711,7 +9958,7 @@
           <a:lstStyle/>
           <a:p>
             <a:pPr algn="ctr"/>
-            <a:endParaRPr lang="zh-CN" altLang="en-US">
+            <a:endParaRPr lang="zh-CN" altLang="en-US" sz="1350">
               <a:solidFill>
                 <a:schemeClr val="accent1">
                   <a:lumMod val="40000"/>
@@ -7736,8 +9983,8 @@
         </p:nvSpPr>
         <p:spPr>
           <a:xfrm>
-            <a:off x="8265954" y="1825625"/>
-            <a:ext cx="1442907" cy="3031601"/>
+            <a:off x="6199466" y="2226469"/>
+            <a:ext cx="1082180" cy="2273701"/>
           </a:xfrm>
           <a:prstGeom prst="rect">
             <a:avLst/>
@@ -7764,7 +10011,7 @@
           <a:lstStyle/>
           <a:p>
             <a:pPr algn="ctr"/>
-            <a:endParaRPr lang="zh-CN" altLang="en-US">
+            <a:endParaRPr lang="zh-CN" altLang="en-US" sz="1350">
               <a:solidFill>
                 <a:schemeClr val="accent1">
                   <a:lumMod val="40000"/>
@@ -7789,8 +10036,8 @@
         </p:nvCxnSpPr>
         <p:spPr>
           <a:xfrm>
-            <a:off x="3204594" y="2365695"/>
-            <a:ext cx="5301843" cy="0"/>
+            <a:off x="2403446" y="2631521"/>
+            <a:ext cx="3976382" cy="0"/>
           </a:xfrm>
           <a:prstGeom prst="line">
             <a:avLst/>
@@ -7827,8 +10074,8 @@
         </p:nvCxnSpPr>
         <p:spPr>
           <a:xfrm>
-            <a:off x="3204593" y="4545647"/>
-            <a:ext cx="5301843" cy="0"/>
+            <a:off x="2403445" y="4266485"/>
+            <a:ext cx="3976382" cy="0"/>
           </a:xfrm>
           <a:prstGeom prst="line">
             <a:avLst/>
@@ -7872,8 +10119,8 @@
         </p:nvSpPr>
         <p:spPr>
           <a:xfrm>
-            <a:off x="3685563" y="1928895"/>
-            <a:ext cx="1435008" cy="369332"/>
+            <a:off x="2764173" y="2303921"/>
+            <a:ext cx="1122423" cy="300082"/>
           </a:xfrm>
           <a:prstGeom prst="rect">
             <a:avLst/>
@@ -7887,7 +10134,7 @@
           <a:lstStyle/>
           <a:p>
             <a:r>
-              <a:rPr lang="en-US" altLang="zh-CN" dirty="0">
+              <a:rPr lang="en-US" altLang="zh-CN" sz="1350" dirty="0">
                 <a:solidFill>
                   <a:schemeClr val="accent1">
                     <a:lumMod val="40000"/>
@@ -7897,7 +10144,7 @@
               </a:rPr>
               <a:t>192.168.1.11</a:t>
             </a:r>
-            <a:endParaRPr lang="zh-CN" altLang="en-US" dirty="0">
+            <a:endParaRPr lang="zh-CN" altLang="en-US" sz="1350" dirty="0">
               <a:solidFill>
                 <a:schemeClr val="accent1">
                   <a:lumMod val="40000"/>
@@ -7922,8 +10169,8 @@
         </p:nvSpPr>
         <p:spPr>
           <a:xfrm>
-            <a:off x="3685563" y="4108847"/>
-            <a:ext cx="1435008" cy="369332"/>
+            <a:off x="2764173" y="3938885"/>
+            <a:ext cx="1122423" cy="300082"/>
           </a:xfrm>
           <a:prstGeom prst="rect">
             <a:avLst/>
@@ -7937,7 +10184,7 @@
           <a:lstStyle/>
           <a:p>
             <a:r>
-              <a:rPr lang="en-US" altLang="zh-CN" dirty="0">
+              <a:rPr lang="en-US" altLang="zh-CN" sz="1350" dirty="0">
                 <a:solidFill>
                   <a:schemeClr val="accent1">
                     <a:lumMod val="40000"/>
@@ -7947,7 +10194,7 @@
               </a:rPr>
               <a:t>192.168.1.11</a:t>
             </a:r>
-            <a:endParaRPr lang="zh-CN" altLang="en-US" dirty="0">
+            <a:endParaRPr lang="zh-CN" altLang="en-US" sz="1350" dirty="0">
               <a:solidFill>
                 <a:schemeClr val="accent1">
                   <a:lumMod val="40000"/>
@@ -7972,8 +10219,8 @@
         </p:nvSpPr>
         <p:spPr>
           <a:xfrm>
-            <a:off x="6828762" y="1910994"/>
-            <a:ext cx="1435008" cy="369332"/>
+            <a:off x="5121572" y="2290495"/>
+            <a:ext cx="1122423" cy="300082"/>
           </a:xfrm>
           <a:prstGeom prst="rect">
             <a:avLst/>
@@ -7987,7 +10234,7 @@
           <a:lstStyle/>
           <a:p>
             <a:r>
-              <a:rPr lang="en-US" altLang="zh-CN" dirty="0">
+              <a:rPr lang="en-US" altLang="zh-CN" sz="1350" dirty="0">
                 <a:solidFill>
                   <a:schemeClr val="accent1">
                     <a:lumMod val="40000"/>
@@ -7997,7 +10244,7 @@
               </a:rPr>
               <a:t>192.168.1.12</a:t>
             </a:r>
-            <a:endParaRPr lang="zh-CN" altLang="en-US" dirty="0">
+            <a:endParaRPr lang="zh-CN" altLang="en-US" sz="1350" dirty="0">
               <a:solidFill>
                 <a:schemeClr val="accent1">
                   <a:lumMod val="40000"/>
@@ -8022,8 +10269,8 @@
         </p:nvSpPr>
         <p:spPr>
           <a:xfrm>
-            <a:off x="6836661" y="4115094"/>
-            <a:ext cx="1435008" cy="369332"/>
+            <a:off x="5127496" y="3943570"/>
+            <a:ext cx="1122423" cy="300082"/>
           </a:xfrm>
           <a:prstGeom prst="rect">
             <a:avLst/>
@@ -8037,7 +10284,7 @@
           <a:lstStyle/>
           <a:p>
             <a:r>
-              <a:rPr lang="en-US" altLang="zh-CN" dirty="0">
+              <a:rPr lang="en-US" altLang="zh-CN" sz="1350" dirty="0">
                 <a:solidFill>
                   <a:schemeClr val="accent1">
                     <a:lumMod val="40000"/>
@@ -8047,7 +10294,7 @@
               </a:rPr>
               <a:t>192.168.1.12</a:t>
             </a:r>
-            <a:endParaRPr lang="zh-CN" altLang="en-US" dirty="0">
+            <a:endParaRPr lang="zh-CN" altLang="en-US" sz="1350" dirty="0">
               <a:solidFill>
                 <a:schemeClr val="accent1">
                   <a:lumMod val="40000"/>
@@ -8072,8 +10319,8 @@
         </p:nvSpPr>
         <p:spPr>
           <a:xfrm>
-            <a:off x="2567031" y="2860646"/>
-            <a:ext cx="436228" cy="369332"/>
+            <a:off x="1925273" y="3002734"/>
+            <a:ext cx="327171" cy="300082"/>
           </a:xfrm>
           <a:prstGeom prst="rect">
             <a:avLst/>
@@ -8086,7 +10333,7 @@
           </a:bodyPr>
           <a:lstStyle/>
           <a:p>
-            <a:endParaRPr lang="zh-CN" altLang="en-US" dirty="0">
+            <a:endParaRPr lang="zh-CN" altLang="en-US" sz="1350" dirty="0">
               <a:solidFill>
                 <a:schemeClr val="accent1">
                   <a:lumMod val="40000"/>
@@ -8111,8 +10358,8 @@
         </p:nvSpPr>
         <p:spPr>
           <a:xfrm>
-            <a:off x="1434517" y="2793534"/>
-            <a:ext cx="897746" cy="369332"/>
+            <a:off x="1075888" y="2952400"/>
+            <a:ext cx="673310" cy="300082"/>
           </a:xfrm>
           <a:prstGeom prst="rect">
             <a:avLst/>
@@ -8126,7 +10373,7 @@
           <a:lstStyle/>
           <a:p>
             <a:r>
-              <a:rPr lang="zh-CN" altLang="en-US" dirty="0">
+              <a:rPr lang="zh-CN" altLang="en-US" sz="1350" dirty="0">
                 <a:solidFill>
                   <a:schemeClr val="accent1">
                     <a:lumMod val="40000"/>
@@ -8137,7 +10384,7 @@
               <a:t>电脑</a:t>
             </a:r>
             <a:r>
-              <a:rPr lang="en-US" altLang="zh-CN" dirty="0">
+              <a:rPr lang="en-US" altLang="zh-CN" sz="1350" dirty="0">
                 <a:solidFill>
                   <a:schemeClr val="accent1">
                     <a:lumMod val="40000"/>
@@ -8147,7 +10394,7 @@
               </a:rPr>
               <a:t>1</a:t>
             </a:r>
-            <a:endParaRPr lang="zh-CN" altLang="en-US" dirty="0">
+            <a:endParaRPr lang="zh-CN" altLang="en-US" sz="1350" dirty="0">
               <a:solidFill>
                 <a:schemeClr val="accent1">
                   <a:lumMod val="40000"/>
@@ -8172,8 +10419,8 @@
         </p:nvSpPr>
         <p:spPr>
           <a:xfrm>
-            <a:off x="9949344" y="2933134"/>
-            <a:ext cx="897746" cy="369332"/>
+            <a:off x="7462008" y="3057100"/>
+            <a:ext cx="673310" cy="300082"/>
           </a:xfrm>
           <a:prstGeom prst="rect">
             <a:avLst/>
@@ -8187,7 +10434,7 @@
           <a:lstStyle/>
           <a:p>
             <a:r>
-              <a:rPr lang="zh-CN" altLang="en-US" dirty="0">
+              <a:rPr lang="zh-CN" altLang="en-US" sz="1350" dirty="0">
                 <a:solidFill>
                   <a:schemeClr val="accent1">
                     <a:lumMod val="40000"/>
@@ -8198,7 +10445,7 @@
               <a:t>电脑</a:t>
             </a:r>
             <a:r>
-              <a:rPr lang="en-US" altLang="zh-CN" dirty="0">
+              <a:rPr lang="en-US" altLang="zh-CN" sz="1350" dirty="0">
                 <a:solidFill>
                   <a:schemeClr val="accent1">
                     <a:lumMod val="40000"/>
@@ -8208,7 +10455,7 @@
               </a:rPr>
               <a:t>2</a:t>
             </a:r>
-            <a:endParaRPr lang="zh-CN" altLang="en-US" dirty="0">
+            <a:endParaRPr lang="zh-CN" altLang="en-US" sz="1350" dirty="0">
               <a:solidFill>
                 <a:schemeClr val="accent1">
                   <a:lumMod val="40000"/>
@@ -8233,8 +10480,8 @@
         </p:nvSpPr>
         <p:spPr>
           <a:xfrm>
-            <a:off x="4890781" y="5636625"/>
-            <a:ext cx="2169953" cy="369332"/>
+            <a:off x="3668086" y="5084719"/>
+            <a:ext cx="1627465" cy="300082"/>
           </a:xfrm>
           <a:prstGeom prst="rect">
             <a:avLst/>
@@ -8249,7 +10496,7 @@
           <a:p>
             <a:pPr algn="ctr"/>
             <a:r>
-              <a:rPr lang="zh-CN" altLang="en-US" dirty="0">
+              <a:rPr lang="zh-CN" altLang="en-US" sz="1350" dirty="0">
                 <a:solidFill>
                   <a:schemeClr val="accent1">
                     <a:lumMod val="40000"/>
@@ -8276,8 +10523,8 @@
         </p:nvSpPr>
         <p:spPr>
           <a:xfrm>
-            <a:off x="5274366" y="4049403"/>
-            <a:ext cx="1171662" cy="369332"/>
+            <a:off x="3955774" y="3894302"/>
+            <a:ext cx="878747" cy="300082"/>
           </a:xfrm>
           <a:prstGeom prst="rect">
             <a:avLst/>
@@ -8291,7 +10538,7 @@
           <a:lstStyle/>
           <a:p>
             <a:r>
-              <a:rPr lang="zh-CN" altLang="en-US" dirty="0">
+              <a:rPr lang="zh-CN" altLang="en-US" sz="1350" dirty="0">
                 <a:solidFill>
                   <a:schemeClr val="accent1">
                     <a:lumMod val="40000"/>
@@ -8302,7 +10549,7 @@
               <a:t>速度</a:t>
             </a:r>
             <a:r>
-              <a:rPr lang="en-US" altLang="zh-CN" dirty="0">
+              <a:rPr lang="en-US" altLang="zh-CN" sz="1350" dirty="0">
                 <a:solidFill>
                   <a:schemeClr val="accent1">
                     <a:lumMod val="40000"/>
@@ -8312,7 +10559,7 @@
               </a:rPr>
               <a:t>B</a:t>
             </a:r>
-            <a:endParaRPr lang="zh-CN" altLang="en-US" dirty="0">
+            <a:endParaRPr lang="zh-CN" altLang="en-US" sz="1350" dirty="0">
               <a:solidFill>
                 <a:schemeClr val="accent1">
                   <a:lumMod val="40000"/>
@@ -8337,8 +10584,8 @@
         </p:nvSpPr>
         <p:spPr>
           <a:xfrm>
-            <a:off x="5269683" y="1477145"/>
-            <a:ext cx="1171662" cy="369332"/>
+            <a:off x="3952262" y="1965109"/>
+            <a:ext cx="878747" cy="300082"/>
           </a:xfrm>
           <a:prstGeom prst="rect">
             <a:avLst/>
@@ -8352,7 +10599,7 @@
           <a:lstStyle/>
           <a:p>
             <a:r>
-              <a:rPr lang="zh-CN" altLang="en-US" dirty="0">
+              <a:rPr lang="zh-CN" altLang="en-US" sz="1350" dirty="0">
                 <a:solidFill>
                   <a:schemeClr val="accent1">
                     <a:lumMod val="40000"/>
@@ -8363,7 +10610,7 @@
               <a:t>速度</a:t>
             </a:r>
             <a:r>
-              <a:rPr lang="en-US" altLang="zh-CN" dirty="0">
+              <a:rPr lang="en-US" altLang="zh-CN" sz="1350" dirty="0">
                 <a:solidFill>
                   <a:schemeClr val="accent1">
                     <a:lumMod val="40000"/>
@@ -8373,7 +10620,7 @@
               </a:rPr>
               <a:t>A</a:t>
             </a:r>
-            <a:endParaRPr lang="zh-CN" altLang="en-US" dirty="0">
+            <a:endParaRPr lang="zh-CN" altLang="en-US" sz="1350" dirty="0">
               <a:solidFill>
                 <a:schemeClr val="accent1">
                   <a:lumMod val="40000"/>
@@ -8398,8 +10645,8 @@
         </p:nvSpPr>
         <p:spPr>
           <a:xfrm>
-            <a:off x="302065" y="5179661"/>
-            <a:ext cx="3162649" cy="923330"/>
+            <a:off x="226549" y="4741996"/>
+            <a:ext cx="2371987" cy="715581"/>
           </a:xfrm>
           <a:prstGeom prst="rect">
             <a:avLst/>
@@ -8413,7 +10660,7 @@
           <a:lstStyle/>
           <a:p>
             <a:r>
-              <a:rPr lang="en-US" altLang="zh-CN" dirty="0">
+              <a:rPr lang="en-US" altLang="zh-CN" sz="1350" dirty="0">
                 <a:solidFill>
                   <a:schemeClr val="accent1">
                     <a:lumMod val="40000"/>
@@ -8424,7 +10671,7 @@
               <a:t>1.</a:t>
             </a:r>
             <a:r>
-              <a:rPr lang="zh-CN" altLang="en-US" dirty="0">
+              <a:rPr lang="zh-CN" altLang="en-US" sz="1350" dirty="0">
                 <a:solidFill>
                   <a:schemeClr val="accent1">
                     <a:lumMod val="40000"/>
@@ -8435,7 +10682,7 @@
               <a:t>速度</a:t>
             </a:r>
             <a:r>
-              <a:rPr lang="en-US" altLang="zh-CN" dirty="0">
+              <a:rPr lang="en-US" altLang="zh-CN" sz="1350" dirty="0">
                 <a:solidFill>
                   <a:schemeClr val="accent1">
                     <a:lumMod val="40000"/>
@@ -8448,7 +10695,7 @@
           </a:p>
           <a:p>
             <a:r>
-              <a:rPr lang="en-US" altLang="zh-CN" dirty="0">
+              <a:rPr lang="en-US" altLang="zh-CN" sz="1350" dirty="0">
                 <a:solidFill>
                   <a:schemeClr val="accent1">
                     <a:lumMod val="40000"/>
@@ -8459,7 +10706,7 @@
               <a:t>2.</a:t>
             </a:r>
             <a:r>
-              <a:rPr lang="zh-CN" altLang="en-US" dirty="0">
+              <a:rPr lang="zh-CN" altLang="en-US" sz="1350" dirty="0">
                 <a:solidFill>
                   <a:schemeClr val="accent1">
                     <a:lumMod val="40000"/>
@@ -8470,7 +10717,7 @@
               <a:t>速度</a:t>
             </a:r>
             <a:r>
-              <a:rPr lang="en-US" altLang="zh-CN" dirty="0">
+              <a:rPr lang="en-US" altLang="zh-CN" sz="1350" dirty="0">
                 <a:solidFill>
                   <a:schemeClr val="accent1">
                     <a:lumMod val="40000"/>
@@ -8483,7 +10730,7 @@
           </a:p>
           <a:p>
             <a:r>
-              <a:rPr lang="en-US" altLang="zh-CN" dirty="0">
+              <a:rPr lang="en-US" altLang="zh-CN" sz="1350" dirty="0">
                 <a:solidFill>
                   <a:schemeClr val="accent1">
                     <a:lumMod val="40000"/>
@@ -8494,7 +10741,7 @@
               <a:t>3.</a:t>
             </a:r>
             <a:r>
-              <a:rPr lang="zh-CN" altLang="en-US" dirty="0">
+              <a:rPr lang="zh-CN" altLang="en-US" sz="1350" dirty="0">
                 <a:solidFill>
                   <a:schemeClr val="accent1">
                     <a:lumMod val="40000"/>
@@ -8505,7 +10752,7 @@
               <a:t>速度</a:t>
             </a:r>
             <a:r>
-              <a:rPr lang="en-US" altLang="zh-CN" dirty="0">
+              <a:rPr lang="en-US" altLang="zh-CN" sz="1350" dirty="0">
                 <a:solidFill>
                   <a:schemeClr val="accent1">
                     <a:lumMod val="40000"/>
@@ -8516,7 +10763,7 @@
               <a:t>C</a:t>
             </a:r>
             <a:r>
-              <a:rPr lang="zh-CN" altLang="en-US" dirty="0">
+              <a:rPr lang="zh-CN" altLang="en-US" sz="1350" dirty="0">
                 <a:solidFill>
                   <a:schemeClr val="accent1">
                     <a:lumMod val="40000"/>
@@ -8527,7 +10774,7 @@
               <a:t>在</a:t>
             </a:r>
             <a:r>
-              <a:rPr lang="en-US" altLang="zh-CN" dirty="0">
+              <a:rPr lang="en-US" altLang="zh-CN" sz="1350" dirty="0">
                 <a:solidFill>
                   <a:schemeClr val="accent1">
                     <a:lumMod val="40000"/>
@@ -8538,7 +10785,7 @@
               <a:t>A</a:t>
             </a:r>
             <a:r>
-              <a:rPr lang="zh-CN" altLang="en-US" dirty="0">
+              <a:rPr lang="zh-CN" altLang="en-US" sz="1350" dirty="0">
                 <a:solidFill>
                   <a:schemeClr val="accent1">
                     <a:lumMod val="40000"/>
@@ -8549,7 +10796,7 @@
               <a:t>，</a:t>
             </a:r>
             <a:r>
-              <a:rPr lang="en-US" altLang="zh-CN" dirty="0">
+              <a:rPr lang="en-US" altLang="zh-CN" sz="1350" dirty="0">
                 <a:solidFill>
                   <a:schemeClr val="accent1">
                     <a:lumMod val="40000"/>
@@ -8560,7 +10807,7 @@
               <a:t>B</a:t>
             </a:r>
             <a:r>
-              <a:rPr lang="zh-CN" altLang="en-US" dirty="0">
+              <a:rPr lang="zh-CN" altLang="en-US" sz="1350" dirty="0">
                 <a:solidFill>
                   <a:schemeClr val="accent1">
                     <a:lumMod val="40000"/>
@@ -8608,8 +10855,8 @@
         </p:blipFill>
         <p:spPr>
           <a:xfrm>
-            <a:off x="5477556" y="4606869"/>
-            <a:ext cx="996404" cy="996404"/>
+            <a:off x="4108167" y="4312402"/>
+            <a:ext cx="747303" cy="747303"/>
           </a:xfrm>
           <a:prstGeom prst="rect">
             <a:avLst/>
@@ -8648,10 +10895,10 @@
       </p:grpSpPr>
       <p:pic>
         <p:nvPicPr>
-          <p:cNvPr id="7" name="图片 6">
-            <a:extLst>
-              <a:ext uri="{FF2B5EF4-FFF2-40B4-BE49-F238E27FC236}">
-                <a16:creationId xmlns:a16="http://schemas.microsoft.com/office/drawing/2014/main" id="{EF7B3635-186D-43B6-80D1-675D8EE77566}"/>
+          <p:cNvPr id="2" name="图片 1">
+            <a:extLst>
+              <a:ext uri="{FF2B5EF4-FFF2-40B4-BE49-F238E27FC236}">
+                <a16:creationId xmlns:a16="http://schemas.microsoft.com/office/drawing/2014/main" id="{A6AED057-1F05-4289-AD90-2FA7D7AC31C4}"/>
               </a:ext>
             </a:extLst>
           </p:cNvPr>
@@ -8667,7 +10914,7 @@
         <p:spPr>
           <a:xfrm>
             <a:off x="0" y="0"/>
-            <a:ext cx="12192000" cy="6858000"/>
+            <a:ext cx="9144000" cy="6858000"/>
           </a:xfrm>
           <a:prstGeom prst="rect">
             <a:avLst/>
@@ -8688,8 +10935,8 @@
         </p:nvSpPr>
         <p:spPr>
           <a:xfrm>
-            <a:off x="2242656" y="1825625"/>
-            <a:ext cx="1442907" cy="3031601"/>
+            <a:off x="1681993" y="2226469"/>
+            <a:ext cx="1082180" cy="2273701"/>
           </a:xfrm>
           <a:prstGeom prst="rect">
             <a:avLst/>
@@ -8716,7 +10963,7 @@
           <a:lstStyle/>
           <a:p>
             <a:pPr algn="ctr"/>
-            <a:endParaRPr lang="zh-CN" altLang="en-US">
+            <a:endParaRPr lang="zh-CN" altLang="en-US" sz="1350">
               <a:solidFill>
                 <a:schemeClr val="accent1">
                   <a:lumMod val="40000"/>
@@ -8741,8 +10988,8 @@
         </p:nvSpPr>
         <p:spPr>
           <a:xfrm>
-            <a:off x="8265954" y="1825625"/>
-            <a:ext cx="1442907" cy="3031601"/>
+            <a:off x="6199466" y="2226469"/>
+            <a:ext cx="1082180" cy="2273701"/>
           </a:xfrm>
           <a:prstGeom prst="rect">
             <a:avLst/>
@@ -8769,7 +11016,7 @@
           <a:lstStyle/>
           <a:p>
             <a:pPr algn="ctr"/>
-            <a:endParaRPr lang="zh-CN" altLang="en-US">
+            <a:endParaRPr lang="zh-CN" altLang="en-US" sz="1350">
               <a:solidFill>
                 <a:schemeClr val="accent1">
                   <a:lumMod val="40000"/>
@@ -8794,8 +11041,8 @@
         </p:nvCxnSpPr>
         <p:spPr>
           <a:xfrm>
-            <a:off x="3204594" y="2365695"/>
-            <a:ext cx="5301843" cy="0"/>
+            <a:off x="2403446" y="2631521"/>
+            <a:ext cx="3976382" cy="0"/>
           </a:xfrm>
           <a:prstGeom prst="line">
             <a:avLst/>
@@ -8832,8 +11079,8 @@
         </p:nvCxnSpPr>
         <p:spPr>
           <a:xfrm>
-            <a:off x="3204593" y="4545647"/>
-            <a:ext cx="5301843" cy="0"/>
+            <a:off x="2403445" y="4266485"/>
+            <a:ext cx="3976382" cy="0"/>
           </a:xfrm>
           <a:prstGeom prst="line">
             <a:avLst/>
@@ -8877,8 +11124,8 @@
         </p:nvSpPr>
         <p:spPr>
           <a:xfrm>
-            <a:off x="3685563" y="1928895"/>
-            <a:ext cx="1435008" cy="369332"/>
+            <a:off x="2764173" y="2303921"/>
+            <a:ext cx="1122423" cy="300082"/>
           </a:xfrm>
           <a:prstGeom prst="rect">
             <a:avLst/>
@@ -8892,7 +11139,7 @@
           <a:lstStyle/>
           <a:p>
             <a:r>
-              <a:rPr lang="en-US" altLang="zh-CN" dirty="0">
+              <a:rPr lang="en-US" altLang="zh-CN" sz="1350" dirty="0">
                 <a:solidFill>
                   <a:schemeClr val="accent1">
                     <a:lumMod val="40000"/>
@@ -8902,7 +11149,7 @@
               </a:rPr>
               <a:t>192.168.1.11</a:t>
             </a:r>
-            <a:endParaRPr lang="zh-CN" altLang="en-US" dirty="0">
+            <a:endParaRPr lang="zh-CN" altLang="en-US" sz="1350" dirty="0">
               <a:solidFill>
                 <a:schemeClr val="accent1">
                   <a:lumMod val="40000"/>
@@ -8927,8 +11174,8 @@
         </p:nvSpPr>
         <p:spPr>
           <a:xfrm>
-            <a:off x="3685563" y="4108847"/>
-            <a:ext cx="1435008" cy="369332"/>
+            <a:off x="2764173" y="3938885"/>
+            <a:ext cx="1122423" cy="300082"/>
           </a:xfrm>
           <a:prstGeom prst="rect">
             <a:avLst/>
@@ -8942,7 +11189,7 @@
           <a:lstStyle/>
           <a:p>
             <a:r>
-              <a:rPr lang="en-US" altLang="zh-CN" dirty="0">
+              <a:rPr lang="en-US" altLang="zh-CN" sz="1350" dirty="0">
                 <a:solidFill>
                   <a:schemeClr val="accent1">
                     <a:lumMod val="40000"/>
@@ -8952,7 +11199,7 @@
               </a:rPr>
               <a:t>192.168.1.11</a:t>
             </a:r>
-            <a:endParaRPr lang="zh-CN" altLang="en-US" dirty="0">
+            <a:endParaRPr lang="zh-CN" altLang="en-US" sz="1350" dirty="0">
               <a:solidFill>
                 <a:schemeClr val="accent1">
                   <a:lumMod val="40000"/>
@@ -8977,8 +11224,8 @@
         </p:nvSpPr>
         <p:spPr>
           <a:xfrm>
-            <a:off x="6828762" y="1910994"/>
-            <a:ext cx="1435008" cy="369332"/>
+            <a:off x="5121572" y="2290495"/>
+            <a:ext cx="1122423" cy="300082"/>
           </a:xfrm>
           <a:prstGeom prst="rect">
             <a:avLst/>
@@ -8992,7 +11239,7 @@
           <a:lstStyle/>
           <a:p>
             <a:r>
-              <a:rPr lang="en-US" altLang="zh-CN" dirty="0">
+              <a:rPr lang="en-US" altLang="zh-CN" sz="1350" dirty="0">
                 <a:solidFill>
                   <a:schemeClr val="accent1">
                     <a:lumMod val="40000"/>
@@ -9002,7 +11249,7 @@
               </a:rPr>
               <a:t>192.168.1.12</a:t>
             </a:r>
-            <a:endParaRPr lang="zh-CN" altLang="en-US" dirty="0">
+            <a:endParaRPr lang="zh-CN" altLang="en-US" sz="1350" dirty="0">
               <a:solidFill>
                 <a:schemeClr val="accent1">
                   <a:lumMod val="40000"/>
@@ -9027,8 +11274,8 @@
         </p:nvSpPr>
         <p:spPr>
           <a:xfrm>
-            <a:off x="6836661" y="4115094"/>
-            <a:ext cx="1435008" cy="369332"/>
+            <a:off x="5127496" y="3943570"/>
+            <a:ext cx="1122423" cy="300082"/>
           </a:xfrm>
           <a:prstGeom prst="rect">
             <a:avLst/>
@@ -9042,7 +11289,7 @@
           <a:lstStyle/>
           <a:p>
             <a:r>
-              <a:rPr lang="en-US" altLang="zh-CN" dirty="0">
+              <a:rPr lang="en-US" altLang="zh-CN" sz="1350" dirty="0">
                 <a:solidFill>
                   <a:schemeClr val="accent1">
                     <a:lumMod val="40000"/>
@@ -9052,7 +11299,7 @@
               </a:rPr>
               <a:t>192.168.1.12</a:t>
             </a:r>
-            <a:endParaRPr lang="zh-CN" altLang="en-US" dirty="0">
+            <a:endParaRPr lang="zh-CN" altLang="en-US" sz="1350" dirty="0">
               <a:solidFill>
                 <a:schemeClr val="accent1">
                   <a:lumMod val="40000"/>
@@ -9077,8 +11324,8 @@
         </p:nvSpPr>
         <p:spPr>
           <a:xfrm>
-            <a:off x="2567031" y="2860646"/>
-            <a:ext cx="436228" cy="369332"/>
+            <a:off x="1925273" y="3002734"/>
+            <a:ext cx="327171" cy="300082"/>
           </a:xfrm>
           <a:prstGeom prst="rect">
             <a:avLst/>
@@ -9091,7 +11338,7 @@
           </a:bodyPr>
           <a:lstStyle/>
           <a:p>
-            <a:endParaRPr lang="zh-CN" altLang="en-US" dirty="0">
+            <a:endParaRPr lang="zh-CN" altLang="en-US" sz="1350" dirty="0">
               <a:solidFill>
                 <a:schemeClr val="accent1">
                   <a:lumMod val="40000"/>
@@ -9116,8 +11363,8 @@
         </p:nvSpPr>
         <p:spPr>
           <a:xfrm>
-            <a:off x="1434517" y="2793534"/>
-            <a:ext cx="897746" cy="369332"/>
+            <a:off x="1075888" y="2952400"/>
+            <a:ext cx="673310" cy="300082"/>
           </a:xfrm>
           <a:prstGeom prst="rect">
             <a:avLst/>
@@ -9131,7 +11378,7 @@
           <a:lstStyle/>
           <a:p>
             <a:r>
-              <a:rPr lang="zh-CN" altLang="en-US" dirty="0">
+              <a:rPr lang="zh-CN" altLang="en-US" sz="1350" dirty="0">
                 <a:solidFill>
                   <a:schemeClr val="accent1">
                     <a:lumMod val="40000"/>
@@ -9142,7 +11389,7 @@
               <a:t>电脑</a:t>
             </a:r>
             <a:r>
-              <a:rPr lang="en-US" altLang="zh-CN" dirty="0">
+              <a:rPr lang="en-US" altLang="zh-CN" sz="1350" dirty="0">
                 <a:solidFill>
                   <a:schemeClr val="accent1">
                     <a:lumMod val="40000"/>
@@ -9152,7 +11399,7 @@
               </a:rPr>
               <a:t>1</a:t>
             </a:r>
-            <a:endParaRPr lang="zh-CN" altLang="en-US" dirty="0">
+            <a:endParaRPr lang="zh-CN" altLang="en-US" sz="1350" dirty="0">
               <a:solidFill>
                 <a:schemeClr val="accent1">
                   <a:lumMod val="40000"/>
@@ -9177,8 +11424,8 @@
         </p:nvSpPr>
         <p:spPr>
           <a:xfrm>
-            <a:off x="9949344" y="2933134"/>
-            <a:ext cx="897746" cy="369332"/>
+            <a:off x="7462008" y="3057100"/>
+            <a:ext cx="673310" cy="300082"/>
           </a:xfrm>
           <a:prstGeom prst="rect">
             <a:avLst/>
@@ -9192,7 +11439,7 @@
           <a:lstStyle/>
           <a:p>
             <a:r>
-              <a:rPr lang="zh-CN" altLang="en-US" dirty="0">
+              <a:rPr lang="zh-CN" altLang="en-US" sz="1350" dirty="0">
                 <a:solidFill>
                   <a:schemeClr val="accent1">
                     <a:lumMod val="40000"/>
@@ -9203,7 +11450,7 @@
               <a:t>电脑</a:t>
             </a:r>
             <a:r>
-              <a:rPr lang="en-US" altLang="zh-CN" dirty="0">
+              <a:rPr lang="en-US" altLang="zh-CN" sz="1350" dirty="0">
                 <a:solidFill>
                   <a:schemeClr val="accent1">
                     <a:lumMod val="40000"/>
@@ -9213,7 +11460,7 @@
               </a:rPr>
               <a:t>2</a:t>
             </a:r>
-            <a:endParaRPr lang="zh-CN" altLang="en-US" dirty="0">
+            <a:endParaRPr lang="zh-CN" altLang="en-US" sz="1350" dirty="0">
               <a:solidFill>
                 <a:schemeClr val="accent1">
                   <a:lumMod val="40000"/>
@@ -9238,8 +11485,8 @@
         </p:nvSpPr>
         <p:spPr>
           <a:xfrm>
-            <a:off x="4890781" y="5733110"/>
-            <a:ext cx="2169953" cy="369332"/>
+            <a:off x="3668086" y="5157082"/>
+            <a:ext cx="1627465" cy="300082"/>
           </a:xfrm>
           <a:prstGeom prst="rect">
             <a:avLst/>
@@ -9254,7 +11501,7 @@
           <a:p>
             <a:pPr algn="ctr"/>
             <a:r>
-              <a:rPr lang="en-US" altLang="zh-CN" dirty="0">
+              <a:rPr lang="en-US" altLang="zh-CN" sz="1350" dirty="0">
                 <a:solidFill>
                   <a:schemeClr val="accent1">
                     <a:lumMod val="40000"/>
@@ -9265,7 +11512,7 @@
               <a:t>Ping</a:t>
             </a:r>
             <a:r>
-              <a:rPr lang="zh-CN" altLang="en-US" dirty="0">
+              <a:rPr lang="zh-CN" altLang="en-US" sz="1350" dirty="0">
                 <a:solidFill>
                   <a:schemeClr val="accent1">
                     <a:lumMod val="40000"/>
@@ -9292,8 +11539,8 @@
         </p:nvSpPr>
         <p:spPr>
           <a:xfrm>
-            <a:off x="5274366" y="4049403"/>
-            <a:ext cx="1171662" cy="369332"/>
+            <a:off x="3955774" y="3894302"/>
+            <a:ext cx="878747" cy="300082"/>
           </a:xfrm>
           <a:prstGeom prst="rect">
             <a:avLst/>
@@ -9307,7 +11554,7 @@
           <a:lstStyle/>
           <a:p>
             <a:r>
-              <a:rPr lang="en-US" altLang="zh-CN" dirty="0">
+              <a:rPr lang="en-US" altLang="zh-CN" sz="1350" dirty="0">
                 <a:solidFill>
                   <a:schemeClr val="accent1">
                     <a:lumMod val="40000"/>
@@ -9318,7 +11565,7 @@
               <a:t>Ping</a:t>
             </a:r>
             <a:r>
-              <a:rPr lang="zh-CN" altLang="en-US" dirty="0">
+              <a:rPr lang="zh-CN" altLang="en-US" sz="1350" dirty="0">
                 <a:solidFill>
                   <a:schemeClr val="accent1">
                     <a:lumMod val="40000"/>
@@ -9329,7 +11576,7 @@
               <a:t>值</a:t>
             </a:r>
             <a:r>
-              <a:rPr lang="en-US" altLang="zh-CN" dirty="0">
+              <a:rPr lang="en-US" altLang="zh-CN" sz="1350" dirty="0">
                 <a:solidFill>
                   <a:schemeClr val="accent1">
                     <a:lumMod val="40000"/>
@@ -9339,7 +11586,7 @@
               </a:rPr>
               <a:t>B</a:t>
             </a:r>
-            <a:endParaRPr lang="zh-CN" altLang="en-US" dirty="0">
+            <a:endParaRPr lang="zh-CN" altLang="en-US" sz="1350" dirty="0">
               <a:solidFill>
                 <a:schemeClr val="accent1">
                   <a:lumMod val="40000"/>
@@ -9364,8 +11611,8 @@
         </p:nvSpPr>
         <p:spPr>
           <a:xfrm>
-            <a:off x="5269683" y="1477145"/>
-            <a:ext cx="1171662" cy="369332"/>
+            <a:off x="3952262" y="1965109"/>
+            <a:ext cx="878747" cy="300082"/>
           </a:xfrm>
           <a:prstGeom prst="rect">
             <a:avLst/>
@@ -9379,7 +11626,7 @@
           <a:lstStyle/>
           <a:p>
             <a:r>
-              <a:rPr lang="en-US" altLang="zh-CN" dirty="0">
+              <a:rPr lang="en-US" altLang="zh-CN" sz="1350" dirty="0">
                 <a:solidFill>
                   <a:schemeClr val="accent1">
                     <a:lumMod val="40000"/>
@@ -9390,7 +11637,7 @@
               <a:t>Ping</a:t>
             </a:r>
             <a:r>
-              <a:rPr lang="zh-CN" altLang="en-US" dirty="0">
+              <a:rPr lang="zh-CN" altLang="en-US" sz="1350" dirty="0">
                 <a:solidFill>
                   <a:schemeClr val="accent1">
                     <a:lumMod val="40000"/>
@@ -9401,7 +11648,7 @@
               <a:t>值</a:t>
             </a:r>
             <a:r>
-              <a:rPr lang="en-US" altLang="zh-CN" dirty="0">
+              <a:rPr lang="en-US" altLang="zh-CN" sz="1350" dirty="0">
                 <a:solidFill>
                   <a:schemeClr val="accent1">
                     <a:lumMod val="40000"/>
@@ -9411,7 +11658,7 @@
               </a:rPr>
               <a:t>A</a:t>
             </a:r>
-            <a:endParaRPr lang="zh-CN" altLang="en-US" dirty="0">
+            <a:endParaRPr lang="zh-CN" altLang="en-US" sz="1350" dirty="0">
               <a:solidFill>
                 <a:schemeClr val="accent1">
                   <a:lumMod val="40000"/>
@@ -9436,8 +11683,8 @@
         </p:nvSpPr>
         <p:spPr>
           <a:xfrm>
-            <a:off x="302065" y="5179661"/>
-            <a:ext cx="3162649" cy="923330"/>
+            <a:off x="226549" y="4741996"/>
+            <a:ext cx="2371987" cy="715581"/>
           </a:xfrm>
           <a:prstGeom prst="rect">
             <a:avLst/>
@@ -9451,7 +11698,7 @@
           <a:lstStyle/>
           <a:p>
             <a:r>
-              <a:rPr lang="en-US" altLang="zh-CN" dirty="0">
+              <a:rPr lang="en-US" altLang="zh-CN" sz="1350" dirty="0">
                 <a:solidFill>
                   <a:schemeClr val="accent1">
                     <a:lumMod val="40000"/>
@@ -9462,7 +11709,7 @@
               <a:t>1. Ping</a:t>
             </a:r>
             <a:r>
-              <a:rPr lang="zh-CN" altLang="en-US" dirty="0">
+              <a:rPr lang="zh-CN" altLang="en-US" sz="1350" dirty="0">
                 <a:solidFill>
                   <a:schemeClr val="accent1">
                     <a:lumMod val="40000"/>
@@ -9473,7 +11720,7 @@
               <a:t>值</a:t>
             </a:r>
             <a:r>
-              <a:rPr lang="en-US" altLang="zh-CN" dirty="0">
+              <a:rPr lang="en-US" altLang="zh-CN" sz="1350" dirty="0">
                 <a:solidFill>
                   <a:schemeClr val="accent1">
                     <a:lumMod val="40000"/>
@@ -9486,7 +11733,7 @@
           </a:p>
           <a:p>
             <a:r>
-              <a:rPr lang="en-US" altLang="zh-CN" dirty="0">
+              <a:rPr lang="en-US" altLang="zh-CN" sz="1350" dirty="0">
                 <a:solidFill>
                   <a:schemeClr val="accent1">
                     <a:lumMod val="40000"/>
@@ -9497,7 +11744,7 @@
               <a:t>2. Ping</a:t>
             </a:r>
             <a:r>
-              <a:rPr lang="zh-CN" altLang="en-US" dirty="0">
+              <a:rPr lang="zh-CN" altLang="en-US" sz="1350" dirty="0">
                 <a:solidFill>
                   <a:schemeClr val="accent1">
                     <a:lumMod val="40000"/>
@@ -9508,7 +11755,7 @@
               <a:t>值</a:t>
             </a:r>
             <a:r>
-              <a:rPr lang="en-US" altLang="zh-CN" dirty="0">
+              <a:rPr lang="en-US" altLang="zh-CN" sz="1350" dirty="0">
                 <a:solidFill>
                   <a:schemeClr val="accent1">
                     <a:lumMod val="40000"/>
@@ -9521,7 +11768,7 @@
           </a:p>
           <a:p>
             <a:r>
-              <a:rPr lang="en-US" altLang="zh-CN" dirty="0">
+              <a:rPr lang="en-US" altLang="zh-CN" sz="1350" dirty="0">
                 <a:solidFill>
                   <a:schemeClr val="accent1">
                     <a:lumMod val="40000"/>
@@ -9532,7 +11779,7 @@
               <a:t>3. Ping</a:t>
             </a:r>
             <a:r>
-              <a:rPr lang="zh-CN" altLang="en-US" dirty="0">
+              <a:rPr lang="zh-CN" altLang="en-US" sz="1350" dirty="0">
                 <a:solidFill>
                   <a:schemeClr val="accent1">
                     <a:lumMod val="40000"/>
@@ -9543,7 +11790,7 @@
               <a:t>值</a:t>
             </a:r>
             <a:r>
-              <a:rPr lang="en-US" altLang="zh-CN" dirty="0">
+              <a:rPr lang="en-US" altLang="zh-CN" sz="1350" dirty="0">
                 <a:solidFill>
                   <a:schemeClr val="accent1">
                     <a:lumMod val="40000"/>
@@ -9554,7 +11801,7 @@
               <a:t>C</a:t>
             </a:r>
             <a:r>
-              <a:rPr lang="zh-CN" altLang="en-US" dirty="0">
+              <a:rPr lang="zh-CN" altLang="en-US" sz="1350" dirty="0">
                 <a:solidFill>
                   <a:schemeClr val="accent1">
                     <a:lumMod val="40000"/>
@@ -9565,7 +11812,7 @@
               <a:t>在</a:t>
             </a:r>
             <a:r>
-              <a:rPr lang="en-US" altLang="zh-CN" dirty="0">
+              <a:rPr lang="en-US" altLang="zh-CN" sz="1350" dirty="0">
                 <a:solidFill>
                   <a:schemeClr val="accent1">
                     <a:lumMod val="40000"/>
@@ -9576,7 +11823,7 @@
               <a:t>A</a:t>
             </a:r>
             <a:r>
-              <a:rPr lang="zh-CN" altLang="en-US" dirty="0">
+              <a:rPr lang="zh-CN" altLang="en-US" sz="1350" dirty="0">
                 <a:solidFill>
                   <a:schemeClr val="accent1">
                     <a:lumMod val="40000"/>
@@ -9587,7 +11834,7 @@
               <a:t>，</a:t>
             </a:r>
             <a:r>
-              <a:rPr lang="en-US" altLang="zh-CN" dirty="0">
+              <a:rPr lang="en-US" altLang="zh-CN" sz="1350" dirty="0">
                 <a:solidFill>
                   <a:schemeClr val="accent1">
                     <a:lumMod val="40000"/>
@@ -9598,7 +11845,7 @@
               <a:t>B</a:t>
             </a:r>
             <a:r>
-              <a:rPr lang="zh-CN" altLang="en-US" dirty="0">
+              <a:rPr lang="zh-CN" altLang="en-US" sz="1350" dirty="0">
                 <a:solidFill>
                   <a:schemeClr val="accent1">
                     <a:lumMod val="40000"/>
@@ -9646,8 +11893,8 @@
         </p:blipFill>
         <p:spPr>
           <a:xfrm>
-            <a:off x="5477556" y="4731391"/>
-            <a:ext cx="996404" cy="996404"/>
+            <a:off x="4108167" y="4405793"/>
+            <a:ext cx="747303" cy="747303"/>
           </a:xfrm>
           <a:prstGeom prst="rect">
             <a:avLst/>
@@ -9686,10 +11933,10 @@
       </p:grpSpPr>
       <p:pic>
         <p:nvPicPr>
-          <p:cNvPr id="3" name="图片 2">
-            <a:extLst>
-              <a:ext uri="{FF2B5EF4-FFF2-40B4-BE49-F238E27FC236}">
-                <a16:creationId xmlns:a16="http://schemas.microsoft.com/office/drawing/2014/main" id="{D0926427-9280-4F02-A404-51E16FF8E923}"/>
+          <p:cNvPr id="4" name="图片 3">
+            <a:extLst>
+              <a:ext uri="{FF2B5EF4-FFF2-40B4-BE49-F238E27FC236}">
+                <a16:creationId xmlns:a16="http://schemas.microsoft.com/office/drawing/2014/main" id="{74B42C75-3393-4C80-8215-FDEF98923E36}"/>
               </a:ext>
             </a:extLst>
           </p:cNvPr>
@@ -9705,7 +11952,7 @@
         <p:spPr>
           <a:xfrm>
             <a:off x="0" y="0"/>
-            <a:ext cx="12192000" cy="6858000"/>
+            <a:ext cx="9144000" cy="6858000"/>
           </a:xfrm>
           <a:prstGeom prst="rect">
             <a:avLst/>
@@ -9730,7 +11977,7 @@
           <a:lstStyle/>
           <a:p>
             <a:r>
-              <a:rPr lang="zh-CN" altLang="en-US" sz="1600" b="1" dirty="0">
+              <a:rPr lang="zh-CN" altLang="en-US" sz="1200" b="1" dirty="0">
                 <a:solidFill>
                   <a:schemeClr val="accent1">
                     <a:lumMod val="40000"/>
@@ -9768,8 +12015,8 @@
         </p:blipFill>
         <p:spPr>
           <a:xfrm>
-            <a:off x="5922518" y="1676665"/>
-            <a:ext cx="5513617" cy="3714326"/>
+            <a:off x="4441889" y="2114749"/>
+            <a:ext cx="4135213" cy="2785745"/>
           </a:xfrm>
           <a:prstGeom prst="rect">
             <a:avLst/>
@@ -9796,8 +12043,8 @@
         </p:blipFill>
         <p:spPr>
           <a:xfrm>
-            <a:off x="755865" y="1495237"/>
-            <a:ext cx="4793126" cy="4050466"/>
+            <a:off x="566899" y="1978678"/>
+            <a:ext cx="3594845" cy="3037850"/>
           </a:xfrm>
           <a:prstGeom prst="rect">
             <a:avLst/>
@@ -9831,10 +12078,10 @@
       </p:grpSpPr>
       <p:pic>
         <p:nvPicPr>
-          <p:cNvPr id="5" name="图片 4">
-            <a:extLst>
-              <a:ext uri="{FF2B5EF4-FFF2-40B4-BE49-F238E27FC236}">
-                <a16:creationId xmlns:a16="http://schemas.microsoft.com/office/drawing/2014/main" id="{4ABE699B-776B-4E38-ACEB-6334ECF6FE86}"/>
+          <p:cNvPr id="4" name="图片 3">
+            <a:extLst>
+              <a:ext uri="{FF2B5EF4-FFF2-40B4-BE49-F238E27FC236}">
+                <a16:creationId xmlns:a16="http://schemas.microsoft.com/office/drawing/2014/main" id="{7AEB5813-8FF2-4D49-A34F-89B0BCC84908}"/>
               </a:ext>
             </a:extLst>
           </p:cNvPr>
@@ -9850,7 +12097,7 @@
         <p:spPr>
           <a:xfrm>
             <a:off x="0" y="0"/>
-            <a:ext cx="12192000" cy="6858000"/>
+            <a:ext cx="9144000" cy="6858000"/>
           </a:xfrm>
           <a:prstGeom prst="rect">
             <a:avLst/>
@@ -9869,8 +12116,8 @@
         </p:nvSpPr>
         <p:spPr>
           <a:xfrm>
-            <a:off x="909221" y="400635"/>
-            <a:ext cx="10515600" cy="1325563"/>
+            <a:off x="681916" y="1157727"/>
+            <a:ext cx="7886700" cy="994172"/>
           </a:xfrm>
         </p:spPr>
         <p:txBody>
@@ -9880,7 +12127,7 @@
           <a:lstStyle/>
           <a:p>
             <a:r>
-              <a:rPr lang="zh-CN" altLang="en-US" sz="1600" b="1" dirty="0">
+              <a:rPr lang="zh-CN" altLang="en-US" sz="1200" b="1" dirty="0">
                 <a:solidFill>
                   <a:schemeClr val="accent1">
                     <a:lumMod val="40000"/>
@@ -9918,8 +12165,8 @@
         </p:blipFill>
         <p:spPr>
           <a:xfrm>
-            <a:off x="3863146" y="1816091"/>
-            <a:ext cx="4465707" cy="3048264"/>
+            <a:off x="2897360" y="2219318"/>
+            <a:ext cx="3349280" cy="2286198"/>
           </a:xfrm>
           <a:prstGeom prst="rect">
             <a:avLst/>
@@ -9940,8 +12187,8 @@
         </p:nvSpPr>
         <p:spPr>
           <a:xfrm>
-            <a:off x="5494789" y="5134061"/>
-            <a:ext cx="3657600" cy="369332"/>
+            <a:off x="4121092" y="4707796"/>
+            <a:ext cx="2743200" cy="300082"/>
           </a:xfrm>
           <a:prstGeom prst="rect">
             <a:avLst/>
@@ -9955,7 +12202,7 @@
           <a:lstStyle/>
           <a:p>
             <a:r>
-              <a:rPr lang="zh-CN" altLang="en-US" dirty="0">
+              <a:rPr lang="zh-CN" altLang="en-US" sz="1350" dirty="0">
                 <a:solidFill>
                   <a:schemeClr val="accent1">
                     <a:lumMod val="40000"/>
@@ -9995,10 +12242,10 @@
       </p:grpSpPr>
       <p:pic>
         <p:nvPicPr>
-          <p:cNvPr id="13" name="图片 12">
-            <a:extLst>
-              <a:ext uri="{FF2B5EF4-FFF2-40B4-BE49-F238E27FC236}">
-                <a16:creationId xmlns:a16="http://schemas.microsoft.com/office/drawing/2014/main" id="{D0E199CB-71BD-49B0-B31A-DCF785EEB054}"/>
+          <p:cNvPr id="4" name="图片 3">
+            <a:extLst>
+              <a:ext uri="{FF2B5EF4-FFF2-40B4-BE49-F238E27FC236}">
+                <a16:creationId xmlns:a16="http://schemas.microsoft.com/office/drawing/2014/main" id="{5C570419-AB5F-442D-A7CA-9A3B24B1B2CE}"/>
               </a:ext>
             </a:extLst>
           </p:cNvPr>
@@ -10014,7 +12261,7 @@
         <p:spPr>
           <a:xfrm>
             <a:off x="0" y="0"/>
-            <a:ext cx="12192000" cy="6858000"/>
+            <a:ext cx="9144000" cy="6858000"/>
           </a:xfrm>
           <a:prstGeom prst="rect">
             <a:avLst/>
@@ -10033,8 +12280,8 @@
         </p:nvSpPr>
         <p:spPr>
           <a:xfrm>
-            <a:off x="758300" y="500062"/>
-            <a:ext cx="10515600" cy="1325563"/>
+            <a:off x="568725" y="1232297"/>
+            <a:ext cx="7886700" cy="994172"/>
           </a:xfrm>
         </p:spPr>
         <p:txBody>
@@ -10044,7 +12291,7 @@
           <a:lstStyle/>
           <a:p>
             <a:r>
-              <a:rPr lang="zh-CN" altLang="en-US" sz="1600" b="1" dirty="0">
+              <a:rPr lang="zh-CN" altLang="en-US" sz="1200" b="1" dirty="0">
                 <a:solidFill>
                   <a:schemeClr val="accent1">
                     <a:lumMod val="40000"/>
@@ -10062,7 +12309,7 @@
               <a:t>两个电脑通过网线连接，一个</a:t>
             </a:r>
             <a:r>
-              <a:rPr lang="en-US" altLang="zh-CN" sz="1600" b="1" dirty="0">
+              <a:rPr lang="en-US" altLang="zh-CN" sz="1200" b="1" dirty="0">
                 <a:solidFill>
                   <a:schemeClr val="accent1">
                     <a:lumMod val="40000"/>
@@ -10080,7 +12327,7 @@
               <a:t>IP</a:t>
             </a:r>
             <a:r>
-              <a:rPr lang="zh-CN" altLang="en-US" sz="1600" b="1" dirty="0">
+              <a:rPr lang="zh-CN" altLang="en-US" sz="1200" b="1" dirty="0">
                 <a:solidFill>
                   <a:schemeClr val="accent1">
                     <a:lumMod val="40000"/>
@@ -10098,7 +12345,7 @@
               <a:t>地址设置为</a:t>
             </a:r>
             <a:r>
-              <a:rPr lang="en-US" altLang="zh-CN" sz="1600" b="1" dirty="0">
+              <a:rPr lang="en-US" altLang="zh-CN" sz="1200" b="1" dirty="0">
                 <a:solidFill>
                   <a:schemeClr val="accent1">
                     <a:lumMod val="40000"/>
@@ -10116,7 +12363,7 @@
               <a:t>192.168.1.11</a:t>
             </a:r>
             <a:r>
-              <a:rPr lang="zh-CN" altLang="en-US" sz="1600" b="1" dirty="0">
+              <a:rPr lang="zh-CN" altLang="en-US" sz="1200" b="1" dirty="0">
                 <a:solidFill>
                   <a:schemeClr val="accent1">
                     <a:lumMod val="40000"/>
@@ -10134,7 +12381,7 @@
               <a:t>，一个为</a:t>
             </a:r>
             <a:r>
-              <a:rPr lang="en-US" altLang="zh-CN" sz="1600" b="1" dirty="0">
+              <a:rPr lang="en-US" altLang="zh-CN" sz="1200" b="1" dirty="0">
                 <a:solidFill>
                   <a:schemeClr val="accent1">
                     <a:lumMod val="40000"/>
@@ -10152,7 +12399,7 @@
               <a:t>192.168.1.12</a:t>
             </a:r>
             <a:r>
-              <a:rPr lang="zh-CN" altLang="en-US" sz="1600" b="1" dirty="0">
+              <a:rPr lang="zh-CN" altLang="en-US" sz="1200" b="1" dirty="0">
                 <a:solidFill>
                   <a:schemeClr val="accent1">
                     <a:lumMod val="40000"/>
@@ -10170,7 +12417,7 @@
               <a:t>，子网掩码相同。用地址为</a:t>
             </a:r>
             <a:r>
-              <a:rPr lang="en-US" altLang="zh-CN" sz="1600" b="1" dirty="0">
+              <a:rPr lang="en-US" altLang="zh-CN" sz="1200" b="1" dirty="0">
                 <a:solidFill>
                   <a:schemeClr val="accent1">
                     <a:lumMod val="40000"/>
@@ -10188,7 +12435,7 @@
               <a:t>1.12</a:t>
             </a:r>
             <a:r>
-              <a:rPr lang="zh-CN" altLang="en-US" sz="1600" b="1" dirty="0">
+              <a:rPr lang="zh-CN" altLang="en-US" sz="1200" b="1" dirty="0">
                 <a:solidFill>
                   <a:schemeClr val="accent1">
                     <a:lumMod val="40000"/>
@@ -10206,7 +12453,7 @@
               <a:t>的电脑</a:t>
             </a:r>
             <a:r>
-              <a:rPr lang="en-US" altLang="zh-CN" sz="1600" b="1" dirty="0">
+              <a:rPr lang="en-US" altLang="zh-CN" sz="1200" b="1" dirty="0">
                 <a:solidFill>
                   <a:schemeClr val="accent1">
                     <a:lumMod val="40000"/>
@@ -10224,7 +12471,7 @@
               <a:t>ping 1.11</a:t>
             </a:r>
             <a:r>
-              <a:rPr lang="zh-CN" altLang="en-US" sz="1600" b="1" dirty="0">
+              <a:rPr lang="zh-CN" altLang="en-US" sz="1200" b="1" dirty="0">
                 <a:solidFill>
                   <a:schemeClr val="accent1">
                     <a:lumMod val="40000"/>
@@ -10240,71 +12487,6 @@
                 </a:effectLst>
               </a:rPr>
               <a:t>，结果如图所示：</a:t>
-            </a:r>
-          </a:p>
-        </p:txBody>
-      </p:sp>
-      <p:sp>
-        <p:nvSpPr>
-          <p:cNvPr id="3" name="文本框 2">
-            <a:extLst>
-              <a:ext uri="{FF2B5EF4-FFF2-40B4-BE49-F238E27FC236}">
-                <a16:creationId xmlns:a16="http://schemas.microsoft.com/office/drawing/2014/main" id="{AE884377-3248-490D-874A-2CC116DDEE4B}"/>
-              </a:ext>
-            </a:extLst>
-          </p:cNvPr>
-          <p:cNvSpPr txBox="1"/>
-          <p:nvPr/>
-        </p:nvSpPr>
-        <p:spPr>
-          <a:xfrm>
-            <a:off x="4514470" y="6268003"/>
-            <a:ext cx="3003259" cy="369332"/>
-          </a:xfrm>
-          <a:prstGeom prst="rect">
-            <a:avLst/>
-          </a:prstGeom>
-          <a:noFill/>
-        </p:spPr>
-        <p:txBody>
-          <a:bodyPr wrap="square" rtlCol="0">
-            <a:spAutoFit/>
-          </a:bodyPr>
-          <a:lstStyle/>
-          <a:p>
-            <a:pPr algn="ctr"/>
-            <a:r>
-              <a:rPr lang="zh-CN" altLang="en-US" dirty="0">
-                <a:solidFill>
-                  <a:schemeClr val="accent1">
-                    <a:lumMod val="40000"/>
-                    <a:lumOff val="60000"/>
-                  </a:schemeClr>
-                </a:solidFill>
-              </a:rPr>
-              <a:t>网线</a:t>
-            </a:r>
-            <a:r>
-              <a:rPr lang="en-US" altLang="zh-CN" dirty="0">
-                <a:solidFill>
-                  <a:schemeClr val="accent1">
-                    <a:lumMod val="40000"/>
-                    <a:lumOff val="60000"/>
-                  </a:schemeClr>
-                </a:solidFill>
-              </a:rPr>
-              <a:t>ping</a:t>
-            </a:r>
-            <a:r>
-              <a:rPr lang="zh-CN" altLang="en-US" dirty="0">
-                <a:solidFill>
-                  <a:schemeClr val="accent1">
-                    <a:lumMod val="40000"/>
-                    <a:lumOff val="60000"/>
-                  </a:schemeClr>
-                </a:solidFill>
-              </a:rPr>
-              <a:t>值</a:t>
             </a:r>
           </a:p>
         </p:txBody>
@@ -10339,11 +12521,76 @@
         </p:blipFill>
         <p:spPr>
           <a:xfrm>
-            <a:off x="3477117" y="1497215"/>
-            <a:ext cx="4943740" cy="4351338"/>
+            <a:off x="2607838" y="1980161"/>
+            <a:ext cx="3707805" cy="3263504"/>
           </a:xfrm>
         </p:spPr>
       </p:pic>
+      <p:sp>
+        <p:nvSpPr>
+          <p:cNvPr id="3" name="文本框 2">
+            <a:extLst>
+              <a:ext uri="{FF2B5EF4-FFF2-40B4-BE49-F238E27FC236}">
+                <a16:creationId xmlns:a16="http://schemas.microsoft.com/office/drawing/2014/main" id="{AE884377-3248-490D-874A-2CC116DDEE4B}"/>
+              </a:ext>
+            </a:extLst>
+          </p:cNvPr>
+          <p:cNvSpPr txBox="1"/>
+          <p:nvPr/>
+        </p:nvSpPr>
+        <p:spPr>
+          <a:xfrm>
+            <a:off x="3385853" y="5558252"/>
+            <a:ext cx="2252444" cy="300082"/>
+          </a:xfrm>
+          <a:prstGeom prst="rect">
+            <a:avLst/>
+          </a:prstGeom>
+          <a:noFill/>
+        </p:spPr>
+        <p:txBody>
+          <a:bodyPr wrap="square" rtlCol="0">
+            <a:spAutoFit/>
+          </a:bodyPr>
+          <a:lstStyle/>
+          <a:p>
+            <a:pPr algn="ctr"/>
+            <a:r>
+              <a:rPr lang="zh-CN" altLang="en-US" sz="1350" dirty="0">
+                <a:solidFill>
+                  <a:schemeClr val="accent1">
+                    <a:lumMod val="40000"/>
+                    <a:lumOff val="60000"/>
+                  </a:schemeClr>
+                </a:solidFill>
+              </a:rPr>
+              <a:t>网线</a:t>
+            </a:r>
+            <a:r>
+              <a:rPr lang="en-US" altLang="zh-CN" sz="1350" dirty="0">
+                <a:solidFill>
+                  <a:schemeClr val="accent1">
+                    <a:lumMod val="40000"/>
+                    <a:lumOff val="60000"/>
+                  </a:schemeClr>
+                </a:solidFill>
+              </a:rPr>
+              <a:t>ping</a:t>
+            </a:r>
+            <a:r>
+              <a:rPr lang="zh-CN" altLang="en-US" sz="1350" dirty="0">
+                <a:solidFill>
+                  <a:schemeClr val="accent1">
+                    <a:lumMod val="40000"/>
+                    <a:lumOff val="60000"/>
+                  </a:schemeClr>
+                </a:solidFill>
+              </a:rPr>
+              <a:t>值</a:t>
+            </a:r>
+          </a:p>
+        </p:txBody>
+      </p:sp>
     </p:spTree>
   </p:cSld>
   <p:clrMapOvr>
@@ -10371,10 +12618,10 @@
       </p:grpSpPr>
       <p:pic>
         <p:nvPicPr>
-          <p:cNvPr id="3" name="图片 2">
-            <a:extLst>
-              <a:ext uri="{FF2B5EF4-FFF2-40B4-BE49-F238E27FC236}">
-                <a16:creationId xmlns:a16="http://schemas.microsoft.com/office/drawing/2014/main" id="{4F35E4B2-0C9C-400B-AA28-494D0AE7437A}"/>
+          <p:cNvPr id="4" name="图片 3">
+            <a:extLst>
+              <a:ext uri="{FF2B5EF4-FFF2-40B4-BE49-F238E27FC236}">
+                <a16:creationId xmlns:a16="http://schemas.microsoft.com/office/drawing/2014/main" id="{E13464A3-A7D5-438F-BCB1-BBCBE6AE798E}"/>
               </a:ext>
             </a:extLst>
           </p:cNvPr>
@@ -10390,7 +12637,7 @@
         <p:spPr>
           <a:xfrm>
             <a:off x="0" y="0"/>
-            <a:ext cx="12192000" cy="6858000"/>
+            <a:ext cx="9144000" cy="6858000"/>
           </a:xfrm>
           <a:prstGeom prst="rect">
             <a:avLst/>
@@ -10409,8 +12656,8 @@
         </p:nvSpPr>
         <p:spPr>
           <a:xfrm>
-            <a:off x="765711" y="94751"/>
-            <a:ext cx="10515600" cy="1325563"/>
+            <a:off x="574283" y="928314"/>
+            <a:ext cx="7886700" cy="994172"/>
           </a:xfrm>
         </p:spPr>
         <p:txBody>
@@ -10420,7 +12667,7 @@
           <a:lstStyle/>
           <a:p>
             <a:r>
-              <a:rPr lang="zh-CN" altLang="en-US" sz="1600" b="1" dirty="0">
+              <a:rPr lang="zh-CN" altLang="en-US" sz="1200" b="1" dirty="0">
                 <a:solidFill>
                   <a:schemeClr val="accent1">
                     <a:lumMod val="40000"/>
@@ -10458,8 +12705,8 @@
         </p:blipFill>
         <p:spPr>
           <a:xfrm>
-            <a:off x="6742328" y="1001771"/>
-            <a:ext cx="3520745" cy="1493649"/>
+            <a:off x="5056746" y="1608579"/>
+            <a:ext cx="2640559" cy="1120237"/>
           </a:xfrm>
           <a:prstGeom prst="rect">
             <a:avLst/>
@@ -10486,8 +12733,8 @@
         </p:blipFill>
         <p:spPr>
           <a:xfrm>
-            <a:off x="702307" y="1038411"/>
-            <a:ext cx="5274310" cy="5068570"/>
+            <a:off x="526730" y="1636058"/>
+            <a:ext cx="3955733" cy="3801428"/>
           </a:xfrm>
           <a:prstGeom prst="rect">
             <a:avLst/>
@@ -10514,8 +12761,8 @@
         </p:blipFill>
         <p:spPr>
           <a:xfrm>
-            <a:off x="6742328" y="2491118"/>
-            <a:ext cx="3456480" cy="3615863"/>
+            <a:off x="5056746" y="2725589"/>
+            <a:ext cx="2592360" cy="2711897"/>
           </a:xfrm>
           <a:prstGeom prst="rect">
             <a:avLst/>
@@ -10549,10 +12796,10 @@
       </p:grpSpPr>
       <p:pic>
         <p:nvPicPr>
-          <p:cNvPr id="3" name="图片 2">
-            <a:extLst>
-              <a:ext uri="{FF2B5EF4-FFF2-40B4-BE49-F238E27FC236}">
-                <a16:creationId xmlns:a16="http://schemas.microsoft.com/office/drawing/2014/main" id="{31BF2E65-B3D3-4161-A002-27E31AD02B55}"/>
+          <p:cNvPr id="4" name="图片 3">
+            <a:extLst>
+              <a:ext uri="{FF2B5EF4-FFF2-40B4-BE49-F238E27FC236}">
+                <a16:creationId xmlns:a16="http://schemas.microsoft.com/office/drawing/2014/main" id="{A6FAB787-9E7B-447C-AA98-45014EAC53D6}"/>
               </a:ext>
             </a:extLst>
           </p:cNvPr>
@@ -10568,7 +12815,7 @@
         <p:spPr>
           <a:xfrm>
             <a:off x="0" y="0"/>
-            <a:ext cx="12192000" cy="6858000"/>
+            <a:ext cx="9144000" cy="6858000"/>
           </a:xfrm>
           <a:prstGeom prst="rect">
             <a:avLst/>
@@ -10593,7 +12840,7 @@
           <a:lstStyle/>
           <a:p>
             <a:r>
-              <a:rPr lang="zh-CN" altLang="en-US" sz="1600" b="1" dirty="0">
+              <a:rPr lang="zh-CN" altLang="en-US" sz="1200" b="1" dirty="0">
                 <a:solidFill>
                   <a:schemeClr val="accent1">
                     <a:lumMod val="40000"/>
@@ -10631,8 +12878,8 @@
         </p:blipFill>
         <p:spPr>
           <a:xfrm>
-            <a:off x="908375" y="2148884"/>
-            <a:ext cx="4160881" cy="2781541"/>
+            <a:off x="681282" y="2468913"/>
+            <a:ext cx="3120661" cy="2086156"/>
           </a:xfrm>
           <a:prstGeom prst="rect">
             <a:avLst/>
@@ -10653,8 +12900,8 @@
         </p:blipFill>
         <p:spPr>
           <a:xfrm>
-            <a:off x="6247882" y="2057400"/>
-            <a:ext cx="4099560" cy="2743200"/>
+            <a:off x="4685912" y="2400300"/>
+            <a:ext cx="3074670" cy="2057400"/>
           </a:xfrm>
           <a:prstGeom prst="rect">
             <a:avLst/>
@@ -10672,7 +12919,7 @@
 <file path=ppt/theme/theme1.xml><?xml version="1.0" encoding="utf-8"?>
 <a:theme xmlns:a="http://schemas.openxmlformats.org/drawingml/2006/main" name="Office 主题​​">
   <a:themeElements>
-    <a:clrScheme name="Office">
+    <a:clrScheme name="Office 主题​​">
       <a:dk1>
         <a:sysClr val="windowText" lastClr="000000"/>
       </a:dk1>
@@ -10710,9 +12957,9 @@
         <a:srgbClr val="954F72"/>
       </a:folHlink>
     </a:clrScheme>
-    <a:fontScheme name="Office">
+    <a:fontScheme name="Office 主题​​">
       <a:majorFont>
-        <a:latin typeface="等线 Light"/>
+        <a:latin typeface="Calibri Light" panose="020F0302020204030204"/>
         <a:ea typeface=""/>
         <a:cs typeface=""/>
         <a:font script="Jpan" typeface="游ゴシック Light"/>
@@ -10747,7 +12994,7 @@
         <a:font script="Geor" typeface="Sylfaen"/>
       </a:majorFont>
       <a:minorFont>
-        <a:latin typeface="等线"/>
+        <a:latin typeface="Calibri" panose="020F0502020204030204"/>
         <a:ea typeface=""/>
         <a:cs typeface=""/>
         <a:font script="Jpan" typeface="游ゴシック"/>
@@ -10782,7 +13029,7 @@
         <a:font script="Geor" typeface="Sylfaen"/>
       </a:minorFont>
     </a:fontScheme>
-    <a:fmtScheme name="Office">
+    <a:fmtScheme name="Office 主题​​">
       <a:fillStyleLst>
         <a:solidFill>
           <a:schemeClr val="phClr"/>
